--- a/sesion-06/Sesion_06_Laboratorio_Cualitativo.pptx
+++ b/sesion-06/Sesion_06_Laboratorio_Cualitativo.pptx
@@ -3285,11 +3285,11 @@
         <p:spPr>
           <a:xfrm>
             <a:off x="566928" y="1609344"/>
-            <a:ext cx="3503066" cy="2550160"/>
+            <a:ext cx="3503066" cy="2989072"/>
           </a:xfrm>
           <a:prstGeom prst="roundRect">
             <a:avLst>
-              <a:gd name="adj" fmla="val 2869"/>
+              <a:gd name="adj" fmla="val 2447"/>
             </a:avLst>
           </a:prstGeom>
           <a:solidFill>
@@ -3376,7 +3376,7 @@
         <p:spPr>
           <a:xfrm>
             <a:off x="804672" y="2395728"/>
-            <a:ext cx="3027578" cy="457200"/>
+            <a:ext cx="3027578" cy="583184"/>
           </a:xfrm>
           <a:prstGeom prst="rect">
             <a:avLst/>
@@ -3414,8 +3414,8 @@
         </p:nvSpPr>
         <p:spPr>
           <a:xfrm>
-            <a:off x="804672" y="2871216"/>
-            <a:ext cx="3027578" cy="1050544"/>
+            <a:off x="804672" y="3125216"/>
+            <a:ext cx="3027578" cy="1272032"/>
           </a:xfrm>
           <a:prstGeom prst="rect">
             <a:avLst/>
@@ -3457,11 +3457,11 @@
         <p:spPr>
           <a:xfrm>
             <a:off x="4344314" y="1609344"/>
-            <a:ext cx="3503066" cy="2550160"/>
+            <a:ext cx="3503066" cy="2989072"/>
           </a:xfrm>
           <a:prstGeom prst="roundRect">
             <a:avLst>
-              <a:gd name="adj" fmla="val 2869"/>
+              <a:gd name="adj" fmla="val 2447"/>
             </a:avLst>
           </a:prstGeom>
           <a:solidFill>
@@ -3548,7 +3548,7 @@
         <p:spPr>
           <a:xfrm>
             <a:off x="4582058" y="2395728"/>
-            <a:ext cx="3027578" cy="457200"/>
+            <a:ext cx="3027578" cy="583184"/>
           </a:xfrm>
           <a:prstGeom prst="rect">
             <a:avLst/>
@@ -3586,8 +3586,8 @@
         </p:nvSpPr>
         <p:spPr>
           <a:xfrm>
-            <a:off x="4582058" y="2871216"/>
-            <a:ext cx="3027578" cy="1050544"/>
+            <a:off x="4582058" y="3125216"/>
+            <a:ext cx="3027578" cy="1272032"/>
           </a:xfrm>
           <a:prstGeom prst="rect">
             <a:avLst/>
@@ -3629,11 +3629,11 @@
         <p:spPr>
           <a:xfrm>
             <a:off x="8121701" y="1609344"/>
-            <a:ext cx="3503066" cy="2550160"/>
+            <a:ext cx="3503066" cy="2989072"/>
           </a:xfrm>
           <a:prstGeom prst="roundRect">
             <a:avLst>
-              <a:gd name="adj" fmla="val 2869"/>
+              <a:gd name="adj" fmla="val 2447"/>
             </a:avLst>
           </a:prstGeom>
           <a:solidFill>
@@ -3720,7 +3720,7 @@
         <p:spPr>
           <a:xfrm>
             <a:off x="8359445" y="2395728"/>
-            <a:ext cx="3027578" cy="457200"/>
+            <a:ext cx="3027578" cy="583184"/>
           </a:xfrm>
           <a:prstGeom prst="rect">
             <a:avLst/>
@@ -3758,8 +3758,8 @@
         </p:nvSpPr>
         <p:spPr>
           <a:xfrm>
-            <a:off x="8359445" y="2871216"/>
-            <a:ext cx="3027578" cy="1050544"/>
+            <a:off x="8359445" y="3125216"/>
+            <a:ext cx="3027578" cy="1272032"/>
           </a:xfrm>
           <a:prstGeom prst="rect">
             <a:avLst/>
@@ -6623,11 +6623,11 @@
         <p:spPr>
           <a:xfrm>
             <a:off x="566928" y="1609344"/>
-            <a:ext cx="3503066" cy="1747520"/>
+            <a:ext cx="3503066" cy="2176272"/>
           </a:xfrm>
           <a:prstGeom prst="roundRect">
             <a:avLst>
-              <a:gd name="adj" fmla="val 4186"/>
+              <a:gd name="adj" fmla="val 3361"/>
             </a:avLst>
           </a:prstGeom>
           <a:solidFill>
@@ -6650,7 +6650,7 @@
         <p:spPr>
           <a:xfrm>
             <a:off x="804672" y="1847088"/>
-            <a:ext cx="3027578" cy="457200"/>
+            <a:ext cx="3027578" cy="319024"/>
           </a:xfrm>
           <a:prstGeom prst="rect">
             <a:avLst/>
@@ -6688,8 +6688,8 @@
         </p:nvSpPr>
         <p:spPr>
           <a:xfrm>
-            <a:off x="804672" y="2322576"/>
-            <a:ext cx="3027578" cy="796544"/>
+            <a:off x="804672" y="2312416"/>
+            <a:ext cx="3027578" cy="1272032"/>
           </a:xfrm>
           <a:prstGeom prst="rect">
             <a:avLst/>
@@ -6731,11 +6731,11 @@
         <p:spPr>
           <a:xfrm>
             <a:off x="4344314" y="1609344"/>
-            <a:ext cx="3503066" cy="1747520"/>
+            <a:ext cx="3503066" cy="2176272"/>
           </a:xfrm>
           <a:prstGeom prst="roundRect">
             <a:avLst>
-              <a:gd name="adj" fmla="val 4186"/>
+              <a:gd name="adj" fmla="val 3361"/>
             </a:avLst>
           </a:prstGeom>
           <a:solidFill>
@@ -6758,7 +6758,7 @@
         <p:spPr>
           <a:xfrm>
             <a:off x="4582058" y="1847088"/>
-            <a:ext cx="3027578" cy="457200"/>
+            <a:ext cx="3027578" cy="319024"/>
           </a:xfrm>
           <a:prstGeom prst="rect">
             <a:avLst/>
@@ -6796,8 +6796,8 @@
         </p:nvSpPr>
         <p:spPr>
           <a:xfrm>
-            <a:off x="4582058" y="2322576"/>
-            <a:ext cx="3027578" cy="796544"/>
+            <a:off x="4582058" y="2312416"/>
+            <a:ext cx="3027578" cy="1272032"/>
           </a:xfrm>
           <a:prstGeom prst="rect">
             <a:avLst/>
@@ -6839,11 +6839,11 @@
         <p:spPr>
           <a:xfrm>
             <a:off x="8121701" y="1609344"/>
-            <a:ext cx="3503066" cy="1747520"/>
+            <a:ext cx="3503066" cy="2176272"/>
           </a:xfrm>
           <a:prstGeom prst="roundRect">
             <a:avLst>
-              <a:gd name="adj" fmla="val 4186"/>
+              <a:gd name="adj" fmla="val 3361"/>
             </a:avLst>
           </a:prstGeom>
           <a:solidFill>
@@ -6866,7 +6866,7 @@
         <p:spPr>
           <a:xfrm>
             <a:off x="8359445" y="1847088"/>
-            <a:ext cx="3027578" cy="457200"/>
+            <a:ext cx="3027578" cy="319024"/>
           </a:xfrm>
           <a:prstGeom prst="rect">
             <a:avLst/>
@@ -6904,8 +6904,8 @@
         </p:nvSpPr>
         <p:spPr>
           <a:xfrm>
-            <a:off x="8359445" y="2322576"/>
-            <a:ext cx="3027578" cy="796544"/>
+            <a:off x="8359445" y="2312416"/>
+            <a:ext cx="3027578" cy="1272032"/>
           </a:xfrm>
           <a:prstGeom prst="rect">
             <a:avLst/>
@@ -7328,12 +7328,12 @@
         </p:nvSpPr>
         <p:spPr>
           <a:xfrm>
-            <a:off x="566928" y="2010664"/>
-            <a:ext cx="3503066" cy="1843532"/>
+            <a:off x="566928" y="1810512"/>
+            <a:ext cx="3503066" cy="2043684"/>
           </a:xfrm>
           <a:prstGeom prst="roundRect">
             <a:avLst>
-              <a:gd name="adj" fmla="val 3968"/>
+              <a:gd name="adj" fmla="val 3579"/>
             </a:avLst>
           </a:prstGeom>
           <a:solidFill>
@@ -7355,7 +7355,7 @@
         </p:nvSpPr>
         <p:spPr>
           <a:xfrm>
-            <a:off x="804672" y="2230120"/>
+            <a:off x="804672" y="2029968"/>
             <a:ext cx="420624" cy="420624"/>
           </a:xfrm>
           <a:prstGeom prst="ellipse">
@@ -7380,7 +7380,7 @@
         </p:nvSpPr>
         <p:spPr>
           <a:xfrm>
-            <a:off x="804672" y="2230120"/>
+            <a:off x="804672" y="2029968"/>
             <a:ext cx="420624" cy="420624"/>
           </a:xfrm>
           <a:prstGeom prst="rect">
@@ -7419,8 +7419,8 @@
         </p:nvSpPr>
         <p:spPr>
           <a:xfrm>
-            <a:off x="804672" y="2797048"/>
-            <a:ext cx="3027578" cy="457200"/>
+            <a:off x="804672" y="2596896"/>
+            <a:ext cx="3027578" cy="247701"/>
           </a:xfrm>
           <a:prstGeom prst="rect">
             <a:avLst/>
@@ -7436,7 +7436,7 @@
               <a:buNone/>
             </a:pPr>
             <a:r>
-              <a:rPr lang="en-US" sz="1600" b="1" dirty="0">
+              <a:rPr lang="en-US" sz="1168" b="1" dirty="0">
                 <a:solidFill>
                   <a:srgbClr val="16262E"/>
                 </a:solidFill>
@@ -7446,7 +7446,7 @@
               </a:rPr>
               <a:t>Entidad A</a:t>
             </a:r>
-            <a:endParaRPr lang="en-US" sz="1600" dirty="0"/>
+            <a:endParaRPr lang="en-US" sz="1168" dirty="0"/>
           </a:p>
         </p:txBody>
       </p:sp>
@@ -7458,8 +7458,8 @@
         </p:nvSpPr>
         <p:spPr>
           <a:xfrm>
-            <a:off x="804672" y="3272536"/>
-            <a:ext cx="3027578" cy="343916"/>
+            <a:off x="804672" y="2990901"/>
+            <a:ext cx="3027578" cy="662127"/>
           </a:xfrm>
           <a:prstGeom prst="rect">
             <a:avLst/>
@@ -7478,7 +7478,7 @@
               <a:buNone/>
             </a:pPr>
             <a:r>
-              <a:rPr lang="en-US" sz="1250" dirty="0">
+              <a:rPr lang="en-US" sz="912" dirty="0">
                 <a:solidFill>
                   <a:srgbClr val="16262E"/>
                 </a:solidFill>
@@ -7488,7 +7488,7 @@
               </a:rPr>
               <a:t>¿Los centros comunitarios operan conforme a los estándares de las reglas de operación?</a:t>
             </a:r>
-            <a:endParaRPr lang="en-US" sz="1250" dirty="0"/>
+            <a:endParaRPr lang="en-US" sz="912" dirty="0"/>
           </a:p>
         </p:txBody>
       </p:sp>
@@ -7500,12 +7500,12 @@
         </p:nvSpPr>
         <p:spPr>
           <a:xfrm>
-            <a:off x="4344314" y="2010664"/>
-            <a:ext cx="3503066" cy="1843532"/>
+            <a:off x="4344314" y="1810512"/>
+            <a:ext cx="3503066" cy="2043684"/>
           </a:xfrm>
           <a:prstGeom prst="roundRect">
             <a:avLst>
-              <a:gd name="adj" fmla="val 3968"/>
+              <a:gd name="adj" fmla="val 3579"/>
             </a:avLst>
           </a:prstGeom>
           <a:solidFill>
@@ -7527,7 +7527,7 @@
         </p:nvSpPr>
         <p:spPr>
           <a:xfrm>
-            <a:off x="4582058" y="2230120"/>
+            <a:off x="4582058" y="2029968"/>
             <a:ext cx="420624" cy="420624"/>
           </a:xfrm>
           <a:prstGeom prst="ellipse">
@@ -7552,7 +7552,7 @@
         </p:nvSpPr>
         <p:spPr>
           <a:xfrm>
-            <a:off x="4582058" y="2230120"/>
+            <a:off x="4582058" y="2029968"/>
             <a:ext cx="420624" cy="420624"/>
           </a:xfrm>
           <a:prstGeom prst="rect">
@@ -7591,8 +7591,8 @@
         </p:nvSpPr>
         <p:spPr>
           <a:xfrm>
-            <a:off x="4582058" y="2797048"/>
-            <a:ext cx="3027578" cy="457200"/>
+            <a:off x="4582058" y="2596896"/>
+            <a:ext cx="3027578" cy="247701"/>
           </a:xfrm>
           <a:prstGeom prst="rect">
             <a:avLst/>
@@ -7608,7 +7608,7 @@
               <a:buNone/>
             </a:pPr>
             <a:r>
-              <a:rPr lang="en-US" sz="1600" b="1" dirty="0">
+              <a:rPr lang="en-US" sz="1168" b="1" dirty="0">
                 <a:solidFill>
                   <a:srgbClr val="16262E"/>
                 </a:solidFill>
@@ -7618,7 +7618,7 @@
               </a:rPr>
               <a:t>Entidad B</a:t>
             </a:r>
-            <a:endParaRPr lang="en-US" sz="1600" dirty="0"/>
+            <a:endParaRPr lang="en-US" sz="1168" dirty="0"/>
           </a:p>
         </p:txBody>
       </p:sp>
@@ -7630,8 +7630,8 @@
         </p:nvSpPr>
         <p:spPr>
           <a:xfrm>
-            <a:off x="4582058" y="3272536"/>
-            <a:ext cx="3027578" cy="343916"/>
+            <a:off x="4582058" y="2990901"/>
+            <a:ext cx="3027578" cy="662127"/>
           </a:xfrm>
           <a:prstGeom prst="rect">
             <a:avLst/>
@@ -7650,7 +7650,7 @@
               <a:buNone/>
             </a:pPr>
             <a:r>
-              <a:rPr lang="en-US" sz="1250" dirty="0">
+              <a:rPr lang="en-US" sz="912" dirty="0">
                 <a:solidFill>
                   <a:srgbClr val="16262E"/>
                 </a:solidFill>
@@ -7660,7 +7660,7 @@
               </a:rPr>
               <a:t>¿A qué se debe el incremento de cobertura y qué tan sólido es ese resultado?</a:t>
             </a:r>
-            <a:endParaRPr lang="en-US" sz="1250" dirty="0"/>
+            <a:endParaRPr lang="en-US" sz="912" dirty="0"/>
           </a:p>
         </p:txBody>
       </p:sp>
@@ -7672,12 +7672,12 @@
         </p:nvSpPr>
         <p:spPr>
           <a:xfrm>
-            <a:off x="8121701" y="2010664"/>
-            <a:ext cx="3503066" cy="1843532"/>
+            <a:off x="8121701" y="1810512"/>
+            <a:ext cx="3503066" cy="2043684"/>
           </a:xfrm>
           <a:prstGeom prst="roundRect">
             <a:avLst>
-              <a:gd name="adj" fmla="val 3968"/>
+              <a:gd name="adj" fmla="val 3579"/>
             </a:avLst>
           </a:prstGeom>
           <a:solidFill>
@@ -7699,7 +7699,7 @@
         </p:nvSpPr>
         <p:spPr>
           <a:xfrm>
-            <a:off x="8359445" y="2230120"/>
+            <a:off x="8359445" y="2029968"/>
             <a:ext cx="420624" cy="420624"/>
           </a:xfrm>
           <a:prstGeom prst="ellipse">
@@ -7724,7 +7724,7 @@
         </p:nvSpPr>
         <p:spPr>
           <a:xfrm>
-            <a:off x="8359445" y="2230120"/>
+            <a:off x="8359445" y="2029968"/>
             <a:ext cx="420624" cy="420624"/>
           </a:xfrm>
           <a:prstGeom prst="rect">
@@ -7763,8 +7763,8 @@
         </p:nvSpPr>
         <p:spPr>
           <a:xfrm>
-            <a:off x="8359445" y="2797048"/>
-            <a:ext cx="3027578" cy="457200"/>
+            <a:off x="8359445" y="2596896"/>
+            <a:ext cx="3027578" cy="247701"/>
           </a:xfrm>
           <a:prstGeom prst="rect">
             <a:avLst/>
@@ -7780,7 +7780,7 @@
               <a:buNone/>
             </a:pPr>
             <a:r>
-              <a:rPr lang="en-US" sz="1600" b="1" dirty="0">
+              <a:rPr lang="en-US" sz="1168" b="1" dirty="0">
                 <a:solidFill>
                   <a:srgbClr val="16262E"/>
                 </a:solidFill>
@@ -7790,7 +7790,7 @@
               </a:rPr>
               <a:t>Entidad C</a:t>
             </a:r>
-            <a:endParaRPr lang="en-US" sz="1600" dirty="0"/>
+            <a:endParaRPr lang="en-US" sz="1168" dirty="0"/>
           </a:p>
         </p:txBody>
       </p:sp>
@@ -7802,8 +7802,8 @@
         </p:nvSpPr>
         <p:spPr>
           <a:xfrm>
-            <a:off x="8359445" y="3272536"/>
-            <a:ext cx="3027578" cy="343916"/>
+            <a:off x="8359445" y="2990901"/>
+            <a:ext cx="3027578" cy="662127"/>
           </a:xfrm>
           <a:prstGeom prst="rect">
             <a:avLst/>
@@ -7822,7 +7822,7 @@
               <a:buNone/>
             </a:pPr>
             <a:r>
-              <a:rPr lang="en-US" sz="1250" dirty="0">
+              <a:rPr lang="en-US" sz="912" dirty="0">
                 <a:solidFill>
                   <a:srgbClr val="16262E"/>
                 </a:solidFill>
@@ -7832,7 +7832,7 @@
               </a:rPr>
               <a:t>¿Los mecanismos de dispersión funcionaron conforme a lo previsto?</a:t>
             </a:r>
-            <a:endParaRPr lang="en-US" sz="1250" dirty="0"/>
+            <a:endParaRPr lang="en-US" sz="912" dirty="0"/>
           </a:p>
         </p:txBody>
       </p:sp>
@@ -7845,11 +7845,11 @@
         <p:spPr>
           <a:xfrm>
             <a:off x="566928" y="4128516"/>
-            <a:ext cx="3503066" cy="1843532"/>
+            <a:ext cx="3503066" cy="2043684"/>
           </a:xfrm>
           <a:prstGeom prst="roundRect">
             <a:avLst>
-              <a:gd name="adj" fmla="val 3968"/>
+              <a:gd name="adj" fmla="val 3579"/>
             </a:avLst>
           </a:prstGeom>
           <a:solidFill>
@@ -7936,7 +7936,7 @@
         <p:spPr>
           <a:xfrm>
             <a:off x="804672" y="4914900"/>
-            <a:ext cx="3027578" cy="457200"/>
+            <a:ext cx="3027578" cy="247701"/>
           </a:xfrm>
           <a:prstGeom prst="rect">
             <a:avLst/>
@@ -7952,7 +7952,7 @@
               <a:buNone/>
             </a:pPr>
             <a:r>
-              <a:rPr lang="en-US" sz="1600" b="1" dirty="0">
+              <a:rPr lang="en-US" sz="1168" b="1" dirty="0">
                 <a:solidFill>
                   <a:srgbClr val="16262E"/>
                 </a:solidFill>
@@ -7962,7 +7962,7 @@
               </a:rPr>
               <a:t>Entidad D</a:t>
             </a:r>
-            <a:endParaRPr lang="en-US" sz="1600" dirty="0"/>
+            <a:endParaRPr lang="en-US" sz="1168" dirty="0"/>
           </a:p>
         </p:txBody>
       </p:sp>
@@ -7974,8 +7974,8 @@
         </p:nvSpPr>
         <p:spPr>
           <a:xfrm>
-            <a:off x="804672" y="5390388"/>
-            <a:ext cx="3027578" cy="343916"/>
+            <a:off x="804672" y="5308905"/>
+            <a:ext cx="3027578" cy="662127"/>
           </a:xfrm>
           <a:prstGeom prst="rect">
             <a:avLst/>
@@ -7994,7 +7994,7 @@
               <a:buNone/>
             </a:pPr>
             <a:r>
-              <a:rPr lang="en-US" sz="1250" dirty="0">
+              <a:rPr lang="en-US" sz="912" dirty="0">
                 <a:solidFill>
                   <a:srgbClr val="16262E"/>
                 </a:solidFill>
@@ -8004,7 +8004,7 @@
               </a:rPr>
               <a:t>¿Por qué disminuyó la cobertura y qué implica la respuesta para el diseño de la norma?</a:t>
             </a:r>
-            <a:endParaRPr lang="en-US" sz="1250" dirty="0"/>
+            <a:endParaRPr lang="en-US" sz="912" dirty="0"/>
           </a:p>
         </p:txBody>
       </p:sp>
@@ -8017,11 +8017,11 @@
         <p:spPr>
           <a:xfrm>
             <a:off x="4344314" y="4128516"/>
-            <a:ext cx="3503066" cy="1843532"/>
+            <a:ext cx="3503066" cy="2043684"/>
           </a:xfrm>
           <a:prstGeom prst="roundRect">
             <a:avLst>
-              <a:gd name="adj" fmla="val 3968"/>
+              <a:gd name="adj" fmla="val 3579"/>
             </a:avLst>
           </a:prstGeom>
           <a:solidFill>
@@ -8108,7 +8108,7 @@
         <p:spPr>
           <a:xfrm>
             <a:off x="4582058" y="4914900"/>
-            <a:ext cx="3027578" cy="457200"/>
+            <a:ext cx="3027578" cy="247701"/>
           </a:xfrm>
           <a:prstGeom prst="rect">
             <a:avLst/>
@@ -8124,7 +8124,7 @@
               <a:buNone/>
             </a:pPr>
             <a:r>
-              <a:rPr lang="en-US" sz="1600" b="1" dirty="0">
+              <a:rPr lang="en-US" sz="1168" b="1" dirty="0">
                 <a:solidFill>
                   <a:srgbClr val="16262E"/>
                 </a:solidFill>
@@ -8134,7 +8134,7 @@
               </a:rPr>
               <a:t>Entidad E</a:t>
             </a:r>
-            <a:endParaRPr lang="en-US" sz="1600" dirty="0"/>
+            <a:endParaRPr lang="en-US" sz="1168" dirty="0"/>
           </a:p>
         </p:txBody>
       </p:sp>
@@ -8146,8 +8146,8 @@
         </p:nvSpPr>
         <p:spPr>
           <a:xfrm>
-            <a:off x="4582058" y="5390388"/>
-            <a:ext cx="3027578" cy="343916"/>
+            <a:off x="4582058" y="5308905"/>
+            <a:ext cx="3027578" cy="662127"/>
           </a:xfrm>
           <a:prstGeom prst="rect">
             <a:avLst/>
@@ -8166,7 +8166,7 @@
               <a:buNone/>
             </a:pPr>
             <a:r>
-              <a:rPr lang="en-US" sz="1250" dirty="0">
+              <a:rPr lang="en-US" sz="912" dirty="0">
                 <a:solidFill>
                   <a:srgbClr val="16262E"/>
                 </a:solidFill>
@@ -8176,7 +8176,7 @@
               </a:rPr>
               <a:t>¿Los criterios de elegibilidad se aplican de manera homogénea en la entidad?</a:t>
             </a:r>
-            <a:endParaRPr lang="en-US" sz="1250" dirty="0"/>
+            <a:endParaRPr lang="en-US" sz="912" dirty="0"/>
           </a:p>
         </p:txBody>
       </p:sp>
@@ -8189,11 +8189,11 @@
         <p:spPr>
           <a:xfrm>
             <a:off x="8121701" y="4128516"/>
-            <a:ext cx="3503066" cy="1843532"/>
+            <a:ext cx="3503066" cy="2043684"/>
           </a:xfrm>
           <a:prstGeom prst="roundRect">
             <a:avLst>
-              <a:gd name="adj" fmla="val 3968"/>
+              <a:gd name="adj" fmla="val 3579"/>
             </a:avLst>
           </a:prstGeom>
           <a:solidFill>
@@ -8280,7 +8280,7 @@
         <p:spPr>
           <a:xfrm>
             <a:off x="8359445" y="4914900"/>
-            <a:ext cx="3027578" cy="457200"/>
+            <a:ext cx="3027578" cy="247701"/>
           </a:xfrm>
           <a:prstGeom prst="rect">
             <a:avLst/>
@@ -8296,7 +8296,7 @@
               <a:buNone/>
             </a:pPr>
             <a:r>
-              <a:rPr lang="en-US" sz="1600" b="1" dirty="0">
+              <a:rPr lang="en-US" sz="1168" b="1" dirty="0">
                 <a:solidFill>
                   <a:srgbClr val="16262E"/>
                 </a:solidFill>
@@ -8306,7 +8306,7 @@
               </a:rPr>
               <a:t>Entidad F</a:t>
             </a:r>
-            <a:endParaRPr lang="en-US" sz="1600" dirty="0"/>
+            <a:endParaRPr lang="en-US" sz="1168" dirty="0"/>
           </a:p>
         </p:txBody>
       </p:sp>
@@ -8318,8 +8318,8 @@
         </p:nvSpPr>
         <p:spPr>
           <a:xfrm>
-            <a:off x="8359445" y="5390388"/>
-            <a:ext cx="3027578" cy="343916"/>
+            <a:off x="8359445" y="5308905"/>
+            <a:ext cx="3027578" cy="662127"/>
           </a:xfrm>
           <a:prstGeom prst="rect">
             <a:avLst/>
@@ -8338,7 +8338,7 @@
               <a:buNone/>
             </a:pPr>
             <a:r>
-              <a:rPr lang="en-US" sz="1250" dirty="0">
+              <a:rPr lang="en-US" sz="912" dirty="0">
                 <a:solidFill>
                   <a:srgbClr val="16262E"/>
                 </a:solidFill>
@@ -8348,7 +8348,7 @@
               </a:rPr>
               <a:t>¿El diseño del programa es pertinente para el contexto de la entidad?</a:t>
             </a:r>
-            <a:endParaRPr lang="en-US" sz="1250" dirty="0"/>
+            <a:endParaRPr lang="en-US" sz="912" dirty="0"/>
           </a:p>
         </p:txBody>
       </p:sp>
@@ -8444,7 +8444,7 @@
                 <a:ea typeface="Arial" pitchFamily="34" charset="-122"/>
                 <a:cs typeface="Arial" pitchFamily="34" charset="-120"/>
               </a:rPr>
-              <a:t>AHORA USTEDES</a:t>
+              <a:t>TU TURNO</a:t>
             </a:r>
             <a:endParaRPr lang="en-US" sz="1300" dirty="0"/>
           </a:p>

--- a/sesion-06/Sesion_06_Laboratorio_Cualitativo.pptx
+++ b/sesion-06/Sesion_06_Laboratorio_Cualitativo.pptx
@@ -1408,7 +1408,13 @@
           <a:p>
             <a:r>
               <a:rPr lang="en-US" dirty="0"/>
-              <a:t>El punto: la cita de la derecha es textual, está bien copiada y viene del expediente correcto. Aun así no sostiene la afirmación, porque saturación no es calidad.</a:t>
+              <a:t>El punto: la cita de la derecha es textual, está bien copiada y viene del artículo correcto. Aun así no sostiene la afirmación, porque un monto no es una medida de suficiencia. Es la confusión más común en evaluación de programas de transferencia.</a:t>
+            </a:r>
+          </a:p>
+          <a:p>
+            <a:r>
+              <a:rPr lang="en-US" dirty="0"/>
+              <a:t>Las dos citas salen del marco normativo común, a propósito: así ningún equipo recibe una pista sobre su propio expediente.</a:t>
             </a:r>
           </a:p>
           <a:p>
@@ -1421,6 +1427,12 @@
             <a:r>
               <a:rPr lang="en-US" dirty="0"/>
               <a:t>Si preguntan si el modelo puede revisar sus propias citas: no. Sin evidencia externa, la autocorrección degrada el resultado. Lo que sí funciona es ir a la fuente, que es lo que hace el paso 3 del laboratorio.</a:t>
+            </a:r>
+          </a:p>
+          <a:p>
+            <a:r>
+              <a:rPr lang="en-US" dirty="0"/>
+              <a:t>Una advertencia que vale para todo el laboratorio: la cita se copia completa. Cortar una oración a la mitad y cerrarla con punto ya cambia lo que dice. Si hay que recortar, se marca con puntos suspensivos.</a:t>
             </a:r>
           </a:p>
           <a:p>
@@ -9803,7 +9815,7 @@
                 <a:ea typeface="Calibri" pitchFamily="34" charset="-122"/>
                 <a:cs typeface="Calibri" pitchFamily="34" charset="-120"/>
               </a:rPr>
-              <a:t>Es la falla que el RAG de ayer no resuelve, porque recuperar el fragmento correcto y sostener la afirmación son dos cosas distintas.</a:t>
+              <a:t>Es la falla que el RAG de ayer no resuelve: recuperar el fragmento correcto y sostener la afirmación son dos cosas distintas. Las dos citas son del marco normativo que todos comparten.</a:t>
             </a:r>
             <a:endParaRPr lang="en-US" sz="1500" dirty="0"/>
           </a:p>
@@ -9908,7 +9920,7 @@
                 <a:ea typeface="Arial" pitchFamily="34" charset="-122"/>
                 <a:cs typeface="Arial" pitchFamily="34" charset="-120"/>
               </a:rPr>
-              <a:t>La cita dice exactamente eso</a:t>
+              <a:t>La afirmación no agrega nada</a:t>
             </a:r>
             <a:endParaRPr lang="en-US" sz="1600" dirty="0"/>
           </a:p>
@@ -9977,7 +9989,7 @@
                 <a:ea typeface="Calibri" pitchFamily="34" charset="-122"/>
                 <a:cs typeface="Calibri" pitchFamily="34" charset="-120"/>
               </a:rPr>
-              <a:t>«Contar con al menos una persona responsable por cada ocho niñas y niños menores de seis años atendidos.» Artículo 21, fracción I.</a:t>
+              <a:t>«El Programa es incompatible con otros programas federales de transferencia monetaria dirigidos a la misma persona cuidadora principal por el mismo concepto.» Artículo 11.</a:t>
             </a:r>
             <a:endParaRPr lang="en-US" sz="1200" dirty="0"/>
           </a:p>
@@ -10019,7 +10031,7 @@
                 <a:ea typeface="Calibri" pitchFamily="34" charset="-122"/>
                 <a:cs typeface="Calibri" pitchFamily="34" charset="-120"/>
               </a:rPr>
-              <a:t>Afirmación: la norma fija una relación máxima de una persona responsable por cada ocho menores. Quien lea solo la cita llega a la misma afirmación.</a:t>
+              <a:t>Afirmación: el Programa no puede concurrir con otro apoyo federal en efectivo para la misma persona cuidadora y por el mismo concepto. Quien lea solo la cita llega a lo mismo.</a:t>
             </a:r>
             <a:endParaRPr lang="en-US" sz="1250" dirty="0"/>
           </a:p>
@@ -10124,7 +10136,7 @@
                 <a:ea typeface="Arial" pitchFamily="34" charset="-122"/>
                 <a:cs typeface="Arial" pitchFamily="34" charset="-120"/>
               </a:rPr>
-              <a:t>La cita habla de otra cosa</a:t>
+              <a:t>La afirmación salta a un juicio</a:t>
             </a:r>
             <a:endParaRPr lang="en-US" sz="1600" dirty="0"/>
           </a:p>
@@ -10193,7 +10205,7 @@
                 <a:ea typeface="Calibri" pitchFamily="34" charset="-122"/>
                 <a:cs typeface="Calibri" pitchFamily="34" charset="-120"/>
               </a:rPr>
-              <a:t>«Los centros de la zona metropolitana operan al límite de su capacidad instalada y en seis de ellos existe lista de espera.» Informe estatal.</a:t>
+              <a:t>«El monto del apoyo es de 3,100 pesos bimestrales.» Artículo 14.</a:t>
             </a:r>
             <a:endParaRPr lang="en-US" sz="1200" dirty="0"/>
           </a:p>
@@ -10235,7 +10247,7 @@
                 <a:ea typeface="Calibri" pitchFamily="34" charset="-122"/>
                 <a:cs typeface="Calibri" pitchFamily="34" charset="-120"/>
               </a:rPr>
-              <a:t>Afirmación: la calidad del servicio en la zona metropolitana es mala. La cita documenta saturación, no calidad. La afirmación dice más que su evidencia.</a:t>
+              <a:t>Afirmación: el monto del apoyo es suficiente para cubrir el cuidado de una persona. La cita fija una cantidad y no dice nada sobre suficiencia. La afirmación dice más que su evidencia.</a:t>
             </a:r>
             <a:endParaRPr lang="en-US" sz="1250" dirty="0"/>
           </a:p>

--- a/sesion-06/Sesion_06_Laboratorio_Cualitativo.pptx
+++ b/sesion-06/Sesion_06_Laboratorio_Cualitativo.pptx
@@ -8,22 +8,25 @@
     <p:sldId id="256" r:id="rId2"/>
     <p:sldId id="257" r:id="rId3"/>
     <p:sldId id="258" r:id="rId44"/>
-    <p:sldId id="259" r:id="rId45"/>
-    <p:sldId id="260" r:id="rId46"/>
-    <p:sldId id="261" r:id="rId47"/>
-    <p:sldId id="262" r:id="rId53"/>
-    <p:sldId id="263" r:id="rId48"/>
-    <p:sldId id="264" r:id="rId49"/>
-    <p:sldId id="265" r:id="rId50"/>
-    <p:sldId id="266" r:id="rId54"/>
-    <p:sldId id="267" r:id="rId6"/>
-    <p:sldId id="268" r:id="rId7"/>
-    <p:sldId id="269" r:id="rId8"/>
-    <p:sldId id="270" r:id="rId11"/>
-    <p:sldId id="271" r:id="rId12"/>
-    <p:sldId id="272" r:id="rId13"/>
-    <p:sldId id="273" r:id="rId14"/>
-    <p:sldId id="274" r:id="rId52"/>
+    <p:sldId id="259" r:id="rId55"/>
+    <p:sldId id="260" r:id="rId45"/>
+    <p:sldId id="261" r:id="rId46"/>
+    <p:sldId id="262" r:id="rId56"/>
+    <p:sldId id="263" r:id="rId47"/>
+    <p:sldId id="264" r:id="rId53"/>
+    <p:sldId id="265" r:id="rId48"/>
+    <p:sldId id="266" r:id="rId49"/>
+    <p:sldId id="267" r:id="rId57"/>
+    <p:sldId id="268" r:id="rId50"/>
+    <p:sldId id="269" r:id="rId54"/>
+    <p:sldId id="270" r:id="rId6"/>
+    <p:sldId id="271" r:id="rId7"/>
+    <p:sldId id="272" r:id="rId8"/>
+    <p:sldId id="273" r:id="rId11"/>
+    <p:sldId id="274" r:id="rId12"/>
+    <p:sldId id="275" r:id="rId13"/>
+    <p:sldId id="276" r:id="rId14"/>
+    <p:sldId id="277" r:id="rId52"/>
   </p:sldIdLst>
   <p:notesMasterIdLst>
     <p:notesMasterId r:id="rId15"/>
@@ -1290,6 +1293,12 @@
           <a:p>
             <a:r>
               <a:rPr lang="en-US" dirty="0"/>
+              <a:t>La banda de arriba dice de qué documento sale el artículo 9. Señálela: a partir de aquí y hasta el receso, todo lo que aparece en pantalla viene del marco normativo que los seis comparten.</a:t>
+            </a:r>
+          </a:p>
+          <a:p>
+            <a:r>
+              <a:rPr lang="en-US" dirty="0"/>
               <a:t>Recorra el renglón de arriba y pregunte cuál de los seis sobra ANTES de revelarlo. Casi siempre alguien lo encuentra, y el ejercicio vale más que la explicación.</a:t>
             </a:r>
           </a:p>
@@ -1626,6 +1635,12 @@
           <a:p>
             <a:r>
               <a:rPr lang="en-US" dirty="0"/>
+              <a:t>Diga el reloj de entrada: hoy terminamos alrededor de las 11:40, diez minutos tarde y a propósito. El bloque técnico creció para que ningún documento aparezca en pantalla sin haber sido presentado. Si necesita terminar a las 11:30, el recorte está al final del guion.</a:t>
+            </a:r>
+          </a:p>
+          <a:p>
+            <a:r>
+              <a:rPr lang="en-US" dirty="0"/>
               <a:t>Acuse recibo aquí de la tarea de la sesión 5 y diga qué equipos entregaron. No lo deje para el cierre.</a:t>
             </a:r>
           </a:p>
@@ -1726,6 +1741,12 @@
           <a:p>
             <a:r>
               <a:rPr lang="en-US" dirty="0"/>
+              <a:t>La banda de arriba recuerda que el corpus es el de los foros del viernes, no el expediente de hoy. Es el único momento del bloque en que cambiamos de documento, y por eso la lámina anterior lo presenta.</a:t>
+            </a:r>
+          </a:p>
+          <a:p>
+            <a:r>
+              <a:rPr lang="en-US" dirty="0"/>
               <a:t>Los números de la primera columna son de su propio corpus de foros: la clave y una reclasificación independiente coincidieron en 36 de 38 en causa raíz.</a:t>
             </a:r>
           </a:p>
@@ -2073,6 +2094,306 @@
             <a:fld id="{B3C21451-1387-4CA6-816F-3879F97B5CB9}" type="slidenum">
               <a:rPr lang="en-US"/>
               <a:t>24</a:t>
+            </a:fld>
+            <a:endParaRPr lang="en-US"/>
+          </a:p>
+        </p:txBody>
+      </p:sp>
+    </p:spTree>
+  </p:cSld>
+  <p:clrMapOvr>
+    <a:masterClrMapping/>
+  </p:clrMapOvr>
+</p:notes>
+</file>
+
+<file path=ppt/notesSlides/notesSlide25.xml><?xml version="1.0" encoding="utf-8"?>
+<p:notes xmlns:a="http://schemas.openxmlformats.org/drawingml/2006/main" xmlns:r="http://schemas.openxmlformats.org/officeDocument/2006/relationships" xmlns:p="http://schemas.openxmlformats.org/presentationml/2006/main">
+  <p:cSld>
+    <p:spTree>
+      <p:nvGrpSpPr>
+        <p:cNvPr id="1" name=""/>
+        <p:cNvGrpSpPr/>
+        <p:nvPr/>
+      </p:nvGrpSpPr>
+      <p:grpSpPr>
+        <a:xfrm>
+          <a:off x="0" y="0"/>
+          <a:ext cx="0" cy="0"/>
+          <a:chOff x="0" y="0"/>
+          <a:chExt cx="0" cy="0"/>
+        </a:xfrm>
+      </p:grpSpPr>
+      <p:sp>
+        <p:nvSpPr>
+          <p:cNvPr id="2" name="Slide Image Placeholder 1"/>
+          <p:cNvSpPr>
+            <a:spLocks noGrp="1" noRot="1" noChangeAspect="1"/>
+          </p:cNvSpPr>
+          <p:nvPr>
+            <p:ph type="sldImg"/>
+          </p:nvPr>
+        </p:nvSpPr>
+        <p:spPr/>
+      </p:sp>
+      <p:sp>
+        <p:nvSpPr>
+          <p:cNvPr id="3" name="Notes Placeholder 2"/>
+          <p:cNvSpPr>
+            <a:spLocks noGrp="1"/>
+          </p:cNvSpPr>
+          <p:nvPr>
+            <p:ph type="body" idx="1"/>
+          </p:nvPr>
+        </p:nvSpPr>
+        <p:spPr/>
+        <p:txBody>
+          <a:bodyPr/>
+          <a:lstStyle/>
+          <a:p>
+            <a:r>
+              <a:rPr lang="en-US" dirty="0"/>
+              <a:t>Seis minutos. Es la lámina que faltaba: hasta hoy cada documento aparecía sin presentación y el grupo tenía que acordarse de dónde salía.</a:t>
+            </a:r>
+          </a:p>
+          <a:p>
+            <a:r>
+              <a:rPr lang="en-US" dirty="0"/>
+              <a:t>Recorra los cuatro renglones por orden cronológico y deténgase en el último renglón de la columna derecha: lo que salió de cada uno.</a:t>
+            </a:r>
+          </a:p>
+          <a:p>
+            <a:r>
+              <a:rPr lang="en-US" dirty="0"/>
+              <a:t>El remate es el banner: es el mismo programa en los cuatro documentos. El informe nacional que desmontaron el jueves se armó a partir de expedientes como los de hoy. Si el grupo entiende eso, la pregunta del cierre se contesta sola.</a:t>
+            </a:r>
+          </a:p>
+          <a:p>
+            <a:r>
+              <a:rPr lang="en-US" dirty="0"/>
+              <a:t>Si alguien pregunta por qué todo es sintético: porque el semáforo de datos no permite subir información real a estas herramientas, y porque los errores tienen que estar puestos a propósito para que el ejercicio sirva.</a:t>
+            </a:r>
+          </a:p>
+        </p:txBody>
+      </p:sp>
+      <p:sp>
+        <p:nvSpPr>
+          <p:cNvPr id="4" name="Slide Number Placeholder 3"/>
+          <p:cNvSpPr>
+            <a:spLocks noGrp="1"/>
+          </p:cNvSpPr>
+          <p:nvPr>
+            <p:ph type="sldNum" sz="quarter" idx="10"/>
+          </p:nvPr>
+        </p:nvSpPr>
+        <p:spPr/>
+        <p:txBody>
+          <a:bodyPr/>
+          <a:lstStyle/>
+          <a:p>
+            <a:fld id="{B3C21451-1387-4CA6-816F-3879F97B5CB9}" type="slidenum">
+              <a:rPr lang="en-US"/>
+              <a:t>25</a:t>
+            </a:fld>
+            <a:endParaRPr lang="en-US"/>
+          </a:p>
+        </p:txBody>
+      </p:sp>
+    </p:spTree>
+  </p:cSld>
+  <p:clrMapOvr>
+    <a:masterClrMapping/>
+  </p:clrMapOvr>
+</p:notes>
+</file>
+
+<file path=ppt/notesSlides/notesSlide26.xml><?xml version="1.0" encoding="utf-8"?>
+<p:notes xmlns:a="http://schemas.openxmlformats.org/drawingml/2006/main" xmlns:r="http://schemas.openxmlformats.org/officeDocument/2006/relationships" xmlns:p="http://schemas.openxmlformats.org/presentationml/2006/main">
+  <p:cSld>
+    <p:spTree>
+      <p:nvGrpSpPr>
+        <p:cNvPr id="1" name=""/>
+        <p:cNvGrpSpPr/>
+        <p:nvPr/>
+      </p:nvGrpSpPr>
+      <p:grpSpPr>
+        <a:xfrm>
+          <a:off x="0" y="0"/>
+          <a:ext cx="0" cy="0"/>
+          <a:chOff x="0" y="0"/>
+          <a:chExt cx="0" cy="0"/>
+        </a:xfrm>
+      </p:grpSpPr>
+      <p:sp>
+        <p:nvSpPr>
+          <p:cNvPr id="2" name="Slide Image Placeholder 1"/>
+          <p:cNvSpPr>
+            <a:spLocks noGrp="1" noRot="1" noChangeAspect="1"/>
+          </p:cNvSpPr>
+          <p:nvPr>
+            <p:ph type="sldImg"/>
+          </p:nvPr>
+        </p:nvSpPr>
+        <p:spPr/>
+      </p:sp>
+      <p:sp>
+        <p:nvSpPr>
+          <p:cNvPr id="3" name="Notes Placeholder 2"/>
+          <p:cNvSpPr>
+            <a:spLocks noGrp="1"/>
+          </p:cNvSpPr>
+          <p:nvPr>
+            <p:ph type="body" idx="1"/>
+          </p:nvPr>
+        </p:nvSpPr>
+        <p:spPr/>
+        <p:txBody>
+          <a:bodyPr/>
+          <a:lstStyle/>
+          <a:p>
+            <a:r>
+              <a:rPr lang="en-US" dirty="0"/>
+              <a:t>Cinco minutos. Es el mapa del archivo que van a abrir en el laboratorio.</a:t>
+            </a:r>
+          </a:p>
+          <a:p>
+            <a:r>
+              <a:rPr lang="en-US" dirty="0"/>
+              <a:t>Lo importante es la división: el marco normativo es el mismo para los seis equipos, y cada entidad trae sus propios tres documentos más su pregunta de evaluación.</a:t>
+            </a:r>
+          </a:p>
+          <a:p>
+            <a:r>
+              <a:rPr lang="en-US" dirty="0"/>
+              <a:t>Diga en voz alta lo del banner: las láminas que siguen usan solo el marco normativo común, para que ningún equipo reciba una pista sobre su propia entidad. Es una decisión de diseño y conviene que se note.</a:t>
+            </a:r>
+          </a:p>
+          <a:p>
+            <a:r>
+              <a:rPr lang="en-US" dirty="0"/>
+              <a:t>El último punto de la derecha prepara el cierre: entre los seis expedientes hay contradicciones, y descubrirlas es parte del trabajo.</a:t>
+            </a:r>
+          </a:p>
+        </p:txBody>
+      </p:sp>
+      <p:sp>
+        <p:nvSpPr>
+          <p:cNvPr id="4" name="Slide Number Placeholder 3"/>
+          <p:cNvSpPr>
+            <a:spLocks noGrp="1"/>
+          </p:cNvSpPr>
+          <p:nvPr>
+            <p:ph type="sldNum" sz="quarter" idx="10"/>
+          </p:nvPr>
+        </p:nvSpPr>
+        <p:spPr/>
+        <p:txBody>
+          <a:bodyPr/>
+          <a:lstStyle/>
+          <a:p>
+            <a:fld id="{B3C21451-1387-4CA6-816F-3879F97B5CB9}" type="slidenum">
+              <a:rPr lang="en-US"/>
+              <a:t>26</a:t>
+            </a:fld>
+            <a:endParaRPr lang="en-US"/>
+          </a:p>
+        </p:txBody>
+      </p:sp>
+    </p:spTree>
+  </p:cSld>
+  <p:clrMapOvr>
+    <a:masterClrMapping/>
+  </p:clrMapOvr>
+</p:notes>
+</file>
+
+<file path=ppt/notesSlides/notesSlide27.xml><?xml version="1.0" encoding="utf-8"?>
+<p:notes xmlns:a="http://schemas.openxmlformats.org/drawingml/2006/main" xmlns:r="http://schemas.openxmlformats.org/officeDocument/2006/relationships" xmlns:p="http://schemas.openxmlformats.org/presentationml/2006/main">
+  <p:cSld>
+    <p:spTree>
+      <p:nvGrpSpPr>
+        <p:cNvPr id="1" name=""/>
+        <p:cNvGrpSpPr/>
+        <p:nvPr/>
+      </p:nvGrpSpPr>
+      <p:grpSpPr>
+        <a:xfrm>
+          <a:off x="0" y="0"/>
+          <a:ext cx="0" cy="0"/>
+          <a:chOff x="0" y="0"/>
+          <a:chExt cx="0" cy="0"/>
+        </a:xfrm>
+      </p:grpSpPr>
+      <p:sp>
+        <p:nvSpPr>
+          <p:cNvPr id="2" name="Slide Image Placeholder 1"/>
+          <p:cNvSpPr>
+            <a:spLocks noGrp="1" noRot="1" noChangeAspect="1"/>
+          </p:cNvSpPr>
+          <p:nvPr>
+            <p:ph type="sldImg"/>
+          </p:nvPr>
+        </p:nvSpPr>
+        <p:spPr/>
+      </p:sp>
+      <p:sp>
+        <p:nvSpPr>
+          <p:cNvPr id="3" name="Notes Placeholder 2"/>
+          <p:cNvSpPr>
+            <a:spLocks noGrp="1"/>
+          </p:cNvSpPr>
+          <p:nvPr>
+            <p:ph type="body" idx="1"/>
+          </p:nvPr>
+        </p:nvSpPr>
+        <p:spPr/>
+        <p:txBody>
+          <a:bodyPr/>
+          <a:lstStyle/>
+          <a:p>
+            <a:r>
+              <a:rPr lang="en-US" dirty="0"/>
+              <a:t>Cuatro minutos. Va justo antes de la lámina de kappa para que el 36 de 38 no aparezca de la nada.</a:t>
+            </a:r>
+          </a:p>
+          <a:p>
+            <a:r>
+              <a:rPr lang="en-US" dirty="0"/>
+              <a:t>Las cuatro tarjetas cuentan la historia del corpus: de dónde salió, qué hicieron con él, quién hizo la clave y cómo se verificó.</a:t>
+            </a:r>
+          </a:p>
+          <a:p>
+            <a:r>
+              <a:rPr lang="en-US" dirty="0"/>
+              <a:t>Sobre la tarjeta 4, si alguien pregunta quién fue el segundo codificador: fue una segunda pasada hecha con un modelo, sin ver la clave, como control de calidad del material del curso. Y aquí conviene adelantarse a la objeción correcta: un modelo corriendo dos veces no es lo mismo que dos personas independientes, porque es la misma fuente de error. Por eso lo que se compara es una clasificación humana contra una automática, y nunca el modelo consigo mismo.</a:t>
+            </a:r>
+          </a:p>
+          <a:p>
+            <a:r>
+              <a:rPr lang="en-US" dirty="0"/>
+              <a:t>El banner es el que vale: excluir las tres intervenciones del moderador cambió las proporciones y por lo tanto el resultado. Es una decisión metodológica que se declara antes de medir.</a:t>
+            </a:r>
+          </a:p>
+        </p:txBody>
+      </p:sp>
+      <p:sp>
+        <p:nvSpPr>
+          <p:cNvPr id="4" name="Slide Number Placeholder 3"/>
+          <p:cNvSpPr>
+            <a:spLocks noGrp="1"/>
+          </p:cNvSpPr>
+          <p:nvPr>
+            <p:ph type="sldNum" sz="quarter" idx="10"/>
+          </p:nvPr>
+        </p:nvSpPr>
+        <p:spPr/>
+        <p:txBody>
+          <a:bodyPr/>
+          <a:lstStyle/>
+          <a:p>
+            <a:fld id="{B3C21451-1387-4CA6-816F-3879F97B5CB9}" type="slidenum">
+              <a:rPr lang="en-US"/>
+              <a:t>27</a:t>
             </a:fld>
             <a:endParaRPr lang="en-US"/>
           </a:p>
@@ -2302,7 +2623,7 @@
           <a:p>
             <a:r>
               <a:rPr lang="en-US" dirty="0"/>
-              <a:t>Cuarenta y ocho minutos de práctica dentro de un bloque de sesenta y dos. El encargo son seis minutos, de 10:10 a 10:16; dos minutos para abrir salas; la práctica de 10:18 a 11:06; dos minutos de regreso y cuatro de reporte en pizarra.</a:t>
+              <a:t>Cuarenta y ocho minutos de práctica dentro de un bloque de sesenta y dos, de 10:20 a 11:22. El encargo son seis minutos, de 10:20 a 10:26; dos minutos para abrir salas; la práctica de 10:28 a 11:16; dos minutos de regreso y cuatro de reporte en pizarra.</a:t>
             </a:r>
           </a:p>
           <a:p>
@@ -5046,7 +5367,7 @@
                 <a:ea typeface="Calibri" pitchFamily="34" charset="-122"/>
                 <a:cs typeface="Calibri" pitchFamily="34" charset="-120"/>
               </a:rPr>
-              <a:t>Acaban de vivirlo: calcular a mano un acuerdo corregido por azar sobre seis filas les tomó cinco minutos y estuvo a punto de quedar indefinido. Sobre 118 registros, seis equipos y tres corridas, eso es una línea de código. El miércoles empieza el Módulo III con Eduardo Ramírez. Lleven su bitácora.</a:t>
+              <a:t>Acaban de vivirlo: calcular a mano un acuerdo corregido por azar sobre seis filas les tomó cinco minutos y estuvo a punto de quedar indefinido. Sobre los 118 registros de Registros_atencion_ciudadana_PARTICIPANTE.xlsx, con seis equipos y tres corridas, eso es una línea de código. El miércoles empieza el Módulo III con Eduardo Ramírez. Lleven su bitácora.</a:t>
             </a:r>
             <a:endParaRPr lang="en-US" sz="1600" dirty="0"/>
           </a:p>
@@ -6625,7 +6946,7 @@
                 <a:ea typeface="Arial" pitchFamily="34" charset="-122"/>
                 <a:cs typeface="Arial" pitchFamily="34" charset="-120"/>
               </a:rPr>
-              <a:t>Hoy se cierra ese hueco, y se cierra con números.</a:t>
+              <a:t>Hoy se cierra ese hueco, y se cierra con números. Pero antes, de dónde salió todo lo que han leído.</a:t>
             </a:r>
             <a:endParaRPr lang="en-US" sz="1600" dirty="0"/>
           </a:p>
@@ -6869,7 +7190,7 @@
                 <a:ea typeface="Arial" pitchFamily="34" charset="-122"/>
                 <a:cs typeface="Arial" pitchFamily="34" charset="-120"/>
               </a:rPr>
-              <a:t>9:08 a 10:00</a:t>
+              <a:t>9:10 a 10:10</a:t>
             </a:r>
             <a:endParaRPr lang="en-US" sz="1200" dirty="0"/>
           </a:p>
@@ -8293,7 +8614,7 @@
                 <a:ea typeface="Calibri" pitchFamily="34" charset="-122"/>
                 <a:cs typeface="Calibri" pitchFamily="34" charset="-120"/>
               </a:rPr>
-              <a:t>El artículo 9 del marco normativo de su expediente lista exactamente cinco requisitos documentales, y agrega que no puede exigirse documentación adicional.</a:t>
+              <a:t>El artículo 9 lista cinco requisitos documentales y prohíbe exigir cualquier otro.</a:t>
             </a:r>
             <a:endParaRPr lang="en-US" sz="1500" dirty="0"/>
           </a:p>
@@ -8301,57 +8622,18 @@
       </p:sp>
       <p:sp>
         <p:nvSpPr>
-          <p:cNvPr id="4" name="Text"/>
-          <p:cNvSpPr txBox="1"/>
-          <p:nvPr/>
-        </p:nvSpPr>
-        <p:spPr>
-          <a:xfrm>
-            <a:off x="566928" y="1880000"/>
-            <a:ext cx="11057839" cy="260000"/>
-          </a:xfrm>
-          <a:prstGeom prst="rect">
-            <a:avLst/>
-          </a:prstGeom>
-          <a:noFill/>
-          <a:ln/>
-        </p:spPr>
-        <p:txBody>
-          <a:bodyPr wrap="square" lIns="0" tIns="0" rIns="0" bIns="0" rtlCol="0" anchor="t"/>
-          <a:lstStyle/>
-          <a:p>
-            <a:pPr indent="0" marL="0">
-              <a:buNone/>
-            </a:pPr>
-            <a:r>
-              <a:rPr lang="en-US" sz="1100" b="1" spc="100" kern="0" dirty="0">
-                <a:solidFill>
-                  <a:srgbClr val="2E7D7D"/>
-                </a:solidFill>
-                <a:latin typeface="Arial" pitchFamily="34" charset="0"/>
-                <a:ea typeface="Arial" pitchFamily="34" charset="-122"/>
-                <a:cs typeface="Arial" pitchFamily="34" charset="-120"/>
-              </a:rPr>
-              <a:t>LO QUE DEVOLVIÓ EL ASISTENTE</a:t>
-            </a:r>
-            <a:endParaRPr lang="en-US" sz="1100" dirty="0"/>
-          </a:p>
-        </p:txBody>
-      </p:sp>
-      <p:sp>
-        <p:nvSpPr>
-          <p:cNvPr id="5" name="Shape"/>
+          <p:cNvPr id="4" name="Shape"/>
           <p:cNvSpPr/>
           <p:nvPr/>
         </p:nvSpPr>
         <p:spPr>
           <a:xfrm>
-            <a:off x="566928" y="2180000"/>
-            <a:ext cx="1480000" cy="620000"/>
+            <a:off x="566928" y="1700000"/>
+            <a:ext cx="11057839" cy="300000"/>
           </a:xfrm>
           <a:prstGeom prst="roundRect">
             <a:avLst>
-              <a:gd name="adj" fmla="val 12000"/>
+              <a:gd name="adj" fmla="val 20000"/>
             </a:avLst>
           </a:prstGeom>
           <a:solidFill>
@@ -8367,14 +8649,14 @@
       </p:sp>
       <p:sp>
         <p:nvSpPr>
-          <p:cNvPr id="6" name="Text"/>
-          <p:cNvSpPr txBox="1"/>
-          <p:nvPr/>
-        </p:nvSpPr>
-        <p:spPr>
-          <a:xfrm>
-            <a:off x="636928" y="2180000"/>
-            <a:ext cx="1340000" cy="620000"/>
+          <p:cNvPr id="5" name="Text"/>
+          <p:cNvSpPr txBox="1"/>
+          <p:nvPr/>
+        </p:nvSpPr>
+        <p:spPr>
+          <a:xfrm>
+            <a:off x="766928" y="1700000"/>
+            <a:ext cx="1700000" cy="300000"/>
           </a:xfrm>
           <a:prstGeom prst="rect">
             <a:avLst/>
@@ -8386,37 +8668,112 @@
           <a:bodyPr wrap="square" lIns="0" tIns="0" rIns="0" bIns="0" rtlCol="0" anchor="ctr"/>
           <a:lstStyle/>
           <a:p>
-            <a:pPr algn="ctr" indent="0" marL="0">
-              <a:lnSpc>
-                <a:spcPct val="100000"/>
-              </a:lnSpc>
-              <a:buNone/>
-            </a:pPr>
-            <a:r>
-              <a:rPr lang="en-US" sz="1000" dirty="0">
-                <a:solidFill>
-                  <a:srgbClr val="16262E"/>
+            <a:pPr indent="0" marL="0">
+              <a:buNone/>
+            </a:pPr>
+            <a:r>
+              <a:rPr lang="en-US" sz="950" b="1" spc="100" kern="0" dirty="0">
+                <a:solidFill>
+                  <a:srgbClr val="2E7D7D"/>
                 </a:solidFill>
                 <a:latin typeface="Arial" pitchFamily="34" charset="0"/>
                 <a:ea typeface="Arial" pitchFamily="34" charset="-122"/>
                 <a:cs typeface="Arial" pitchFamily="34" charset="-120"/>
               </a:rPr>
-              <a:t>Identificación oficial</a:t>
-            </a:r>
-            <a:endParaRPr lang="en-US" sz="1000" dirty="0"/>
-          </a:p>
-        </p:txBody>
-      </p:sp>
-      <p:sp>
-        <p:nvSpPr>
-          <p:cNvPr id="7" name="Shape"/>
+              <a:t>DE DÓNDE SALE</a:t>
+            </a:r>
+            <a:endParaRPr lang="en-US" sz="950" dirty="0"/>
+          </a:p>
+        </p:txBody>
+      </p:sp>
+      <p:sp>
+        <p:nvSpPr>
+          <p:cNvPr id="6" name="Text"/>
+          <p:cNvSpPr txBox="1"/>
+          <p:nvPr/>
+        </p:nvSpPr>
+        <p:spPr>
+          <a:xfrm>
+            <a:off x="2516928" y="1700000"/>
+            <a:ext cx="8907839" cy="300000"/>
+          </a:xfrm>
+          <a:prstGeom prst="rect">
+            <a:avLst/>
+          </a:prstGeom>
+          <a:noFill/>
+          <a:ln/>
+        </p:spPr>
+        <p:txBody>
+          <a:bodyPr wrap="square" lIns="0" tIns="0" rIns="0" bIns="0" rtlCol="0" anchor="ctr"/>
+          <a:lstStyle/>
+          <a:p>
+            <a:pPr indent="0" marL="0">
+              <a:buNone/>
+            </a:pPr>
+            <a:r>
+              <a:rPr lang="en-US" sz="1100" dirty="0">
+                <a:solidFill>
+                  <a:srgbClr val="16262E"/>
+                </a:solidFill>
+                <a:latin typeface="Calibri" pitchFamily="34" charset="0"/>
+                <a:ea typeface="Calibri" pitchFamily="34" charset="-122"/>
+                <a:cs typeface="Calibri" pitchFamily="34" charset="-120"/>
+              </a:rPr>
+              <a:t>Reglas de Operación del PACC 2025, artículo 9, en el marco normativo común de Expedientes_LAB2.docx.</a:t>
+            </a:r>
+            <a:endParaRPr lang="en-US" sz="1100" dirty="0"/>
+          </a:p>
+        </p:txBody>
+      </p:sp>
+      <p:sp>
+        <p:nvSpPr>
+          <p:cNvPr id="7" name="Text"/>
+          <p:cNvSpPr txBox="1"/>
+          <p:nvPr/>
+        </p:nvSpPr>
+        <p:spPr>
+          <a:xfrm>
+            <a:off x="566928" y="2100000"/>
+            <a:ext cx="11057839" cy="260000"/>
+          </a:xfrm>
+          <a:prstGeom prst="rect">
+            <a:avLst/>
+          </a:prstGeom>
+          <a:noFill/>
+          <a:ln/>
+        </p:spPr>
+        <p:txBody>
+          <a:bodyPr wrap="square" lIns="0" tIns="0" rIns="0" bIns="0" rtlCol="0" anchor="t"/>
+          <a:lstStyle/>
+          <a:p>
+            <a:pPr indent="0" marL="0">
+              <a:buNone/>
+            </a:pPr>
+            <a:r>
+              <a:rPr lang="en-US" sz="1100" b="1" spc="100" kern="0" dirty="0">
+                <a:solidFill>
+                  <a:srgbClr val="2E7D7D"/>
+                </a:solidFill>
+                <a:latin typeface="Arial" pitchFamily="34" charset="0"/>
+                <a:ea typeface="Arial" pitchFamily="34" charset="-122"/>
+                <a:cs typeface="Arial" pitchFamily="34" charset="-120"/>
+              </a:rPr>
+              <a:t>LO QUE DEVOLVIÓ EL ASISTENTE</a:t>
+            </a:r>
+            <a:endParaRPr lang="en-US" sz="1100" dirty="0"/>
+          </a:p>
+        </p:txBody>
+      </p:sp>
+      <p:sp>
+        <p:nvSpPr>
+          <p:cNvPr id="8" name="Shape"/>
           <p:cNvSpPr/>
           <p:nvPr/>
         </p:nvSpPr>
         <p:spPr>
           <a:xfrm>
-            <a:off x="2166928" y="2180000"/>
-            <a:ext cx="1480000" cy="620000"/>
+            <a:off x="566928" y="2370000"/>
+            <a:ext cx="1480000" cy="580000"/>
           </a:xfrm>
           <a:prstGeom prst="roundRect">
             <a:avLst>
@@ -8436,14 +8793,14 @@
       </p:sp>
       <p:sp>
         <p:nvSpPr>
-          <p:cNvPr id="8" name="Text"/>
-          <p:cNvSpPr txBox="1"/>
-          <p:nvPr/>
-        </p:nvSpPr>
-        <p:spPr>
-          <a:xfrm>
-            <a:off x="2236928" y="2180000"/>
-            <a:ext cx="1340000" cy="620000"/>
+          <p:cNvPr id="9" name="Text"/>
+          <p:cNvSpPr txBox="1"/>
+          <p:nvPr/>
+        </p:nvSpPr>
+        <p:spPr>
+          <a:xfrm>
+            <a:off x="636928" y="2370000"/>
+            <a:ext cx="1340000" cy="580000"/>
           </a:xfrm>
           <a:prstGeom prst="rect">
             <a:avLst/>
@@ -8470,7 +8827,7 @@
                 <a:ea typeface="Arial" pitchFamily="34" charset="-122"/>
                 <a:cs typeface="Arial" pitchFamily="34" charset="-120"/>
               </a:rPr>
-              <a:t>CURP de la persona cuidadora</a:t>
+              <a:t>Identificación oficial</a:t>
             </a:r>
             <a:endParaRPr lang="en-US" sz="1000" dirty="0"/>
           </a:p>
@@ -8478,14 +8835,14 @@
       </p:sp>
       <p:sp>
         <p:nvSpPr>
-          <p:cNvPr id="9" name="Shape"/>
+          <p:cNvPr id="10" name="Shape"/>
           <p:cNvSpPr/>
           <p:nvPr/>
         </p:nvSpPr>
         <p:spPr>
           <a:xfrm>
-            <a:off x="3766928" y="2180000"/>
-            <a:ext cx="1480000" cy="620000"/>
+            <a:off x="2166928" y="2370000"/>
+            <a:ext cx="1480000" cy="580000"/>
           </a:xfrm>
           <a:prstGeom prst="roundRect">
             <a:avLst>
@@ -8505,14 +8862,14 @@
       </p:sp>
       <p:sp>
         <p:nvSpPr>
-          <p:cNvPr id="10" name="Text"/>
-          <p:cNvSpPr txBox="1"/>
-          <p:nvPr/>
-        </p:nvSpPr>
-        <p:spPr>
-          <a:xfrm>
-            <a:off x="3836928" y="2180000"/>
-            <a:ext cx="1340000" cy="620000"/>
+          <p:cNvPr id="11" name="Text"/>
+          <p:cNvSpPr txBox="1"/>
+          <p:nvPr/>
+        </p:nvSpPr>
+        <p:spPr>
+          <a:xfrm>
+            <a:off x="2236928" y="2370000"/>
+            <a:ext cx="1340000" cy="580000"/>
           </a:xfrm>
           <a:prstGeom prst="rect">
             <a:avLst/>
@@ -8539,7 +8896,7 @@
                 <a:ea typeface="Arial" pitchFamily="34" charset="-122"/>
                 <a:cs typeface="Arial" pitchFamily="34" charset="-120"/>
               </a:rPr>
-              <a:t>Comprobante de domicilio</a:t>
+              <a:t>CURP de la persona cuidadora</a:t>
             </a:r>
             <a:endParaRPr lang="en-US" sz="1000" dirty="0"/>
           </a:p>
@@ -8547,14 +8904,14 @@
       </p:sp>
       <p:sp>
         <p:nvSpPr>
-          <p:cNvPr id="11" name="Shape"/>
+          <p:cNvPr id="12" name="Shape"/>
           <p:cNvSpPr/>
           <p:nvPr/>
         </p:nvSpPr>
         <p:spPr>
           <a:xfrm>
-            <a:off x="5366928" y="2180000"/>
-            <a:ext cx="1480000" cy="620000"/>
+            <a:off x="3766928" y="2370000"/>
+            <a:ext cx="1480000" cy="580000"/>
           </a:xfrm>
           <a:prstGeom prst="roundRect">
             <a:avLst>
@@ -8574,14 +8931,14 @@
       </p:sp>
       <p:sp>
         <p:nvSpPr>
-          <p:cNvPr id="12" name="Text"/>
-          <p:cNvSpPr txBox="1"/>
-          <p:nvPr/>
-        </p:nvSpPr>
-        <p:spPr>
-          <a:xfrm>
-            <a:off x="5436928" y="2180000"/>
-            <a:ext cx="1340000" cy="620000"/>
+          <p:cNvPr id="13" name="Text"/>
+          <p:cNvSpPr txBox="1"/>
+          <p:nvPr/>
+        </p:nvSpPr>
+        <p:spPr>
+          <a:xfrm>
+            <a:off x="3836928" y="2370000"/>
+            <a:ext cx="1340000" cy="580000"/>
           </a:xfrm>
           <a:prstGeom prst="rect">
             <a:avLst/>
@@ -8608,7 +8965,7 @@
                 <a:ea typeface="Arial" pitchFamily="34" charset="-122"/>
                 <a:cs typeface="Arial" pitchFamily="34" charset="-120"/>
               </a:rPr>
-              <a:t>Acta de nacimiento</a:t>
+              <a:t>Comprobante de domicilio</a:t>
             </a:r>
             <a:endParaRPr lang="en-US" sz="1000" dirty="0"/>
           </a:p>
@@ -8616,14 +8973,14 @@
       </p:sp>
       <p:sp>
         <p:nvSpPr>
-          <p:cNvPr id="13" name="Shape"/>
+          <p:cNvPr id="14" name="Shape"/>
           <p:cNvSpPr/>
           <p:nvPr/>
         </p:nvSpPr>
         <p:spPr>
           <a:xfrm>
-            <a:off x="6966928" y="2180000"/>
-            <a:ext cx="1480000" cy="620000"/>
+            <a:off x="5366928" y="2370000"/>
+            <a:ext cx="1480000" cy="580000"/>
           </a:xfrm>
           <a:prstGeom prst="roundRect">
             <a:avLst>
@@ -8643,14 +9000,14 @@
       </p:sp>
       <p:sp>
         <p:nvSpPr>
-          <p:cNvPr id="14" name="Text"/>
-          <p:cNvSpPr txBox="1"/>
-          <p:nvPr/>
-        </p:nvSpPr>
-        <p:spPr>
-          <a:xfrm>
-            <a:off x="7036928" y="2180000"/>
-            <a:ext cx="1340000" cy="620000"/>
+          <p:cNvPr id="15" name="Text"/>
+          <p:cNvSpPr txBox="1"/>
+          <p:nvPr/>
+        </p:nvSpPr>
+        <p:spPr>
+          <a:xfrm>
+            <a:off x="5436928" y="2370000"/>
+            <a:ext cx="1340000" cy="580000"/>
           </a:xfrm>
           <a:prstGeom prst="rect">
             <a:avLst/>
@@ -8677,6 +9034,75 @@
                 <a:ea typeface="Arial" pitchFamily="34" charset="-122"/>
                 <a:cs typeface="Arial" pitchFamily="34" charset="-120"/>
               </a:rPr>
+              <a:t>Acta de nacimiento</a:t>
+            </a:r>
+            <a:endParaRPr lang="en-US" sz="1000" dirty="0"/>
+          </a:p>
+        </p:txBody>
+      </p:sp>
+      <p:sp>
+        <p:nvSpPr>
+          <p:cNvPr id="16" name="Shape"/>
+          <p:cNvSpPr/>
+          <p:nvPr/>
+        </p:nvSpPr>
+        <p:spPr>
+          <a:xfrm>
+            <a:off x="6966928" y="2370000"/>
+            <a:ext cx="1480000" cy="580000"/>
+          </a:xfrm>
+          <a:prstGeom prst="roundRect">
+            <a:avLst>
+              <a:gd name="adj" fmla="val 12000"/>
+            </a:avLst>
+          </a:prstGeom>
+          <a:solidFill>
+            <a:srgbClr val="D7E7E7"/>
+          </a:solidFill>
+          <a:ln w="12700">
+            <a:solidFill>
+              <a:srgbClr val="D7E7E7"/>
+            </a:solidFill>
+            <a:prstDash val="solid"/>
+          </a:ln>
+        </p:spPr>
+      </p:sp>
+      <p:sp>
+        <p:nvSpPr>
+          <p:cNvPr id="17" name="Text"/>
+          <p:cNvSpPr txBox="1"/>
+          <p:nvPr/>
+        </p:nvSpPr>
+        <p:spPr>
+          <a:xfrm>
+            <a:off x="7036928" y="2370000"/>
+            <a:ext cx="1340000" cy="580000"/>
+          </a:xfrm>
+          <a:prstGeom prst="rect">
+            <a:avLst/>
+          </a:prstGeom>
+          <a:noFill/>
+          <a:ln/>
+        </p:spPr>
+        <p:txBody>
+          <a:bodyPr wrap="square" lIns="0" tIns="0" rIns="0" bIns="0" rtlCol="0" anchor="ctr"/>
+          <a:lstStyle/>
+          <a:p>
+            <a:pPr algn="ctr" indent="0" marL="0">
+              <a:lnSpc>
+                <a:spcPct val="100000"/>
+              </a:lnSpc>
+              <a:buNone/>
+            </a:pPr>
+            <a:r>
+              <a:rPr lang="en-US" sz="1000" dirty="0">
+                <a:solidFill>
+                  <a:srgbClr val="16262E"/>
+                </a:solidFill>
+                <a:latin typeface="Arial" pitchFamily="34" charset="0"/>
+                <a:ea typeface="Arial" pitchFamily="34" charset="-122"/>
+                <a:cs typeface="Arial" pitchFamily="34" charset="-120"/>
+              </a:rPr>
               <a:t>Constancia médica</a:t>
             </a:r>
             <a:endParaRPr lang="en-US" sz="1000" dirty="0"/>
@@ -8685,14 +9111,14 @@
       </p:sp>
       <p:sp>
         <p:nvSpPr>
-          <p:cNvPr id="15" name="Shape"/>
+          <p:cNvPr id="18" name="Shape"/>
           <p:cNvSpPr/>
           <p:nvPr/>
         </p:nvSpPr>
         <p:spPr>
           <a:xfrm>
-            <a:off x="8566928" y="2180000"/>
-            <a:ext cx="1480000" cy="620000"/>
+            <a:off x="8566928" y="2370000"/>
+            <a:ext cx="1480000" cy="580000"/>
           </a:xfrm>
           <a:prstGeom prst="roundRect">
             <a:avLst>
@@ -8712,14 +9138,14 @@
       </p:sp>
       <p:sp>
         <p:nvSpPr>
-          <p:cNvPr id="16" name="Text"/>
-          <p:cNvSpPr txBox="1"/>
-          <p:nvPr/>
-        </p:nvSpPr>
-        <p:spPr>
-          <a:xfrm>
-            <a:off x="8636928" y="2180000"/>
-            <a:ext cx="1340000" cy="620000"/>
+          <p:cNvPr id="19" name="Text"/>
+          <p:cNvSpPr txBox="1"/>
+          <p:nvPr/>
+        </p:nvSpPr>
+        <p:spPr>
+          <a:xfrm>
+            <a:off x="8636928" y="2370000"/>
+            <a:ext cx="1340000" cy="580000"/>
           </a:xfrm>
           <a:prstGeom prst="rect">
             <a:avLst/>
@@ -8754,13 +9180,13 @@
       </p:sp>
       <p:sp>
         <p:nvSpPr>
-          <p:cNvPr id="17" name="Text"/>
-          <p:cNvSpPr txBox="1"/>
-          <p:nvPr/>
-        </p:nvSpPr>
-        <p:spPr>
-          <a:xfrm>
-            <a:off x="566928" y="2870000"/>
+          <p:cNvPr id="20" name="Text"/>
+          <p:cNvSpPr txBox="1"/>
+          <p:nvPr/>
+        </p:nvSpPr>
+        <p:spPr>
+          <a:xfrm>
+            <a:off x="566928" y="3010000"/>
             <a:ext cx="11057839" cy="260000"/>
           </a:xfrm>
           <a:prstGeom prst="rect">
@@ -8793,13 +9219,13 @@
       </p:sp>
       <p:sp>
         <p:nvSpPr>
-          <p:cNvPr id="18" name="Text"/>
-          <p:cNvSpPr txBox="1"/>
-          <p:nvPr/>
-        </p:nvSpPr>
-        <p:spPr>
-          <a:xfrm>
-            <a:off x="566928" y="3280000"/>
+          <p:cNvPr id="21" name="Text"/>
+          <p:cNvSpPr txBox="1"/>
+          <p:nvPr/>
+        </p:nvSpPr>
+        <p:spPr>
+          <a:xfrm>
+            <a:off x="566928" y="3330000"/>
             <a:ext cx="11057839" cy="260000"/>
           </a:xfrm>
           <a:prstGeom prst="rect">
@@ -8832,14 +9258,14 @@
       </p:sp>
       <p:sp>
         <p:nvSpPr>
-          <p:cNvPr id="19" name="Shape"/>
+          <p:cNvPr id="22" name="Shape"/>
           <p:cNvSpPr/>
           <p:nvPr/>
         </p:nvSpPr>
         <p:spPr>
           <a:xfrm>
-            <a:off x="566928" y="3580000"/>
-            <a:ext cx="1480000" cy="620000"/>
+            <a:off x="566928" y="3600000"/>
+            <a:ext cx="1480000" cy="580000"/>
           </a:xfrm>
           <a:prstGeom prst="roundRect">
             <a:avLst>
@@ -8859,14 +9285,14 @@
       </p:sp>
       <p:sp>
         <p:nvSpPr>
-          <p:cNvPr id="20" name="Text"/>
-          <p:cNvSpPr txBox="1"/>
-          <p:nvPr/>
-        </p:nvSpPr>
-        <p:spPr>
-          <a:xfrm>
-            <a:off x="636928" y="3580000"/>
-            <a:ext cx="1340000" cy="620000"/>
+          <p:cNvPr id="23" name="Text"/>
+          <p:cNvSpPr txBox="1"/>
+          <p:nvPr/>
+        </p:nvSpPr>
+        <p:spPr>
+          <a:xfrm>
+            <a:off x="636928" y="3600000"/>
+            <a:ext cx="1340000" cy="580000"/>
           </a:xfrm>
           <a:prstGeom prst="rect">
             <a:avLst/>
@@ -8901,14 +9327,14 @@
       </p:sp>
       <p:sp>
         <p:nvSpPr>
-          <p:cNvPr id="21" name="Shape"/>
+          <p:cNvPr id="24" name="Shape"/>
           <p:cNvSpPr/>
           <p:nvPr/>
         </p:nvSpPr>
         <p:spPr>
           <a:xfrm>
-            <a:off x="2166928" y="3580000"/>
-            <a:ext cx="1480000" cy="620000"/>
+            <a:off x="2166928" y="3600000"/>
+            <a:ext cx="1480000" cy="580000"/>
           </a:xfrm>
           <a:prstGeom prst="roundRect">
             <a:avLst>
@@ -8928,14 +9354,14 @@
       </p:sp>
       <p:sp>
         <p:nvSpPr>
-          <p:cNvPr id="22" name="Text"/>
-          <p:cNvSpPr txBox="1"/>
-          <p:nvPr/>
-        </p:nvSpPr>
-        <p:spPr>
-          <a:xfrm>
-            <a:off x="2236928" y="3580000"/>
-            <a:ext cx="1340000" cy="620000"/>
+          <p:cNvPr id="25" name="Text"/>
+          <p:cNvSpPr txBox="1"/>
+          <p:nvPr/>
+        </p:nvSpPr>
+        <p:spPr>
+          <a:xfrm>
+            <a:off x="2236928" y="3600000"/>
+            <a:ext cx="1340000" cy="580000"/>
           </a:xfrm>
           <a:prstGeom prst="rect">
             <a:avLst/>
@@ -8970,14 +9396,14 @@
       </p:sp>
       <p:sp>
         <p:nvSpPr>
-          <p:cNvPr id="23" name="Shape"/>
+          <p:cNvPr id="26" name="Shape"/>
           <p:cNvSpPr/>
           <p:nvPr/>
         </p:nvSpPr>
         <p:spPr>
           <a:xfrm>
-            <a:off x="3766928" y="3580000"/>
-            <a:ext cx="1480000" cy="620000"/>
+            <a:off x="3766928" y="3600000"/>
+            <a:ext cx="1480000" cy="580000"/>
           </a:xfrm>
           <a:prstGeom prst="roundRect">
             <a:avLst>
@@ -8997,14 +9423,14 @@
       </p:sp>
       <p:sp>
         <p:nvSpPr>
-          <p:cNvPr id="24" name="Text"/>
-          <p:cNvSpPr txBox="1"/>
-          <p:nvPr/>
-        </p:nvSpPr>
-        <p:spPr>
-          <a:xfrm>
-            <a:off x="3836928" y="3580000"/>
-            <a:ext cx="1340000" cy="620000"/>
+          <p:cNvPr id="27" name="Text"/>
+          <p:cNvSpPr txBox="1"/>
+          <p:nvPr/>
+        </p:nvSpPr>
+        <p:spPr>
+          <a:xfrm>
+            <a:off x="3836928" y="3600000"/>
+            <a:ext cx="1340000" cy="580000"/>
           </a:xfrm>
           <a:prstGeom prst="rect">
             <a:avLst/>
@@ -9039,14 +9465,14 @@
       </p:sp>
       <p:sp>
         <p:nvSpPr>
-          <p:cNvPr id="25" name="Shape"/>
+          <p:cNvPr id="28" name="Shape"/>
           <p:cNvSpPr/>
           <p:nvPr/>
         </p:nvSpPr>
         <p:spPr>
           <a:xfrm>
-            <a:off x="5366928" y="3580000"/>
-            <a:ext cx="1480000" cy="620000"/>
+            <a:off x="5366928" y="3600000"/>
+            <a:ext cx="1480000" cy="580000"/>
           </a:xfrm>
           <a:prstGeom prst="roundRect">
             <a:avLst>
@@ -9066,14 +9492,14 @@
       </p:sp>
       <p:sp>
         <p:nvSpPr>
-          <p:cNvPr id="26" name="Text"/>
-          <p:cNvSpPr txBox="1"/>
-          <p:nvPr/>
-        </p:nvSpPr>
-        <p:spPr>
-          <a:xfrm>
-            <a:off x="5436928" y="3580000"/>
-            <a:ext cx="1340000" cy="620000"/>
+          <p:cNvPr id="29" name="Text"/>
+          <p:cNvSpPr txBox="1"/>
+          <p:nvPr/>
+        </p:nvSpPr>
+        <p:spPr>
+          <a:xfrm>
+            <a:off x="5436928" y="3600000"/>
+            <a:ext cx="1340000" cy="580000"/>
           </a:xfrm>
           <a:prstGeom prst="rect">
             <a:avLst/>
@@ -9108,14 +9534,14 @@
       </p:sp>
       <p:sp>
         <p:nvSpPr>
-          <p:cNvPr id="27" name="Shape"/>
+          <p:cNvPr id="30" name="Shape"/>
           <p:cNvSpPr/>
           <p:nvPr/>
         </p:nvSpPr>
         <p:spPr>
           <a:xfrm>
-            <a:off x="6966928" y="3580000"/>
-            <a:ext cx="1480000" cy="620000"/>
+            <a:off x="6966928" y="3600000"/>
+            <a:ext cx="1480000" cy="580000"/>
           </a:xfrm>
           <a:prstGeom prst="roundRect">
             <a:avLst>
@@ -9135,14 +9561,14 @@
       </p:sp>
       <p:sp>
         <p:nvSpPr>
-          <p:cNvPr id="28" name="Text"/>
-          <p:cNvSpPr txBox="1"/>
-          <p:nvPr/>
-        </p:nvSpPr>
-        <p:spPr>
-          <a:xfrm>
-            <a:off x="7036928" y="3580000"/>
-            <a:ext cx="1340000" cy="620000"/>
+          <p:cNvPr id="31" name="Text"/>
+          <p:cNvSpPr txBox="1"/>
+          <p:nvPr/>
+        </p:nvSpPr>
+        <p:spPr>
+          <a:xfrm>
+            <a:off x="7036928" y="3600000"/>
+            <a:ext cx="1340000" cy="580000"/>
           </a:xfrm>
           <a:prstGeom prst="rect">
             <a:avLst/>
@@ -9177,14 +9603,14 @@
       </p:sp>
       <p:sp>
         <p:nvSpPr>
-          <p:cNvPr id="29" name="Shape"/>
+          <p:cNvPr id="32" name="Shape"/>
           <p:cNvSpPr/>
           <p:nvPr/>
         </p:nvSpPr>
         <p:spPr>
           <a:xfrm>
-            <a:off x="566928" y="4360000"/>
-            <a:ext cx="3525946" cy="1120000"/>
+            <a:off x="566928" y="4300000"/>
+            <a:ext cx="3525946" cy="1080000"/>
           </a:xfrm>
           <a:prstGeom prst="roundRect">
             <a:avLst>
@@ -9204,13 +9630,13 @@
       </p:sp>
       <p:sp>
         <p:nvSpPr>
-          <p:cNvPr id="30" name="Text"/>
-          <p:cNvSpPr txBox="1"/>
-          <p:nvPr/>
-        </p:nvSpPr>
-        <p:spPr>
-          <a:xfrm>
-            <a:off x="804672" y="4500000"/>
+          <p:cNvPr id="33" name="Text"/>
+          <p:cNvSpPr txBox="1"/>
+          <p:nvPr/>
+        </p:nvSpPr>
+        <p:spPr>
+          <a:xfrm>
+            <a:off x="804672" y="4420000"/>
             <a:ext cx="3050458" cy="300000"/>
           </a:xfrm>
           <a:prstGeom prst="rect">
@@ -9227,7 +9653,7 @@
               <a:buNone/>
             </a:pPr>
             <a:r>
-              <a:rPr lang="en-US" sz="1500" b="1" dirty="0">
+              <a:rPr lang="en-US" sz="1450" b="1" dirty="0">
                 <a:solidFill>
                   <a:srgbClr val="16262E"/>
                 </a:solidFill>
@@ -9237,19 +9663,19 @@
               </a:rPr>
               <a:t>Precisión</a:t>
             </a:r>
-            <a:endParaRPr lang="en-US" sz="1500" dirty="0"/>
-          </a:p>
-        </p:txBody>
-      </p:sp>
-      <p:sp>
-        <p:nvSpPr>
-          <p:cNvPr id="31" name="Text"/>
-          <p:cNvSpPr txBox="1"/>
-          <p:nvPr/>
-        </p:nvSpPr>
-        <p:spPr>
-          <a:xfrm>
-            <a:off x="804672" y="4820000"/>
+            <a:endParaRPr lang="en-US" sz="1450" dirty="0"/>
+          </a:p>
+        </p:txBody>
+      </p:sp>
+      <p:sp>
+        <p:nvSpPr>
+          <p:cNvPr id="34" name="Text"/>
+          <p:cNvSpPr txBox="1"/>
+          <p:nvPr/>
+        </p:nvSpPr>
+        <p:spPr>
+          <a:xfrm>
+            <a:off x="804672" y="4720000"/>
             <a:ext cx="3050458" cy="300000"/>
           </a:xfrm>
           <a:prstGeom prst="rect">
@@ -9266,7 +9692,7 @@
               <a:buNone/>
             </a:pPr>
             <a:r>
-              <a:rPr lang="en-US" sz="1500" b="1" dirty="0">
+              <a:rPr lang="en-US" sz="1450" b="1" dirty="0">
                 <a:solidFill>
                   <a:srgbClr val="C85A28"/>
                 </a:solidFill>
@@ -9276,19 +9702,19 @@
               </a:rPr>
               <a:t>5 de 6 = 0.83</a:t>
             </a:r>
-            <a:endParaRPr lang="en-US" sz="1500" dirty="0"/>
-          </a:p>
-        </p:txBody>
-      </p:sp>
-      <p:sp>
-        <p:nvSpPr>
-          <p:cNvPr id="32" name="Text"/>
-          <p:cNvSpPr txBox="1"/>
-          <p:nvPr/>
-        </p:nvSpPr>
-        <p:spPr>
-          <a:xfrm>
-            <a:off x="804672" y="5140000"/>
+            <a:endParaRPr lang="en-US" sz="1450" dirty="0"/>
+          </a:p>
+        </p:txBody>
+      </p:sp>
+      <p:sp>
+        <p:nvSpPr>
+          <p:cNvPr id="35" name="Text"/>
+          <p:cNvSpPr txBox="1"/>
+          <p:nvPr/>
+        </p:nvSpPr>
+        <p:spPr>
+          <a:xfrm>
+            <a:off x="804672" y="5030000"/>
             <a:ext cx="3050458" cy="280000"/>
           </a:xfrm>
           <a:prstGeom prst="rect">
@@ -9305,7 +9731,7 @@
               <a:buNone/>
             </a:pPr>
             <a:r>
-              <a:rPr lang="en-US" sz="1150" dirty="0">
+              <a:rPr lang="en-US" sz="1100" dirty="0">
                 <a:solidFill>
                   <a:srgbClr val="5A6B73"/>
                 </a:solidFill>
@@ -9315,20 +9741,20 @@
               </a:rPr>
               <a:t>De lo que le entregó, cuánto era cierto.</a:t>
             </a:r>
-            <a:endParaRPr lang="en-US" sz="1150" dirty="0"/>
-          </a:p>
-        </p:txBody>
-      </p:sp>
-      <p:sp>
-        <p:nvSpPr>
-          <p:cNvPr id="33" name="Shape"/>
+            <a:endParaRPr lang="en-US" sz="1100" dirty="0"/>
+          </a:p>
+        </p:txBody>
+      </p:sp>
+      <p:sp>
+        <p:nvSpPr>
+          <p:cNvPr id="36" name="Shape"/>
           <p:cNvSpPr/>
           <p:nvPr/>
         </p:nvSpPr>
         <p:spPr>
           <a:xfrm>
-            <a:off x="4332874" y="4360000"/>
-            <a:ext cx="3525946" cy="1120000"/>
+            <a:off x="4332874" y="4300000"/>
+            <a:ext cx="3525946" cy="1080000"/>
           </a:xfrm>
           <a:prstGeom prst="roundRect">
             <a:avLst>
@@ -9348,13 +9774,13 @@
       </p:sp>
       <p:sp>
         <p:nvSpPr>
-          <p:cNvPr id="34" name="Text"/>
-          <p:cNvSpPr txBox="1"/>
-          <p:nvPr/>
-        </p:nvSpPr>
-        <p:spPr>
-          <a:xfrm>
-            <a:off x="4570618" y="4500000"/>
+          <p:cNvPr id="37" name="Text"/>
+          <p:cNvSpPr txBox="1"/>
+          <p:nvPr/>
+        </p:nvSpPr>
+        <p:spPr>
+          <a:xfrm>
+            <a:off x="4570618" y="4420000"/>
             <a:ext cx="3050458" cy="300000"/>
           </a:xfrm>
           <a:prstGeom prst="rect">
@@ -9371,7 +9797,7 @@
               <a:buNone/>
             </a:pPr>
             <a:r>
-              <a:rPr lang="en-US" sz="1500" b="1" dirty="0">
+              <a:rPr lang="en-US" sz="1450" b="1" dirty="0">
                 <a:solidFill>
                   <a:srgbClr val="16262E"/>
                 </a:solidFill>
@@ -9381,19 +9807,19 @@
               </a:rPr>
               <a:t>Recuperación</a:t>
             </a:r>
-            <a:endParaRPr lang="en-US" sz="1500" dirty="0"/>
-          </a:p>
-        </p:txBody>
-      </p:sp>
-      <p:sp>
-        <p:nvSpPr>
-          <p:cNvPr id="35" name="Text"/>
-          <p:cNvSpPr txBox="1"/>
-          <p:nvPr/>
-        </p:nvSpPr>
-        <p:spPr>
-          <a:xfrm>
-            <a:off x="4570618" y="4820000"/>
+            <a:endParaRPr lang="en-US" sz="1450" dirty="0"/>
+          </a:p>
+        </p:txBody>
+      </p:sp>
+      <p:sp>
+        <p:nvSpPr>
+          <p:cNvPr id="38" name="Text"/>
+          <p:cNvSpPr txBox="1"/>
+          <p:nvPr/>
+        </p:nvSpPr>
+        <p:spPr>
+          <a:xfrm>
+            <a:off x="4570618" y="4720000"/>
             <a:ext cx="3050458" cy="300000"/>
           </a:xfrm>
           <a:prstGeom prst="rect">
@@ -9410,7 +9836,7 @@
               <a:buNone/>
             </a:pPr>
             <a:r>
-              <a:rPr lang="en-US" sz="1500" b="1" dirty="0">
+              <a:rPr lang="en-US" sz="1450" b="1" dirty="0">
                 <a:solidFill>
                   <a:srgbClr val="C85A28"/>
                 </a:solidFill>
@@ -9420,19 +9846,19 @@
               </a:rPr>
               <a:t>5 de 5 = 1.00</a:t>
             </a:r>
-            <a:endParaRPr lang="en-US" sz="1500" dirty="0"/>
-          </a:p>
-        </p:txBody>
-      </p:sp>
-      <p:sp>
-        <p:nvSpPr>
-          <p:cNvPr id="36" name="Text"/>
-          <p:cNvSpPr txBox="1"/>
-          <p:nvPr/>
-        </p:nvSpPr>
-        <p:spPr>
-          <a:xfrm>
-            <a:off x="4570618" y="5140000"/>
+            <a:endParaRPr lang="en-US" sz="1450" dirty="0"/>
+          </a:p>
+        </p:txBody>
+      </p:sp>
+      <p:sp>
+        <p:nvSpPr>
+          <p:cNvPr id="39" name="Text"/>
+          <p:cNvSpPr txBox="1"/>
+          <p:nvPr/>
+        </p:nvSpPr>
+        <p:spPr>
+          <a:xfrm>
+            <a:off x="4570618" y="5030000"/>
             <a:ext cx="3050458" cy="280000"/>
           </a:xfrm>
           <a:prstGeom prst="rect">
@@ -9449,7 +9875,7 @@
               <a:buNone/>
             </a:pPr>
             <a:r>
-              <a:rPr lang="en-US" sz="1150" dirty="0">
+              <a:rPr lang="en-US" sz="1100" dirty="0">
                 <a:solidFill>
                   <a:srgbClr val="5A6B73"/>
                 </a:solidFill>
@@ -9459,20 +9885,20 @@
               </a:rPr>
               <a:t>De lo que había, cuánto encontró.</a:t>
             </a:r>
-            <a:endParaRPr lang="en-US" sz="1150" dirty="0"/>
-          </a:p>
-        </p:txBody>
-      </p:sp>
-      <p:sp>
-        <p:nvSpPr>
-          <p:cNvPr id="37" name="Shape"/>
+            <a:endParaRPr lang="en-US" sz="1100" dirty="0"/>
+          </a:p>
+        </p:txBody>
+      </p:sp>
+      <p:sp>
+        <p:nvSpPr>
+          <p:cNvPr id="40" name="Shape"/>
           <p:cNvSpPr/>
           <p:nvPr/>
         </p:nvSpPr>
         <p:spPr>
           <a:xfrm>
-            <a:off x="8098820" y="4360000"/>
-            <a:ext cx="3525946" cy="1120000"/>
+            <a:off x="8098820" y="4300000"/>
+            <a:ext cx="3525946" cy="1080000"/>
           </a:xfrm>
           <a:prstGeom prst="roundRect">
             <a:avLst>
@@ -9492,13 +9918,13 @@
       </p:sp>
       <p:sp>
         <p:nvSpPr>
-          <p:cNvPr id="38" name="Text"/>
-          <p:cNvSpPr txBox="1"/>
-          <p:nvPr/>
-        </p:nvSpPr>
-        <p:spPr>
-          <a:xfrm>
-            <a:off x="8336564" y="4500000"/>
+          <p:cNvPr id="41" name="Text"/>
+          <p:cNvSpPr txBox="1"/>
+          <p:nvPr/>
+        </p:nvSpPr>
+        <p:spPr>
+          <a:xfrm>
+            <a:off x="8336564" y="4420000"/>
             <a:ext cx="3050458" cy="300000"/>
           </a:xfrm>
           <a:prstGeom prst="rect">
@@ -9515,7 +9941,7 @@
               <a:buNone/>
             </a:pPr>
             <a:r>
-              <a:rPr lang="en-US" sz="1500" b="1" dirty="0">
+              <a:rPr lang="en-US" sz="1450" b="1" dirty="0">
                 <a:solidFill>
                   <a:srgbClr val="16262E"/>
                 </a:solidFill>
@@ -9525,19 +9951,19 @@
               </a:rPr>
               <a:t>F1</a:t>
             </a:r>
-            <a:endParaRPr lang="en-US" sz="1500" dirty="0"/>
-          </a:p>
-        </p:txBody>
-      </p:sp>
-      <p:sp>
-        <p:nvSpPr>
-          <p:cNvPr id="39" name="Text"/>
-          <p:cNvSpPr txBox="1"/>
-          <p:nvPr/>
-        </p:nvSpPr>
-        <p:spPr>
-          <a:xfrm>
-            <a:off x="8336564" y="4820000"/>
+            <a:endParaRPr lang="en-US" sz="1450" dirty="0"/>
+          </a:p>
+        </p:txBody>
+      </p:sp>
+      <p:sp>
+        <p:nvSpPr>
+          <p:cNvPr id="42" name="Text"/>
+          <p:cNvSpPr txBox="1"/>
+          <p:nvPr/>
+        </p:nvSpPr>
+        <p:spPr>
+          <a:xfrm>
+            <a:off x="8336564" y="4720000"/>
             <a:ext cx="3050458" cy="300000"/>
           </a:xfrm>
           <a:prstGeom prst="rect">
@@ -9554,7 +9980,7 @@
               <a:buNone/>
             </a:pPr>
             <a:r>
-              <a:rPr lang="en-US" sz="1500" b="1" dirty="0">
+              <a:rPr lang="en-US" sz="1450" b="1" dirty="0">
                 <a:solidFill>
                   <a:srgbClr val="C85A28"/>
                 </a:solidFill>
@@ -9564,19 +9990,19 @@
               </a:rPr>
               <a:t>10 / 11 = 0.91</a:t>
             </a:r>
-            <a:endParaRPr lang="en-US" sz="1500" dirty="0"/>
-          </a:p>
-        </p:txBody>
-      </p:sp>
-      <p:sp>
-        <p:nvSpPr>
-          <p:cNvPr id="40" name="Text"/>
-          <p:cNvSpPr txBox="1"/>
-          <p:nvPr/>
-        </p:nvSpPr>
-        <p:spPr>
-          <a:xfrm>
-            <a:off x="8336564" y="5140000"/>
+            <a:endParaRPr lang="en-US" sz="1450" dirty="0"/>
+          </a:p>
+        </p:txBody>
+      </p:sp>
+      <p:sp>
+        <p:nvSpPr>
+          <p:cNvPr id="43" name="Text"/>
+          <p:cNvSpPr txBox="1"/>
+          <p:nvPr/>
+        </p:nvSpPr>
+        <p:spPr>
+          <a:xfrm>
+            <a:off x="8336564" y="5030000"/>
             <a:ext cx="3050458" cy="280000"/>
           </a:xfrm>
           <a:prstGeom prst="rect">
@@ -9593,7 +10019,7 @@
               <a:buNone/>
             </a:pPr>
             <a:r>
-              <a:rPr lang="en-US" sz="1150" dirty="0">
+              <a:rPr lang="en-US" sz="1100" dirty="0">
                 <a:solidFill>
                   <a:srgbClr val="5A6B73"/>
                 </a:solidFill>
@@ -9603,20 +10029,20 @@
               </a:rPr>
               <a:t>Las dos en un solo número, por media armónica.</a:t>
             </a:r>
-            <a:endParaRPr lang="en-US" sz="1150" dirty="0"/>
-          </a:p>
-        </p:txBody>
-      </p:sp>
-      <p:sp>
-        <p:nvSpPr>
-          <p:cNvPr id="41" name="Shape"/>
+            <a:endParaRPr lang="en-US" sz="1100" dirty="0"/>
+          </a:p>
+        </p:txBody>
+      </p:sp>
+      <p:sp>
+        <p:nvSpPr>
+          <p:cNvPr id="44" name="Shape"/>
           <p:cNvSpPr/>
           <p:nvPr/>
         </p:nvSpPr>
         <p:spPr>
           <a:xfrm>
-            <a:off x="566928" y="5600000"/>
-            <a:ext cx="11057839" cy="640000"/>
+            <a:off x="566928" y="5480000"/>
+            <a:ext cx="11057839" cy="700000"/>
           </a:xfrm>
           <a:prstGeom prst="roundRect">
             <a:avLst>
@@ -9636,14 +10062,14 @@
       </p:sp>
       <p:sp>
         <p:nvSpPr>
-          <p:cNvPr id="42" name="Text"/>
-          <p:cNvSpPr txBox="1"/>
-          <p:nvPr/>
-        </p:nvSpPr>
-        <p:spPr>
-          <a:xfrm>
-            <a:off x="804672" y="5600000"/>
-            <a:ext cx="10582351" cy="640000"/>
+          <p:cNvPr id="45" name="Text"/>
+          <p:cNvSpPr txBox="1"/>
+          <p:nvPr/>
+        </p:nvSpPr>
+        <p:spPr>
+          <a:xfrm>
+            <a:off x="804672" y="5480000"/>
+            <a:ext cx="10582351" cy="700000"/>
           </a:xfrm>
           <a:prstGeom prst="rect">
             <a:avLst/>
@@ -9678,13 +10104,13 @@
       </p:sp>
       <p:sp>
         <p:nvSpPr>
-          <p:cNvPr id="43" name="Text"/>
-          <p:cNvSpPr txBox="1"/>
-          <p:nvPr/>
-        </p:nvSpPr>
-        <p:spPr>
-          <a:xfrm>
-            <a:off x="566928" y="6320000"/>
+          <p:cNvPr id="46" name="Text"/>
+          <p:cNvSpPr txBox="1"/>
+          <p:nvPr/>
+        </p:nvSpPr>
+        <p:spPr>
+          <a:xfrm>
+            <a:off x="566928" y="6280000"/>
             <a:ext cx="11057839" cy="240000"/>
           </a:xfrm>
           <a:prstGeom prst="rect">
@@ -9815,7 +10241,7 @@
                 <a:ea typeface="Calibri" pitchFamily="34" charset="-122"/>
                 <a:cs typeface="Calibri" pitchFamily="34" charset="-120"/>
               </a:rPr>
-              <a:t>Es la falla que el RAG de ayer no resuelve: recuperar el fragmento correcto y sostener la afirmación son dos cosas distintas. Las dos citas son del marco normativo que todos comparten.</a:t>
+              <a:t>Recuperar el fragmento correcto y sostener la afirmación son dos cosas distintas.</a:t>
             </a:r>
             <a:endParaRPr lang="en-US" sz="1500" dirty="0"/>
           </a:p>
@@ -9829,8 +10255,113 @@
         </p:nvSpPr>
         <p:spPr>
           <a:xfrm>
-            <a:off x="566928" y="1880000"/>
-            <a:ext cx="5378919" cy="2680000"/>
+            <a:off x="566928" y="1700000"/>
+            <a:ext cx="11057839" cy="300000"/>
+          </a:xfrm>
+          <a:prstGeom prst="roundRect">
+            <a:avLst>
+              <a:gd name="adj" fmla="val 20000"/>
+            </a:avLst>
+          </a:prstGeom>
+          <a:solidFill>
+            <a:srgbClr val="D7E7E7"/>
+          </a:solidFill>
+          <a:ln w="12700">
+            <a:solidFill>
+              <a:srgbClr val="D7E7E7"/>
+            </a:solidFill>
+            <a:prstDash val="solid"/>
+          </a:ln>
+        </p:spPr>
+      </p:sp>
+      <p:sp>
+        <p:nvSpPr>
+          <p:cNvPr id="5" name="Text"/>
+          <p:cNvSpPr txBox="1"/>
+          <p:nvPr/>
+        </p:nvSpPr>
+        <p:spPr>
+          <a:xfrm>
+            <a:off x="766928" y="1700000"/>
+            <a:ext cx="1700000" cy="300000"/>
+          </a:xfrm>
+          <a:prstGeom prst="rect">
+            <a:avLst/>
+          </a:prstGeom>
+          <a:noFill/>
+          <a:ln/>
+        </p:spPr>
+        <p:txBody>
+          <a:bodyPr wrap="square" lIns="0" tIns="0" rIns="0" bIns="0" rtlCol="0" anchor="ctr"/>
+          <a:lstStyle/>
+          <a:p>
+            <a:pPr indent="0" marL="0">
+              <a:buNone/>
+            </a:pPr>
+            <a:r>
+              <a:rPr lang="en-US" sz="950" b="1" spc="100" kern="0" dirty="0">
+                <a:solidFill>
+                  <a:srgbClr val="2E7D7D"/>
+                </a:solidFill>
+                <a:latin typeface="Arial" pitchFamily="34" charset="0"/>
+                <a:ea typeface="Arial" pitchFamily="34" charset="-122"/>
+                <a:cs typeface="Arial" pitchFamily="34" charset="-120"/>
+              </a:rPr>
+              <a:t>DE DÓNDE SALE</a:t>
+            </a:r>
+            <a:endParaRPr lang="en-US" sz="950" dirty="0"/>
+          </a:p>
+        </p:txBody>
+      </p:sp>
+      <p:sp>
+        <p:nvSpPr>
+          <p:cNvPr id="6" name="Text"/>
+          <p:cNvSpPr txBox="1"/>
+          <p:nvPr/>
+        </p:nvSpPr>
+        <p:spPr>
+          <a:xfrm>
+            <a:off x="2516928" y="1700000"/>
+            <a:ext cx="8907839" cy="300000"/>
+          </a:xfrm>
+          <a:prstGeom prst="rect">
+            <a:avLst/>
+          </a:prstGeom>
+          <a:noFill/>
+          <a:ln/>
+        </p:spPr>
+        <p:txBody>
+          <a:bodyPr wrap="square" lIns="0" tIns="0" rIns="0" bIns="0" rtlCol="0" anchor="ctr"/>
+          <a:lstStyle/>
+          <a:p>
+            <a:pPr indent="0" marL="0">
+              <a:buNone/>
+            </a:pPr>
+            <a:r>
+              <a:rPr lang="en-US" sz="1100" dirty="0">
+                <a:solidFill>
+                  <a:srgbClr val="16262E"/>
+                </a:solidFill>
+                <a:latin typeface="Calibri" pitchFamily="34" charset="0"/>
+                <a:ea typeface="Calibri" pitchFamily="34" charset="-122"/>
+                <a:cs typeface="Calibri" pitchFamily="34" charset="-120"/>
+              </a:rPr>
+              <a:t>Reglas de Operación del PACC 2025, artículos 11 y 14, del mismo marco normativo común. No son de ninguna entidad.</a:t>
+            </a:r>
+            <a:endParaRPr lang="en-US" sz="1100" dirty="0"/>
+          </a:p>
+        </p:txBody>
+      </p:sp>
+      <p:sp>
+        <p:nvSpPr>
+          <p:cNvPr id="7" name="Shape"/>
+          <p:cNvSpPr/>
+          <p:nvPr/>
+        </p:nvSpPr>
+        <p:spPr>
+          <a:xfrm>
+            <a:off x="566928" y="2100000"/>
+            <a:ext cx="5378919" cy="2480000"/>
           </a:xfrm>
           <a:prstGeom prst="roundRect">
             <a:avLst>
@@ -9850,13 +10381,13 @@
       </p:sp>
       <p:sp>
         <p:nvSpPr>
-          <p:cNvPr id="5" name="Text"/>
-          <p:cNvSpPr txBox="1"/>
-          <p:nvPr/>
-        </p:nvSpPr>
-        <p:spPr>
-          <a:xfrm>
-            <a:off x="804672" y="2060000"/>
+          <p:cNvPr id="8" name="Text"/>
+          <p:cNvSpPr txBox="1"/>
+          <p:nvPr/>
+        </p:nvSpPr>
+        <p:spPr>
+          <a:xfrm>
+            <a:off x="804672" y="2250000"/>
             <a:ext cx="4903431" cy="260000"/>
           </a:xfrm>
           <a:prstGeom prst="rect">
@@ -9889,13 +10420,13 @@
       </p:sp>
       <p:sp>
         <p:nvSpPr>
-          <p:cNvPr id="6" name="Text"/>
-          <p:cNvSpPr txBox="1"/>
-          <p:nvPr/>
-        </p:nvSpPr>
-        <p:spPr>
-          <a:xfrm>
-            <a:off x="804672" y="2360000"/>
+          <p:cNvPr id="9" name="Text"/>
+          <p:cNvSpPr txBox="1"/>
+          <p:nvPr/>
+        </p:nvSpPr>
+        <p:spPr>
+          <a:xfrm>
+            <a:off x="804672" y="2540000"/>
             <a:ext cx="4903431" cy="320000"/>
           </a:xfrm>
           <a:prstGeom prst="rect">
@@ -9912,7 +10443,7 @@
               <a:buNone/>
             </a:pPr>
             <a:r>
-              <a:rPr lang="en-US" sz="1600" b="1" dirty="0">
+              <a:rPr lang="en-US" sz="1550" b="1" dirty="0">
                 <a:solidFill>
                   <a:srgbClr val="16262E"/>
                 </a:solidFill>
@@ -9922,20 +10453,20 @@
               </a:rPr>
               <a:t>La afirmación no agrega nada</a:t>
             </a:r>
-            <a:endParaRPr lang="en-US" sz="1600" dirty="0"/>
-          </a:p>
-        </p:txBody>
-      </p:sp>
-      <p:sp>
-        <p:nvSpPr>
-          <p:cNvPr id="7" name="Shape"/>
+            <a:endParaRPr lang="en-US" sz="1550" dirty="0"/>
+          </a:p>
+        </p:txBody>
+      </p:sp>
+      <p:sp>
+        <p:nvSpPr>
+          <p:cNvPr id="10" name="Shape"/>
           <p:cNvSpPr/>
           <p:nvPr/>
         </p:nvSpPr>
         <p:spPr>
           <a:xfrm>
-            <a:off x="804672" y="2760000"/>
-            <a:ext cx="4903431" cy="880000"/>
+            <a:off x="804672" y="2920000"/>
+            <a:ext cx="4903431" cy="800000"/>
           </a:xfrm>
           <a:prstGeom prst="roundRect">
             <a:avLst>
@@ -9955,14 +10486,14 @@
       </p:sp>
       <p:sp>
         <p:nvSpPr>
-          <p:cNvPr id="8" name="Text"/>
-          <p:cNvSpPr txBox="1"/>
-          <p:nvPr/>
-        </p:nvSpPr>
-        <p:spPr>
-          <a:xfrm>
-            <a:off x="946928" y="2760000"/>
-            <a:ext cx="4618919" cy="880000"/>
+          <p:cNvPr id="11" name="Text"/>
+          <p:cNvSpPr txBox="1"/>
+          <p:nvPr/>
+        </p:nvSpPr>
+        <p:spPr>
+          <a:xfrm>
+            <a:off x="946928" y="2920000"/>
+            <a:ext cx="4618919" cy="800000"/>
           </a:xfrm>
           <a:prstGeom prst="rect">
             <a:avLst/>
@@ -9976,12 +10507,12 @@
           <a:p>
             <a:pPr indent="0" marL="0">
               <a:lnSpc>
-                <a:spcPct val="106000"/>
+                <a:spcPct val="105000"/>
               </a:lnSpc>
               <a:buNone/>
             </a:pPr>
             <a:r>
-              <a:rPr lang="en-US" sz="1200" i="1" dirty="0">
+              <a:rPr lang="en-US" sz="1150" i="1" dirty="0">
                 <a:solidFill>
                   <a:srgbClr val="16262E"/>
                 </a:solidFill>
@@ -9991,19 +10522,19 @@
               </a:rPr>
               <a:t>«El Programa es incompatible con otros programas federales de transferencia monetaria dirigidos a la misma persona cuidadora principal por el mismo concepto.» Artículo 11.</a:t>
             </a:r>
-            <a:endParaRPr lang="en-US" sz="1200" dirty="0"/>
-          </a:p>
-        </p:txBody>
-      </p:sp>
-      <p:sp>
-        <p:nvSpPr>
-          <p:cNvPr id="9" name="Text"/>
-          <p:cNvSpPr txBox="1"/>
-          <p:nvPr/>
-        </p:nvSpPr>
-        <p:spPr>
-          <a:xfrm>
-            <a:off x="804672" y="3760000"/>
+            <a:endParaRPr lang="en-US" sz="1150" dirty="0"/>
+          </a:p>
+        </p:txBody>
+      </p:sp>
+      <p:sp>
+        <p:nvSpPr>
+          <p:cNvPr id="12" name="Text"/>
+          <p:cNvSpPr txBox="1"/>
+          <p:nvPr/>
+        </p:nvSpPr>
+        <p:spPr>
+          <a:xfrm>
+            <a:off x="804672" y="3800000"/>
             <a:ext cx="4903431" cy="700000"/>
           </a:xfrm>
           <a:prstGeom prst="rect">
@@ -10018,12 +10549,12 @@
           <a:p>
             <a:pPr indent="0" marL="0">
               <a:lnSpc>
-                <a:spcPct val="106000"/>
+                <a:spcPct val="105000"/>
               </a:lnSpc>
               <a:buNone/>
             </a:pPr>
             <a:r>
-              <a:rPr lang="en-US" sz="1250" dirty="0">
+              <a:rPr lang="en-US" sz="1200" dirty="0">
                 <a:solidFill>
                   <a:srgbClr val="16262E"/>
                 </a:solidFill>
@@ -10033,20 +10564,20 @@
               </a:rPr>
               <a:t>Afirmación: el Programa no puede concurrir con otro apoyo federal en efectivo para la misma persona cuidadora y por el mismo concepto. Quien lea solo la cita llega a lo mismo.</a:t>
             </a:r>
-            <a:endParaRPr lang="en-US" sz="1250" dirty="0"/>
-          </a:p>
-        </p:txBody>
-      </p:sp>
-      <p:sp>
-        <p:nvSpPr>
-          <p:cNvPr id="10" name="Shape"/>
+            <a:endParaRPr lang="en-US" sz="1200" dirty="0"/>
+          </a:p>
+        </p:txBody>
+      </p:sp>
+      <p:sp>
+        <p:nvSpPr>
+          <p:cNvPr id="13" name="Shape"/>
           <p:cNvSpPr/>
           <p:nvPr/>
         </p:nvSpPr>
         <p:spPr>
           <a:xfrm>
-            <a:off x="6245847" y="1880000"/>
-            <a:ext cx="5378919" cy="2680000"/>
+            <a:off x="6245847" y="2100000"/>
+            <a:ext cx="5378919" cy="2480000"/>
           </a:xfrm>
           <a:prstGeom prst="roundRect">
             <a:avLst>
@@ -10066,13 +10597,13 @@
       </p:sp>
       <p:sp>
         <p:nvSpPr>
-          <p:cNvPr id="11" name="Text"/>
-          <p:cNvSpPr txBox="1"/>
-          <p:nvPr/>
-        </p:nvSpPr>
-        <p:spPr>
-          <a:xfrm>
-            <a:off x="6483591" y="2060000"/>
+          <p:cNvPr id="14" name="Text"/>
+          <p:cNvSpPr txBox="1"/>
+          <p:nvPr/>
+        </p:nvSpPr>
+        <p:spPr>
+          <a:xfrm>
+            <a:off x="6483591" y="2250000"/>
             <a:ext cx="4903431" cy="260000"/>
           </a:xfrm>
           <a:prstGeom prst="rect">
@@ -10105,13 +10636,13 @@
       </p:sp>
       <p:sp>
         <p:nvSpPr>
-          <p:cNvPr id="12" name="Text"/>
-          <p:cNvSpPr txBox="1"/>
-          <p:nvPr/>
-        </p:nvSpPr>
-        <p:spPr>
-          <a:xfrm>
-            <a:off x="6483591" y="2360000"/>
+          <p:cNvPr id="15" name="Text"/>
+          <p:cNvSpPr txBox="1"/>
+          <p:nvPr/>
+        </p:nvSpPr>
+        <p:spPr>
+          <a:xfrm>
+            <a:off x="6483591" y="2540000"/>
             <a:ext cx="4903431" cy="320000"/>
           </a:xfrm>
           <a:prstGeom prst="rect">
@@ -10128,7 +10659,7 @@
               <a:buNone/>
             </a:pPr>
             <a:r>
-              <a:rPr lang="en-US" sz="1600" b="1" dirty="0">
+              <a:rPr lang="en-US" sz="1550" b="1" dirty="0">
                 <a:solidFill>
                   <a:srgbClr val="16262E"/>
                 </a:solidFill>
@@ -10138,20 +10669,20 @@
               </a:rPr>
               <a:t>La afirmación salta a un juicio</a:t>
             </a:r>
-            <a:endParaRPr lang="en-US" sz="1600" dirty="0"/>
-          </a:p>
-        </p:txBody>
-      </p:sp>
-      <p:sp>
-        <p:nvSpPr>
-          <p:cNvPr id="13" name="Shape"/>
+            <a:endParaRPr lang="en-US" sz="1550" dirty="0"/>
+          </a:p>
+        </p:txBody>
+      </p:sp>
+      <p:sp>
+        <p:nvSpPr>
+          <p:cNvPr id="16" name="Shape"/>
           <p:cNvSpPr/>
           <p:nvPr/>
         </p:nvSpPr>
         <p:spPr>
           <a:xfrm>
-            <a:off x="6483591" y="2760000"/>
-            <a:ext cx="4903431" cy="880000"/>
+            <a:off x="6483591" y="2920000"/>
+            <a:ext cx="4903431" cy="800000"/>
           </a:xfrm>
           <a:prstGeom prst="roundRect">
             <a:avLst>
@@ -10171,14 +10702,14 @@
       </p:sp>
       <p:sp>
         <p:nvSpPr>
-          <p:cNvPr id="14" name="Text"/>
-          <p:cNvSpPr txBox="1"/>
-          <p:nvPr/>
-        </p:nvSpPr>
-        <p:spPr>
-          <a:xfrm>
-            <a:off x="6625847" y="2760000"/>
-            <a:ext cx="4618919" cy="880000"/>
+          <p:cNvPr id="17" name="Text"/>
+          <p:cNvSpPr txBox="1"/>
+          <p:nvPr/>
+        </p:nvSpPr>
+        <p:spPr>
+          <a:xfrm>
+            <a:off x="6625847" y="2920000"/>
+            <a:ext cx="4618919" cy="800000"/>
           </a:xfrm>
           <a:prstGeom prst="rect">
             <a:avLst/>
@@ -10192,12 +10723,12 @@
           <a:p>
             <a:pPr indent="0" marL="0">
               <a:lnSpc>
-                <a:spcPct val="106000"/>
+                <a:spcPct val="105000"/>
               </a:lnSpc>
               <a:buNone/>
             </a:pPr>
             <a:r>
-              <a:rPr lang="en-US" sz="1200" i="1" dirty="0">
+              <a:rPr lang="en-US" sz="1150" i="1" dirty="0">
                 <a:solidFill>
                   <a:srgbClr val="16262E"/>
                 </a:solidFill>
@@ -10207,19 +10738,19 @@
               </a:rPr>
               <a:t>«El monto del apoyo es de 3,100 pesos bimestrales.» Artículo 14.</a:t>
             </a:r>
-            <a:endParaRPr lang="en-US" sz="1200" dirty="0"/>
-          </a:p>
-        </p:txBody>
-      </p:sp>
-      <p:sp>
-        <p:nvSpPr>
-          <p:cNvPr id="15" name="Text"/>
-          <p:cNvSpPr txBox="1"/>
-          <p:nvPr/>
-        </p:nvSpPr>
-        <p:spPr>
-          <a:xfrm>
-            <a:off x="6483591" y="3760000"/>
+            <a:endParaRPr lang="en-US" sz="1150" dirty="0"/>
+          </a:p>
+        </p:txBody>
+      </p:sp>
+      <p:sp>
+        <p:nvSpPr>
+          <p:cNvPr id="18" name="Text"/>
+          <p:cNvSpPr txBox="1"/>
+          <p:nvPr/>
+        </p:nvSpPr>
+        <p:spPr>
+          <a:xfrm>
+            <a:off x="6483591" y="3800000"/>
             <a:ext cx="4903431" cy="700000"/>
           </a:xfrm>
           <a:prstGeom prst="rect">
@@ -10234,12 +10765,12 @@
           <a:p>
             <a:pPr indent="0" marL="0">
               <a:lnSpc>
-                <a:spcPct val="106000"/>
+                <a:spcPct val="105000"/>
               </a:lnSpc>
               <a:buNone/>
             </a:pPr>
             <a:r>
-              <a:rPr lang="en-US" sz="1250" dirty="0">
+              <a:rPr lang="en-US" sz="1200" dirty="0">
                 <a:solidFill>
                   <a:srgbClr val="16262E"/>
                 </a:solidFill>
@@ -10249,20 +10780,20 @@
               </a:rPr>
               <a:t>Afirmación: el monto del apoyo es suficiente para cubrir el cuidado de una persona. La cita fija una cantidad y no dice nada sobre suficiencia. La afirmación dice más que su evidencia.</a:t>
             </a:r>
-            <a:endParaRPr lang="en-US" sz="1250" dirty="0"/>
-          </a:p>
-        </p:txBody>
-      </p:sp>
-      <p:sp>
-        <p:nvSpPr>
-          <p:cNvPr id="16" name="Shape"/>
+            <a:endParaRPr lang="en-US" sz="1200" dirty="0"/>
+          </a:p>
+        </p:txBody>
+      </p:sp>
+      <p:sp>
+        <p:nvSpPr>
+          <p:cNvPr id="19" name="Shape"/>
           <p:cNvSpPr/>
           <p:nvPr/>
         </p:nvSpPr>
         <p:spPr>
           <a:xfrm>
-            <a:off x="566928" y="4700000"/>
-            <a:ext cx="11057839" cy="860000"/>
+            <a:off x="566928" y="4660000"/>
+            <a:ext cx="11057839" cy="800000"/>
           </a:xfrm>
           <a:prstGeom prst="roundRect">
             <a:avLst>
@@ -10282,13 +10813,13 @@
       </p:sp>
       <p:sp>
         <p:nvSpPr>
-          <p:cNvPr id="17" name="Text"/>
-          <p:cNvSpPr txBox="1"/>
-          <p:nvPr/>
-        </p:nvSpPr>
-        <p:spPr>
-          <a:xfrm>
-            <a:off x="804672" y="4860000"/>
+          <p:cNvPr id="20" name="Text"/>
+          <p:cNvSpPr txBox="1"/>
+          <p:nvPr/>
+        </p:nvSpPr>
+        <p:spPr>
+          <a:xfrm>
+            <a:off x="804672" y="4790000"/>
             <a:ext cx="10582351" cy="280000"/>
           </a:xfrm>
           <a:prstGeom prst="rect">
@@ -10321,13 +10852,13 @@
       </p:sp>
       <p:sp>
         <p:nvSpPr>
-          <p:cNvPr id="18" name="Text"/>
-          <p:cNvSpPr txBox="1"/>
-          <p:nvPr/>
-        </p:nvSpPr>
-        <p:spPr>
-          <a:xfrm>
-            <a:off x="804672" y="5140000"/>
+          <p:cNvPr id="21" name="Text"/>
+          <p:cNvSpPr txBox="1"/>
+          <p:nvPr/>
+        </p:nvSpPr>
+        <p:spPr>
+          <a:xfrm>
+            <a:off x="804672" y="5060000"/>
             <a:ext cx="10582351" cy="340000"/>
           </a:xfrm>
           <a:prstGeom prst="rect">
@@ -10342,12 +10873,12 @@
           <a:p>
             <a:pPr indent="0" marL="0">
               <a:lnSpc>
-                <a:spcPct val="106000"/>
+                <a:spcPct val="105000"/>
               </a:lnSpc>
               <a:buNone/>
             </a:pPr>
             <a:r>
-              <a:rPr lang="en-US" sz="1350" dirty="0">
+              <a:rPr lang="en-US" sz="1300" dirty="0">
                 <a:solidFill>
                   <a:srgbClr val="16262E"/>
                 </a:solidFill>
@@ -10357,20 +10888,20 @@
               </a:rPr>
               <a:t>¿Alguien que lea solo esta cita, sin conocer el expediente, llegaría a esta afirmación? Si la respuesta es no, la fila no está trazada, por más que la cita sea textual y esté bien copiada.</a:t>
             </a:r>
-            <a:endParaRPr lang="en-US" sz="1350" dirty="0"/>
-          </a:p>
-        </p:txBody>
-      </p:sp>
-      <p:sp>
-        <p:nvSpPr>
-          <p:cNvPr id="19" name="Shape"/>
+            <a:endParaRPr lang="en-US" sz="1300" dirty="0"/>
+          </a:p>
+        </p:txBody>
+      </p:sp>
+      <p:sp>
+        <p:nvSpPr>
+          <p:cNvPr id="22" name="Shape"/>
           <p:cNvSpPr/>
           <p:nvPr/>
         </p:nvSpPr>
         <p:spPr>
           <a:xfrm>
-            <a:off x="566928" y="5680000"/>
-            <a:ext cx="11057839" cy="560000"/>
+            <a:off x="566928" y="5540000"/>
+            <a:ext cx="11057839" cy="620000"/>
           </a:xfrm>
           <a:prstGeom prst="roundRect">
             <a:avLst>
@@ -10390,14 +10921,14 @@
       </p:sp>
       <p:sp>
         <p:nvSpPr>
-          <p:cNvPr id="20" name="Text"/>
-          <p:cNvSpPr txBox="1"/>
-          <p:nvPr/>
-        </p:nvSpPr>
-        <p:spPr>
-          <a:xfrm>
-            <a:off x="804672" y="5680000"/>
-            <a:ext cx="10582351" cy="560000"/>
+          <p:cNvPr id="23" name="Text"/>
+          <p:cNvSpPr txBox="1"/>
+          <p:nvPr/>
+        </p:nvSpPr>
+        <p:spPr>
+          <a:xfrm>
+            <a:off x="804672" y="5540000"/>
+            <a:ext cx="10582351" cy="620000"/>
           </a:xfrm>
           <a:prstGeom prst="rect">
             <a:avLst/>
@@ -10432,13 +10963,13 @@
       </p:sp>
       <p:sp>
         <p:nvSpPr>
-          <p:cNvPr id="21" name="Text"/>
-          <p:cNvSpPr txBox="1"/>
-          <p:nvPr/>
-        </p:nvSpPr>
-        <p:spPr>
-          <a:xfrm>
-            <a:off x="566928" y="6320000"/>
+          <p:cNvPr id="24" name="Text"/>
+          <p:cNvSpPr txBox="1"/>
+          <p:nvPr/>
+        </p:nvSpPr>
+        <p:spPr>
+          <a:xfrm>
+            <a:off x="566928" y="6260000"/>
             <a:ext cx="11057839" cy="240000"/>
           </a:xfrm>
           <a:prstGeom prst="rect">
@@ -11803,7 +12334,7 @@
                 <a:ea typeface="Arial" pitchFamily="34" charset="-122"/>
                 <a:cs typeface="Arial" pitchFamily="34" charset="-120"/>
               </a:rPr>
-              <a:t>9:00 a 11:30</a:t>
+              <a:t>9:00 a 11:40</a:t>
             </a:r>
             <a:endParaRPr lang="en-US" sz="1200" dirty="0"/>
           </a:p>
@@ -11911,7 +12442,7 @@
                 <a:ea typeface="Calibri" pitchFamily="34" charset="-122"/>
                 <a:cs typeface="Calibri" pitchFamily="34" charset="-120"/>
               </a:rPr>
-              <a:t>Dónde estamos: lo que el Módulo II ya sabe hacer</a:t>
+              <a:t>Dónde estamos y con qué documentos hemos trabajado</a:t>
             </a:r>
             <a:endParaRPr lang="en-US" sz="1350" dirty="0"/>
           </a:p>
@@ -11977,7 +12508,7 @@
                 <a:ea typeface="Arial" pitchFamily="34" charset="-122"/>
                 <a:cs typeface="Arial" pitchFamily="34" charset="-120"/>
               </a:rPr>
-              <a:t>9:08</a:t>
+              <a:t>9:10</a:t>
             </a:r>
             <a:endParaRPr lang="en-US" sz="1300" dirty="0"/>
           </a:p>
@@ -12019,7 +12550,7 @@
                 <a:ea typeface="Calibri" pitchFamily="34" charset="-122"/>
                 <a:cs typeface="Calibri" pitchFamily="34" charset="-120"/>
               </a:rPr>
-              <a:t>Cómo se prueba un hallazgo: las tres fallas</a:t>
+              <a:t>Las tres fallas, y el expediente de hoy por dentro</a:t>
             </a:r>
             <a:endParaRPr lang="en-US" sz="1350" dirty="0"/>
           </a:p>
@@ -12085,7 +12616,7 @@
                 <a:ea typeface="Arial" pitchFamily="34" charset="-122"/>
                 <a:cs typeface="Arial" pitchFamily="34" charset="-120"/>
               </a:rPr>
-              <a:t>9:25</a:t>
+              <a:t>9:20</a:t>
             </a:r>
             <a:endParaRPr lang="en-US" sz="1300" dirty="0"/>
           </a:p>
@@ -12127,7 +12658,7 @@
                 <a:ea typeface="Calibri" pitchFamily="34" charset="-122"/>
                 <a:cs typeface="Calibri" pitchFamily="34" charset="-120"/>
               </a:rPr>
-              <a:t>Cómo se miden: extracción y costo del error</a:t>
+              <a:t>Medir la extracción: precisión, recuperación y costo del error</a:t>
             </a:r>
             <a:endParaRPr lang="en-US" sz="1350" dirty="0"/>
           </a:p>
@@ -12193,7 +12724,7 @@
                 <a:ea typeface="Arial" pitchFamily="34" charset="-122"/>
                 <a:cs typeface="Arial" pitchFamily="34" charset="-120"/>
               </a:rPr>
-              <a:t>9:40</a:t>
+              <a:t>9:33</a:t>
             </a:r>
             <a:endParaRPr lang="en-US" sz="1300" dirty="0"/>
           </a:p>
@@ -12235,7 +12766,7 @@
                 <a:ea typeface="Calibri" pitchFamily="34" charset="-122"/>
                 <a:cs typeface="Calibri" pitchFamily="34" charset="-120"/>
               </a:rPr>
-              <a:t>Atribución, generalización y acuerdo</a:t>
+              <a:t>Atribución y generalización</a:t>
             </a:r>
             <a:endParaRPr lang="en-US" sz="1350" dirty="0"/>
           </a:p>
@@ -12250,6 +12781,114 @@
         <p:spPr>
           <a:xfrm>
             <a:off x="6260440" y="1408176"/>
+            <a:ext cx="5364328" cy="1081278"/>
+          </a:xfrm>
+          <a:prstGeom prst="roundRect">
+            <a:avLst>
+              <a:gd name="adj" fmla="val 2933"/>
+            </a:avLst>
+          </a:prstGeom>
+          <a:solidFill>
+            <a:srgbClr val="F2F5F6"/>
+          </a:solidFill>
+          <a:ln w="12700">
+            <a:solidFill>
+              <a:srgbClr val="F2F5F6"/>
+            </a:solidFill>
+            <a:prstDash val="solid"/>
+          </a:ln>
+        </p:spPr>
+      </p:sp>
+      <p:sp>
+        <p:nvSpPr>
+          <p:cNvPr id="18" name="Text"/>
+          <p:cNvSpPr txBox="1"/>
+          <p:nvPr/>
+        </p:nvSpPr>
+        <p:spPr>
+          <a:xfrm>
+            <a:off x="6479896" y="1408176"/>
+            <a:ext cx="1371600" cy="1081278"/>
+          </a:xfrm>
+          <a:prstGeom prst="rect">
+            <a:avLst/>
+          </a:prstGeom>
+          <a:noFill/>
+          <a:ln/>
+        </p:spPr>
+        <p:txBody>
+          <a:bodyPr wrap="square" lIns="0" tIns="0" rIns="0" bIns="0" rtlCol="0" anchor="ctr"/>
+          <a:lstStyle/>
+          <a:p>
+            <a:pPr indent="0" marL="0">
+              <a:buNone/>
+            </a:pPr>
+            <a:r>
+              <a:rPr lang="en-US" sz="1300" b="1" dirty="0">
+                <a:solidFill>
+                  <a:srgbClr val="2E7D7D"/>
+                </a:solidFill>
+                <a:latin typeface="Arial" pitchFamily="34" charset="0"/>
+                <a:ea typeface="Arial" pitchFamily="34" charset="-122"/>
+                <a:cs typeface="Arial" pitchFamily="34" charset="-120"/>
+              </a:rPr>
+              <a:t>9:45</a:t>
+            </a:r>
+            <a:endParaRPr lang="en-US" sz="1300" dirty="0"/>
+          </a:p>
+        </p:txBody>
+      </p:sp>
+      <p:sp>
+        <p:nvSpPr>
+          <p:cNvPr id="19" name="Text"/>
+          <p:cNvSpPr txBox="1"/>
+          <p:nvPr/>
+        </p:nvSpPr>
+        <p:spPr>
+          <a:xfrm>
+            <a:off x="7888072" y="1463040"/>
+            <a:ext cx="3517240" cy="971550"/>
+          </a:xfrm>
+          <a:prstGeom prst="rect">
+            <a:avLst/>
+          </a:prstGeom>
+          <a:noFill/>
+          <a:ln/>
+        </p:spPr>
+        <p:txBody>
+          <a:bodyPr wrap="square" lIns="0" tIns="0" rIns="0" bIns="0" rtlCol="0" anchor="ctr"/>
+          <a:lstStyle/>
+          <a:p>
+            <a:pPr indent="0" marL="0">
+              <a:lnSpc>
+                <a:spcPct val="105000"/>
+              </a:lnSpc>
+              <a:buNone/>
+            </a:pPr>
+            <a:r>
+              <a:rPr lang="en-US" sz="1350" dirty="0">
+                <a:solidFill>
+                  <a:srgbClr val="16262E"/>
+                </a:solidFill>
+                <a:latin typeface="Calibri" pitchFamily="34" charset="0"/>
+                <a:ea typeface="Calibri" pitchFamily="34" charset="-122"/>
+                <a:cs typeface="Calibri" pitchFamily="34" charset="-120"/>
+              </a:rPr>
+              <a:t>El acuerdo entre codificadores, y la matriz de evidencia</a:t>
+            </a:r>
+            <a:endParaRPr lang="en-US" sz="1350" dirty="0"/>
+          </a:p>
+        </p:txBody>
+      </p:sp>
+      <p:sp>
+        <p:nvSpPr>
+          <p:cNvPr id="20" name="Shape"/>
+          <p:cNvSpPr/>
+          <p:nvPr/>
+        </p:nvSpPr>
+        <p:spPr>
+          <a:xfrm>
+            <a:off x="6260440" y="2635758"/>
             <a:ext cx="5364328" cy="1081278"/>
           </a:xfrm>
           <a:prstGeom prst="roundRect">
@@ -12270,13 +12909,13 @@
       </p:sp>
       <p:sp>
         <p:nvSpPr>
-          <p:cNvPr id="18" name="Text"/>
-          <p:cNvSpPr txBox="1"/>
-          <p:nvPr/>
-        </p:nvSpPr>
-        <p:spPr>
-          <a:xfrm>
-            <a:off x="6479896" y="1408176"/>
+          <p:cNvPr id="21" name="Text"/>
+          <p:cNvSpPr txBox="1"/>
+          <p:nvPr/>
+        </p:nvSpPr>
+        <p:spPr>
+          <a:xfrm>
+            <a:off x="6479896" y="2635758"/>
             <a:ext cx="1371600" cy="1081278"/>
           </a:xfrm>
           <a:prstGeom prst="rect">
@@ -12301,7 +12940,7 @@
                 <a:ea typeface="Arial" pitchFamily="34" charset="-122"/>
                 <a:cs typeface="Arial" pitchFamily="34" charset="-120"/>
               </a:rPr>
-              <a:t>10:00</a:t>
+              <a:t>10:10</a:t>
             </a:r>
             <a:endParaRPr lang="en-US" sz="1300" dirty="0"/>
           </a:p>
@@ -12309,13 +12948,13 @@
       </p:sp>
       <p:sp>
         <p:nvSpPr>
-          <p:cNvPr id="19" name="Text"/>
-          <p:cNvSpPr txBox="1"/>
-          <p:nvPr/>
-        </p:nvSpPr>
-        <p:spPr>
-          <a:xfrm>
-            <a:off x="7888072" y="1463040"/>
+          <p:cNvPr id="22" name="Text"/>
+          <p:cNvSpPr txBox="1"/>
+          <p:nvPr/>
+        </p:nvSpPr>
+        <p:spPr>
+          <a:xfrm>
+            <a:off x="7888072" y="2690622"/>
             <a:ext cx="3517240" cy="971550"/>
           </a:xfrm>
           <a:prstGeom prst="rect">
@@ -12351,13 +12990,13 @@
       </p:sp>
       <p:sp>
         <p:nvSpPr>
-          <p:cNvPr id="20" name="Shape"/>
+          <p:cNvPr id="23" name="Shape"/>
           <p:cNvSpPr/>
           <p:nvPr/>
         </p:nvSpPr>
         <p:spPr>
           <a:xfrm>
-            <a:off x="6260440" y="2635758"/>
+            <a:off x="6260440" y="3863340"/>
             <a:ext cx="5364328" cy="1081278"/>
           </a:xfrm>
           <a:prstGeom prst="roundRect">
@@ -12378,13 +13017,13 @@
       </p:sp>
       <p:sp>
         <p:nvSpPr>
-          <p:cNvPr id="21" name="Text"/>
-          <p:cNvSpPr txBox="1"/>
-          <p:nvPr/>
-        </p:nvSpPr>
-        <p:spPr>
-          <a:xfrm>
-            <a:off x="6479896" y="2635758"/>
+          <p:cNvPr id="24" name="Text"/>
+          <p:cNvSpPr txBox="1"/>
+          <p:nvPr/>
+        </p:nvSpPr>
+        <p:spPr>
+          <a:xfrm>
+            <a:off x="6479896" y="3863340"/>
             <a:ext cx="1371600" cy="1081278"/>
           </a:xfrm>
           <a:prstGeom prst="rect">
@@ -12409,7 +13048,7 @@
                 <a:ea typeface="Arial" pitchFamily="34" charset="-122"/>
                 <a:cs typeface="Arial" pitchFamily="34" charset="-120"/>
               </a:rPr>
-              <a:t>10:10</a:t>
+              <a:t>10:20</a:t>
             </a:r>
             <a:endParaRPr lang="en-US" sz="1300" dirty="0"/>
           </a:p>
@@ -12417,13 +13056,13 @@
       </p:sp>
       <p:sp>
         <p:nvSpPr>
-          <p:cNvPr id="22" name="Text"/>
-          <p:cNvSpPr txBox="1"/>
-          <p:nvPr/>
-        </p:nvSpPr>
-        <p:spPr>
-          <a:xfrm>
-            <a:off x="7888072" y="2690622"/>
+          <p:cNvPr id="25" name="Text"/>
+          <p:cNvSpPr txBox="1"/>
+          <p:nvPr/>
+        </p:nvSpPr>
+        <p:spPr>
+          <a:xfrm>
+            <a:off x="7888072" y="3918204"/>
             <a:ext cx="3517240" cy="971550"/>
           </a:xfrm>
           <a:prstGeom prst="rect">
@@ -12459,13 +13098,13 @@
       </p:sp>
       <p:sp>
         <p:nvSpPr>
-          <p:cNvPr id="23" name="Shape"/>
+          <p:cNvPr id="26" name="Shape"/>
           <p:cNvSpPr/>
           <p:nvPr/>
         </p:nvSpPr>
         <p:spPr>
           <a:xfrm>
-            <a:off x="6260440" y="3863340"/>
+            <a:off x="6260440" y="5090922"/>
             <a:ext cx="5364328" cy="1081278"/>
           </a:xfrm>
           <a:prstGeom prst="roundRect">
@@ -12486,13 +13125,13 @@
       </p:sp>
       <p:sp>
         <p:nvSpPr>
-          <p:cNvPr id="24" name="Text"/>
-          <p:cNvSpPr txBox="1"/>
-          <p:nvPr/>
-        </p:nvSpPr>
-        <p:spPr>
-          <a:xfrm>
-            <a:off x="6479896" y="3863340"/>
+          <p:cNvPr id="27" name="Text"/>
+          <p:cNvSpPr txBox="1"/>
+          <p:nvPr/>
+        </p:nvSpPr>
+        <p:spPr>
+          <a:xfrm>
+            <a:off x="6479896" y="5090922"/>
             <a:ext cx="1371600" cy="1081278"/>
           </a:xfrm>
           <a:prstGeom prst="rect">
@@ -12517,7 +13156,7 @@
                 <a:ea typeface="Arial" pitchFamily="34" charset="-122"/>
                 <a:cs typeface="Arial" pitchFamily="34" charset="-120"/>
               </a:rPr>
-              <a:t>11:12</a:t>
+              <a:t>11:22</a:t>
             </a:r>
             <a:endParaRPr lang="en-US" sz="1300" dirty="0"/>
           </a:p>
@@ -12525,13 +13164,13 @@
       </p:sp>
       <p:sp>
         <p:nvSpPr>
-          <p:cNvPr id="25" name="Text"/>
-          <p:cNvSpPr txBox="1"/>
-          <p:nvPr/>
-        </p:nvSpPr>
-        <p:spPr>
-          <a:xfrm>
-            <a:off x="7888072" y="3918204"/>
+          <p:cNvPr id="28" name="Text"/>
+          <p:cNvSpPr txBox="1"/>
+          <p:nvPr/>
+        </p:nvSpPr>
+        <p:spPr>
+          <a:xfrm>
+            <a:off x="7888072" y="5145786"/>
             <a:ext cx="3517240" cy="971550"/>
           </a:xfrm>
           <a:prstGeom prst="rect">
@@ -12559,7 +13198,7 @@
                 <a:ea typeface="Calibri" pitchFamily="34" charset="-122"/>
                 <a:cs typeface="Calibri" pitchFamily="34" charset="-120"/>
               </a:rPr>
-              <a:t>Cierre del bloque y enlace con el Módulo III</a:t>
+              <a:t>Cierre, entregables y proyecto integrador</a:t>
             </a:r>
             <a:endParaRPr lang="en-US" sz="1350" dirty="0"/>
           </a:p>
@@ -12567,146 +13206,38 @@
       </p:sp>
       <p:sp>
         <p:nvSpPr>
-          <p:cNvPr id="26" name="Shape"/>
-          <p:cNvSpPr/>
-          <p:nvPr/>
-        </p:nvSpPr>
-        <p:spPr>
-          <a:xfrm>
-            <a:off x="6260440" y="5090922"/>
-            <a:ext cx="5364328" cy="1081278"/>
-          </a:xfrm>
-          <a:prstGeom prst="roundRect">
-            <a:avLst>
-              <a:gd name="adj" fmla="val 2933"/>
-            </a:avLst>
-          </a:prstGeom>
-          <a:solidFill>
-            <a:srgbClr val="F2F5F6"/>
-          </a:solidFill>
-          <a:ln w="12700">
-            <a:solidFill>
-              <a:srgbClr val="F2F5F6"/>
-            </a:solidFill>
-            <a:prstDash val="solid"/>
-          </a:ln>
-        </p:spPr>
-      </p:sp>
-      <p:sp>
-        <p:nvSpPr>
-          <p:cNvPr id="27" name="Text"/>
-          <p:cNvSpPr txBox="1"/>
-          <p:nvPr/>
-        </p:nvSpPr>
-        <p:spPr>
-          <a:xfrm>
-            <a:off x="6479896" y="5090922"/>
-            <a:ext cx="1371600" cy="1081278"/>
-          </a:xfrm>
-          <a:prstGeom prst="rect">
-            <a:avLst/>
-          </a:prstGeom>
-          <a:noFill/>
-          <a:ln/>
-        </p:spPr>
-        <p:txBody>
-          <a:bodyPr wrap="square" lIns="0" tIns="0" rIns="0" bIns="0" rtlCol="0" anchor="ctr"/>
-          <a:lstStyle/>
-          <a:p>
-            <a:pPr indent="0" marL="0">
-              <a:buNone/>
-            </a:pPr>
-            <a:r>
-              <a:rPr lang="en-US" sz="1300" b="1" dirty="0">
-                <a:solidFill>
-                  <a:srgbClr val="2E7D7D"/>
-                </a:solidFill>
-                <a:latin typeface="Arial" pitchFamily="34" charset="0"/>
-                <a:ea typeface="Arial" pitchFamily="34" charset="-122"/>
-                <a:cs typeface="Arial" pitchFamily="34" charset="-120"/>
-              </a:rPr>
-              <a:t>11:25</a:t>
-            </a:r>
-            <a:endParaRPr lang="en-US" sz="1300" dirty="0"/>
-          </a:p>
-        </p:txBody>
-      </p:sp>
-      <p:sp>
-        <p:nvSpPr>
-          <p:cNvPr id="28" name="Text"/>
-          <p:cNvSpPr txBox="1"/>
-          <p:nvPr/>
-        </p:nvSpPr>
-        <p:spPr>
-          <a:xfrm>
-            <a:off x="7888072" y="5145786"/>
-            <a:ext cx="3517240" cy="971550"/>
-          </a:xfrm>
-          <a:prstGeom prst="rect">
-            <a:avLst/>
-          </a:prstGeom>
-          <a:noFill/>
-          <a:ln/>
-        </p:spPr>
-        <p:txBody>
-          <a:bodyPr wrap="square" lIns="0" tIns="0" rIns="0" bIns="0" rtlCol="0" anchor="ctr"/>
-          <a:lstStyle/>
-          <a:p>
-            <a:pPr indent="0" marL="0">
-              <a:lnSpc>
-                <a:spcPct val="105000"/>
-              </a:lnSpc>
-              <a:buNone/>
-            </a:pPr>
-            <a:r>
-              <a:rPr lang="en-US" sz="1350" dirty="0">
-                <a:solidFill>
-                  <a:srgbClr val="16262E"/>
+          <p:cNvPr id="29" name="Text"/>
+          <p:cNvSpPr txBox="1"/>
+          <p:nvPr/>
+        </p:nvSpPr>
+        <p:spPr>
+          <a:xfrm>
+            <a:off x="566928" y="6327648"/>
+            <a:ext cx="11057839" cy="292608"/>
+          </a:xfrm>
+          <a:prstGeom prst="rect">
+            <a:avLst/>
+          </a:prstGeom>
+          <a:noFill/>
+          <a:ln/>
+        </p:spPr>
+        <p:txBody>
+          <a:bodyPr wrap="square" lIns="0" tIns="0" rIns="0" bIns="0" rtlCol="0" anchor="t"/>
+          <a:lstStyle/>
+          <a:p>
+            <a:pPr indent="0" marL="0">
+              <a:buNone/>
+            </a:pPr>
+            <a:r>
+              <a:rPr lang="en-US" sz="1000" dirty="0">
+                <a:solidFill>
+                  <a:srgbClr val="5A6B73"/>
                 </a:solidFill>
                 <a:latin typeface="Calibri" pitchFamily="34" charset="0"/>
                 <a:ea typeface="Calibri" pitchFamily="34" charset="-122"/>
                 <a:cs typeface="Calibri" pitchFamily="34" charset="-120"/>
               </a:rPr>
-              <a:t>Entregables y tema definitivo del proyecto</a:t>
-            </a:r>
-            <a:endParaRPr lang="en-US" sz="1350" dirty="0"/>
-          </a:p>
-        </p:txBody>
-      </p:sp>
-      <p:sp>
-        <p:nvSpPr>
-          <p:cNvPr id="29" name="Text"/>
-          <p:cNvSpPr txBox="1"/>
-          <p:nvPr/>
-        </p:nvSpPr>
-        <p:spPr>
-          <a:xfrm>
-            <a:off x="566928" y="6327648"/>
-            <a:ext cx="11057839" cy="292608"/>
-          </a:xfrm>
-          <a:prstGeom prst="rect">
-            <a:avLst/>
-          </a:prstGeom>
-          <a:noFill/>
-          <a:ln/>
-        </p:spPr>
-        <p:txBody>
-          <a:bodyPr wrap="square" lIns="0" tIns="0" rIns="0" bIns="0" rtlCol="0" anchor="t"/>
-          <a:lstStyle/>
-          <a:p>
-            <a:pPr indent="0" marL="0">
-              <a:buNone/>
-            </a:pPr>
-            <a:r>
-              <a:rPr lang="en-US" sz="1000" dirty="0">
-                <a:solidFill>
-                  <a:srgbClr val="5A6B73"/>
-                </a:solidFill>
-                <a:latin typeface="Calibri" pitchFamily="34" charset="0"/>
-                <a:ea typeface="Calibri" pitchFamily="34" charset="-122"/>
-                <a:cs typeface="Calibri" pitchFamily="34" charset="-120"/>
-              </a:rPr>
-              <a:t>Una sola práctica. La primera hora es para saber qué se mide y cómo, porque de eso depende que su matriz resista cuando otro equipo la revise. El reloj de cada paso está en su lámina.</a:t>
+              <a:t>Hoy cerramos diez minutos tarde, a propósito: el bloque técnico creció para que cada documento que aparece en pantalla venga presentado antes de usarse. Una sola práctica, de cuarenta y ocho minutos.</a:t>
             </a:r>
             <a:endParaRPr lang="en-US" sz="1000" dirty="0"/>
           </a:p>
@@ -12812,7 +13343,7 @@
                 <a:ea typeface="Calibri" pitchFamily="34" charset="-122"/>
                 <a:cs typeface="Calibri" pitchFamily="34" charset="-120"/>
               </a:rPr>
-              <a:t>Dos codificadores coinciden en el 95 por ciento de los casos. ¿Eso es bueno? El porcentaje solo no lo dice.</a:t>
+              <a:t>Dos codificadores coinciden en el 95 por ciento de los casos. ¿Eso es bueno?</a:t>
             </a:r>
             <a:endParaRPr lang="en-US" sz="1500" dirty="0"/>
           </a:p>
@@ -12827,6 +13358,111 @@
         <p:spPr>
           <a:xfrm>
             <a:off x="566928" y="1700000"/>
+            <a:ext cx="11057839" cy="300000"/>
+          </a:xfrm>
+          <a:prstGeom prst="roundRect">
+            <a:avLst>
+              <a:gd name="adj" fmla="val 20000"/>
+            </a:avLst>
+          </a:prstGeom>
+          <a:solidFill>
+            <a:srgbClr val="D7E7E7"/>
+          </a:solidFill>
+          <a:ln w="12700">
+            <a:solidFill>
+              <a:srgbClr val="D7E7E7"/>
+            </a:solidFill>
+            <a:prstDash val="solid"/>
+          </a:ln>
+        </p:spPr>
+      </p:sp>
+      <p:sp>
+        <p:nvSpPr>
+          <p:cNvPr id="5" name="Text"/>
+          <p:cNvSpPr txBox="1"/>
+          <p:nvPr/>
+        </p:nvSpPr>
+        <p:spPr>
+          <a:xfrm>
+            <a:off x="766928" y="1700000"/>
+            <a:ext cx="1700000" cy="300000"/>
+          </a:xfrm>
+          <a:prstGeom prst="rect">
+            <a:avLst/>
+          </a:prstGeom>
+          <a:noFill/>
+          <a:ln/>
+        </p:spPr>
+        <p:txBody>
+          <a:bodyPr wrap="square" lIns="0" tIns="0" rIns="0" bIns="0" rtlCol="0" anchor="ctr"/>
+          <a:lstStyle/>
+          <a:p>
+            <a:pPr indent="0" marL="0">
+              <a:buNone/>
+            </a:pPr>
+            <a:r>
+              <a:rPr lang="en-US" sz="950" b="1" spc="100" kern="0" dirty="0">
+                <a:solidFill>
+                  <a:srgbClr val="2E7D7D"/>
+                </a:solidFill>
+                <a:latin typeface="Arial" pitchFamily="34" charset="0"/>
+                <a:ea typeface="Arial" pitchFamily="34" charset="-122"/>
+                <a:cs typeface="Arial" pitchFamily="34" charset="-120"/>
+              </a:rPr>
+              <a:t>DE DÓNDE SALE</a:t>
+            </a:r>
+            <a:endParaRPr lang="en-US" sz="950" dirty="0"/>
+          </a:p>
+        </p:txBody>
+      </p:sp>
+      <p:sp>
+        <p:nvSpPr>
+          <p:cNvPr id="6" name="Text"/>
+          <p:cNvSpPr txBox="1"/>
+          <p:nvPr/>
+        </p:nvSpPr>
+        <p:spPr>
+          <a:xfrm>
+            <a:off x="2516928" y="1700000"/>
+            <a:ext cx="8907839" cy="300000"/>
+          </a:xfrm>
+          <a:prstGeom prst="rect">
+            <a:avLst/>
+          </a:prstGeom>
+          <a:noFill/>
+          <a:ln/>
+        </p:spPr>
+        <p:txBody>
+          <a:bodyPr wrap="square" lIns="0" tIns="0" rIns="0" bIns="0" rtlCol="0" anchor="ctr"/>
+          <a:lstStyle/>
+          <a:p>
+            <a:pPr indent="0" marL="0">
+              <a:buNone/>
+            </a:pPr>
+            <a:r>
+              <a:rPr lang="en-US" sz="1100" dirty="0">
+                <a:solidFill>
+                  <a:srgbClr val="16262E"/>
+                </a:solidFill>
+                <a:latin typeface="Calibri" pitchFamily="34" charset="0"/>
+                <a:ea typeface="Calibri" pitchFamily="34" charset="-122"/>
+                <a:cs typeface="Calibri" pitchFamily="34" charset="-120"/>
+              </a:rPr>
+              <a:t>Transcripciones_foro_PARTICIPANTE.docx, sesión 4: los dos foros de la Entidad C que clasificaron el viernes.</a:t>
+            </a:r>
+            <a:endParaRPr lang="en-US" sz="1100" dirty="0"/>
+          </a:p>
+        </p:txBody>
+      </p:sp>
+      <p:sp>
+        <p:nvSpPr>
+          <p:cNvPr id="7" name="Shape"/>
+          <p:cNvSpPr/>
+          <p:nvPr/>
+        </p:nvSpPr>
+        <p:spPr>
+          <a:xfrm>
+            <a:off x="566928" y="2100000"/>
             <a:ext cx="2900000" cy="420000"/>
           </a:xfrm>
           <a:prstGeom prst="rect">
@@ -12845,13 +13481,13 @@
       </p:sp>
       <p:sp>
         <p:nvSpPr>
-          <p:cNvPr id="5" name="Text"/>
-          <p:cNvSpPr txBox="1"/>
-          <p:nvPr/>
-        </p:nvSpPr>
-        <p:spPr>
-          <a:xfrm>
-            <a:off x="686928" y="1700000"/>
+          <p:cNvPr id="8" name="Text"/>
+          <p:cNvSpPr txBox="1"/>
+          <p:nvPr/>
+        </p:nvSpPr>
+        <p:spPr>
+          <a:xfrm>
+            <a:off x="686928" y="2100000"/>
             <a:ext cx="2660000" cy="420000"/>
           </a:xfrm>
           <a:prstGeom prst="rect">
@@ -12884,13 +13520,13 @@
       </p:sp>
       <p:sp>
         <p:nvSpPr>
-          <p:cNvPr id="6" name="Shape"/>
+          <p:cNvPr id="9" name="Shape"/>
           <p:cNvSpPr/>
           <p:nvPr/>
         </p:nvSpPr>
         <p:spPr>
           <a:xfrm>
-            <a:off x="3466928" y="1700000"/>
+            <a:off x="3466928" y="2100000"/>
             <a:ext cx="2719279" cy="420000"/>
           </a:xfrm>
           <a:prstGeom prst="rect">
@@ -12909,13 +13545,13 @@
       </p:sp>
       <p:sp>
         <p:nvSpPr>
-          <p:cNvPr id="7" name="Text"/>
-          <p:cNvSpPr txBox="1"/>
-          <p:nvPr/>
-        </p:nvSpPr>
-        <p:spPr>
-          <a:xfrm>
-            <a:off x="3586928" y="1700000"/>
+          <p:cNvPr id="10" name="Text"/>
+          <p:cNvSpPr txBox="1"/>
+          <p:nvPr/>
+        </p:nvSpPr>
+        <p:spPr>
+          <a:xfrm>
+            <a:off x="3586928" y="2100000"/>
             <a:ext cx="2479279" cy="420000"/>
           </a:xfrm>
           <a:prstGeom prst="rect">
@@ -12948,13 +13584,13 @@
       </p:sp>
       <p:sp>
         <p:nvSpPr>
-          <p:cNvPr id="8" name="Shape"/>
+          <p:cNvPr id="11" name="Shape"/>
           <p:cNvSpPr/>
           <p:nvPr/>
         </p:nvSpPr>
         <p:spPr>
           <a:xfrm>
-            <a:off x="6186207" y="1700000"/>
+            <a:off x="6186207" y="2100000"/>
             <a:ext cx="2719280" cy="420000"/>
           </a:xfrm>
           <a:prstGeom prst="rect">
@@ -12973,13 +13609,13 @@
       </p:sp>
       <p:sp>
         <p:nvSpPr>
-          <p:cNvPr id="9" name="Text"/>
-          <p:cNvSpPr txBox="1"/>
-          <p:nvPr/>
-        </p:nvSpPr>
-        <p:spPr>
-          <a:xfrm>
-            <a:off x="6306207" y="1700000"/>
+          <p:cNvPr id="12" name="Text"/>
+          <p:cNvSpPr txBox="1"/>
+          <p:nvPr/>
+        </p:nvSpPr>
+        <p:spPr>
+          <a:xfrm>
+            <a:off x="6306207" y="2100000"/>
             <a:ext cx="2479280" cy="420000"/>
           </a:xfrm>
           <a:prstGeom prst="rect">
@@ -13012,13 +13648,13 @@
       </p:sp>
       <p:sp>
         <p:nvSpPr>
-          <p:cNvPr id="10" name="Shape"/>
+          <p:cNvPr id="13" name="Shape"/>
           <p:cNvSpPr/>
           <p:nvPr/>
         </p:nvSpPr>
         <p:spPr>
           <a:xfrm>
-            <a:off x="8905487" y="1700000"/>
+            <a:off x="8905487" y="2100000"/>
             <a:ext cx="2719280" cy="420000"/>
           </a:xfrm>
           <a:prstGeom prst="rect">
@@ -13037,13 +13673,13 @@
       </p:sp>
       <p:sp>
         <p:nvSpPr>
-          <p:cNvPr id="11" name="Text"/>
-          <p:cNvSpPr txBox="1"/>
-          <p:nvPr/>
-        </p:nvSpPr>
-        <p:spPr>
-          <a:xfrm>
-            <a:off x="9025487" y="1700000"/>
+          <p:cNvPr id="14" name="Text"/>
+          <p:cNvSpPr txBox="1"/>
+          <p:nvPr/>
+        </p:nvSpPr>
+        <p:spPr>
+          <a:xfrm>
+            <a:off x="9025487" y="2100000"/>
             <a:ext cx="2479280" cy="420000"/>
           </a:xfrm>
           <a:prstGeom prst="rect">
@@ -13076,14 +13712,14 @@
       </p:sp>
       <p:sp>
         <p:nvSpPr>
-          <p:cNvPr id="12" name="Shape"/>
+          <p:cNvPr id="15" name="Shape"/>
           <p:cNvSpPr/>
           <p:nvPr/>
         </p:nvSpPr>
         <p:spPr>
           <a:xfrm>
-            <a:off x="566928" y="2120000"/>
-            <a:ext cx="2900000" cy="730000"/>
+            <a:off x="566928" y="2520000"/>
+            <a:ext cx="2900000" cy="700000"/>
           </a:xfrm>
           <a:prstGeom prst="rect">
             <a:avLst/>
@@ -13101,14 +13737,14 @@
       </p:sp>
       <p:sp>
         <p:nvSpPr>
-          <p:cNvPr id="13" name="Text"/>
-          <p:cNvSpPr txBox="1"/>
-          <p:nvPr/>
-        </p:nvSpPr>
-        <p:spPr>
-          <a:xfrm>
-            <a:off x="686928" y="2120000"/>
-            <a:ext cx="2660000" cy="730000"/>
+          <p:cNvPr id="16" name="Text"/>
+          <p:cNvSpPr txBox="1"/>
+          <p:nvPr/>
+        </p:nvSpPr>
+        <p:spPr>
+          <a:xfrm>
+            <a:off x="686928" y="2520000"/>
+            <a:ext cx="2660000" cy="700000"/>
           </a:xfrm>
           <a:prstGeom prst="rect">
             <a:avLst/>
@@ -13127,7 +13763,7 @@
               <a:buNone/>
             </a:pPr>
             <a:r>
-              <a:rPr lang="en-US" sz="1250" b="1" dirty="0">
+              <a:rPr lang="en-US" sz="1200" b="1" dirty="0">
                 <a:solidFill>
                   <a:srgbClr val="16262E"/>
                 </a:solidFill>
@@ -13137,20 +13773,20 @@
               </a:rPr>
               <a:t>La situación</a:t>
             </a:r>
-            <a:endParaRPr lang="en-US" sz="1250" dirty="0"/>
-          </a:p>
-        </p:txBody>
-      </p:sp>
-      <p:sp>
-        <p:nvSpPr>
-          <p:cNvPr id="14" name="Shape"/>
+            <a:endParaRPr lang="en-US" sz="1200" dirty="0"/>
+          </a:p>
+        </p:txBody>
+      </p:sp>
+      <p:sp>
+        <p:nvSpPr>
+          <p:cNvPr id="17" name="Shape"/>
           <p:cNvSpPr/>
           <p:nvPr/>
         </p:nvSpPr>
         <p:spPr>
           <a:xfrm>
-            <a:off x="3466928" y="2120000"/>
-            <a:ext cx="2719279" cy="730000"/>
+            <a:off x="3466928" y="2520000"/>
+            <a:ext cx="2719279" cy="700000"/>
           </a:xfrm>
           <a:prstGeom prst="rect">
             <a:avLst/>
@@ -13168,14 +13804,14 @@
       </p:sp>
       <p:sp>
         <p:nvSpPr>
-          <p:cNvPr id="15" name="Text"/>
-          <p:cNvSpPr txBox="1"/>
-          <p:nvPr/>
-        </p:nvSpPr>
-        <p:spPr>
-          <a:xfrm>
-            <a:off x="3586928" y="2120000"/>
-            <a:ext cx="2479279" cy="730000"/>
+          <p:cNvPr id="18" name="Text"/>
+          <p:cNvSpPr txBox="1"/>
+          <p:nvPr/>
+        </p:nvSpPr>
+        <p:spPr>
+          <a:xfrm>
+            <a:off x="3586928" y="2520000"/>
+            <a:ext cx="2479279" cy="700000"/>
           </a:xfrm>
           <a:prstGeom prst="rect">
             <a:avLst/>
@@ -13194,7 +13830,7 @@
               <a:buNone/>
             </a:pPr>
             <a:r>
-              <a:rPr lang="en-US" sz="1250" dirty="0">
+              <a:rPr lang="en-US" sz="1200" dirty="0">
                 <a:solidFill>
                   <a:srgbClr val="16262E"/>
                 </a:solidFill>
@@ -13204,20 +13840,20 @@
               </a:rPr>
               <a:t>Gestión 14, infraestructura 9, presupuesto 8, transparencia 7.</a:t>
             </a:r>
-            <a:endParaRPr lang="en-US" sz="1250" dirty="0"/>
-          </a:p>
-        </p:txBody>
-      </p:sp>
-      <p:sp>
-        <p:nvSpPr>
-          <p:cNvPr id="16" name="Shape"/>
+            <a:endParaRPr lang="en-US" sz="1200" dirty="0"/>
+          </a:p>
+        </p:txBody>
+      </p:sp>
+      <p:sp>
+        <p:nvSpPr>
+          <p:cNvPr id="19" name="Shape"/>
           <p:cNvSpPr/>
           <p:nvPr/>
         </p:nvSpPr>
         <p:spPr>
           <a:xfrm>
-            <a:off x="6186207" y="2120000"/>
-            <a:ext cx="2719280" cy="730000"/>
+            <a:off x="6186207" y="2520000"/>
+            <a:ext cx="2719280" cy="700000"/>
           </a:xfrm>
           <a:prstGeom prst="rect">
             <a:avLst/>
@@ -13235,14 +13871,14 @@
       </p:sp>
       <p:sp>
         <p:nvSpPr>
-          <p:cNvPr id="17" name="Text"/>
-          <p:cNvSpPr txBox="1"/>
-          <p:nvPr/>
-        </p:nvSpPr>
-        <p:spPr>
-          <a:xfrm>
-            <a:off x="6306207" y="2120000"/>
-            <a:ext cx="2479280" cy="730000"/>
+          <p:cNvPr id="20" name="Text"/>
+          <p:cNvSpPr txBox="1"/>
+          <p:nvPr/>
+        </p:nvSpPr>
+        <p:spPr>
+          <a:xfrm>
+            <a:off x="6306207" y="2520000"/>
+            <a:ext cx="2479280" cy="700000"/>
           </a:xfrm>
           <a:prstGeom prst="rect">
             <a:avLst/>
@@ -13261,7 +13897,7 @@
               <a:buNone/>
             </a:pPr>
             <a:r>
-              <a:rPr lang="en-US" sz="1250" dirty="0">
+              <a:rPr lang="en-US" sz="1200" dirty="0">
                 <a:solidFill>
                   <a:srgbClr val="16262E"/>
                 </a:solidFill>
@@ -13271,20 +13907,20 @@
               </a:rPr>
               <a:t>Los dos usan «gestión» 35 veces y otra categoría 3.</a:t>
             </a:r>
-            <a:endParaRPr lang="en-US" sz="1250" dirty="0"/>
-          </a:p>
-        </p:txBody>
-      </p:sp>
-      <p:sp>
-        <p:nvSpPr>
-          <p:cNvPr id="18" name="Shape"/>
+            <a:endParaRPr lang="en-US" sz="1200" dirty="0"/>
+          </a:p>
+        </p:txBody>
+      </p:sp>
+      <p:sp>
+        <p:nvSpPr>
+          <p:cNvPr id="21" name="Shape"/>
           <p:cNvSpPr/>
           <p:nvPr/>
         </p:nvSpPr>
         <p:spPr>
           <a:xfrm>
-            <a:off x="8905487" y="2120000"/>
-            <a:ext cx="2719280" cy="730000"/>
+            <a:off x="8905487" y="2520000"/>
+            <a:ext cx="2719280" cy="700000"/>
           </a:xfrm>
           <a:prstGeom prst="rect">
             <a:avLst/>
@@ -13302,14 +13938,14 @@
       </p:sp>
       <p:sp>
         <p:nvSpPr>
-          <p:cNvPr id="19" name="Text"/>
-          <p:cNvSpPr txBox="1"/>
-          <p:nvPr/>
-        </p:nvSpPr>
-        <p:spPr>
-          <a:xfrm>
-            <a:off x="9025487" y="2120000"/>
-            <a:ext cx="2479280" cy="730000"/>
+          <p:cNvPr id="22" name="Text"/>
+          <p:cNvSpPr txBox="1"/>
+          <p:nvPr/>
+        </p:nvSpPr>
+        <p:spPr>
+          <a:xfrm>
+            <a:off x="9025487" y="2520000"/>
+            <a:ext cx="2479280" cy="700000"/>
           </a:xfrm>
           <a:prstGeom prst="rect">
             <a:avLst/>
@@ -13328,7 +13964,7 @@
               <a:buNone/>
             </a:pPr>
             <a:r>
-              <a:rPr lang="en-US" sz="1250" dirty="0">
+              <a:rPr lang="en-US" sz="1200" dirty="0">
                 <a:solidFill>
                   <a:srgbClr val="16262E"/>
                 </a:solidFill>
@@ -13338,20 +13974,20 @@
               </a:rPr>
               <a:t>Los dos escriben «gestión» siempre, sin abrir el archivo.</a:t>
             </a:r>
-            <a:endParaRPr lang="en-US" sz="1250" dirty="0"/>
-          </a:p>
-        </p:txBody>
-      </p:sp>
-      <p:sp>
-        <p:nvSpPr>
-          <p:cNvPr id="20" name="Shape"/>
+            <a:endParaRPr lang="en-US" sz="1200" dirty="0"/>
+          </a:p>
+        </p:txBody>
+      </p:sp>
+      <p:sp>
+        <p:nvSpPr>
+          <p:cNvPr id="23" name="Shape"/>
           <p:cNvSpPr/>
           <p:nvPr/>
         </p:nvSpPr>
         <p:spPr>
           <a:xfrm>
-            <a:off x="566928" y="2850000"/>
-            <a:ext cx="2900000" cy="730000"/>
+            <a:off x="566928" y="3220000"/>
+            <a:ext cx="2900000" cy="700000"/>
           </a:xfrm>
           <a:prstGeom prst="rect">
             <a:avLst/>
@@ -13369,14 +14005,14 @@
       </p:sp>
       <p:sp>
         <p:nvSpPr>
-          <p:cNvPr id="21" name="Text"/>
-          <p:cNvSpPr txBox="1"/>
-          <p:nvPr/>
-        </p:nvSpPr>
-        <p:spPr>
-          <a:xfrm>
-            <a:off x="686928" y="2850000"/>
-            <a:ext cx="2660000" cy="730000"/>
+          <p:cNvPr id="24" name="Text"/>
+          <p:cNvSpPr txBox="1"/>
+          <p:nvPr/>
+        </p:nvSpPr>
+        <p:spPr>
+          <a:xfrm>
+            <a:off x="686928" y="3220000"/>
+            <a:ext cx="2660000" cy="700000"/>
           </a:xfrm>
           <a:prstGeom prst="rect">
             <a:avLst/>
@@ -13395,7 +14031,7 @@
               <a:buNone/>
             </a:pPr>
             <a:r>
-              <a:rPr lang="en-US" sz="1250" b="1" dirty="0">
+              <a:rPr lang="en-US" sz="1200" b="1" dirty="0">
                 <a:solidFill>
                   <a:srgbClr val="16262E"/>
                 </a:solidFill>
@@ -13405,20 +14041,20 @@
               </a:rPr>
               <a:t>Acuerdo observado</a:t>
             </a:r>
-            <a:endParaRPr lang="en-US" sz="1250" dirty="0"/>
-          </a:p>
-        </p:txBody>
-      </p:sp>
-      <p:sp>
-        <p:nvSpPr>
-          <p:cNvPr id="22" name="Shape"/>
+            <a:endParaRPr lang="en-US" sz="1200" dirty="0"/>
+          </a:p>
+        </p:txBody>
+      </p:sp>
+      <p:sp>
+        <p:nvSpPr>
+          <p:cNvPr id="25" name="Shape"/>
           <p:cNvSpPr/>
           <p:nvPr/>
         </p:nvSpPr>
         <p:spPr>
           <a:xfrm>
-            <a:off x="3466928" y="2850000"/>
-            <a:ext cx="2719279" cy="730000"/>
+            <a:off x="3466928" y="3220000"/>
+            <a:ext cx="2719279" cy="700000"/>
           </a:xfrm>
           <a:prstGeom prst="rect">
             <a:avLst/>
@@ -13436,14 +14072,14 @@
       </p:sp>
       <p:sp>
         <p:nvSpPr>
-          <p:cNvPr id="23" name="Text"/>
-          <p:cNvSpPr txBox="1"/>
-          <p:nvPr/>
-        </p:nvSpPr>
-        <p:spPr>
-          <a:xfrm>
-            <a:off x="3586928" y="2850000"/>
-            <a:ext cx="2479279" cy="730000"/>
+          <p:cNvPr id="26" name="Text"/>
+          <p:cNvSpPr txBox="1"/>
+          <p:nvPr/>
+        </p:nvSpPr>
+        <p:spPr>
+          <a:xfrm>
+            <a:off x="3586928" y="3220000"/>
+            <a:ext cx="2479279" cy="700000"/>
           </a:xfrm>
           <a:prstGeom prst="rect">
             <a:avLst/>
@@ -13462,7 +14098,7 @@
               <a:buNone/>
             </a:pPr>
             <a:r>
-              <a:rPr lang="en-US" sz="1250" dirty="0">
+              <a:rPr lang="en-US" sz="1200" dirty="0">
                 <a:solidFill>
                   <a:srgbClr val="16262E"/>
                 </a:solidFill>
@@ -13472,20 +14108,20 @@
               </a:rPr>
               <a:t>36 de 38 = 94.7%</a:t>
             </a:r>
-            <a:endParaRPr lang="en-US" sz="1250" dirty="0"/>
-          </a:p>
-        </p:txBody>
-      </p:sp>
-      <p:sp>
-        <p:nvSpPr>
-          <p:cNvPr id="24" name="Shape"/>
+            <a:endParaRPr lang="en-US" sz="1200" dirty="0"/>
+          </a:p>
+        </p:txBody>
+      </p:sp>
+      <p:sp>
+        <p:nvSpPr>
+          <p:cNvPr id="27" name="Shape"/>
           <p:cNvSpPr/>
           <p:nvPr/>
         </p:nvSpPr>
         <p:spPr>
           <a:xfrm>
-            <a:off x="6186207" y="2850000"/>
-            <a:ext cx="2719280" cy="730000"/>
+            <a:off x="6186207" y="3220000"/>
+            <a:ext cx="2719280" cy="700000"/>
           </a:xfrm>
           <a:prstGeom prst="rect">
             <a:avLst/>
@@ -13503,14 +14139,14 @@
       </p:sp>
       <p:sp>
         <p:nvSpPr>
-          <p:cNvPr id="25" name="Text"/>
-          <p:cNvSpPr txBox="1"/>
-          <p:nvPr/>
-        </p:nvSpPr>
-        <p:spPr>
-          <a:xfrm>
-            <a:off x="6306207" y="2850000"/>
-            <a:ext cx="2479280" cy="730000"/>
+          <p:cNvPr id="28" name="Text"/>
+          <p:cNvSpPr txBox="1"/>
+          <p:nvPr/>
+        </p:nvSpPr>
+        <p:spPr>
+          <a:xfrm>
+            <a:off x="6306207" y="3220000"/>
+            <a:ext cx="2479280" cy="700000"/>
           </a:xfrm>
           <a:prstGeom prst="rect">
             <a:avLst/>
@@ -13529,7 +14165,7 @@
               <a:buNone/>
             </a:pPr>
             <a:r>
-              <a:rPr lang="en-US" sz="1250" dirty="0">
+              <a:rPr lang="en-US" sz="1200" dirty="0">
                 <a:solidFill>
                   <a:srgbClr val="16262E"/>
                 </a:solidFill>
@@ -13539,20 +14175,20 @@
               </a:rPr>
               <a:t>36 de 38 = 94.7%</a:t>
             </a:r>
-            <a:endParaRPr lang="en-US" sz="1250" dirty="0"/>
-          </a:p>
-        </p:txBody>
-      </p:sp>
-      <p:sp>
-        <p:nvSpPr>
-          <p:cNvPr id="26" name="Shape"/>
+            <a:endParaRPr lang="en-US" sz="1200" dirty="0"/>
+          </a:p>
+        </p:txBody>
+      </p:sp>
+      <p:sp>
+        <p:nvSpPr>
+          <p:cNvPr id="29" name="Shape"/>
           <p:cNvSpPr/>
           <p:nvPr/>
         </p:nvSpPr>
         <p:spPr>
           <a:xfrm>
-            <a:off x="8905487" y="2850000"/>
-            <a:ext cx="2719280" cy="730000"/>
+            <a:off x="8905487" y="3220000"/>
+            <a:ext cx="2719280" cy="700000"/>
           </a:xfrm>
           <a:prstGeom prst="rect">
             <a:avLst/>
@@ -13570,14 +14206,14 @@
       </p:sp>
       <p:sp>
         <p:nvSpPr>
-          <p:cNvPr id="27" name="Text"/>
-          <p:cNvSpPr txBox="1"/>
-          <p:nvPr/>
-        </p:nvSpPr>
-        <p:spPr>
-          <a:xfrm>
-            <a:off x="9025487" y="2850000"/>
-            <a:ext cx="2479280" cy="730000"/>
+          <p:cNvPr id="30" name="Text"/>
+          <p:cNvSpPr txBox="1"/>
+          <p:nvPr/>
+        </p:nvSpPr>
+        <p:spPr>
+          <a:xfrm>
+            <a:off x="9025487" y="3220000"/>
+            <a:ext cx="2479280" cy="700000"/>
           </a:xfrm>
           <a:prstGeom prst="rect">
             <a:avLst/>
@@ -13596,7 +14232,7 @@
               <a:buNone/>
             </a:pPr>
             <a:r>
-              <a:rPr lang="en-US" sz="1250" dirty="0">
+              <a:rPr lang="en-US" sz="1200" dirty="0">
                 <a:solidFill>
                   <a:srgbClr val="16262E"/>
                 </a:solidFill>
@@ -13606,20 +14242,20 @@
               </a:rPr>
               <a:t>37 de 38 = 97.4%</a:t>
             </a:r>
-            <a:endParaRPr lang="en-US" sz="1250" dirty="0"/>
-          </a:p>
-        </p:txBody>
-      </p:sp>
-      <p:sp>
-        <p:nvSpPr>
-          <p:cNvPr id="28" name="Shape"/>
+            <a:endParaRPr lang="en-US" sz="1200" dirty="0"/>
+          </a:p>
+        </p:txBody>
+      </p:sp>
+      <p:sp>
+        <p:nvSpPr>
+          <p:cNvPr id="31" name="Shape"/>
           <p:cNvSpPr/>
           <p:nvPr/>
         </p:nvSpPr>
         <p:spPr>
           <a:xfrm>
-            <a:off x="566928" y="3580000"/>
-            <a:ext cx="2900000" cy="730000"/>
+            <a:off x="566928" y="3920000"/>
+            <a:ext cx="2900000" cy="700000"/>
           </a:xfrm>
           <a:prstGeom prst="rect">
             <a:avLst/>
@@ -13637,14 +14273,14 @@
       </p:sp>
       <p:sp>
         <p:nvSpPr>
-          <p:cNvPr id="29" name="Text"/>
-          <p:cNvSpPr txBox="1"/>
-          <p:nvPr/>
-        </p:nvSpPr>
-        <p:spPr>
-          <a:xfrm>
-            <a:off x="686928" y="3580000"/>
-            <a:ext cx="2660000" cy="730000"/>
+          <p:cNvPr id="32" name="Text"/>
+          <p:cNvSpPr txBox="1"/>
+          <p:nvPr/>
+        </p:nvSpPr>
+        <p:spPr>
+          <a:xfrm>
+            <a:off x="686928" y="3920000"/>
+            <a:ext cx="2660000" cy="700000"/>
           </a:xfrm>
           <a:prstGeom prst="rect">
             <a:avLst/>
@@ -13663,7 +14299,7 @@
               <a:buNone/>
             </a:pPr>
             <a:r>
-              <a:rPr lang="en-US" sz="1250" b="1" dirty="0">
+              <a:rPr lang="en-US" sz="1200" b="1" dirty="0">
                 <a:solidFill>
                   <a:srgbClr val="16262E"/>
                 </a:solidFill>
@@ -13673,20 +14309,20 @@
               </a:rPr>
               <a:t>Acuerdo esperado por azar</a:t>
             </a:r>
-            <a:endParaRPr lang="en-US" sz="1250" dirty="0"/>
-          </a:p>
-        </p:txBody>
-      </p:sp>
-      <p:sp>
-        <p:nvSpPr>
-          <p:cNvPr id="30" name="Shape"/>
+            <a:endParaRPr lang="en-US" sz="1200" dirty="0"/>
+          </a:p>
+        </p:txBody>
+      </p:sp>
+      <p:sp>
+        <p:nvSpPr>
+          <p:cNvPr id="33" name="Shape"/>
           <p:cNvSpPr/>
           <p:nvPr/>
         </p:nvSpPr>
         <p:spPr>
           <a:xfrm>
-            <a:off x="3466928" y="3580000"/>
-            <a:ext cx="2719279" cy="730000"/>
+            <a:off x="3466928" y="3920000"/>
+            <a:ext cx="2719279" cy="700000"/>
           </a:xfrm>
           <a:prstGeom prst="rect">
             <a:avLst/>
@@ -13704,14 +14340,14 @@
       </p:sp>
       <p:sp>
         <p:nvSpPr>
-          <p:cNvPr id="31" name="Text"/>
-          <p:cNvSpPr txBox="1"/>
-          <p:nvPr/>
-        </p:nvSpPr>
-        <p:spPr>
-          <a:xfrm>
-            <a:off x="3586928" y="3580000"/>
-            <a:ext cx="2479279" cy="730000"/>
+          <p:cNvPr id="34" name="Text"/>
+          <p:cNvSpPr txBox="1"/>
+          <p:nvPr/>
+        </p:nvSpPr>
+        <p:spPr>
+          <a:xfrm>
+            <a:off x="3586928" y="3920000"/>
+            <a:ext cx="2479279" cy="700000"/>
           </a:xfrm>
           <a:prstGeom prst="rect">
             <a:avLst/>
@@ -13730,7 +14366,7 @@
               <a:buNone/>
             </a:pPr>
             <a:r>
-              <a:rPr lang="en-US" sz="1250" dirty="0">
+              <a:rPr lang="en-US" sz="1200" dirty="0">
                 <a:solidFill>
                   <a:srgbClr val="16262E"/>
                 </a:solidFill>
@@ -13740,20 +14376,20 @@
               </a:rPr>
               <a:t>27.0%</a:t>
             </a:r>
-            <a:endParaRPr lang="en-US" sz="1250" dirty="0"/>
-          </a:p>
-        </p:txBody>
-      </p:sp>
-      <p:sp>
-        <p:nvSpPr>
-          <p:cNvPr id="32" name="Shape"/>
+            <a:endParaRPr lang="en-US" sz="1200" dirty="0"/>
+          </a:p>
+        </p:txBody>
+      </p:sp>
+      <p:sp>
+        <p:nvSpPr>
+          <p:cNvPr id="35" name="Shape"/>
           <p:cNvSpPr/>
           <p:nvPr/>
         </p:nvSpPr>
         <p:spPr>
           <a:xfrm>
-            <a:off x="6186207" y="3580000"/>
-            <a:ext cx="2719280" cy="730000"/>
+            <a:off x="6186207" y="3920000"/>
+            <a:ext cx="2719280" cy="700000"/>
           </a:xfrm>
           <a:prstGeom prst="rect">
             <a:avLst/>
@@ -13771,14 +14407,14 @@
       </p:sp>
       <p:sp>
         <p:nvSpPr>
-          <p:cNvPr id="33" name="Text"/>
-          <p:cNvSpPr txBox="1"/>
-          <p:nvPr/>
-        </p:nvSpPr>
-        <p:spPr>
-          <a:xfrm>
-            <a:off x="6306207" y="3580000"/>
-            <a:ext cx="2479280" cy="730000"/>
+          <p:cNvPr id="36" name="Text"/>
+          <p:cNvSpPr txBox="1"/>
+          <p:nvPr/>
+        </p:nvSpPr>
+        <p:spPr>
+          <a:xfrm>
+            <a:off x="6306207" y="3920000"/>
+            <a:ext cx="2479280" cy="700000"/>
           </a:xfrm>
           <a:prstGeom prst="rect">
             <a:avLst/>
@@ -13797,7 +14433,7 @@
               <a:buNone/>
             </a:pPr>
             <a:r>
-              <a:rPr lang="en-US" sz="1250" dirty="0">
+              <a:rPr lang="en-US" sz="1200" dirty="0">
                 <a:solidFill>
                   <a:srgbClr val="16262E"/>
                 </a:solidFill>
@@ -13807,20 +14443,20 @@
               </a:rPr>
               <a:t>85.5%</a:t>
             </a:r>
-            <a:endParaRPr lang="en-US" sz="1250" dirty="0"/>
-          </a:p>
-        </p:txBody>
-      </p:sp>
-      <p:sp>
-        <p:nvSpPr>
-          <p:cNvPr id="34" name="Shape"/>
+            <a:endParaRPr lang="en-US" sz="1200" dirty="0"/>
+          </a:p>
+        </p:txBody>
+      </p:sp>
+      <p:sp>
+        <p:nvSpPr>
+          <p:cNvPr id="37" name="Shape"/>
           <p:cNvSpPr/>
           <p:nvPr/>
         </p:nvSpPr>
         <p:spPr>
           <a:xfrm>
-            <a:off x="8905487" y="3580000"/>
-            <a:ext cx="2719280" cy="730000"/>
+            <a:off x="8905487" y="3920000"/>
+            <a:ext cx="2719280" cy="700000"/>
           </a:xfrm>
           <a:prstGeom prst="rect">
             <a:avLst/>
@@ -13838,14 +14474,14 @@
       </p:sp>
       <p:sp>
         <p:nvSpPr>
-          <p:cNvPr id="35" name="Text"/>
-          <p:cNvSpPr txBox="1"/>
-          <p:nvPr/>
-        </p:nvSpPr>
-        <p:spPr>
-          <a:xfrm>
-            <a:off x="9025487" y="3580000"/>
-            <a:ext cx="2479280" cy="730000"/>
+          <p:cNvPr id="38" name="Text"/>
+          <p:cNvSpPr txBox="1"/>
+          <p:nvPr/>
+        </p:nvSpPr>
+        <p:spPr>
+          <a:xfrm>
+            <a:off x="9025487" y="3920000"/>
+            <a:ext cx="2479280" cy="700000"/>
           </a:xfrm>
           <a:prstGeom prst="rect">
             <a:avLst/>
@@ -13864,7 +14500,7 @@
               <a:buNone/>
             </a:pPr>
             <a:r>
-              <a:rPr lang="en-US" sz="1250" dirty="0">
+              <a:rPr lang="en-US" sz="1200" dirty="0">
                 <a:solidFill>
                   <a:srgbClr val="16262E"/>
                 </a:solidFill>
@@ -13874,20 +14510,20 @@
               </a:rPr>
               <a:t>97.4%</a:t>
             </a:r>
-            <a:endParaRPr lang="en-US" sz="1250" dirty="0"/>
-          </a:p>
-        </p:txBody>
-      </p:sp>
-      <p:sp>
-        <p:nvSpPr>
-          <p:cNvPr id="36" name="Shape"/>
+            <a:endParaRPr lang="en-US" sz="1200" dirty="0"/>
+          </a:p>
+        </p:txBody>
+      </p:sp>
+      <p:sp>
+        <p:nvSpPr>
+          <p:cNvPr id="39" name="Shape"/>
           <p:cNvSpPr/>
           <p:nvPr/>
         </p:nvSpPr>
         <p:spPr>
           <a:xfrm>
-            <a:off x="566928" y="4310000"/>
-            <a:ext cx="2900000" cy="730000"/>
+            <a:off x="566928" y="4620000"/>
+            <a:ext cx="2900000" cy="700000"/>
           </a:xfrm>
           <a:prstGeom prst="rect">
             <a:avLst/>
@@ -13905,14 +14541,14 @@
       </p:sp>
       <p:sp>
         <p:nvSpPr>
-          <p:cNvPr id="37" name="Text"/>
-          <p:cNvSpPr txBox="1"/>
-          <p:nvPr/>
-        </p:nvSpPr>
-        <p:spPr>
-          <a:xfrm>
-            <a:off x="686928" y="4310000"/>
-            <a:ext cx="2660000" cy="730000"/>
+          <p:cNvPr id="40" name="Text"/>
+          <p:cNvSpPr txBox="1"/>
+          <p:nvPr/>
+        </p:nvSpPr>
+        <p:spPr>
+          <a:xfrm>
+            <a:off x="686928" y="4620000"/>
+            <a:ext cx="2660000" cy="700000"/>
           </a:xfrm>
           <a:prstGeom prst="rect">
             <a:avLst/>
@@ -13931,7 +14567,7 @@
               <a:buNone/>
             </a:pPr>
             <a:r>
-              <a:rPr lang="en-US" sz="1250" b="1" dirty="0">
+              <a:rPr lang="en-US" sz="1200" b="1" dirty="0">
                 <a:solidFill>
                   <a:srgbClr val="16262E"/>
                 </a:solidFill>
@@ -13941,20 +14577,20 @@
               </a:rPr>
               <a:t>Kappa de Cohen</a:t>
             </a:r>
-            <a:endParaRPr lang="en-US" sz="1250" dirty="0"/>
-          </a:p>
-        </p:txBody>
-      </p:sp>
-      <p:sp>
-        <p:nvSpPr>
-          <p:cNvPr id="38" name="Shape"/>
+            <a:endParaRPr lang="en-US" sz="1200" dirty="0"/>
+          </a:p>
+        </p:txBody>
+      </p:sp>
+      <p:sp>
+        <p:nvSpPr>
+          <p:cNvPr id="41" name="Shape"/>
           <p:cNvSpPr/>
           <p:nvPr/>
         </p:nvSpPr>
         <p:spPr>
           <a:xfrm>
-            <a:off x="3466928" y="4310000"/>
-            <a:ext cx="2719279" cy="730000"/>
+            <a:off x="3466928" y="4620000"/>
+            <a:ext cx="2719279" cy="700000"/>
           </a:xfrm>
           <a:prstGeom prst="rect">
             <a:avLst/>
@@ -13972,14 +14608,14 @@
       </p:sp>
       <p:sp>
         <p:nvSpPr>
-          <p:cNvPr id="39" name="Text"/>
-          <p:cNvSpPr txBox="1"/>
-          <p:nvPr/>
-        </p:nvSpPr>
-        <p:spPr>
-          <a:xfrm>
-            <a:off x="3586928" y="4310000"/>
-            <a:ext cx="2479279" cy="730000"/>
+          <p:cNvPr id="42" name="Text"/>
+          <p:cNvSpPr txBox="1"/>
+          <p:nvPr/>
+        </p:nvSpPr>
+        <p:spPr>
+          <a:xfrm>
+            <a:off x="3586928" y="4620000"/>
+            <a:ext cx="2479279" cy="700000"/>
           </a:xfrm>
           <a:prstGeom prst="rect">
             <a:avLst/>
@@ -13998,7 +14634,7 @@
               <a:buNone/>
             </a:pPr>
             <a:r>
-              <a:rPr lang="en-US" sz="1250" dirty="0">
+              <a:rPr lang="en-US" sz="1200" dirty="0">
                 <a:solidFill>
                   <a:srgbClr val="16262E"/>
                 </a:solidFill>
@@ -14008,20 +14644,20 @@
               </a:rPr>
               <a:t>0.93</a:t>
             </a:r>
-            <a:endParaRPr lang="en-US" sz="1250" dirty="0"/>
-          </a:p>
-        </p:txBody>
-      </p:sp>
-      <p:sp>
-        <p:nvSpPr>
-          <p:cNvPr id="40" name="Shape"/>
+            <a:endParaRPr lang="en-US" sz="1200" dirty="0"/>
+          </a:p>
+        </p:txBody>
+      </p:sp>
+      <p:sp>
+        <p:nvSpPr>
+          <p:cNvPr id="43" name="Shape"/>
           <p:cNvSpPr/>
           <p:nvPr/>
         </p:nvSpPr>
         <p:spPr>
           <a:xfrm>
-            <a:off x="6186207" y="4310000"/>
-            <a:ext cx="2719280" cy="730000"/>
+            <a:off x="6186207" y="4620000"/>
+            <a:ext cx="2719280" cy="700000"/>
           </a:xfrm>
           <a:prstGeom prst="rect">
             <a:avLst/>
@@ -14039,14 +14675,14 @@
       </p:sp>
       <p:sp>
         <p:nvSpPr>
-          <p:cNvPr id="41" name="Text"/>
-          <p:cNvSpPr txBox="1"/>
-          <p:nvPr/>
-        </p:nvSpPr>
-        <p:spPr>
-          <a:xfrm>
-            <a:off x="6306207" y="4310000"/>
-            <a:ext cx="2479280" cy="730000"/>
+          <p:cNvPr id="44" name="Text"/>
+          <p:cNvSpPr txBox="1"/>
+          <p:nvPr/>
+        </p:nvSpPr>
+        <p:spPr>
+          <a:xfrm>
+            <a:off x="6306207" y="4620000"/>
+            <a:ext cx="2479280" cy="700000"/>
           </a:xfrm>
           <a:prstGeom prst="rect">
             <a:avLst/>
@@ -14065,7 +14701,7 @@
               <a:buNone/>
             </a:pPr>
             <a:r>
-              <a:rPr lang="en-US" sz="1250" dirty="0">
+              <a:rPr lang="en-US" sz="1200" dirty="0">
                 <a:solidFill>
                   <a:srgbClr val="16262E"/>
                 </a:solidFill>
@@ -14075,20 +14711,20 @@
               </a:rPr>
               <a:t>0.64</a:t>
             </a:r>
-            <a:endParaRPr lang="en-US" sz="1250" dirty="0"/>
-          </a:p>
-        </p:txBody>
-      </p:sp>
-      <p:sp>
-        <p:nvSpPr>
-          <p:cNvPr id="42" name="Shape"/>
+            <a:endParaRPr lang="en-US" sz="1200" dirty="0"/>
+          </a:p>
+        </p:txBody>
+      </p:sp>
+      <p:sp>
+        <p:nvSpPr>
+          <p:cNvPr id="45" name="Shape"/>
           <p:cNvSpPr/>
           <p:nvPr/>
         </p:nvSpPr>
         <p:spPr>
           <a:xfrm>
-            <a:off x="8905487" y="4310000"/>
-            <a:ext cx="2719280" cy="730000"/>
+            <a:off x="8905487" y="4620000"/>
+            <a:ext cx="2719280" cy="700000"/>
           </a:xfrm>
           <a:prstGeom prst="rect">
             <a:avLst/>
@@ -14106,14 +14742,14 @@
       </p:sp>
       <p:sp>
         <p:nvSpPr>
-          <p:cNvPr id="43" name="Text"/>
-          <p:cNvSpPr txBox="1"/>
-          <p:nvPr/>
-        </p:nvSpPr>
-        <p:spPr>
-          <a:xfrm>
-            <a:off x="9025487" y="4310000"/>
-            <a:ext cx="2479280" cy="730000"/>
+          <p:cNvPr id="46" name="Text"/>
+          <p:cNvSpPr txBox="1"/>
+          <p:nvPr/>
+        </p:nvSpPr>
+        <p:spPr>
+          <a:xfrm>
+            <a:off x="9025487" y="4620000"/>
+            <a:ext cx="2479280" cy="700000"/>
           </a:xfrm>
           <a:prstGeom prst="rect">
             <a:avLst/>
@@ -14132,7 +14768,7 @@
               <a:buNone/>
             </a:pPr>
             <a:r>
-              <a:rPr lang="en-US" sz="1250" dirty="0">
+              <a:rPr lang="en-US" sz="1200" dirty="0">
                 <a:solidFill>
                   <a:srgbClr val="16262E"/>
                 </a:solidFill>
@@ -14142,20 +14778,20 @@
               </a:rPr>
               <a:t>0.00</a:t>
             </a:r>
-            <a:endParaRPr lang="en-US" sz="1250" dirty="0"/>
-          </a:p>
-        </p:txBody>
-      </p:sp>
-      <p:sp>
-        <p:nvSpPr>
-          <p:cNvPr id="44" name="Shape"/>
+            <a:endParaRPr lang="en-US" sz="1200" dirty="0"/>
+          </a:p>
+        </p:txBody>
+      </p:sp>
+      <p:sp>
+        <p:nvSpPr>
+          <p:cNvPr id="47" name="Shape"/>
           <p:cNvSpPr/>
           <p:nvPr/>
         </p:nvSpPr>
         <p:spPr>
           <a:xfrm>
-            <a:off x="566928" y="5160000"/>
-            <a:ext cx="5408919" cy="860000"/>
+            <a:off x="566928" y="5400000"/>
+            <a:ext cx="5408919" cy="720000"/>
           </a:xfrm>
           <a:prstGeom prst="roundRect">
             <a:avLst>
@@ -14175,13 +14811,13 @@
       </p:sp>
       <p:sp>
         <p:nvSpPr>
-          <p:cNvPr id="45" name="Text"/>
-          <p:cNvSpPr txBox="1"/>
-          <p:nvPr/>
-        </p:nvSpPr>
-        <p:spPr>
-          <a:xfrm>
-            <a:off x="804672" y="5280000"/>
+          <p:cNvPr id="48" name="Text"/>
+          <p:cNvSpPr txBox="1"/>
+          <p:nvPr/>
+        </p:nvSpPr>
+        <p:spPr>
+          <a:xfrm>
+            <a:off x="804672" y="5520000"/>
             <a:ext cx="4933431" cy="300000"/>
           </a:xfrm>
           <a:prstGeom prst="rect">
@@ -14214,14 +14850,14 @@
       </p:sp>
       <p:sp>
         <p:nvSpPr>
-          <p:cNvPr id="46" name="Text"/>
-          <p:cNvSpPr txBox="1"/>
-          <p:nvPr/>
-        </p:nvSpPr>
-        <p:spPr>
-          <a:xfrm>
-            <a:off x="804672" y="5590000"/>
-            <a:ext cx="4933431" cy="380000"/>
+          <p:cNvPr id="49" name="Text"/>
+          <p:cNvSpPr txBox="1"/>
+          <p:nvPr/>
+        </p:nvSpPr>
+        <p:spPr>
+          <a:xfrm>
+            <a:off x="804672" y="5800000"/>
+            <a:ext cx="4933431" cy="300000"/>
           </a:xfrm>
           <a:prstGeom prst="rect">
             <a:avLst/>
@@ -14240,7 +14876,7 @@
               <a:buNone/>
             </a:pPr>
             <a:r>
-              <a:rPr lang="en-US" sz="1050" dirty="0">
+              <a:rPr lang="en-US" sz="1000" dirty="0">
                 <a:solidFill>
                   <a:srgbClr val="5A6B73"/>
                 </a:solidFill>
@@ -14250,20 +14886,20 @@
               </a:rPr>
               <a:t>a es en cuántas de las seis filas coincidieron. S es la suma, nivel por nivel, del conteo de un equipo por el del otro. Todo con enteros: es la del paso 4.</a:t>
             </a:r>
-            <a:endParaRPr lang="en-US" sz="1050" dirty="0"/>
-          </a:p>
-        </p:txBody>
-      </p:sp>
-      <p:sp>
-        <p:nvSpPr>
-          <p:cNvPr id="47" name="Shape"/>
+            <a:endParaRPr lang="en-US" sz="1000" dirty="0"/>
+          </a:p>
+        </p:txBody>
+      </p:sp>
+      <p:sp>
+        <p:nvSpPr>
+          <p:cNvPr id="50" name="Shape"/>
           <p:cNvSpPr/>
           <p:nvPr/>
         </p:nvSpPr>
         <p:spPr>
           <a:xfrm>
-            <a:off x="6215847" y="5160000"/>
-            <a:ext cx="5408919" cy="860000"/>
+            <a:off x="6215847" y="5400000"/>
+            <a:ext cx="5408919" cy="720000"/>
           </a:xfrm>
           <a:prstGeom prst="roundRect">
             <a:avLst>
@@ -14283,14 +14919,14 @@
       </p:sp>
       <p:sp>
         <p:nvSpPr>
-          <p:cNvPr id="48" name="Text"/>
-          <p:cNvSpPr txBox="1"/>
-          <p:nvPr/>
-        </p:nvSpPr>
-        <p:spPr>
-          <a:xfrm>
-            <a:off x="6453591" y="5280000"/>
-            <a:ext cx="4933431" cy="620000"/>
+          <p:cNvPr id="51" name="Text"/>
+          <p:cNvSpPr txBox="1"/>
+          <p:nvPr/>
+        </p:nvSpPr>
+        <p:spPr>
+          <a:xfrm>
+            <a:off x="6453591" y="5510000"/>
+            <a:ext cx="4933431" cy="520000"/>
           </a:xfrm>
           <a:prstGeom prst="rect">
             <a:avLst/>
@@ -14304,12 +14940,12 @@
           <a:p>
             <a:pPr indent="0" marL="0">
               <a:lnSpc>
-                <a:spcPct val="104000"/>
+                <a:spcPct val="103000"/>
               </a:lnSpc>
               <a:buNone/>
             </a:pPr>
             <a:r>
-              <a:rPr lang="en-US" sz="1150" dirty="0">
+              <a:rPr lang="en-US" sz="1050" dirty="0">
                 <a:solidFill>
                   <a:srgbClr val="16262E"/>
                 </a:solidFill>
@@ -14319,19 +14955,19 @@
               </a:rPr>
               <a:t>El mismo 94.7 por ciento vale 0.93 en su corpus y 0.64 cuando un tema domina. Y dos codificadores que nunca abren el archivo llegan al 97 por ciento con kappa de cero: todo su acuerdo era gratis. Kappa es la parte que no se explica por azar.</a:t>
             </a:r>
-            <a:endParaRPr lang="en-US" sz="1150" dirty="0"/>
-          </a:p>
-        </p:txBody>
-      </p:sp>
-      <p:sp>
-        <p:nvSpPr>
-          <p:cNvPr id="49" name="Text"/>
-          <p:cNvSpPr txBox="1"/>
-          <p:nvPr/>
-        </p:nvSpPr>
-        <p:spPr>
-          <a:xfrm>
-            <a:off x="566928" y="6120000"/>
+            <a:endParaRPr lang="en-US" sz="1050" dirty="0"/>
+          </a:p>
+        </p:txBody>
+      </p:sp>
+      <p:sp>
+        <p:nvSpPr>
+          <p:cNvPr id="52" name="Text"/>
+          <p:cNvSpPr txBox="1"/>
+          <p:nvPr/>
+        </p:nvSpPr>
+        <p:spPr>
+          <a:xfrm>
+            <a:off x="566928" y="6200000"/>
             <a:ext cx="11057839" cy="240000"/>
           </a:xfrm>
           <a:prstGeom prst="rect">
@@ -15101,7 +15737,7 @@
                 <a:ea typeface="Calibri" pitchFamily="34" charset="-122"/>
                 <a:cs typeface="Calibri" pitchFamily="34" charset="-120"/>
               </a:rPr>
-              <a:t>Dos asistentes, dos maneras de equivocarse sobre el mismo artículo 9. Cuál es peor no lo dice la fórmula: lo declara quien va a usar el resultado.</a:t>
+              <a:t>Dos asistentes, dos maneras de equivocarse sobre el mismo artículo 9.</a:t>
             </a:r>
             <a:endParaRPr lang="en-US" sz="1500" dirty="0"/>
           </a:p>
@@ -15115,7 +15751,112 @@
         </p:nvSpPr>
         <p:spPr>
           <a:xfrm>
-            <a:off x="566928" y="1800000"/>
+            <a:off x="566928" y="1700000"/>
+            <a:ext cx="11057839" cy="300000"/>
+          </a:xfrm>
+          <a:prstGeom prst="roundRect">
+            <a:avLst>
+              <a:gd name="adj" fmla="val 20000"/>
+            </a:avLst>
+          </a:prstGeom>
+          <a:solidFill>
+            <a:srgbClr val="D7E7E7"/>
+          </a:solidFill>
+          <a:ln w="12700">
+            <a:solidFill>
+              <a:srgbClr val="D7E7E7"/>
+            </a:solidFill>
+            <a:prstDash val="solid"/>
+          </a:ln>
+        </p:spPr>
+      </p:sp>
+      <p:sp>
+        <p:nvSpPr>
+          <p:cNvPr id="5" name="Text"/>
+          <p:cNvSpPr txBox="1"/>
+          <p:nvPr/>
+        </p:nvSpPr>
+        <p:spPr>
+          <a:xfrm>
+            <a:off x="766928" y="1700000"/>
+            <a:ext cx="1700000" cy="300000"/>
+          </a:xfrm>
+          <a:prstGeom prst="rect">
+            <a:avLst/>
+          </a:prstGeom>
+          <a:noFill/>
+          <a:ln/>
+        </p:spPr>
+        <p:txBody>
+          <a:bodyPr wrap="square" lIns="0" tIns="0" rIns="0" bIns="0" rtlCol="0" anchor="ctr"/>
+          <a:lstStyle/>
+          <a:p>
+            <a:pPr indent="0" marL="0">
+              <a:buNone/>
+            </a:pPr>
+            <a:r>
+              <a:rPr lang="en-US" sz="950" b="1" spc="100" kern="0" dirty="0">
+                <a:solidFill>
+                  <a:srgbClr val="2E7D7D"/>
+                </a:solidFill>
+                <a:latin typeface="Arial" pitchFamily="34" charset="0"/>
+                <a:ea typeface="Arial" pitchFamily="34" charset="-122"/>
+                <a:cs typeface="Arial" pitchFamily="34" charset="-120"/>
+              </a:rPr>
+              <a:t>DE DÓNDE SALE</a:t>
+            </a:r>
+            <a:endParaRPr lang="en-US" sz="950" dirty="0"/>
+          </a:p>
+        </p:txBody>
+      </p:sp>
+      <p:sp>
+        <p:nvSpPr>
+          <p:cNvPr id="6" name="Text"/>
+          <p:cNvSpPr txBox="1"/>
+          <p:nvPr/>
+        </p:nvSpPr>
+        <p:spPr>
+          <a:xfrm>
+            <a:off x="2516928" y="1700000"/>
+            <a:ext cx="8907839" cy="300000"/>
+          </a:xfrm>
+          <a:prstGeom prst="rect">
+            <a:avLst/>
+          </a:prstGeom>
+          <a:noFill/>
+          <a:ln/>
+        </p:spPr>
+        <p:txBody>
+          <a:bodyPr wrap="square" lIns="0" tIns="0" rIns="0" bIns="0" rtlCol="0" anchor="ctr"/>
+          <a:lstStyle/>
+          <a:p>
+            <a:pPr indent="0" marL="0">
+              <a:buNone/>
+            </a:pPr>
+            <a:r>
+              <a:rPr lang="en-US" sz="1100" dirty="0">
+                <a:solidFill>
+                  <a:srgbClr val="16262E"/>
+                </a:solidFill>
+                <a:latin typeface="Calibri" pitchFamily="34" charset="0"/>
+                <a:ea typeface="Calibri" pitchFamily="34" charset="-122"/>
+                <a:cs typeface="Calibri" pitchFamily="34" charset="-120"/>
+              </a:rPr>
+              <a:t>El mismo artículo 9 de la lámina anterior. Los dos asistentes son hipotéticos; los cinco requisitos son del expediente.</a:t>
+            </a:r>
+            <a:endParaRPr lang="en-US" sz="1100" dirty="0"/>
+          </a:p>
+        </p:txBody>
+      </p:sp>
+      <p:sp>
+        <p:nvSpPr>
+          <p:cNvPr id="7" name="Shape"/>
+          <p:cNvSpPr/>
+          <p:nvPr/>
+        </p:nvSpPr>
+        <p:spPr>
+          <a:xfrm>
+            <a:off x="566928" y="2100000"/>
             <a:ext cx="3100000" cy="420000"/>
           </a:xfrm>
           <a:prstGeom prst="rect">
@@ -15134,13 +15875,13 @@
       </p:sp>
       <p:sp>
         <p:nvSpPr>
-          <p:cNvPr id="5" name="Text"/>
-          <p:cNvSpPr txBox="1"/>
-          <p:nvPr/>
-        </p:nvSpPr>
-        <p:spPr>
-          <a:xfrm>
-            <a:off x="686928" y="1800000"/>
+          <p:cNvPr id="8" name="Text"/>
+          <p:cNvSpPr txBox="1"/>
+          <p:nvPr/>
+        </p:nvSpPr>
+        <p:spPr>
+          <a:xfrm>
+            <a:off x="686928" y="2100000"/>
             <a:ext cx="2860000" cy="420000"/>
           </a:xfrm>
           <a:prstGeom prst="rect">
@@ -15173,13 +15914,13 @@
       </p:sp>
       <p:sp>
         <p:nvSpPr>
-          <p:cNvPr id="6" name="Shape"/>
+          <p:cNvPr id="9" name="Shape"/>
           <p:cNvSpPr/>
           <p:nvPr/>
         </p:nvSpPr>
         <p:spPr>
           <a:xfrm>
-            <a:off x="3666928" y="1800000"/>
+            <a:off x="3666928" y="2100000"/>
             <a:ext cx="2652613" cy="420000"/>
           </a:xfrm>
           <a:prstGeom prst="rect">
@@ -15198,13 +15939,13 @@
       </p:sp>
       <p:sp>
         <p:nvSpPr>
-          <p:cNvPr id="7" name="Text"/>
-          <p:cNvSpPr txBox="1"/>
-          <p:nvPr/>
-        </p:nvSpPr>
-        <p:spPr>
-          <a:xfrm>
-            <a:off x="3786928" y="1800000"/>
+          <p:cNvPr id="10" name="Text"/>
+          <p:cNvSpPr txBox="1"/>
+          <p:nvPr/>
+        </p:nvSpPr>
+        <p:spPr>
+          <a:xfrm>
+            <a:off x="3786928" y="2100000"/>
             <a:ext cx="2412613" cy="420000"/>
           </a:xfrm>
           <a:prstGeom prst="rect">
@@ -15237,13 +15978,13 @@
       </p:sp>
       <p:sp>
         <p:nvSpPr>
-          <p:cNvPr id="8" name="Shape"/>
+          <p:cNvPr id="11" name="Shape"/>
           <p:cNvSpPr/>
           <p:nvPr/>
         </p:nvSpPr>
         <p:spPr>
           <a:xfrm>
-            <a:off x="6319541" y="1800000"/>
+            <a:off x="6319541" y="2100000"/>
             <a:ext cx="2652613" cy="420000"/>
           </a:xfrm>
           <a:prstGeom prst="rect">
@@ -15262,13 +16003,13 @@
       </p:sp>
       <p:sp>
         <p:nvSpPr>
-          <p:cNvPr id="9" name="Text"/>
-          <p:cNvSpPr txBox="1"/>
-          <p:nvPr/>
-        </p:nvSpPr>
-        <p:spPr>
-          <a:xfrm>
-            <a:off x="6439541" y="1800000"/>
+          <p:cNvPr id="12" name="Text"/>
+          <p:cNvSpPr txBox="1"/>
+          <p:nvPr/>
+        </p:nvSpPr>
+        <p:spPr>
+          <a:xfrm>
+            <a:off x="6439541" y="2100000"/>
             <a:ext cx="2412613" cy="420000"/>
           </a:xfrm>
           <a:prstGeom prst="rect">
@@ -15301,13 +16042,13 @@
       </p:sp>
       <p:sp>
         <p:nvSpPr>
-          <p:cNvPr id="10" name="Shape"/>
+          <p:cNvPr id="13" name="Shape"/>
           <p:cNvSpPr/>
           <p:nvPr/>
         </p:nvSpPr>
         <p:spPr>
           <a:xfrm>
-            <a:off x="8972154" y="1800000"/>
+            <a:off x="8972154" y="2100000"/>
             <a:ext cx="2652613" cy="420000"/>
           </a:xfrm>
           <a:prstGeom prst="rect">
@@ -15326,13 +16067,13 @@
       </p:sp>
       <p:sp>
         <p:nvSpPr>
-          <p:cNvPr id="11" name="Text"/>
-          <p:cNvSpPr txBox="1"/>
-          <p:nvPr/>
-        </p:nvSpPr>
-        <p:spPr>
-          <a:xfrm>
-            <a:off x="9092154" y="1800000"/>
+          <p:cNvPr id="14" name="Text"/>
+          <p:cNvSpPr txBox="1"/>
+          <p:nvPr/>
+        </p:nvSpPr>
+        <p:spPr>
+          <a:xfrm>
+            <a:off x="9092154" y="2100000"/>
             <a:ext cx="2412613" cy="420000"/>
           </a:xfrm>
           <a:prstGeom prst="rect">
@@ -15365,14 +16106,14 @@
       </p:sp>
       <p:sp>
         <p:nvSpPr>
-          <p:cNvPr id="12" name="Shape"/>
+          <p:cNvPr id="15" name="Shape"/>
           <p:cNvSpPr/>
           <p:nvPr/>
         </p:nvSpPr>
         <p:spPr>
           <a:xfrm>
-            <a:off x="566928" y="2220000"/>
-            <a:ext cx="3100000" cy="780000"/>
+            <a:off x="566928" y="2520000"/>
+            <a:ext cx="3100000" cy="620000"/>
           </a:xfrm>
           <a:prstGeom prst="rect">
             <a:avLst/>
@@ -15390,14 +16131,14 @@
       </p:sp>
       <p:sp>
         <p:nvSpPr>
-          <p:cNvPr id="13" name="Text"/>
-          <p:cNvSpPr txBox="1"/>
-          <p:nvPr/>
-        </p:nvSpPr>
-        <p:spPr>
-          <a:xfrm>
-            <a:off x="686928" y="2220000"/>
-            <a:ext cx="2860000" cy="780000"/>
+          <p:cNvPr id="16" name="Text"/>
+          <p:cNvSpPr txBox="1"/>
+          <p:nvPr/>
+        </p:nvSpPr>
+        <p:spPr>
+          <a:xfrm>
+            <a:off x="686928" y="2520000"/>
+            <a:ext cx="2860000" cy="620000"/>
           </a:xfrm>
           <a:prstGeom prst="rect">
             <a:avLst/>
@@ -15416,7 +16157,7 @@
               <a:buNone/>
             </a:pPr>
             <a:r>
-              <a:rPr lang="en-US" sz="1250" b="1" dirty="0">
+              <a:rPr lang="en-US" sz="1200" b="1" dirty="0">
                 <a:solidFill>
                   <a:srgbClr val="16262E"/>
                 </a:solidFill>
@@ -15426,20 +16167,20 @@
               </a:rPr>
               <a:t>Lo que hizo</a:t>
             </a:r>
-            <a:endParaRPr lang="en-US" sz="1250" dirty="0"/>
-          </a:p>
-        </p:txBody>
-      </p:sp>
-      <p:sp>
-        <p:nvSpPr>
-          <p:cNvPr id="14" name="Shape"/>
+            <a:endParaRPr lang="en-US" sz="1200" dirty="0"/>
+          </a:p>
+        </p:txBody>
+      </p:sp>
+      <p:sp>
+        <p:nvSpPr>
+          <p:cNvPr id="17" name="Shape"/>
           <p:cNvSpPr/>
           <p:nvPr/>
         </p:nvSpPr>
         <p:spPr>
           <a:xfrm>
-            <a:off x="3666928" y="2220000"/>
-            <a:ext cx="2652613" cy="780000"/>
+            <a:off x="3666928" y="2520000"/>
+            <a:ext cx="2652613" cy="620000"/>
           </a:xfrm>
           <a:prstGeom prst="rect">
             <a:avLst/>
@@ -15457,14 +16198,14 @@
       </p:sp>
       <p:sp>
         <p:nvSpPr>
-          <p:cNvPr id="15" name="Text"/>
-          <p:cNvSpPr txBox="1"/>
-          <p:nvPr/>
-        </p:nvSpPr>
-        <p:spPr>
-          <a:xfrm>
-            <a:off x="3786928" y="2220000"/>
-            <a:ext cx="2412613" cy="780000"/>
+          <p:cNvPr id="18" name="Text"/>
+          <p:cNvSpPr txBox="1"/>
+          <p:nvPr/>
+        </p:nvSpPr>
+        <p:spPr>
+          <a:xfrm>
+            <a:off x="3786928" y="2520000"/>
+            <a:ext cx="2412613" cy="620000"/>
           </a:xfrm>
           <a:prstGeom prst="rect">
             <a:avLst/>
@@ -15483,7 +16224,7 @@
               <a:buNone/>
             </a:pPr>
             <a:r>
-              <a:rPr lang="en-US" sz="1250" dirty="0">
+              <a:rPr lang="en-US" sz="1200" dirty="0">
                 <a:solidFill>
                   <a:srgbClr val="16262E"/>
                 </a:solidFill>
@@ -15493,20 +16234,20 @@
               </a:rPr>
               <a:t>Devuelve los 5 y agrega uno que no existe.</a:t>
             </a:r>
-            <a:endParaRPr lang="en-US" sz="1250" dirty="0"/>
-          </a:p>
-        </p:txBody>
-      </p:sp>
-      <p:sp>
-        <p:nvSpPr>
-          <p:cNvPr id="16" name="Shape"/>
+            <a:endParaRPr lang="en-US" sz="1200" dirty="0"/>
+          </a:p>
+        </p:txBody>
+      </p:sp>
+      <p:sp>
+        <p:nvSpPr>
+          <p:cNvPr id="19" name="Shape"/>
           <p:cNvSpPr/>
           <p:nvPr/>
         </p:nvSpPr>
         <p:spPr>
           <a:xfrm>
-            <a:off x="6319541" y="2220000"/>
-            <a:ext cx="2652613" cy="780000"/>
+            <a:off x="6319541" y="2520000"/>
+            <a:ext cx="2652613" cy="620000"/>
           </a:xfrm>
           <a:prstGeom prst="rect">
             <a:avLst/>
@@ -15524,14 +16265,14 @@
       </p:sp>
       <p:sp>
         <p:nvSpPr>
-          <p:cNvPr id="17" name="Text"/>
-          <p:cNvSpPr txBox="1"/>
-          <p:nvPr/>
-        </p:nvSpPr>
-        <p:spPr>
-          <a:xfrm>
-            <a:off x="6439541" y="2220000"/>
-            <a:ext cx="2412613" cy="780000"/>
+          <p:cNvPr id="20" name="Text"/>
+          <p:cNvSpPr txBox="1"/>
+          <p:nvPr/>
+        </p:nvSpPr>
+        <p:spPr>
+          <a:xfrm>
+            <a:off x="6439541" y="2520000"/>
+            <a:ext cx="2412613" cy="620000"/>
           </a:xfrm>
           <a:prstGeom prst="rect">
             <a:avLst/>
@@ -15550,7 +16291,7 @@
               <a:buNone/>
             </a:pPr>
             <a:r>
-              <a:rPr lang="en-US" sz="1250" dirty="0">
+              <a:rPr lang="en-US" sz="1200" dirty="0">
                 <a:solidFill>
                   <a:srgbClr val="16262E"/>
                 </a:solidFill>
@@ -15560,20 +16301,20 @@
               </a:rPr>
               <a:t>Devuelve 4 correctos y se salta uno.</a:t>
             </a:r>
-            <a:endParaRPr lang="en-US" sz="1250" dirty="0"/>
-          </a:p>
-        </p:txBody>
-      </p:sp>
-      <p:sp>
-        <p:nvSpPr>
-          <p:cNvPr id="18" name="Shape"/>
+            <a:endParaRPr lang="en-US" sz="1200" dirty="0"/>
+          </a:p>
+        </p:txBody>
+      </p:sp>
+      <p:sp>
+        <p:nvSpPr>
+          <p:cNvPr id="21" name="Shape"/>
           <p:cNvSpPr/>
           <p:nvPr/>
         </p:nvSpPr>
         <p:spPr>
           <a:xfrm>
-            <a:off x="8972154" y="2220000"/>
-            <a:ext cx="2652613" cy="780000"/>
+            <a:off x="8972154" y="2520000"/>
+            <a:ext cx="2652613" cy="620000"/>
           </a:xfrm>
           <a:prstGeom prst="rect">
             <a:avLst/>
@@ -15591,14 +16332,14 @@
       </p:sp>
       <p:sp>
         <p:nvSpPr>
-          <p:cNvPr id="19" name="Text"/>
-          <p:cNvSpPr txBox="1"/>
-          <p:nvPr/>
-        </p:nvSpPr>
-        <p:spPr>
-          <a:xfrm>
-            <a:off x="9092154" y="2220000"/>
-            <a:ext cx="2412613" cy="780000"/>
+          <p:cNvPr id="22" name="Text"/>
+          <p:cNvSpPr txBox="1"/>
+          <p:nvPr/>
+        </p:nvSpPr>
+        <p:spPr>
+          <a:xfrm>
+            <a:off x="9092154" y="2520000"/>
+            <a:ext cx="2412613" cy="620000"/>
           </a:xfrm>
           <a:prstGeom prst="rect">
             <a:avLst/>
@@ -15617,7 +16358,7 @@
               <a:buNone/>
             </a:pPr>
             <a:r>
-              <a:rPr lang="en-US" sz="1250" dirty="0">
+              <a:rPr lang="en-US" sz="1200" dirty="0">
                 <a:solidFill>
                   <a:srgbClr val="16262E"/>
                 </a:solidFill>
@@ -15627,20 +16368,20 @@
               </a:rPr>
               <a:t/>
             </a:r>
-            <a:endParaRPr lang="en-US" sz="1250" dirty="0"/>
-          </a:p>
-        </p:txBody>
-      </p:sp>
-      <p:sp>
-        <p:nvSpPr>
-          <p:cNvPr id="20" name="Shape"/>
+            <a:endParaRPr lang="en-US" sz="1200" dirty="0"/>
+          </a:p>
+        </p:txBody>
+      </p:sp>
+      <p:sp>
+        <p:nvSpPr>
+          <p:cNvPr id="23" name="Shape"/>
           <p:cNvSpPr/>
           <p:nvPr/>
         </p:nvSpPr>
         <p:spPr>
           <a:xfrm>
-            <a:off x="566928" y="3000000"/>
-            <a:ext cx="3100000" cy="780000"/>
+            <a:off x="566928" y="3140000"/>
+            <a:ext cx="3100000" cy="620000"/>
           </a:xfrm>
           <a:prstGeom prst="rect">
             <a:avLst/>
@@ -15658,14 +16399,14 @@
       </p:sp>
       <p:sp>
         <p:nvSpPr>
-          <p:cNvPr id="21" name="Text"/>
-          <p:cNvSpPr txBox="1"/>
-          <p:nvPr/>
-        </p:nvSpPr>
-        <p:spPr>
-          <a:xfrm>
-            <a:off x="686928" y="3000000"/>
-            <a:ext cx="2860000" cy="780000"/>
+          <p:cNvPr id="24" name="Text"/>
+          <p:cNvSpPr txBox="1"/>
+          <p:nvPr/>
+        </p:nvSpPr>
+        <p:spPr>
+          <a:xfrm>
+            <a:off x="686928" y="3140000"/>
+            <a:ext cx="2860000" cy="620000"/>
           </a:xfrm>
           <a:prstGeom prst="rect">
             <a:avLst/>
@@ -15684,7 +16425,7 @@
               <a:buNone/>
             </a:pPr>
             <a:r>
-              <a:rPr lang="en-US" sz="1250" b="1" dirty="0">
+              <a:rPr lang="en-US" sz="1200" b="1" dirty="0">
                 <a:solidFill>
                   <a:srgbClr val="16262E"/>
                 </a:solidFill>
@@ -15694,20 +16435,20 @@
               </a:rPr>
               <a:t>Precisión y recuperación</a:t>
             </a:r>
-            <a:endParaRPr lang="en-US" sz="1250" dirty="0"/>
-          </a:p>
-        </p:txBody>
-      </p:sp>
-      <p:sp>
-        <p:nvSpPr>
-          <p:cNvPr id="22" name="Shape"/>
+            <a:endParaRPr lang="en-US" sz="1200" dirty="0"/>
+          </a:p>
+        </p:txBody>
+      </p:sp>
+      <p:sp>
+        <p:nvSpPr>
+          <p:cNvPr id="25" name="Shape"/>
           <p:cNvSpPr/>
           <p:nvPr/>
         </p:nvSpPr>
         <p:spPr>
           <a:xfrm>
-            <a:off x="3666928" y="3000000"/>
-            <a:ext cx="2652613" cy="780000"/>
+            <a:off x="3666928" y="3140000"/>
+            <a:ext cx="2652613" cy="620000"/>
           </a:xfrm>
           <a:prstGeom prst="rect">
             <a:avLst/>
@@ -15725,14 +16466,14 @@
       </p:sp>
       <p:sp>
         <p:nvSpPr>
-          <p:cNvPr id="23" name="Text"/>
-          <p:cNvSpPr txBox="1"/>
-          <p:nvPr/>
-        </p:nvSpPr>
-        <p:spPr>
-          <a:xfrm>
-            <a:off x="3786928" y="3000000"/>
-            <a:ext cx="2412613" cy="780000"/>
+          <p:cNvPr id="26" name="Text"/>
+          <p:cNvSpPr txBox="1"/>
+          <p:nvPr/>
+        </p:nvSpPr>
+        <p:spPr>
+          <a:xfrm>
+            <a:off x="3786928" y="3140000"/>
+            <a:ext cx="2412613" cy="620000"/>
           </a:xfrm>
           <a:prstGeom prst="rect">
             <a:avLst/>
@@ -15751,7 +16492,7 @@
               <a:buNone/>
             </a:pPr>
             <a:r>
-              <a:rPr lang="en-US" sz="1250" dirty="0">
+              <a:rPr lang="en-US" sz="1200" dirty="0">
                 <a:solidFill>
                   <a:srgbClr val="16262E"/>
                 </a:solidFill>
@@ -15761,20 +16502,20 @@
               </a:rPr>
               <a:t>P = 5/6 = 0.83   R = 5/5 = 1.00</a:t>
             </a:r>
-            <a:endParaRPr lang="en-US" sz="1250" dirty="0"/>
-          </a:p>
-        </p:txBody>
-      </p:sp>
-      <p:sp>
-        <p:nvSpPr>
-          <p:cNvPr id="24" name="Shape"/>
+            <a:endParaRPr lang="en-US" sz="1200" dirty="0"/>
+          </a:p>
+        </p:txBody>
+      </p:sp>
+      <p:sp>
+        <p:nvSpPr>
+          <p:cNvPr id="27" name="Shape"/>
           <p:cNvSpPr/>
           <p:nvPr/>
         </p:nvSpPr>
         <p:spPr>
           <a:xfrm>
-            <a:off x="6319541" y="3000000"/>
-            <a:ext cx="2652613" cy="780000"/>
+            <a:off x="6319541" y="3140000"/>
+            <a:ext cx="2652613" cy="620000"/>
           </a:xfrm>
           <a:prstGeom prst="rect">
             <a:avLst/>
@@ -15792,14 +16533,14 @@
       </p:sp>
       <p:sp>
         <p:nvSpPr>
-          <p:cNvPr id="25" name="Text"/>
-          <p:cNvSpPr txBox="1"/>
-          <p:nvPr/>
-        </p:nvSpPr>
-        <p:spPr>
-          <a:xfrm>
-            <a:off x="6439541" y="3000000"/>
-            <a:ext cx="2412613" cy="780000"/>
+          <p:cNvPr id="28" name="Text"/>
+          <p:cNvSpPr txBox="1"/>
+          <p:nvPr/>
+        </p:nvSpPr>
+        <p:spPr>
+          <a:xfrm>
+            <a:off x="6439541" y="3140000"/>
+            <a:ext cx="2412613" cy="620000"/>
           </a:xfrm>
           <a:prstGeom prst="rect">
             <a:avLst/>
@@ -15818,7 +16559,7 @@
               <a:buNone/>
             </a:pPr>
             <a:r>
-              <a:rPr lang="en-US" sz="1250" dirty="0">
+              <a:rPr lang="en-US" sz="1200" dirty="0">
                 <a:solidFill>
                   <a:srgbClr val="16262E"/>
                 </a:solidFill>
@@ -15828,20 +16569,20 @@
               </a:rPr>
               <a:t>P = 4/4 = 1.00   R = 4/5 = 0.80</a:t>
             </a:r>
-            <a:endParaRPr lang="en-US" sz="1250" dirty="0"/>
-          </a:p>
-        </p:txBody>
-      </p:sp>
-      <p:sp>
-        <p:nvSpPr>
-          <p:cNvPr id="26" name="Shape"/>
+            <a:endParaRPr lang="en-US" sz="1200" dirty="0"/>
+          </a:p>
+        </p:txBody>
+      </p:sp>
+      <p:sp>
+        <p:nvSpPr>
+          <p:cNvPr id="29" name="Shape"/>
           <p:cNvSpPr/>
           <p:nvPr/>
         </p:nvSpPr>
         <p:spPr>
           <a:xfrm>
-            <a:off x="8972154" y="3000000"/>
-            <a:ext cx="2652613" cy="780000"/>
+            <a:off x="8972154" y="3140000"/>
+            <a:ext cx="2652613" cy="620000"/>
           </a:xfrm>
           <a:prstGeom prst="rect">
             <a:avLst/>
@@ -15859,14 +16600,14 @@
       </p:sp>
       <p:sp>
         <p:nvSpPr>
-          <p:cNvPr id="27" name="Text"/>
-          <p:cNvSpPr txBox="1"/>
-          <p:nvPr/>
-        </p:nvSpPr>
-        <p:spPr>
-          <a:xfrm>
-            <a:off x="9092154" y="3000000"/>
-            <a:ext cx="2412613" cy="780000"/>
+          <p:cNvPr id="30" name="Text"/>
+          <p:cNvSpPr txBox="1"/>
+          <p:nvPr/>
+        </p:nvSpPr>
+        <p:spPr>
+          <a:xfrm>
+            <a:off x="9092154" y="3140000"/>
+            <a:ext cx="2412613" cy="620000"/>
           </a:xfrm>
           <a:prstGeom prst="rect">
             <a:avLst/>
@@ -15885,7 +16626,7 @@
               <a:buNone/>
             </a:pPr>
             <a:r>
-              <a:rPr lang="en-US" sz="1250" dirty="0">
+              <a:rPr lang="en-US" sz="1200" dirty="0">
                 <a:solidFill>
                   <a:srgbClr val="16262E"/>
                 </a:solidFill>
@@ -15895,20 +16636,20 @@
               </a:rPr>
               <a:t/>
             </a:r>
-            <a:endParaRPr lang="en-US" sz="1250" dirty="0"/>
-          </a:p>
-        </p:txBody>
-      </p:sp>
-      <p:sp>
-        <p:nvSpPr>
-          <p:cNvPr id="28" name="Shape"/>
+            <a:endParaRPr lang="en-US" sz="1200" dirty="0"/>
+          </a:p>
+        </p:txBody>
+      </p:sp>
+      <p:sp>
+        <p:nvSpPr>
+          <p:cNvPr id="31" name="Shape"/>
           <p:cNvSpPr/>
           <p:nvPr/>
         </p:nvSpPr>
         <p:spPr>
           <a:xfrm>
-            <a:off x="566928" y="3780000"/>
-            <a:ext cx="3100000" cy="780000"/>
+            <a:off x="566928" y="3760000"/>
+            <a:ext cx="3100000" cy="620000"/>
           </a:xfrm>
           <a:prstGeom prst="rect">
             <a:avLst/>
@@ -15926,14 +16667,14 @@
       </p:sp>
       <p:sp>
         <p:nvSpPr>
-          <p:cNvPr id="29" name="Text"/>
-          <p:cNvSpPr txBox="1"/>
-          <p:nvPr/>
-        </p:nvSpPr>
-        <p:spPr>
-          <a:xfrm>
-            <a:off x="686928" y="3780000"/>
-            <a:ext cx="2860000" cy="780000"/>
+          <p:cNvPr id="32" name="Text"/>
+          <p:cNvSpPr txBox="1"/>
+          <p:nvPr/>
+        </p:nvSpPr>
+        <p:spPr>
+          <a:xfrm>
+            <a:off x="686928" y="3760000"/>
+            <a:ext cx="2860000" cy="620000"/>
           </a:xfrm>
           <a:prstGeom prst="rect">
             <a:avLst/>
@@ -15952,7 +16693,7 @@
               <a:buNone/>
             </a:pPr>
             <a:r>
-              <a:rPr lang="en-US" sz="1250" b="1" dirty="0">
+              <a:rPr lang="en-US" sz="1200" b="1" dirty="0">
                 <a:solidFill>
                   <a:srgbClr val="16262E"/>
                 </a:solidFill>
@@ -15962,20 +16703,20 @@
               </a:rPr>
               <a:t>F1, los dos errores pesan igual</a:t>
             </a:r>
-            <a:endParaRPr lang="en-US" sz="1250" dirty="0"/>
-          </a:p>
-        </p:txBody>
-      </p:sp>
-      <p:sp>
-        <p:nvSpPr>
-          <p:cNvPr id="30" name="Shape"/>
+            <a:endParaRPr lang="en-US" sz="1200" dirty="0"/>
+          </a:p>
+        </p:txBody>
+      </p:sp>
+      <p:sp>
+        <p:nvSpPr>
+          <p:cNvPr id="33" name="Shape"/>
           <p:cNvSpPr/>
           <p:nvPr/>
         </p:nvSpPr>
         <p:spPr>
           <a:xfrm>
-            <a:off x="3666928" y="3780000"/>
-            <a:ext cx="2652613" cy="780000"/>
+            <a:off x="3666928" y="3760000"/>
+            <a:ext cx="2652613" cy="620000"/>
           </a:xfrm>
           <a:prstGeom prst="rect">
             <a:avLst/>
@@ -15993,14 +16734,14 @@
       </p:sp>
       <p:sp>
         <p:nvSpPr>
-          <p:cNvPr id="31" name="Text"/>
-          <p:cNvSpPr txBox="1"/>
-          <p:nvPr/>
-        </p:nvSpPr>
-        <p:spPr>
-          <a:xfrm>
-            <a:off x="3786928" y="3780000"/>
-            <a:ext cx="2412613" cy="780000"/>
+          <p:cNvPr id="34" name="Text"/>
+          <p:cNvSpPr txBox="1"/>
+          <p:nvPr/>
+        </p:nvSpPr>
+        <p:spPr>
+          <a:xfrm>
+            <a:off x="3786928" y="3760000"/>
+            <a:ext cx="2412613" cy="620000"/>
           </a:xfrm>
           <a:prstGeom prst="rect">
             <a:avLst/>
@@ -16019,7 +16760,7 @@
               <a:buNone/>
             </a:pPr>
             <a:r>
-              <a:rPr lang="en-US" sz="1250" dirty="0">
+              <a:rPr lang="en-US" sz="1200" dirty="0">
                 <a:solidFill>
                   <a:srgbClr val="16262E"/>
                 </a:solidFill>
@@ -16029,20 +16770,20 @@
               </a:rPr>
               <a:t>10/11 = 0.91</a:t>
             </a:r>
-            <a:endParaRPr lang="en-US" sz="1250" dirty="0"/>
-          </a:p>
-        </p:txBody>
-      </p:sp>
-      <p:sp>
-        <p:nvSpPr>
-          <p:cNvPr id="32" name="Shape"/>
+            <a:endParaRPr lang="en-US" sz="1200" dirty="0"/>
+          </a:p>
+        </p:txBody>
+      </p:sp>
+      <p:sp>
+        <p:nvSpPr>
+          <p:cNvPr id="35" name="Shape"/>
           <p:cNvSpPr/>
           <p:nvPr/>
         </p:nvSpPr>
         <p:spPr>
           <a:xfrm>
-            <a:off x="6319541" y="3780000"/>
-            <a:ext cx="2652613" cy="780000"/>
+            <a:off x="6319541" y="3760000"/>
+            <a:ext cx="2652613" cy="620000"/>
           </a:xfrm>
           <a:prstGeom prst="rect">
             <a:avLst/>
@@ -16060,14 +16801,14 @@
       </p:sp>
       <p:sp>
         <p:nvSpPr>
-          <p:cNvPr id="33" name="Text"/>
-          <p:cNvSpPr txBox="1"/>
-          <p:nvPr/>
-        </p:nvSpPr>
-        <p:spPr>
-          <a:xfrm>
-            <a:off x="6439541" y="3780000"/>
-            <a:ext cx="2412613" cy="780000"/>
+          <p:cNvPr id="36" name="Text"/>
+          <p:cNvSpPr txBox="1"/>
+          <p:nvPr/>
+        </p:nvSpPr>
+        <p:spPr>
+          <a:xfrm>
+            <a:off x="6439541" y="3760000"/>
+            <a:ext cx="2412613" cy="620000"/>
           </a:xfrm>
           <a:prstGeom prst="rect">
             <a:avLst/>
@@ -16086,7 +16827,7 @@
               <a:buNone/>
             </a:pPr>
             <a:r>
-              <a:rPr lang="en-US" sz="1250" dirty="0">
+              <a:rPr lang="en-US" sz="1200" dirty="0">
                 <a:solidFill>
                   <a:srgbClr val="16262E"/>
                 </a:solidFill>
@@ -16096,20 +16837,20 @@
               </a:rPr>
               <a:t>8/9 = 0.89</a:t>
             </a:r>
-            <a:endParaRPr lang="en-US" sz="1250" dirty="0"/>
-          </a:p>
-        </p:txBody>
-      </p:sp>
-      <p:sp>
-        <p:nvSpPr>
-          <p:cNvPr id="34" name="Shape"/>
+            <a:endParaRPr lang="en-US" sz="1200" dirty="0"/>
+          </a:p>
+        </p:txBody>
+      </p:sp>
+      <p:sp>
+        <p:nvSpPr>
+          <p:cNvPr id="37" name="Shape"/>
           <p:cNvSpPr/>
           <p:nvPr/>
         </p:nvSpPr>
         <p:spPr>
           <a:xfrm>
-            <a:off x="8972154" y="3780000"/>
-            <a:ext cx="2652613" cy="780000"/>
+            <a:off x="8972154" y="3760000"/>
+            <a:ext cx="2652613" cy="620000"/>
           </a:xfrm>
           <a:prstGeom prst="rect">
             <a:avLst/>
@@ -16127,14 +16868,14 @@
       </p:sp>
       <p:sp>
         <p:nvSpPr>
-          <p:cNvPr id="35" name="Text"/>
-          <p:cNvSpPr txBox="1"/>
-          <p:nvPr/>
-        </p:nvSpPr>
-        <p:spPr>
-          <a:xfrm>
-            <a:off x="9092154" y="3780000"/>
-            <a:ext cx="2412613" cy="780000"/>
+          <p:cNvPr id="38" name="Text"/>
+          <p:cNvSpPr txBox="1"/>
+          <p:nvPr/>
+        </p:nvSpPr>
+        <p:spPr>
+          <a:xfrm>
+            <a:off x="9092154" y="3760000"/>
+            <a:ext cx="2412613" cy="620000"/>
           </a:xfrm>
           <a:prstGeom prst="rect">
             <a:avLst/>
@@ -16153,7 +16894,7 @@
               <a:buNone/>
             </a:pPr>
             <a:r>
-              <a:rPr lang="en-US" sz="1250" dirty="0">
+              <a:rPr lang="en-US" sz="1200" dirty="0">
                 <a:solidFill>
                   <a:srgbClr val="16262E"/>
                 </a:solidFill>
@@ -16163,20 +16904,20 @@
               </a:rPr>
               <a:t>El que inventa</a:t>
             </a:r>
-            <a:endParaRPr lang="en-US" sz="1250" dirty="0"/>
-          </a:p>
-        </p:txBody>
-      </p:sp>
-      <p:sp>
-        <p:nvSpPr>
-          <p:cNvPr id="36" name="Shape"/>
+            <a:endParaRPr lang="en-US" sz="1200" dirty="0"/>
+          </a:p>
+        </p:txBody>
+      </p:sp>
+      <p:sp>
+        <p:nvSpPr>
+          <p:cNvPr id="39" name="Shape"/>
           <p:cNvSpPr/>
           <p:nvPr/>
         </p:nvSpPr>
         <p:spPr>
           <a:xfrm>
-            <a:off x="566928" y="4560000"/>
-            <a:ext cx="3100000" cy="780000"/>
+            <a:off x="566928" y="4380000"/>
+            <a:ext cx="3100000" cy="620000"/>
           </a:xfrm>
           <a:prstGeom prst="rect">
             <a:avLst/>
@@ -16194,14 +16935,14 @@
       </p:sp>
       <p:sp>
         <p:nvSpPr>
-          <p:cNvPr id="37" name="Text"/>
-          <p:cNvSpPr txBox="1"/>
-          <p:nvPr/>
-        </p:nvSpPr>
-        <p:spPr>
-          <a:xfrm>
-            <a:off x="686928" y="4560000"/>
-            <a:ext cx="2860000" cy="780000"/>
+          <p:cNvPr id="40" name="Text"/>
+          <p:cNvSpPr txBox="1"/>
+          <p:nvPr/>
+        </p:nvSpPr>
+        <p:spPr>
+          <a:xfrm>
+            <a:off x="686928" y="4380000"/>
+            <a:ext cx="2860000" cy="620000"/>
           </a:xfrm>
           <a:prstGeom prst="rect">
             <a:avLst/>
@@ -16220,7 +16961,7 @@
               <a:buNone/>
             </a:pPr>
             <a:r>
-              <a:rPr lang="en-US" sz="1250" b="1" dirty="0">
+              <a:rPr lang="en-US" sz="1200" b="1" dirty="0">
                 <a:solidFill>
                   <a:srgbClr val="16262E"/>
                 </a:solidFill>
@@ -16230,20 +16971,20 @@
               </a:rPr>
               <a:t>F2, omitir pesa el doble</a:t>
             </a:r>
-            <a:endParaRPr lang="en-US" sz="1250" dirty="0"/>
-          </a:p>
-        </p:txBody>
-      </p:sp>
-      <p:sp>
-        <p:nvSpPr>
-          <p:cNvPr id="38" name="Shape"/>
+            <a:endParaRPr lang="en-US" sz="1200" dirty="0"/>
+          </a:p>
+        </p:txBody>
+      </p:sp>
+      <p:sp>
+        <p:nvSpPr>
+          <p:cNvPr id="41" name="Shape"/>
           <p:cNvSpPr/>
           <p:nvPr/>
         </p:nvSpPr>
         <p:spPr>
           <a:xfrm>
-            <a:off x="3666928" y="4560000"/>
-            <a:ext cx="2652613" cy="780000"/>
+            <a:off x="3666928" y="4380000"/>
+            <a:ext cx="2652613" cy="620000"/>
           </a:xfrm>
           <a:prstGeom prst="rect">
             <a:avLst/>
@@ -16261,14 +17002,14 @@
       </p:sp>
       <p:sp>
         <p:nvSpPr>
-          <p:cNvPr id="39" name="Text"/>
-          <p:cNvSpPr txBox="1"/>
-          <p:nvPr/>
-        </p:nvSpPr>
-        <p:spPr>
-          <a:xfrm>
-            <a:off x="3786928" y="4560000"/>
-            <a:ext cx="2412613" cy="780000"/>
+          <p:cNvPr id="42" name="Text"/>
+          <p:cNvSpPr txBox="1"/>
+          <p:nvPr/>
+        </p:nvSpPr>
+        <p:spPr>
+          <a:xfrm>
+            <a:off x="3786928" y="4380000"/>
+            <a:ext cx="2412613" cy="620000"/>
           </a:xfrm>
           <a:prstGeom prst="rect">
             <a:avLst/>
@@ -16287,7 +17028,7 @@
               <a:buNone/>
             </a:pPr>
             <a:r>
-              <a:rPr lang="en-US" sz="1250" dirty="0">
+              <a:rPr lang="en-US" sz="1200" dirty="0">
                 <a:solidFill>
                   <a:srgbClr val="16262E"/>
                 </a:solidFill>
@@ -16297,20 +17038,20 @@
               </a:rPr>
               <a:t>0.96</a:t>
             </a:r>
-            <a:endParaRPr lang="en-US" sz="1250" dirty="0"/>
-          </a:p>
-        </p:txBody>
-      </p:sp>
-      <p:sp>
-        <p:nvSpPr>
-          <p:cNvPr id="40" name="Shape"/>
+            <a:endParaRPr lang="en-US" sz="1200" dirty="0"/>
+          </a:p>
+        </p:txBody>
+      </p:sp>
+      <p:sp>
+        <p:nvSpPr>
+          <p:cNvPr id="43" name="Shape"/>
           <p:cNvSpPr/>
           <p:nvPr/>
         </p:nvSpPr>
         <p:spPr>
           <a:xfrm>
-            <a:off x="6319541" y="4560000"/>
-            <a:ext cx="2652613" cy="780000"/>
+            <a:off x="6319541" y="4380000"/>
+            <a:ext cx="2652613" cy="620000"/>
           </a:xfrm>
           <a:prstGeom prst="rect">
             <a:avLst/>
@@ -16328,14 +17069,14 @@
       </p:sp>
       <p:sp>
         <p:nvSpPr>
-          <p:cNvPr id="41" name="Text"/>
-          <p:cNvSpPr txBox="1"/>
-          <p:nvPr/>
-        </p:nvSpPr>
-        <p:spPr>
-          <a:xfrm>
-            <a:off x="6439541" y="4560000"/>
-            <a:ext cx="2412613" cy="780000"/>
+          <p:cNvPr id="44" name="Text"/>
+          <p:cNvSpPr txBox="1"/>
+          <p:nvPr/>
+        </p:nvSpPr>
+        <p:spPr>
+          <a:xfrm>
+            <a:off x="6439541" y="4380000"/>
+            <a:ext cx="2412613" cy="620000"/>
           </a:xfrm>
           <a:prstGeom prst="rect">
             <a:avLst/>
@@ -16354,7 +17095,7 @@
               <a:buNone/>
             </a:pPr>
             <a:r>
-              <a:rPr lang="en-US" sz="1250" dirty="0">
+              <a:rPr lang="en-US" sz="1200" dirty="0">
                 <a:solidFill>
                   <a:srgbClr val="16262E"/>
                 </a:solidFill>
@@ -16364,20 +17105,20 @@
               </a:rPr>
               <a:t>0.83</a:t>
             </a:r>
-            <a:endParaRPr lang="en-US" sz="1250" dirty="0"/>
-          </a:p>
-        </p:txBody>
-      </p:sp>
-      <p:sp>
-        <p:nvSpPr>
-          <p:cNvPr id="42" name="Shape"/>
+            <a:endParaRPr lang="en-US" sz="1200" dirty="0"/>
+          </a:p>
+        </p:txBody>
+      </p:sp>
+      <p:sp>
+        <p:nvSpPr>
+          <p:cNvPr id="45" name="Shape"/>
           <p:cNvSpPr/>
           <p:nvPr/>
         </p:nvSpPr>
         <p:spPr>
           <a:xfrm>
-            <a:off x="8972154" y="4560000"/>
-            <a:ext cx="2652613" cy="780000"/>
+            <a:off x="8972154" y="4380000"/>
+            <a:ext cx="2652613" cy="620000"/>
           </a:xfrm>
           <a:prstGeom prst="rect">
             <a:avLst/>
@@ -16395,14 +17136,14 @@
       </p:sp>
       <p:sp>
         <p:nvSpPr>
-          <p:cNvPr id="43" name="Text"/>
-          <p:cNvSpPr txBox="1"/>
-          <p:nvPr/>
-        </p:nvSpPr>
-        <p:spPr>
-          <a:xfrm>
-            <a:off x="9092154" y="4560000"/>
-            <a:ext cx="2412613" cy="780000"/>
+          <p:cNvPr id="46" name="Text"/>
+          <p:cNvSpPr txBox="1"/>
+          <p:nvPr/>
+        </p:nvSpPr>
+        <p:spPr>
+          <a:xfrm>
+            <a:off x="9092154" y="4380000"/>
+            <a:ext cx="2412613" cy="620000"/>
           </a:xfrm>
           <a:prstGeom prst="rect">
             <a:avLst/>
@@ -16421,7 +17162,7 @@
               <a:buNone/>
             </a:pPr>
             <a:r>
-              <a:rPr lang="en-US" sz="1250" dirty="0">
+              <a:rPr lang="en-US" sz="1200" dirty="0">
                 <a:solidFill>
                   <a:srgbClr val="16262E"/>
                 </a:solidFill>
@@ -16431,20 +17172,20 @@
               </a:rPr>
               <a:t>El que inventa, por mucho</a:t>
             </a:r>
-            <a:endParaRPr lang="en-US" sz="1250" dirty="0"/>
-          </a:p>
-        </p:txBody>
-      </p:sp>
-      <p:sp>
-        <p:nvSpPr>
-          <p:cNvPr id="44" name="Shape"/>
+            <a:endParaRPr lang="en-US" sz="1200" dirty="0"/>
+          </a:p>
+        </p:txBody>
+      </p:sp>
+      <p:sp>
+        <p:nvSpPr>
+          <p:cNvPr id="47" name="Shape"/>
           <p:cNvSpPr/>
           <p:nvPr/>
         </p:nvSpPr>
         <p:spPr>
           <a:xfrm>
-            <a:off x="566928" y="5340000"/>
-            <a:ext cx="3100000" cy="780000"/>
+            <a:off x="566928" y="5000000"/>
+            <a:ext cx="3100000" cy="620000"/>
           </a:xfrm>
           <a:prstGeom prst="rect">
             <a:avLst/>
@@ -16462,14 +17203,14 @@
       </p:sp>
       <p:sp>
         <p:nvSpPr>
-          <p:cNvPr id="45" name="Text"/>
-          <p:cNvSpPr txBox="1"/>
-          <p:nvPr/>
-        </p:nvSpPr>
-        <p:spPr>
-          <a:xfrm>
-            <a:off x="686928" y="5340000"/>
-            <a:ext cx="2860000" cy="780000"/>
+          <p:cNvPr id="48" name="Text"/>
+          <p:cNvSpPr txBox="1"/>
+          <p:nvPr/>
+        </p:nvSpPr>
+        <p:spPr>
+          <a:xfrm>
+            <a:off x="686928" y="5000000"/>
+            <a:ext cx="2860000" cy="620000"/>
           </a:xfrm>
           <a:prstGeom prst="rect">
             <a:avLst/>
@@ -16488,7 +17229,7 @@
               <a:buNone/>
             </a:pPr>
             <a:r>
-              <a:rPr lang="en-US" sz="1250" b="1" dirty="0">
+              <a:rPr lang="en-US" sz="1200" b="1" dirty="0">
                 <a:solidFill>
                   <a:srgbClr val="16262E"/>
                 </a:solidFill>
@@ -16498,20 +17239,20 @@
               </a:rPr>
               <a:t>F0.5, inventar pesa el doble</a:t>
             </a:r>
-            <a:endParaRPr lang="en-US" sz="1250" dirty="0"/>
-          </a:p>
-        </p:txBody>
-      </p:sp>
-      <p:sp>
-        <p:nvSpPr>
-          <p:cNvPr id="46" name="Shape"/>
+            <a:endParaRPr lang="en-US" sz="1200" dirty="0"/>
+          </a:p>
+        </p:txBody>
+      </p:sp>
+      <p:sp>
+        <p:nvSpPr>
+          <p:cNvPr id="49" name="Shape"/>
           <p:cNvSpPr/>
           <p:nvPr/>
         </p:nvSpPr>
         <p:spPr>
           <a:xfrm>
-            <a:off x="3666928" y="5340000"/>
-            <a:ext cx="2652613" cy="780000"/>
+            <a:off x="3666928" y="5000000"/>
+            <a:ext cx="2652613" cy="620000"/>
           </a:xfrm>
           <a:prstGeom prst="rect">
             <a:avLst/>
@@ -16529,14 +17270,14 @@
       </p:sp>
       <p:sp>
         <p:nvSpPr>
-          <p:cNvPr id="47" name="Text"/>
-          <p:cNvSpPr txBox="1"/>
-          <p:nvPr/>
-        </p:nvSpPr>
-        <p:spPr>
-          <a:xfrm>
-            <a:off x="3786928" y="5340000"/>
-            <a:ext cx="2412613" cy="780000"/>
+          <p:cNvPr id="50" name="Text"/>
+          <p:cNvSpPr txBox="1"/>
+          <p:nvPr/>
+        </p:nvSpPr>
+        <p:spPr>
+          <a:xfrm>
+            <a:off x="3786928" y="5000000"/>
+            <a:ext cx="2412613" cy="620000"/>
           </a:xfrm>
           <a:prstGeom prst="rect">
             <a:avLst/>
@@ -16555,7 +17296,7 @@
               <a:buNone/>
             </a:pPr>
             <a:r>
-              <a:rPr lang="en-US" sz="1250" dirty="0">
+              <a:rPr lang="en-US" sz="1200" dirty="0">
                 <a:solidFill>
                   <a:srgbClr val="16262E"/>
                 </a:solidFill>
@@ -16565,20 +17306,20 @@
               </a:rPr>
               <a:t>0.86</a:t>
             </a:r>
-            <a:endParaRPr lang="en-US" sz="1250" dirty="0"/>
-          </a:p>
-        </p:txBody>
-      </p:sp>
-      <p:sp>
-        <p:nvSpPr>
-          <p:cNvPr id="48" name="Shape"/>
+            <a:endParaRPr lang="en-US" sz="1200" dirty="0"/>
+          </a:p>
+        </p:txBody>
+      </p:sp>
+      <p:sp>
+        <p:nvSpPr>
+          <p:cNvPr id="51" name="Shape"/>
           <p:cNvSpPr/>
           <p:nvPr/>
         </p:nvSpPr>
         <p:spPr>
           <a:xfrm>
-            <a:off x="6319541" y="5340000"/>
-            <a:ext cx="2652613" cy="780000"/>
+            <a:off x="6319541" y="5000000"/>
+            <a:ext cx="2652613" cy="620000"/>
           </a:xfrm>
           <a:prstGeom prst="rect">
             <a:avLst/>
@@ -16596,14 +17337,14 @@
       </p:sp>
       <p:sp>
         <p:nvSpPr>
-          <p:cNvPr id="49" name="Text"/>
-          <p:cNvSpPr txBox="1"/>
-          <p:nvPr/>
-        </p:nvSpPr>
-        <p:spPr>
-          <a:xfrm>
-            <a:off x="6439541" y="5340000"/>
-            <a:ext cx="2412613" cy="780000"/>
+          <p:cNvPr id="52" name="Text"/>
+          <p:cNvSpPr txBox="1"/>
+          <p:nvPr/>
+        </p:nvSpPr>
+        <p:spPr>
+          <a:xfrm>
+            <a:off x="6439541" y="5000000"/>
+            <a:ext cx="2412613" cy="620000"/>
           </a:xfrm>
           <a:prstGeom prst="rect">
             <a:avLst/>
@@ -16622,7 +17363,7 @@
               <a:buNone/>
             </a:pPr>
             <a:r>
-              <a:rPr lang="en-US" sz="1250" dirty="0">
+              <a:rPr lang="en-US" sz="1200" dirty="0">
                 <a:solidFill>
                   <a:srgbClr val="16262E"/>
                 </a:solidFill>
@@ -16632,20 +17373,20 @@
               </a:rPr>
               <a:t>0.95</a:t>
             </a:r>
-            <a:endParaRPr lang="en-US" sz="1250" dirty="0"/>
-          </a:p>
-        </p:txBody>
-      </p:sp>
-      <p:sp>
-        <p:nvSpPr>
-          <p:cNvPr id="50" name="Shape"/>
+            <a:endParaRPr lang="en-US" sz="1200" dirty="0"/>
+          </a:p>
+        </p:txBody>
+      </p:sp>
+      <p:sp>
+        <p:nvSpPr>
+          <p:cNvPr id="53" name="Shape"/>
           <p:cNvSpPr/>
           <p:nvPr/>
         </p:nvSpPr>
         <p:spPr>
           <a:xfrm>
-            <a:off x="8972154" y="5340000"/>
-            <a:ext cx="2652613" cy="780000"/>
+            <a:off x="8972154" y="5000000"/>
+            <a:ext cx="2652613" cy="620000"/>
           </a:xfrm>
           <a:prstGeom prst="rect">
             <a:avLst/>
@@ -16663,14 +17404,14 @@
       </p:sp>
       <p:sp>
         <p:nvSpPr>
-          <p:cNvPr id="51" name="Text"/>
-          <p:cNvSpPr txBox="1"/>
-          <p:nvPr/>
-        </p:nvSpPr>
-        <p:spPr>
-          <a:xfrm>
-            <a:off x="9092154" y="5340000"/>
-            <a:ext cx="2412613" cy="780000"/>
+          <p:cNvPr id="54" name="Text"/>
+          <p:cNvSpPr txBox="1"/>
+          <p:nvPr/>
+        </p:nvSpPr>
+        <p:spPr>
+          <a:xfrm>
+            <a:off x="9092154" y="5000000"/>
+            <a:ext cx="2412613" cy="620000"/>
           </a:xfrm>
           <a:prstGeom prst="rect">
             <a:avLst/>
@@ -16689,7 +17430,7 @@
               <a:buNone/>
             </a:pPr>
             <a:r>
-              <a:rPr lang="en-US" sz="1250" dirty="0">
+              <a:rPr lang="en-US" sz="1200" dirty="0">
                 <a:solidFill>
                   <a:srgbClr val="16262E"/>
                 </a:solidFill>
@@ -16699,20 +17440,20 @@
               </a:rPr>
               <a:t>El que omite</a:t>
             </a:r>
-            <a:endParaRPr lang="en-US" sz="1250" dirty="0"/>
-          </a:p>
-        </p:txBody>
-      </p:sp>
-      <p:sp>
-        <p:nvSpPr>
-          <p:cNvPr id="52" name="Shape"/>
+            <a:endParaRPr lang="en-US" sz="1200" dirty="0"/>
+          </a:p>
+        </p:txBody>
+      </p:sp>
+      <p:sp>
+        <p:nvSpPr>
+          <p:cNvPr id="55" name="Shape"/>
           <p:cNvSpPr/>
           <p:nvPr/>
         </p:nvSpPr>
         <p:spPr>
           <a:xfrm>
-            <a:off x="566928" y="5200000"/>
-            <a:ext cx="11057839" cy="900000"/>
+            <a:off x="566928" y="5700000"/>
+            <a:ext cx="11057839" cy="520000"/>
           </a:xfrm>
           <a:prstGeom prst="roundRect">
             <a:avLst>
@@ -16732,14 +17473,14 @@
       </p:sp>
       <p:sp>
         <p:nvSpPr>
-          <p:cNvPr id="53" name="Text"/>
-          <p:cNvSpPr txBox="1"/>
-          <p:nvPr/>
-        </p:nvSpPr>
-        <p:spPr>
-          <a:xfrm>
-            <a:off x="804672" y="5200000"/>
-            <a:ext cx="10582351" cy="900000"/>
+          <p:cNvPr id="56" name="Text"/>
+          <p:cNvSpPr txBox="1"/>
+          <p:nvPr/>
+        </p:nvSpPr>
+        <p:spPr>
+          <a:xfrm>
+            <a:off x="804672" y="5700000"/>
+            <a:ext cx="10582351" cy="520000"/>
           </a:xfrm>
           <a:prstGeom prst="rect">
             <a:avLst/>
@@ -16774,13 +17515,13 @@
       </p:sp>
       <p:sp>
         <p:nvSpPr>
-          <p:cNvPr id="54" name="Text"/>
-          <p:cNvSpPr txBox="1"/>
-          <p:nvPr/>
-        </p:nvSpPr>
-        <p:spPr>
-          <a:xfrm>
-            <a:off x="566928" y="6280000"/>
+          <p:cNvPr id="57" name="Text"/>
+          <p:cNvSpPr txBox="1"/>
+          <p:nvPr/>
+        </p:nvSpPr>
+        <p:spPr>
+          <a:xfrm>
+            <a:off x="566928" y="6290000"/>
             <a:ext cx="11057839" cy="240000"/>
           </a:xfrm>
           <a:prstGeom prst="rect">
@@ -18742,6 +19483,3556 @@
                 <a:cs typeface="Calibri" pitchFamily="34" charset="-120"/>
               </a:rPr>
               <a:t>No es una invención del curso: Guba (1981) llama a esto pista de auditoría y pide que un externo pueda examinar cómo se llegó a cada interpretación. El IPCC exige un «traceable account» con nivel de confianza y CERQual califica la confianza de cada hallazgo cualitativo.</a:t>
+            </a:r>
+            <a:endParaRPr lang="en-US" sz="1000" dirty="0"/>
+          </a:p>
+        </p:txBody>
+      </p:sp>
+    </p:spTree>
+  </p:cSld>
+  <p:clrMapOvr>
+    <a:masterClrMapping/>
+  </p:clrMapOvr>
+</p:sld>
+</file>
+
+<file path=ppt/slides/slide25.xml><?xml version="1.0" encoding="utf-8"?>
+<p:sld xmlns:a="http://schemas.openxmlformats.org/drawingml/2006/main" xmlns:r="http://schemas.openxmlformats.org/officeDocument/2006/relationships" xmlns:p="http://schemas.openxmlformats.org/presentationml/2006/main">
+  <p:cSld name="Mapa de documentos">
+    <p:spTree>
+      <p:nvGrpSpPr>
+        <p:cNvPr id="1" name=""/>
+        <p:cNvGrpSpPr/>
+        <p:nvPr/>
+      </p:nvGrpSpPr>
+      <p:grpSpPr>
+        <a:xfrm>
+          <a:off x="0" y="0"/>
+          <a:ext cx="0" cy="0"/>
+          <a:chOff x="0" y="0"/>
+          <a:chExt cx="0" cy="0"/>
+        </a:xfrm>
+      </p:grpSpPr>
+      <p:sp>
+        <p:nvSpPr>
+          <p:cNvPr id="2" name="Text"/>
+          <p:cNvSpPr txBox="1"/>
+          <p:nvPr/>
+        </p:nvSpPr>
+        <p:spPr>
+          <a:xfrm>
+            <a:off x="566928" y="402336"/>
+            <a:ext cx="11057839" cy="749808"/>
+          </a:xfrm>
+          <a:prstGeom prst="rect">
+            <a:avLst/>
+          </a:prstGeom>
+          <a:noFill/>
+          <a:ln/>
+        </p:spPr>
+        <p:txBody>
+          <a:bodyPr wrap="square" lIns="0" tIns="0" rIns="0" bIns="0" rtlCol="0" anchor="t"/>
+          <a:lstStyle/>
+          <a:p>
+            <a:pPr algn="l" indent="0" marL="0">
+              <a:buNone/>
+            </a:pPr>
+            <a:r>
+              <a:rPr lang="en-US" sz="3200" b="1" dirty="0">
+                <a:solidFill>
+                  <a:srgbClr val="16262E"/>
+                </a:solidFill>
+                <a:latin typeface="Arial" pitchFamily="34" charset="0"/>
+                <a:ea typeface="Arial" pitchFamily="34" charset="-122"/>
+                <a:cs typeface="Arial" pitchFamily="34" charset="-120"/>
+              </a:rPr>
+              <a:t>Todo lo que hemos leído es el mismo programa</a:t>
+            </a:r>
+            <a:endParaRPr lang="en-US" sz="3200" dirty="0"/>
+          </a:p>
+        </p:txBody>
+      </p:sp>
+      <p:sp>
+        <p:nvSpPr>
+          <p:cNvPr id="3" name="Text"/>
+          <p:cNvSpPr txBox="1"/>
+          <p:nvPr/>
+        </p:nvSpPr>
+        <p:spPr>
+          <a:xfrm>
+            <a:off x="566928" y="1280160"/>
+            <a:ext cx="11057839" cy="731520"/>
+          </a:xfrm>
+          <a:prstGeom prst="rect">
+            <a:avLst/>
+          </a:prstGeom>
+          <a:noFill/>
+          <a:ln/>
+        </p:spPr>
+        <p:txBody>
+          <a:bodyPr wrap="square" lIns="0" tIns="0" rIns="0" bIns="0" rtlCol="0" anchor="t"/>
+          <a:lstStyle/>
+          <a:p>
+            <a:pPr indent="0" marL="0">
+              <a:lnSpc>
+                <a:spcPct val="108000"/>
+              </a:lnSpc>
+              <a:buNone/>
+            </a:pPr>
+            <a:r>
+              <a:rPr lang="en-US" sz="1500" dirty="0">
+                <a:solidFill>
+                  <a:srgbClr val="5A6B73"/>
+                </a:solidFill>
+                <a:latin typeface="Calibri" pitchFamily="34" charset="0"/>
+                <a:ea typeface="Calibri" pitchFamily="34" charset="-122"/>
+                <a:cs typeface="Calibri" pitchFamily="34" charset="-120"/>
+              </a:rPr>
+              <a:t>Las cuatro sesiones del módulo trabajaron documentos distintos de un mismo programa ficticio. Hoy se cierra el círculo.</a:t>
+            </a:r>
+            <a:endParaRPr lang="en-US" sz="1500" dirty="0"/>
+          </a:p>
+        </p:txBody>
+      </p:sp>
+      <p:sp>
+        <p:nvSpPr>
+          <p:cNvPr id="4" name="Shape"/>
+          <p:cNvSpPr/>
+          <p:nvPr/>
+        </p:nvSpPr>
+        <p:spPr>
+          <a:xfrm>
+            <a:off x="566928" y="1780000"/>
+            <a:ext cx="2950000" cy="420000"/>
+          </a:xfrm>
+          <a:prstGeom prst="rect">
+            <a:avLst/>
+          </a:prstGeom>
+          <a:solidFill>
+            <a:srgbClr val="16262E"/>
+          </a:solidFill>
+          <a:ln w="9525">
+            <a:solidFill>
+              <a:srgbClr val="FFFFFF"/>
+            </a:solidFill>
+            <a:prstDash val="solid"/>
+          </a:ln>
+        </p:spPr>
+      </p:sp>
+      <p:sp>
+        <p:nvSpPr>
+          <p:cNvPr id="5" name="Text"/>
+          <p:cNvSpPr txBox="1"/>
+          <p:nvPr/>
+        </p:nvSpPr>
+        <p:spPr>
+          <a:xfrm>
+            <a:off x="686928" y="1780000"/>
+            <a:ext cx="2710000" cy="420000"/>
+          </a:xfrm>
+          <a:prstGeom prst="rect">
+            <a:avLst/>
+          </a:prstGeom>
+          <a:noFill/>
+          <a:ln/>
+        </p:spPr>
+        <p:txBody>
+          <a:bodyPr wrap="square" lIns="0" tIns="0" rIns="0" bIns="0" rtlCol="0" anchor="ctr"/>
+          <a:lstStyle/>
+          <a:p>
+            <a:pPr indent="0" marL="0">
+              <a:buNone/>
+            </a:pPr>
+            <a:r>
+              <a:rPr lang="en-US" sz="1200" b="1" dirty="0">
+                <a:solidFill>
+                  <a:srgbClr val="FFFFFF"/>
+                </a:solidFill>
+                <a:latin typeface="Arial" pitchFamily="34" charset="0"/>
+                <a:ea typeface="Arial" pitchFamily="34" charset="-122"/>
+                <a:cs typeface="Arial" pitchFamily="34" charset="-120"/>
+              </a:rPr>
+              <a:t>Documento</a:t>
+            </a:r>
+            <a:endParaRPr lang="en-US" sz="1200" dirty="0"/>
+          </a:p>
+        </p:txBody>
+      </p:sp>
+      <p:sp>
+        <p:nvSpPr>
+          <p:cNvPr id="6" name="Shape"/>
+          <p:cNvSpPr/>
+          <p:nvPr/>
+        </p:nvSpPr>
+        <p:spPr>
+          <a:xfrm>
+            <a:off x="3516928" y="1780000"/>
+            <a:ext cx="3150000" cy="420000"/>
+          </a:xfrm>
+          <a:prstGeom prst="rect">
+            <a:avLst/>
+          </a:prstGeom>
+          <a:solidFill>
+            <a:srgbClr val="16262E"/>
+          </a:solidFill>
+          <a:ln w="9525">
+            <a:solidFill>
+              <a:srgbClr val="FFFFFF"/>
+            </a:solidFill>
+            <a:prstDash val="solid"/>
+          </a:ln>
+        </p:spPr>
+      </p:sp>
+      <p:sp>
+        <p:nvSpPr>
+          <p:cNvPr id="7" name="Text"/>
+          <p:cNvSpPr txBox="1"/>
+          <p:nvPr/>
+        </p:nvSpPr>
+        <p:spPr>
+          <a:xfrm>
+            <a:off x="3636928" y="1780000"/>
+            <a:ext cx="2910000" cy="420000"/>
+          </a:xfrm>
+          <a:prstGeom prst="rect">
+            <a:avLst/>
+          </a:prstGeom>
+          <a:noFill/>
+          <a:ln/>
+        </p:spPr>
+        <p:txBody>
+          <a:bodyPr wrap="square" lIns="0" tIns="0" rIns="0" bIns="0" rtlCol="0" anchor="ctr"/>
+          <a:lstStyle/>
+          <a:p>
+            <a:pPr indent="0" marL="0">
+              <a:buNone/>
+            </a:pPr>
+            <a:r>
+              <a:rPr lang="en-US" sz="1200" b="1" dirty="0">
+                <a:solidFill>
+                  <a:srgbClr val="FFFFFF"/>
+                </a:solidFill>
+                <a:latin typeface="Arial" pitchFamily="34" charset="0"/>
+                <a:ea typeface="Arial" pitchFamily="34" charset="-122"/>
+                <a:cs typeface="Arial" pitchFamily="34" charset="-120"/>
+              </a:rPr>
+              <a:t>Qué es</a:t>
+            </a:r>
+            <a:endParaRPr lang="en-US" sz="1200" dirty="0"/>
+          </a:p>
+        </p:txBody>
+      </p:sp>
+      <p:sp>
+        <p:nvSpPr>
+          <p:cNvPr id="8" name="Shape"/>
+          <p:cNvSpPr/>
+          <p:nvPr/>
+        </p:nvSpPr>
+        <p:spPr>
+          <a:xfrm>
+            <a:off x="6666928" y="1780000"/>
+            <a:ext cx="1800000" cy="420000"/>
+          </a:xfrm>
+          <a:prstGeom prst="rect">
+            <a:avLst/>
+          </a:prstGeom>
+          <a:solidFill>
+            <a:srgbClr val="16262E"/>
+          </a:solidFill>
+          <a:ln w="9525">
+            <a:solidFill>
+              <a:srgbClr val="FFFFFF"/>
+            </a:solidFill>
+            <a:prstDash val="solid"/>
+          </a:ln>
+        </p:spPr>
+      </p:sp>
+      <p:sp>
+        <p:nvSpPr>
+          <p:cNvPr id="9" name="Text"/>
+          <p:cNvSpPr txBox="1"/>
+          <p:nvPr/>
+        </p:nvSpPr>
+        <p:spPr>
+          <a:xfrm>
+            <a:off x="6786928" y="1780000"/>
+            <a:ext cx="1560000" cy="420000"/>
+          </a:xfrm>
+          <a:prstGeom prst="rect">
+            <a:avLst/>
+          </a:prstGeom>
+          <a:noFill/>
+          <a:ln/>
+        </p:spPr>
+        <p:txBody>
+          <a:bodyPr wrap="square" lIns="0" tIns="0" rIns="0" bIns="0" rtlCol="0" anchor="ctr"/>
+          <a:lstStyle/>
+          <a:p>
+            <a:pPr indent="0" marL="0">
+              <a:buNone/>
+            </a:pPr>
+            <a:r>
+              <a:rPr lang="en-US" sz="1200" b="1" dirty="0">
+                <a:solidFill>
+                  <a:srgbClr val="FFFFFF"/>
+                </a:solidFill>
+                <a:latin typeface="Arial" pitchFamily="34" charset="0"/>
+                <a:ea typeface="Arial" pitchFamily="34" charset="-122"/>
+                <a:cs typeface="Arial" pitchFamily="34" charset="-120"/>
+              </a:rPr>
+              <a:t>Cuándo</a:t>
+            </a:r>
+            <a:endParaRPr lang="en-US" sz="1200" dirty="0"/>
+          </a:p>
+        </p:txBody>
+      </p:sp>
+      <p:sp>
+        <p:nvSpPr>
+          <p:cNvPr id="10" name="Shape"/>
+          <p:cNvSpPr/>
+          <p:nvPr/>
+        </p:nvSpPr>
+        <p:spPr>
+          <a:xfrm>
+            <a:off x="8466928" y="1780000"/>
+            <a:ext cx="3157839" cy="420000"/>
+          </a:xfrm>
+          <a:prstGeom prst="rect">
+            <a:avLst/>
+          </a:prstGeom>
+          <a:solidFill>
+            <a:srgbClr val="16262E"/>
+          </a:solidFill>
+          <a:ln w="9525">
+            <a:solidFill>
+              <a:srgbClr val="FFFFFF"/>
+            </a:solidFill>
+            <a:prstDash val="solid"/>
+          </a:ln>
+        </p:spPr>
+      </p:sp>
+      <p:sp>
+        <p:nvSpPr>
+          <p:cNvPr id="11" name="Text"/>
+          <p:cNvSpPr txBox="1"/>
+          <p:nvPr/>
+        </p:nvSpPr>
+        <p:spPr>
+          <a:xfrm>
+            <a:off x="8586928" y="1780000"/>
+            <a:ext cx="2917839" cy="420000"/>
+          </a:xfrm>
+          <a:prstGeom prst="rect">
+            <a:avLst/>
+          </a:prstGeom>
+          <a:noFill/>
+          <a:ln/>
+        </p:spPr>
+        <p:txBody>
+          <a:bodyPr wrap="square" lIns="0" tIns="0" rIns="0" bIns="0" rtlCol="0" anchor="ctr"/>
+          <a:lstStyle/>
+          <a:p>
+            <a:pPr indent="0" marL="0">
+              <a:buNone/>
+            </a:pPr>
+            <a:r>
+              <a:rPr lang="en-US" sz="1200" b="1" dirty="0">
+                <a:solidFill>
+                  <a:srgbClr val="FFFFFF"/>
+                </a:solidFill>
+                <a:latin typeface="Arial" pitchFamily="34" charset="0"/>
+                <a:ea typeface="Arial" pitchFamily="34" charset="-122"/>
+                <a:cs typeface="Arial" pitchFamily="34" charset="-120"/>
+              </a:rPr>
+              <a:t>Qué salió de ahí</a:t>
+            </a:r>
+            <a:endParaRPr lang="en-US" sz="1200" dirty="0"/>
+          </a:p>
+        </p:txBody>
+      </p:sp>
+      <p:sp>
+        <p:nvSpPr>
+          <p:cNvPr id="12" name="Shape"/>
+          <p:cNvSpPr/>
+          <p:nvPr/>
+        </p:nvSpPr>
+        <p:spPr>
+          <a:xfrm>
+            <a:off x="566928" y="2200000"/>
+            <a:ext cx="2950000" cy="820000"/>
+          </a:xfrm>
+          <a:prstGeom prst="rect">
+            <a:avLst/>
+          </a:prstGeom>
+          <a:solidFill>
+            <a:srgbClr val="D7E7E7"/>
+          </a:solidFill>
+          <a:ln w="9525">
+            <a:solidFill>
+              <a:srgbClr val="D9E0E3"/>
+            </a:solidFill>
+            <a:prstDash val="solid"/>
+          </a:ln>
+        </p:spPr>
+      </p:sp>
+      <p:sp>
+        <p:nvSpPr>
+          <p:cNvPr id="13" name="Text"/>
+          <p:cNvSpPr txBox="1"/>
+          <p:nvPr/>
+        </p:nvSpPr>
+        <p:spPr>
+          <a:xfrm>
+            <a:off x="686928" y="2200000"/>
+            <a:ext cx="2710000" cy="820000"/>
+          </a:xfrm>
+          <a:prstGeom prst="rect">
+            <a:avLst/>
+          </a:prstGeom>
+          <a:noFill/>
+          <a:ln/>
+        </p:spPr>
+        <p:txBody>
+          <a:bodyPr wrap="square" lIns="0" tIns="0" rIns="0" bIns="0" rtlCol="0" anchor="ctr"/>
+          <a:lstStyle/>
+          <a:p>
+            <a:pPr indent="0" marL="0">
+              <a:lnSpc>
+                <a:spcPct val="103000"/>
+              </a:lnSpc>
+              <a:buNone/>
+            </a:pPr>
+            <a:r>
+              <a:rPr lang="en-US" sz="1150" b="1" dirty="0">
+                <a:solidFill>
+                  <a:srgbClr val="16262E"/>
+                </a:solidFill>
+                <a:latin typeface="Arial" pitchFamily="34" charset="0"/>
+                <a:ea typeface="Arial" pitchFamily="34" charset="-122"/>
+                <a:cs typeface="Arial" pitchFamily="34" charset="-120"/>
+              </a:rPr>
+              <a:t>Informe_sintetico_LAB1.docx</a:t>
+            </a:r>
+            <a:endParaRPr lang="en-US" sz="1150" dirty="0"/>
+          </a:p>
+        </p:txBody>
+      </p:sp>
+      <p:sp>
+        <p:nvSpPr>
+          <p:cNvPr id="14" name="Shape"/>
+          <p:cNvSpPr/>
+          <p:nvPr/>
+        </p:nvSpPr>
+        <p:spPr>
+          <a:xfrm>
+            <a:off x="3516928" y="2200000"/>
+            <a:ext cx="3150000" cy="820000"/>
+          </a:xfrm>
+          <a:prstGeom prst="rect">
+            <a:avLst/>
+          </a:prstGeom>
+          <a:solidFill>
+            <a:srgbClr val="F2F5F6"/>
+          </a:solidFill>
+          <a:ln w="9525">
+            <a:solidFill>
+              <a:srgbClr val="D9E0E3"/>
+            </a:solidFill>
+            <a:prstDash val="solid"/>
+          </a:ln>
+        </p:spPr>
+      </p:sp>
+      <p:sp>
+        <p:nvSpPr>
+          <p:cNvPr id="15" name="Text"/>
+          <p:cNvSpPr txBox="1"/>
+          <p:nvPr/>
+        </p:nvSpPr>
+        <p:spPr>
+          <a:xfrm>
+            <a:off x="3636928" y="2200000"/>
+            <a:ext cx="2910000" cy="820000"/>
+          </a:xfrm>
+          <a:prstGeom prst="rect">
+            <a:avLst/>
+          </a:prstGeom>
+          <a:noFill/>
+          <a:ln/>
+        </p:spPr>
+        <p:txBody>
+          <a:bodyPr wrap="square" lIns="0" tIns="0" rIns="0" bIns="0" rtlCol="0" anchor="ctr"/>
+          <a:lstStyle/>
+          <a:p>
+            <a:pPr indent="0" marL="0">
+              <a:lnSpc>
+                <a:spcPct val="103000"/>
+              </a:lnSpc>
+              <a:buNone/>
+            </a:pPr>
+            <a:r>
+              <a:rPr lang="en-US" sz="1150" dirty="0">
+                <a:solidFill>
+                  <a:srgbClr val="16262E"/>
+                </a:solidFill>
+                <a:latin typeface="Calibri" pitchFamily="34" charset="0"/>
+                <a:ea typeface="Calibri" pitchFamily="34" charset="-122"/>
+                <a:cs typeface="Calibri" pitchFamily="34" charset="-120"/>
+              </a:rPr>
+              <a:t>El informe final de evaluación del programa, ejercicio 2025. La versión nacional, con las doce entidades juntas.</a:t>
+            </a:r>
+            <a:endParaRPr lang="en-US" sz="1150" dirty="0"/>
+          </a:p>
+        </p:txBody>
+      </p:sp>
+      <p:sp>
+        <p:nvSpPr>
+          <p:cNvPr id="16" name="Shape"/>
+          <p:cNvSpPr/>
+          <p:nvPr/>
+        </p:nvSpPr>
+        <p:spPr>
+          <a:xfrm>
+            <a:off x="6666928" y="2200000"/>
+            <a:ext cx="1800000" cy="820000"/>
+          </a:xfrm>
+          <a:prstGeom prst="rect">
+            <a:avLst/>
+          </a:prstGeom>
+          <a:solidFill>
+            <a:srgbClr val="F2F5F6"/>
+          </a:solidFill>
+          <a:ln w="9525">
+            <a:solidFill>
+              <a:srgbClr val="D9E0E3"/>
+            </a:solidFill>
+            <a:prstDash val="solid"/>
+          </a:ln>
+        </p:spPr>
+      </p:sp>
+      <p:sp>
+        <p:nvSpPr>
+          <p:cNvPr id="17" name="Text"/>
+          <p:cNvSpPr txBox="1"/>
+          <p:nvPr/>
+        </p:nvSpPr>
+        <p:spPr>
+          <a:xfrm>
+            <a:off x="6786928" y="2200000"/>
+            <a:ext cx="1560000" cy="820000"/>
+          </a:xfrm>
+          <a:prstGeom prst="rect">
+            <a:avLst/>
+          </a:prstGeom>
+          <a:noFill/>
+          <a:ln/>
+        </p:spPr>
+        <p:txBody>
+          <a:bodyPr wrap="square" lIns="0" tIns="0" rIns="0" bIns="0" rtlCol="0" anchor="ctr"/>
+          <a:lstStyle/>
+          <a:p>
+            <a:pPr indent="0" marL="0">
+              <a:lnSpc>
+                <a:spcPct val="103000"/>
+              </a:lnSpc>
+              <a:buNone/>
+            </a:pPr>
+            <a:r>
+              <a:rPr lang="en-US" sz="1150" dirty="0">
+                <a:solidFill>
+                  <a:srgbClr val="16262E"/>
+                </a:solidFill>
+                <a:latin typeface="Calibri" pitchFamily="34" charset="0"/>
+                <a:ea typeface="Calibri" pitchFamily="34" charset="-122"/>
+                <a:cs typeface="Calibri" pitchFamily="34" charset="-120"/>
+              </a:rPr>
+              <a:t>Sesión 3, Laboratorio 1</a:t>
+            </a:r>
+            <a:endParaRPr lang="en-US" sz="1150" dirty="0"/>
+          </a:p>
+        </p:txBody>
+      </p:sp>
+      <p:sp>
+        <p:nvSpPr>
+          <p:cNvPr id="18" name="Shape"/>
+          <p:cNvSpPr/>
+          <p:nvPr/>
+        </p:nvSpPr>
+        <p:spPr>
+          <a:xfrm>
+            <a:off x="8466928" y="2200000"/>
+            <a:ext cx="3157839" cy="820000"/>
+          </a:xfrm>
+          <a:prstGeom prst="rect">
+            <a:avLst/>
+          </a:prstGeom>
+          <a:solidFill>
+            <a:srgbClr val="F2F5F6"/>
+          </a:solidFill>
+          <a:ln w="9525">
+            <a:solidFill>
+              <a:srgbClr val="D9E0E3"/>
+            </a:solidFill>
+            <a:prstDash val="solid"/>
+          </a:ln>
+        </p:spPr>
+      </p:sp>
+      <p:sp>
+        <p:nvSpPr>
+          <p:cNvPr id="19" name="Text"/>
+          <p:cNvSpPr txBox="1"/>
+          <p:nvPr/>
+        </p:nvSpPr>
+        <p:spPr>
+          <a:xfrm>
+            <a:off x="8586928" y="2200000"/>
+            <a:ext cx="2917839" cy="820000"/>
+          </a:xfrm>
+          <a:prstGeom prst="rect">
+            <a:avLst/>
+          </a:prstGeom>
+          <a:noFill/>
+          <a:ln/>
+        </p:spPr>
+        <p:txBody>
+          <a:bodyPr wrap="square" lIns="0" tIns="0" rIns="0" bIns="0" rtlCol="0" anchor="ctr"/>
+          <a:lstStyle/>
+          <a:p>
+            <a:pPr indent="0" marL="0">
+              <a:lnSpc>
+                <a:spcPct val="103000"/>
+              </a:lnSpc>
+              <a:buNone/>
+            </a:pPr>
+            <a:r>
+              <a:rPr lang="en-US" sz="1150" dirty="0">
+                <a:solidFill>
+                  <a:srgbClr val="16262E"/>
+                </a:solidFill>
+                <a:latin typeface="Calibri" pitchFamily="34" charset="0"/>
+                <a:ea typeface="Calibri" pitchFamily="34" charset="-122"/>
+                <a:cs typeface="Calibri" pitchFamily="34" charset="-120"/>
+              </a:rPr>
+              <a:t>Lo desmontaron: cifras que no cuadraban, una fuente inexistente y conclusiones sin respaldo.</a:t>
+            </a:r>
+            <a:endParaRPr lang="en-US" sz="1150" dirty="0"/>
+          </a:p>
+        </p:txBody>
+      </p:sp>
+      <p:sp>
+        <p:nvSpPr>
+          <p:cNvPr id="20" name="Shape"/>
+          <p:cNvSpPr/>
+          <p:nvPr/>
+        </p:nvSpPr>
+        <p:spPr>
+          <a:xfrm>
+            <a:off x="566928" y="3020000"/>
+            <a:ext cx="2950000" cy="820000"/>
+          </a:xfrm>
+          <a:prstGeom prst="rect">
+            <a:avLst/>
+          </a:prstGeom>
+          <a:solidFill>
+            <a:srgbClr val="D7E7E7"/>
+          </a:solidFill>
+          <a:ln w="9525">
+            <a:solidFill>
+              <a:srgbClr val="D9E0E3"/>
+            </a:solidFill>
+            <a:prstDash val="solid"/>
+          </a:ln>
+        </p:spPr>
+      </p:sp>
+      <p:sp>
+        <p:nvSpPr>
+          <p:cNvPr id="21" name="Text"/>
+          <p:cNvSpPr txBox="1"/>
+          <p:nvPr/>
+        </p:nvSpPr>
+        <p:spPr>
+          <a:xfrm>
+            <a:off x="686928" y="3020000"/>
+            <a:ext cx="2710000" cy="820000"/>
+          </a:xfrm>
+          <a:prstGeom prst="rect">
+            <a:avLst/>
+          </a:prstGeom>
+          <a:noFill/>
+          <a:ln/>
+        </p:spPr>
+        <p:txBody>
+          <a:bodyPr wrap="square" lIns="0" tIns="0" rIns="0" bIns="0" rtlCol="0" anchor="ctr"/>
+          <a:lstStyle/>
+          <a:p>
+            <a:pPr indent="0" marL="0">
+              <a:lnSpc>
+                <a:spcPct val="103000"/>
+              </a:lnSpc>
+              <a:buNone/>
+            </a:pPr>
+            <a:r>
+              <a:rPr lang="en-US" sz="1150" b="1" dirty="0">
+                <a:solidFill>
+                  <a:srgbClr val="16262E"/>
+                </a:solidFill>
+                <a:latin typeface="Arial" pitchFamily="34" charset="0"/>
+                <a:ea typeface="Arial" pitchFamily="34" charset="-122"/>
+                <a:cs typeface="Arial" pitchFamily="34" charset="-120"/>
+              </a:rPr>
+              <a:t>Registros_atencion_ciudadana_PARTICIPANTE.xlsx</a:t>
+            </a:r>
+            <a:endParaRPr lang="en-US" sz="1150" dirty="0"/>
+          </a:p>
+        </p:txBody>
+      </p:sp>
+      <p:sp>
+        <p:nvSpPr>
+          <p:cNvPr id="22" name="Shape"/>
+          <p:cNvSpPr/>
+          <p:nvPr/>
+        </p:nvSpPr>
+        <p:spPr>
+          <a:xfrm>
+            <a:off x="3516928" y="3020000"/>
+            <a:ext cx="3150000" cy="820000"/>
+          </a:xfrm>
+          <a:prstGeom prst="rect">
+            <a:avLst/>
+          </a:prstGeom>
+          <a:solidFill>
+            <a:srgbClr val="FFFFFF"/>
+          </a:solidFill>
+          <a:ln w="9525">
+            <a:solidFill>
+              <a:srgbClr val="D9E0E3"/>
+            </a:solidFill>
+            <a:prstDash val="solid"/>
+          </a:ln>
+        </p:spPr>
+      </p:sp>
+      <p:sp>
+        <p:nvSpPr>
+          <p:cNvPr id="23" name="Text"/>
+          <p:cNvSpPr txBox="1"/>
+          <p:nvPr/>
+        </p:nvSpPr>
+        <p:spPr>
+          <a:xfrm>
+            <a:off x="3636928" y="3020000"/>
+            <a:ext cx="2910000" cy="820000"/>
+          </a:xfrm>
+          <a:prstGeom prst="rect">
+            <a:avLst/>
+          </a:prstGeom>
+          <a:noFill/>
+          <a:ln/>
+        </p:spPr>
+        <p:txBody>
+          <a:bodyPr wrap="square" lIns="0" tIns="0" rIns="0" bIns="0" rtlCol="0" anchor="ctr"/>
+          <a:lstStyle/>
+          <a:p>
+            <a:pPr indent="0" marL="0">
+              <a:lnSpc>
+                <a:spcPct val="103000"/>
+              </a:lnSpc>
+              <a:buNone/>
+            </a:pPr>
+            <a:r>
+              <a:rPr lang="en-US" sz="1150" dirty="0">
+                <a:solidFill>
+                  <a:srgbClr val="16262E"/>
+                </a:solidFill>
+                <a:latin typeface="Calibri" pitchFamily="34" charset="0"/>
+                <a:ea typeface="Calibri" pitchFamily="34" charset="-122"/>
+                <a:cs typeface="Calibri" pitchFamily="34" charset="-120"/>
+              </a:rPr>
+              <a:t>118 registros de atención ciudadana del programa: quejas, dudas y solicitudes.</a:t>
+            </a:r>
+            <a:endParaRPr lang="en-US" sz="1150" dirty="0"/>
+          </a:p>
+        </p:txBody>
+      </p:sp>
+      <p:sp>
+        <p:nvSpPr>
+          <p:cNvPr id="24" name="Shape"/>
+          <p:cNvSpPr/>
+          <p:nvPr/>
+        </p:nvSpPr>
+        <p:spPr>
+          <a:xfrm>
+            <a:off x="6666928" y="3020000"/>
+            <a:ext cx="1800000" cy="820000"/>
+          </a:xfrm>
+          <a:prstGeom prst="rect">
+            <a:avLst/>
+          </a:prstGeom>
+          <a:solidFill>
+            <a:srgbClr val="FFFFFF"/>
+          </a:solidFill>
+          <a:ln w="9525">
+            <a:solidFill>
+              <a:srgbClr val="D9E0E3"/>
+            </a:solidFill>
+            <a:prstDash val="solid"/>
+          </a:ln>
+        </p:spPr>
+      </p:sp>
+      <p:sp>
+        <p:nvSpPr>
+          <p:cNvPr id="25" name="Text"/>
+          <p:cNvSpPr txBox="1"/>
+          <p:nvPr/>
+        </p:nvSpPr>
+        <p:spPr>
+          <a:xfrm>
+            <a:off x="6786928" y="3020000"/>
+            <a:ext cx="1560000" cy="820000"/>
+          </a:xfrm>
+          <a:prstGeom prst="rect">
+            <a:avLst/>
+          </a:prstGeom>
+          <a:noFill/>
+          <a:ln/>
+        </p:spPr>
+        <p:txBody>
+          <a:bodyPr wrap="square" lIns="0" tIns="0" rIns="0" bIns="0" rtlCol="0" anchor="ctr"/>
+          <a:lstStyle/>
+          <a:p>
+            <a:pPr indent="0" marL="0">
+              <a:lnSpc>
+                <a:spcPct val="103000"/>
+              </a:lnSpc>
+              <a:buNone/>
+            </a:pPr>
+            <a:r>
+              <a:rPr lang="en-US" sz="1150" dirty="0">
+                <a:solidFill>
+                  <a:srgbClr val="16262E"/>
+                </a:solidFill>
+                <a:latin typeface="Calibri" pitchFamily="34" charset="0"/>
+                <a:ea typeface="Calibri" pitchFamily="34" charset="-122"/>
+                <a:cs typeface="Calibri" pitchFamily="34" charset="-120"/>
+              </a:rPr>
+              <a:t>Sesiones 1 y 4</a:t>
+            </a:r>
+            <a:endParaRPr lang="en-US" sz="1150" dirty="0"/>
+          </a:p>
+        </p:txBody>
+      </p:sp>
+      <p:sp>
+        <p:nvSpPr>
+          <p:cNvPr id="26" name="Shape"/>
+          <p:cNvSpPr/>
+          <p:nvPr/>
+        </p:nvSpPr>
+        <p:spPr>
+          <a:xfrm>
+            <a:off x="8466928" y="3020000"/>
+            <a:ext cx="3157839" cy="820000"/>
+          </a:xfrm>
+          <a:prstGeom prst="rect">
+            <a:avLst/>
+          </a:prstGeom>
+          <a:solidFill>
+            <a:srgbClr val="FFFFFF"/>
+          </a:solidFill>
+          <a:ln w="9525">
+            <a:solidFill>
+              <a:srgbClr val="D9E0E3"/>
+            </a:solidFill>
+            <a:prstDash val="solid"/>
+          </a:ln>
+        </p:spPr>
+      </p:sp>
+      <p:sp>
+        <p:nvSpPr>
+          <p:cNvPr id="27" name="Text"/>
+          <p:cNvSpPr txBox="1"/>
+          <p:nvPr/>
+        </p:nvSpPr>
+        <p:spPr>
+          <a:xfrm>
+            <a:off x="8586928" y="3020000"/>
+            <a:ext cx="2917839" cy="820000"/>
+          </a:xfrm>
+          <a:prstGeom prst="rect">
+            <a:avLst/>
+          </a:prstGeom>
+          <a:noFill/>
+          <a:ln/>
+        </p:spPr>
+        <p:txBody>
+          <a:bodyPr wrap="square" lIns="0" tIns="0" rIns="0" bIns="0" rtlCol="0" anchor="ctr"/>
+          <a:lstStyle/>
+          <a:p>
+            <a:pPr indent="0" marL="0">
+              <a:lnSpc>
+                <a:spcPct val="103000"/>
+              </a:lnSpc>
+              <a:buNone/>
+            </a:pPr>
+            <a:r>
+              <a:rPr lang="en-US" sz="1150" dirty="0">
+                <a:solidFill>
+                  <a:srgbClr val="16262E"/>
+                </a:solidFill>
+                <a:latin typeface="Calibri" pitchFamily="34" charset="0"/>
+                <a:ea typeface="Calibri" pitchFamily="34" charset="-122"/>
+                <a:cs typeface="Calibri" pitchFamily="34" charset="-120"/>
+              </a:rPr>
+              <a:t>El libro de códigos y el agrupamiento temático. Y el enmascaramiento, sobre la hoja del padrón.</a:t>
+            </a:r>
+            <a:endParaRPr lang="en-US" sz="1150" dirty="0"/>
+          </a:p>
+        </p:txBody>
+      </p:sp>
+      <p:sp>
+        <p:nvSpPr>
+          <p:cNvPr id="28" name="Shape"/>
+          <p:cNvSpPr/>
+          <p:nvPr/>
+        </p:nvSpPr>
+        <p:spPr>
+          <a:xfrm>
+            <a:off x="566928" y="3840000"/>
+            <a:ext cx="2950000" cy="820000"/>
+          </a:xfrm>
+          <a:prstGeom prst="rect">
+            <a:avLst/>
+          </a:prstGeom>
+          <a:solidFill>
+            <a:srgbClr val="D7E7E7"/>
+          </a:solidFill>
+          <a:ln w="9525">
+            <a:solidFill>
+              <a:srgbClr val="D9E0E3"/>
+            </a:solidFill>
+            <a:prstDash val="solid"/>
+          </a:ln>
+        </p:spPr>
+      </p:sp>
+      <p:sp>
+        <p:nvSpPr>
+          <p:cNvPr id="29" name="Text"/>
+          <p:cNvSpPr txBox="1"/>
+          <p:nvPr/>
+        </p:nvSpPr>
+        <p:spPr>
+          <a:xfrm>
+            <a:off x="686928" y="3840000"/>
+            <a:ext cx="2710000" cy="820000"/>
+          </a:xfrm>
+          <a:prstGeom prst="rect">
+            <a:avLst/>
+          </a:prstGeom>
+          <a:noFill/>
+          <a:ln/>
+        </p:spPr>
+        <p:txBody>
+          <a:bodyPr wrap="square" lIns="0" tIns="0" rIns="0" bIns="0" rtlCol="0" anchor="ctr"/>
+          <a:lstStyle/>
+          <a:p>
+            <a:pPr indent="0" marL="0">
+              <a:lnSpc>
+                <a:spcPct val="103000"/>
+              </a:lnSpc>
+              <a:buNone/>
+            </a:pPr>
+            <a:r>
+              <a:rPr lang="en-US" sz="1150" b="1" dirty="0">
+                <a:solidFill>
+                  <a:srgbClr val="16262E"/>
+                </a:solidFill>
+                <a:latin typeface="Arial" pitchFamily="34" charset="0"/>
+                <a:ea typeface="Arial" pitchFamily="34" charset="-122"/>
+                <a:cs typeface="Arial" pitchFamily="34" charset="-120"/>
+              </a:rPr>
+              <a:t>Transcripciones_foro_PARTICIPANTE.docx</a:t>
+            </a:r>
+            <a:endParaRPr lang="en-US" sz="1150" dirty="0"/>
+          </a:p>
+        </p:txBody>
+      </p:sp>
+      <p:sp>
+        <p:nvSpPr>
+          <p:cNvPr id="30" name="Shape"/>
+          <p:cNvSpPr/>
+          <p:nvPr/>
+        </p:nvSpPr>
+        <p:spPr>
+          <a:xfrm>
+            <a:off x="3516928" y="3840000"/>
+            <a:ext cx="3150000" cy="820000"/>
+          </a:xfrm>
+          <a:prstGeom prst="rect">
+            <a:avLst/>
+          </a:prstGeom>
+          <a:solidFill>
+            <a:srgbClr val="F2F5F6"/>
+          </a:solidFill>
+          <a:ln w="9525">
+            <a:solidFill>
+              <a:srgbClr val="D9E0E3"/>
+            </a:solidFill>
+            <a:prstDash val="solid"/>
+          </a:ln>
+        </p:spPr>
+      </p:sp>
+      <p:sp>
+        <p:nvSpPr>
+          <p:cNvPr id="31" name="Text"/>
+          <p:cNvSpPr txBox="1"/>
+          <p:nvPr/>
+        </p:nvSpPr>
+        <p:spPr>
+          <a:xfrm>
+            <a:off x="3636928" y="3840000"/>
+            <a:ext cx="2910000" cy="820000"/>
+          </a:xfrm>
+          <a:prstGeom prst="rect">
+            <a:avLst/>
+          </a:prstGeom>
+          <a:noFill/>
+          <a:ln/>
+        </p:spPr>
+        <p:txBody>
+          <a:bodyPr wrap="square" lIns="0" tIns="0" rIns="0" bIns="0" rtlCol="0" anchor="ctr"/>
+          <a:lstStyle/>
+          <a:p>
+            <a:pPr indent="0" marL="0">
+              <a:lnSpc>
+                <a:spcPct val="103000"/>
+              </a:lnSpc>
+              <a:buNone/>
+            </a:pPr>
+            <a:r>
+              <a:rPr lang="en-US" sz="1150" dirty="0">
+                <a:solidFill>
+                  <a:srgbClr val="16262E"/>
+                </a:solidFill>
+                <a:latin typeface="Calibri" pitchFamily="34" charset="0"/>
+                <a:ea typeface="Calibri" pitchFamily="34" charset="-122"/>
+                <a:cs typeface="Calibri" pitchFamily="34" charset="-120"/>
+              </a:rPr>
+              <a:t>41 intervenciones en dos foros de consulta de la Entidad C, agosto de 2026.</a:t>
+            </a:r>
+            <a:endParaRPr lang="en-US" sz="1150" dirty="0"/>
+          </a:p>
+        </p:txBody>
+      </p:sp>
+      <p:sp>
+        <p:nvSpPr>
+          <p:cNvPr id="32" name="Shape"/>
+          <p:cNvSpPr/>
+          <p:nvPr/>
+        </p:nvSpPr>
+        <p:spPr>
+          <a:xfrm>
+            <a:off x="6666928" y="3840000"/>
+            <a:ext cx="1800000" cy="820000"/>
+          </a:xfrm>
+          <a:prstGeom prst="rect">
+            <a:avLst/>
+          </a:prstGeom>
+          <a:solidFill>
+            <a:srgbClr val="F2F5F6"/>
+          </a:solidFill>
+          <a:ln w="9525">
+            <a:solidFill>
+              <a:srgbClr val="D9E0E3"/>
+            </a:solidFill>
+            <a:prstDash val="solid"/>
+          </a:ln>
+        </p:spPr>
+      </p:sp>
+      <p:sp>
+        <p:nvSpPr>
+          <p:cNvPr id="33" name="Text"/>
+          <p:cNvSpPr txBox="1"/>
+          <p:nvPr/>
+        </p:nvSpPr>
+        <p:spPr>
+          <a:xfrm>
+            <a:off x="6786928" y="3840000"/>
+            <a:ext cx="1560000" cy="820000"/>
+          </a:xfrm>
+          <a:prstGeom prst="rect">
+            <a:avLst/>
+          </a:prstGeom>
+          <a:noFill/>
+          <a:ln/>
+        </p:spPr>
+        <p:txBody>
+          <a:bodyPr wrap="square" lIns="0" tIns="0" rIns="0" bIns="0" rtlCol="0" anchor="ctr"/>
+          <a:lstStyle/>
+          <a:p>
+            <a:pPr indent="0" marL="0">
+              <a:lnSpc>
+                <a:spcPct val="103000"/>
+              </a:lnSpc>
+              <a:buNone/>
+            </a:pPr>
+            <a:r>
+              <a:rPr lang="en-US" sz="1150" dirty="0">
+                <a:solidFill>
+                  <a:srgbClr val="16262E"/>
+                </a:solidFill>
+                <a:latin typeface="Calibri" pitchFamily="34" charset="0"/>
+                <a:ea typeface="Calibri" pitchFamily="34" charset="-122"/>
+                <a:cs typeface="Calibri" pitchFamily="34" charset="-120"/>
+              </a:rPr>
+              <a:t>Sesión 4, Práctica D</a:t>
+            </a:r>
+            <a:endParaRPr lang="en-US" sz="1150" dirty="0"/>
+          </a:p>
+        </p:txBody>
+      </p:sp>
+      <p:sp>
+        <p:nvSpPr>
+          <p:cNvPr id="34" name="Shape"/>
+          <p:cNvSpPr/>
+          <p:nvPr/>
+        </p:nvSpPr>
+        <p:spPr>
+          <a:xfrm>
+            <a:off x="8466928" y="3840000"/>
+            <a:ext cx="3157839" cy="820000"/>
+          </a:xfrm>
+          <a:prstGeom prst="rect">
+            <a:avLst/>
+          </a:prstGeom>
+          <a:solidFill>
+            <a:srgbClr val="F2F5F6"/>
+          </a:solidFill>
+          <a:ln w="9525">
+            <a:solidFill>
+              <a:srgbClr val="D9E0E3"/>
+            </a:solidFill>
+            <a:prstDash val="solid"/>
+          </a:ln>
+        </p:spPr>
+      </p:sp>
+      <p:sp>
+        <p:nvSpPr>
+          <p:cNvPr id="35" name="Text"/>
+          <p:cNvSpPr txBox="1"/>
+          <p:nvPr/>
+        </p:nvSpPr>
+        <p:spPr>
+          <a:xfrm>
+            <a:off x="8586928" y="3840000"/>
+            <a:ext cx="2917839" cy="820000"/>
+          </a:xfrm>
+          <a:prstGeom prst="rect">
+            <a:avLst/>
+          </a:prstGeom>
+          <a:noFill/>
+          <a:ln/>
+        </p:spPr>
+        <p:txBody>
+          <a:bodyPr wrap="square" lIns="0" tIns="0" rIns="0" bIns="0" rtlCol="0" anchor="ctr"/>
+          <a:lstStyle/>
+          <a:p>
+            <a:pPr indent="0" marL="0">
+              <a:lnSpc>
+                <a:spcPct val="103000"/>
+              </a:lnSpc>
+              <a:buNone/>
+            </a:pPr>
+            <a:r>
+              <a:rPr lang="en-US" sz="1150" dirty="0">
+                <a:solidFill>
+                  <a:srgbClr val="16262E"/>
+                </a:solidFill>
+                <a:latin typeface="Calibri" pitchFamily="34" charset="0"/>
+                <a:ea typeface="Calibri" pitchFamily="34" charset="-122"/>
+                <a:cs typeface="Calibri" pitchFamily="34" charset="-120"/>
+              </a:rPr>
+              <a:t>Polaridad y causa raíz sobre las 38 intervenciones que sí se clasifican.</a:t>
+            </a:r>
+            <a:endParaRPr lang="en-US" sz="1150" dirty="0"/>
+          </a:p>
+        </p:txBody>
+      </p:sp>
+      <p:sp>
+        <p:nvSpPr>
+          <p:cNvPr id="36" name="Shape"/>
+          <p:cNvSpPr/>
+          <p:nvPr/>
+        </p:nvSpPr>
+        <p:spPr>
+          <a:xfrm>
+            <a:off x="566928" y="4660000"/>
+            <a:ext cx="2950000" cy="820000"/>
+          </a:xfrm>
+          <a:prstGeom prst="rect">
+            <a:avLst/>
+          </a:prstGeom>
+          <a:solidFill>
+            <a:srgbClr val="D7E7E7"/>
+          </a:solidFill>
+          <a:ln w="9525">
+            <a:solidFill>
+              <a:srgbClr val="D9E0E3"/>
+            </a:solidFill>
+            <a:prstDash val="solid"/>
+          </a:ln>
+        </p:spPr>
+      </p:sp>
+      <p:sp>
+        <p:nvSpPr>
+          <p:cNvPr id="37" name="Text"/>
+          <p:cNvSpPr txBox="1"/>
+          <p:nvPr/>
+        </p:nvSpPr>
+        <p:spPr>
+          <a:xfrm>
+            <a:off x="686928" y="4660000"/>
+            <a:ext cx="2710000" cy="820000"/>
+          </a:xfrm>
+          <a:prstGeom prst="rect">
+            <a:avLst/>
+          </a:prstGeom>
+          <a:noFill/>
+          <a:ln/>
+        </p:spPr>
+        <p:txBody>
+          <a:bodyPr wrap="square" lIns="0" tIns="0" rIns="0" bIns="0" rtlCol="0" anchor="ctr"/>
+          <a:lstStyle/>
+          <a:p>
+            <a:pPr indent="0" marL="0">
+              <a:lnSpc>
+                <a:spcPct val="103000"/>
+              </a:lnSpc>
+              <a:buNone/>
+            </a:pPr>
+            <a:r>
+              <a:rPr lang="en-US" sz="1150" b="1" dirty="0">
+                <a:solidFill>
+                  <a:srgbClr val="16262E"/>
+                </a:solidFill>
+                <a:latin typeface="Arial" pitchFamily="34" charset="0"/>
+                <a:ea typeface="Arial" pitchFamily="34" charset="-122"/>
+                <a:cs typeface="Arial" pitchFamily="34" charset="-120"/>
+              </a:rPr>
+              <a:t>Expedientes_LAB2.docx</a:t>
+            </a:r>
+            <a:endParaRPr lang="en-US" sz="1150" dirty="0"/>
+          </a:p>
+        </p:txBody>
+      </p:sp>
+      <p:sp>
+        <p:nvSpPr>
+          <p:cNvPr id="38" name="Shape"/>
+          <p:cNvSpPr/>
+          <p:nvPr/>
+        </p:nvSpPr>
+        <p:spPr>
+          <a:xfrm>
+            <a:off x="3516928" y="4660000"/>
+            <a:ext cx="3150000" cy="820000"/>
+          </a:xfrm>
+          <a:prstGeom prst="rect">
+            <a:avLst/>
+          </a:prstGeom>
+          <a:solidFill>
+            <a:srgbClr val="FFFFFF"/>
+          </a:solidFill>
+          <a:ln w="9525">
+            <a:solidFill>
+              <a:srgbClr val="D9E0E3"/>
+            </a:solidFill>
+            <a:prstDash val="solid"/>
+          </a:ln>
+        </p:spPr>
+      </p:sp>
+      <p:sp>
+        <p:nvSpPr>
+          <p:cNvPr id="39" name="Text"/>
+          <p:cNvSpPr txBox="1"/>
+          <p:nvPr/>
+        </p:nvSpPr>
+        <p:spPr>
+          <a:xfrm>
+            <a:off x="3636928" y="4660000"/>
+            <a:ext cx="2910000" cy="820000"/>
+          </a:xfrm>
+          <a:prstGeom prst="rect">
+            <a:avLst/>
+          </a:prstGeom>
+          <a:noFill/>
+          <a:ln/>
+        </p:spPr>
+        <p:txBody>
+          <a:bodyPr wrap="square" lIns="0" tIns="0" rIns="0" bIns="0" rtlCol="0" anchor="ctr"/>
+          <a:lstStyle/>
+          <a:p>
+            <a:pPr indent="0" marL="0">
+              <a:lnSpc>
+                <a:spcPct val="103000"/>
+              </a:lnSpc>
+              <a:buNone/>
+            </a:pPr>
+            <a:r>
+              <a:rPr lang="en-US" sz="1150" dirty="0">
+                <a:solidFill>
+                  <a:srgbClr val="16262E"/>
+                </a:solidFill>
+                <a:latin typeface="Calibri" pitchFamily="34" charset="0"/>
+                <a:ea typeface="Calibri" pitchFamily="34" charset="-122"/>
+                <a:cs typeface="Calibri" pitchFamily="34" charset="-120"/>
+              </a:rPr>
+              <a:t>Seis expedientes de evaluación, uno por entidad, sobre el mismo marco normativo.</a:t>
+            </a:r>
+            <a:endParaRPr lang="en-US" sz="1150" dirty="0"/>
+          </a:p>
+        </p:txBody>
+      </p:sp>
+      <p:sp>
+        <p:nvSpPr>
+          <p:cNvPr id="40" name="Shape"/>
+          <p:cNvSpPr/>
+          <p:nvPr/>
+        </p:nvSpPr>
+        <p:spPr>
+          <a:xfrm>
+            <a:off x="6666928" y="4660000"/>
+            <a:ext cx="1800000" cy="820000"/>
+          </a:xfrm>
+          <a:prstGeom prst="rect">
+            <a:avLst/>
+          </a:prstGeom>
+          <a:solidFill>
+            <a:srgbClr val="FFFFFF"/>
+          </a:solidFill>
+          <a:ln w="9525">
+            <a:solidFill>
+              <a:srgbClr val="D9E0E3"/>
+            </a:solidFill>
+            <a:prstDash val="solid"/>
+          </a:ln>
+        </p:spPr>
+      </p:sp>
+      <p:sp>
+        <p:nvSpPr>
+          <p:cNvPr id="41" name="Text"/>
+          <p:cNvSpPr txBox="1"/>
+          <p:nvPr/>
+        </p:nvSpPr>
+        <p:spPr>
+          <a:xfrm>
+            <a:off x="6786928" y="4660000"/>
+            <a:ext cx="1560000" cy="820000"/>
+          </a:xfrm>
+          <a:prstGeom prst="rect">
+            <a:avLst/>
+          </a:prstGeom>
+          <a:noFill/>
+          <a:ln/>
+        </p:spPr>
+        <p:txBody>
+          <a:bodyPr wrap="square" lIns="0" tIns="0" rIns="0" bIns="0" rtlCol="0" anchor="ctr"/>
+          <a:lstStyle/>
+          <a:p>
+            <a:pPr indent="0" marL="0">
+              <a:lnSpc>
+                <a:spcPct val="103000"/>
+              </a:lnSpc>
+              <a:buNone/>
+            </a:pPr>
+            <a:r>
+              <a:rPr lang="en-US" sz="1150" dirty="0">
+                <a:solidFill>
+                  <a:srgbClr val="16262E"/>
+                </a:solidFill>
+                <a:latin typeface="Calibri" pitchFamily="34" charset="0"/>
+                <a:ea typeface="Calibri" pitchFamily="34" charset="-122"/>
+                <a:cs typeface="Calibri" pitchFamily="34" charset="-120"/>
+              </a:rPr>
+              <a:t>Hoy</a:t>
+            </a:r>
+            <a:endParaRPr lang="en-US" sz="1150" dirty="0"/>
+          </a:p>
+        </p:txBody>
+      </p:sp>
+      <p:sp>
+        <p:nvSpPr>
+          <p:cNvPr id="42" name="Shape"/>
+          <p:cNvSpPr/>
+          <p:nvPr/>
+        </p:nvSpPr>
+        <p:spPr>
+          <a:xfrm>
+            <a:off x="8466928" y="4660000"/>
+            <a:ext cx="3157839" cy="820000"/>
+          </a:xfrm>
+          <a:prstGeom prst="rect">
+            <a:avLst/>
+          </a:prstGeom>
+          <a:solidFill>
+            <a:srgbClr val="FFFFFF"/>
+          </a:solidFill>
+          <a:ln w="9525">
+            <a:solidFill>
+              <a:srgbClr val="D9E0E3"/>
+            </a:solidFill>
+            <a:prstDash val="solid"/>
+          </a:ln>
+        </p:spPr>
+      </p:sp>
+      <p:sp>
+        <p:nvSpPr>
+          <p:cNvPr id="43" name="Text"/>
+          <p:cNvSpPr txBox="1"/>
+          <p:nvPr/>
+        </p:nvSpPr>
+        <p:spPr>
+          <a:xfrm>
+            <a:off x="8586928" y="4660000"/>
+            <a:ext cx="2917839" cy="820000"/>
+          </a:xfrm>
+          <a:prstGeom prst="rect">
+            <a:avLst/>
+          </a:prstGeom>
+          <a:noFill/>
+          <a:ln/>
+        </p:spPr>
+        <p:txBody>
+          <a:bodyPr wrap="square" lIns="0" tIns="0" rIns="0" bIns="0" rtlCol="0" anchor="ctr"/>
+          <a:lstStyle/>
+          <a:p>
+            <a:pPr indent="0" marL="0">
+              <a:lnSpc>
+                <a:spcPct val="103000"/>
+              </a:lnSpc>
+              <a:buNone/>
+            </a:pPr>
+            <a:r>
+              <a:rPr lang="en-US" sz="1150" dirty="0">
+                <a:solidFill>
+                  <a:srgbClr val="16262E"/>
+                </a:solidFill>
+                <a:latin typeface="Calibri" pitchFamily="34" charset="0"/>
+                <a:ea typeface="Calibri" pitchFamily="34" charset="-122"/>
+                <a:cs typeface="Calibri" pitchFamily="34" charset="-120"/>
+              </a:rPr>
+              <a:t>Su matriz de evidencia y la síntesis que la acompaña.</a:t>
+            </a:r>
+            <a:endParaRPr lang="en-US" sz="1150" dirty="0"/>
+          </a:p>
+        </p:txBody>
+      </p:sp>
+      <p:sp>
+        <p:nvSpPr>
+          <p:cNvPr id="44" name="Shape"/>
+          <p:cNvSpPr/>
+          <p:nvPr/>
+        </p:nvSpPr>
+        <p:spPr>
+          <a:xfrm>
+            <a:off x="566928" y="5380000"/>
+            <a:ext cx="11057839" cy="780000"/>
+          </a:xfrm>
+          <a:prstGeom prst="roundRect">
+            <a:avLst>
+              <a:gd name="adj" fmla="val 8235"/>
+            </a:avLst>
+          </a:prstGeom>
+          <a:solidFill>
+            <a:srgbClr val="F7E4D8"/>
+          </a:solidFill>
+          <a:ln w="12700">
+            <a:solidFill>
+              <a:srgbClr val="F7E4D8"/>
+            </a:solidFill>
+            <a:prstDash val="solid"/>
+          </a:ln>
+        </p:spPr>
+      </p:sp>
+      <p:sp>
+        <p:nvSpPr>
+          <p:cNvPr id="45" name="Text"/>
+          <p:cNvSpPr txBox="1"/>
+          <p:nvPr/>
+        </p:nvSpPr>
+        <p:spPr>
+          <a:xfrm>
+            <a:off x="804672" y="5380000"/>
+            <a:ext cx="10582351" cy="780000"/>
+          </a:xfrm>
+          <a:prstGeom prst="rect">
+            <a:avLst/>
+          </a:prstGeom>
+          <a:noFill/>
+          <a:ln/>
+        </p:spPr>
+        <p:txBody>
+          <a:bodyPr wrap="square" lIns="0" tIns="0" rIns="0" bIns="0" rtlCol="0" anchor="ctr"/>
+          <a:lstStyle/>
+          <a:p>
+            <a:pPr indent="0" marL="0">
+              <a:lnSpc>
+                <a:spcPct val="110000"/>
+              </a:lnSpc>
+              <a:buNone/>
+            </a:pPr>
+            <a:r>
+              <a:rPr lang="en-US" sz="1300" dirty="0">
+                <a:solidFill>
+                  <a:srgbClr val="16262E"/>
+                </a:solidFill>
+                <a:latin typeface="Calibri" pitchFamily="34" charset="0"/>
+                <a:ea typeface="Calibri" pitchFamily="34" charset="-122"/>
+                <a:cs typeface="Calibri" pitchFamily="34" charset="-120"/>
+              </a:rPr>
+              <a:t>Es el mismo Programa de Apoyo al Cuidado Comunitario en los cuatro. El informe nacional que desmontaron el jueves se armó a partir de expedientes estatales como los de hoy, y por eso la pregunta con la que cerramos la sesión es qué hallazgo se perdió en el camino del expediente al informe.</a:t>
+            </a:r>
+            <a:endParaRPr lang="en-US" sz="1300" dirty="0"/>
+          </a:p>
+        </p:txBody>
+      </p:sp>
+      <p:sp>
+        <p:nvSpPr>
+          <p:cNvPr id="46" name="Text"/>
+          <p:cNvSpPr txBox="1"/>
+          <p:nvPr/>
+        </p:nvSpPr>
+        <p:spPr>
+          <a:xfrm>
+            <a:off x="566928" y="6260000"/>
+            <a:ext cx="11057839" cy="240000"/>
+          </a:xfrm>
+          <a:prstGeom prst="rect">
+            <a:avLst/>
+          </a:prstGeom>
+          <a:noFill/>
+          <a:ln/>
+        </p:spPr>
+        <p:txBody>
+          <a:bodyPr wrap="square" lIns="0" tIns="0" rIns="0" bIns="0" rtlCol="0" anchor="t"/>
+          <a:lstStyle/>
+          <a:p>
+            <a:pPr indent="0" marL="0">
+              <a:buNone/>
+            </a:pPr>
+            <a:r>
+              <a:rPr lang="en-US" sz="1000" dirty="0">
+                <a:solidFill>
+                  <a:srgbClr val="5A6B73"/>
+                </a:solidFill>
+                <a:latin typeface="Calibri" pitchFamily="34" charset="0"/>
+                <a:ea typeface="Calibri" pitchFamily="34" charset="-122"/>
+                <a:cs typeface="Calibri" pitchFamily="34" charset="-120"/>
+              </a:rPr>
+              <a:t>Los cuatro son documentos sintéticos elaborados para el curso: el programa, las entidades, las cifras y las personas son ficticios. Están en las carpetas sesion-01, sesion-03, sesion-04 y sesion-06 del repositorio.</a:t>
+            </a:r>
+            <a:endParaRPr lang="en-US" sz="1000" dirty="0"/>
+          </a:p>
+        </p:txBody>
+      </p:sp>
+    </p:spTree>
+  </p:cSld>
+  <p:clrMapOvr>
+    <a:masterClrMapping/>
+  </p:clrMapOvr>
+</p:sld>
+</file>
+
+<file path=ppt/slides/slide26.xml><?xml version="1.0" encoding="utf-8"?>
+<p:sld xmlns:a="http://schemas.openxmlformats.org/drawingml/2006/main" xmlns:r="http://schemas.openxmlformats.org/officeDocument/2006/relationships" xmlns:p="http://schemas.openxmlformats.org/presentationml/2006/main">
+  <p:cSld name="Expediente por dentro">
+    <p:spTree>
+      <p:nvGrpSpPr>
+        <p:cNvPr id="1" name=""/>
+        <p:cNvGrpSpPr/>
+        <p:nvPr/>
+      </p:nvGrpSpPr>
+      <p:grpSpPr>
+        <a:xfrm>
+          <a:off x="0" y="0"/>
+          <a:ext cx="0" cy="0"/>
+          <a:chOff x="0" y="0"/>
+          <a:chExt cx="0" cy="0"/>
+        </a:xfrm>
+      </p:grpSpPr>
+      <p:sp>
+        <p:nvSpPr>
+          <p:cNvPr id="2" name="Text"/>
+          <p:cNvSpPr txBox="1"/>
+          <p:nvPr/>
+        </p:nvSpPr>
+        <p:spPr>
+          <a:xfrm>
+            <a:off x="566928" y="402336"/>
+            <a:ext cx="11057839" cy="749808"/>
+          </a:xfrm>
+          <a:prstGeom prst="rect">
+            <a:avLst/>
+          </a:prstGeom>
+          <a:noFill/>
+          <a:ln/>
+        </p:spPr>
+        <p:txBody>
+          <a:bodyPr wrap="square" lIns="0" tIns="0" rIns="0" bIns="0" rtlCol="0" anchor="t"/>
+          <a:lstStyle/>
+          <a:p>
+            <a:pPr algn="l" indent="0" marL="0">
+              <a:buNone/>
+            </a:pPr>
+            <a:r>
+              <a:rPr lang="en-US" sz="3200" b="1" dirty="0">
+                <a:solidFill>
+                  <a:srgbClr val="16262E"/>
+                </a:solidFill>
+                <a:latin typeface="Arial" pitchFamily="34" charset="0"/>
+                <a:ea typeface="Arial" pitchFamily="34" charset="-122"/>
+                <a:cs typeface="Arial" pitchFamily="34" charset="-120"/>
+              </a:rPr>
+              <a:t>El expediente de hoy, por dentro</a:t>
+            </a:r>
+            <a:endParaRPr lang="en-US" sz="3200" dirty="0"/>
+          </a:p>
+        </p:txBody>
+      </p:sp>
+      <p:sp>
+        <p:nvSpPr>
+          <p:cNvPr id="3" name="Text"/>
+          <p:cNvSpPr txBox="1"/>
+          <p:nvPr/>
+        </p:nvSpPr>
+        <p:spPr>
+          <a:xfrm>
+            <a:off x="566928" y="1280160"/>
+            <a:ext cx="11057839" cy="731520"/>
+          </a:xfrm>
+          <a:prstGeom prst="rect">
+            <a:avLst/>
+          </a:prstGeom>
+          <a:noFill/>
+          <a:ln/>
+        </p:spPr>
+        <p:txBody>
+          <a:bodyPr wrap="square" lIns="0" tIns="0" rIns="0" bIns="0" rtlCol="0" anchor="t"/>
+          <a:lstStyle/>
+          <a:p>
+            <a:pPr indent="0" marL="0">
+              <a:lnSpc>
+                <a:spcPct val="108000"/>
+              </a:lnSpc>
+              <a:buNone/>
+            </a:pPr>
+            <a:r>
+              <a:rPr lang="en-US" sz="1500" dirty="0">
+                <a:solidFill>
+                  <a:srgbClr val="5A6B73"/>
+                </a:solidFill>
+                <a:latin typeface="Calibri" pitchFamily="34" charset="0"/>
+                <a:ea typeface="Calibri" pitchFamily="34" charset="-122"/>
+                <a:cs typeface="Calibri" pitchFamily="34" charset="-120"/>
+              </a:rPr>
+              <a:t>Un solo archivo con dos partes: lo que los seis equipos comparten y lo que solo trae su entidad.</a:t>
+            </a:r>
+            <a:endParaRPr lang="en-US" sz="1500" dirty="0"/>
+          </a:p>
+        </p:txBody>
+      </p:sp>
+      <p:sp>
+        <p:nvSpPr>
+          <p:cNvPr id="4" name="Shape"/>
+          <p:cNvSpPr/>
+          <p:nvPr/>
+        </p:nvSpPr>
+        <p:spPr>
+          <a:xfrm>
+            <a:off x="566928" y="1780000"/>
+            <a:ext cx="5378919" cy="3000000"/>
+          </a:xfrm>
+          <a:prstGeom prst="roundRect">
+            <a:avLst>
+              <a:gd name="adj" fmla="val 2933"/>
+            </a:avLst>
+          </a:prstGeom>
+          <a:solidFill>
+            <a:srgbClr val="F2F5F6"/>
+          </a:solidFill>
+          <a:ln w="12700">
+            <a:solidFill>
+              <a:srgbClr val="F2F5F6"/>
+            </a:solidFill>
+            <a:prstDash val="solid"/>
+          </a:ln>
+        </p:spPr>
+      </p:sp>
+      <p:sp>
+        <p:nvSpPr>
+          <p:cNvPr id="5" name="Text"/>
+          <p:cNvSpPr txBox="1"/>
+          <p:nvPr/>
+        </p:nvSpPr>
+        <p:spPr>
+          <a:xfrm>
+            <a:off x="804672" y="1930000"/>
+            <a:ext cx="4903431" cy="260000"/>
+          </a:xfrm>
+          <a:prstGeom prst="rect">
+            <a:avLst/>
+          </a:prstGeom>
+          <a:noFill/>
+          <a:ln/>
+        </p:spPr>
+        <p:txBody>
+          <a:bodyPr wrap="square" lIns="0" tIns="0" rIns="0" bIns="0" rtlCol="0" anchor="t"/>
+          <a:lstStyle/>
+          <a:p>
+            <a:pPr indent="0" marL="0">
+              <a:buNone/>
+            </a:pPr>
+            <a:r>
+              <a:rPr lang="en-US" sz="1000" b="1" spc="100" kern="0" dirty="0">
+                <a:solidFill>
+                  <a:srgbClr val="2E7D7D"/>
+                </a:solidFill>
+                <a:latin typeface="Arial" pitchFamily="34" charset="0"/>
+                <a:ea typeface="Arial" pitchFamily="34" charset="-122"/>
+                <a:cs typeface="Arial" pitchFamily="34" charset="-120"/>
+              </a:rPr>
+              <a:t>IGUAL PARA LOS SEIS EQUIPOS</a:t>
+            </a:r>
+            <a:endParaRPr lang="en-US" sz="1000" dirty="0"/>
+          </a:p>
+        </p:txBody>
+      </p:sp>
+      <p:sp>
+        <p:nvSpPr>
+          <p:cNvPr id="6" name="Text"/>
+          <p:cNvSpPr txBox="1"/>
+          <p:nvPr/>
+        </p:nvSpPr>
+        <p:spPr>
+          <a:xfrm>
+            <a:off x="804672" y="2220000"/>
+            <a:ext cx="4903431" cy="340000"/>
+          </a:xfrm>
+          <a:prstGeom prst="rect">
+            <a:avLst/>
+          </a:prstGeom>
+          <a:noFill/>
+          <a:ln/>
+        </p:spPr>
+        <p:txBody>
+          <a:bodyPr wrap="square" lIns="0" tIns="0" rIns="0" bIns="0" rtlCol="0" anchor="t"/>
+          <a:lstStyle/>
+          <a:p>
+            <a:pPr indent="0" marL="0">
+              <a:buNone/>
+            </a:pPr>
+            <a:r>
+              <a:rPr lang="en-US" sz="1550" b="1" dirty="0">
+                <a:solidFill>
+                  <a:srgbClr val="16262E"/>
+                </a:solidFill>
+                <a:latin typeface="Arial" pitchFamily="34" charset="0"/>
+                <a:ea typeface="Arial" pitchFamily="34" charset="-122"/>
+                <a:cs typeface="Arial" pitchFamily="34" charset="-120"/>
+              </a:rPr>
+              <a:t>El marco normativo</a:t>
+            </a:r>
+            <a:endParaRPr lang="en-US" sz="1550" dirty="0"/>
+          </a:p>
+        </p:txBody>
+      </p:sp>
+      <p:sp>
+        <p:nvSpPr>
+          <p:cNvPr id="7" name="Shape"/>
+          <p:cNvSpPr/>
+          <p:nvPr/>
+        </p:nvSpPr>
+        <p:spPr>
+          <a:xfrm>
+            <a:off x="804672" y="2740000"/>
+            <a:ext cx="200000" cy="200000"/>
+          </a:xfrm>
+          <a:prstGeom prst="ellipse">
+            <a:avLst/>
+          </a:prstGeom>
+          <a:solidFill>
+            <a:srgbClr val="2E7D7D"/>
+          </a:solidFill>
+          <a:ln w="12700">
+            <a:solidFill>
+              <a:srgbClr val="2E7D7D"/>
+            </a:solidFill>
+            <a:prstDash val="solid"/>
+          </a:ln>
+        </p:spPr>
+      </p:sp>
+      <p:sp>
+        <p:nvSpPr>
+          <p:cNvPr id="8" name="Text"/>
+          <p:cNvSpPr txBox="1"/>
+          <p:nvPr/>
+        </p:nvSpPr>
+        <p:spPr>
+          <a:xfrm>
+            <a:off x="1126928" y="2680000"/>
+            <a:ext cx="4578919" cy="380000"/>
+          </a:xfrm>
+          <a:prstGeom prst="rect">
+            <a:avLst/>
+          </a:prstGeom>
+          <a:noFill/>
+          <a:ln/>
+        </p:spPr>
+        <p:txBody>
+          <a:bodyPr wrap="square" lIns="0" tIns="0" rIns="0" bIns="0" rtlCol="0" anchor="t"/>
+          <a:lstStyle/>
+          <a:p>
+            <a:pPr indent="0" marL="0">
+              <a:lnSpc>
+                <a:spcPct val="104000"/>
+              </a:lnSpc>
+              <a:buNone/>
+            </a:pPr>
+            <a:r>
+              <a:rPr lang="en-US" sz="1150" dirty="0">
+                <a:solidFill>
+                  <a:srgbClr val="16262E"/>
+                </a:solidFill>
+                <a:latin typeface="Calibri" pitchFamily="34" charset="0"/>
+                <a:ea typeface="Calibri" pitchFamily="34" charset="-122"/>
+                <a:cs typeface="Calibri" pitchFamily="34" charset="-120"/>
+              </a:rPr>
+              <a:t>Reglas de Operación del programa para el ejercicio 2025, en extracto.</a:t>
+            </a:r>
+            <a:endParaRPr lang="en-US" sz="1150" dirty="0"/>
+          </a:p>
+        </p:txBody>
+      </p:sp>
+      <p:sp>
+        <p:nvSpPr>
+          <p:cNvPr id="9" name="Shape"/>
+          <p:cNvSpPr/>
+          <p:nvPr/>
+        </p:nvSpPr>
+        <p:spPr>
+          <a:xfrm>
+            <a:off x="804672" y="3140000"/>
+            <a:ext cx="200000" cy="200000"/>
+          </a:xfrm>
+          <a:prstGeom prst="ellipse">
+            <a:avLst/>
+          </a:prstGeom>
+          <a:solidFill>
+            <a:srgbClr val="2E7D7D"/>
+          </a:solidFill>
+          <a:ln w="12700">
+            <a:solidFill>
+              <a:srgbClr val="2E7D7D"/>
+            </a:solidFill>
+            <a:prstDash val="solid"/>
+          </a:ln>
+        </p:spPr>
+      </p:sp>
+      <p:sp>
+        <p:nvSpPr>
+          <p:cNvPr id="10" name="Text"/>
+          <p:cNvSpPr txBox="1"/>
+          <p:nvPr/>
+        </p:nvSpPr>
+        <p:spPr>
+          <a:xfrm>
+            <a:off x="1126928" y="3080000"/>
+            <a:ext cx="4578919" cy="380000"/>
+          </a:xfrm>
+          <a:prstGeom prst="rect">
+            <a:avLst/>
+          </a:prstGeom>
+          <a:noFill/>
+          <a:ln/>
+        </p:spPr>
+        <p:txBody>
+          <a:bodyPr wrap="square" lIns="0" tIns="0" rIns="0" bIns="0" rtlCol="0" anchor="t"/>
+          <a:lstStyle/>
+          <a:p>
+            <a:pPr indent="0" marL="0">
+              <a:lnSpc>
+                <a:spcPct val="104000"/>
+              </a:lnSpc>
+              <a:buNone/>
+            </a:pPr>
+            <a:r>
+              <a:rPr lang="en-US" sz="1150" dirty="0">
+                <a:solidFill>
+                  <a:srgbClr val="16262E"/>
+                </a:solidFill>
+                <a:latin typeface="Calibri" pitchFamily="34" charset="0"/>
+                <a:ea typeface="Calibri" pitchFamily="34" charset="-122"/>
+                <a:cs typeface="Calibri" pitchFamily="34" charset="-120"/>
+              </a:rPr>
+              <a:t>Población objetivo, criterios de elegibilidad y requisitos documentales: artículos 6, 8 y 9.</a:t>
+            </a:r>
+            <a:endParaRPr lang="en-US" sz="1150" dirty="0"/>
+          </a:p>
+        </p:txBody>
+      </p:sp>
+      <p:sp>
+        <p:nvSpPr>
+          <p:cNvPr id="11" name="Shape"/>
+          <p:cNvSpPr/>
+          <p:nvPr/>
+        </p:nvSpPr>
+        <p:spPr>
+          <a:xfrm>
+            <a:off x="804672" y="3540000"/>
+            <a:ext cx="200000" cy="200000"/>
+          </a:xfrm>
+          <a:prstGeom prst="ellipse">
+            <a:avLst/>
+          </a:prstGeom>
+          <a:solidFill>
+            <a:srgbClr val="2E7D7D"/>
+          </a:solidFill>
+          <a:ln w="12700">
+            <a:solidFill>
+              <a:srgbClr val="2E7D7D"/>
+            </a:solidFill>
+            <a:prstDash val="solid"/>
+          </a:ln>
+        </p:spPr>
+      </p:sp>
+      <p:sp>
+        <p:nvSpPr>
+          <p:cNvPr id="12" name="Text"/>
+          <p:cNvSpPr txBox="1"/>
+          <p:nvPr/>
+        </p:nvSpPr>
+        <p:spPr>
+          <a:xfrm>
+            <a:off x="1126928" y="3480000"/>
+            <a:ext cx="4578919" cy="380000"/>
+          </a:xfrm>
+          <a:prstGeom prst="rect">
+            <a:avLst/>
+          </a:prstGeom>
+          <a:noFill/>
+          <a:ln/>
+        </p:spPr>
+        <p:txBody>
+          <a:bodyPr wrap="square" lIns="0" tIns="0" rIns="0" bIns="0" rtlCol="0" anchor="t"/>
+          <a:lstStyle/>
+          <a:p>
+            <a:pPr indent="0" marL="0">
+              <a:lnSpc>
+                <a:spcPct val="104000"/>
+              </a:lnSpc>
+              <a:buNone/>
+            </a:pPr>
+            <a:r>
+              <a:rPr lang="en-US" sz="1150" dirty="0">
+                <a:solidFill>
+                  <a:srgbClr val="16262E"/>
+                </a:solidFill>
+                <a:latin typeface="Calibri" pitchFamily="34" charset="0"/>
+                <a:ea typeface="Calibri" pitchFamily="34" charset="-122"/>
+                <a:cs typeface="Calibri" pitchFamily="34" charset="-120"/>
+              </a:rPr>
+              <a:t>Montos, compatibilidad y fecha de entrega: artículos 11, 14 y 17.</a:t>
+            </a:r>
+            <a:endParaRPr lang="en-US" sz="1150" dirty="0"/>
+          </a:p>
+        </p:txBody>
+      </p:sp>
+      <p:sp>
+        <p:nvSpPr>
+          <p:cNvPr id="13" name="Shape"/>
+          <p:cNvSpPr/>
+          <p:nvPr/>
+        </p:nvSpPr>
+        <p:spPr>
+          <a:xfrm>
+            <a:off x="804672" y="3940000"/>
+            <a:ext cx="200000" cy="200000"/>
+          </a:xfrm>
+          <a:prstGeom prst="ellipse">
+            <a:avLst/>
+          </a:prstGeom>
+          <a:solidFill>
+            <a:srgbClr val="2E7D7D"/>
+          </a:solidFill>
+          <a:ln w="12700">
+            <a:solidFill>
+              <a:srgbClr val="2E7D7D"/>
+            </a:solidFill>
+            <a:prstDash val="solid"/>
+          </a:ln>
+        </p:spPr>
+      </p:sp>
+      <p:sp>
+        <p:nvSpPr>
+          <p:cNvPr id="14" name="Text"/>
+          <p:cNvSpPr txBox="1"/>
+          <p:nvPr/>
+        </p:nvSpPr>
+        <p:spPr>
+          <a:xfrm>
+            <a:off x="1126928" y="3880000"/>
+            <a:ext cx="4578919" cy="380000"/>
+          </a:xfrm>
+          <a:prstGeom prst="rect">
+            <a:avLst/>
+          </a:prstGeom>
+          <a:noFill/>
+          <a:ln/>
+        </p:spPr>
+        <p:txBody>
+          <a:bodyPr wrap="square" lIns="0" tIns="0" rIns="0" bIns="0" rtlCol="0" anchor="t"/>
+          <a:lstStyle/>
+          <a:p>
+            <a:pPr indent="0" marL="0">
+              <a:lnSpc>
+                <a:spcPct val="104000"/>
+              </a:lnSpc>
+              <a:buNone/>
+            </a:pPr>
+            <a:r>
+              <a:rPr lang="en-US" sz="1150" dirty="0">
+                <a:solidFill>
+                  <a:srgbClr val="16262E"/>
+                </a:solidFill>
+                <a:latin typeface="Calibri" pitchFamily="34" charset="0"/>
+                <a:ea typeface="Calibri" pitchFamily="34" charset="-122"/>
+                <a:cs typeface="Calibri" pitchFamily="34" charset="-120"/>
+              </a:rPr>
+              <a:t>Centros comunitarios de cuidado: artículo 21.</a:t>
+            </a:r>
+            <a:endParaRPr lang="en-US" sz="1150" dirty="0"/>
+          </a:p>
+        </p:txBody>
+      </p:sp>
+      <p:sp>
+        <p:nvSpPr>
+          <p:cNvPr id="15" name="Shape"/>
+          <p:cNvSpPr/>
+          <p:nvPr/>
+        </p:nvSpPr>
+        <p:spPr>
+          <a:xfrm>
+            <a:off x="804672" y="4340000"/>
+            <a:ext cx="200000" cy="200000"/>
+          </a:xfrm>
+          <a:prstGeom prst="ellipse">
+            <a:avLst/>
+          </a:prstGeom>
+          <a:solidFill>
+            <a:srgbClr val="2E7D7D"/>
+          </a:solidFill>
+          <a:ln w="12700">
+            <a:solidFill>
+              <a:srgbClr val="2E7D7D"/>
+            </a:solidFill>
+            <a:prstDash val="solid"/>
+          </a:ln>
+        </p:spPr>
+      </p:sp>
+      <p:sp>
+        <p:nvSpPr>
+          <p:cNvPr id="16" name="Text"/>
+          <p:cNvSpPr txBox="1"/>
+          <p:nvPr/>
+        </p:nvSpPr>
+        <p:spPr>
+          <a:xfrm>
+            <a:off x="1126928" y="4280000"/>
+            <a:ext cx="4578919" cy="380000"/>
+          </a:xfrm>
+          <a:prstGeom prst="rect">
+            <a:avLst/>
+          </a:prstGeom>
+          <a:noFill/>
+          <a:ln/>
+        </p:spPr>
+        <p:txBody>
+          <a:bodyPr wrap="square" lIns="0" tIns="0" rIns="0" bIns="0" rtlCol="0" anchor="t"/>
+          <a:lstStyle/>
+          <a:p>
+            <a:pPr indent="0" marL="0">
+              <a:lnSpc>
+                <a:spcPct val="104000"/>
+              </a:lnSpc>
+              <a:buNone/>
+            </a:pPr>
+            <a:r>
+              <a:rPr lang="en-US" sz="1150" dirty="0">
+                <a:solidFill>
+                  <a:srgbClr val="16262E"/>
+                </a:solidFill>
+                <a:latin typeface="Calibri" pitchFamily="34" charset="0"/>
+                <a:ea typeface="Calibri" pitchFamily="34" charset="-122"/>
+                <a:cs typeface="Calibri" pitchFamily="34" charset="-120"/>
+              </a:rPr>
+              <a:t>Obligaciones, causales de baja y transparencia: artículos 24, 27, 30 y 32.</a:t>
+            </a:r>
+            <a:endParaRPr lang="en-US" sz="1150" dirty="0"/>
+          </a:p>
+        </p:txBody>
+      </p:sp>
+      <p:sp>
+        <p:nvSpPr>
+          <p:cNvPr id="17" name="Shape"/>
+          <p:cNvSpPr/>
+          <p:nvPr/>
+        </p:nvSpPr>
+        <p:spPr>
+          <a:xfrm>
+            <a:off x="6245847" y="1780000"/>
+            <a:ext cx="5378919" cy="3000000"/>
+          </a:xfrm>
+          <a:prstGeom prst="roundRect">
+            <a:avLst>
+              <a:gd name="adj" fmla="val 2933"/>
+            </a:avLst>
+          </a:prstGeom>
+          <a:solidFill>
+            <a:srgbClr val="F7E4D8"/>
+          </a:solidFill>
+          <a:ln w="12700">
+            <a:solidFill>
+              <a:srgbClr val="F7E4D8"/>
+            </a:solidFill>
+            <a:prstDash val="solid"/>
+          </a:ln>
+        </p:spPr>
+      </p:sp>
+      <p:sp>
+        <p:nvSpPr>
+          <p:cNvPr id="18" name="Text"/>
+          <p:cNvSpPr txBox="1"/>
+          <p:nvPr/>
+        </p:nvSpPr>
+        <p:spPr>
+          <a:xfrm>
+            <a:off x="6483591" y="1930000"/>
+            <a:ext cx="4903431" cy="260000"/>
+          </a:xfrm>
+          <a:prstGeom prst="rect">
+            <a:avLst/>
+          </a:prstGeom>
+          <a:noFill/>
+          <a:ln/>
+        </p:spPr>
+        <p:txBody>
+          <a:bodyPr wrap="square" lIns="0" tIns="0" rIns="0" bIns="0" rtlCol="0" anchor="t"/>
+          <a:lstStyle/>
+          <a:p>
+            <a:pPr indent="0" marL="0">
+              <a:buNone/>
+            </a:pPr>
+            <a:r>
+              <a:rPr lang="en-US" sz="1000" b="1" spc="100" kern="0" dirty="0">
+                <a:solidFill>
+                  <a:srgbClr val="C85A28"/>
+                </a:solidFill>
+                <a:latin typeface="Arial" pitchFamily="34" charset="0"/>
+                <a:ea typeface="Arial" pitchFamily="34" charset="-122"/>
+                <a:cs typeface="Arial" pitchFamily="34" charset="-120"/>
+              </a:rPr>
+              <a:t>DISTINTO EN CADA ENTIDAD</a:t>
+            </a:r>
+            <a:endParaRPr lang="en-US" sz="1000" dirty="0"/>
+          </a:p>
+        </p:txBody>
+      </p:sp>
+      <p:sp>
+        <p:nvSpPr>
+          <p:cNvPr id="19" name="Text"/>
+          <p:cNvSpPr txBox="1"/>
+          <p:nvPr/>
+        </p:nvSpPr>
+        <p:spPr>
+          <a:xfrm>
+            <a:off x="6483591" y="2220000"/>
+            <a:ext cx="4903431" cy="340000"/>
+          </a:xfrm>
+          <a:prstGeom prst="rect">
+            <a:avLst/>
+          </a:prstGeom>
+          <a:noFill/>
+          <a:ln/>
+        </p:spPr>
+        <p:txBody>
+          <a:bodyPr wrap="square" lIns="0" tIns="0" rIns="0" bIns="0" rtlCol="0" anchor="t"/>
+          <a:lstStyle/>
+          <a:p>
+            <a:pPr indent="0" marL="0">
+              <a:buNone/>
+            </a:pPr>
+            <a:r>
+              <a:rPr lang="en-US" sz="1550" b="1" dirty="0">
+                <a:solidFill>
+                  <a:srgbClr val="16262E"/>
+                </a:solidFill>
+                <a:latin typeface="Arial" pitchFamily="34" charset="0"/>
+                <a:ea typeface="Arial" pitchFamily="34" charset="-122"/>
+                <a:cs typeface="Arial" pitchFamily="34" charset="-120"/>
+              </a:rPr>
+              <a:t>Los tres documentos de su caso</a:t>
+            </a:r>
+            <a:endParaRPr lang="en-US" sz="1550" dirty="0"/>
+          </a:p>
+        </p:txBody>
+      </p:sp>
+      <p:sp>
+        <p:nvSpPr>
+          <p:cNvPr id="20" name="Shape"/>
+          <p:cNvSpPr/>
+          <p:nvPr/>
+        </p:nvSpPr>
+        <p:spPr>
+          <a:xfrm>
+            <a:off x="6483591" y="2740000"/>
+            <a:ext cx="200000" cy="200000"/>
+          </a:xfrm>
+          <a:prstGeom prst="ellipse">
+            <a:avLst/>
+          </a:prstGeom>
+          <a:solidFill>
+            <a:srgbClr val="C85A28"/>
+          </a:solidFill>
+          <a:ln w="12700">
+            <a:solidFill>
+              <a:srgbClr val="C85A28"/>
+            </a:solidFill>
+            <a:prstDash val="solid"/>
+          </a:ln>
+        </p:spPr>
+      </p:sp>
+      <p:sp>
+        <p:nvSpPr>
+          <p:cNvPr id="21" name="Text"/>
+          <p:cNvSpPr txBox="1"/>
+          <p:nvPr/>
+        </p:nvSpPr>
+        <p:spPr>
+          <a:xfrm>
+            <a:off x="6805847" y="2680000"/>
+            <a:ext cx="4578919" cy="380000"/>
+          </a:xfrm>
+          <a:prstGeom prst="rect">
+            <a:avLst/>
+          </a:prstGeom>
+          <a:noFill/>
+          <a:ln/>
+        </p:spPr>
+        <p:txBody>
+          <a:bodyPr wrap="square" lIns="0" tIns="0" rIns="0" bIns="0" rtlCol="0" anchor="t"/>
+          <a:lstStyle/>
+          <a:p>
+            <a:pPr indent="0" marL="0">
+              <a:lnSpc>
+                <a:spcPct val="104000"/>
+              </a:lnSpc>
+              <a:buNone/>
+            </a:pPr>
+            <a:r>
+              <a:rPr lang="en-US" sz="1150" dirty="0">
+                <a:solidFill>
+                  <a:srgbClr val="16262E"/>
+                </a:solidFill>
+                <a:latin typeface="Calibri" pitchFamily="34" charset="0"/>
+                <a:ea typeface="Calibri" pitchFamily="34" charset="-122"/>
+                <a:cs typeface="Calibri" pitchFamily="34" charset="-120"/>
+              </a:rPr>
+              <a:t>Extracto del informe estatal de seguimiento 2025.</a:t>
+            </a:r>
+            <a:endParaRPr lang="en-US" sz="1150" dirty="0"/>
+          </a:p>
+        </p:txBody>
+      </p:sp>
+      <p:sp>
+        <p:nvSpPr>
+          <p:cNvPr id="22" name="Shape"/>
+          <p:cNvSpPr/>
+          <p:nvPr/>
+        </p:nvSpPr>
+        <p:spPr>
+          <a:xfrm>
+            <a:off x="6483591" y="3140000"/>
+            <a:ext cx="200000" cy="200000"/>
+          </a:xfrm>
+          <a:prstGeom prst="ellipse">
+            <a:avLst/>
+          </a:prstGeom>
+          <a:solidFill>
+            <a:srgbClr val="C85A28"/>
+          </a:solidFill>
+          <a:ln w="12700">
+            <a:solidFill>
+              <a:srgbClr val="C85A28"/>
+            </a:solidFill>
+            <a:prstDash val="solid"/>
+          </a:ln>
+        </p:spPr>
+      </p:sp>
+      <p:sp>
+        <p:nvSpPr>
+          <p:cNvPr id="23" name="Text"/>
+          <p:cNvSpPr txBox="1"/>
+          <p:nvPr/>
+        </p:nvSpPr>
+        <p:spPr>
+          <a:xfrm>
+            <a:off x="6805847" y="3080000"/>
+            <a:ext cx="4578919" cy="380000"/>
+          </a:xfrm>
+          <a:prstGeom prst="rect">
+            <a:avLst/>
+          </a:prstGeom>
+          <a:noFill/>
+          <a:ln/>
+        </p:spPr>
+        <p:txBody>
+          <a:bodyPr wrap="square" lIns="0" tIns="0" rIns="0" bIns="0" rtlCol="0" anchor="t"/>
+          <a:lstStyle/>
+          <a:p>
+            <a:pPr indent="0" marL="0">
+              <a:lnSpc>
+                <a:spcPct val="104000"/>
+              </a:lnSpc>
+              <a:buNone/>
+            </a:pPr>
+            <a:r>
+              <a:rPr lang="en-US" sz="1150" dirty="0">
+                <a:solidFill>
+                  <a:srgbClr val="16262E"/>
+                </a:solidFill>
+                <a:latin typeface="Calibri" pitchFamily="34" charset="0"/>
+                <a:ea typeface="Calibri" pitchFamily="34" charset="-122"/>
+                <a:cs typeface="Calibri" pitchFamily="34" charset="-120"/>
+              </a:rPr>
+              <a:t>Registros administrativos, en tablas con cifras.</a:t>
+            </a:r>
+            <a:endParaRPr lang="en-US" sz="1150" dirty="0"/>
+          </a:p>
+        </p:txBody>
+      </p:sp>
+      <p:sp>
+        <p:nvSpPr>
+          <p:cNvPr id="24" name="Shape"/>
+          <p:cNvSpPr/>
+          <p:nvPr/>
+        </p:nvSpPr>
+        <p:spPr>
+          <a:xfrm>
+            <a:off x="6483591" y="3540000"/>
+            <a:ext cx="200000" cy="200000"/>
+          </a:xfrm>
+          <a:prstGeom prst="ellipse">
+            <a:avLst/>
+          </a:prstGeom>
+          <a:solidFill>
+            <a:srgbClr val="C85A28"/>
+          </a:solidFill>
+          <a:ln w="12700">
+            <a:solidFill>
+              <a:srgbClr val="C85A28"/>
+            </a:solidFill>
+            <a:prstDash val="solid"/>
+          </a:ln>
+        </p:spPr>
+      </p:sp>
+      <p:sp>
+        <p:nvSpPr>
+          <p:cNvPr id="25" name="Text"/>
+          <p:cNvSpPr txBox="1"/>
+          <p:nvPr/>
+        </p:nvSpPr>
+        <p:spPr>
+          <a:xfrm>
+            <a:off x="6805847" y="3480000"/>
+            <a:ext cx="4578919" cy="380000"/>
+          </a:xfrm>
+          <a:prstGeom prst="rect">
+            <a:avLst/>
+          </a:prstGeom>
+          <a:noFill/>
+          <a:ln/>
+        </p:spPr>
+        <p:txBody>
+          <a:bodyPr wrap="square" lIns="0" tIns="0" rIns="0" bIns="0" rtlCol="0" anchor="t"/>
+          <a:lstStyle/>
+          <a:p>
+            <a:pPr indent="0" marL="0">
+              <a:lnSpc>
+                <a:spcPct val="104000"/>
+              </a:lnSpc>
+              <a:buNone/>
+            </a:pPr>
+            <a:r>
+              <a:rPr lang="en-US" sz="1150" dirty="0">
+                <a:solidFill>
+                  <a:srgbClr val="16262E"/>
+                </a:solidFill>
+                <a:latin typeface="Calibri" pitchFamily="34" charset="0"/>
+                <a:ea typeface="Calibri" pitchFamily="34" charset="-122"/>
+                <a:cs typeface="Calibri" pitchFamily="34" charset="-120"/>
+              </a:rPr>
+              <a:t>Extractos de bitácoras, testimonios y comunicaciones internas.</a:t>
+            </a:r>
+            <a:endParaRPr lang="en-US" sz="1150" dirty="0"/>
+          </a:p>
+        </p:txBody>
+      </p:sp>
+      <p:sp>
+        <p:nvSpPr>
+          <p:cNvPr id="26" name="Shape"/>
+          <p:cNvSpPr/>
+          <p:nvPr/>
+        </p:nvSpPr>
+        <p:spPr>
+          <a:xfrm>
+            <a:off x="6483591" y="3940000"/>
+            <a:ext cx="200000" cy="200000"/>
+          </a:xfrm>
+          <a:prstGeom prst="ellipse">
+            <a:avLst/>
+          </a:prstGeom>
+          <a:solidFill>
+            <a:srgbClr val="C85A28"/>
+          </a:solidFill>
+          <a:ln w="12700">
+            <a:solidFill>
+              <a:srgbClr val="C85A28"/>
+            </a:solidFill>
+            <a:prstDash val="solid"/>
+          </a:ln>
+        </p:spPr>
+      </p:sp>
+      <p:sp>
+        <p:nvSpPr>
+          <p:cNvPr id="27" name="Text"/>
+          <p:cNvSpPr txBox="1"/>
+          <p:nvPr/>
+        </p:nvSpPr>
+        <p:spPr>
+          <a:xfrm>
+            <a:off x="6805847" y="3880000"/>
+            <a:ext cx="4578919" cy="380000"/>
+          </a:xfrm>
+          <a:prstGeom prst="rect">
+            <a:avLst/>
+          </a:prstGeom>
+          <a:noFill/>
+          <a:ln/>
+        </p:spPr>
+        <p:txBody>
+          <a:bodyPr wrap="square" lIns="0" tIns="0" rIns="0" bIns="0" rtlCol="0" anchor="t"/>
+          <a:lstStyle/>
+          <a:p>
+            <a:pPr indent="0" marL="0">
+              <a:lnSpc>
+                <a:spcPct val="104000"/>
+              </a:lnSpc>
+              <a:buNone/>
+            </a:pPr>
+            <a:r>
+              <a:rPr lang="en-US" sz="1150" dirty="0">
+                <a:solidFill>
+                  <a:srgbClr val="16262E"/>
+                </a:solidFill>
+                <a:latin typeface="Calibri" pitchFamily="34" charset="0"/>
+                <a:ea typeface="Calibri" pitchFamily="34" charset="-122"/>
+                <a:cs typeface="Calibri" pitchFamily="34" charset="-120"/>
+              </a:rPr>
+              <a:t>Y una pregunta de evaluación, distinta para cada equipo.</a:t>
+            </a:r>
+            <a:endParaRPr lang="en-US" sz="1150" dirty="0"/>
+          </a:p>
+        </p:txBody>
+      </p:sp>
+      <p:sp>
+        <p:nvSpPr>
+          <p:cNvPr id="28" name="Shape"/>
+          <p:cNvSpPr/>
+          <p:nvPr/>
+        </p:nvSpPr>
+        <p:spPr>
+          <a:xfrm>
+            <a:off x="6483591" y="4340000"/>
+            <a:ext cx="200000" cy="200000"/>
+          </a:xfrm>
+          <a:prstGeom prst="ellipse">
+            <a:avLst/>
+          </a:prstGeom>
+          <a:solidFill>
+            <a:srgbClr val="C85A28"/>
+          </a:solidFill>
+          <a:ln w="12700">
+            <a:solidFill>
+              <a:srgbClr val="C85A28"/>
+            </a:solidFill>
+            <a:prstDash val="solid"/>
+          </a:ln>
+        </p:spPr>
+      </p:sp>
+      <p:sp>
+        <p:nvSpPr>
+          <p:cNvPr id="29" name="Text"/>
+          <p:cNvSpPr txBox="1"/>
+          <p:nvPr/>
+        </p:nvSpPr>
+        <p:spPr>
+          <a:xfrm>
+            <a:off x="6805847" y="4280000"/>
+            <a:ext cx="4578919" cy="380000"/>
+          </a:xfrm>
+          <a:prstGeom prst="rect">
+            <a:avLst/>
+          </a:prstGeom>
+          <a:noFill/>
+          <a:ln/>
+        </p:spPr>
+        <p:txBody>
+          <a:bodyPr wrap="square" lIns="0" tIns="0" rIns="0" bIns="0" rtlCol="0" anchor="t"/>
+          <a:lstStyle/>
+          <a:p>
+            <a:pPr indent="0" marL="0">
+              <a:lnSpc>
+                <a:spcPct val="104000"/>
+              </a:lnSpc>
+              <a:buNone/>
+            </a:pPr>
+            <a:r>
+              <a:rPr lang="en-US" sz="1150" dirty="0">
+                <a:solidFill>
+                  <a:srgbClr val="16262E"/>
+                </a:solidFill>
+                <a:latin typeface="Calibri" pitchFamily="34" charset="0"/>
+                <a:ea typeface="Calibri" pitchFamily="34" charset="-122"/>
+                <a:cs typeface="Calibri" pitchFamily="34" charset="-120"/>
+              </a:rPr>
+              <a:t>Entre los seis expedientes hay contradicciones, y son parte de lo que hay que discutir.</a:t>
+            </a:r>
+            <a:endParaRPr lang="en-US" sz="1150" dirty="0"/>
+          </a:p>
+        </p:txBody>
+      </p:sp>
+      <p:sp>
+        <p:nvSpPr>
+          <p:cNvPr id="30" name="Shape"/>
+          <p:cNvSpPr/>
+          <p:nvPr/>
+        </p:nvSpPr>
+        <p:spPr>
+          <a:xfrm>
+            <a:off x="566928" y="4940000"/>
+            <a:ext cx="11057839" cy="900000"/>
+          </a:xfrm>
+          <a:prstGeom prst="roundRect">
+            <a:avLst>
+              <a:gd name="adj" fmla="val 8235"/>
+            </a:avLst>
+          </a:prstGeom>
+          <a:solidFill>
+            <a:srgbClr val="F7E4D8"/>
+          </a:solidFill>
+          <a:ln w="12700">
+            <a:solidFill>
+              <a:srgbClr val="F7E4D8"/>
+            </a:solidFill>
+            <a:prstDash val="solid"/>
+          </a:ln>
+        </p:spPr>
+      </p:sp>
+      <p:sp>
+        <p:nvSpPr>
+          <p:cNvPr id="31" name="Text"/>
+          <p:cNvSpPr txBox="1"/>
+          <p:nvPr/>
+        </p:nvSpPr>
+        <p:spPr>
+          <a:xfrm>
+            <a:off x="804672" y="4940000"/>
+            <a:ext cx="10582351" cy="900000"/>
+          </a:xfrm>
+          <a:prstGeom prst="rect">
+            <a:avLst/>
+          </a:prstGeom>
+          <a:noFill/>
+          <a:ln/>
+        </p:spPr>
+        <p:txBody>
+          <a:bodyPr wrap="square" lIns="0" tIns="0" rIns="0" bIns="0" rtlCol="0" anchor="ctr"/>
+          <a:lstStyle/>
+          <a:p>
+            <a:pPr indent="0" marL="0">
+              <a:lnSpc>
+                <a:spcPct val="110000"/>
+              </a:lnSpc>
+              <a:buNone/>
+            </a:pPr>
+            <a:r>
+              <a:rPr lang="en-US" sz="1300" dirty="0">
+                <a:solidFill>
+                  <a:srgbClr val="16262E"/>
+                </a:solidFill>
+                <a:latin typeface="Calibri" pitchFamily="34" charset="0"/>
+                <a:ea typeface="Calibri" pitchFamily="34" charset="-122"/>
+                <a:cs typeface="Calibri" pitchFamily="34" charset="-120"/>
+              </a:rPr>
+              <a:t>Las cuatro láminas que siguen usan solo el marco normativo, el que todos comparten, para que ningún equipo reciba una pista sobre su propia entidad. Los documentos de su caso los abren hasta el laboratorio.</a:t>
+            </a:r>
+            <a:endParaRPr lang="en-US" sz="1300" dirty="0"/>
+          </a:p>
+        </p:txBody>
+      </p:sp>
+      <p:sp>
+        <p:nvSpPr>
+          <p:cNvPr id="32" name="Text"/>
+          <p:cNvSpPr txBox="1"/>
+          <p:nvPr/>
+        </p:nvSpPr>
+        <p:spPr>
+          <a:xfrm>
+            <a:off x="566928" y="6000000"/>
+            <a:ext cx="11057839" cy="240000"/>
+          </a:xfrm>
+          <a:prstGeom prst="rect">
+            <a:avLst/>
+          </a:prstGeom>
+          <a:noFill/>
+          <a:ln/>
+        </p:spPr>
+        <p:txBody>
+          <a:bodyPr wrap="square" lIns="0" tIns="0" rIns="0" bIns="0" rtlCol="0" anchor="t"/>
+          <a:lstStyle/>
+          <a:p>
+            <a:pPr indent="0" marL="0">
+              <a:buNone/>
+            </a:pPr>
+            <a:r>
+              <a:rPr lang="en-US" sz="1000" dirty="0">
+                <a:solidFill>
+                  <a:srgbClr val="5A6B73"/>
+                </a:solidFill>
+                <a:latin typeface="Calibri" pitchFamily="34" charset="0"/>
+                <a:ea typeface="Calibri" pitchFamily="34" charset="-122"/>
+                <a:cs typeface="Calibri" pitchFamily="34" charset="-120"/>
+              </a:rPr>
+              <a:t>Expedientes_LAB2.docx, en la carpeta sesion-06 del repositorio. Se distribuyó el fin de semana.</a:t>
+            </a:r>
+            <a:endParaRPr lang="en-US" sz="1000" dirty="0"/>
+          </a:p>
+        </p:txBody>
+      </p:sp>
+    </p:spTree>
+  </p:cSld>
+  <p:clrMapOvr>
+    <a:masterClrMapping/>
+  </p:clrMapOvr>
+</p:sld>
+</file>
+
+<file path=ppt/slides/slide27.xml><?xml version="1.0" encoding="utf-8"?>
+<p:sld xmlns:a="http://schemas.openxmlformats.org/drawingml/2006/main" xmlns:r="http://schemas.openxmlformats.org/officeDocument/2006/relationships" xmlns:p="http://schemas.openxmlformats.org/presentationml/2006/main">
+  <p:cSld name="Corpus de foros">
+    <p:spTree>
+      <p:nvGrpSpPr>
+        <p:cNvPr id="1" name=""/>
+        <p:cNvGrpSpPr/>
+        <p:nvPr/>
+      </p:nvGrpSpPr>
+      <p:grpSpPr>
+        <a:xfrm>
+          <a:off x="0" y="0"/>
+          <a:ext cx="0" cy="0"/>
+          <a:chOff x="0" y="0"/>
+          <a:chExt cx="0" cy="0"/>
+        </a:xfrm>
+      </p:grpSpPr>
+      <p:sp>
+        <p:nvSpPr>
+          <p:cNvPr id="2" name="Text"/>
+          <p:cNvSpPr txBox="1"/>
+          <p:nvPr/>
+        </p:nvSpPr>
+        <p:spPr>
+          <a:xfrm>
+            <a:off x="566928" y="402336"/>
+            <a:ext cx="11057839" cy="749808"/>
+          </a:xfrm>
+          <a:prstGeom prst="rect">
+            <a:avLst/>
+          </a:prstGeom>
+          <a:noFill/>
+          <a:ln/>
+        </p:spPr>
+        <p:txBody>
+          <a:bodyPr wrap="square" lIns="0" tIns="0" rIns="0" bIns="0" rtlCol="0" anchor="t"/>
+          <a:lstStyle/>
+          <a:p>
+            <a:pPr algn="l" indent="0" marL="0">
+              <a:buNone/>
+            </a:pPr>
+            <a:r>
+              <a:rPr lang="en-US" sz="3200" b="1" dirty="0">
+                <a:solidFill>
+                  <a:srgbClr val="16262E"/>
+                </a:solidFill>
+                <a:latin typeface="Arial" pitchFamily="34" charset="0"/>
+                <a:ea typeface="Arial" pitchFamily="34" charset="-122"/>
+                <a:cs typeface="Arial" pitchFamily="34" charset="-120"/>
+              </a:rPr>
+              <a:t>De dónde salen los 38 casos de la lámina que sigue</a:t>
+            </a:r>
+            <a:endParaRPr lang="en-US" sz="3200" dirty="0"/>
+          </a:p>
+        </p:txBody>
+      </p:sp>
+      <p:sp>
+        <p:nvSpPr>
+          <p:cNvPr id="3" name="Text"/>
+          <p:cNvSpPr txBox="1"/>
+          <p:nvPr/>
+        </p:nvSpPr>
+        <p:spPr>
+          <a:xfrm>
+            <a:off x="566928" y="1280160"/>
+            <a:ext cx="11057839" cy="731520"/>
+          </a:xfrm>
+          <a:prstGeom prst="rect">
+            <a:avLst/>
+          </a:prstGeom>
+          <a:noFill/>
+          <a:ln/>
+        </p:spPr>
+        <p:txBody>
+          <a:bodyPr wrap="square" lIns="0" tIns="0" rIns="0" bIns="0" rtlCol="0" anchor="t"/>
+          <a:lstStyle/>
+          <a:p>
+            <a:pPr indent="0" marL="0">
+              <a:lnSpc>
+                <a:spcPct val="108000"/>
+              </a:lnSpc>
+              <a:buNone/>
+            </a:pPr>
+            <a:r>
+              <a:rPr lang="en-US" sz="1500" dirty="0">
+                <a:solidFill>
+                  <a:srgbClr val="5A6B73"/>
+                </a:solidFill>
+                <a:latin typeface="Calibri" pitchFamily="34" charset="0"/>
+                <a:ea typeface="Calibri" pitchFamily="34" charset="-122"/>
+                <a:cs typeface="Calibri" pitchFamily="34" charset="-120"/>
+              </a:rPr>
+              <a:t>El número que van a ver no es un ejemplo de libro de texto: es su propio material del viernes.</a:t>
+            </a:r>
+            <a:endParaRPr lang="en-US" sz="1500" dirty="0"/>
+          </a:p>
+        </p:txBody>
+      </p:sp>
+      <p:sp>
+        <p:nvSpPr>
+          <p:cNvPr id="4" name="Shape"/>
+          <p:cNvSpPr/>
+          <p:nvPr/>
+        </p:nvSpPr>
+        <p:spPr>
+          <a:xfrm>
+            <a:off x="566928" y="1800000"/>
+            <a:ext cx="2584459" cy="2900000"/>
+          </a:xfrm>
+          <a:prstGeom prst="roundRect">
+            <a:avLst>
+              <a:gd name="adj" fmla="val 2933"/>
+            </a:avLst>
+          </a:prstGeom>
+          <a:solidFill>
+            <a:srgbClr val="F2F5F6"/>
+          </a:solidFill>
+          <a:ln w="12700">
+            <a:solidFill>
+              <a:srgbClr val="F2F5F6"/>
+            </a:solidFill>
+            <a:prstDash val="solid"/>
+          </a:ln>
+        </p:spPr>
+      </p:sp>
+      <p:sp>
+        <p:nvSpPr>
+          <p:cNvPr id="5" name="Shape"/>
+          <p:cNvSpPr/>
+          <p:nvPr/>
+        </p:nvSpPr>
+        <p:spPr>
+          <a:xfrm>
+            <a:off x="804672" y="2019456"/>
+            <a:ext cx="420624" cy="420624"/>
+          </a:xfrm>
+          <a:prstGeom prst="ellipse">
+            <a:avLst/>
+          </a:prstGeom>
+          <a:solidFill>
+            <a:srgbClr val="2E7D7D"/>
+          </a:solidFill>
+          <a:ln w="12700">
+            <a:solidFill>
+              <a:srgbClr val="2E7D7D"/>
+            </a:solidFill>
+            <a:prstDash val="solid"/>
+          </a:ln>
+        </p:spPr>
+      </p:sp>
+      <p:sp>
+        <p:nvSpPr>
+          <p:cNvPr id="6" name="Text"/>
+          <p:cNvSpPr txBox="1"/>
+          <p:nvPr/>
+        </p:nvSpPr>
+        <p:spPr>
+          <a:xfrm>
+            <a:off x="804672" y="2019456"/>
+            <a:ext cx="420624" cy="420624"/>
+          </a:xfrm>
+          <a:prstGeom prst="rect">
+            <a:avLst/>
+          </a:prstGeom>
+          <a:noFill/>
+          <a:ln/>
+        </p:spPr>
+        <p:txBody>
+          <a:bodyPr wrap="square" lIns="0" tIns="0" rIns="0" bIns="0" rtlCol="0" anchor="ctr"/>
+          <a:lstStyle/>
+          <a:p>
+            <a:pPr algn="ctr" indent="0" marL="0">
+              <a:buNone/>
+            </a:pPr>
+            <a:r>
+              <a:rPr lang="en-US" sz="1400" b="1" dirty="0">
+                <a:solidFill>
+                  <a:srgbClr val="FFFFFF"/>
+                </a:solidFill>
+                <a:latin typeface="Arial" pitchFamily="34" charset="0"/>
+                <a:ea typeface="Arial" pitchFamily="34" charset="-122"/>
+                <a:cs typeface="Arial" pitchFamily="34" charset="-120"/>
+              </a:rPr>
+              <a:t>1</a:t>
+            </a:r>
+            <a:endParaRPr lang="en-US" sz="1400" dirty="0"/>
+          </a:p>
+        </p:txBody>
+      </p:sp>
+      <p:sp>
+        <p:nvSpPr>
+          <p:cNvPr id="7" name="Text"/>
+          <p:cNvSpPr txBox="1"/>
+          <p:nvPr/>
+        </p:nvSpPr>
+        <p:spPr>
+          <a:xfrm>
+            <a:off x="804672" y="2579456"/>
+            <a:ext cx="2108971" cy="583184"/>
+          </a:xfrm>
+          <a:prstGeom prst="rect">
+            <a:avLst/>
+          </a:prstGeom>
+          <a:noFill/>
+          <a:ln/>
+        </p:spPr>
+        <p:txBody>
+          <a:bodyPr wrap="square" lIns="0" tIns="0" rIns="0" bIns="0" rtlCol="0" anchor="t"/>
+          <a:lstStyle/>
+          <a:p>
+            <a:pPr indent="0" marL="0">
+              <a:buNone/>
+            </a:pPr>
+            <a:r>
+              <a:rPr lang="en-US" sz="1450" b="1" dirty="0">
+                <a:solidFill>
+                  <a:srgbClr val="16262E"/>
+                </a:solidFill>
+                <a:latin typeface="Arial" pitchFamily="34" charset="0"/>
+                <a:ea typeface="Arial" pitchFamily="34" charset="-122"/>
+                <a:cs typeface="Arial" pitchFamily="34" charset="-120"/>
+              </a:rPr>
+              <a:t>El corpus</a:t>
+            </a:r>
+            <a:endParaRPr lang="en-US" sz="1450" dirty="0"/>
+          </a:p>
+        </p:txBody>
+      </p:sp>
+      <p:sp>
+        <p:nvSpPr>
+          <p:cNvPr id="8" name="Text"/>
+          <p:cNvSpPr txBox="1"/>
+          <p:nvPr/>
+        </p:nvSpPr>
+        <p:spPr>
+          <a:xfrm>
+            <a:off x="804672" y="3219456"/>
+            <a:ext cx="2108971" cy="1360544"/>
+          </a:xfrm>
+          <a:prstGeom prst="rect">
+            <a:avLst/>
+          </a:prstGeom>
+          <a:noFill/>
+          <a:ln/>
+        </p:spPr>
+        <p:txBody>
+          <a:bodyPr wrap="square" lIns="0" tIns="0" rIns="0" bIns="0" rtlCol="0" anchor="t"/>
+          <a:lstStyle/>
+          <a:p>
+            <a:pPr indent="0" marL="0">
+              <a:lnSpc>
+                <a:spcPct val="110000"/>
+              </a:lnSpc>
+              <a:spcAft>
+                <a:spcPts val="700"/>
+              </a:spcAft>
+              <a:buNone/>
+            </a:pPr>
+            <a:r>
+              <a:rPr lang="en-US" sz="1150" dirty="0">
+                <a:solidFill>
+                  <a:srgbClr val="16262E"/>
+                </a:solidFill>
+                <a:latin typeface="Calibri" pitchFamily="34" charset="0"/>
+                <a:ea typeface="Calibri" pitchFamily="34" charset="-122"/>
+                <a:cs typeface="Calibri" pitchFamily="34" charset="-120"/>
+              </a:rPr>
+              <a:t>Dos foros de consulta del programa en la Entidad C, en agosto de 2026. La transcripción trae 41 intervenciones, de las cuales tres son del moderador y no se clasifican. Quedan 38.</a:t>
+            </a:r>
+            <a:endParaRPr lang="en-US" sz="1150" dirty="0"/>
+          </a:p>
+        </p:txBody>
+      </p:sp>
+      <p:sp>
+        <p:nvSpPr>
+          <p:cNvPr id="9" name="Shape"/>
+          <p:cNvSpPr/>
+          <p:nvPr/>
+        </p:nvSpPr>
+        <p:spPr>
+          <a:xfrm>
+            <a:off x="3391387" y="1800000"/>
+            <a:ext cx="2584459" cy="2900000"/>
+          </a:xfrm>
+          <a:prstGeom prst="roundRect">
+            <a:avLst>
+              <a:gd name="adj" fmla="val 2933"/>
+            </a:avLst>
+          </a:prstGeom>
+          <a:solidFill>
+            <a:srgbClr val="F2F5F6"/>
+          </a:solidFill>
+          <a:ln w="12700">
+            <a:solidFill>
+              <a:srgbClr val="F2F5F6"/>
+            </a:solidFill>
+            <a:prstDash val="solid"/>
+          </a:ln>
+        </p:spPr>
+      </p:sp>
+      <p:sp>
+        <p:nvSpPr>
+          <p:cNvPr id="10" name="Shape"/>
+          <p:cNvSpPr/>
+          <p:nvPr/>
+        </p:nvSpPr>
+        <p:spPr>
+          <a:xfrm>
+            <a:off x="3629131" y="2019456"/>
+            <a:ext cx="420624" cy="420624"/>
+          </a:xfrm>
+          <a:prstGeom prst="ellipse">
+            <a:avLst/>
+          </a:prstGeom>
+          <a:solidFill>
+            <a:srgbClr val="2E7D7D"/>
+          </a:solidFill>
+          <a:ln w="12700">
+            <a:solidFill>
+              <a:srgbClr val="2E7D7D"/>
+            </a:solidFill>
+            <a:prstDash val="solid"/>
+          </a:ln>
+        </p:spPr>
+      </p:sp>
+      <p:sp>
+        <p:nvSpPr>
+          <p:cNvPr id="11" name="Text"/>
+          <p:cNvSpPr txBox="1"/>
+          <p:nvPr/>
+        </p:nvSpPr>
+        <p:spPr>
+          <a:xfrm>
+            <a:off x="3629131" y="2019456"/>
+            <a:ext cx="420624" cy="420624"/>
+          </a:xfrm>
+          <a:prstGeom prst="rect">
+            <a:avLst/>
+          </a:prstGeom>
+          <a:noFill/>
+          <a:ln/>
+        </p:spPr>
+        <p:txBody>
+          <a:bodyPr wrap="square" lIns="0" tIns="0" rIns="0" bIns="0" rtlCol="0" anchor="ctr"/>
+          <a:lstStyle/>
+          <a:p>
+            <a:pPr algn="ctr" indent="0" marL="0">
+              <a:buNone/>
+            </a:pPr>
+            <a:r>
+              <a:rPr lang="en-US" sz="1400" b="1" dirty="0">
+                <a:solidFill>
+                  <a:srgbClr val="FFFFFF"/>
+                </a:solidFill>
+                <a:latin typeface="Arial" pitchFamily="34" charset="0"/>
+                <a:ea typeface="Arial" pitchFamily="34" charset="-122"/>
+                <a:cs typeface="Arial" pitchFamily="34" charset="-120"/>
+              </a:rPr>
+              <a:t>2</a:t>
+            </a:r>
+            <a:endParaRPr lang="en-US" sz="1400" dirty="0"/>
+          </a:p>
+        </p:txBody>
+      </p:sp>
+      <p:sp>
+        <p:nvSpPr>
+          <p:cNvPr id="12" name="Text"/>
+          <p:cNvSpPr txBox="1"/>
+          <p:nvPr/>
+        </p:nvSpPr>
+        <p:spPr>
+          <a:xfrm>
+            <a:off x="3629131" y="2579456"/>
+            <a:ext cx="2108971" cy="583184"/>
+          </a:xfrm>
+          <a:prstGeom prst="rect">
+            <a:avLst/>
+          </a:prstGeom>
+          <a:noFill/>
+          <a:ln/>
+        </p:spPr>
+        <p:txBody>
+          <a:bodyPr wrap="square" lIns="0" tIns="0" rIns="0" bIns="0" rtlCol="0" anchor="t"/>
+          <a:lstStyle/>
+          <a:p>
+            <a:pPr indent="0" marL="0">
+              <a:buNone/>
+            </a:pPr>
+            <a:r>
+              <a:rPr lang="en-US" sz="1450" b="1" dirty="0">
+                <a:solidFill>
+                  <a:srgbClr val="16262E"/>
+                </a:solidFill>
+                <a:latin typeface="Arial" pitchFamily="34" charset="0"/>
+                <a:ea typeface="Arial" pitchFamily="34" charset="-122"/>
+                <a:cs typeface="Arial" pitchFamily="34" charset="-120"/>
+              </a:rPr>
+              <a:t>Lo que hicieron el viernes</a:t>
+            </a:r>
+            <a:endParaRPr lang="en-US" sz="1450" dirty="0"/>
+          </a:p>
+        </p:txBody>
+      </p:sp>
+      <p:sp>
+        <p:nvSpPr>
+          <p:cNvPr id="13" name="Text"/>
+          <p:cNvSpPr txBox="1"/>
+          <p:nvPr/>
+        </p:nvSpPr>
+        <p:spPr>
+          <a:xfrm>
+            <a:off x="3629131" y="3219456"/>
+            <a:ext cx="2108971" cy="1360544"/>
+          </a:xfrm>
+          <a:prstGeom prst="rect">
+            <a:avLst/>
+          </a:prstGeom>
+          <a:noFill/>
+          <a:ln/>
+        </p:spPr>
+        <p:txBody>
+          <a:bodyPr wrap="square" lIns="0" tIns="0" rIns="0" bIns="0" rtlCol="0" anchor="t"/>
+          <a:lstStyle/>
+          <a:p>
+            <a:pPr indent="0" marL="0">
+              <a:lnSpc>
+                <a:spcPct val="110000"/>
+              </a:lnSpc>
+              <a:spcAft>
+                <a:spcPts val="700"/>
+              </a:spcAft>
+              <a:buNone/>
+            </a:pPr>
+            <a:r>
+              <a:rPr lang="en-US" sz="1150" dirty="0">
+                <a:solidFill>
+                  <a:srgbClr val="16262E"/>
+                </a:solidFill>
+                <a:latin typeface="Calibri" pitchFamily="34" charset="0"/>
+                <a:ea typeface="Calibri" pitchFamily="34" charset="-122"/>
+                <a:cs typeface="Calibri" pitchFamily="34" charset="-120"/>
+              </a:rPr>
+              <a:t>Clasificar cada intervención por polaridad y por causa raíz, con cuatro categorías: infraestructura, presupuesto, gestión y transparencia.</a:t>
+            </a:r>
+            <a:endParaRPr lang="en-US" sz="1150" dirty="0"/>
+          </a:p>
+        </p:txBody>
+      </p:sp>
+      <p:sp>
+        <p:nvSpPr>
+          <p:cNvPr id="14" name="Shape"/>
+          <p:cNvSpPr/>
+          <p:nvPr/>
+        </p:nvSpPr>
+        <p:spPr>
+          <a:xfrm>
+            <a:off x="6215846" y="1800000"/>
+            <a:ext cx="2584459" cy="2900000"/>
+          </a:xfrm>
+          <a:prstGeom prst="roundRect">
+            <a:avLst>
+              <a:gd name="adj" fmla="val 2933"/>
+            </a:avLst>
+          </a:prstGeom>
+          <a:solidFill>
+            <a:srgbClr val="F2F5F6"/>
+          </a:solidFill>
+          <a:ln w="12700">
+            <a:solidFill>
+              <a:srgbClr val="F2F5F6"/>
+            </a:solidFill>
+            <a:prstDash val="solid"/>
+          </a:ln>
+        </p:spPr>
+      </p:sp>
+      <p:sp>
+        <p:nvSpPr>
+          <p:cNvPr id="15" name="Shape"/>
+          <p:cNvSpPr/>
+          <p:nvPr/>
+        </p:nvSpPr>
+        <p:spPr>
+          <a:xfrm>
+            <a:off x="6453590" y="2019456"/>
+            <a:ext cx="420624" cy="420624"/>
+          </a:xfrm>
+          <a:prstGeom prst="ellipse">
+            <a:avLst/>
+          </a:prstGeom>
+          <a:solidFill>
+            <a:srgbClr val="2E7D7D"/>
+          </a:solidFill>
+          <a:ln w="12700">
+            <a:solidFill>
+              <a:srgbClr val="2E7D7D"/>
+            </a:solidFill>
+            <a:prstDash val="solid"/>
+          </a:ln>
+        </p:spPr>
+      </p:sp>
+      <p:sp>
+        <p:nvSpPr>
+          <p:cNvPr id="16" name="Text"/>
+          <p:cNvSpPr txBox="1"/>
+          <p:nvPr/>
+        </p:nvSpPr>
+        <p:spPr>
+          <a:xfrm>
+            <a:off x="6453590" y="2019456"/>
+            <a:ext cx="420624" cy="420624"/>
+          </a:xfrm>
+          <a:prstGeom prst="rect">
+            <a:avLst/>
+          </a:prstGeom>
+          <a:noFill/>
+          <a:ln/>
+        </p:spPr>
+        <p:txBody>
+          <a:bodyPr wrap="square" lIns="0" tIns="0" rIns="0" bIns="0" rtlCol="0" anchor="ctr"/>
+          <a:lstStyle/>
+          <a:p>
+            <a:pPr algn="ctr" indent="0" marL="0">
+              <a:buNone/>
+            </a:pPr>
+            <a:r>
+              <a:rPr lang="en-US" sz="1400" b="1" dirty="0">
+                <a:solidFill>
+                  <a:srgbClr val="FFFFFF"/>
+                </a:solidFill>
+                <a:latin typeface="Arial" pitchFamily="34" charset="0"/>
+                <a:ea typeface="Arial" pitchFamily="34" charset="-122"/>
+                <a:cs typeface="Arial" pitchFamily="34" charset="-120"/>
+              </a:rPr>
+              <a:t>3</a:t>
+            </a:r>
+            <a:endParaRPr lang="en-US" sz="1400" dirty="0"/>
+          </a:p>
+        </p:txBody>
+      </p:sp>
+      <p:sp>
+        <p:nvSpPr>
+          <p:cNvPr id="17" name="Text"/>
+          <p:cNvSpPr txBox="1"/>
+          <p:nvPr/>
+        </p:nvSpPr>
+        <p:spPr>
+          <a:xfrm>
+            <a:off x="6453590" y="2579456"/>
+            <a:ext cx="2108971" cy="583184"/>
+          </a:xfrm>
+          <a:prstGeom prst="rect">
+            <a:avLst/>
+          </a:prstGeom>
+          <a:noFill/>
+          <a:ln/>
+        </p:spPr>
+        <p:txBody>
+          <a:bodyPr wrap="square" lIns="0" tIns="0" rIns="0" bIns="0" rtlCol="0" anchor="t"/>
+          <a:lstStyle/>
+          <a:p>
+            <a:pPr indent="0" marL="0">
+              <a:buNone/>
+            </a:pPr>
+            <a:r>
+              <a:rPr lang="en-US" sz="1450" b="1" dirty="0">
+                <a:solidFill>
+                  <a:srgbClr val="16262E"/>
+                </a:solidFill>
+                <a:latin typeface="Arial" pitchFamily="34" charset="0"/>
+                <a:ea typeface="Arial" pitchFamily="34" charset="-122"/>
+                <a:cs typeface="Arial" pitchFamily="34" charset="-120"/>
+              </a:rPr>
+              <a:t>La clave</a:t>
+            </a:r>
+            <a:endParaRPr lang="en-US" sz="1450" dirty="0"/>
+          </a:p>
+        </p:txBody>
+      </p:sp>
+      <p:sp>
+        <p:nvSpPr>
+          <p:cNvPr id="18" name="Text"/>
+          <p:cNvSpPr txBox="1"/>
+          <p:nvPr/>
+        </p:nvSpPr>
+        <p:spPr>
+          <a:xfrm>
+            <a:off x="6453590" y="3219456"/>
+            <a:ext cx="2108971" cy="1360544"/>
+          </a:xfrm>
+          <a:prstGeom prst="rect">
+            <a:avLst/>
+          </a:prstGeom>
+          <a:noFill/>
+          <a:ln/>
+        </p:spPr>
+        <p:txBody>
+          <a:bodyPr wrap="square" lIns="0" tIns="0" rIns="0" bIns="0" rtlCol="0" anchor="t"/>
+          <a:lstStyle/>
+          <a:p>
+            <a:pPr indent="0" marL="0">
+              <a:lnSpc>
+                <a:spcPct val="110000"/>
+              </a:lnSpc>
+              <a:spcAft>
+                <a:spcPts val="700"/>
+              </a:spcAft>
+              <a:buNone/>
+            </a:pPr>
+            <a:r>
+              <a:rPr lang="en-US" sz="1150" dirty="0">
+                <a:solidFill>
+                  <a:srgbClr val="16262E"/>
+                </a:solidFill>
+                <a:latin typeface="Calibri" pitchFamily="34" charset="0"/>
+                <a:ea typeface="Calibri" pitchFamily="34" charset="-122"/>
+                <a:cs typeface="Calibri" pitchFamily="34" charset="-120"/>
+              </a:rPr>
+              <a:t>Yo clasifiqué las 38 al preparar el material, y esa es la clave contra la que se compararon sus resultados.</a:t>
+            </a:r>
+            <a:endParaRPr lang="en-US" sz="1150" dirty="0"/>
+          </a:p>
+        </p:txBody>
+      </p:sp>
+      <p:sp>
+        <p:nvSpPr>
+          <p:cNvPr id="19" name="Shape"/>
+          <p:cNvSpPr/>
+          <p:nvPr/>
+        </p:nvSpPr>
+        <p:spPr>
+          <a:xfrm>
+            <a:off x="9040305" y="1800000"/>
+            <a:ext cx="2584459" cy="2900000"/>
+          </a:xfrm>
+          <a:prstGeom prst="roundRect">
+            <a:avLst>
+              <a:gd name="adj" fmla="val 2933"/>
+            </a:avLst>
+          </a:prstGeom>
+          <a:solidFill>
+            <a:srgbClr val="F2F5F6"/>
+          </a:solidFill>
+          <a:ln w="12700">
+            <a:solidFill>
+              <a:srgbClr val="F2F5F6"/>
+            </a:solidFill>
+            <a:prstDash val="solid"/>
+          </a:ln>
+        </p:spPr>
+      </p:sp>
+      <p:sp>
+        <p:nvSpPr>
+          <p:cNvPr id="20" name="Shape"/>
+          <p:cNvSpPr/>
+          <p:nvPr/>
+        </p:nvSpPr>
+        <p:spPr>
+          <a:xfrm>
+            <a:off x="9278049" y="2019456"/>
+            <a:ext cx="420624" cy="420624"/>
+          </a:xfrm>
+          <a:prstGeom prst="ellipse">
+            <a:avLst/>
+          </a:prstGeom>
+          <a:solidFill>
+            <a:srgbClr val="2E7D7D"/>
+          </a:solidFill>
+          <a:ln w="12700">
+            <a:solidFill>
+              <a:srgbClr val="2E7D7D"/>
+            </a:solidFill>
+            <a:prstDash val="solid"/>
+          </a:ln>
+        </p:spPr>
+      </p:sp>
+      <p:sp>
+        <p:nvSpPr>
+          <p:cNvPr id="21" name="Text"/>
+          <p:cNvSpPr txBox="1"/>
+          <p:nvPr/>
+        </p:nvSpPr>
+        <p:spPr>
+          <a:xfrm>
+            <a:off x="9278049" y="2019456"/>
+            <a:ext cx="420624" cy="420624"/>
+          </a:xfrm>
+          <a:prstGeom prst="rect">
+            <a:avLst/>
+          </a:prstGeom>
+          <a:noFill/>
+          <a:ln/>
+        </p:spPr>
+        <p:txBody>
+          <a:bodyPr wrap="square" lIns="0" tIns="0" rIns="0" bIns="0" rtlCol="0" anchor="ctr"/>
+          <a:lstStyle/>
+          <a:p>
+            <a:pPr algn="ctr" indent="0" marL="0">
+              <a:buNone/>
+            </a:pPr>
+            <a:r>
+              <a:rPr lang="en-US" sz="1400" b="1" dirty="0">
+                <a:solidFill>
+                  <a:srgbClr val="FFFFFF"/>
+                </a:solidFill>
+                <a:latin typeface="Arial" pitchFamily="34" charset="0"/>
+                <a:ea typeface="Arial" pitchFamily="34" charset="-122"/>
+                <a:cs typeface="Arial" pitchFamily="34" charset="-120"/>
+              </a:rPr>
+              <a:t>4</a:t>
+            </a:r>
+            <a:endParaRPr lang="en-US" sz="1400" dirty="0"/>
+          </a:p>
+        </p:txBody>
+      </p:sp>
+      <p:sp>
+        <p:nvSpPr>
+          <p:cNvPr id="22" name="Text"/>
+          <p:cNvSpPr txBox="1"/>
+          <p:nvPr/>
+        </p:nvSpPr>
+        <p:spPr>
+          <a:xfrm>
+            <a:off x="9278049" y="2579456"/>
+            <a:ext cx="2108971" cy="583184"/>
+          </a:xfrm>
+          <a:prstGeom prst="rect">
+            <a:avLst/>
+          </a:prstGeom>
+          <a:noFill/>
+          <a:ln/>
+        </p:spPr>
+        <p:txBody>
+          <a:bodyPr wrap="square" lIns="0" tIns="0" rIns="0" bIns="0" rtlCol="0" anchor="t"/>
+          <a:lstStyle/>
+          <a:p>
+            <a:pPr indent="0" marL="0">
+              <a:buNone/>
+            </a:pPr>
+            <a:r>
+              <a:rPr lang="en-US" sz="1450" b="1" dirty="0">
+                <a:solidFill>
+                  <a:srgbClr val="16262E"/>
+                </a:solidFill>
+                <a:latin typeface="Arial" pitchFamily="34" charset="0"/>
+                <a:ea typeface="Arial" pitchFamily="34" charset="-122"/>
+                <a:cs typeface="Arial" pitchFamily="34" charset="-120"/>
+              </a:rPr>
+              <a:t>La verificación</a:t>
+            </a:r>
+            <a:endParaRPr lang="en-US" sz="1450" dirty="0"/>
+          </a:p>
+        </p:txBody>
+      </p:sp>
+      <p:sp>
+        <p:nvSpPr>
+          <p:cNvPr id="23" name="Text"/>
+          <p:cNvSpPr txBox="1"/>
+          <p:nvPr/>
+        </p:nvSpPr>
+        <p:spPr>
+          <a:xfrm>
+            <a:off x="9278049" y="3219456"/>
+            <a:ext cx="2108971" cy="1360544"/>
+          </a:xfrm>
+          <a:prstGeom prst="rect">
+            <a:avLst/>
+          </a:prstGeom>
+          <a:noFill/>
+          <a:ln/>
+        </p:spPr>
+        <p:txBody>
+          <a:bodyPr wrap="square" lIns="0" tIns="0" rIns="0" bIns="0" rtlCol="0" anchor="t"/>
+          <a:lstStyle/>
+          <a:p>
+            <a:pPr indent="0" marL="0">
+              <a:lnSpc>
+                <a:spcPct val="110000"/>
+              </a:lnSpc>
+              <a:spcAft>
+                <a:spcPts val="700"/>
+              </a:spcAft>
+              <a:buNone/>
+            </a:pPr>
+            <a:r>
+              <a:rPr lang="en-US" sz="1150" dirty="0">
+                <a:solidFill>
+                  <a:srgbClr val="16262E"/>
+                </a:solidFill>
+                <a:latin typeface="Calibri" pitchFamily="34" charset="0"/>
+                <a:ea typeface="Calibri" pitchFamily="34" charset="-122"/>
+                <a:cs typeface="Calibri" pitchFamily="34" charset="-120"/>
+              </a:rPr>
+              <a:t>Una segunda clasificación independiente, hecha sin ver la clave, volvió a codificar las 38. Coincidió en 36, y las dos diferencias sirvieron para corregir la clave.</a:t>
+            </a:r>
+            <a:endParaRPr lang="en-US" sz="1150" dirty="0"/>
+          </a:p>
+        </p:txBody>
+      </p:sp>
+      <p:sp>
+        <p:nvSpPr>
+          <p:cNvPr id="24" name="Shape"/>
+          <p:cNvSpPr/>
+          <p:nvPr/>
+        </p:nvSpPr>
+        <p:spPr>
+          <a:xfrm>
+            <a:off x="566928" y="4860000"/>
+            <a:ext cx="11057839" cy="900000"/>
+          </a:xfrm>
+          <a:prstGeom prst="roundRect">
+            <a:avLst>
+              <a:gd name="adj" fmla="val 8235"/>
+            </a:avLst>
+          </a:prstGeom>
+          <a:solidFill>
+            <a:srgbClr val="F7E4D8"/>
+          </a:solidFill>
+          <a:ln w="12700">
+            <a:solidFill>
+              <a:srgbClr val="F7E4D8"/>
+            </a:solidFill>
+            <a:prstDash val="solid"/>
+          </a:ln>
+        </p:spPr>
+      </p:sp>
+      <p:sp>
+        <p:nvSpPr>
+          <p:cNvPr id="25" name="Text"/>
+          <p:cNvSpPr txBox="1"/>
+          <p:nvPr/>
+        </p:nvSpPr>
+        <p:spPr>
+          <a:xfrm>
+            <a:off x="804672" y="4860000"/>
+            <a:ext cx="10582351" cy="900000"/>
+          </a:xfrm>
+          <a:prstGeom prst="rect">
+            <a:avLst/>
+          </a:prstGeom>
+          <a:noFill/>
+          <a:ln/>
+        </p:spPr>
+        <p:txBody>
+          <a:bodyPr wrap="square" lIns="0" tIns="0" rIns="0" bIns="0" rtlCol="0" anchor="ctr"/>
+          <a:lstStyle/>
+          <a:p>
+            <a:pPr indent="0" marL="0">
+              <a:lnSpc>
+                <a:spcPct val="110000"/>
+              </a:lnSpc>
+              <a:buNone/>
+            </a:pPr>
+            <a:r>
+              <a:rPr lang="en-US" sz="1300" dirty="0">
+                <a:solidFill>
+                  <a:srgbClr val="16262E"/>
+                </a:solidFill>
+                <a:latin typeface="Calibri" pitchFamily="34" charset="0"/>
+                <a:ea typeface="Calibri" pitchFamily="34" charset="-122"/>
+                <a:cs typeface="Calibri" pitchFamily="34" charset="-120"/>
+              </a:rPr>
+              <a:t>De ahí sale el 36 de 38 de la lámina siguiente. Y una advertencia que vale para su trabajo: excluir las tres intervenciones del moderador fue una decisión, cambia las proporciones y por lo tanto cambia el resultado. Es justo el tipo de decisión que se declara antes de medir y no después.</a:t>
+            </a:r>
+            <a:endParaRPr lang="en-US" sz="1300" dirty="0"/>
+          </a:p>
+        </p:txBody>
+      </p:sp>
+      <p:sp>
+        <p:nvSpPr>
+          <p:cNvPr id="26" name="Text"/>
+          <p:cNvSpPr txBox="1"/>
+          <p:nvPr/>
+        </p:nvSpPr>
+        <p:spPr>
+          <a:xfrm>
+            <a:off x="566928" y="5920000"/>
+            <a:ext cx="11057839" cy="240000"/>
+          </a:xfrm>
+          <a:prstGeom prst="rect">
+            <a:avLst/>
+          </a:prstGeom>
+          <a:noFill/>
+          <a:ln/>
+        </p:spPr>
+        <p:txBody>
+          <a:bodyPr wrap="square" lIns="0" tIns="0" rIns="0" bIns="0" rtlCol="0" anchor="t"/>
+          <a:lstStyle/>
+          <a:p>
+            <a:pPr indent="0" marL="0">
+              <a:buNone/>
+            </a:pPr>
+            <a:r>
+              <a:rPr lang="en-US" sz="1000" dirty="0">
+                <a:solidFill>
+                  <a:srgbClr val="5A6B73"/>
+                </a:solidFill>
+                <a:latin typeface="Calibri" pitchFamily="34" charset="0"/>
+                <a:ea typeface="Calibri" pitchFamily="34" charset="-122"/>
+                <a:cs typeface="Calibri" pitchFamily="34" charset="-120"/>
+              </a:rPr>
+              <a:t>Transcripciones_foro_PARTICIPANTE.docx, en la carpeta sesion-04. La distribución de causa raíz es gestión 14, infraestructura 9, presupuesto 8 y transparencia 7.</a:t>
             </a:r>
             <a:endParaRPr lang="en-US" sz="1000" dirty="0"/>
           </a:p>
@@ -18981,7 +23272,7 @@
                 <a:ea typeface="Calibri" pitchFamily="34" charset="-122"/>
                 <a:cs typeface="Calibri" pitchFamily="34" charset="-120"/>
               </a:rPr>
-              <a:t>10:10 a 11:12</a:t>
+              <a:t>10:20 a 11:22</a:t>
             </a:r>
             <a:endParaRPr lang="en-US" sz="1200" dirty="0"/>
           </a:p>
@@ -20492,7 +24783,7 @@
                 <a:ea typeface="Arial" pitchFamily="34" charset="-122"/>
                 <a:cs typeface="Arial" pitchFamily="34" charset="-120"/>
               </a:rPr>
-              <a:t>10 min · corte 10:28</a:t>
+              <a:t>10 min · corte 10:38</a:t>
             </a:r>
             <a:endParaRPr lang="en-US" sz="1100" dirty="0"/>
           </a:p>
@@ -20664,7 +24955,7 @@
                 <a:ea typeface="Arial" pitchFamily="34" charset="-122"/>
                 <a:cs typeface="Arial" pitchFamily="34" charset="-120"/>
               </a:rPr>
-              <a:t>20 min · corte 10:48</a:t>
+              <a:t>20 min · corte 10:58</a:t>
             </a:r>
             <a:endParaRPr lang="en-US" sz="1100" dirty="0"/>
           </a:p>
@@ -20836,7 +25127,7 @@
                 <a:ea typeface="Arial" pitchFamily="34" charset="-122"/>
                 <a:cs typeface="Arial" pitchFamily="34" charset="-120"/>
               </a:rPr>
-              <a:t>11 min · corte 10:59</a:t>
+              <a:t>11 min · corte 11:09</a:t>
             </a:r>
             <a:endParaRPr lang="en-US" sz="1100" dirty="0"/>
           </a:p>
@@ -21008,7 +25299,7 @@
                 <a:ea typeface="Arial" pitchFamily="34" charset="-122"/>
                 <a:cs typeface="Arial" pitchFamily="34" charset="-120"/>
               </a:rPr>
-              <a:t>5 min · corte 11:04</a:t>
+              <a:t>5 min · corte 11:14</a:t>
             </a:r>
             <a:endParaRPr lang="en-US" sz="1100" dirty="0"/>
           </a:p>
@@ -21180,7 +25471,7 @@
                 <a:ea typeface="Arial" pitchFamily="34" charset="-122"/>
                 <a:cs typeface="Arial" pitchFamily="34" charset="-120"/>
               </a:rPr>
-              <a:t>2 min · corte 11:06</a:t>
+              <a:t>2 min · corte 11:16</a:t>
             </a:r>
             <a:endParaRPr lang="en-US" sz="1100" dirty="0"/>
           </a:p>

--- a/sesion-06/Sesion_06_Laboratorio_Cualitativo.pptx
+++ b/sesion-06/Sesion_06_Laboratorio_Cualitativo.pptx
@@ -12,21 +12,26 @@
     <p:sldId id="260" r:id="rId45"/>
     <p:sldId id="261" r:id="rId46"/>
     <p:sldId id="262" r:id="rId56"/>
-    <p:sldId id="263" r:id="rId47"/>
-    <p:sldId id="264" r:id="rId53"/>
-    <p:sldId id="265" r:id="rId48"/>
-    <p:sldId id="266" r:id="rId49"/>
-    <p:sldId id="267" r:id="rId57"/>
-    <p:sldId id="268" r:id="rId50"/>
-    <p:sldId id="269" r:id="rId54"/>
-    <p:sldId id="270" r:id="rId6"/>
-    <p:sldId id="271" r:id="rId7"/>
-    <p:sldId id="272" r:id="rId8"/>
-    <p:sldId id="273" r:id="rId11"/>
-    <p:sldId id="274" r:id="rId12"/>
-    <p:sldId id="275" r:id="rId13"/>
-    <p:sldId id="276" r:id="rId14"/>
-    <p:sldId id="277" r:id="rId52"/>
+    <p:sldId id="263" r:id="rId58"/>
+    <p:sldId id="264" r:id="rId47"/>
+    <p:sldId id="265" r:id="rId53"/>
+    <p:sldId id="266" r:id="rId59"/>
+    <p:sldId id="267" r:id="rId48"/>
+    <p:sldId id="268" r:id="rId60"/>
+    <p:sldId id="269" r:id="rId63"/>
+    <p:sldId id="270" r:id="rId57"/>
+    <p:sldId id="271" r:id="rId61"/>
+    <p:sldId id="272" r:id="rId50"/>
+    <p:sldId id="273" r:id="rId54"/>
+    <p:sldId id="274" r:id="rId6"/>
+    <p:sldId id="275" r:id="rId7"/>
+    <p:sldId id="276" r:id="rId8"/>
+    <p:sldId id="277" r:id="rId62"/>
+    <p:sldId id="278" r:id="rId11"/>
+    <p:sldId id="279" r:id="rId12"/>
+    <p:sldId id="280" r:id="rId13"/>
+    <p:sldId id="281" r:id="rId14"/>
+    <p:sldId id="282" r:id="rId52"/>
   </p:sldIdLst>
   <p:notesMasterIdLst>
     <p:notesMasterId r:id="rId15"/>
@@ -1483,106 +1488,6 @@
 </p:notes>
 </file>
 
-<file path=ppt/notesSlides/notesSlide19.xml><?xml version="1.0" encoding="utf-8"?>
-<p:notes xmlns:a="http://schemas.openxmlformats.org/drawingml/2006/main" xmlns:r="http://schemas.openxmlformats.org/officeDocument/2006/relationships" xmlns:p="http://schemas.openxmlformats.org/presentationml/2006/main">
-  <p:cSld>
-    <p:spTree>
-      <p:nvGrpSpPr>
-        <p:cNvPr id="1" name=""/>
-        <p:cNvGrpSpPr/>
-        <p:nvPr/>
-      </p:nvGrpSpPr>
-      <p:grpSpPr>
-        <a:xfrm>
-          <a:off x="0" y="0"/>
-          <a:ext cx="0" cy="0"/>
-          <a:chOff x="0" y="0"/>
-          <a:chExt cx="0" cy="0"/>
-        </a:xfrm>
-      </p:grpSpPr>
-      <p:sp>
-        <p:nvSpPr>
-          <p:cNvPr id="2" name="Slide Image Placeholder 1"/>
-          <p:cNvSpPr>
-            <a:spLocks noGrp="1" noRot="1" noChangeAspect="1"/>
-          </p:cNvSpPr>
-          <p:nvPr>
-            <p:ph type="sldImg"/>
-          </p:nvPr>
-        </p:nvSpPr>
-        <p:spPr/>
-      </p:sp>
-      <p:sp>
-        <p:nvSpPr>
-          <p:cNvPr id="3" name="Notes Placeholder 2"/>
-          <p:cNvSpPr>
-            <a:spLocks noGrp="1"/>
-          </p:cNvSpPr>
-          <p:nvPr>
-            <p:ph type="body" idx="1"/>
-          </p:nvPr>
-        </p:nvSpPr>
-        <p:spPr/>
-        <p:txBody>
-          <a:bodyPr/>
-          <a:lstStyle/>
-          <a:p>
-            <a:r>
-              <a:rPr lang="en-US" dirty="0"/>
-              <a:t>Cinco minutos. No repita la distinción de la sesión 4: dé el dato que la vuelve incómoda.</a:t>
-            </a:r>
-          </a:p>
-          <a:p>
-            <a:r>
-              <a:rPr lang="en-US" dirty="0"/>
-              <a:t>Al anotar a mano 1,600 resúmenes extractivos, el 30.3 por ciento traía al menos un problema de correferencia, de discurso o de información engañosa. Copiar la oración y sacarla de contexto ya basta para afirmar lo que el documento no sostiene.</a:t>
-            </a:r>
-          </a:p>
-          <a:p>
-            <a:r>
-              <a:rPr lang="en-US" dirty="0"/>
-              <a:t>La conclusión nueva respecto de la sesión 4: la afirmación no sostenida no nace al redactar, nace al recortar. Por eso la columna de cita textual no los salva sola.</a:t>
-            </a:r>
-          </a:p>
-          <a:p>
-            <a:r>
-              <a:rPr lang="en-US" dirty="0"/>
-              <a:t>Aterrice aquí la regla dura, que ya no tiene lámina propia y vive dentro del encargo.</a:t>
-            </a:r>
-          </a:p>
-        </p:txBody>
-      </p:sp>
-      <p:sp>
-        <p:nvSpPr>
-          <p:cNvPr id="4" name="Slide Number Placeholder 3"/>
-          <p:cNvSpPr>
-            <a:spLocks noGrp="1"/>
-          </p:cNvSpPr>
-          <p:nvPr>
-            <p:ph type="sldNum" sz="quarter" idx="10"/>
-          </p:nvPr>
-        </p:nvSpPr>
-        <p:spPr/>
-        <p:txBody>
-          <a:bodyPr/>
-          <a:lstStyle/>
-          <a:p>
-            <a:fld id="{B3C21451-1387-4CA6-816F-3879F97B5CB9}" type="slidenum">
-              <a:rPr lang="en-US"/>
-              <a:t>19</a:t>
-            </a:fld>
-            <a:endParaRPr lang="en-US"/>
-          </a:p>
-        </p:txBody>
-      </p:sp>
-    </p:spTree>
-  </p:cSld>
-  <p:clrMapOvr>
-    <a:masterClrMapping/>
-  </p:clrMapOvr>
-</p:notes>
-</file>
-
 <file path=ppt/notesSlides/notesSlide2.xml><?xml version="1.0" encoding="utf-8"?>
 <p:notes xmlns:a="http://schemas.openxmlformats.org/drawingml/2006/main" xmlns:r="http://schemas.openxmlformats.org/officeDocument/2006/relationships" xmlns:p="http://schemas.openxmlformats.org/presentationml/2006/main">
   <p:cSld>
@@ -2394,6 +2299,648 @@
             <a:fld id="{B3C21451-1387-4CA6-816F-3879F97B5CB9}" type="slidenum">
               <a:rPr lang="en-US"/>
               <a:t>27</a:t>
+            </a:fld>
+            <a:endParaRPr lang="en-US"/>
+          </a:p>
+        </p:txBody>
+      </p:sp>
+    </p:spTree>
+  </p:cSld>
+  <p:clrMapOvr>
+    <a:masterClrMapping/>
+  </p:clrMapOvr>
+</p:notes>
+</file>
+
+<file path=ppt/notesSlides/notesSlide28.xml><?xml version="1.0" encoding="utf-8"?>
+<p:notes xmlns:a="http://schemas.openxmlformats.org/drawingml/2006/main" xmlns:r="http://schemas.openxmlformats.org/officeDocument/2006/relationships" xmlns:p="http://schemas.openxmlformats.org/presentationml/2006/main">
+  <p:cSld>
+    <p:spTree>
+      <p:nvGrpSpPr>
+        <p:cNvPr id="1" name=""/>
+        <p:cNvGrpSpPr/>
+        <p:nvPr/>
+      </p:nvGrpSpPr>
+      <p:grpSpPr>
+        <a:xfrm>
+          <a:off x="0" y="0"/>
+          <a:ext cx="0" cy="0"/>
+          <a:chOff x="0" y="0"/>
+          <a:chExt cx="0" cy="0"/>
+        </a:xfrm>
+      </p:grpSpPr>
+      <p:sp>
+        <p:nvSpPr>
+          <p:cNvPr id="2" name="Slide Image Placeholder 1"/>
+          <p:cNvSpPr>
+            <a:spLocks noGrp="1" noRot="1" noChangeAspect="1"/>
+          </p:cNvSpPr>
+          <p:nvPr>
+            <p:ph type="sldImg"/>
+          </p:nvPr>
+        </p:nvSpPr>
+        <p:spPr/>
+      </p:sp>
+      <p:sp>
+        <p:nvSpPr>
+          <p:cNvPr id="3" name="Notes Placeholder 2"/>
+          <p:cNvSpPr>
+            <a:spLocks noGrp="1"/>
+          </p:cNvSpPr>
+          <p:nvPr>
+            <p:ph type="body" idx="1"/>
+          </p:nvPr>
+        </p:nvSpPr>
+        <p:spPr/>
+        <p:txBody>
+          <a:bodyPr/>
+          <a:lstStyle/>
+          <a:p>
+            <a:r>
+              <a:rPr lang="en-US" dirty="0"/>
+              <a:t>Cuatro minutos. Va inmediatamente antes de la lámina de precisión, para que los seis elementos no aparezcan de la nada.</a:t>
+            </a:r>
+          </a:p>
+          <a:p>
+            <a:r>
+              <a:rPr lang="en-US" dirty="0"/>
+              <a:t>Aquí NO se revela cuál sobra: en pantalla solo están el prompt y lo que contestó. Lea el prompt casilla por casilla y pregunte al grupo qué le falta antes de decirlo.</a:t>
+            </a:r>
+          </a:p>
+          <a:p>
+            <a:r>
+              <a:rPr lang="en-US" dirty="0"/>
+              <a:t>Las dos fallas del prompt, por si no salen solas: no pidió la fracción exacta del artículo, y pidió la lista agrupada por persona. Agrupar deja una casilla visiblemente vacía, y llenarla parece un servicio y no una invención.</a:t>
+            </a:r>
+          </a:p>
+          <a:p>
+            <a:r>
+              <a:rPr lang="en-US" dirty="0"/>
+              <a:t>Diga que el prompt y la respuesta son una reconstrucción para la clase, no una corrida guardada. Si lo corre antes de clase puede salir distinto; los números de la lámina siguiente no cambian porque el ejemplo va declarado como reconstrucción.</a:t>
+            </a:r>
+          </a:p>
+          <a:p>
+            <a:r>
+              <a:rPr lang="en-US" dirty="0"/>
+              <a:t>Objeción probable: «el prompt ya le había prohibido usar su conocimiento de otros programas». Cierto, y ahí está la lección: esa casilla reduce las alucinaciones, no las elimina. Lo mismo con «no busques en internet»: es una petición, no un interruptor; la búsqueda web se apaga en la interfaz.</a:t>
+            </a:r>
+          </a:p>
+          <a:p>
+            <a:r>
+              <a:rPr lang="en-US" dirty="0"/>
+              <a:t>Objeción probable: «entonces basta con arreglar el prompt». La versión corregida sería agregar «no agregues requisitos que no estén en el texto» y pedir la fracción exacta de cada uno. Baja la probabilidad y facilita atraparlo, no la vuelve cero. Por eso la lámina que sigue mide en vez de confiar.</a:t>
+            </a:r>
+          </a:p>
+          <a:p>
+            <a:r>
+              <a:rPr lang="en-US" dirty="0"/>
+              <a:t>Por qué se pegó el artículo y no se adjuntó el archivo: adjuntar Expedientes_LAB2.docx mete en la conversación los seis expedientes de entidad. Vale para el laboratorio: si un equipo adjunta el archivo completo, el asistente está leyendo también los otros cinco casos.</a:t>
+            </a:r>
+          </a:p>
+        </p:txBody>
+      </p:sp>
+      <p:sp>
+        <p:nvSpPr>
+          <p:cNvPr id="4" name="Slide Number Placeholder 3"/>
+          <p:cNvSpPr>
+            <a:spLocks noGrp="1"/>
+          </p:cNvSpPr>
+          <p:nvPr>
+            <p:ph type="sldNum" sz="quarter" idx="10"/>
+          </p:nvPr>
+        </p:nvSpPr>
+        <p:spPr/>
+        <p:txBody>
+          <a:bodyPr/>
+          <a:lstStyle/>
+          <a:p>
+            <a:fld id="{B3C21451-1387-4CA6-816F-3879F97B5CB9}" type="slidenum">
+              <a:rPr lang="en-US"/>
+              <a:t>28</a:t>
+            </a:fld>
+            <a:endParaRPr lang="en-US"/>
+          </a:p>
+        </p:txBody>
+      </p:sp>
+    </p:spTree>
+  </p:cSld>
+  <p:clrMapOvr>
+    <a:masterClrMapping/>
+  </p:clrMapOvr>
+</p:notes>
+</file>
+
+<file path=ppt/notesSlides/notesSlide29.xml><?xml version="1.0" encoding="utf-8"?>
+<p:notes xmlns:a="http://schemas.openxmlformats.org/drawingml/2006/main" xmlns:r="http://schemas.openxmlformats.org/officeDocument/2006/relationships" xmlns:p="http://schemas.openxmlformats.org/presentationml/2006/main">
+  <p:cSld>
+    <p:spTree>
+      <p:nvGrpSpPr>
+        <p:cNvPr id="1" name=""/>
+        <p:cNvGrpSpPr/>
+        <p:nvPr/>
+      </p:nvGrpSpPr>
+      <p:grpSpPr>
+        <a:xfrm>
+          <a:off x="0" y="0"/>
+          <a:ext cx="0" cy="0"/>
+          <a:chOff x="0" y="0"/>
+          <a:chExt cx="0" cy="0"/>
+        </a:xfrm>
+      </p:grpSpPr>
+      <p:sp>
+        <p:nvSpPr>
+          <p:cNvPr id="2" name="Slide Image Placeholder 1"/>
+          <p:cNvSpPr>
+            <a:spLocks noGrp="1" noRot="1" noChangeAspect="1"/>
+          </p:cNvSpPr>
+          <p:nvPr>
+            <p:ph type="sldImg"/>
+          </p:nvPr>
+        </p:nvSpPr>
+        <p:spPr/>
+      </p:sp>
+      <p:sp>
+        <p:nvSpPr>
+          <p:cNvPr id="3" name="Notes Placeholder 2"/>
+          <p:cNvSpPr>
+            <a:spLocks noGrp="1"/>
+          </p:cNvSpPr>
+          <p:nvPr>
+            <p:ph type="body" idx="1"/>
+          </p:nvPr>
+        </p:nvSpPr>
+        <p:spPr/>
+        <p:txBody>
+          <a:bodyPr/>
+          <a:lstStyle/>
+          <a:p>
+            <a:r>
+              <a:rPr lang="en-US" dirty="0"/>
+              <a:t>Cuatro minutos. Mismo movimiento que en extracción: primero el prompt, después la salida.</a:t>
+            </a:r>
+          </a:p>
+          <a:p>
+            <a:r>
+              <a:rPr lang="en-US" dirty="0"/>
+              <a:t>El daño lo hacen dos casillas que sí hicieron su trabajo. El contexto le dijo que el informe tiene que pronunciarse sobre si el apoyo alcanza, y el formato exige que ninguna fila se quede sin cita.</a:t>
+            </a:r>
+          </a:p>
+          <a:p>
+            <a:r>
+              <a:rPr lang="en-US" dirty="0"/>
+              <a:t>La línea más fuerte de la lámina: la casilla 2 le pide «hallazgos» a la herramienta, y el dictamen de validación que llenaron en la sesión 3 dice que lo que devuelve la herramienta todavía no es un hallazgo, es una hipótesis.</a:t>
+            </a:r>
+          </a:p>
+          <a:p>
+            <a:r>
+              <a:rPr lang="en-US" dirty="0"/>
+              <a:t>Lo que faltó no es una séptima casilla: es un renglón en restricciones que prohíba afirmar nada que la cita no diga con sus propias palabras, y que autorice cerrar con «no lo encontré».</a:t>
+            </a:r>
+          </a:p>
+          <a:p>
+            <a:r>
+              <a:rPr lang="en-US" dirty="0"/>
+              <a:t>Señale el cierre que el asistente agregó solo, «todas las afirmaciones están respaldadas»: nadie se lo pidió, y es falso para la fila 2.</a:t>
+            </a:r>
+          </a:p>
+        </p:txBody>
+      </p:sp>
+      <p:sp>
+        <p:nvSpPr>
+          <p:cNvPr id="4" name="Slide Number Placeholder 3"/>
+          <p:cNvSpPr>
+            <a:spLocks noGrp="1"/>
+          </p:cNvSpPr>
+          <p:nvPr>
+            <p:ph type="sldNum" sz="quarter" idx="10"/>
+          </p:nvPr>
+        </p:nvSpPr>
+        <p:spPr/>
+        <p:txBody>
+          <a:bodyPr/>
+          <a:lstStyle/>
+          <a:p>
+            <a:fld id="{B3C21451-1387-4CA6-816F-3879F97B5CB9}" type="slidenum">
+              <a:rPr lang="en-US"/>
+              <a:t>29</a:t>
+            </a:fld>
+            <a:endParaRPr lang="en-US"/>
+          </a:p>
+        </p:txBody>
+      </p:sp>
+    </p:spTree>
+  </p:cSld>
+  <p:clrMapOvr>
+    <a:masterClrMapping/>
+  </p:clrMapOvr>
+</p:notes>
+</file>
+
+<file path=ppt/notesSlides/notesSlide30.xml><?xml version="1.0" encoding="utf-8"?>
+<p:notes xmlns:a="http://schemas.openxmlformats.org/drawingml/2006/main" xmlns:r="http://schemas.openxmlformats.org/officeDocument/2006/relationships" xmlns:p="http://schemas.openxmlformats.org/presentationml/2006/main">
+  <p:cSld>
+    <p:spTree>
+      <p:nvGrpSpPr>
+        <p:cNvPr id="1" name=""/>
+        <p:cNvGrpSpPr/>
+        <p:nvPr/>
+      </p:nvGrpSpPr>
+      <p:grpSpPr>
+        <a:xfrm>
+          <a:off x="0" y="0"/>
+          <a:ext cx="0" cy="0"/>
+          <a:chOff x="0" y="0"/>
+          <a:chExt cx="0" cy="0"/>
+        </a:xfrm>
+      </p:grpSpPr>
+      <p:sp>
+        <p:nvSpPr>
+          <p:cNvPr id="2" name="Slide Image Placeholder 1"/>
+          <p:cNvSpPr>
+            <a:spLocks noGrp="1" noRot="1" noChangeAspect="1"/>
+          </p:cNvSpPr>
+          <p:nvPr>
+            <p:ph type="sldImg"/>
+          </p:nvPr>
+        </p:nvSpPr>
+        <p:spPr/>
+      </p:sp>
+      <p:sp>
+        <p:nvSpPr>
+          <p:cNvPr id="3" name="Notes Placeholder 2"/>
+          <p:cNvSpPr>
+            <a:spLocks noGrp="1"/>
+          </p:cNvSpPr>
+          <p:nvPr>
+            <p:ph type="body" idx="1"/>
+          </p:nvPr>
+        </p:nvSpPr>
+        <p:spPr/>
+        <p:txBody>
+          <a:bodyPr/>
+          <a:lstStyle/>
+          <a:p>
+            <a:r>
+              <a:rPr lang="en-US" dirty="0"/>
+              <a:t>Cuatro minutos. La franja gris de arriba dice que las cuatro primeras casillas son idénticas; no las lea, señálelas.</a:t>
+            </a:r>
+          </a:p>
+          <a:p>
+            <a:r>
+              <a:rPr lang="en-US" dirty="0"/>
+              <a:t>Lo que se ve con el dedo: cambian restricciones y formato de salida, y nada más. Los dos prompts dicen «no afirmes nada que no esté escrito en el artículo».</a:t>
+            </a:r>
+          </a:p>
+          <a:p>
+            <a:r>
+              <a:rPr lang="en-US" dirty="0"/>
+              <a:t>No adelante las cuatro cosas que se colaron en B. Eso es la lámina siguiente, y conviene que el grupo lea el párrafo antes de ver los señalamientos.</a:t>
+            </a:r>
+          </a:p>
+        </p:txBody>
+      </p:sp>
+      <p:sp>
+        <p:nvSpPr>
+          <p:cNvPr id="4" name="Slide Number Placeholder 3"/>
+          <p:cNvSpPr>
+            <a:spLocks noGrp="1"/>
+          </p:cNvSpPr>
+          <p:nvPr>
+            <p:ph type="sldNum" sz="quarter" idx="10"/>
+          </p:nvPr>
+        </p:nvSpPr>
+        <p:spPr/>
+        <p:txBody>
+          <a:bodyPr/>
+          <a:lstStyle/>
+          <a:p>
+            <a:fld id="{B3C21451-1387-4CA6-816F-3879F97B5CB9}" type="slidenum">
+              <a:rPr lang="en-US"/>
+              <a:t>30</a:t>
+            </a:fld>
+            <a:endParaRPr lang="en-US"/>
+          </a:p>
+        </p:txBody>
+      </p:sp>
+    </p:spTree>
+  </p:cSld>
+  <p:clrMapOvr>
+    <a:masterClrMapping/>
+  </p:clrMapOvr>
+</p:notes>
+</file>
+
+<file path=ppt/notesSlides/notesSlide31.xml><?xml version="1.0" encoding="utf-8"?>
+<p:notes xmlns:a="http://schemas.openxmlformats.org/drawingml/2006/main" xmlns:r="http://schemas.openxmlformats.org/officeDocument/2006/relationships" xmlns:p="http://schemas.openxmlformats.org/presentationml/2006/main">
+  <p:cSld>
+    <p:spTree>
+      <p:nvGrpSpPr>
+        <p:cNvPr id="1" name=""/>
+        <p:cNvGrpSpPr/>
+        <p:nvPr/>
+      </p:nvGrpSpPr>
+      <p:grpSpPr>
+        <a:xfrm>
+          <a:off x="0" y="0"/>
+          <a:ext cx="0" cy="0"/>
+          <a:chOff x="0" y="0"/>
+          <a:chExt cx="0" cy="0"/>
+        </a:xfrm>
+      </p:grpSpPr>
+      <p:sp>
+        <p:nvSpPr>
+          <p:cNvPr id="2" name="Slide Image Placeholder 1"/>
+          <p:cNvSpPr>
+            <a:spLocks noGrp="1" noRot="1" noChangeAspect="1"/>
+          </p:cNvSpPr>
+          <p:nvPr>
+            <p:ph type="sldImg"/>
+          </p:nvPr>
+        </p:nvSpPr>
+        <p:spPr/>
+      </p:sp>
+      <p:sp>
+        <p:nvSpPr>
+          <p:cNvPr id="3" name="Notes Placeholder 2"/>
+          <p:cNvSpPr>
+            <a:spLocks noGrp="1"/>
+          </p:cNvSpPr>
+          <p:nvPr>
+            <p:ph type="body" idx="1"/>
+          </p:nvPr>
+        </p:nvSpPr>
+        <p:spPr/>
+        <p:txBody>
+          <a:bodyPr/>
+          <a:lstStyle/>
+          <a:p>
+            <a:r>
+              <a:rPr lang="en-US" dirty="0"/>
+              <a:t>Cinco minutos. Es el prompt más cargado del bloque técnico y va antes de la lámina de kappa.</a:t>
+            </a:r>
+          </a:p>
+          <a:p>
+            <a:r>
+              <a:rPr lang="en-US" dirty="0"/>
+              <a:t>Cuente las reglas de la casilla 5 con el grupo: son las decisiones metodológicas que el curso ya tomó, y todas se declaran antes de codificar.</a:t>
+            </a:r>
+          </a:p>
+          <a:p>
+            <a:r>
+              <a:rPr lang="en-US" dirty="0"/>
+              <a:t>Antes de decir nada, pregunte cuáles de los ocho renglones no se sostienen. F1-09 y F2-08 son sarcasmo; el léxico amable las volvió positivas.</a:t>
+            </a:r>
+          </a:p>
+          <a:p>
+            <a:r>
+              <a:rPr lang="en-US" dirty="0"/>
+              <a:t>El remate: fíjese en la última columna. Las tres frases están bien copiadas y son textuales, y las tres conclusiones están mal. El prompt es la parte del trabajo que se puede auditar; leer la intención no.</a:t>
+            </a:r>
+          </a:p>
+          <a:p>
+            <a:r>
+              <a:rPr lang="en-US" dirty="0"/>
+              <a:t>Esta es una PRIMERA pasada. El 36 de 38 de la lámina siguiente salió de una segunda pasada adversarial con las definiciones delante. Dígalo, o la lámina parece contradecir a la anterior.</a:t>
+            </a:r>
+          </a:p>
+          <a:p>
+            <a:r>
+              <a:rPr lang="en-US" dirty="0"/>
+              <a:t>Si va muy atrasado, esta es la primera lámina que se recorta: su corpus es de la sesión 4 y no del expediente de hoy.</a:t>
+            </a:r>
+          </a:p>
+        </p:txBody>
+      </p:sp>
+      <p:sp>
+        <p:nvSpPr>
+          <p:cNvPr id="4" name="Slide Number Placeholder 3"/>
+          <p:cNvSpPr>
+            <a:spLocks noGrp="1"/>
+          </p:cNvSpPr>
+          <p:nvPr>
+            <p:ph type="sldNum" sz="quarter" idx="10"/>
+          </p:nvPr>
+        </p:nvSpPr>
+        <p:spPr/>
+        <p:txBody>
+          <a:bodyPr/>
+          <a:lstStyle/>
+          <a:p>
+            <a:fld id="{B3C21451-1387-4CA6-816F-3879F97B5CB9}" type="slidenum">
+              <a:rPr lang="en-US"/>
+              <a:t>31</a:t>
+            </a:fld>
+            <a:endParaRPr lang="en-US"/>
+          </a:p>
+        </p:txBody>
+      </p:sp>
+    </p:spTree>
+  </p:cSld>
+  <p:clrMapOvr>
+    <a:masterClrMapping/>
+  </p:clrMapOvr>
+</p:notes>
+</file>
+
+<file path=ppt/notesSlides/notesSlide32.xml><?xml version="1.0" encoding="utf-8"?>
+<p:notes xmlns:a="http://schemas.openxmlformats.org/drawingml/2006/main" xmlns:r="http://schemas.openxmlformats.org/officeDocument/2006/relationships" xmlns:p="http://schemas.openxmlformats.org/presentationml/2006/main">
+  <p:cSld>
+    <p:spTree>
+      <p:nvGrpSpPr>
+        <p:cNvPr id="1" name=""/>
+        <p:cNvGrpSpPr/>
+        <p:nvPr/>
+      </p:nvGrpSpPr>
+      <p:grpSpPr>
+        <a:xfrm>
+          <a:off x="0" y="0"/>
+          <a:ext cx="0" cy="0"/>
+          <a:chOff x="0" y="0"/>
+          <a:chExt cx="0" cy="0"/>
+        </a:xfrm>
+      </p:grpSpPr>
+      <p:sp>
+        <p:nvSpPr>
+          <p:cNvPr id="2" name="Slide Image Placeholder 1"/>
+          <p:cNvSpPr>
+            <a:spLocks noGrp="1" noRot="1" noChangeAspect="1"/>
+          </p:cNvSpPr>
+          <p:nvPr>
+            <p:ph type="sldImg"/>
+          </p:nvPr>
+        </p:nvSpPr>
+        <p:spPr/>
+      </p:sp>
+      <p:sp>
+        <p:nvSpPr>
+          <p:cNvPr id="3" name="Notes Placeholder 2"/>
+          <p:cNvSpPr>
+            <a:spLocks noGrp="1"/>
+          </p:cNvSpPr>
+          <p:nvPr>
+            <p:ph type="body" idx="1"/>
+          </p:nvPr>
+        </p:nvSpPr>
+        <p:spPr/>
+        <p:txBody>
+          <a:bodyPr/>
+          <a:lstStyle/>
+          <a:p>
+            <a:r>
+              <a:rPr lang="en-US" dirty="0"/>
+              <a:t>Tres minutos, dentro del encargo del laboratorio, antes de abrir las salas.</a:t>
+            </a:r>
+          </a:p>
+          <a:p>
+            <a:r>
+              <a:rPr lang="en-US" dirty="0"/>
+              <a:t>Es para copiarse tal cual. Señale los dos huecos: la pregunta de evaluación de su expediente y la letra de su entidad.</a:t>
+            </a:r>
+          </a:p>
+          <a:p>
+            <a:r>
+              <a:rPr lang="en-US" dirty="0"/>
+              <a:t>Lo que hay que subrayar de la salida: de las once columnas de su hoja, el modelo llena cuatro. Herramienta, quién verificó y nivel de confianza las llenan ellos, y por eso el prompt se lo prohíbe expresamente.</a:t>
+            </a:r>
+          </a:p>
+          <a:p>
+            <a:r>
+              <a:rPr lang="en-US" dirty="0"/>
+              <a:t>Dos cosas salieron bien porque se le pidieron: dijo qué no encontró en lugar de rellenar, y no propuso conclusiones. Y aun así coló el renglón 3, donde la cita es textual y no dice lo que la afirmación asegura: prohibirle inventar datos no es prohibirle interpretar.</a:t>
+            </a:r>
+          </a:p>
+          <a:p>
+            <a:r>
+              <a:rPr lang="en-US" dirty="0"/>
+              <a:t>La salida usa una Entidad J que no existe en el archivo, para que ningún equipo vea su propio caso proyectado. Dígalo.</a:t>
+            </a:r>
+          </a:p>
+          <a:p>
+            <a:r>
+              <a:rPr lang="en-US" dirty="0"/>
+              <a:t>Pídales pegar el prompt en la bitácora ANTES de correrlo, no al final. Es el hábito que se llevan del curso.</a:t>
+            </a:r>
+          </a:p>
+        </p:txBody>
+      </p:sp>
+      <p:sp>
+        <p:nvSpPr>
+          <p:cNvPr id="4" name="Slide Number Placeholder 3"/>
+          <p:cNvSpPr>
+            <a:spLocks noGrp="1"/>
+          </p:cNvSpPr>
+          <p:nvPr>
+            <p:ph type="sldNum" sz="quarter" idx="10"/>
+          </p:nvPr>
+        </p:nvSpPr>
+        <p:spPr/>
+        <p:txBody>
+          <a:bodyPr/>
+          <a:lstStyle/>
+          <a:p>
+            <a:fld id="{B3C21451-1387-4CA6-816F-3879F97B5CB9}" type="slidenum">
+              <a:rPr lang="en-US"/>
+              <a:t>32</a:t>
+            </a:fld>
+            <a:endParaRPr lang="en-US"/>
+          </a:p>
+        </p:txBody>
+      </p:sp>
+    </p:spTree>
+  </p:cSld>
+  <p:clrMapOvr>
+    <a:masterClrMapping/>
+  </p:clrMapOvr>
+</p:notes>
+</file>
+
+<file path=ppt/notesSlides/notesSlide33.xml><?xml version="1.0" encoding="utf-8"?>
+<p:notes xmlns:a="http://schemas.openxmlformats.org/drawingml/2006/main" xmlns:r="http://schemas.openxmlformats.org/officeDocument/2006/relationships" xmlns:p="http://schemas.openxmlformats.org/presentationml/2006/main">
+  <p:cSld>
+    <p:spTree>
+      <p:nvGrpSpPr>
+        <p:cNvPr id="1" name=""/>
+        <p:cNvGrpSpPr/>
+        <p:nvPr/>
+      </p:nvGrpSpPr>
+      <p:grpSpPr>
+        <a:xfrm>
+          <a:off x="0" y="0"/>
+          <a:ext cx="0" cy="0"/>
+          <a:chOff x="0" y="0"/>
+          <a:chExt cx="0" cy="0"/>
+        </a:xfrm>
+      </p:grpSpPr>
+      <p:sp>
+        <p:nvSpPr>
+          <p:cNvPr id="2" name="Slide Image Placeholder 1"/>
+          <p:cNvSpPr>
+            <a:spLocks noGrp="1" noRot="1" noChangeAspect="1"/>
+          </p:cNvSpPr>
+          <p:nvPr>
+            <p:ph type="sldImg"/>
+          </p:nvPr>
+        </p:nvSpPr>
+        <p:spPr/>
+      </p:sp>
+      <p:sp>
+        <p:nvSpPr>
+          <p:cNvPr id="3" name="Notes Placeholder 2"/>
+          <p:cNvSpPr>
+            <a:spLocks noGrp="1"/>
+          </p:cNvSpPr>
+          <p:nvPr>
+            <p:ph type="body" idx="1"/>
+          </p:nvPr>
+        </p:nvSpPr>
+        <p:spPr/>
+        <p:txBody>
+          <a:bodyPr/>
+          <a:lstStyle/>
+          <a:p>
+            <a:r>
+              <a:rPr lang="en-US" dirty="0"/>
+              <a:t>Seis minutos, y es la lámina que más rinde del bloque de síntesis.</a:t>
+            </a:r>
+          </a:p>
+          <a:p>
+            <a:r>
+              <a:rPr lang="en-US" dirty="0"/>
+              <a:t>Lea el párrafo completo en voz alta primero y pregunte si lo firmarían. Casi siempre dicen que sí: se lee bien y cita el artículo desde la primera línea.</a:t>
+            </a:r>
+          </a:p>
+          <a:p>
+            <a:r>
+              <a:rPr lang="en-US" dirty="0"/>
+              <a:t>Después recorra las cuatro tarjetas. La más útil para su trabajo es la segunda: «jornadas de ocho horas» pierde continuas y en días hábiles, y con eso un centro que abre cuatro y cuatro cumple con el resumen y no con la norma.</a:t>
+            </a:r>
+          </a:p>
+          <a:p>
+            <a:r>
+              <a:rPr lang="en-US" dirty="0"/>
+              <a:t>La conclusión: el control no puede ser que traiga cita, porque B la trae. Tiene que ser la correspondencia frase por frase, que es la regla dura del laboratorio.</a:t>
+            </a:r>
+          </a:p>
+        </p:txBody>
+      </p:sp>
+      <p:sp>
+        <p:nvSpPr>
+          <p:cNvPr id="4" name="Slide Number Placeholder 3"/>
+          <p:cNvSpPr>
+            <a:spLocks noGrp="1"/>
+          </p:cNvSpPr>
+          <p:nvPr>
+            <p:ph type="sldNum" sz="quarter" idx="10"/>
+          </p:nvPr>
+        </p:nvSpPr>
+        <p:spPr/>
+        <p:txBody>
+          <a:bodyPr/>
+          <a:lstStyle/>
+          <a:p>
+            <a:fld id="{B3C21451-1387-4CA6-816F-3879F97B5CB9}" type="slidenum">
+              <a:rPr lang="en-US"/>
+              <a:t>33</a:t>
             </a:fld>
             <a:endParaRPr lang="en-US"/>
           </a:p>
@@ -2623,13 +3170,13 @@
           <a:p>
             <a:r>
               <a:rPr lang="en-US" dirty="0"/>
-              <a:t>Cuarenta y ocho minutos de práctica dentro de un bloque de sesenta y dos, de 10:20 a 11:22. El encargo son seis minutos, de 10:20 a 10:26; dos minutos para abrir salas; la práctica de 10:28 a 11:16; dos minutos de regreso y cuatro de reporte en pizarra.</a:t>
+              <a:t>Cuarenta y ocho minutos de práctica dentro de un bloque de sesenta y cinco, de 10:39 a 11:44. El encargo son nueve minutos porque incluye la lámina del prompt; dos para abrir salas; la práctica de 10:47 a 11:35; dos de regreso y cuatro de reporte.</a:t>
             </a:r>
           </a:p>
           <a:p>
             <a:r>
               <a:rPr lang="en-US" dirty="0"/>
-              <a:t>Los cortes están en la lámina como hora absoluta, no como duración, para que cada sala se autorregule. Ponga avisos de voz a los minutos 10, 30, 41 y 46 de la práctica.</a:t>
+              <a:t>Los cortes están en la lámina como hora absoluta. Ponga avisos de voz a los minutos 10, 30, 41 y 46 de la práctica.</a:t>
             </a:r>
           </a:p>
           <a:p>
@@ -7190,7 +7737,7 @@
                 <a:ea typeface="Arial" pitchFamily="34" charset="-122"/>
                 <a:cs typeface="Arial" pitchFamily="34" charset="-120"/>
               </a:rPr>
-              <a:t>9:10 a 10:10</a:t>
+              <a:t>9:10 a 10:29</a:t>
             </a:r>
             <a:endParaRPr lang="en-US" sz="1200" dirty="0"/>
           </a:p>
@@ -11008,1216 +11555,6 @@
 </p:sld>
 </file>
 
-<file path=ppt/slides/slide19.xml><?xml version="1.0" encoding="utf-8"?>
-<p:sld xmlns:a="http://schemas.openxmlformats.org/drawingml/2006/main" xmlns:r="http://schemas.openxmlformats.org/officeDocument/2006/relationships" xmlns:p="http://schemas.openxmlformats.org/presentationml/2006/main">
-  <p:cSld name="Generalizacion">
-    <p:spTree>
-      <p:nvGrpSpPr>
-        <p:cNvPr id="1" name=""/>
-        <p:cNvGrpSpPr/>
-        <p:nvPr/>
-      </p:nvGrpSpPr>
-      <p:grpSpPr>
-        <a:xfrm>
-          <a:off x="0" y="0"/>
-          <a:ext cx="0" cy="0"/>
-          <a:chOff x="0" y="0"/>
-          <a:chExt cx="0" cy="0"/>
-        </a:xfrm>
-      </p:grpSpPr>
-      <p:sp>
-        <p:nvSpPr>
-          <p:cNvPr id="2" name="Text"/>
-          <p:cNvSpPr txBox="1"/>
-          <p:nvPr/>
-        </p:nvSpPr>
-        <p:spPr>
-          <a:xfrm>
-            <a:off x="566928" y="402336"/>
-            <a:ext cx="11057839" cy="749808"/>
-          </a:xfrm>
-          <a:prstGeom prst="rect">
-            <a:avLst/>
-          </a:prstGeom>
-          <a:noFill/>
-          <a:ln/>
-        </p:spPr>
-        <p:txBody>
-          <a:bodyPr wrap="square" lIns="0" tIns="0" rIns="0" bIns="0" rtlCol="0" anchor="t"/>
-          <a:lstStyle/>
-          <a:p>
-            <a:pPr algn="l" indent="0" marL="0">
-              <a:buNone/>
-            </a:pPr>
-            <a:r>
-              <a:rPr lang="en-US" sz="3200" b="1" dirty="0">
-                <a:solidFill>
-                  <a:srgbClr val="16262E"/>
-                </a:solidFill>
-                <a:latin typeface="Arial" pitchFamily="34" charset="0"/>
-                <a:ea typeface="Arial" pitchFamily="34" charset="-122"/>
-                <a:cs typeface="Arial" pitchFamily="34" charset="-120"/>
-              </a:rPr>
-              <a:t>La síntesis dice más de lo que la matriz sostiene</a:t>
-            </a:r>
-            <a:endParaRPr lang="en-US" sz="3200" dirty="0"/>
-          </a:p>
-        </p:txBody>
-      </p:sp>
-      <p:sp>
-        <p:nvSpPr>
-          <p:cNvPr id="3" name="Text"/>
-          <p:cNvSpPr txBox="1"/>
-          <p:nvPr/>
-        </p:nvSpPr>
-        <p:spPr>
-          <a:xfrm>
-            <a:off x="566928" y="1280160"/>
-            <a:ext cx="11057839" cy="731520"/>
-          </a:xfrm>
-          <a:prstGeom prst="rect">
-            <a:avLst/>
-          </a:prstGeom>
-          <a:noFill/>
-          <a:ln/>
-        </p:spPr>
-        <p:txBody>
-          <a:bodyPr wrap="square" lIns="0" tIns="0" rIns="0" bIns="0" rtlCol="0" anchor="t"/>
-          <a:lstStyle/>
-          <a:p>
-            <a:pPr indent="0" marL="0">
-              <a:lnSpc>
-                <a:spcPct val="108000"/>
-              </a:lnSpc>
-              <a:buNone/>
-            </a:pPr>
-            <a:r>
-              <a:rPr lang="en-US" sz="1500" dirty="0">
-                <a:solidFill>
-                  <a:srgbClr val="5A6B73"/>
-                </a:solidFill>
-                <a:latin typeface="Calibri" pitchFamily="34" charset="0"/>
-                <a:ea typeface="Calibri" pitchFamily="34" charset="-122"/>
-                <a:cs typeface="Calibri" pitchFamily="34" charset="-120"/>
-              </a:rPr>
-              <a:t>Es la falla del final, cuando ya hay que redactar. Se disfraza de escribir bien.</a:t>
-            </a:r>
-            <a:endParaRPr lang="en-US" sz="1500" dirty="0"/>
-          </a:p>
-        </p:txBody>
-      </p:sp>
-      <p:sp>
-        <p:nvSpPr>
-          <p:cNvPr id="4" name="Shape"/>
-          <p:cNvSpPr/>
-          <p:nvPr/>
-        </p:nvSpPr>
-        <p:spPr>
-          <a:xfrm>
-            <a:off x="566928" y="1820000"/>
-            <a:ext cx="2500000" cy="420000"/>
-          </a:xfrm>
-          <a:prstGeom prst="rect">
-            <a:avLst/>
-          </a:prstGeom>
-          <a:solidFill>
-            <a:srgbClr val="16262E"/>
-          </a:solidFill>
-          <a:ln w="9525">
-            <a:solidFill>
-              <a:srgbClr val="FFFFFF"/>
-            </a:solidFill>
-            <a:prstDash val="solid"/>
-          </a:ln>
-        </p:spPr>
-      </p:sp>
-      <p:sp>
-        <p:nvSpPr>
-          <p:cNvPr id="5" name="Text"/>
-          <p:cNvSpPr txBox="1"/>
-          <p:nvPr/>
-        </p:nvSpPr>
-        <p:spPr>
-          <a:xfrm>
-            <a:off x="686928" y="1820000"/>
-            <a:ext cx="2260000" cy="420000"/>
-          </a:xfrm>
-          <a:prstGeom prst="rect">
-            <a:avLst/>
-          </a:prstGeom>
-          <a:noFill/>
-          <a:ln/>
-        </p:spPr>
-        <p:txBody>
-          <a:bodyPr wrap="square" lIns="0" tIns="0" rIns="0" bIns="0" rtlCol="0" anchor="ctr"/>
-          <a:lstStyle/>
-          <a:p>
-            <a:pPr indent="0" marL="0">
-              <a:buNone/>
-            </a:pPr>
-            <a:r>
-              <a:rPr lang="en-US" sz="1200" b="1" dirty="0">
-                <a:solidFill>
-                  <a:srgbClr val="FFFFFF"/>
-                </a:solidFill>
-                <a:latin typeface="Arial" pitchFamily="34" charset="0"/>
-                <a:ea typeface="Arial" pitchFamily="34" charset="-122"/>
-                <a:cs typeface="Arial" pitchFamily="34" charset="-120"/>
-              </a:rPr>
-              <a:t/>
-            </a:r>
-            <a:endParaRPr lang="en-US" sz="1200" dirty="0"/>
-          </a:p>
-        </p:txBody>
-      </p:sp>
-      <p:sp>
-        <p:nvSpPr>
-          <p:cNvPr id="6" name="Shape"/>
-          <p:cNvSpPr/>
-          <p:nvPr/>
-        </p:nvSpPr>
-        <p:spPr>
-          <a:xfrm>
-            <a:off x="3066928" y="1820000"/>
-            <a:ext cx="4278919" cy="420000"/>
-          </a:xfrm>
-          <a:prstGeom prst="rect">
-            <a:avLst/>
-          </a:prstGeom>
-          <a:solidFill>
-            <a:srgbClr val="16262E"/>
-          </a:solidFill>
-          <a:ln w="9525">
-            <a:solidFill>
-              <a:srgbClr val="FFFFFF"/>
-            </a:solidFill>
-            <a:prstDash val="solid"/>
-          </a:ln>
-        </p:spPr>
-      </p:sp>
-      <p:sp>
-        <p:nvSpPr>
-          <p:cNvPr id="7" name="Text"/>
-          <p:cNvSpPr txBox="1"/>
-          <p:nvPr/>
-        </p:nvSpPr>
-        <p:spPr>
-          <a:xfrm>
-            <a:off x="3186928" y="1820000"/>
-            <a:ext cx="4038919" cy="420000"/>
-          </a:xfrm>
-          <a:prstGeom prst="rect">
-            <a:avLst/>
-          </a:prstGeom>
-          <a:noFill/>
-          <a:ln/>
-        </p:spPr>
-        <p:txBody>
-          <a:bodyPr wrap="square" lIns="0" tIns="0" rIns="0" bIns="0" rtlCol="0" anchor="ctr"/>
-          <a:lstStyle/>
-          <a:p>
-            <a:pPr indent="0" marL="0">
-              <a:buNone/>
-            </a:pPr>
-            <a:r>
-              <a:rPr lang="en-US" sz="1200" b="1" dirty="0">
-                <a:solidFill>
-                  <a:srgbClr val="FFFFFF"/>
-                </a:solidFill>
-                <a:latin typeface="Arial" pitchFamily="34" charset="0"/>
-                <a:ea typeface="Arial" pitchFamily="34" charset="-122"/>
-                <a:cs typeface="Arial" pitchFamily="34" charset="-120"/>
-              </a:rPr>
-              <a:t>Síntesis extractiva</a:t>
-            </a:r>
-            <a:endParaRPr lang="en-US" sz="1200" dirty="0"/>
-          </a:p>
-        </p:txBody>
-      </p:sp>
-      <p:sp>
-        <p:nvSpPr>
-          <p:cNvPr id="8" name="Shape"/>
-          <p:cNvSpPr/>
-          <p:nvPr/>
-        </p:nvSpPr>
-        <p:spPr>
-          <a:xfrm>
-            <a:off x="7345847" y="1820000"/>
-            <a:ext cx="4278920" cy="420000"/>
-          </a:xfrm>
-          <a:prstGeom prst="rect">
-            <a:avLst/>
-          </a:prstGeom>
-          <a:solidFill>
-            <a:srgbClr val="16262E"/>
-          </a:solidFill>
-          <a:ln w="9525">
-            <a:solidFill>
-              <a:srgbClr val="FFFFFF"/>
-            </a:solidFill>
-            <a:prstDash val="solid"/>
-          </a:ln>
-        </p:spPr>
-      </p:sp>
-      <p:sp>
-        <p:nvSpPr>
-          <p:cNvPr id="9" name="Text"/>
-          <p:cNvSpPr txBox="1"/>
-          <p:nvPr/>
-        </p:nvSpPr>
-        <p:spPr>
-          <a:xfrm>
-            <a:off x="7465847" y="1820000"/>
-            <a:ext cx="4038920" cy="420000"/>
-          </a:xfrm>
-          <a:prstGeom prst="rect">
-            <a:avLst/>
-          </a:prstGeom>
-          <a:noFill/>
-          <a:ln/>
-        </p:spPr>
-        <p:txBody>
-          <a:bodyPr wrap="square" lIns="0" tIns="0" rIns="0" bIns="0" rtlCol="0" anchor="ctr"/>
-          <a:lstStyle/>
-          <a:p>
-            <a:pPr indent="0" marL="0">
-              <a:buNone/>
-            </a:pPr>
-            <a:r>
-              <a:rPr lang="en-US" sz="1200" b="1" dirty="0">
-                <a:solidFill>
-                  <a:srgbClr val="FFFFFF"/>
-                </a:solidFill>
-                <a:latin typeface="Arial" pitchFamily="34" charset="0"/>
-                <a:ea typeface="Arial" pitchFamily="34" charset="-122"/>
-                <a:cs typeface="Arial" pitchFamily="34" charset="-120"/>
-              </a:rPr>
-              <a:t>Síntesis abstractiva</a:t>
-            </a:r>
-            <a:endParaRPr lang="en-US" sz="1200" dirty="0"/>
-          </a:p>
-        </p:txBody>
-      </p:sp>
-      <p:sp>
-        <p:nvSpPr>
-          <p:cNvPr id="10" name="Shape"/>
-          <p:cNvSpPr/>
-          <p:nvPr/>
-        </p:nvSpPr>
-        <p:spPr>
-          <a:xfrm>
-            <a:off x="566928" y="2240000"/>
-            <a:ext cx="2500000" cy="900000"/>
-          </a:xfrm>
-          <a:prstGeom prst="rect">
-            <a:avLst/>
-          </a:prstGeom>
-          <a:solidFill>
-            <a:srgbClr val="D7E7E7"/>
-          </a:solidFill>
-          <a:ln w="9525">
-            <a:solidFill>
-              <a:srgbClr val="D9E0E3"/>
-            </a:solidFill>
-            <a:prstDash val="solid"/>
-          </a:ln>
-        </p:spPr>
-      </p:sp>
-      <p:sp>
-        <p:nvSpPr>
-          <p:cNvPr id="11" name="Text"/>
-          <p:cNvSpPr txBox="1"/>
-          <p:nvPr/>
-        </p:nvSpPr>
-        <p:spPr>
-          <a:xfrm>
-            <a:off x="686928" y="2240000"/>
-            <a:ext cx="2260000" cy="900000"/>
-          </a:xfrm>
-          <a:prstGeom prst="rect">
-            <a:avLst/>
-          </a:prstGeom>
-          <a:noFill/>
-          <a:ln/>
-        </p:spPr>
-        <p:txBody>
-          <a:bodyPr wrap="square" lIns="0" tIns="0" rIns="0" bIns="0" rtlCol="0" anchor="ctr"/>
-          <a:lstStyle/>
-          <a:p>
-            <a:pPr indent="0" marL="0">
-              <a:lnSpc>
-                <a:spcPct val="103000"/>
-              </a:lnSpc>
-              <a:buNone/>
-            </a:pPr>
-            <a:r>
-              <a:rPr lang="en-US" sz="1250" b="1" dirty="0">
-                <a:solidFill>
-                  <a:srgbClr val="16262E"/>
-                </a:solidFill>
-                <a:latin typeface="Arial" pitchFamily="34" charset="0"/>
-                <a:ea typeface="Arial" pitchFamily="34" charset="-122"/>
-                <a:cs typeface="Arial" pitchFamily="34" charset="-120"/>
-              </a:rPr>
-              <a:t>Cómo produce el texto</a:t>
-            </a:r>
-            <a:endParaRPr lang="en-US" sz="1250" dirty="0"/>
-          </a:p>
-        </p:txBody>
-      </p:sp>
-      <p:sp>
-        <p:nvSpPr>
-          <p:cNvPr id="12" name="Shape"/>
-          <p:cNvSpPr/>
-          <p:nvPr/>
-        </p:nvSpPr>
-        <p:spPr>
-          <a:xfrm>
-            <a:off x="3066928" y="2240000"/>
-            <a:ext cx="4278919" cy="900000"/>
-          </a:xfrm>
-          <a:prstGeom prst="rect">
-            <a:avLst/>
-          </a:prstGeom>
-          <a:solidFill>
-            <a:srgbClr val="F2F5F6"/>
-          </a:solidFill>
-          <a:ln w="9525">
-            <a:solidFill>
-              <a:srgbClr val="D9E0E3"/>
-            </a:solidFill>
-            <a:prstDash val="solid"/>
-          </a:ln>
-        </p:spPr>
-      </p:sp>
-      <p:sp>
-        <p:nvSpPr>
-          <p:cNvPr id="13" name="Text"/>
-          <p:cNvSpPr txBox="1"/>
-          <p:nvPr/>
-        </p:nvSpPr>
-        <p:spPr>
-          <a:xfrm>
-            <a:off x="3186928" y="2240000"/>
-            <a:ext cx="4038919" cy="900000"/>
-          </a:xfrm>
-          <a:prstGeom prst="rect">
-            <a:avLst/>
-          </a:prstGeom>
-          <a:noFill/>
-          <a:ln/>
-        </p:spPr>
-        <p:txBody>
-          <a:bodyPr wrap="square" lIns="0" tIns="0" rIns="0" bIns="0" rtlCol="0" anchor="ctr"/>
-          <a:lstStyle/>
-          <a:p>
-            <a:pPr indent="0" marL="0">
-              <a:lnSpc>
-                <a:spcPct val="103000"/>
-              </a:lnSpc>
-              <a:buNone/>
-            </a:pPr>
-            <a:r>
-              <a:rPr lang="en-US" sz="1250" dirty="0">
-                <a:solidFill>
-                  <a:srgbClr val="16262E"/>
-                </a:solidFill>
-                <a:latin typeface="Calibri" pitchFamily="34" charset="0"/>
-                <a:ea typeface="Calibri" pitchFamily="34" charset="-122"/>
-                <a:cs typeface="Calibri" pitchFamily="34" charset="-120"/>
-              </a:rPr>
-              <a:t>Selecciona y copia oraciones que ya están en el documento.</a:t>
-            </a:r>
-            <a:endParaRPr lang="en-US" sz="1250" dirty="0"/>
-          </a:p>
-        </p:txBody>
-      </p:sp>
-      <p:sp>
-        <p:nvSpPr>
-          <p:cNvPr id="14" name="Shape"/>
-          <p:cNvSpPr/>
-          <p:nvPr/>
-        </p:nvSpPr>
-        <p:spPr>
-          <a:xfrm>
-            <a:off x="7345847" y="2240000"/>
-            <a:ext cx="4278920" cy="900000"/>
-          </a:xfrm>
-          <a:prstGeom prst="rect">
-            <a:avLst/>
-          </a:prstGeom>
-          <a:solidFill>
-            <a:srgbClr val="F2F5F6"/>
-          </a:solidFill>
-          <a:ln w="9525">
-            <a:solidFill>
-              <a:srgbClr val="D9E0E3"/>
-            </a:solidFill>
-            <a:prstDash val="solid"/>
-          </a:ln>
-        </p:spPr>
-      </p:sp>
-      <p:sp>
-        <p:nvSpPr>
-          <p:cNvPr id="15" name="Text"/>
-          <p:cNvSpPr txBox="1"/>
-          <p:nvPr/>
-        </p:nvSpPr>
-        <p:spPr>
-          <a:xfrm>
-            <a:off x="7465847" y="2240000"/>
-            <a:ext cx="4038920" cy="900000"/>
-          </a:xfrm>
-          <a:prstGeom prst="rect">
-            <a:avLst/>
-          </a:prstGeom>
-          <a:noFill/>
-          <a:ln/>
-        </p:spPr>
-        <p:txBody>
-          <a:bodyPr wrap="square" lIns="0" tIns="0" rIns="0" bIns="0" rtlCol="0" anchor="ctr"/>
-          <a:lstStyle/>
-          <a:p>
-            <a:pPr indent="0" marL="0">
-              <a:lnSpc>
-                <a:spcPct val="103000"/>
-              </a:lnSpc>
-              <a:buNone/>
-            </a:pPr>
-            <a:r>
-              <a:rPr lang="en-US" sz="1250" dirty="0">
-                <a:solidFill>
-                  <a:srgbClr val="16262E"/>
-                </a:solidFill>
-                <a:latin typeface="Calibri" pitchFamily="34" charset="0"/>
-                <a:ea typeface="Calibri" pitchFamily="34" charset="-122"/>
-                <a:cs typeface="Calibri" pitchFamily="34" charset="-120"/>
-              </a:rPr>
-              <a:t>Redacta oraciones nuevas que no aparecen en ningún documento.</a:t>
-            </a:r>
-            <a:endParaRPr lang="en-US" sz="1250" dirty="0"/>
-          </a:p>
-        </p:txBody>
-      </p:sp>
-      <p:sp>
-        <p:nvSpPr>
-          <p:cNvPr id="16" name="Shape"/>
-          <p:cNvSpPr/>
-          <p:nvPr/>
-        </p:nvSpPr>
-        <p:spPr>
-          <a:xfrm>
-            <a:off x="566928" y="3140000"/>
-            <a:ext cx="2500000" cy="900000"/>
-          </a:xfrm>
-          <a:prstGeom prst="rect">
-            <a:avLst/>
-          </a:prstGeom>
-          <a:solidFill>
-            <a:srgbClr val="D7E7E7"/>
-          </a:solidFill>
-          <a:ln w="9525">
-            <a:solidFill>
-              <a:srgbClr val="D9E0E3"/>
-            </a:solidFill>
-            <a:prstDash val="solid"/>
-          </a:ln>
-        </p:spPr>
-      </p:sp>
-      <p:sp>
-        <p:nvSpPr>
-          <p:cNvPr id="17" name="Text"/>
-          <p:cNvSpPr txBox="1"/>
-          <p:nvPr/>
-        </p:nvSpPr>
-        <p:spPr>
-          <a:xfrm>
-            <a:off x="686928" y="3140000"/>
-            <a:ext cx="2260000" cy="900000"/>
-          </a:xfrm>
-          <a:prstGeom prst="rect">
-            <a:avLst/>
-          </a:prstGeom>
-          <a:noFill/>
-          <a:ln/>
-        </p:spPr>
-        <p:txBody>
-          <a:bodyPr wrap="square" lIns="0" tIns="0" rIns="0" bIns="0" rtlCol="0" anchor="ctr"/>
-          <a:lstStyle/>
-          <a:p>
-            <a:pPr indent="0" marL="0">
-              <a:lnSpc>
-                <a:spcPct val="103000"/>
-              </a:lnSpc>
-              <a:buNone/>
-            </a:pPr>
-            <a:r>
-              <a:rPr lang="en-US" sz="1250" b="1" dirty="0">
-                <a:solidFill>
-                  <a:srgbClr val="16262E"/>
-                </a:solidFill>
-                <a:latin typeface="Arial" pitchFamily="34" charset="0"/>
-                <a:ea typeface="Arial" pitchFamily="34" charset="-122"/>
-                <a:cs typeface="Arial" pitchFamily="34" charset="-120"/>
-              </a:rPr>
-              <a:t>Cómo se lee</a:t>
-            </a:r>
-            <a:endParaRPr lang="en-US" sz="1250" dirty="0"/>
-          </a:p>
-        </p:txBody>
-      </p:sp>
-      <p:sp>
-        <p:nvSpPr>
-          <p:cNvPr id="18" name="Shape"/>
-          <p:cNvSpPr/>
-          <p:nvPr/>
-        </p:nvSpPr>
-        <p:spPr>
-          <a:xfrm>
-            <a:off x="3066928" y="3140000"/>
-            <a:ext cx="4278919" cy="900000"/>
-          </a:xfrm>
-          <a:prstGeom prst="rect">
-            <a:avLst/>
-          </a:prstGeom>
-          <a:solidFill>
-            <a:srgbClr val="FFFFFF"/>
-          </a:solidFill>
-          <a:ln w="9525">
-            <a:solidFill>
-              <a:srgbClr val="D9E0E3"/>
-            </a:solidFill>
-            <a:prstDash val="solid"/>
-          </a:ln>
-        </p:spPr>
-      </p:sp>
-      <p:sp>
-        <p:nvSpPr>
-          <p:cNvPr id="19" name="Text"/>
-          <p:cNvSpPr txBox="1"/>
-          <p:nvPr/>
-        </p:nvSpPr>
-        <p:spPr>
-          <a:xfrm>
-            <a:off x="3186928" y="3140000"/>
-            <a:ext cx="4038919" cy="900000"/>
-          </a:xfrm>
-          <a:prstGeom prst="rect">
-            <a:avLst/>
-          </a:prstGeom>
-          <a:noFill/>
-          <a:ln/>
-        </p:spPr>
-        <p:txBody>
-          <a:bodyPr wrap="square" lIns="0" tIns="0" rIns="0" bIns="0" rtlCol="0" anchor="ctr"/>
-          <a:lstStyle/>
-          <a:p>
-            <a:pPr indent="0" marL="0">
-              <a:lnSpc>
-                <a:spcPct val="103000"/>
-              </a:lnSpc>
-              <a:buNone/>
-            </a:pPr>
-            <a:r>
-              <a:rPr lang="en-US" sz="1250" dirty="0">
-                <a:solidFill>
-                  <a:srgbClr val="16262E"/>
-                </a:solidFill>
-                <a:latin typeface="Calibri" pitchFamily="34" charset="0"/>
-                <a:ea typeface="Calibri" pitchFamily="34" charset="-122"/>
-                <a:cs typeface="Calibri" pitchFamily="34" charset="-120"/>
-              </a:rPr>
-              <a:t>Áspera y con saltos. Se nota que son pedazos pegados.</a:t>
-            </a:r>
-            <a:endParaRPr lang="en-US" sz="1250" dirty="0"/>
-          </a:p>
-        </p:txBody>
-      </p:sp>
-      <p:sp>
-        <p:nvSpPr>
-          <p:cNvPr id="20" name="Shape"/>
-          <p:cNvSpPr/>
-          <p:nvPr/>
-        </p:nvSpPr>
-        <p:spPr>
-          <a:xfrm>
-            <a:off x="7345847" y="3140000"/>
-            <a:ext cx="4278920" cy="900000"/>
-          </a:xfrm>
-          <a:prstGeom prst="rect">
-            <a:avLst/>
-          </a:prstGeom>
-          <a:solidFill>
-            <a:srgbClr val="FFFFFF"/>
-          </a:solidFill>
-          <a:ln w="9525">
-            <a:solidFill>
-              <a:srgbClr val="D9E0E3"/>
-            </a:solidFill>
-            <a:prstDash val="solid"/>
-          </a:ln>
-        </p:spPr>
-      </p:sp>
-      <p:sp>
-        <p:nvSpPr>
-          <p:cNvPr id="21" name="Text"/>
-          <p:cNvSpPr txBox="1"/>
-          <p:nvPr/>
-        </p:nvSpPr>
-        <p:spPr>
-          <a:xfrm>
-            <a:off x="7465847" y="3140000"/>
-            <a:ext cx="4038920" cy="900000"/>
-          </a:xfrm>
-          <a:prstGeom prst="rect">
-            <a:avLst/>
-          </a:prstGeom>
-          <a:noFill/>
-          <a:ln/>
-        </p:spPr>
-        <p:txBody>
-          <a:bodyPr wrap="square" lIns="0" tIns="0" rIns="0" bIns="0" rtlCol="0" anchor="ctr"/>
-          <a:lstStyle/>
-          <a:p>
-            <a:pPr indent="0" marL="0">
-              <a:lnSpc>
-                <a:spcPct val="103000"/>
-              </a:lnSpc>
-              <a:buNone/>
-            </a:pPr>
-            <a:r>
-              <a:rPr lang="en-US" sz="1250" dirty="0">
-                <a:solidFill>
-                  <a:srgbClr val="16262E"/>
-                </a:solidFill>
-                <a:latin typeface="Calibri" pitchFamily="34" charset="0"/>
-                <a:ea typeface="Calibri" pitchFamily="34" charset="-122"/>
-                <a:cs typeface="Calibri" pitchFamily="34" charset="-120"/>
-              </a:rPr>
-              <a:t>Fluida. Suena a informe terminado.</a:t>
-            </a:r>
-            <a:endParaRPr lang="en-US" sz="1250" dirty="0"/>
-          </a:p>
-        </p:txBody>
-      </p:sp>
-      <p:sp>
-        <p:nvSpPr>
-          <p:cNvPr id="22" name="Shape"/>
-          <p:cNvSpPr/>
-          <p:nvPr/>
-        </p:nvSpPr>
-        <p:spPr>
-          <a:xfrm>
-            <a:off x="566928" y="4040000"/>
-            <a:ext cx="2500000" cy="900000"/>
-          </a:xfrm>
-          <a:prstGeom prst="rect">
-            <a:avLst/>
-          </a:prstGeom>
-          <a:solidFill>
-            <a:srgbClr val="D7E7E7"/>
-          </a:solidFill>
-          <a:ln w="9525">
-            <a:solidFill>
-              <a:srgbClr val="D9E0E3"/>
-            </a:solidFill>
-            <a:prstDash val="solid"/>
-          </a:ln>
-        </p:spPr>
-      </p:sp>
-      <p:sp>
-        <p:nvSpPr>
-          <p:cNvPr id="23" name="Text"/>
-          <p:cNvSpPr txBox="1"/>
-          <p:nvPr/>
-        </p:nvSpPr>
-        <p:spPr>
-          <a:xfrm>
-            <a:off x="686928" y="4040000"/>
-            <a:ext cx="2260000" cy="900000"/>
-          </a:xfrm>
-          <a:prstGeom prst="rect">
-            <a:avLst/>
-          </a:prstGeom>
-          <a:noFill/>
-          <a:ln/>
-        </p:spPr>
-        <p:txBody>
-          <a:bodyPr wrap="square" lIns="0" tIns="0" rIns="0" bIns="0" rtlCol="0" anchor="ctr"/>
-          <a:lstStyle/>
-          <a:p>
-            <a:pPr indent="0" marL="0">
-              <a:lnSpc>
-                <a:spcPct val="103000"/>
-              </a:lnSpc>
-              <a:buNone/>
-            </a:pPr>
-            <a:r>
-              <a:rPr lang="en-US" sz="1250" b="1" dirty="0">
-                <a:solidFill>
-                  <a:srgbClr val="16262E"/>
-                </a:solidFill>
-                <a:latin typeface="Arial" pitchFamily="34" charset="0"/>
-                <a:ea typeface="Arial" pitchFamily="34" charset="-122"/>
-                <a:cs typeface="Arial" pitchFamily="34" charset="-120"/>
-              </a:rPr>
-              <a:t>Dónde aparece lo que nadie sostiene</a:t>
-            </a:r>
-            <a:endParaRPr lang="en-US" sz="1250" dirty="0"/>
-          </a:p>
-        </p:txBody>
-      </p:sp>
-      <p:sp>
-        <p:nvSpPr>
-          <p:cNvPr id="24" name="Shape"/>
-          <p:cNvSpPr/>
-          <p:nvPr/>
-        </p:nvSpPr>
-        <p:spPr>
-          <a:xfrm>
-            <a:off x="3066928" y="4040000"/>
-            <a:ext cx="4278919" cy="900000"/>
-          </a:xfrm>
-          <a:prstGeom prst="rect">
-            <a:avLst/>
-          </a:prstGeom>
-          <a:solidFill>
-            <a:srgbClr val="F2F5F6"/>
-          </a:solidFill>
-          <a:ln w="9525">
-            <a:solidFill>
-              <a:srgbClr val="D9E0E3"/>
-            </a:solidFill>
-            <a:prstDash val="solid"/>
-          </a:ln>
-        </p:spPr>
-      </p:sp>
-      <p:sp>
-        <p:nvSpPr>
-          <p:cNvPr id="25" name="Text"/>
-          <p:cNvSpPr txBox="1"/>
-          <p:nvPr/>
-        </p:nvSpPr>
-        <p:spPr>
-          <a:xfrm>
-            <a:off x="3186928" y="4040000"/>
-            <a:ext cx="4038919" cy="900000"/>
-          </a:xfrm>
-          <a:prstGeom prst="rect">
-            <a:avLst/>
-          </a:prstGeom>
-          <a:noFill/>
-          <a:ln/>
-        </p:spPr>
-        <p:txBody>
-          <a:bodyPr wrap="square" lIns="0" tIns="0" rIns="0" bIns="0" rtlCol="0" anchor="ctr"/>
-          <a:lstStyle/>
-          <a:p>
-            <a:pPr indent="0" marL="0">
-              <a:lnSpc>
-                <a:spcPct val="103000"/>
-              </a:lnSpc>
-              <a:buNone/>
-            </a:pPr>
-            <a:r>
-              <a:rPr lang="en-US" sz="1250" dirty="0">
-                <a:solidFill>
-                  <a:srgbClr val="16262E"/>
-                </a:solidFill>
-                <a:latin typeface="Calibri" pitchFamily="34" charset="0"/>
-                <a:ea typeface="Calibri" pitchFamily="34" charset="-122"/>
-                <a:cs typeface="Calibri" pitchFamily="34" charset="-120"/>
-              </a:rPr>
-              <a:t>Menos, pero no nunca: una oración arrancada de su contexto puede cambiar de sentido. Se midió en 3 de cada 10.</a:t>
-            </a:r>
-            <a:endParaRPr lang="en-US" sz="1250" dirty="0"/>
-          </a:p>
-        </p:txBody>
-      </p:sp>
-      <p:sp>
-        <p:nvSpPr>
-          <p:cNvPr id="26" name="Shape"/>
-          <p:cNvSpPr/>
-          <p:nvPr/>
-        </p:nvSpPr>
-        <p:spPr>
-          <a:xfrm>
-            <a:off x="7345847" y="4040000"/>
-            <a:ext cx="4278920" cy="900000"/>
-          </a:xfrm>
-          <a:prstGeom prst="rect">
-            <a:avLst/>
-          </a:prstGeom>
-          <a:solidFill>
-            <a:srgbClr val="F2F5F6"/>
-          </a:solidFill>
-          <a:ln w="9525">
-            <a:solidFill>
-              <a:srgbClr val="D9E0E3"/>
-            </a:solidFill>
-            <a:prstDash val="solid"/>
-          </a:ln>
-        </p:spPr>
-      </p:sp>
-      <p:sp>
-        <p:nvSpPr>
-          <p:cNvPr id="27" name="Text"/>
-          <p:cNvSpPr txBox="1"/>
-          <p:nvPr/>
-        </p:nvSpPr>
-        <p:spPr>
-          <a:xfrm>
-            <a:off x="7465847" y="4040000"/>
-            <a:ext cx="4038920" cy="900000"/>
-          </a:xfrm>
-          <a:prstGeom prst="rect">
-            <a:avLst/>
-          </a:prstGeom>
-          <a:noFill/>
-          <a:ln/>
-        </p:spPr>
-        <p:txBody>
-          <a:bodyPr wrap="square" lIns="0" tIns="0" rIns="0" bIns="0" rtlCol="0" anchor="ctr"/>
-          <a:lstStyle/>
-          <a:p>
-            <a:pPr indent="0" marL="0">
-              <a:lnSpc>
-                <a:spcPct val="103000"/>
-              </a:lnSpc>
-              <a:buNone/>
-            </a:pPr>
-            <a:r>
-              <a:rPr lang="en-US" sz="1250" dirty="0">
-                <a:solidFill>
-                  <a:srgbClr val="16262E"/>
-                </a:solidFill>
-                <a:latin typeface="Calibri" pitchFamily="34" charset="0"/>
-                <a:ea typeface="Calibri" pitchFamily="34" charset="-122"/>
-                <a:cs typeface="Calibri" pitchFamily="34" charset="-120"/>
-              </a:rPr>
-              <a:t>Aquí sobre todo. Al unir dos hechos ciertos puede afirmar un tercero que ninguno de los dos sostiene.</a:t>
-            </a:r>
-            <a:endParaRPr lang="en-US" sz="1250" dirty="0"/>
-          </a:p>
-        </p:txBody>
-      </p:sp>
-      <p:sp>
-        <p:nvSpPr>
-          <p:cNvPr id="28" name="Shape"/>
-          <p:cNvSpPr/>
-          <p:nvPr/>
-        </p:nvSpPr>
-        <p:spPr>
-          <a:xfrm>
-            <a:off x="566928" y="4940000"/>
-            <a:ext cx="2500000" cy="900000"/>
-          </a:xfrm>
-          <a:prstGeom prst="rect">
-            <a:avLst/>
-          </a:prstGeom>
-          <a:solidFill>
-            <a:srgbClr val="D7E7E7"/>
-          </a:solidFill>
-          <a:ln w="9525">
-            <a:solidFill>
-              <a:srgbClr val="D9E0E3"/>
-            </a:solidFill>
-            <a:prstDash val="solid"/>
-          </a:ln>
-        </p:spPr>
-      </p:sp>
-      <p:sp>
-        <p:nvSpPr>
-          <p:cNvPr id="29" name="Text"/>
-          <p:cNvSpPr txBox="1"/>
-          <p:nvPr/>
-        </p:nvSpPr>
-        <p:spPr>
-          <a:xfrm>
-            <a:off x="686928" y="4940000"/>
-            <a:ext cx="2260000" cy="900000"/>
-          </a:xfrm>
-          <a:prstGeom prst="rect">
-            <a:avLst/>
-          </a:prstGeom>
-          <a:noFill/>
-          <a:ln/>
-        </p:spPr>
-        <p:txBody>
-          <a:bodyPr wrap="square" lIns="0" tIns="0" rIns="0" bIns="0" rtlCol="0" anchor="ctr"/>
-          <a:lstStyle/>
-          <a:p>
-            <a:pPr indent="0" marL="0">
-              <a:lnSpc>
-                <a:spcPct val="103000"/>
-              </a:lnSpc>
-              <a:buNone/>
-            </a:pPr>
-            <a:r>
-              <a:rPr lang="en-US" sz="1250" b="1" dirty="0">
-                <a:solidFill>
-                  <a:srgbClr val="16262E"/>
-                </a:solidFill>
-                <a:latin typeface="Arial" pitchFamily="34" charset="0"/>
-                <a:ea typeface="Arial" pitchFamily="34" charset="-122"/>
-                <a:cs typeface="Arial" pitchFamily="34" charset="-120"/>
-              </a:rPr>
-              <a:t>Qué le toca verificar</a:t>
-            </a:r>
-            <a:endParaRPr lang="en-US" sz="1250" dirty="0"/>
-          </a:p>
-        </p:txBody>
-      </p:sp>
-      <p:sp>
-        <p:nvSpPr>
-          <p:cNvPr id="30" name="Shape"/>
-          <p:cNvSpPr/>
-          <p:nvPr/>
-        </p:nvSpPr>
-        <p:spPr>
-          <a:xfrm>
-            <a:off x="3066928" y="4940000"/>
-            <a:ext cx="4278919" cy="900000"/>
-          </a:xfrm>
-          <a:prstGeom prst="rect">
-            <a:avLst/>
-          </a:prstGeom>
-          <a:solidFill>
-            <a:srgbClr val="FFFFFF"/>
-          </a:solidFill>
-          <a:ln w="9525">
-            <a:solidFill>
-              <a:srgbClr val="D9E0E3"/>
-            </a:solidFill>
-            <a:prstDash val="solid"/>
-          </a:ln>
-        </p:spPr>
-      </p:sp>
-      <p:sp>
-        <p:nvSpPr>
-          <p:cNvPr id="31" name="Text"/>
-          <p:cNvSpPr txBox="1"/>
-          <p:nvPr/>
-        </p:nvSpPr>
-        <p:spPr>
-          <a:xfrm>
-            <a:off x="3186928" y="4940000"/>
-            <a:ext cx="4038919" cy="900000"/>
-          </a:xfrm>
-          <a:prstGeom prst="rect">
-            <a:avLst/>
-          </a:prstGeom>
-          <a:noFill/>
-          <a:ln/>
-        </p:spPr>
-        <p:txBody>
-          <a:bodyPr wrap="square" lIns="0" tIns="0" rIns="0" bIns="0" rtlCol="0" anchor="ctr"/>
-          <a:lstStyle/>
-          <a:p>
-            <a:pPr indent="0" marL="0">
-              <a:lnSpc>
-                <a:spcPct val="103000"/>
-              </a:lnSpc>
-              <a:buNone/>
-            </a:pPr>
-            <a:r>
-              <a:rPr lang="en-US" sz="1250" dirty="0">
-                <a:solidFill>
-                  <a:srgbClr val="16262E"/>
-                </a:solidFill>
-                <a:latin typeface="Calibri" pitchFamily="34" charset="0"/>
-                <a:ea typeface="Calibri" pitchFamily="34" charset="-122"/>
-                <a:cs typeface="Calibri" pitchFamily="34" charset="-120"/>
-              </a:rPr>
-              <a:t>Que la oración copiada siga diciendo lo mismo fuera de su contexto. Cuidado con los «este» y los «dicho programa».</a:t>
-            </a:r>
-            <a:endParaRPr lang="en-US" sz="1250" dirty="0"/>
-          </a:p>
-        </p:txBody>
-      </p:sp>
-      <p:sp>
-        <p:nvSpPr>
-          <p:cNvPr id="32" name="Shape"/>
-          <p:cNvSpPr/>
-          <p:nvPr/>
-        </p:nvSpPr>
-        <p:spPr>
-          <a:xfrm>
-            <a:off x="7345847" y="4940000"/>
-            <a:ext cx="4278920" cy="900000"/>
-          </a:xfrm>
-          <a:prstGeom prst="rect">
-            <a:avLst/>
-          </a:prstGeom>
-          <a:solidFill>
-            <a:srgbClr val="FFFFFF"/>
-          </a:solidFill>
-          <a:ln w="9525">
-            <a:solidFill>
-              <a:srgbClr val="D9E0E3"/>
-            </a:solidFill>
-            <a:prstDash val="solid"/>
-          </a:ln>
-        </p:spPr>
-      </p:sp>
-      <p:sp>
-        <p:nvSpPr>
-          <p:cNvPr id="33" name="Text"/>
-          <p:cNvSpPr txBox="1"/>
-          <p:nvPr/>
-        </p:nvSpPr>
-        <p:spPr>
-          <a:xfrm>
-            <a:off x="7465847" y="4940000"/>
-            <a:ext cx="4038920" cy="900000"/>
-          </a:xfrm>
-          <a:prstGeom prst="rect">
-            <a:avLst/>
-          </a:prstGeom>
-          <a:noFill/>
-          <a:ln/>
-        </p:spPr>
-        <p:txBody>
-          <a:bodyPr wrap="square" lIns="0" tIns="0" rIns="0" bIns="0" rtlCol="0" anchor="ctr"/>
-          <a:lstStyle/>
-          <a:p>
-            <a:pPr indent="0" marL="0">
-              <a:lnSpc>
-                <a:spcPct val="103000"/>
-              </a:lnSpc>
-              <a:buNone/>
-            </a:pPr>
-            <a:r>
-              <a:rPr lang="en-US" sz="1250" dirty="0">
-                <a:solidFill>
-                  <a:srgbClr val="16262E"/>
-                </a:solidFill>
-                <a:latin typeface="Calibri" pitchFamily="34" charset="0"/>
-                <a:ea typeface="Calibri" pitchFamily="34" charset="-122"/>
-                <a:cs typeface="Calibri" pitchFamily="34" charset="-120"/>
-              </a:rPr>
-              <a:t>Frase por frase contra la matriz. Es la regla dura del laboratorio de hoy.</a:t>
-            </a:r>
-            <a:endParaRPr lang="en-US" sz="1250" dirty="0"/>
-          </a:p>
-        </p:txBody>
-      </p:sp>
-      <p:sp>
-        <p:nvSpPr>
-          <p:cNvPr id="34" name="Shape"/>
-          <p:cNvSpPr/>
-          <p:nvPr/>
-        </p:nvSpPr>
-        <p:spPr>
-          <a:xfrm>
-            <a:off x="566928" y="5560000"/>
-            <a:ext cx="11057839" cy="680000"/>
-          </a:xfrm>
-          <a:prstGeom prst="roundRect">
-            <a:avLst>
-              <a:gd name="adj" fmla="val 8235"/>
-            </a:avLst>
-          </a:prstGeom>
-          <a:solidFill>
-            <a:srgbClr val="F7E4D8"/>
-          </a:solidFill>
-          <a:ln w="12700">
-            <a:solidFill>
-              <a:srgbClr val="F7E4D8"/>
-            </a:solidFill>
-            <a:prstDash val="solid"/>
-          </a:ln>
-        </p:spPr>
-      </p:sp>
-      <p:sp>
-        <p:nvSpPr>
-          <p:cNvPr id="35" name="Text"/>
-          <p:cNvSpPr txBox="1"/>
-          <p:nvPr/>
-        </p:nvSpPr>
-        <p:spPr>
-          <a:xfrm>
-            <a:off x="804672" y="5560000"/>
-            <a:ext cx="10582351" cy="680000"/>
-          </a:xfrm>
-          <a:prstGeom prst="rect">
-            <a:avLst/>
-          </a:prstGeom>
-          <a:noFill/>
-          <a:ln/>
-        </p:spPr>
-        <p:txBody>
-          <a:bodyPr wrap="square" lIns="0" tIns="0" rIns="0" bIns="0" rtlCol="0" anchor="ctr"/>
-          <a:lstStyle/>
-          <a:p>
-            <a:pPr indent="0" marL="0">
-              <a:lnSpc>
-                <a:spcPct val="110000"/>
-              </a:lnSpc>
-              <a:buNone/>
-            </a:pPr>
-            <a:r>
-              <a:rPr lang="en-US" sz="1300" dirty="0">
-                <a:solidFill>
-                  <a:srgbClr val="16262E"/>
-                </a:solidFill>
-                <a:latin typeface="Calibri" pitchFamily="34" charset="0"/>
-                <a:ea typeface="Calibri" pitchFamily="34" charset="-122"/>
-                <a:cs typeface="Calibri" pitchFamily="34" charset="-120"/>
-              </a:rPr>
-              <a:t>Su síntesis de dos cuartillas es abstractiva por fuerza: nadie entrega un informe pegando oraciones sueltas. Por eso la regla dura no es una formalidad del curso, es el control de la única falla que la buena redacción esconde.</a:t>
-            </a:r>
-            <a:endParaRPr lang="en-US" sz="1300" dirty="0"/>
-          </a:p>
-        </p:txBody>
-      </p:sp>
-      <p:sp>
-        <p:nvSpPr>
-          <p:cNvPr id="36" name="Text"/>
-          <p:cNvSpPr txBox="1"/>
-          <p:nvPr/>
-        </p:nvSpPr>
-        <p:spPr>
-          <a:xfrm>
-            <a:off x="566928" y="6330000"/>
-            <a:ext cx="11057839" cy="240000"/>
-          </a:xfrm>
-          <a:prstGeom prst="rect">
-            <a:avLst/>
-          </a:prstGeom>
-          <a:noFill/>
-          <a:ln/>
-        </p:spPr>
-        <p:txBody>
-          <a:bodyPr wrap="square" lIns="0" tIns="0" rIns="0" bIns="0" rtlCol="0" anchor="t"/>
-          <a:lstStyle/>
-          <a:p>
-            <a:pPr indent="0" marL="0">
-              <a:buNone/>
-            </a:pPr>
-            <a:r>
-              <a:rPr lang="en-US" sz="1000" dirty="0">
-                <a:solidFill>
-                  <a:srgbClr val="5A6B73"/>
-                </a:solidFill>
-                <a:latin typeface="Calibri" pitchFamily="34" charset="0"/>
-                <a:ea typeface="Calibri" pitchFamily="34" charset="-122"/>
-                <a:cs typeface="Calibri" pitchFamily="34" charset="-120"/>
-              </a:rPr>
-              <a:t>Zhang, Wan y Bansal (2023), «Extractive is not Faithful», ACL: 30.3% de los resúmenes extractivos revisados a mano traían al menos un problema de correferencia, de discurso o de información engañosa.</a:t>
-            </a:r>
-            <a:endParaRPr lang="en-US" sz="1000" dirty="0"/>
-          </a:p>
-        </p:txBody>
-      </p:sp>
-    </p:spTree>
-  </p:cSld>
-  <p:clrMapOvr>
-    <a:masterClrMapping/>
-  </p:clrMapOvr>
-</p:sld>
-</file>
-
 <file path=ppt/slides/slide2.xml><?xml version="1.0" encoding="utf-8"?>
 <p:sld xmlns:a="http://schemas.openxmlformats.org/drawingml/2006/main" xmlns:r="http://schemas.openxmlformats.org/officeDocument/2006/relationships" xmlns:p="http://schemas.openxmlformats.org/presentationml/2006/main">
   <p:cSld name="Agenda">
@@ -12334,7 +11671,7 @@
                 <a:ea typeface="Arial" pitchFamily="34" charset="-122"/>
                 <a:cs typeface="Arial" pitchFamily="34" charset="-120"/>
               </a:rPr>
-              <a:t>9:00 a 11:40</a:t>
+              <a:t>9:00 a 12:00</a:t>
             </a:r>
             <a:endParaRPr lang="en-US" sz="1200" dirty="0"/>
           </a:p>
@@ -12658,7 +11995,7 @@
                 <a:ea typeface="Calibri" pitchFamily="34" charset="-122"/>
                 <a:cs typeface="Calibri" pitchFamily="34" charset="-120"/>
               </a:rPr>
-              <a:t>Medir la extracción: precisión, recuperación y costo del error</a:t>
+              <a:t>Medir la extracción: el prompt, la salida y el costo del error</a:t>
             </a:r>
             <a:endParaRPr lang="en-US" sz="1350" dirty="0"/>
           </a:p>
@@ -12724,7 +12061,7 @@
                 <a:ea typeface="Arial" pitchFamily="34" charset="-122"/>
                 <a:cs typeface="Arial" pitchFamily="34" charset="-120"/>
               </a:rPr>
-              <a:t>9:33</a:t>
+              <a:t>9:41</a:t>
             </a:r>
             <a:endParaRPr lang="en-US" sz="1300" dirty="0"/>
           </a:p>
@@ -12766,7 +12103,7 @@
                 <a:ea typeface="Calibri" pitchFamily="34" charset="-122"/>
                 <a:cs typeface="Calibri" pitchFamily="34" charset="-120"/>
               </a:rPr>
-              <a:t>Atribución y generalización</a:t>
+              <a:t>Atribución: el prompt y la cita que no sostiene</a:t>
             </a:r>
             <a:endParaRPr lang="en-US" sz="1350" dirty="0"/>
           </a:p>
@@ -12832,7 +12169,7 @@
                 <a:ea typeface="Arial" pitchFamily="34" charset="-122"/>
                 <a:cs typeface="Arial" pitchFamily="34" charset="-120"/>
               </a:rPr>
-              <a:t>9:45</a:t>
+              <a:t>9:52</a:t>
             </a:r>
             <a:endParaRPr lang="en-US" sz="1300" dirty="0"/>
           </a:p>
@@ -12874,7 +12211,7 @@
                 <a:ea typeface="Calibri" pitchFamily="34" charset="-122"/>
                 <a:cs typeface="Calibri" pitchFamily="34" charset="-120"/>
               </a:rPr>
-              <a:t>El acuerdo entre codificadores, y la matriz de evidencia</a:t>
+              <a:t>Las dos síntesis, el corpus de foros y el acuerdo</a:t>
             </a:r>
             <a:endParaRPr lang="en-US" sz="1350" dirty="0"/>
           </a:p>
@@ -12940,7 +12277,7 @@
                 <a:ea typeface="Arial" pitchFamily="34" charset="-122"/>
                 <a:cs typeface="Arial" pitchFamily="34" charset="-120"/>
               </a:rPr>
-              <a:t>10:10</a:t>
+              <a:t>10:29</a:t>
             </a:r>
             <a:endParaRPr lang="en-US" sz="1300" dirty="0"/>
           </a:p>
@@ -13048,7 +12385,7 @@
                 <a:ea typeface="Arial" pitchFamily="34" charset="-122"/>
                 <a:cs typeface="Arial" pitchFamily="34" charset="-120"/>
               </a:rPr>
-              <a:t>10:20</a:t>
+              <a:t>10:39</a:t>
             </a:r>
             <a:endParaRPr lang="en-US" sz="1300" dirty="0"/>
           </a:p>
@@ -13156,7 +12493,7 @@
                 <a:ea typeface="Arial" pitchFamily="34" charset="-122"/>
                 <a:cs typeface="Arial" pitchFamily="34" charset="-120"/>
               </a:rPr>
-              <a:t>11:22</a:t>
+              <a:t>11:44</a:t>
             </a:r>
             <a:endParaRPr lang="en-US" sz="1300" dirty="0"/>
           </a:p>
@@ -13237,7 +12574,7 @@
                 <a:ea typeface="Calibri" pitchFamily="34" charset="-122"/>
                 <a:cs typeface="Calibri" pitchFamily="34" charset="-120"/>
               </a:rPr>
-              <a:t>Hoy cerramos diez minutos tarde, a propósito: el bloque técnico creció para que cada documento que aparece en pantalla venga presentado antes de usarse. Una sola práctica, de cuarenta y ocho minutos.</a:t>
+              <a:t>Hoy nos pasamos media hora, a propósito: cada salida que aparece en pantalla viene con el prompt que la produjo. Si hay que terminar a las 11:30, el recorte está en el guion. Una sola práctica, de cuarenta y ocho minutos.</a:t>
             </a:r>
             <a:endParaRPr lang="en-US" sz="1000" dirty="0"/>
           </a:p>
@@ -15842,7 +15179,7 @@
                 <a:ea typeface="Calibri" pitchFamily="34" charset="-122"/>
                 <a:cs typeface="Calibri" pitchFamily="34" charset="-120"/>
               </a:rPr>
-              <a:t>El mismo artículo 9 de la lámina anterior. Los dos asistentes son hipotéticos; los cinco requisitos son del expediente.</a:t>
+              <a:t>El mismo prompt de la lámina anterior, corrido dos veces. El asistente que inventa ya lo vieron; el que omite es hipotético.</a:t>
             </a:r>
             <a:endParaRPr lang="en-US" sz="1100" dirty="0"/>
           </a:p>
@@ -23033,6 +22370,5826 @@
                 <a:cs typeface="Calibri" pitchFamily="34" charset="-120"/>
               </a:rPr>
               <a:t>Transcripciones_foro_PARTICIPANTE.docx, en la carpeta sesion-04. La distribución de causa raíz es gestión 14, infraestructura 9, presupuesto 8 y transparencia 7.</a:t>
+            </a:r>
+            <a:endParaRPr lang="en-US" sz="1000" dirty="0"/>
+          </a:p>
+        </p:txBody>
+      </p:sp>
+    </p:spTree>
+  </p:cSld>
+  <p:clrMapOvr>
+    <a:masterClrMapping/>
+  </p:clrMapOvr>
+</p:sld>
+</file>
+
+<file path=ppt/slides/slide28.xml><?xml version="1.0" encoding="utf-8"?>
+<p:sld xmlns:a="http://schemas.openxmlformats.org/drawingml/2006/main" xmlns:r="http://schemas.openxmlformats.org/officeDocument/2006/relationships" xmlns:p="http://schemas.openxmlformats.org/presentationml/2006/main">
+  <p:cSld name="P_extraccion">
+    <p:spTree>
+      <p:nvGrpSpPr>
+        <p:cNvPr id="1" name=""/>
+        <p:cNvGrpSpPr/>
+        <p:nvPr/>
+      </p:nvGrpSpPr>
+      <p:grpSpPr>
+        <a:xfrm>
+          <a:off x="0" y="0"/>
+          <a:ext cx="0" cy="0"/>
+          <a:chOff x="0" y="0"/>
+          <a:chExt cx="0" cy="0"/>
+        </a:xfrm>
+      </p:grpSpPr>
+      <p:sp>
+        <p:nvSpPr>
+          <p:cNvPr id="2" name="Text"/>
+          <p:cNvSpPr txBox="1"/>
+          <p:nvPr/>
+        </p:nvSpPr>
+        <p:spPr>
+          <a:xfrm>
+            <a:off x="566928" y="402336"/>
+            <a:ext cx="11057839" cy="749808"/>
+          </a:xfrm>
+          <a:prstGeom prst="rect">
+            <a:avLst/>
+          </a:prstGeom>
+          <a:noFill/>
+          <a:ln/>
+        </p:spPr>
+        <p:txBody>
+          <a:bodyPr wrap="square" lIns="0" tIns="0" rIns="0" bIns="0" rtlCol="0" anchor="t"/>
+          <a:lstStyle/>
+          <a:p>
+            <a:pPr algn="l" indent="0" marL="0">
+              <a:buNone/>
+            </a:pPr>
+            <a:r>
+              <a:rPr lang="en-US" sz="3200" b="1" dirty="0">
+                <a:solidFill>
+                  <a:srgbClr val="16262E"/>
+                </a:solidFill>
+                <a:latin typeface="Arial" pitchFamily="34" charset="0"/>
+                <a:ea typeface="Arial" pitchFamily="34" charset="-122"/>
+                <a:cs typeface="Arial" pitchFamily="34" charset="-120"/>
+              </a:rPr>
+              <a:t>De dónde sale la lista de seis requisitos</a:t>
+            </a:r>
+            <a:endParaRPr lang="en-US" sz="3200" dirty="0"/>
+          </a:p>
+        </p:txBody>
+      </p:sp>
+      <p:sp>
+        <p:nvSpPr>
+          <p:cNvPr id="3" name="Text"/>
+          <p:cNvSpPr txBox="1"/>
+          <p:nvPr/>
+        </p:nvSpPr>
+        <p:spPr>
+          <a:xfrm>
+            <a:off x="566928" y="1280160"/>
+            <a:ext cx="11057839" cy="731520"/>
+          </a:xfrm>
+          <a:prstGeom prst="rect">
+            <a:avLst/>
+          </a:prstGeom>
+          <a:noFill/>
+          <a:ln/>
+        </p:spPr>
+        <p:txBody>
+          <a:bodyPr wrap="square" lIns="0" tIns="0" rIns="0" bIns="0" rtlCol="0" anchor="t"/>
+          <a:lstStyle/>
+          <a:p>
+            <a:pPr indent="0" marL="0">
+              <a:lnSpc>
+                <a:spcPct val="108000"/>
+              </a:lnSpc>
+              <a:buNone/>
+            </a:pPr>
+            <a:r>
+              <a:rPr lang="en-US" sz="1500" dirty="0">
+                <a:solidFill>
+                  <a:srgbClr val="5A6B73"/>
+                </a:solidFill>
+                <a:latin typeface="Calibri" pitchFamily="34" charset="0"/>
+                <a:ea typeface="Calibri" pitchFamily="34" charset="-122"/>
+                <a:cs typeface="Calibri" pitchFamily="34" charset="-120"/>
+              </a:rPr>
+              <a:t>Nadie le pidió al asistente que inventara nada. Este es el prompt que produjo esa lista.</a:t>
+            </a:r>
+            <a:endParaRPr lang="en-US" sz="1500" dirty="0"/>
+          </a:p>
+        </p:txBody>
+      </p:sp>
+      <p:sp>
+        <p:nvSpPr>
+          <p:cNvPr id="4" name="Shape"/>
+          <p:cNvSpPr/>
+          <p:nvPr/>
+        </p:nvSpPr>
+        <p:spPr>
+          <a:xfrm>
+            <a:off x="566928" y="1700000"/>
+            <a:ext cx="11057839" cy="300000"/>
+          </a:xfrm>
+          <a:prstGeom prst="roundRect">
+            <a:avLst>
+              <a:gd name="adj" fmla="val 20000"/>
+            </a:avLst>
+          </a:prstGeom>
+          <a:solidFill>
+            <a:srgbClr val="D7E7E7"/>
+          </a:solidFill>
+          <a:ln w="12700">
+            <a:solidFill>
+              <a:srgbClr val="D7E7E7"/>
+            </a:solidFill>
+            <a:prstDash val="solid"/>
+          </a:ln>
+        </p:spPr>
+      </p:sp>
+      <p:sp>
+        <p:nvSpPr>
+          <p:cNvPr id="5" name="Text"/>
+          <p:cNvSpPr txBox="1"/>
+          <p:nvPr/>
+        </p:nvSpPr>
+        <p:spPr>
+          <a:xfrm>
+            <a:off x="766928" y="1700000"/>
+            <a:ext cx="1700000" cy="300000"/>
+          </a:xfrm>
+          <a:prstGeom prst="rect">
+            <a:avLst/>
+          </a:prstGeom>
+          <a:noFill/>
+          <a:ln/>
+        </p:spPr>
+        <p:txBody>
+          <a:bodyPr wrap="square" lIns="0" tIns="0" rIns="0" bIns="0" rtlCol="0" anchor="ctr"/>
+          <a:lstStyle/>
+          <a:p>
+            <a:pPr indent="0" marL="0">
+              <a:buNone/>
+            </a:pPr>
+            <a:r>
+              <a:rPr lang="en-US" sz="950" b="1" spc="100" kern="0" dirty="0">
+                <a:solidFill>
+                  <a:srgbClr val="2E7D7D"/>
+                </a:solidFill>
+                <a:latin typeface="Arial" pitchFamily="34" charset="0"/>
+                <a:ea typeface="Arial" pitchFamily="34" charset="-122"/>
+                <a:cs typeface="Arial" pitchFamily="34" charset="-120"/>
+              </a:rPr>
+              <a:t>DE DÓNDE SALE</a:t>
+            </a:r>
+            <a:endParaRPr lang="en-US" sz="950" dirty="0"/>
+          </a:p>
+        </p:txBody>
+      </p:sp>
+      <p:sp>
+        <p:nvSpPr>
+          <p:cNvPr id="6" name="Text"/>
+          <p:cNvSpPr txBox="1"/>
+          <p:nvPr/>
+        </p:nvSpPr>
+        <p:spPr>
+          <a:xfrm>
+            <a:off x="2516928" y="1700000"/>
+            <a:ext cx="8907839" cy="300000"/>
+          </a:xfrm>
+          <a:prstGeom prst="rect">
+            <a:avLst/>
+          </a:prstGeom>
+          <a:noFill/>
+          <a:ln/>
+        </p:spPr>
+        <p:txBody>
+          <a:bodyPr wrap="square" lIns="0" tIns="0" rIns="0" bIns="0" rtlCol="0" anchor="ctr"/>
+          <a:lstStyle/>
+          <a:p>
+            <a:pPr indent="0" marL="0">
+              <a:buNone/>
+            </a:pPr>
+            <a:r>
+              <a:rPr lang="en-US" sz="1100" dirty="0">
+                <a:solidFill>
+                  <a:srgbClr val="16262E"/>
+                </a:solidFill>
+                <a:latin typeface="Calibri" pitchFamily="34" charset="0"/>
+                <a:ea typeface="Calibri" pitchFamily="34" charset="-122"/>
+                <a:cs typeface="Calibri" pitchFamily="34" charset="-120"/>
+              </a:rPr>
+              <a:t>El artículo 9 del marco normativo, pegado en el chat. No se adjuntó el archivo: adjuntarlo mete también los seis expedientes de entidad.</a:t>
+            </a:r>
+            <a:endParaRPr lang="en-US" sz="1100" dirty="0"/>
+          </a:p>
+        </p:txBody>
+      </p:sp>
+      <p:sp>
+        <p:nvSpPr>
+          <p:cNvPr id="7" name="Shape"/>
+          <p:cNvSpPr/>
+          <p:nvPr/>
+        </p:nvSpPr>
+        <p:spPr>
+          <a:xfrm>
+            <a:off x="566928" y="2080000"/>
+            <a:ext cx="11057839" cy="2270000"/>
+          </a:xfrm>
+          <a:prstGeom prst="roundRect">
+            <a:avLst>
+              <a:gd name="adj" fmla="val 2933"/>
+            </a:avLst>
+          </a:prstGeom>
+          <a:solidFill>
+            <a:srgbClr val="16262E"/>
+          </a:solidFill>
+          <a:ln w="12700">
+            <a:solidFill>
+              <a:srgbClr val="16262E"/>
+            </a:solidFill>
+            <a:prstDash val="solid"/>
+          </a:ln>
+        </p:spPr>
+      </p:sp>
+      <p:sp>
+        <p:nvSpPr>
+          <p:cNvPr id="8" name="Text"/>
+          <p:cNvSpPr txBox="1"/>
+          <p:nvPr/>
+        </p:nvSpPr>
+        <p:spPr>
+          <a:xfrm>
+            <a:off x="804672" y="2190000"/>
+            <a:ext cx="10582351" cy="240000"/>
+          </a:xfrm>
+          <a:prstGeom prst="rect">
+            <a:avLst/>
+          </a:prstGeom>
+          <a:noFill/>
+          <a:ln/>
+        </p:spPr>
+        <p:txBody>
+          <a:bodyPr wrap="square" lIns="0" tIns="0" rIns="0" bIns="0" rtlCol="0" anchor="t"/>
+          <a:lstStyle/>
+          <a:p>
+            <a:pPr indent="0" marL="0">
+              <a:buNone/>
+            </a:pPr>
+            <a:r>
+              <a:rPr lang="en-US" sz="950" b="1" spc="120" kern="0" dirty="0">
+                <a:solidFill>
+                  <a:srgbClr val="8FC7C7"/>
+                </a:solidFill>
+                <a:latin typeface="Arial" pitchFamily="34" charset="0"/>
+                <a:ea typeface="Arial" pitchFamily="34" charset="-122"/>
+                <a:cs typeface="Arial" pitchFamily="34" charset="-120"/>
+              </a:rPr>
+              <a:t>EL PROMPT, CON LAS SEIS CASILLAS</a:t>
+            </a:r>
+            <a:endParaRPr lang="en-US" sz="950" dirty="0"/>
+          </a:p>
+        </p:txBody>
+      </p:sp>
+      <p:sp>
+        <p:nvSpPr>
+          <p:cNvPr id="9" name="Text"/>
+          <p:cNvSpPr txBox="1"/>
+          <p:nvPr/>
+        </p:nvSpPr>
+        <p:spPr>
+          <a:xfrm>
+            <a:off x="766928" y="2470000"/>
+            <a:ext cx="1290000" cy="620000"/>
+          </a:xfrm>
+          <a:prstGeom prst="rect">
+            <a:avLst/>
+          </a:prstGeom>
+          <a:noFill/>
+          <a:ln/>
+        </p:spPr>
+        <p:txBody>
+          <a:bodyPr wrap="square" lIns="0" tIns="0" rIns="0" bIns="0" rtlCol="0" anchor="ctr"/>
+          <a:lstStyle/>
+          <a:p>
+            <a:pPr indent="0" marL="0">
+              <a:buNone/>
+            </a:pPr>
+            <a:r>
+              <a:rPr lang="en-US" sz="950" b="1" dirty="0">
+                <a:solidFill>
+                  <a:srgbClr val="8FC7C7"/>
+                </a:solidFill>
+                <a:latin typeface="Arial" pitchFamily="34" charset="0"/>
+                <a:ea typeface="Arial" pitchFamily="34" charset="-122"/>
+                <a:cs typeface="Arial" pitchFamily="34" charset="-120"/>
+              </a:rPr>
+              <a:t>1. Rol</a:t>
+            </a:r>
+            <a:endParaRPr lang="en-US" sz="950" dirty="0"/>
+          </a:p>
+        </p:txBody>
+      </p:sp>
+      <p:sp>
+        <p:nvSpPr>
+          <p:cNvPr id="10" name="Text"/>
+          <p:cNvSpPr txBox="1"/>
+          <p:nvPr/>
+        </p:nvSpPr>
+        <p:spPr>
+          <a:xfrm>
+            <a:off x="2146928" y="2470000"/>
+            <a:ext cx="3848919" cy="620000"/>
+          </a:xfrm>
+          <a:prstGeom prst="rect">
+            <a:avLst/>
+          </a:prstGeom>
+          <a:noFill/>
+          <a:ln/>
+        </p:spPr>
+        <p:txBody>
+          <a:bodyPr wrap="square" lIns="0" tIns="0" rIns="0" bIns="0" rtlCol="0" anchor="ctr"/>
+          <a:lstStyle/>
+          <a:p>
+            <a:pPr indent="0" marL="0">
+              <a:lnSpc>
+                <a:spcPct val="103000"/>
+              </a:lnSpc>
+              <a:buNone/>
+            </a:pPr>
+            <a:r>
+              <a:rPr lang="en-US" sz="1000" dirty="0">
+                <a:solidFill>
+                  <a:srgbClr val="FFFFFF"/>
+                </a:solidFill>
+                <a:latin typeface="Calibri" pitchFamily="34" charset="0"/>
+                <a:ea typeface="Calibri" pitchFamily="34" charset="-122"/>
+                <a:cs typeface="Calibri" pitchFamily="34" charset="-120"/>
+              </a:rPr>
+              <a:t>Responde como analista de evaluación de política de desarrollo social que revisa expedientes de un programa de cuidados.</a:t>
+            </a:r>
+            <a:endParaRPr lang="en-US" sz="1000" dirty="0"/>
+          </a:p>
+        </p:txBody>
+      </p:sp>
+      <p:sp>
+        <p:nvSpPr>
+          <p:cNvPr id="11" name="Text"/>
+          <p:cNvSpPr txBox="1"/>
+          <p:nvPr/>
+        </p:nvSpPr>
+        <p:spPr>
+          <a:xfrm>
+            <a:off x="766928" y="3090000"/>
+            <a:ext cx="1290000" cy="620000"/>
+          </a:xfrm>
+          <a:prstGeom prst="rect">
+            <a:avLst/>
+          </a:prstGeom>
+          <a:noFill/>
+          <a:ln/>
+        </p:spPr>
+        <p:txBody>
+          <a:bodyPr wrap="square" lIns="0" tIns="0" rIns="0" bIns="0" rtlCol="0" anchor="ctr"/>
+          <a:lstStyle/>
+          <a:p>
+            <a:pPr indent="0" marL="0">
+              <a:buNone/>
+            </a:pPr>
+            <a:r>
+              <a:rPr lang="en-US" sz="950" b="1" dirty="0">
+                <a:solidFill>
+                  <a:srgbClr val="8FC7C7"/>
+                </a:solidFill>
+                <a:latin typeface="Arial" pitchFamily="34" charset="0"/>
+                <a:ea typeface="Arial" pitchFamily="34" charset="-122"/>
+                <a:cs typeface="Arial" pitchFamily="34" charset="-120"/>
+              </a:rPr>
+              <a:t>2. Objetivo</a:t>
+            </a:r>
+            <a:endParaRPr lang="en-US" sz="950" dirty="0"/>
+          </a:p>
+        </p:txBody>
+      </p:sp>
+      <p:sp>
+        <p:nvSpPr>
+          <p:cNvPr id="12" name="Text"/>
+          <p:cNvSpPr txBox="1"/>
+          <p:nvPr/>
+        </p:nvSpPr>
+        <p:spPr>
+          <a:xfrm>
+            <a:off x="2146928" y="3090000"/>
+            <a:ext cx="3848919" cy="620000"/>
+          </a:xfrm>
+          <a:prstGeom prst="rect">
+            <a:avLst/>
+          </a:prstGeom>
+          <a:noFill/>
+          <a:ln/>
+        </p:spPr>
+        <p:txBody>
+          <a:bodyPr wrap="square" lIns="0" tIns="0" rIns="0" bIns="0" rtlCol="0" anchor="ctr"/>
+          <a:lstStyle/>
+          <a:p>
+            <a:pPr indent="0" marL="0">
+              <a:lnSpc>
+                <a:spcPct val="103000"/>
+              </a:lnSpc>
+              <a:buNone/>
+            </a:pPr>
+            <a:r>
+              <a:rPr lang="en-US" sz="1000" dirty="0">
+                <a:solidFill>
+                  <a:srgbClr val="FFFFFF"/>
+                </a:solidFill>
+                <a:latin typeface="Calibri" pitchFamily="34" charset="0"/>
+                <a:ea typeface="Calibri" pitchFamily="34" charset="-122"/>
+                <a:cs typeface="Calibri" pitchFamily="34" charset="-120"/>
+              </a:rPr>
+              <a:t>Tu objetivo es enlistar los documentos que tiene que entregar una persona para incorporarse al Programa de Apoyo al Cuidado Comunitario.</a:t>
+            </a:r>
+            <a:endParaRPr lang="en-US" sz="1000" dirty="0"/>
+          </a:p>
+        </p:txBody>
+      </p:sp>
+      <p:sp>
+        <p:nvSpPr>
+          <p:cNvPr id="13" name="Text"/>
+          <p:cNvSpPr txBox="1"/>
+          <p:nvPr/>
+        </p:nvSpPr>
+        <p:spPr>
+          <a:xfrm>
+            <a:off x="766928" y="3710000"/>
+            <a:ext cx="1290000" cy="620000"/>
+          </a:xfrm>
+          <a:prstGeom prst="rect">
+            <a:avLst/>
+          </a:prstGeom>
+          <a:noFill/>
+          <a:ln/>
+        </p:spPr>
+        <p:txBody>
+          <a:bodyPr wrap="square" lIns="0" tIns="0" rIns="0" bIns="0" rtlCol="0" anchor="ctr"/>
+          <a:lstStyle/>
+          <a:p>
+            <a:pPr indent="0" marL="0">
+              <a:buNone/>
+            </a:pPr>
+            <a:r>
+              <a:rPr lang="en-US" sz="950" b="1" dirty="0">
+                <a:solidFill>
+                  <a:srgbClr val="8FC7C7"/>
+                </a:solidFill>
+                <a:latin typeface="Arial" pitchFamily="34" charset="0"/>
+                <a:ea typeface="Arial" pitchFamily="34" charset="-122"/>
+                <a:cs typeface="Arial" pitchFamily="34" charset="-120"/>
+              </a:rPr>
+              <a:t>3. Contexto</a:t>
+            </a:r>
+            <a:endParaRPr lang="en-US" sz="950" dirty="0"/>
+          </a:p>
+        </p:txBody>
+      </p:sp>
+      <p:sp>
+        <p:nvSpPr>
+          <p:cNvPr id="14" name="Text"/>
+          <p:cNvSpPr txBox="1"/>
+          <p:nvPr/>
+        </p:nvSpPr>
+        <p:spPr>
+          <a:xfrm>
+            <a:off x="2146928" y="3710000"/>
+            <a:ext cx="3848919" cy="620000"/>
+          </a:xfrm>
+          <a:prstGeom prst="rect">
+            <a:avLst/>
+          </a:prstGeom>
+          <a:noFill/>
+          <a:ln/>
+        </p:spPr>
+        <p:txBody>
+          <a:bodyPr wrap="square" lIns="0" tIns="0" rIns="0" bIns="0" rtlCol="0" anchor="ctr"/>
+          <a:lstStyle/>
+          <a:p>
+            <a:pPr indent="0" marL="0">
+              <a:lnSpc>
+                <a:spcPct val="103000"/>
+              </a:lnSpc>
+              <a:buNone/>
+            </a:pPr>
+            <a:r>
+              <a:rPr lang="en-US" sz="1000" dirty="0">
+                <a:solidFill>
+                  <a:srgbClr val="FFFFFF"/>
+                </a:solidFill>
+                <a:latin typeface="Calibri" pitchFamily="34" charset="0"/>
+                <a:ea typeface="Calibri" pitchFamily="34" charset="-122"/>
+                <a:cs typeface="Calibri" pitchFamily="34" charset="-120"/>
+              </a:rPr>
+              <a:t>Con esa lista voy a armar la hoja de verificación del personal de ventanilla. Tiene que entenderse sin abrir las reglas de operación.</a:t>
+            </a:r>
+            <a:endParaRPr lang="en-US" sz="1000" dirty="0"/>
+          </a:p>
+        </p:txBody>
+      </p:sp>
+      <p:sp>
+        <p:nvSpPr>
+          <p:cNvPr id="15" name="Text"/>
+          <p:cNvSpPr txBox="1"/>
+          <p:nvPr/>
+        </p:nvSpPr>
+        <p:spPr>
+          <a:xfrm>
+            <a:off x="6195847" y="2470000"/>
+            <a:ext cx="1290000" cy="620000"/>
+          </a:xfrm>
+          <a:prstGeom prst="rect">
+            <a:avLst/>
+          </a:prstGeom>
+          <a:noFill/>
+          <a:ln/>
+        </p:spPr>
+        <p:txBody>
+          <a:bodyPr wrap="square" lIns="0" tIns="0" rIns="0" bIns="0" rtlCol="0" anchor="ctr"/>
+          <a:lstStyle/>
+          <a:p>
+            <a:pPr indent="0" marL="0">
+              <a:buNone/>
+            </a:pPr>
+            <a:r>
+              <a:rPr lang="en-US" sz="950" b="1" dirty="0">
+                <a:solidFill>
+                  <a:srgbClr val="8FC7C7"/>
+                </a:solidFill>
+                <a:latin typeface="Arial" pitchFamily="34" charset="0"/>
+                <a:ea typeface="Arial" pitchFamily="34" charset="-122"/>
+                <a:cs typeface="Arial" pitchFamily="34" charset="-120"/>
+              </a:rPr>
+              <a:t>4. Insumos</a:t>
+            </a:r>
+            <a:endParaRPr lang="en-US" sz="950" dirty="0"/>
+          </a:p>
+        </p:txBody>
+      </p:sp>
+      <p:sp>
+        <p:nvSpPr>
+          <p:cNvPr id="16" name="Text"/>
+          <p:cNvSpPr txBox="1"/>
+          <p:nvPr/>
+        </p:nvSpPr>
+        <p:spPr>
+          <a:xfrm>
+            <a:off x="7575847" y="2470000"/>
+            <a:ext cx="3848919" cy="620000"/>
+          </a:xfrm>
+          <a:prstGeom prst="rect">
+            <a:avLst/>
+          </a:prstGeom>
+          <a:noFill/>
+          <a:ln/>
+        </p:spPr>
+        <p:txBody>
+          <a:bodyPr wrap="square" lIns="0" tIns="0" rIns="0" bIns="0" rtlCol="0" anchor="ctr"/>
+          <a:lstStyle/>
+          <a:p>
+            <a:pPr indent="0" marL="0">
+              <a:lnSpc>
+                <a:spcPct val="103000"/>
+              </a:lnSpc>
+              <a:buNone/>
+            </a:pPr>
+            <a:r>
+              <a:rPr lang="en-US" sz="1000" dirty="0">
+                <a:solidFill>
+                  <a:srgbClr val="FFFFFF"/>
+                </a:solidFill>
+                <a:latin typeface="Calibri" pitchFamily="34" charset="0"/>
+                <a:ea typeface="Calibri" pitchFamily="34" charset="-122"/>
+                <a:cs typeface="Calibri" pitchFamily="34" charset="-120"/>
+              </a:rPr>
+              <a:t>Te pego abajo el artículo 9 de las Reglas de Operación 2025. Trabaja solo con ese texto, no con tu conocimiento de otros programas ni con lo que haya en internet.</a:t>
+            </a:r>
+            <a:endParaRPr lang="en-US" sz="1000" dirty="0"/>
+          </a:p>
+        </p:txBody>
+      </p:sp>
+      <p:sp>
+        <p:nvSpPr>
+          <p:cNvPr id="17" name="Text"/>
+          <p:cNvSpPr txBox="1"/>
+          <p:nvPr/>
+        </p:nvSpPr>
+        <p:spPr>
+          <a:xfrm>
+            <a:off x="6195847" y="3090000"/>
+            <a:ext cx="1290000" cy="620000"/>
+          </a:xfrm>
+          <a:prstGeom prst="rect">
+            <a:avLst/>
+          </a:prstGeom>
+          <a:noFill/>
+          <a:ln/>
+        </p:spPr>
+        <p:txBody>
+          <a:bodyPr wrap="square" lIns="0" tIns="0" rIns="0" bIns="0" rtlCol="0" anchor="ctr"/>
+          <a:lstStyle/>
+          <a:p>
+            <a:pPr indent="0" marL="0">
+              <a:buNone/>
+            </a:pPr>
+            <a:r>
+              <a:rPr lang="en-US" sz="950" b="1" dirty="0">
+                <a:solidFill>
+                  <a:srgbClr val="8FC7C7"/>
+                </a:solidFill>
+                <a:latin typeface="Arial" pitchFamily="34" charset="0"/>
+                <a:ea typeface="Arial" pitchFamily="34" charset="-122"/>
+                <a:cs typeface="Arial" pitchFamily="34" charset="-120"/>
+              </a:rPr>
+              <a:t>5. Restricciones</a:t>
+            </a:r>
+            <a:endParaRPr lang="en-US" sz="950" dirty="0"/>
+          </a:p>
+        </p:txBody>
+      </p:sp>
+      <p:sp>
+        <p:nvSpPr>
+          <p:cNvPr id="18" name="Text"/>
+          <p:cNvSpPr txBox="1"/>
+          <p:nvPr/>
+        </p:nvSpPr>
+        <p:spPr>
+          <a:xfrm>
+            <a:off x="7575847" y="3090000"/>
+            <a:ext cx="3848919" cy="620000"/>
+          </a:xfrm>
+          <a:prstGeom prst="rect">
+            <a:avLst/>
+          </a:prstGeom>
+          <a:noFill/>
+          <a:ln/>
+        </p:spPr>
+        <p:txBody>
+          <a:bodyPr wrap="square" lIns="0" tIns="0" rIns="0" bIns="0" rtlCol="0" anchor="ctr"/>
+          <a:lstStyle/>
+          <a:p>
+            <a:pPr indent="0" marL="0">
+              <a:lnSpc>
+                <a:spcPct val="103000"/>
+              </a:lnSpc>
+              <a:buNone/>
+            </a:pPr>
+            <a:r>
+              <a:rPr lang="en-US" sz="1000" dirty="0">
+                <a:solidFill>
+                  <a:srgbClr val="FFFFFF"/>
+                </a:solidFill>
+                <a:latin typeface="Calibri" pitchFamily="34" charset="0"/>
+                <a:ea typeface="Calibri" pitchFamily="34" charset="-122"/>
+                <a:cs typeface="Calibri" pitchFamily="34" charset="-120"/>
+              </a:rPr>
+              <a:t>Escríbelo en lenguaje claro, sin copiar la redacción jurídica. Si algo no está en el texto, dímelo en lugar de suponerlo.</a:t>
+            </a:r>
+            <a:endParaRPr lang="en-US" sz="1000" dirty="0"/>
+          </a:p>
+        </p:txBody>
+      </p:sp>
+      <p:sp>
+        <p:nvSpPr>
+          <p:cNvPr id="19" name="Text"/>
+          <p:cNvSpPr txBox="1"/>
+          <p:nvPr/>
+        </p:nvSpPr>
+        <p:spPr>
+          <a:xfrm>
+            <a:off x="6195847" y="3710000"/>
+            <a:ext cx="1290000" cy="620000"/>
+          </a:xfrm>
+          <a:prstGeom prst="rect">
+            <a:avLst/>
+          </a:prstGeom>
+          <a:noFill/>
+          <a:ln/>
+        </p:spPr>
+        <p:txBody>
+          <a:bodyPr wrap="square" lIns="0" tIns="0" rIns="0" bIns="0" rtlCol="0" anchor="ctr"/>
+          <a:lstStyle/>
+          <a:p>
+            <a:pPr indent="0" marL="0">
+              <a:buNone/>
+            </a:pPr>
+            <a:r>
+              <a:rPr lang="en-US" sz="950" b="1" dirty="0">
+                <a:solidFill>
+                  <a:srgbClr val="8FC7C7"/>
+                </a:solidFill>
+                <a:latin typeface="Arial" pitchFamily="34" charset="0"/>
+                <a:ea typeface="Arial" pitchFamily="34" charset="-122"/>
+                <a:cs typeface="Arial" pitchFamily="34" charset="-120"/>
+              </a:rPr>
+              <a:t>6. Formato de salida</a:t>
+            </a:r>
+            <a:endParaRPr lang="en-US" sz="950" dirty="0"/>
+          </a:p>
+        </p:txBody>
+      </p:sp>
+      <p:sp>
+        <p:nvSpPr>
+          <p:cNvPr id="20" name="Text"/>
+          <p:cNvSpPr txBox="1"/>
+          <p:nvPr/>
+        </p:nvSpPr>
+        <p:spPr>
+          <a:xfrm>
+            <a:off x="7575847" y="3710000"/>
+            <a:ext cx="3848919" cy="620000"/>
+          </a:xfrm>
+          <a:prstGeom prst="rect">
+            <a:avLst/>
+          </a:prstGeom>
+          <a:noFill/>
+          <a:ln/>
+        </p:spPr>
+        <p:txBody>
+          <a:bodyPr wrap="square" lIns="0" tIns="0" rIns="0" bIns="0" rtlCol="0" anchor="ctr"/>
+          <a:lstStyle/>
+          <a:p>
+            <a:pPr indent="0" marL="0">
+              <a:lnSpc>
+                <a:spcPct val="103000"/>
+              </a:lnSpc>
+              <a:buNone/>
+            </a:pPr>
+            <a:r>
+              <a:rPr lang="en-US" sz="1000" dirty="0">
+                <a:solidFill>
+                  <a:srgbClr val="FFFFFF"/>
+                </a:solidFill>
+                <a:latin typeface="Calibri" pitchFamily="34" charset="0"/>
+                <a:ea typeface="Calibri" pitchFamily="34" charset="-122"/>
+                <a:cs typeface="Calibri" pitchFamily="34" charset="-120"/>
+              </a:rPr>
+              <a:t>Una lista numerada, un renglón por documento, agrupada en dos partes: primero los de la persona cuidadora principal y después los de la persona que requiere cuidados.</a:t>
+            </a:r>
+            <a:endParaRPr lang="en-US" sz="1000" dirty="0"/>
+          </a:p>
+        </p:txBody>
+      </p:sp>
+      <p:sp>
+        <p:nvSpPr>
+          <p:cNvPr id="21" name="Shape"/>
+          <p:cNvSpPr/>
+          <p:nvPr/>
+        </p:nvSpPr>
+        <p:spPr>
+          <a:xfrm>
+            <a:off x="566928" y="4450000"/>
+            <a:ext cx="11057839" cy="962000"/>
+          </a:xfrm>
+          <a:prstGeom prst="roundRect">
+            <a:avLst>
+              <a:gd name="adj" fmla="val 8235"/>
+            </a:avLst>
+          </a:prstGeom>
+          <a:solidFill>
+            <a:srgbClr val="F7E4D8"/>
+          </a:solidFill>
+          <a:ln w="12700">
+            <a:solidFill>
+              <a:srgbClr val="F7E4D8"/>
+            </a:solidFill>
+            <a:prstDash val="solid"/>
+          </a:ln>
+        </p:spPr>
+      </p:sp>
+      <p:sp>
+        <p:nvSpPr>
+          <p:cNvPr id="22" name="Text"/>
+          <p:cNvSpPr txBox="1"/>
+          <p:nvPr/>
+        </p:nvSpPr>
+        <p:spPr>
+          <a:xfrm>
+            <a:off x="804672" y="4450000"/>
+            <a:ext cx="10582351" cy="962000"/>
+          </a:xfrm>
+          <a:prstGeom prst="rect">
+            <a:avLst/>
+          </a:prstGeom>
+          <a:noFill/>
+          <a:ln/>
+        </p:spPr>
+        <p:txBody>
+          <a:bodyPr wrap="square" lIns="0" tIns="0" rIns="0" bIns="0" rtlCol="0" anchor="ctr"/>
+          <a:lstStyle/>
+          <a:p>
+            <a:pPr indent="0" marL="0">
+              <a:lnSpc>
+                <a:spcPct val="110000"/>
+              </a:lnSpc>
+              <a:buNone/>
+            </a:pPr>
+            <a:r>
+              <a:rPr lang="en-US" sz="1300" dirty="0">
+                <a:solidFill>
+                  <a:srgbClr val="16262E"/>
+                </a:solidFill>
+                <a:latin typeface="Calibri" pitchFamily="34" charset="0"/>
+                <a:ea typeface="Calibri" pitchFamily="34" charset="-122"/>
+                <a:cs typeface="Calibri" pitchFamily="34" charset="-120"/>
+              </a:rPr>
+              <a:t>Seis casillas llenas, el texto de la norma enfrente y la prohibición expresa de usar otras fuentes: está mejor escrito que casi todo lo que sale de una oficina. Aun así devolvió un requisito que el artículo 9 no pide, y no por azar. Pedir lenguaje claro en vez de la fracción exacta, y una lista agrupada por persona, dejaron una casilla vacía que el asistente completó.</a:t>
+            </a:r>
+            <a:endParaRPr lang="en-US" sz="1300" dirty="0"/>
+          </a:p>
+        </p:txBody>
+      </p:sp>
+      <p:sp>
+        <p:nvSpPr>
+          <p:cNvPr id="23" name="Text"/>
+          <p:cNvSpPr txBox="1"/>
+          <p:nvPr/>
+        </p:nvSpPr>
+        <p:spPr>
+          <a:xfrm>
+            <a:off x="566928" y="6270000"/>
+            <a:ext cx="11057839" cy="240000"/>
+          </a:xfrm>
+          <a:prstGeom prst="rect">
+            <a:avLst/>
+          </a:prstGeom>
+          <a:noFill/>
+          <a:ln/>
+        </p:spPr>
+        <p:txBody>
+          <a:bodyPr wrap="square" lIns="0" tIns="0" rIns="0" bIns="0" rtlCol="0" anchor="t"/>
+          <a:lstStyle/>
+          <a:p>
+            <a:pPr indent="0" marL="0">
+              <a:buNone/>
+            </a:pPr>
+            <a:r>
+              <a:rPr lang="en-US" sz="1000" dirty="0">
+                <a:solidFill>
+                  <a:srgbClr val="5A6B73"/>
+                </a:solidFill>
+                <a:latin typeface="Calibri" pitchFamily="34" charset="0"/>
+                <a:ea typeface="Calibri" pitchFamily="34" charset="-122"/>
+                <a:cs typeface="Calibri" pitchFamily="34" charset="-120"/>
+              </a:rPr>
+              <a:t>Dato verde: el programa y los expedientes son ficticios. Con expedientes reales esto es información amarilla y solo se escribe en Copilot Chat con la cuenta del Instituto.</a:t>
+            </a:r>
+            <a:endParaRPr lang="en-US" sz="1000" dirty="0"/>
+          </a:p>
+        </p:txBody>
+      </p:sp>
+    </p:spTree>
+  </p:cSld>
+  <p:clrMapOvr>
+    <a:masterClrMapping/>
+  </p:clrMapOvr>
+</p:sld>
+</file>
+
+<file path=ppt/slides/slide29.xml><?xml version="1.0" encoding="utf-8"?>
+<p:sld xmlns:a="http://schemas.openxmlformats.org/drawingml/2006/main" xmlns:r="http://schemas.openxmlformats.org/officeDocument/2006/relationships" xmlns:p="http://schemas.openxmlformats.org/presentationml/2006/main">
+  <p:cSld name="P_atribucion">
+    <p:spTree>
+      <p:nvGrpSpPr>
+        <p:cNvPr id="1" name=""/>
+        <p:cNvGrpSpPr/>
+        <p:nvPr/>
+      </p:nvGrpSpPr>
+      <p:grpSpPr>
+        <a:xfrm>
+          <a:off x="0" y="0"/>
+          <a:ext cx="0" cy="0"/>
+          <a:chOff x="0" y="0"/>
+          <a:chExt cx="0" cy="0"/>
+        </a:xfrm>
+      </p:grpSpPr>
+      <p:sp>
+        <p:nvSpPr>
+          <p:cNvPr id="2" name="Text"/>
+          <p:cNvSpPr txBox="1"/>
+          <p:nvPr/>
+        </p:nvSpPr>
+        <p:spPr>
+          <a:xfrm>
+            <a:off x="566928" y="402336"/>
+            <a:ext cx="11057839" cy="749808"/>
+          </a:xfrm>
+          <a:prstGeom prst="rect">
+            <a:avLst/>
+          </a:prstGeom>
+          <a:noFill/>
+          <a:ln/>
+        </p:spPr>
+        <p:txBody>
+          <a:bodyPr wrap="square" lIns="0" tIns="0" rIns="0" bIns="0" rtlCol="0" anchor="t"/>
+          <a:lstStyle/>
+          <a:p>
+            <a:pPr algn="l" indent="0" marL="0">
+              <a:buNone/>
+            </a:pPr>
+            <a:r>
+              <a:rPr lang="en-US" sz="3200" b="1" dirty="0">
+                <a:solidFill>
+                  <a:srgbClr val="16262E"/>
+                </a:solidFill>
+                <a:latin typeface="Arial" pitchFamily="34" charset="0"/>
+                <a:ea typeface="Arial" pitchFamily="34" charset="-122"/>
+                <a:cs typeface="Arial" pitchFamily="34" charset="-120"/>
+              </a:rPr>
+              <a:t>El prompt del que salen esas dos filas</a:t>
+            </a:r>
+            <a:endParaRPr lang="en-US" sz="3200" dirty="0"/>
+          </a:p>
+        </p:txBody>
+      </p:sp>
+      <p:sp>
+        <p:nvSpPr>
+          <p:cNvPr id="3" name="Text"/>
+          <p:cNvSpPr txBox="1"/>
+          <p:nvPr/>
+        </p:nvSpPr>
+        <p:spPr>
+          <a:xfrm>
+            <a:off x="566928" y="1280160"/>
+            <a:ext cx="11057839" cy="731520"/>
+          </a:xfrm>
+          <a:prstGeom prst="rect">
+            <a:avLst/>
+          </a:prstGeom>
+          <a:noFill/>
+          <a:ln/>
+        </p:spPr>
+        <p:txBody>
+          <a:bodyPr wrap="square" lIns="0" tIns="0" rIns="0" bIns="0" rtlCol="0" anchor="t"/>
+          <a:lstStyle/>
+          <a:p>
+            <a:pPr indent="0" marL="0">
+              <a:lnSpc>
+                <a:spcPct val="108000"/>
+              </a:lnSpc>
+              <a:buNone/>
+            </a:pPr>
+            <a:r>
+              <a:rPr lang="en-US" sz="1500" dirty="0">
+                <a:solidFill>
+                  <a:srgbClr val="5A6B73"/>
+                </a:solidFill>
+                <a:latin typeface="Calibri" pitchFamily="34" charset="0"/>
+                <a:ea typeface="Calibri" pitchFamily="34" charset="-122"/>
+                <a:cs typeface="Calibri" pitchFamily="34" charset="-120"/>
+              </a:rPr>
+              <a:t>Seis casillas puestas, insumos acotados y prohibido parafrasear. Aun así una fila no se sostiene.</a:t>
+            </a:r>
+            <a:endParaRPr lang="en-US" sz="1500" dirty="0"/>
+          </a:p>
+        </p:txBody>
+      </p:sp>
+      <p:sp>
+        <p:nvSpPr>
+          <p:cNvPr id="4" name="Shape"/>
+          <p:cNvSpPr/>
+          <p:nvPr/>
+        </p:nvSpPr>
+        <p:spPr>
+          <a:xfrm>
+            <a:off x="566928" y="1700000"/>
+            <a:ext cx="11057839" cy="300000"/>
+          </a:xfrm>
+          <a:prstGeom prst="roundRect">
+            <a:avLst>
+              <a:gd name="adj" fmla="val 20000"/>
+            </a:avLst>
+          </a:prstGeom>
+          <a:solidFill>
+            <a:srgbClr val="D7E7E7"/>
+          </a:solidFill>
+          <a:ln w="12700">
+            <a:solidFill>
+              <a:srgbClr val="D7E7E7"/>
+            </a:solidFill>
+            <a:prstDash val="solid"/>
+          </a:ln>
+        </p:spPr>
+      </p:sp>
+      <p:sp>
+        <p:nvSpPr>
+          <p:cNvPr id="5" name="Text"/>
+          <p:cNvSpPr txBox="1"/>
+          <p:nvPr/>
+        </p:nvSpPr>
+        <p:spPr>
+          <a:xfrm>
+            <a:off x="766928" y="1700000"/>
+            <a:ext cx="1700000" cy="300000"/>
+          </a:xfrm>
+          <a:prstGeom prst="rect">
+            <a:avLst/>
+          </a:prstGeom>
+          <a:noFill/>
+          <a:ln/>
+        </p:spPr>
+        <p:txBody>
+          <a:bodyPr wrap="square" lIns="0" tIns="0" rIns="0" bIns="0" rtlCol="0" anchor="ctr"/>
+          <a:lstStyle/>
+          <a:p>
+            <a:pPr indent="0" marL="0">
+              <a:buNone/>
+            </a:pPr>
+            <a:r>
+              <a:rPr lang="en-US" sz="950" b="1" spc="100" kern="0" dirty="0">
+                <a:solidFill>
+                  <a:srgbClr val="2E7D7D"/>
+                </a:solidFill>
+                <a:latin typeface="Arial" pitchFamily="34" charset="0"/>
+                <a:ea typeface="Arial" pitchFamily="34" charset="-122"/>
+                <a:cs typeface="Arial" pitchFamily="34" charset="-120"/>
+              </a:rPr>
+              <a:t>DE DÓNDE SALE</a:t>
+            </a:r>
+            <a:endParaRPr lang="en-US" sz="950" dirty="0"/>
+          </a:p>
+        </p:txBody>
+      </p:sp>
+      <p:sp>
+        <p:nvSpPr>
+          <p:cNvPr id="6" name="Text"/>
+          <p:cNvSpPr txBox="1"/>
+          <p:nvPr/>
+        </p:nvSpPr>
+        <p:spPr>
+          <a:xfrm>
+            <a:off x="2516928" y="1700000"/>
+            <a:ext cx="8907839" cy="300000"/>
+          </a:xfrm>
+          <a:prstGeom prst="rect">
+            <a:avLst/>
+          </a:prstGeom>
+          <a:noFill/>
+          <a:ln/>
+        </p:spPr>
+        <p:txBody>
+          <a:bodyPr wrap="square" lIns="0" tIns="0" rIns="0" bIns="0" rtlCol="0" anchor="ctr"/>
+          <a:lstStyle/>
+          <a:p>
+            <a:pPr indent="0" marL="0">
+              <a:buNone/>
+            </a:pPr>
+            <a:r>
+              <a:rPr lang="en-US" sz="1100" dirty="0">
+                <a:solidFill>
+                  <a:srgbClr val="16262E"/>
+                </a:solidFill>
+                <a:latin typeface="Calibri" pitchFamily="34" charset="0"/>
+                <a:ea typeface="Calibri" pitchFamily="34" charset="-122"/>
+                <a:cs typeface="Calibri" pitchFamily="34" charset="-120"/>
+              </a:rPr>
+              <a:t>Los artículos 11 y 14 del marco normativo, pegados en el chat. El prompt y la respuesta son una reconstrucción; las dos citas sí son textuales.</a:t>
+            </a:r>
+            <a:endParaRPr lang="en-US" sz="1100" dirty="0"/>
+          </a:p>
+        </p:txBody>
+      </p:sp>
+      <p:sp>
+        <p:nvSpPr>
+          <p:cNvPr id="7" name="Shape"/>
+          <p:cNvSpPr/>
+          <p:nvPr/>
+        </p:nvSpPr>
+        <p:spPr>
+          <a:xfrm>
+            <a:off x="566928" y="2080000"/>
+            <a:ext cx="11057839" cy="2270000"/>
+          </a:xfrm>
+          <a:prstGeom prst="roundRect">
+            <a:avLst>
+              <a:gd name="adj" fmla="val 2933"/>
+            </a:avLst>
+          </a:prstGeom>
+          <a:solidFill>
+            <a:srgbClr val="16262E"/>
+          </a:solidFill>
+          <a:ln w="12700">
+            <a:solidFill>
+              <a:srgbClr val="16262E"/>
+            </a:solidFill>
+            <a:prstDash val="solid"/>
+          </a:ln>
+        </p:spPr>
+      </p:sp>
+      <p:sp>
+        <p:nvSpPr>
+          <p:cNvPr id="8" name="Text"/>
+          <p:cNvSpPr txBox="1"/>
+          <p:nvPr/>
+        </p:nvSpPr>
+        <p:spPr>
+          <a:xfrm>
+            <a:off x="804672" y="2190000"/>
+            <a:ext cx="10582351" cy="240000"/>
+          </a:xfrm>
+          <a:prstGeom prst="rect">
+            <a:avLst/>
+          </a:prstGeom>
+          <a:noFill/>
+          <a:ln/>
+        </p:spPr>
+        <p:txBody>
+          <a:bodyPr wrap="square" lIns="0" tIns="0" rIns="0" bIns="0" rtlCol="0" anchor="t"/>
+          <a:lstStyle/>
+          <a:p>
+            <a:pPr indent="0" marL="0">
+              <a:buNone/>
+            </a:pPr>
+            <a:r>
+              <a:rPr lang="en-US" sz="950" b="1" spc="120" kern="0" dirty="0">
+                <a:solidFill>
+                  <a:srgbClr val="8FC7C7"/>
+                </a:solidFill>
+                <a:latin typeface="Arial" pitchFamily="34" charset="0"/>
+                <a:ea typeface="Arial" pitchFamily="34" charset="-122"/>
+                <a:cs typeface="Arial" pitchFamily="34" charset="-120"/>
+              </a:rPr>
+              <a:t>EL PROMPT, CON LAS SEIS CASILLAS</a:t>
+            </a:r>
+            <a:endParaRPr lang="en-US" sz="950" dirty="0"/>
+          </a:p>
+        </p:txBody>
+      </p:sp>
+      <p:sp>
+        <p:nvSpPr>
+          <p:cNvPr id="9" name="Text"/>
+          <p:cNvSpPr txBox="1"/>
+          <p:nvPr/>
+        </p:nvSpPr>
+        <p:spPr>
+          <a:xfrm>
+            <a:off x="766928" y="2470000"/>
+            <a:ext cx="1290000" cy="620000"/>
+          </a:xfrm>
+          <a:prstGeom prst="rect">
+            <a:avLst/>
+          </a:prstGeom>
+          <a:noFill/>
+          <a:ln/>
+        </p:spPr>
+        <p:txBody>
+          <a:bodyPr wrap="square" lIns="0" tIns="0" rIns="0" bIns="0" rtlCol="0" anchor="ctr"/>
+          <a:lstStyle/>
+          <a:p>
+            <a:pPr indent="0" marL="0">
+              <a:buNone/>
+            </a:pPr>
+            <a:r>
+              <a:rPr lang="en-US" sz="950" b="1" dirty="0">
+                <a:solidFill>
+                  <a:srgbClr val="8FC7C7"/>
+                </a:solidFill>
+                <a:latin typeface="Arial" pitchFamily="34" charset="0"/>
+                <a:ea typeface="Arial" pitchFamily="34" charset="-122"/>
+                <a:cs typeface="Arial" pitchFamily="34" charset="-120"/>
+              </a:rPr>
+              <a:t>1. Rol</a:t>
+            </a:r>
+            <a:endParaRPr lang="en-US" sz="950" dirty="0"/>
+          </a:p>
+        </p:txBody>
+      </p:sp>
+      <p:sp>
+        <p:nvSpPr>
+          <p:cNvPr id="10" name="Text"/>
+          <p:cNvSpPr txBox="1"/>
+          <p:nvPr/>
+        </p:nvSpPr>
+        <p:spPr>
+          <a:xfrm>
+            <a:off x="2146928" y="2470000"/>
+            <a:ext cx="3848919" cy="620000"/>
+          </a:xfrm>
+          <a:prstGeom prst="rect">
+            <a:avLst/>
+          </a:prstGeom>
+          <a:noFill/>
+          <a:ln/>
+        </p:spPr>
+        <p:txBody>
+          <a:bodyPr wrap="square" lIns="0" tIns="0" rIns="0" bIns="0" rtlCol="0" anchor="ctr"/>
+          <a:lstStyle/>
+          <a:p>
+            <a:pPr indent="0" marL="0">
+              <a:lnSpc>
+                <a:spcPct val="103000"/>
+              </a:lnSpc>
+              <a:buNone/>
+            </a:pPr>
+            <a:r>
+              <a:rPr lang="en-US" sz="1000" dirty="0">
+                <a:solidFill>
+                  <a:srgbClr val="FFFFFF"/>
+                </a:solidFill>
+                <a:latin typeface="Calibri" pitchFamily="34" charset="0"/>
+                <a:ea typeface="Calibri" pitchFamily="34" charset="-122"/>
+                <a:cs typeface="Calibri" pitchFamily="34" charset="-120"/>
+              </a:rPr>
+              <a:t>Responde como analista de evaluación de política de desarrollo social que está redactando el apartado de hallazgos de una evaluación estatal.</a:t>
+            </a:r>
+            <a:endParaRPr lang="en-US" sz="1000" dirty="0"/>
+          </a:p>
+        </p:txBody>
+      </p:sp>
+      <p:sp>
+        <p:nvSpPr>
+          <p:cNvPr id="11" name="Text"/>
+          <p:cNvSpPr txBox="1"/>
+          <p:nvPr/>
+        </p:nvSpPr>
+        <p:spPr>
+          <a:xfrm>
+            <a:off x="766928" y="3090000"/>
+            <a:ext cx="1290000" cy="620000"/>
+          </a:xfrm>
+          <a:prstGeom prst="rect">
+            <a:avLst/>
+          </a:prstGeom>
+          <a:noFill/>
+          <a:ln/>
+        </p:spPr>
+        <p:txBody>
+          <a:bodyPr wrap="square" lIns="0" tIns="0" rIns="0" bIns="0" rtlCol="0" anchor="ctr"/>
+          <a:lstStyle/>
+          <a:p>
+            <a:pPr indent="0" marL="0">
+              <a:buNone/>
+            </a:pPr>
+            <a:r>
+              <a:rPr lang="en-US" sz="950" b="1" dirty="0">
+                <a:solidFill>
+                  <a:srgbClr val="8FC7C7"/>
+                </a:solidFill>
+                <a:latin typeface="Arial" pitchFamily="34" charset="0"/>
+                <a:ea typeface="Arial" pitchFamily="34" charset="-122"/>
+                <a:cs typeface="Arial" pitchFamily="34" charset="-120"/>
+              </a:rPr>
+              <a:t>2. Objetivo</a:t>
+            </a:r>
+            <a:endParaRPr lang="en-US" sz="950" dirty="0"/>
+          </a:p>
+        </p:txBody>
+      </p:sp>
+      <p:sp>
+        <p:nvSpPr>
+          <p:cNvPr id="12" name="Text"/>
+          <p:cNvSpPr txBox="1"/>
+          <p:nvPr/>
+        </p:nvSpPr>
+        <p:spPr>
+          <a:xfrm>
+            <a:off x="2146928" y="3090000"/>
+            <a:ext cx="3848919" cy="620000"/>
+          </a:xfrm>
+          <a:prstGeom prst="rect">
+            <a:avLst/>
+          </a:prstGeom>
+          <a:noFill/>
+          <a:ln/>
+        </p:spPr>
+        <p:txBody>
+          <a:bodyPr wrap="square" lIns="0" tIns="0" rIns="0" bIns="0" rtlCol="0" anchor="ctr"/>
+          <a:lstStyle/>
+          <a:p>
+            <a:pPr indent="0" marL="0">
+              <a:lnSpc>
+                <a:spcPct val="103000"/>
+              </a:lnSpc>
+              <a:buNone/>
+            </a:pPr>
+            <a:r>
+              <a:rPr lang="en-US" sz="1000" dirty="0">
+                <a:solidFill>
+                  <a:srgbClr val="FFFFFF"/>
+                </a:solidFill>
+                <a:latin typeface="Calibri" pitchFamily="34" charset="0"/>
+                <a:ea typeface="Calibri" pitchFamily="34" charset="-122"/>
+                <a:cs typeface="Calibri" pitchFamily="34" charset="-120"/>
+              </a:rPr>
+              <a:t>Identifica los hallazgos del marco normativo sobre el monto del apoyo y sobre su compatibilidad con otros programas.</a:t>
+            </a:r>
+            <a:endParaRPr lang="en-US" sz="1000" dirty="0"/>
+          </a:p>
+        </p:txBody>
+      </p:sp>
+      <p:sp>
+        <p:nvSpPr>
+          <p:cNvPr id="13" name="Text"/>
+          <p:cNvSpPr txBox="1"/>
+          <p:nvPr/>
+        </p:nvSpPr>
+        <p:spPr>
+          <a:xfrm>
+            <a:off x="766928" y="3710000"/>
+            <a:ext cx="1290000" cy="620000"/>
+          </a:xfrm>
+          <a:prstGeom prst="rect">
+            <a:avLst/>
+          </a:prstGeom>
+          <a:noFill/>
+          <a:ln/>
+        </p:spPr>
+        <p:txBody>
+          <a:bodyPr wrap="square" lIns="0" tIns="0" rIns="0" bIns="0" rtlCol="0" anchor="ctr"/>
+          <a:lstStyle/>
+          <a:p>
+            <a:pPr indent="0" marL="0">
+              <a:buNone/>
+            </a:pPr>
+            <a:r>
+              <a:rPr lang="en-US" sz="950" b="1" dirty="0">
+                <a:solidFill>
+                  <a:srgbClr val="8FC7C7"/>
+                </a:solidFill>
+                <a:latin typeface="Arial" pitchFamily="34" charset="0"/>
+                <a:ea typeface="Arial" pitchFamily="34" charset="-122"/>
+                <a:cs typeface="Arial" pitchFamily="34" charset="-120"/>
+              </a:rPr>
+              <a:t>3. Contexto</a:t>
+            </a:r>
+            <a:endParaRPr lang="en-US" sz="950" dirty="0"/>
+          </a:p>
+        </p:txBody>
+      </p:sp>
+      <p:sp>
+        <p:nvSpPr>
+          <p:cNvPr id="14" name="Text"/>
+          <p:cNvSpPr txBox="1"/>
+          <p:nvPr/>
+        </p:nvSpPr>
+        <p:spPr>
+          <a:xfrm>
+            <a:off x="2146928" y="3710000"/>
+            <a:ext cx="3848919" cy="620000"/>
+          </a:xfrm>
+          <a:prstGeom prst="rect">
+            <a:avLst/>
+          </a:prstGeom>
+          <a:noFill/>
+          <a:ln/>
+        </p:spPr>
+        <p:txBody>
+          <a:bodyPr wrap="square" lIns="0" tIns="0" rIns="0" bIns="0" rtlCol="0" anchor="ctr"/>
+          <a:lstStyle/>
+          <a:p>
+            <a:pPr indent="0" marL="0">
+              <a:lnSpc>
+                <a:spcPct val="103000"/>
+              </a:lnSpc>
+              <a:buNone/>
+            </a:pPr>
+            <a:r>
+              <a:rPr lang="en-US" sz="1000" dirty="0">
+                <a:solidFill>
+                  <a:srgbClr val="FFFFFF"/>
+                </a:solidFill>
+                <a:latin typeface="Calibri" pitchFamily="34" charset="0"/>
+                <a:ea typeface="Calibri" pitchFamily="34" charset="-122"/>
+                <a:cs typeface="Calibri" pitchFamily="34" charset="-120"/>
+              </a:rPr>
+              <a:t>El apartado tiene que pronunciarse sobre si el apoyo responde a las necesidades de cuidado de los hogares. Cada renglón que devuelvas va a ser una fila de mi matriz de evidencia.</a:t>
+            </a:r>
+            <a:endParaRPr lang="en-US" sz="1000" dirty="0"/>
+          </a:p>
+        </p:txBody>
+      </p:sp>
+      <p:sp>
+        <p:nvSpPr>
+          <p:cNvPr id="15" name="Text"/>
+          <p:cNvSpPr txBox="1"/>
+          <p:nvPr/>
+        </p:nvSpPr>
+        <p:spPr>
+          <a:xfrm>
+            <a:off x="6195847" y="2470000"/>
+            <a:ext cx="1290000" cy="620000"/>
+          </a:xfrm>
+          <a:prstGeom prst="rect">
+            <a:avLst/>
+          </a:prstGeom>
+          <a:noFill/>
+          <a:ln/>
+        </p:spPr>
+        <p:txBody>
+          <a:bodyPr wrap="square" lIns="0" tIns="0" rIns="0" bIns="0" rtlCol="0" anchor="ctr"/>
+          <a:lstStyle/>
+          <a:p>
+            <a:pPr indent="0" marL="0">
+              <a:buNone/>
+            </a:pPr>
+            <a:r>
+              <a:rPr lang="en-US" sz="950" b="1" dirty="0">
+                <a:solidFill>
+                  <a:srgbClr val="8FC7C7"/>
+                </a:solidFill>
+                <a:latin typeface="Arial" pitchFamily="34" charset="0"/>
+                <a:ea typeface="Arial" pitchFamily="34" charset="-122"/>
+                <a:cs typeface="Arial" pitchFamily="34" charset="-120"/>
+              </a:rPr>
+              <a:t>4. Insumos</a:t>
+            </a:r>
+            <a:endParaRPr lang="en-US" sz="950" dirty="0"/>
+          </a:p>
+        </p:txBody>
+      </p:sp>
+      <p:sp>
+        <p:nvSpPr>
+          <p:cNvPr id="16" name="Text"/>
+          <p:cNvSpPr txBox="1"/>
+          <p:nvPr/>
+        </p:nvSpPr>
+        <p:spPr>
+          <a:xfrm>
+            <a:off x="7575847" y="2470000"/>
+            <a:ext cx="3848919" cy="620000"/>
+          </a:xfrm>
+          <a:prstGeom prst="rect">
+            <a:avLst/>
+          </a:prstGeom>
+          <a:noFill/>
+          <a:ln/>
+        </p:spPr>
+        <p:txBody>
+          <a:bodyPr wrap="square" lIns="0" tIns="0" rIns="0" bIns="0" rtlCol="0" anchor="ctr"/>
+          <a:lstStyle/>
+          <a:p>
+            <a:pPr indent="0" marL="0">
+              <a:lnSpc>
+                <a:spcPct val="103000"/>
+              </a:lnSpc>
+              <a:buNone/>
+            </a:pPr>
+            <a:r>
+              <a:rPr lang="en-US" sz="1000" dirty="0">
+                <a:solidFill>
+                  <a:srgbClr val="FFFFFF"/>
+                </a:solidFill>
+                <a:latin typeface="Calibri" pitchFamily="34" charset="0"/>
+                <a:ea typeface="Calibri" pitchFamily="34" charset="-122"/>
+                <a:cs typeface="Calibri" pitchFamily="34" charset="-120"/>
+              </a:rPr>
+              <a:t>Te pego abajo los artículos 11 y 14 de las Reglas de Operación 2025. Trabaja solo con ese texto, no con tu conocimiento general ni con lo que haya en internet.</a:t>
+            </a:r>
+            <a:endParaRPr lang="en-US" sz="1000" dirty="0"/>
+          </a:p>
+        </p:txBody>
+      </p:sp>
+      <p:sp>
+        <p:nvSpPr>
+          <p:cNvPr id="17" name="Text"/>
+          <p:cNvSpPr txBox="1"/>
+          <p:nvPr/>
+        </p:nvSpPr>
+        <p:spPr>
+          <a:xfrm>
+            <a:off x="6195847" y="3090000"/>
+            <a:ext cx="1290000" cy="620000"/>
+          </a:xfrm>
+          <a:prstGeom prst="rect">
+            <a:avLst/>
+          </a:prstGeom>
+          <a:noFill/>
+          <a:ln/>
+        </p:spPr>
+        <p:txBody>
+          <a:bodyPr wrap="square" lIns="0" tIns="0" rIns="0" bIns="0" rtlCol="0" anchor="ctr"/>
+          <a:lstStyle/>
+          <a:p>
+            <a:pPr indent="0" marL="0">
+              <a:buNone/>
+            </a:pPr>
+            <a:r>
+              <a:rPr lang="en-US" sz="950" b="1" dirty="0">
+                <a:solidFill>
+                  <a:srgbClr val="8FC7C7"/>
+                </a:solidFill>
+                <a:latin typeface="Arial" pitchFamily="34" charset="0"/>
+                <a:ea typeface="Arial" pitchFamily="34" charset="-122"/>
+                <a:cs typeface="Arial" pitchFamily="34" charset="-120"/>
+              </a:rPr>
+              <a:t>5. Restricciones</a:t>
+            </a:r>
+            <a:endParaRPr lang="en-US" sz="950" dirty="0"/>
+          </a:p>
+        </p:txBody>
+      </p:sp>
+      <p:sp>
+        <p:nvSpPr>
+          <p:cNvPr id="18" name="Text"/>
+          <p:cNvSpPr txBox="1"/>
+          <p:nvPr/>
+        </p:nvSpPr>
+        <p:spPr>
+          <a:xfrm>
+            <a:off x="7575847" y="3090000"/>
+            <a:ext cx="3848919" cy="620000"/>
+          </a:xfrm>
+          <a:prstGeom prst="rect">
+            <a:avLst/>
+          </a:prstGeom>
+          <a:noFill/>
+          <a:ln/>
+        </p:spPr>
+        <p:txBody>
+          <a:bodyPr wrap="square" lIns="0" tIns="0" rIns="0" bIns="0" rtlCol="0" anchor="ctr"/>
+          <a:lstStyle/>
+          <a:p>
+            <a:pPr indent="0" marL="0">
+              <a:lnSpc>
+                <a:spcPct val="103000"/>
+              </a:lnSpc>
+              <a:buNone/>
+            </a:pPr>
+            <a:r>
+              <a:rPr lang="en-US" sz="1000" dirty="0">
+                <a:solidFill>
+                  <a:srgbClr val="FFFFFF"/>
+                </a:solidFill>
+                <a:latin typeface="Calibri" pitchFamily="34" charset="0"/>
+                <a:ea typeface="Calibri" pitchFamily="34" charset="-122"/>
+                <a:cs typeface="Calibri" pitchFamily="34" charset="-120"/>
+              </a:rPr>
+              <a:t>Copia cada cita completa y textual, sin parafrasear, e indica el artículo del que sale. Ninguna fila puede quedarse sin su cita, y si algo no aparece, dilo en lugar de suponerlo.</a:t>
+            </a:r>
+            <a:endParaRPr lang="en-US" sz="1000" dirty="0"/>
+          </a:p>
+        </p:txBody>
+      </p:sp>
+      <p:sp>
+        <p:nvSpPr>
+          <p:cNvPr id="19" name="Text"/>
+          <p:cNvSpPr txBox="1"/>
+          <p:nvPr/>
+        </p:nvSpPr>
+        <p:spPr>
+          <a:xfrm>
+            <a:off x="6195847" y="3710000"/>
+            <a:ext cx="1290000" cy="620000"/>
+          </a:xfrm>
+          <a:prstGeom prst="rect">
+            <a:avLst/>
+          </a:prstGeom>
+          <a:noFill/>
+          <a:ln/>
+        </p:spPr>
+        <p:txBody>
+          <a:bodyPr wrap="square" lIns="0" tIns="0" rIns="0" bIns="0" rtlCol="0" anchor="ctr"/>
+          <a:lstStyle/>
+          <a:p>
+            <a:pPr indent="0" marL="0">
+              <a:buNone/>
+            </a:pPr>
+            <a:r>
+              <a:rPr lang="en-US" sz="950" b="1" dirty="0">
+                <a:solidFill>
+                  <a:srgbClr val="8FC7C7"/>
+                </a:solidFill>
+                <a:latin typeface="Arial" pitchFamily="34" charset="0"/>
+                <a:ea typeface="Arial" pitchFamily="34" charset="-122"/>
+                <a:cs typeface="Arial" pitchFamily="34" charset="-120"/>
+              </a:rPr>
+              <a:t>6. Formato de salida</a:t>
+            </a:r>
+            <a:endParaRPr lang="en-US" sz="950" dirty="0"/>
+          </a:p>
+        </p:txBody>
+      </p:sp>
+      <p:sp>
+        <p:nvSpPr>
+          <p:cNvPr id="20" name="Text"/>
+          <p:cNvSpPr txBox="1"/>
+          <p:nvPr/>
+        </p:nvSpPr>
+        <p:spPr>
+          <a:xfrm>
+            <a:off x="7575847" y="3710000"/>
+            <a:ext cx="3848919" cy="620000"/>
+          </a:xfrm>
+          <a:prstGeom prst="rect">
+            <a:avLst/>
+          </a:prstGeom>
+          <a:noFill/>
+          <a:ln/>
+        </p:spPr>
+        <p:txBody>
+          <a:bodyPr wrap="square" lIns="0" tIns="0" rIns="0" bIns="0" rtlCol="0" anchor="ctr"/>
+          <a:lstStyle/>
+          <a:p>
+            <a:pPr indent="0" marL="0">
+              <a:lnSpc>
+                <a:spcPct val="103000"/>
+              </a:lnSpc>
+              <a:buNone/>
+            </a:pPr>
+            <a:r>
+              <a:rPr lang="en-US" sz="1000" dirty="0">
+                <a:solidFill>
+                  <a:srgbClr val="FFFFFF"/>
+                </a:solidFill>
+                <a:latin typeface="Calibri" pitchFamily="34" charset="0"/>
+                <a:ea typeface="Calibri" pitchFamily="34" charset="-122"/>
+                <a:cs typeface="Calibri" pitchFamily="34" charset="-120"/>
+              </a:rPr>
+              <a:t>Una tabla de dos columnas: la afirmación tal como iría escrita en el informe, y la cita textual con su número de artículo. No más de seis filas.</a:t>
+            </a:r>
+            <a:endParaRPr lang="en-US" sz="1000" dirty="0"/>
+          </a:p>
+        </p:txBody>
+      </p:sp>
+      <p:sp>
+        <p:nvSpPr>
+          <p:cNvPr id="21" name="Shape"/>
+          <p:cNvSpPr/>
+          <p:nvPr/>
+        </p:nvSpPr>
+        <p:spPr>
+          <a:xfrm>
+            <a:off x="566928" y="4450000"/>
+            <a:ext cx="11057839" cy="962000"/>
+          </a:xfrm>
+          <a:prstGeom prst="roundRect">
+            <a:avLst>
+              <a:gd name="adj" fmla="val 8235"/>
+            </a:avLst>
+          </a:prstGeom>
+          <a:solidFill>
+            <a:srgbClr val="F7E4D8"/>
+          </a:solidFill>
+          <a:ln w="12700">
+            <a:solidFill>
+              <a:srgbClr val="F7E4D8"/>
+            </a:solidFill>
+            <a:prstDash val="solid"/>
+          </a:ln>
+        </p:spPr>
+      </p:sp>
+      <p:sp>
+        <p:nvSpPr>
+          <p:cNvPr id="22" name="Text"/>
+          <p:cNvSpPr txBox="1"/>
+          <p:nvPr/>
+        </p:nvSpPr>
+        <p:spPr>
+          <a:xfrm>
+            <a:off x="804672" y="4450000"/>
+            <a:ext cx="10582351" cy="962000"/>
+          </a:xfrm>
+          <a:prstGeom prst="rect">
+            <a:avLst/>
+          </a:prstGeom>
+          <a:noFill/>
+          <a:ln/>
+        </p:spPr>
+        <p:txBody>
+          <a:bodyPr wrap="square" lIns="0" tIns="0" rIns="0" bIns="0" rtlCol="0" anchor="ctr"/>
+          <a:lstStyle/>
+          <a:p>
+            <a:pPr indent="0" marL="0">
+              <a:lnSpc>
+                <a:spcPct val="110000"/>
+              </a:lnSpc>
+              <a:buNone/>
+            </a:pPr>
+            <a:r>
+              <a:rPr lang="en-US" sz="1300" dirty="0">
+                <a:solidFill>
+                  <a:srgbClr val="16262E"/>
+                </a:solidFill>
+                <a:latin typeface="Calibri" pitchFamily="34" charset="0"/>
+                <a:ea typeface="Calibri" pitchFamily="34" charset="-122"/>
+                <a:cs typeface="Calibri" pitchFamily="34" charset="-120"/>
+              </a:rPr>
+              <a:t>El daño lo hacen dos casillas que sí hicieron su trabajo. El contexto le dijo que el informe tiene que pronunciarse sobre si el apoyo alcanza, y el formato exige que ninguna fila se quede sin cita: con eso escribió un juicio y le pegó al lado la cita más cercana al tema. Ojo con la palabra «hallazgos» de la casilla 2: el dictamen de validación que llenaron en la sesión 3 dice que lo que devuelve la herramienta todavía no es un hallazgo, es una hipótesis.</a:t>
+            </a:r>
+            <a:endParaRPr lang="en-US" sz="1300" dirty="0"/>
+          </a:p>
+        </p:txBody>
+      </p:sp>
+      <p:sp>
+        <p:nvSpPr>
+          <p:cNvPr id="23" name="Text"/>
+          <p:cNvSpPr txBox="1"/>
+          <p:nvPr/>
+        </p:nvSpPr>
+        <p:spPr>
+          <a:xfrm>
+            <a:off x="566928" y="6270000"/>
+            <a:ext cx="11057839" cy="240000"/>
+          </a:xfrm>
+          <a:prstGeom prst="rect">
+            <a:avLst/>
+          </a:prstGeom>
+          <a:noFill/>
+          <a:ln/>
+        </p:spPr>
+        <p:txBody>
+          <a:bodyPr wrap="square" lIns="0" tIns="0" rIns="0" bIns="0" rtlCol="0" anchor="t"/>
+          <a:lstStyle/>
+          <a:p>
+            <a:pPr indent="0" marL="0">
+              <a:buNone/>
+            </a:pPr>
+            <a:r>
+              <a:rPr lang="en-US" sz="1000" dirty="0">
+                <a:solidFill>
+                  <a:srgbClr val="5A6B73"/>
+                </a:solidFill>
+                <a:latin typeface="Calibri" pitchFamily="34" charset="0"/>
+                <a:ea typeface="Calibri" pitchFamily="34" charset="-122"/>
+                <a:cs typeface="Calibri" pitchFamily="34" charset="-120"/>
+              </a:rPr>
+              <a:t>Dato verde: el programa y los expedientes son ficticios. Con expedientes reales esto es información amarilla y solo se escribe en Copilot Chat con la cuenta del Instituto.</a:t>
+            </a:r>
+            <a:endParaRPr lang="en-US" sz="1000" dirty="0"/>
+          </a:p>
+        </p:txBody>
+      </p:sp>
+    </p:spTree>
+  </p:cSld>
+  <p:clrMapOvr>
+    <a:masterClrMapping/>
+  </p:clrMapOvr>
+</p:sld>
+</file>
+
+<file path=ppt/slides/slide30.xml><?xml version="1.0" encoding="utf-8"?>
+<p:sld xmlns:a="http://schemas.openxmlformats.org/drawingml/2006/main" xmlns:r="http://schemas.openxmlformats.org/officeDocument/2006/relationships" xmlns:p="http://schemas.openxmlformats.org/presentationml/2006/main">
+  <p:cSld name="P_gemelos">
+    <p:spTree>
+      <p:nvGrpSpPr>
+        <p:cNvPr id="1" name=""/>
+        <p:cNvGrpSpPr/>
+        <p:nvPr/>
+      </p:nvGrpSpPr>
+      <p:grpSpPr>
+        <a:xfrm>
+          <a:off x="0" y="0"/>
+          <a:ext cx="0" cy="0"/>
+          <a:chOff x="0" y="0"/>
+          <a:chExt cx="0" cy="0"/>
+        </a:xfrm>
+      </p:grpSpPr>
+      <p:sp>
+        <p:nvSpPr>
+          <p:cNvPr id="2" name="Text"/>
+          <p:cNvSpPr txBox="1"/>
+          <p:nvPr/>
+        </p:nvSpPr>
+        <p:spPr>
+          <a:xfrm>
+            <a:off x="566928" y="402336"/>
+            <a:ext cx="11057839" cy="749808"/>
+          </a:xfrm>
+          <a:prstGeom prst="rect">
+            <a:avLst/>
+          </a:prstGeom>
+          <a:noFill/>
+          <a:ln/>
+        </p:spPr>
+        <p:txBody>
+          <a:bodyPr wrap="square" lIns="0" tIns="0" rIns="0" bIns="0" rtlCol="0" anchor="t"/>
+          <a:lstStyle/>
+          <a:p>
+            <a:pPr algn="l" indent="0" marL="0">
+              <a:buNone/>
+            </a:pPr>
+            <a:r>
+              <a:rPr lang="en-US" sz="3200" b="1" dirty="0">
+                <a:solidFill>
+                  <a:srgbClr val="16262E"/>
+                </a:solidFill>
+                <a:latin typeface="Arial" pitchFamily="34" charset="0"/>
+                <a:ea typeface="Arial" pitchFamily="34" charset="-122"/>
+                <a:cs typeface="Arial" pitchFamily="34" charset="-120"/>
+              </a:rPr>
+              <a:t>Dos prompts casi iguales, y ahí está toda la diferencia</a:t>
+            </a:r>
+            <a:endParaRPr lang="en-US" sz="3200" dirty="0"/>
+          </a:p>
+        </p:txBody>
+      </p:sp>
+      <p:sp>
+        <p:nvSpPr>
+          <p:cNvPr id="3" name="Text"/>
+          <p:cNvSpPr txBox="1"/>
+          <p:nvPr/>
+        </p:nvSpPr>
+        <p:spPr>
+          <a:xfrm>
+            <a:off x="566928" y="1280160"/>
+            <a:ext cx="11057839" cy="731520"/>
+          </a:xfrm>
+          <a:prstGeom prst="rect">
+            <a:avLst/>
+          </a:prstGeom>
+          <a:noFill/>
+          <a:ln/>
+        </p:spPr>
+        <p:txBody>
+          <a:bodyPr wrap="square" lIns="0" tIns="0" rIns="0" bIns="0" rtlCol="0" anchor="t"/>
+          <a:lstStyle/>
+          <a:p>
+            <a:pPr indent="0" marL="0">
+              <a:lnSpc>
+                <a:spcPct val="108000"/>
+              </a:lnSpc>
+              <a:buNone/>
+            </a:pPr>
+            <a:r>
+              <a:rPr lang="en-US" sz="1500" dirty="0">
+                <a:solidFill>
+                  <a:srgbClr val="5A6B73"/>
+                </a:solidFill>
+                <a:latin typeface="Calibri" pitchFamily="34" charset="0"/>
+                <a:ea typeface="Calibri" pitchFamily="34" charset="-122"/>
+                <a:cs typeface="Calibri" pitchFamily="34" charset="-120"/>
+              </a:rPr>
+              <a:t>Mismo artículo, mismo asistente, mismas cuatro primeras casillas. Cambian dos.</a:t>
+            </a:r>
+            <a:endParaRPr lang="en-US" sz="1500" dirty="0"/>
+          </a:p>
+        </p:txBody>
+      </p:sp>
+      <p:sp>
+        <p:nvSpPr>
+          <p:cNvPr id="4" name="Shape"/>
+          <p:cNvSpPr/>
+          <p:nvPr/>
+        </p:nvSpPr>
+        <p:spPr>
+          <a:xfrm>
+            <a:off x="566928" y="1700000"/>
+            <a:ext cx="11057839" cy="300000"/>
+          </a:xfrm>
+          <a:prstGeom prst="roundRect">
+            <a:avLst>
+              <a:gd name="adj" fmla="val 20000"/>
+            </a:avLst>
+          </a:prstGeom>
+          <a:solidFill>
+            <a:srgbClr val="D7E7E7"/>
+          </a:solidFill>
+          <a:ln w="12700">
+            <a:solidFill>
+              <a:srgbClr val="D7E7E7"/>
+            </a:solidFill>
+            <a:prstDash val="solid"/>
+          </a:ln>
+        </p:spPr>
+      </p:sp>
+      <p:sp>
+        <p:nvSpPr>
+          <p:cNvPr id="5" name="Text"/>
+          <p:cNvSpPr txBox="1"/>
+          <p:nvPr/>
+        </p:nvSpPr>
+        <p:spPr>
+          <a:xfrm>
+            <a:off x="766928" y="1700000"/>
+            <a:ext cx="1700000" cy="300000"/>
+          </a:xfrm>
+          <a:prstGeom prst="rect">
+            <a:avLst/>
+          </a:prstGeom>
+          <a:noFill/>
+          <a:ln/>
+        </p:spPr>
+        <p:txBody>
+          <a:bodyPr wrap="square" lIns="0" tIns="0" rIns="0" bIns="0" rtlCol="0" anchor="ctr"/>
+          <a:lstStyle/>
+          <a:p>
+            <a:pPr indent="0" marL="0">
+              <a:buNone/>
+            </a:pPr>
+            <a:r>
+              <a:rPr lang="en-US" sz="950" b="1" spc="100" kern="0" dirty="0">
+                <a:solidFill>
+                  <a:srgbClr val="2E7D7D"/>
+                </a:solidFill>
+                <a:latin typeface="Arial" pitchFamily="34" charset="0"/>
+                <a:ea typeface="Arial" pitchFamily="34" charset="-122"/>
+                <a:cs typeface="Arial" pitchFamily="34" charset="-120"/>
+              </a:rPr>
+              <a:t>DE DÓNDE SALE</a:t>
+            </a:r>
+            <a:endParaRPr lang="en-US" sz="950" dirty="0"/>
+          </a:p>
+        </p:txBody>
+      </p:sp>
+      <p:sp>
+        <p:nvSpPr>
+          <p:cNvPr id="6" name="Text"/>
+          <p:cNvSpPr txBox="1"/>
+          <p:nvPr/>
+        </p:nvSpPr>
+        <p:spPr>
+          <a:xfrm>
+            <a:off x="2516928" y="1700000"/>
+            <a:ext cx="8907839" cy="300000"/>
+          </a:xfrm>
+          <a:prstGeom prst="rect">
+            <a:avLst/>
+          </a:prstGeom>
+          <a:noFill/>
+          <a:ln/>
+        </p:spPr>
+        <p:txBody>
+          <a:bodyPr wrap="square" lIns="0" tIns="0" rIns="0" bIns="0" rtlCol="0" anchor="ctr"/>
+          <a:lstStyle/>
+          <a:p>
+            <a:pPr indent="0" marL="0">
+              <a:buNone/>
+            </a:pPr>
+            <a:r>
+              <a:rPr lang="en-US" sz="1100" dirty="0">
+                <a:solidFill>
+                  <a:srgbClr val="16262E"/>
+                </a:solidFill>
+                <a:latin typeface="Calibri" pitchFamily="34" charset="0"/>
+                <a:ea typeface="Calibri" pitchFamily="34" charset="-122"/>
+                <a:cs typeface="Calibri" pitchFamily="34" charset="-120"/>
+              </a:rPr>
+              <a:t>El artículo 21 del marco normativo, las condiciones de los centros comunitarios, pegado en el chat.</a:t>
+            </a:r>
+            <a:endParaRPr lang="en-US" sz="1100" dirty="0"/>
+          </a:p>
+        </p:txBody>
+      </p:sp>
+      <p:sp>
+        <p:nvSpPr>
+          <p:cNvPr id="7" name="Shape"/>
+          <p:cNvSpPr/>
+          <p:nvPr/>
+        </p:nvSpPr>
+        <p:spPr>
+          <a:xfrm>
+            <a:off x="566928" y="2080000"/>
+            <a:ext cx="11057839" cy="640000"/>
+          </a:xfrm>
+          <a:prstGeom prst="roundRect">
+            <a:avLst>
+              <a:gd name="adj" fmla="val 2933"/>
+            </a:avLst>
+          </a:prstGeom>
+          <a:solidFill>
+            <a:srgbClr val="F2F5F6"/>
+          </a:solidFill>
+          <a:ln w="12700">
+            <a:solidFill>
+              <a:srgbClr val="F2F5F6"/>
+            </a:solidFill>
+            <a:prstDash val="solid"/>
+          </a:ln>
+        </p:spPr>
+      </p:sp>
+      <p:sp>
+        <p:nvSpPr>
+          <p:cNvPr id="8" name="Text"/>
+          <p:cNvSpPr txBox="1"/>
+          <p:nvPr/>
+        </p:nvSpPr>
+        <p:spPr>
+          <a:xfrm>
+            <a:off x="804672" y="2160000"/>
+            <a:ext cx="10582351" cy="500000"/>
+          </a:xfrm>
+          <a:prstGeom prst="rect">
+            <a:avLst/>
+          </a:prstGeom>
+          <a:noFill/>
+          <a:ln/>
+        </p:spPr>
+        <p:txBody>
+          <a:bodyPr wrap="square" lIns="0" tIns="0" rIns="0" bIns="0" rtlCol="0" anchor="ctr"/>
+          <a:lstStyle/>
+          <a:p>
+            <a:pPr indent="0" marL="0">
+              <a:lnSpc>
+                <a:spcPct val="106000"/>
+              </a:lnSpc>
+              <a:buNone/>
+            </a:pPr>
+            <a:r>
+              <a:rPr lang="en-US" sz="1050" dirty="0">
+                <a:solidFill>
+                  <a:srgbClr val="5A6B73"/>
+                </a:solidFill>
+                <a:latin typeface="Calibri" pitchFamily="34" charset="0"/>
+                <a:ea typeface="Calibri" pitchFamily="34" charset="-122"/>
+                <a:cs typeface="Calibri" pitchFamily="34" charset="-120"/>
+              </a:rPr>
+              <a:t>IGUALES EN LAS DOS VERSIONES · 1. Rol: analista que revisa reglas de operación, sin opinar sobre el programa. · 2. Objetivo: resumir las condiciones que debe cumplir un centro comunitario, según el artículo 21. · 3. Contexto: mi equipo va a revisar si los centros de una entidad cumplen la norma. · 4. Insumos: solo el artículo 21 que te pego abajo.</a:t>
+            </a:r>
+            <a:endParaRPr lang="en-US" sz="1050" dirty="0"/>
+          </a:p>
+        </p:txBody>
+      </p:sp>
+      <p:sp>
+        <p:nvSpPr>
+          <p:cNvPr id="9" name="Text"/>
+          <p:cNvSpPr txBox="1"/>
+          <p:nvPr/>
+        </p:nvSpPr>
+        <p:spPr>
+          <a:xfrm>
+            <a:off x="566928" y="2700000"/>
+            <a:ext cx="5378919" cy="260000"/>
+          </a:xfrm>
+          <a:prstGeom prst="rect">
+            <a:avLst/>
+          </a:prstGeom>
+          <a:noFill/>
+          <a:ln/>
+        </p:spPr>
+        <p:txBody>
+          <a:bodyPr wrap="square" lIns="0" tIns="0" rIns="0" bIns="0" rtlCol="0" anchor="t"/>
+          <a:lstStyle/>
+          <a:p>
+            <a:pPr indent="0" marL="0">
+              <a:buNone/>
+            </a:pPr>
+            <a:r>
+              <a:rPr lang="en-US" sz="1050" b="1" spc="100" kern="0" dirty="0">
+                <a:solidFill>
+                  <a:srgbClr val="2E7D7D"/>
+                </a:solidFill>
+                <a:latin typeface="Arial" pitchFamily="34" charset="0"/>
+                <a:ea typeface="Arial" pitchFamily="34" charset="-122"/>
+                <a:cs typeface="Arial" pitchFamily="34" charset="-120"/>
+              </a:rPr>
+              <a:t>VERSIÓN A · COPIAR Y CITAR</a:t>
+            </a:r>
+            <a:endParaRPr lang="en-US" sz="1050" dirty="0"/>
+          </a:p>
+        </p:txBody>
+      </p:sp>
+      <p:sp>
+        <p:nvSpPr>
+          <p:cNvPr id="10" name="Shape"/>
+          <p:cNvSpPr/>
+          <p:nvPr/>
+        </p:nvSpPr>
+        <p:spPr>
+          <a:xfrm>
+            <a:off x="566928" y="2940000"/>
+            <a:ext cx="5378919" cy="1580000"/>
+          </a:xfrm>
+          <a:prstGeom prst="roundRect">
+            <a:avLst>
+              <a:gd name="adj" fmla="val 2933"/>
+            </a:avLst>
+          </a:prstGeom>
+          <a:solidFill>
+            <a:srgbClr val="16262E"/>
+          </a:solidFill>
+          <a:ln w="12700">
+            <a:solidFill>
+              <a:srgbClr val="16262E"/>
+            </a:solidFill>
+            <a:prstDash val="solid"/>
+          </a:ln>
+        </p:spPr>
+      </p:sp>
+      <p:sp>
+        <p:nvSpPr>
+          <p:cNvPr id="11" name="Text"/>
+          <p:cNvSpPr txBox="1"/>
+          <p:nvPr/>
+        </p:nvSpPr>
+        <p:spPr>
+          <a:xfrm>
+            <a:off x="804672" y="3060000"/>
+            <a:ext cx="4903431" cy="240000"/>
+          </a:xfrm>
+          <a:prstGeom prst="rect">
+            <a:avLst/>
+          </a:prstGeom>
+          <a:noFill/>
+          <a:ln/>
+        </p:spPr>
+        <p:txBody>
+          <a:bodyPr wrap="square" lIns="0" tIns="0" rIns="0" bIns="0" rtlCol="0" anchor="t"/>
+          <a:lstStyle/>
+          <a:p>
+            <a:pPr indent="0" marL="0">
+              <a:buNone/>
+            </a:pPr>
+            <a:r>
+              <a:rPr lang="en-US" sz="950" b="1" spc="120" kern="0" dirty="0">
+                <a:solidFill>
+                  <a:srgbClr val="8FC7C7"/>
+                </a:solidFill>
+                <a:latin typeface="Arial" pitchFamily="34" charset="0"/>
+                <a:ea typeface="Arial" pitchFamily="34" charset="-122"/>
+                <a:cs typeface="Arial" pitchFamily="34" charset="-120"/>
+              </a:rPr>
+              <a:t>LO QUE CAMBIA</a:t>
+            </a:r>
+            <a:endParaRPr lang="en-US" sz="950" dirty="0"/>
+          </a:p>
+        </p:txBody>
+      </p:sp>
+      <p:sp>
+        <p:nvSpPr>
+          <p:cNvPr id="12" name="Text"/>
+          <p:cNvSpPr txBox="1"/>
+          <p:nvPr/>
+        </p:nvSpPr>
+        <p:spPr>
+          <a:xfrm>
+            <a:off x="804672" y="3340000"/>
+            <a:ext cx="1260000" cy="580000"/>
+          </a:xfrm>
+          <a:prstGeom prst="rect">
+            <a:avLst/>
+          </a:prstGeom>
+          <a:noFill/>
+          <a:ln/>
+        </p:spPr>
+        <p:txBody>
+          <a:bodyPr wrap="square" lIns="0" tIns="0" rIns="0" bIns="0" rtlCol="0" anchor="ctr"/>
+          <a:lstStyle/>
+          <a:p>
+            <a:pPr indent="0" marL="0">
+              <a:buNone/>
+            </a:pPr>
+            <a:r>
+              <a:rPr lang="en-US" sz="950" b="1" dirty="0">
+                <a:solidFill>
+                  <a:srgbClr val="8FC7C7"/>
+                </a:solidFill>
+                <a:latin typeface="Arial" pitchFamily="34" charset="0"/>
+                <a:ea typeface="Arial" pitchFamily="34" charset="-122"/>
+                <a:cs typeface="Arial" pitchFamily="34" charset="-120"/>
+              </a:rPr>
+              <a:t>5. Restricciones</a:t>
+            </a:r>
+            <a:endParaRPr lang="en-US" sz="950" dirty="0"/>
+          </a:p>
+        </p:txBody>
+      </p:sp>
+      <p:sp>
+        <p:nvSpPr>
+          <p:cNvPr id="13" name="Text"/>
+          <p:cNvSpPr txBox="1"/>
+          <p:nvPr/>
+        </p:nvSpPr>
+        <p:spPr>
+          <a:xfrm>
+            <a:off x="2184672" y="3340000"/>
+            <a:ext cx="3523431" cy="580000"/>
+          </a:xfrm>
+          <a:prstGeom prst="rect">
+            <a:avLst/>
+          </a:prstGeom>
+          <a:noFill/>
+          <a:ln/>
+        </p:spPr>
+        <p:txBody>
+          <a:bodyPr wrap="square" lIns="0" tIns="0" rIns="0" bIns="0" rtlCol="0" anchor="ctr"/>
+          <a:lstStyle/>
+          <a:p>
+            <a:pPr indent="0" marL="0">
+              <a:lnSpc>
+                <a:spcPct val="104000"/>
+              </a:lnSpc>
+              <a:buNone/>
+            </a:pPr>
+            <a:r>
+              <a:rPr lang="en-US" sz="1000" dirty="0">
+                <a:solidFill>
+                  <a:srgbClr val="FFFFFF"/>
+                </a:solidFill>
+                <a:latin typeface="Calibri" pitchFamily="34" charset="0"/>
+                <a:ea typeface="Calibri" pitchFamily="34" charset="-122"/>
+                <a:cs typeface="Calibri" pitchFamily="34" charset="-120"/>
+              </a:rPr>
+              <a:t>No afirmes nada que no esté escrito en el artículo. Copia las oraciones tal como están: no cambies palabras, no juntes dos fracciones en una y no agregues frases de enlace.</a:t>
+            </a:r>
+            <a:endParaRPr lang="en-US" sz="1000" dirty="0"/>
+          </a:p>
+        </p:txBody>
+      </p:sp>
+      <p:sp>
+        <p:nvSpPr>
+          <p:cNvPr id="14" name="Text"/>
+          <p:cNvSpPr txBox="1"/>
+          <p:nvPr/>
+        </p:nvSpPr>
+        <p:spPr>
+          <a:xfrm>
+            <a:off x="804672" y="3920000"/>
+            <a:ext cx="1260000" cy="580000"/>
+          </a:xfrm>
+          <a:prstGeom prst="rect">
+            <a:avLst/>
+          </a:prstGeom>
+          <a:noFill/>
+          <a:ln/>
+        </p:spPr>
+        <p:txBody>
+          <a:bodyPr wrap="square" lIns="0" tIns="0" rIns="0" bIns="0" rtlCol="0" anchor="ctr"/>
+          <a:lstStyle/>
+          <a:p>
+            <a:pPr indent="0" marL="0">
+              <a:buNone/>
+            </a:pPr>
+            <a:r>
+              <a:rPr lang="en-US" sz="950" b="1" dirty="0">
+                <a:solidFill>
+                  <a:srgbClr val="8FC7C7"/>
+                </a:solidFill>
+                <a:latin typeface="Arial" pitchFamily="34" charset="0"/>
+                <a:ea typeface="Arial" pitchFamily="34" charset="-122"/>
+                <a:cs typeface="Arial" pitchFamily="34" charset="-120"/>
+              </a:rPr>
+              <a:t>6. Formato de salida</a:t>
+            </a:r>
+            <a:endParaRPr lang="en-US" sz="950" dirty="0"/>
+          </a:p>
+        </p:txBody>
+      </p:sp>
+      <p:sp>
+        <p:nvSpPr>
+          <p:cNvPr id="15" name="Text"/>
+          <p:cNvSpPr txBox="1"/>
+          <p:nvPr/>
+        </p:nvSpPr>
+        <p:spPr>
+          <a:xfrm>
+            <a:off x="2184672" y="3920000"/>
+            <a:ext cx="3523431" cy="580000"/>
+          </a:xfrm>
+          <a:prstGeom prst="rect">
+            <a:avLst/>
+          </a:prstGeom>
+          <a:noFill/>
+          <a:ln/>
+        </p:spPr>
+        <p:txBody>
+          <a:bodyPr wrap="square" lIns="0" tIns="0" rIns="0" bIns="0" rtlCol="0" anchor="ctr"/>
+          <a:lstStyle/>
+          <a:p>
+            <a:pPr indent="0" marL="0">
+              <a:lnSpc>
+                <a:spcPct val="104000"/>
+              </a:lnSpc>
+              <a:buNone/>
+            </a:pPr>
+            <a:r>
+              <a:rPr lang="en-US" sz="1000" dirty="0">
+                <a:solidFill>
+                  <a:srgbClr val="FFFFFF"/>
+                </a:solidFill>
+                <a:latin typeface="Calibri" pitchFamily="34" charset="0"/>
+                <a:ea typeface="Calibri" pitchFamily="34" charset="-122"/>
+                <a:cs typeface="Calibri" pitchFamily="34" charset="-120"/>
+              </a:rPr>
+              <a:t>Una viñeta por cada fracción del artículo. En cada una, la oración entre comillas y, al final entre paréntesis, el artículo y la fracción de donde la copiaste.</a:t>
+            </a:r>
+            <a:endParaRPr lang="en-US" sz="1000" dirty="0"/>
+          </a:p>
+        </p:txBody>
+      </p:sp>
+      <p:sp>
+        <p:nvSpPr>
+          <p:cNvPr id="16" name="Shape"/>
+          <p:cNvSpPr/>
+          <p:nvPr/>
+        </p:nvSpPr>
+        <p:spPr>
+          <a:xfrm>
+            <a:off x="566928" y="4590000"/>
+            <a:ext cx="5378919" cy="954000"/>
+          </a:xfrm>
+          <a:prstGeom prst="roundRect">
+            <a:avLst>
+              <a:gd name="adj" fmla="val 2933"/>
+            </a:avLst>
+          </a:prstGeom>
+          <a:solidFill>
+            <a:srgbClr val="D7E7E7"/>
+          </a:solidFill>
+          <a:ln w="12700">
+            <a:solidFill>
+              <a:srgbClr val="D7E7E7"/>
+            </a:solidFill>
+            <a:prstDash val="solid"/>
+          </a:ln>
+        </p:spPr>
+      </p:sp>
+      <p:sp>
+        <p:nvSpPr>
+          <p:cNvPr id="17" name="Text"/>
+          <p:cNvSpPr txBox="1"/>
+          <p:nvPr/>
+        </p:nvSpPr>
+        <p:spPr>
+          <a:xfrm>
+            <a:off x="804672" y="4700000"/>
+            <a:ext cx="4903431" cy="230000"/>
+          </a:xfrm>
+          <a:prstGeom prst="rect">
+            <a:avLst/>
+          </a:prstGeom>
+          <a:noFill/>
+          <a:ln/>
+        </p:spPr>
+        <p:txBody>
+          <a:bodyPr wrap="square" lIns="0" tIns="0" rIns="0" bIns="0" rtlCol="0" anchor="t"/>
+          <a:lstStyle/>
+          <a:p>
+            <a:pPr indent="0" marL="0">
+              <a:buNone/>
+            </a:pPr>
+            <a:r>
+              <a:rPr lang="en-US" sz="950" b="1" spc="120" kern="0" dirty="0">
+                <a:solidFill>
+                  <a:srgbClr val="2E7D7D"/>
+                </a:solidFill>
+                <a:latin typeface="Arial" pitchFamily="34" charset="0"/>
+                <a:ea typeface="Arial" pitchFamily="34" charset="-122"/>
+                <a:cs typeface="Arial" pitchFamily="34" charset="-120"/>
+              </a:rPr>
+              <a:t>LO QUE REGRESÓ</a:t>
+            </a:r>
+            <a:endParaRPr lang="en-US" sz="950" dirty="0"/>
+          </a:p>
+        </p:txBody>
+      </p:sp>
+      <p:sp>
+        <p:nvSpPr>
+          <p:cNvPr id="18" name="Text"/>
+          <p:cNvSpPr txBox="1"/>
+          <p:nvPr/>
+        </p:nvSpPr>
+        <p:spPr>
+          <a:xfrm>
+            <a:off x="804672" y="4960000"/>
+            <a:ext cx="4903431" cy="520000"/>
+          </a:xfrm>
+          <a:prstGeom prst="rect">
+            <a:avLst/>
+          </a:prstGeom>
+          <a:noFill/>
+          <a:ln/>
+        </p:spPr>
+        <p:txBody>
+          <a:bodyPr wrap="square" lIns="0" tIns="0" rIns="0" bIns="0" rtlCol="0" anchor="t"/>
+          <a:lstStyle/>
+          <a:p>
+            <a:pPr indent="0" marL="0">
+              <a:lnSpc>
+                <a:spcPct val="104000"/>
+              </a:lnSpc>
+              <a:spcAft>
+                <a:spcPts val="300"/>
+              </a:spcAft>
+              <a:buNone/>
+            </a:pPr>
+            <a:r>
+              <a:rPr lang="en-US" sz="1100" dirty="0">
+                <a:solidFill>
+                  <a:srgbClr val="16262E"/>
+                </a:solidFill>
+                <a:latin typeface="Calibri" pitchFamily="34" charset="0"/>
+                <a:ea typeface="Calibri" pitchFamily="34" charset="-122"/>
+                <a:cs typeface="Calibri" pitchFamily="34" charset="-120"/>
+              </a:rPr>
+              <a:t>Cinco viñetas, una por fracción, entrecomilladas y con su fracción al final.</a:t>
+            </a:r>
+            <a:endParaRPr lang="en-US" sz="1100" dirty="0"/>
+          </a:p>
+          <a:p>
+            <a:pPr indent="0" marL="0">
+              <a:lnSpc>
+                <a:spcPct val="104000"/>
+              </a:lnSpc>
+              <a:spcAft>
+                <a:spcPts val="300"/>
+              </a:spcAft>
+              <a:buNone/>
+            </a:pPr>
+            <a:r>
+              <a:rPr lang="en-US" sz="1100" dirty="0">
+                <a:solidFill>
+                  <a:srgbClr val="16262E"/>
+                </a:solidFill>
+                <a:latin typeface="Calibri" pitchFamily="34" charset="0"/>
+                <a:ea typeface="Calibri" pitchFamily="34" charset="-122"/>
+                <a:cs typeface="Calibri" pitchFamily="34" charset="-120"/>
+              </a:rPr>
+              <a:t>Se lee áspero y no sirve para pegarlo en el informe. Cada renglón se verifica en diez segundos.</a:t>
+            </a:r>
+            <a:endParaRPr lang="en-US" sz="1100" dirty="0"/>
+          </a:p>
+        </p:txBody>
+      </p:sp>
+      <p:sp>
+        <p:nvSpPr>
+          <p:cNvPr id="19" name="Text"/>
+          <p:cNvSpPr txBox="1"/>
+          <p:nvPr/>
+        </p:nvSpPr>
+        <p:spPr>
+          <a:xfrm>
+            <a:off x="6245847" y="2700000"/>
+            <a:ext cx="5378919" cy="260000"/>
+          </a:xfrm>
+          <a:prstGeom prst="rect">
+            <a:avLst/>
+          </a:prstGeom>
+          <a:noFill/>
+          <a:ln/>
+        </p:spPr>
+        <p:txBody>
+          <a:bodyPr wrap="square" lIns="0" tIns="0" rIns="0" bIns="0" rtlCol="0" anchor="t"/>
+          <a:lstStyle/>
+          <a:p>
+            <a:pPr indent="0" marL="0">
+              <a:buNone/>
+            </a:pPr>
+            <a:r>
+              <a:rPr lang="en-US" sz="1050" b="1" spc="100" kern="0" dirty="0">
+                <a:solidFill>
+                  <a:srgbClr val="C85A28"/>
+                </a:solidFill>
+                <a:latin typeface="Arial" pitchFamily="34" charset="0"/>
+                <a:ea typeface="Arial" pitchFamily="34" charset="-122"/>
+                <a:cs typeface="Arial" pitchFamily="34" charset="-120"/>
+              </a:rPr>
+              <a:t>VERSIÓN B · REDACTAR DE CORRIDO</a:t>
+            </a:r>
+            <a:endParaRPr lang="en-US" sz="1050" dirty="0"/>
+          </a:p>
+        </p:txBody>
+      </p:sp>
+      <p:sp>
+        <p:nvSpPr>
+          <p:cNvPr id="20" name="Shape"/>
+          <p:cNvSpPr/>
+          <p:nvPr/>
+        </p:nvSpPr>
+        <p:spPr>
+          <a:xfrm>
+            <a:off x="6245847" y="2940000"/>
+            <a:ext cx="5378919" cy="1580000"/>
+          </a:xfrm>
+          <a:prstGeom prst="roundRect">
+            <a:avLst>
+              <a:gd name="adj" fmla="val 2933"/>
+            </a:avLst>
+          </a:prstGeom>
+          <a:solidFill>
+            <a:srgbClr val="16262E"/>
+          </a:solidFill>
+          <a:ln w="12700">
+            <a:solidFill>
+              <a:srgbClr val="16262E"/>
+            </a:solidFill>
+            <a:prstDash val="solid"/>
+          </a:ln>
+        </p:spPr>
+      </p:sp>
+      <p:sp>
+        <p:nvSpPr>
+          <p:cNvPr id="21" name="Text"/>
+          <p:cNvSpPr txBox="1"/>
+          <p:nvPr/>
+        </p:nvSpPr>
+        <p:spPr>
+          <a:xfrm>
+            <a:off x="6483591" y="3060000"/>
+            <a:ext cx="4903431" cy="240000"/>
+          </a:xfrm>
+          <a:prstGeom prst="rect">
+            <a:avLst/>
+          </a:prstGeom>
+          <a:noFill/>
+          <a:ln/>
+        </p:spPr>
+        <p:txBody>
+          <a:bodyPr wrap="square" lIns="0" tIns="0" rIns="0" bIns="0" rtlCol="0" anchor="t"/>
+          <a:lstStyle/>
+          <a:p>
+            <a:pPr indent="0" marL="0">
+              <a:buNone/>
+            </a:pPr>
+            <a:r>
+              <a:rPr lang="en-US" sz="950" b="1" spc="120" kern="0" dirty="0">
+                <a:solidFill>
+                  <a:srgbClr val="8FC7C7"/>
+                </a:solidFill>
+                <a:latin typeface="Arial" pitchFamily="34" charset="0"/>
+                <a:ea typeface="Arial" pitchFamily="34" charset="-122"/>
+                <a:cs typeface="Arial" pitchFamily="34" charset="-120"/>
+              </a:rPr>
+              <a:t>LO QUE CAMBIA</a:t>
+            </a:r>
+            <a:endParaRPr lang="en-US" sz="950" dirty="0"/>
+          </a:p>
+        </p:txBody>
+      </p:sp>
+      <p:sp>
+        <p:nvSpPr>
+          <p:cNvPr id="22" name="Text"/>
+          <p:cNvSpPr txBox="1"/>
+          <p:nvPr/>
+        </p:nvSpPr>
+        <p:spPr>
+          <a:xfrm>
+            <a:off x="6483591" y="3340000"/>
+            <a:ext cx="1260000" cy="580000"/>
+          </a:xfrm>
+          <a:prstGeom prst="rect">
+            <a:avLst/>
+          </a:prstGeom>
+          <a:noFill/>
+          <a:ln/>
+        </p:spPr>
+        <p:txBody>
+          <a:bodyPr wrap="square" lIns="0" tIns="0" rIns="0" bIns="0" rtlCol="0" anchor="ctr"/>
+          <a:lstStyle/>
+          <a:p>
+            <a:pPr indent="0" marL="0">
+              <a:buNone/>
+            </a:pPr>
+            <a:r>
+              <a:rPr lang="en-US" sz="950" b="1" dirty="0">
+                <a:solidFill>
+                  <a:srgbClr val="8FC7C7"/>
+                </a:solidFill>
+                <a:latin typeface="Arial" pitchFamily="34" charset="0"/>
+                <a:ea typeface="Arial" pitchFamily="34" charset="-122"/>
+                <a:cs typeface="Arial" pitchFamily="34" charset="-120"/>
+              </a:rPr>
+              <a:t>5. Restricciones</a:t>
+            </a:r>
+            <a:endParaRPr lang="en-US" sz="950" dirty="0"/>
+          </a:p>
+        </p:txBody>
+      </p:sp>
+      <p:sp>
+        <p:nvSpPr>
+          <p:cNvPr id="23" name="Text"/>
+          <p:cNvSpPr txBox="1"/>
+          <p:nvPr/>
+        </p:nvSpPr>
+        <p:spPr>
+          <a:xfrm>
+            <a:off x="7863591" y="3340000"/>
+            <a:ext cx="3523431" cy="580000"/>
+          </a:xfrm>
+          <a:prstGeom prst="rect">
+            <a:avLst/>
+          </a:prstGeom>
+          <a:noFill/>
+          <a:ln/>
+        </p:spPr>
+        <p:txBody>
+          <a:bodyPr wrap="square" lIns="0" tIns="0" rIns="0" bIns="0" rtlCol="0" anchor="ctr"/>
+          <a:lstStyle/>
+          <a:p>
+            <a:pPr indent="0" marL="0">
+              <a:lnSpc>
+                <a:spcPct val="104000"/>
+              </a:lnSpc>
+              <a:buNone/>
+            </a:pPr>
+            <a:r>
+              <a:rPr lang="en-US" sz="1000" dirty="0">
+                <a:solidFill>
+                  <a:srgbClr val="FFFFFF"/>
+                </a:solidFill>
+                <a:latin typeface="Calibri" pitchFamily="34" charset="0"/>
+                <a:ea typeface="Calibri" pitchFamily="34" charset="-122"/>
+                <a:cs typeface="Calibri" pitchFamily="34" charset="-120"/>
+              </a:rPr>
+              <a:t>No afirmes nada que no esté escrito en el artículo. No copies las oraciones: redáctalo con tus palabras y de corrido, sin fracciones romanas.</a:t>
+            </a:r>
+            <a:endParaRPr lang="en-US" sz="1000" dirty="0"/>
+          </a:p>
+        </p:txBody>
+      </p:sp>
+      <p:sp>
+        <p:nvSpPr>
+          <p:cNvPr id="24" name="Text"/>
+          <p:cNvSpPr txBox="1"/>
+          <p:nvPr/>
+        </p:nvSpPr>
+        <p:spPr>
+          <a:xfrm>
+            <a:off x="6483591" y="3920000"/>
+            <a:ext cx="1260000" cy="580000"/>
+          </a:xfrm>
+          <a:prstGeom prst="rect">
+            <a:avLst/>
+          </a:prstGeom>
+          <a:noFill/>
+          <a:ln/>
+        </p:spPr>
+        <p:txBody>
+          <a:bodyPr wrap="square" lIns="0" tIns="0" rIns="0" bIns="0" rtlCol="0" anchor="ctr"/>
+          <a:lstStyle/>
+          <a:p>
+            <a:pPr indent="0" marL="0">
+              <a:buNone/>
+            </a:pPr>
+            <a:r>
+              <a:rPr lang="en-US" sz="950" b="1" dirty="0">
+                <a:solidFill>
+                  <a:srgbClr val="8FC7C7"/>
+                </a:solidFill>
+                <a:latin typeface="Arial" pitchFamily="34" charset="0"/>
+                <a:ea typeface="Arial" pitchFamily="34" charset="-122"/>
+                <a:cs typeface="Arial" pitchFamily="34" charset="-120"/>
+              </a:rPr>
+              <a:t>6. Formato de salida</a:t>
+            </a:r>
+            <a:endParaRPr lang="en-US" sz="950" dirty="0"/>
+          </a:p>
+        </p:txBody>
+      </p:sp>
+      <p:sp>
+        <p:nvSpPr>
+          <p:cNvPr id="25" name="Text"/>
+          <p:cNvSpPr txBox="1"/>
+          <p:nvPr/>
+        </p:nvSpPr>
+        <p:spPr>
+          <a:xfrm>
+            <a:off x="7863591" y="3920000"/>
+            <a:ext cx="3523431" cy="580000"/>
+          </a:xfrm>
+          <a:prstGeom prst="rect">
+            <a:avLst/>
+          </a:prstGeom>
+          <a:noFill/>
+          <a:ln/>
+        </p:spPr>
+        <p:txBody>
+          <a:bodyPr wrap="square" lIns="0" tIns="0" rIns="0" bIns="0" rtlCol="0" anchor="ctr"/>
+          <a:lstStyle/>
+          <a:p>
+            <a:pPr indent="0" marL="0">
+              <a:lnSpc>
+                <a:spcPct val="104000"/>
+              </a:lnSpc>
+              <a:buNone/>
+            </a:pPr>
+            <a:r>
+              <a:rPr lang="en-US" sz="1000" dirty="0">
+                <a:solidFill>
+                  <a:srgbClr val="FFFFFF"/>
+                </a:solidFill>
+                <a:latin typeface="Calibri" pitchFamily="34" charset="0"/>
+                <a:ea typeface="Calibri" pitchFamily="34" charset="-122"/>
+                <a:cs typeface="Calibri" pitchFamily="34" charset="-120"/>
+              </a:rPr>
+              <a:t>Un solo párrafo de entre 50 y 70 palabras, en el tono de un informe de evaluación, sin viñetas y sin comillas.</a:t>
+            </a:r>
+            <a:endParaRPr lang="en-US" sz="1000" dirty="0"/>
+          </a:p>
+        </p:txBody>
+      </p:sp>
+      <p:sp>
+        <p:nvSpPr>
+          <p:cNvPr id="26" name="Shape"/>
+          <p:cNvSpPr/>
+          <p:nvPr/>
+        </p:nvSpPr>
+        <p:spPr>
+          <a:xfrm>
+            <a:off x="6245847" y="4590000"/>
+            <a:ext cx="5378919" cy="954000"/>
+          </a:xfrm>
+          <a:prstGeom prst="roundRect">
+            <a:avLst>
+              <a:gd name="adj" fmla="val 2933"/>
+            </a:avLst>
+          </a:prstGeom>
+          <a:solidFill>
+            <a:srgbClr val="F7E4D8"/>
+          </a:solidFill>
+          <a:ln w="12700">
+            <a:solidFill>
+              <a:srgbClr val="F7E4D8"/>
+            </a:solidFill>
+            <a:prstDash val="solid"/>
+          </a:ln>
+        </p:spPr>
+      </p:sp>
+      <p:sp>
+        <p:nvSpPr>
+          <p:cNvPr id="27" name="Text"/>
+          <p:cNvSpPr txBox="1"/>
+          <p:nvPr/>
+        </p:nvSpPr>
+        <p:spPr>
+          <a:xfrm>
+            <a:off x="6483591" y="4700000"/>
+            <a:ext cx="4903431" cy="230000"/>
+          </a:xfrm>
+          <a:prstGeom prst="rect">
+            <a:avLst/>
+          </a:prstGeom>
+          <a:noFill/>
+          <a:ln/>
+        </p:spPr>
+        <p:txBody>
+          <a:bodyPr wrap="square" lIns="0" tIns="0" rIns="0" bIns="0" rtlCol="0" anchor="t"/>
+          <a:lstStyle/>
+          <a:p>
+            <a:pPr indent="0" marL="0">
+              <a:buNone/>
+            </a:pPr>
+            <a:r>
+              <a:rPr lang="en-US" sz="950" b="1" spc="120" kern="0" dirty="0">
+                <a:solidFill>
+                  <a:srgbClr val="C85A28"/>
+                </a:solidFill>
+                <a:latin typeface="Arial" pitchFamily="34" charset="0"/>
+                <a:ea typeface="Arial" pitchFamily="34" charset="-122"/>
+                <a:cs typeface="Arial" pitchFamily="34" charset="-120"/>
+              </a:rPr>
+              <a:t>LO QUE REGRESÓ</a:t>
+            </a:r>
+            <a:endParaRPr lang="en-US" sz="950" dirty="0"/>
+          </a:p>
+        </p:txBody>
+      </p:sp>
+      <p:sp>
+        <p:nvSpPr>
+          <p:cNvPr id="28" name="Text"/>
+          <p:cNvSpPr txBox="1"/>
+          <p:nvPr/>
+        </p:nvSpPr>
+        <p:spPr>
+          <a:xfrm>
+            <a:off x="6483591" y="4960000"/>
+            <a:ext cx="4903431" cy="520000"/>
+          </a:xfrm>
+          <a:prstGeom prst="rect">
+            <a:avLst/>
+          </a:prstGeom>
+          <a:noFill/>
+          <a:ln/>
+        </p:spPr>
+        <p:txBody>
+          <a:bodyPr wrap="square" lIns="0" tIns="0" rIns="0" bIns="0" rtlCol="0" anchor="t"/>
+          <a:lstStyle/>
+          <a:p>
+            <a:pPr indent="0" marL="0">
+              <a:lnSpc>
+                <a:spcPct val="104000"/>
+              </a:lnSpc>
+              <a:spcAft>
+                <a:spcPts val="300"/>
+              </a:spcAft>
+              <a:buNone/>
+            </a:pPr>
+            <a:r>
+              <a:rPr lang="en-US" sz="1100" dirty="0">
+                <a:solidFill>
+                  <a:srgbClr val="16262E"/>
+                </a:solidFill>
+                <a:latin typeface="Calibri" pitchFamily="34" charset="0"/>
+                <a:ea typeface="Calibri" pitchFamily="34" charset="-122"/>
+                <a:cs typeface="Calibri" pitchFamily="34" charset="-120"/>
+              </a:rPr>
+              <a:t>Un párrafo que se lee bien y se puede pegar en el informe.</a:t>
+            </a:r>
+            <a:endParaRPr lang="en-US" sz="1100" dirty="0"/>
+          </a:p>
+          <a:p>
+            <a:pPr indent="0" marL="0">
+              <a:lnSpc>
+                <a:spcPct val="104000"/>
+              </a:lnSpc>
+              <a:spcAft>
+                <a:spcPts val="300"/>
+              </a:spcAft>
+              <a:buNone/>
+            </a:pPr>
+            <a:r>
+              <a:rPr lang="en-US" sz="1100" dirty="0">
+                <a:solidFill>
+                  <a:srgbClr val="16262E"/>
+                </a:solidFill>
+                <a:latin typeface="Calibri" pitchFamily="34" charset="0"/>
+                <a:ea typeface="Calibri" pitchFamily="34" charset="-122"/>
+                <a:cs typeface="Calibri" pitchFamily="34" charset="-120"/>
+              </a:rPr>
+              <a:t>Y que dice cuatro cosas que el artículo no dice. Las vemos en la lámina que sigue.</a:t>
+            </a:r>
+            <a:endParaRPr lang="en-US" sz="1100" dirty="0"/>
+          </a:p>
+        </p:txBody>
+      </p:sp>
+      <p:sp>
+        <p:nvSpPr>
+          <p:cNvPr id="29" name="Shape"/>
+          <p:cNvSpPr/>
+          <p:nvPr/>
+        </p:nvSpPr>
+        <p:spPr>
+          <a:xfrm>
+            <a:off x="566928" y="5650000"/>
+            <a:ext cx="11057839" cy="560000"/>
+          </a:xfrm>
+          <a:prstGeom prst="roundRect">
+            <a:avLst>
+              <a:gd name="adj" fmla="val 8235"/>
+            </a:avLst>
+          </a:prstGeom>
+          <a:solidFill>
+            <a:srgbClr val="F7E4D8"/>
+          </a:solidFill>
+          <a:ln w="12700">
+            <a:solidFill>
+              <a:srgbClr val="F7E4D8"/>
+            </a:solidFill>
+            <a:prstDash val="solid"/>
+          </a:ln>
+        </p:spPr>
+      </p:sp>
+      <p:sp>
+        <p:nvSpPr>
+          <p:cNvPr id="30" name="Text"/>
+          <p:cNvSpPr txBox="1"/>
+          <p:nvPr/>
+        </p:nvSpPr>
+        <p:spPr>
+          <a:xfrm>
+            <a:off x="804672" y="5650000"/>
+            <a:ext cx="10582351" cy="560000"/>
+          </a:xfrm>
+          <a:prstGeom prst="rect">
+            <a:avLst/>
+          </a:prstGeom>
+          <a:noFill/>
+          <a:ln/>
+        </p:spPr>
+        <p:txBody>
+          <a:bodyPr wrap="square" lIns="0" tIns="0" rIns="0" bIns="0" rtlCol="0" anchor="ctr"/>
+          <a:lstStyle/>
+          <a:p>
+            <a:pPr indent="0" marL="0">
+              <a:lnSpc>
+                <a:spcPct val="110000"/>
+              </a:lnSpc>
+              <a:buNone/>
+            </a:pPr>
+            <a:r>
+              <a:rPr lang="en-US" sz="1300" dirty="0">
+                <a:solidFill>
+                  <a:srgbClr val="16262E"/>
+                </a:solidFill>
+                <a:latin typeface="Calibri" pitchFamily="34" charset="0"/>
+                <a:ea typeface="Calibri" pitchFamily="34" charset="-122"/>
+                <a:cs typeface="Calibri" pitchFamily="34" charset="-120"/>
+              </a:rPr>
+              <a:t>Los dos prompts dicen «no afirmes nada que no esté escrito en el artículo». La versión B lo dice igual y afirma cuatro cosas que el artículo no dice, porque lo que se cuela no son datos inventados: son compresiones que borran una condición y verbos que nadie autorizó.</a:t>
+            </a:r>
+            <a:endParaRPr lang="en-US" sz="1300" dirty="0"/>
+          </a:p>
+        </p:txBody>
+      </p:sp>
+      <p:sp>
+        <p:nvSpPr>
+          <p:cNvPr id="31" name="Text"/>
+          <p:cNvSpPr txBox="1"/>
+          <p:nvPr/>
+        </p:nvSpPr>
+        <p:spPr>
+          <a:xfrm>
+            <a:off x="566928" y="6270000"/>
+            <a:ext cx="11057839" cy="240000"/>
+          </a:xfrm>
+          <a:prstGeom prst="rect">
+            <a:avLst/>
+          </a:prstGeom>
+          <a:noFill/>
+          <a:ln/>
+        </p:spPr>
+        <p:txBody>
+          <a:bodyPr wrap="square" lIns="0" tIns="0" rIns="0" bIns="0" rtlCol="0" anchor="t"/>
+          <a:lstStyle/>
+          <a:p>
+            <a:pPr indent="0" marL="0">
+              <a:buNone/>
+            </a:pPr>
+            <a:r>
+              <a:rPr lang="en-US" sz="1000" dirty="0">
+                <a:solidFill>
+                  <a:srgbClr val="5A6B73"/>
+                </a:solidFill>
+                <a:latin typeface="Calibri" pitchFamily="34" charset="0"/>
+                <a:ea typeface="Calibri" pitchFamily="34" charset="-122"/>
+                <a:cs typeface="Calibri" pitchFamily="34" charset="-120"/>
+              </a:rPr>
+              <a:t>Dato verde: el programa y los expedientes son ficticios. Con expedientes reales esto es información amarilla y solo se escribe en Copilot Chat con la cuenta del Instituto.</a:t>
+            </a:r>
+            <a:endParaRPr lang="en-US" sz="1000" dirty="0"/>
+          </a:p>
+        </p:txBody>
+      </p:sp>
+    </p:spTree>
+  </p:cSld>
+  <p:clrMapOvr>
+    <a:masterClrMapping/>
+  </p:clrMapOvr>
+</p:sld>
+</file>
+
+<file path=ppt/slides/slide31.xml><?xml version="1.0" encoding="utf-8"?>
+<p:sld xmlns:a="http://schemas.openxmlformats.org/drawingml/2006/main" xmlns:r="http://schemas.openxmlformats.org/officeDocument/2006/relationships" xmlns:p="http://schemas.openxmlformats.org/presentationml/2006/main">
+  <p:cSld name="P_clasificacion">
+    <p:spTree>
+      <p:nvGrpSpPr>
+        <p:cNvPr id="1" name=""/>
+        <p:cNvGrpSpPr/>
+        <p:nvPr/>
+      </p:nvGrpSpPr>
+      <p:grpSpPr>
+        <a:xfrm>
+          <a:off x="0" y="0"/>
+          <a:ext cx="0" cy="0"/>
+          <a:chOff x="0" y="0"/>
+          <a:chExt cx="0" cy="0"/>
+        </a:xfrm>
+      </p:grpSpPr>
+      <p:sp>
+        <p:nvSpPr>
+          <p:cNvPr id="2" name="Text"/>
+          <p:cNvSpPr txBox="1"/>
+          <p:nvPr/>
+        </p:nvSpPr>
+        <p:spPr>
+          <a:xfrm>
+            <a:off x="566928" y="402336"/>
+            <a:ext cx="11057839" cy="749808"/>
+          </a:xfrm>
+          <a:prstGeom prst="rect">
+            <a:avLst/>
+          </a:prstGeom>
+          <a:noFill/>
+          <a:ln/>
+        </p:spPr>
+        <p:txBody>
+          <a:bodyPr wrap="square" lIns="0" tIns="0" rIns="0" bIns="0" rtlCol="0" anchor="t"/>
+          <a:lstStyle/>
+          <a:p>
+            <a:pPr algn="l" indent="0" marL="0">
+              <a:buNone/>
+            </a:pPr>
+            <a:r>
+              <a:rPr lang="en-US" sz="3200" b="1" dirty="0">
+                <a:solidFill>
+                  <a:srgbClr val="16262E"/>
+                </a:solidFill>
+                <a:latin typeface="Arial" pitchFamily="34" charset="0"/>
+                <a:ea typeface="Arial" pitchFamily="34" charset="-122"/>
+                <a:cs typeface="Arial" pitchFamily="34" charset="-120"/>
+              </a:rPr>
+              <a:t>Seis casillas bien puestas, y aun así tres errores</a:t>
+            </a:r>
+            <a:endParaRPr lang="en-US" sz="3200" dirty="0"/>
+          </a:p>
+        </p:txBody>
+      </p:sp>
+      <p:sp>
+        <p:nvSpPr>
+          <p:cNvPr id="3" name="Text"/>
+          <p:cNvSpPr txBox="1"/>
+          <p:nvPr/>
+        </p:nvSpPr>
+        <p:spPr>
+          <a:xfrm>
+            <a:off x="566928" y="1280160"/>
+            <a:ext cx="11057839" cy="731520"/>
+          </a:xfrm>
+          <a:prstGeom prst="rect">
+            <a:avLst/>
+          </a:prstGeom>
+          <a:noFill/>
+          <a:ln/>
+        </p:spPr>
+        <p:txBody>
+          <a:bodyPr wrap="square" lIns="0" tIns="0" rIns="0" bIns="0" rtlCol="0" anchor="t"/>
+          <a:lstStyle/>
+          <a:p>
+            <a:pPr indent="0" marL="0">
+              <a:lnSpc>
+                <a:spcPct val="108000"/>
+              </a:lnSpc>
+              <a:buNone/>
+            </a:pPr>
+            <a:r>
+              <a:rPr lang="en-US" sz="1500" dirty="0">
+                <a:solidFill>
+                  <a:srgbClr val="5A6B73"/>
+                </a:solidFill>
+                <a:latin typeface="Calibri" pitchFamily="34" charset="0"/>
+                <a:ea typeface="Calibri" pitchFamily="34" charset="-122"/>
+                <a:cs typeface="Calibri" pitchFamily="34" charset="-120"/>
+              </a:rPr>
+              <a:t>Las seis casillas con las que se codificaron los dos foros, y ocho de los renglones que devolvió.</a:t>
+            </a:r>
+            <a:endParaRPr lang="en-US" sz="1500" dirty="0"/>
+          </a:p>
+        </p:txBody>
+      </p:sp>
+      <p:sp>
+        <p:nvSpPr>
+          <p:cNvPr id="4" name="Shape"/>
+          <p:cNvSpPr/>
+          <p:nvPr/>
+        </p:nvSpPr>
+        <p:spPr>
+          <a:xfrm>
+            <a:off x="566928" y="1700000"/>
+            <a:ext cx="11057839" cy="300000"/>
+          </a:xfrm>
+          <a:prstGeom prst="roundRect">
+            <a:avLst>
+              <a:gd name="adj" fmla="val 20000"/>
+            </a:avLst>
+          </a:prstGeom>
+          <a:solidFill>
+            <a:srgbClr val="D7E7E7"/>
+          </a:solidFill>
+          <a:ln w="12700">
+            <a:solidFill>
+              <a:srgbClr val="D7E7E7"/>
+            </a:solidFill>
+            <a:prstDash val="solid"/>
+          </a:ln>
+        </p:spPr>
+      </p:sp>
+      <p:sp>
+        <p:nvSpPr>
+          <p:cNvPr id="5" name="Text"/>
+          <p:cNvSpPr txBox="1"/>
+          <p:nvPr/>
+        </p:nvSpPr>
+        <p:spPr>
+          <a:xfrm>
+            <a:off x="766928" y="1700000"/>
+            <a:ext cx="1700000" cy="300000"/>
+          </a:xfrm>
+          <a:prstGeom prst="rect">
+            <a:avLst/>
+          </a:prstGeom>
+          <a:noFill/>
+          <a:ln/>
+        </p:spPr>
+        <p:txBody>
+          <a:bodyPr wrap="square" lIns="0" tIns="0" rIns="0" bIns="0" rtlCol="0" anchor="ctr"/>
+          <a:lstStyle/>
+          <a:p>
+            <a:pPr indent="0" marL="0">
+              <a:buNone/>
+            </a:pPr>
+            <a:r>
+              <a:rPr lang="en-US" sz="950" b="1" spc="100" kern="0" dirty="0">
+                <a:solidFill>
+                  <a:srgbClr val="2E7D7D"/>
+                </a:solidFill>
+                <a:latin typeface="Arial" pitchFamily="34" charset="0"/>
+                <a:ea typeface="Arial" pitchFamily="34" charset="-122"/>
+                <a:cs typeface="Arial" pitchFamily="34" charset="-120"/>
+              </a:rPr>
+              <a:t>DE DÓNDE SALE</a:t>
+            </a:r>
+            <a:endParaRPr lang="en-US" sz="950" dirty="0"/>
+          </a:p>
+        </p:txBody>
+      </p:sp>
+      <p:sp>
+        <p:nvSpPr>
+          <p:cNvPr id="6" name="Text"/>
+          <p:cNvSpPr txBox="1"/>
+          <p:nvPr/>
+        </p:nvSpPr>
+        <p:spPr>
+          <a:xfrm>
+            <a:off x="2516928" y="1700000"/>
+            <a:ext cx="8907839" cy="300000"/>
+          </a:xfrm>
+          <a:prstGeom prst="rect">
+            <a:avLst/>
+          </a:prstGeom>
+          <a:noFill/>
+          <a:ln/>
+        </p:spPr>
+        <p:txBody>
+          <a:bodyPr wrap="square" lIns="0" tIns="0" rIns="0" bIns="0" rtlCol="0" anchor="ctr"/>
+          <a:lstStyle/>
+          <a:p>
+            <a:pPr indent="0" marL="0">
+              <a:buNone/>
+            </a:pPr>
+            <a:r>
+              <a:rPr lang="en-US" sz="1100" dirty="0">
+                <a:solidFill>
+                  <a:srgbClr val="16262E"/>
+                </a:solidFill>
+                <a:latin typeface="Calibri" pitchFamily="34" charset="0"/>
+                <a:ea typeface="Calibri" pitchFamily="34" charset="-122"/>
+                <a:cs typeface="Calibri" pitchFamily="34" charset="-120"/>
+              </a:rPr>
+              <a:t>Transcripciones_foro_PARTICIPANTE.docx, adjunto completo. Las intervenciones y sus faltas de ortografía son textuales; la tabla es una reconstrucción de una primera pasada.</a:t>
+            </a:r>
+            <a:endParaRPr lang="en-US" sz="1100" dirty="0"/>
+          </a:p>
+        </p:txBody>
+      </p:sp>
+      <p:sp>
+        <p:nvSpPr>
+          <p:cNvPr id="7" name="Shape"/>
+          <p:cNvSpPr/>
+          <p:nvPr/>
+        </p:nvSpPr>
+        <p:spPr>
+          <a:xfrm>
+            <a:off x="566928" y="2080000"/>
+            <a:ext cx="11057839" cy="2270000"/>
+          </a:xfrm>
+          <a:prstGeom prst="roundRect">
+            <a:avLst>
+              <a:gd name="adj" fmla="val 2933"/>
+            </a:avLst>
+          </a:prstGeom>
+          <a:solidFill>
+            <a:srgbClr val="16262E"/>
+          </a:solidFill>
+          <a:ln w="12700">
+            <a:solidFill>
+              <a:srgbClr val="16262E"/>
+            </a:solidFill>
+            <a:prstDash val="solid"/>
+          </a:ln>
+        </p:spPr>
+      </p:sp>
+      <p:sp>
+        <p:nvSpPr>
+          <p:cNvPr id="8" name="Text"/>
+          <p:cNvSpPr txBox="1"/>
+          <p:nvPr/>
+        </p:nvSpPr>
+        <p:spPr>
+          <a:xfrm>
+            <a:off x="804672" y="2190000"/>
+            <a:ext cx="10582351" cy="240000"/>
+          </a:xfrm>
+          <a:prstGeom prst="rect">
+            <a:avLst/>
+          </a:prstGeom>
+          <a:noFill/>
+          <a:ln/>
+        </p:spPr>
+        <p:txBody>
+          <a:bodyPr wrap="square" lIns="0" tIns="0" rIns="0" bIns="0" rtlCol="0" anchor="t"/>
+          <a:lstStyle/>
+          <a:p>
+            <a:pPr indent="0" marL="0">
+              <a:buNone/>
+            </a:pPr>
+            <a:r>
+              <a:rPr lang="en-US" sz="950" b="1" spc="120" kern="0" dirty="0">
+                <a:solidFill>
+                  <a:srgbClr val="8FC7C7"/>
+                </a:solidFill>
+                <a:latin typeface="Arial" pitchFamily="34" charset="0"/>
+                <a:ea typeface="Arial" pitchFamily="34" charset="-122"/>
+                <a:cs typeface="Arial" pitchFamily="34" charset="-120"/>
+              </a:rPr>
+              <a:t>EL PROMPT, CON LAS SEIS CASILLAS</a:t>
+            </a:r>
+            <a:endParaRPr lang="en-US" sz="950" dirty="0"/>
+          </a:p>
+        </p:txBody>
+      </p:sp>
+      <p:sp>
+        <p:nvSpPr>
+          <p:cNvPr id="9" name="Text"/>
+          <p:cNvSpPr txBox="1"/>
+          <p:nvPr/>
+        </p:nvSpPr>
+        <p:spPr>
+          <a:xfrm>
+            <a:off x="766928" y="2470000"/>
+            <a:ext cx="1290000" cy="620000"/>
+          </a:xfrm>
+          <a:prstGeom prst="rect">
+            <a:avLst/>
+          </a:prstGeom>
+          <a:noFill/>
+          <a:ln/>
+        </p:spPr>
+        <p:txBody>
+          <a:bodyPr wrap="square" lIns="0" tIns="0" rIns="0" bIns="0" rtlCol="0" anchor="ctr"/>
+          <a:lstStyle/>
+          <a:p>
+            <a:pPr indent="0" marL="0">
+              <a:buNone/>
+            </a:pPr>
+            <a:r>
+              <a:rPr lang="en-US" sz="950" b="1" dirty="0">
+                <a:solidFill>
+                  <a:srgbClr val="8FC7C7"/>
+                </a:solidFill>
+                <a:latin typeface="Arial" pitchFamily="34" charset="0"/>
+                <a:ea typeface="Arial" pitchFamily="34" charset="-122"/>
+                <a:cs typeface="Arial" pitchFamily="34" charset="-120"/>
+              </a:rPr>
+              <a:t>1. Rol</a:t>
+            </a:r>
+            <a:endParaRPr lang="en-US" sz="950" dirty="0"/>
+          </a:p>
+        </p:txBody>
+      </p:sp>
+      <p:sp>
+        <p:nvSpPr>
+          <p:cNvPr id="10" name="Text"/>
+          <p:cNvSpPr txBox="1"/>
+          <p:nvPr/>
+        </p:nvSpPr>
+        <p:spPr>
+          <a:xfrm>
+            <a:off x="2146928" y="2470000"/>
+            <a:ext cx="3848919" cy="620000"/>
+          </a:xfrm>
+          <a:prstGeom prst="rect">
+            <a:avLst/>
+          </a:prstGeom>
+          <a:noFill/>
+          <a:ln/>
+        </p:spPr>
+        <p:txBody>
+          <a:bodyPr wrap="square" lIns="0" tIns="0" rIns="0" bIns="0" rtlCol="0" anchor="ctr"/>
+          <a:lstStyle/>
+          <a:p>
+            <a:pPr indent="0" marL="0">
+              <a:lnSpc>
+                <a:spcPct val="103000"/>
+              </a:lnSpc>
+              <a:buNone/>
+            </a:pPr>
+            <a:r>
+              <a:rPr lang="en-US" sz="1000" dirty="0">
+                <a:solidFill>
+                  <a:srgbClr val="FFFFFF"/>
+                </a:solidFill>
+                <a:latin typeface="Calibri" pitchFamily="34" charset="0"/>
+                <a:ea typeface="Calibri" pitchFamily="34" charset="-122"/>
+                <a:cs typeface="Calibri" pitchFamily="34" charset="-120"/>
+              </a:rPr>
+              <a:t>Responde como analista de evaluación que está codificando testimonios de una consulta comunitaria, no midiendo satisfacción.</a:t>
+            </a:r>
+            <a:endParaRPr lang="en-US" sz="1000" dirty="0"/>
+          </a:p>
+        </p:txBody>
+      </p:sp>
+      <p:sp>
+        <p:nvSpPr>
+          <p:cNvPr id="11" name="Text"/>
+          <p:cNvSpPr txBox="1"/>
+          <p:nvPr/>
+        </p:nvSpPr>
+        <p:spPr>
+          <a:xfrm>
+            <a:off x="766928" y="3090000"/>
+            <a:ext cx="1290000" cy="620000"/>
+          </a:xfrm>
+          <a:prstGeom prst="rect">
+            <a:avLst/>
+          </a:prstGeom>
+          <a:noFill/>
+          <a:ln/>
+        </p:spPr>
+        <p:txBody>
+          <a:bodyPr wrap="square" lIns="0" tIns="0" rIns="0" bIns="0" rtlCol="0" anchor="ctr"/>
+          <a:lstStyle/>
+          <a:p>
+            <a:pPr indent="0" marL="0">
+              <a:buNone/>
+            </a:pPr>
+            <a:r>
+              <a:rPr lang="en-US" sz="950" b="1" dirty="0">
+                <a:solidFill>
+                  <a:srgbClr val="8FC7C7"/>
+                </a:solidFill>
+                <a:latin typeface="Arial" pitchFamily="34" charset="0"/>
+                <a:ea typeface="Arial" pitchFamily="34" charset="-122"/>
+                <a:cs typeface="Arial" pitchFamily="34" charset="-120"/>
+              </a:rPr>
+              <a:t>2. Objetivo</a:t>
+            </a:r>
+            <a:endParaRPr lang="en-US" sz="950" dirty="0"/>
+          </a:p>
+        </p:txBody>
+      </p:sp>
+      <p:sp>
+        <p:nvSpPr>
+          <p:cNvPr id="12" name="Text"/>
+          <p:cNvSpPr txBox="1"/>
+          <p:nvPr/>
+        </p:nvSpPr>
+        <p:spPr>
+          <a:xfrm>
+            <a:off x="2146928" y="3090000"/>
+            <a:ext cx="3848919" cy="620000"/>
+          </a:xfrm>
+          <a:prstGeom prst="rect">
+            <a:avLst/>
+          </a:prstGeom>
+          <a:noFill/>
+          <a:ln/>
+        </p:spPr>
+        <p:txBody>
+          <a:bodyPr wrap="square" lIns="0" tIns="0" rIns="0" bIns="0" rtlCol="0" anchor="ctr"/>
+          <a:lstStyle/>
+          <a:p>
+            <a:pPr indent="0" marL="0">
+              <a:lnSpc>
+                <a:spcPct val="103000"/>
+              </a:lnSpc>
+              <a:buNone/>
+            </a:pPr>
+            <a:r>
+              <a:rPr lang="en-US" sz="1000" dirty="0">
+                <a:solidFill>
+                  <a:srgbClr val="FFFFFF"/>
+                </a:solidFill>
+                <a:latin typeface="Calibri" pitchFamily="34" charset="0"/>
+                <a:ea typeface="Calibri" pitchFamily="34" charset="-122"/>
+                <a:cs typeface="Calibri" pitchFamily="34" charset="-120"/>
+              </a:rPr>
+              <a:t>Clasifica cada intervención en dos ejes: polaridad, que es positiva, neutra o negativa, y causa raíz, que es infraestructura, presupuesto, gestión o transparencia.</a:t>
+            </a:r>
+            <a:endParaRPr lang="en-US" sz="1000" dirty="0"/>
+          </a:p>
+        </p:txBody>
+      </p:sp>
+      <p:sp>
+        <p:nvSpPr>
+          <p:cNvPr id="13" name="Text"/>
+          <p:cNvSpPr txBox="1"/>
+          <p:nvPr/>
+        </p:nvSpPr>
+        <p:spPr>
+          <a:xfrm>
+            <a:off x="766928" y="3710000"/>
+            <a:ext cx="1290000" cy="620000"/>
+          </a:xfrm>
+          <a:prstGeom prst="rect">
+            <a:avLst/>
+          </a:prstGeom>
+          <a:noFill/>
+          <a:ln/>
+        </p:spPr>
+        <p:txBody>
+          <a:bodyPr wrap="square" lIns="0" tIns="0" rIns="0" bIns="0" rtlCol="0" anchor="ctr"/>
+          <a:lstStyle/>
+          <a:p>
+            <a:pPr indent="0" marL="0">
+              <a:buNone/>
+            </a:pPr>
+            <a:r>
+              <a:rPr lang="en-US" sz="950" b="1" dirty="0">
+                <a:solidFill>
+                  <a:srgbClr val="8FC7C7"/>
+                </a:solidFill>
+                <a:latin typeface="Arial" pitchFamily="34" charset="0"/>
+                <a:ea typeface="Arial" pitchFamily="34" charset="-122"/>
+                <a:cs typeface="Arial" pitchFamily="34" charset="-120"/>
+              </a:rPr>
+              <a:t>3. Contexto</a:t>
+            </a:r>
+            <a:endParaRPr lang="en-US" sz="950" dirty="0"/>
+          </a:p>
+        </p:txBody>
+      </p:sp>
+      <p:sp>
+        <p:nvSpPr>
+          <p:cNvPr id="14" name="Text"/>
+          <p:cNvSpPr txBox="1"/>
+          <p:nvPr/>
+        </p:nvSpPr>
+        <p:spPr>
+          <a:xfrm>
+            <a:off x="2146928" y="3710000"/>
+            <a:ext cx="3848919" cy="620000"/>
+          </a:xfrm>
+          <a:prstGeom prst="rect">
+            <a:avLst/>
+          </a:prstGeom>
+          <a:noFill/>
+          <a:ln/>
+        </p:spPr>
+        <p:txBody>
+          <a:bodyPr wrap="square" lIns="0" tIns="0" rIns="0" bIns="0" rtlCol="0" anchor="ctr"/>
+          <a:lstStyle/>
+          <a:p>
+            <a:pPr indent="0" marL="0">
+              <a:lnSpc>
+                <a:spcPct val="103000"/>
+              </a:lnSpc>
+              <a:buNone/>
+            </a:pPr>
+            <a:r>
+              <a:rPr lang="en-US" sz="1000" dirty="0">
+                <a:solidFill>
+                  <a:srgbClr val="FFFFFF"/>
+                </a:solidFill>
+                <a:latin typeface="Calibri" pitchFamily="34" charset="0"/>
+                <a:ea typeface="Calibri" pitchFamily="34" charset="-122"/>
+                <a:cs typeface="Calibri" pitchFamily="34" charset="-120"/>
+              </a:rPr>
+              <a:t>El resultado va al informe de consulta de la Entidad C, y otra persona lo va a revisar intervención por intervención contra la transcripción.</a:t>
+            </a:r>
+            <a:endParaRPr lang="en-US" sz="1000" dirty="0"/>
+          </a:p>
+        </p:txBody>
+      </p:sp>
+      <p:sp>
+        <p:nvSpPr>
+          <p:cNvPr id="15" name="Text"/>
+          <p:cNvSpPr txBox="1"/>
+          <p:nvPr/>
+        </p:nvSpPr>
+        <p:spPr>
+          <a:xfrm>
+            <a:off x="6195847" y="2470000"/>
+            <a:ext cx="1290000" cy="620000"/>
+          </a:xfrm>
+          <a:prstGeom prst="rect">
+            <a:avLst/>
+          </a:prstGeom>
+          <a:noFill/>
+          <a:ln/>
+        </p:spPr>
+        <p:txBody>
+          <a:bodyPr wrap="square" lIns="0" tIns="0" rIns="0" bIns="0" rtlCol="0" anchor="ctr"/>
+          <a:lstStyle/>
+          <a:p>
+            <a:pPr indent="0" marL="0">
+              <a:buNone/>
+            </a:pPr>
+            <a:r>
+              <a:rPr lang="en-US" sz="950" b="1" dirty="0">
+                <a:solidFill>
+                  <a:srgbClr val="8FC7C7"/>
+                </a:solidFill>
+                <a:latin typeface="Arial" pitchFamily="34" charset="0"/>
+                <a:ea typeface="Arial" pitchFamily="34" charset="-122"/>
+                <a:cs typeface="Arial" pitchFamily="34" charset="-120"/>
+              </a:rPr>
+              <a:t>4. Insumos</a:t>
+            </a:r>
+            <a:endParaRPr lang="en-US" sz="950" dirty="0"/>
+          </a:p>
+        </p:txBody>
+      </p:sp>
+      <p:sp>
+        <p:nvSpPr>
+          <p:cNvPr id="16" name="Text"/>
+          <p:cNvSpPr txBox="1"/>
+          <p:nvPr/>
+        </p:nvSpPr>
+        <p:spPr>
+          <a:xfrm>
+            <a:off x="7575847" y="2470000"/>
+            <a:ext cx="3848919" cy="620000"/>
+          </a:xfrm>
+          <a:prstGeom prst="rect">
+            <a:avLst/>
+          </a:prstGeom>
+          <a:noFill/>
+          <a:ln/>
+        </p:spPr>
+        <p:txBody>
+          <a:bodyPr wrap="square" lIns="0" tIns="0" rIns="0" bIns="0" rtlCol="0" anchor="ctr"/>
+          <a:lstStyle/>
+          <a:p>
+            <a:pPr indent="0" marL="0">
+              <a:lnSpc>
+                <a:spcPct val="103000"/>
+              </a:lnSpc>
+              <a:buNone/>
+            </a:pPr>
+            <a:r>
+              <a:rPr lang="en-US" sz="1000" dirty="0">
+                <a:solidFill>
+                  <a:srgbClr val="FFFFFF"/>
+                </a:solidFill>
+                <a:latin typeface="Calibri" pitchFamily="34" charset="0"/>
+                <a:ea typeface="Calibri" pitchFamily="34" charset="-122"/>
+                <a:cs typeface="Calibri" pitchFamily="34" charset="-120"/>
+              </a:rPr>
+              <a:t>Trabaja solo con el archivo adjunto y con las definiciones de las cuatro causas que te pego al final. Las tres intervenciones del moderador, F1-00, F1-08 y F2-00, quedan fuera.</a:t>
+            </a:r>
+            <a:endParaRPr lang="en-US" sz="1000" dirty="0"/>
+          </a:p>
+        </p:txBody>
+      </p:sp>
+      <p:sp>
+        <p:nvSpPr>
+          <p:cNvPr id="17" name="Text"/>
+          <p:cNvSpPr txBox="1"/>
+          <p:nvPr/>
+        </p:nvSpPr>
+        <p:spPr>
+          <a:xfrm>
+            <a:off x="6195847" y="3090000"/>
+            <a:ext cx="1290000" cy="620000"/>
+          </a:xfrm>
+          <a:prstGeom prst="rect">
+            <a:avLst/>
+          </a:prstGeom>
+          <a:noFill/>
+          <a:ln/>
+        </p:spPr>
+        <p:txBody>
+          <a:bodyPr wrap="square" lIns="0" tIns="0" rIns="0" bIns="0" rtlCol="0" anchor="ctr"/>
+          <a:lstStyle/>
+          <a:p>
+            <a:pPr indent="0" marL="0">
+              <a:buNone/>
+            </a:pPr>
+            <a:r>
+              <a:rPr lang="en-US" sz="950" b="1" dirty="0">
+                <a:solidFill>
+                  <a:srgbClr val="8FC7C7"/>
+                </a:solidFill>
+                <a:latin typeface="Arial" pitchFamily="34" charset="0"/>
+                <a:ea typeface="Arial" pitchFamily="34" charset="-122"/>
+                <a:cs typeface="Arial" pitchFamily="34" charset="-120"/>
+              </a:rPr>
+              <a:t>5. Restricciones</a:t>
+            </a:r>
+            <a:endParaRPr lang="en-US" sz="950" dirty="0"/>
+          </a:p>
+        </p:txBody>
+      </p:sp>
+      <p:sp>
+        <p:nvSpPr>
+          <p:cNvPr id="18" name="Text"/>
+          <p:cNvSpPr txBox="1"/>
+          <p:nvPr/>
+        </p:nvSpPr>
+        <p:spPr>
+          <a:xfrm>
+            <a:off x="7575847" y="3090000"/>
+            <a:ext cx="3848919" cy="620000"/>
+          </a:xfrm>
+          <a:prstGeom prst="rect">
+            <a:avLst/>
+          </a:prstGeom>
+          <a:noFill/>
+          <a:ln/>
+        </p:spPr>
+        <p:txBody>
+          <a:bodyPr wrap="square" lIns="0" tIns="0" rIns="0" bIns="0" rtlCol="0" anchor="ctr"/>
+          <a:lstStyle/>
+          <a:p>
+            <a:pPr indent="0" marL="0">
+              <a:lnSpc>
+                <a:spcPct val="103000"/>
+              </a:lnSpc>
+              <a:buNone/>
+            </a:pPr>
+            <a:r>
+              <a:rPr lang="en-US" sz="1000" dirty="0">
+                <a:solidFill>
+                  <a:srgbClr val="FFFFFF"/>
+                </a:solidFill>
+                <a:latin typeface="Calibri" pitchFamily="34" charset="0"/>
+                <a:ea typeface="Calibri" pitchFamily="34" charset="-122"/>
+                <a:cs typeface="Calibri" pitchFamily="34" charset="-120"/>
+              </a:rPr>
+              <a:t>Cuando una intervención toque más de una causa, la principal es sobre la que recae la queja o el reconocimiento. No partas una intervención en dos renglones. Si no alcanza para decidir, escribe «dudosa».</a:t>
+            </a:r>
+            <a:endParaRPr lang="en-US" sz="1000" dirty="0"/>
+          </a:p>
+        </p:txBody>
+      </p:sp>
+      <p:sp>
+        <p:nvSpPr>
+          <p:cNvPr id="19" name="Text"/>
+          <p:cNvSpPr txBox="1"/>
+          <p:nvPr/>
+        </p:nvSpPr>
+        <p:spPr>
+          <a:xfrm>
+            <a:off x="6195847" y="3710000"/>
+            <a:ext cx="1290000" cy="620000"/>
+          </a:xfrm>
+          <a:prstGeom prst="rect">
+            <a:avLst/>
+          </a:prstGeom>
+          <a:noFill/>
+          <a:ln/>
+        </p:spPr>
+        <p:txBody>
+          <a:bodyPr wrap="square" lIns="0" tIns="0" rIns="0" bIns="0" rtlCol="0" anchor="ctr"/>
+          <a:lstStyle/>
+          <a:p>
+            <a:pPr indent="0" marL="0">
+              <a:buNone/>
+            </a:pPr>
+            <a:r>
+              <a:rPr lang="en-US" sz="950" b="1" dirty="0">
+                <a:solidFill>
+                  <a:srgbClr val="8FC7C7"/>
+                </a:solidFill>
+                <a:latin typeface="Arial" pitchFamily="34" charset="0"/>
+                <a:ea typeface="Arial" pitchFamily="34" charset="-122"/>
+                <a:cs typeface="Arial" pitchFamily="34" charset="-120"/>
+              </a:rPr>
+              <a:t>6. Formato de salida</a:t>
+            </a:r>
+            <a:endParaRPr lang="en-US" sz="950" dirty="0"/>
+          </a:p>
+        </p:txBody>
+      </p:sp>
+      <p:sp>
+        <p:nvSpPr>
+          <p:cNvPr id="20" name="Text"/>
+          <p:cNvSpPr txBox="1"/>
+          <p:nvPr/>
+        </p:nvSpPr>
+        <p:spPr>
+          <a:xfrm>
+            <a:off x="7575847" y="3710000"/>
+            <a:ext cx="3848919" cy="620000"/>
+          </a:xfrm>
+          <a:prstGeom prst="rect">
+            <a:avLst/>
+          </a:prstGeom>
+          <a:noFill/>
+          <a:ln/>
+        </p:spPr>
+        <p:txBody>
+          <a:bodyPr wrap="square" lIns="0" tIns="0" rIns="0" bIns="0" rtlCol="0" anchor="ctr"/>
+          <a:lstStyle/>
+          <a:p>
+            <a:pPr indent="0" marL="0">
+              <a:lnSpc>
+                <a:spcPct val="103000"/>
+              </a:lnSpc>
+              <a:buNone/>
+            </a:pPr>
+            <a:r>
+              <a:rPr lang="en-US" sz="1000" dirty="0">
+                <a:solidFill>
+                  <a:srgbClr val="FFFFFF"/>
+                </a:solidFill>
+                <a:latin typeface="Calibri" pitchFamily="34" charset="0"/>
+                <a:ea typeface="Calibri" pitchFamily="34" charset="-122"/>
+                <a:cs typeface="Calibri" pitchFamily="34" charset="-120"/>
+              </a:rPr>
+              <a:t>Un renglón con cuántas clasificaste y cuáles dejaste fuera. Luego una tabla: intervención, polaridad, causa principal, causa secundaria y la frase textual en que te apoyaste, sin corregir la ortografía.</a:t>
+            </a:r>
+            <a:endParaRPr lang="en-US" sz="1000" dirty="0"/>
+          </a:p>
+        </p:txBody>
+      </p:sp>
+      <p:sp>
+        <p:nvSpPr>
+          <p:cNvPr id="21" name="Shape"/>
+          <p:cNvSpPr/>
+          <p:nvPr/>
+        </p:nvSpPr>
+        <p:spPr>
+          <a:xfrm>
+            <a:off x="566928" y="4450000"/>
+            <a:ext cx="11057839" cy="1216000"/>
+          </a:xfrm>
+          <a:prstGeom prst="roundRect">
+            <a:avLst>
+              <a:gd name="adj" fmla="val 2933"/>
+            </a:avLst>
+          </a:prstGeom>
+          <a:solidFill>
+            <a:srgbClr val="F7E4D8"/>
+          </a:solidFill>
+          <a:ln w="12700">
+            <a:solidFill>
+              <a:srgbClr val="F7E4D8"/>
+            </a:solidFill>
+            <a:prstDash val="solid"/>
+          </a:ln>
+        </p:spPr>
+      </p:sp>
+      <p:sp>
+        <p:nvSpPr>
+          <p:cNvPr id="22" name="Text"/>
+          <p:cNvSpPr txBox="1"/>
+          <p:nvPr/>
+        </p:nvSpPr>
+        <p:spPr>
+          <a:xfrm>
+            <a:off x="804672" y="4560000"/>
+            <a:ext cx="10582351" cy="230000"/>
+          </a:xfrm>
+          <a:prstGeom prst="rect">
+            <a:avLst/>
+          </a:prstGeom>
+          <a:noFill/>
+          <a:ln/>
+        </p:spPr>
+        <p:txBody>
+          <a:bodyPr wrap="square" lIns="0" tIns="0" rIns="0" bIns="0" rtlCol="0" anchor="t"/>
+          <a:lstStyle/>
+          <a:p>
+            <a:pPr indent="0" marL="0">
+              <a:buNone/>
+            </a:pPr>
+            <a:r>
+              <a:rPr lang="en-US" sz="950" b="1" spc="120" kern="0" dirty="0">
+                <a:solidFill>
+                  <a:srgbClr val="C85A28"/>
+                </a:solidFill>
+                <a:latin typeface="Arial" pitchFamily="34" charset="0"/>
+                <a:ea typeface="Arial" pitchFamily="34" charset="-122"/>
+                <a:cs typeface="Arial" pitchFamily="34" charset="-120"/>
+              </a:rPr>
+              <a:t>LO QUE REGRESÓ</a:t>
+            </a:r>
+            <a:endParaRPr lang="en-US" sz="950" dirty="0"/>
+          </a:p>
+        </p:txBody>
+      </p:sp>
+      <p:sp>
+        <p:nvSpPr>
+          <p:cNvPr id="23" name="Text"/>
+          <p:cNvSpPr txBox="1"/>
+          <p:nvPr/>
+        </p:nvSpPr>
+        <p:spPr>
+          <a:xfrm>
+            <a:off x="804672" y="4820000"/>
+            <a:ext cx="10582351" cy="780000"/>
+          </a:xfrm>
+          <a:prstGeom prst="rect">
+            <a:avLst/>
+          </a:prstGeom>
+          <a:noFill/>
+          <a:ln/>
+        </p:spPr>
+        <p:txBody>
+          <a:bodyPr wrap="square" lIns="0" tIns="0" rIns="0" bIns="0" rtlCol="0" anchor="t"/>
+          <a:lstStyle/>
+          <a:p>
+            <a:pPr indent="0" marL="0">
+              <a:lnSpc>
+                <a:spcPct val="104000"/>
+              </a:lnSpc>
+              <a:spcAft>
+                <a:spcPts val="300"/>
+              </a:spcAft>
+              <a:buNone/>
+            </a:pPr>
+            <a:r>
+              <a:rPr lang="en-US" sz="1100" dirty="0">
+                <a:solidFill>
+                  <a:srgbClr val="16262E"/>
+                </a:solidFill>
+                <a:latin typeface="Calibri" pitchFamily="34" charset="0"/>
+                <a:ea typeface="Calibri" pitchFamily="34" charset="-122"/>
+                <a:cs typeface="Calibri" pitchFamily="34" charset="-120"/>
+              </a:rPr>
+              <a:t>«Clasifiqué 38 intervenciones. Dejé fuera F1-00, F1-08 y F2-00, que son del moderador.»</a:t>
+            </a:r>
+            <a:endParaRPr lang="en-US" sz="1100" dirty="0"/>
+          </a:p>
+          <a:p>
+            <a:pPr indent="0" marL="0">
+              <a:lnSpc>
+                <a:spcPct val="104000"/>
+              </a:lnSpc>
+              <a:spcAft>
+                <a:spcPts val="300"/>
+              </a:spcAft>
+              <a:buNone/>
+            </a:pPr>
+            <a:r>
+              <a:rPr lang="en-US" sz="1100" dirty="0">
+                <a:solidFill>
+                  <a:srgbClr val="16262E"/>
+                </a:solidFill>
+                <a:latin typeface="Calibri" pitchFamily="34" charset="0"/>
+                <a:ea typeface="Calibri" pitchFamily="34" charset="-122"/>
+                <a:cs typeface="Calibri" pitchFamily="34" charset="-120"/>
+              </a:rPr>
+              <a:t>F1-09 · Positiva · Infraestructura · «quedó rete bonita la lona nueva»   ·   F2-08 · Positiva · Gestión · «Muy amables en la ventanilla, eso sí»</a:t>
+            </a:r>
+            <a:endParaRPr lang="en-US" sz="1100" dirty="0"/>
+          </a:p>
+          <a:p>
+            <a:pPr indent="0" marL="0">
+              <a:lnSpc>
+                <a:spcPct val="104000"/>
+              </a:lnSpc>
+              <a:spcAft>
+                <a:spcPts val="300"/>
+              </a:spcAft>
+              <a:buNone/>
+            </a:pPr>
+            <a:r>
+              <a:rPr lang="en-US" sz="1100" dirty="0">
+                <a:solidFill>
+                  <a:srgbClr val="16262E"/>
+                </a:solidFill>
+                <a:latin typeface="Calibri" pitchFamily="34" charset="0"/>
+                <a:ea typeface="Calibri" pitchFamily="34" charset="-122"/>
+                <a:cs typeface="Calibri" pitchFamily="34" charset="-120"/>
+              </a:rPr>
+              <a:t>F1-16 · Negativa · Presupuesto · «ojala no lo vallan a kitar»   ·   F1-14 · Negativa · Gestión · Presupuesto · «la ventanilla la pasaron a la cabecera»</a:t>
+            </a:r>
+            <a:endParaRPr lang="en-US" sz="1100" dirty="0"/>
+          </a:p>
+        </p:txBody>
+      </p:sp>
+      <p:sp>
+        <p:nvSpPr>
+          <p:cNvPr id="24" name="Shape"/>
+          <p:cNvSpPr/>
+          <p:nvPr/>
+        </p:nvSpPr>
+        <p:spPr>
+          <a:xfrm>
+            <a:off x="566928" y="5766000"/>
+            <a:ext cx="11057839" cy="460000"/>
+          </a:xfrm>
+          <a:prstGeom prst="roundRect">
+            <a:avLst>
+              <a:gd name="adj" fmla="val 8235"/>
+            </a:avLst>
+          </a:prstGeom>
+          <a:solidFill>
+            <a:srgbClr val="F7E4D8"/>
+          </a:solidFill>
+          <a:ln w="12700">
+            <a:solidFill>
+              <a:srgbClr val="F7E4D8"/>
+            </a:solidFill>
+            <a:prstDash val="solid"/>
+          </a:ln>
+        </p:spPr>
+      </p:sp>
+      <p:sp>
+        <p:nvSpPr>
+          <p:cNvPr id="25" name="Text"/>
+          <p:cNvSpPr txBox="1"/>
+          <p:nvPr/>
+        </p:nvSpPr>
+        <p:spPr>
+          <a:xfrm>
+            <a:off x="804672" y="5766000"/>
+            <a:ext cx="10582351" cy="460000"/>
+          </a:xfrm>
+          <a:prstGeom prst="rect">
+            <a:avLst/>
+          </a:prstGeom>
+          <a:noFill/>
+          <a:ln/>
+        </p:spPr>
+        <p:txBody>
+          <a:bodyPr wrap="square" lIns="0" tIns="0" rIns="0" bIns="0" rtlCol="0" anchor="ctr"/>
+          <a:lstStyle/>
+          <a:p>
+            <a:pPr indent="0" marL="0">
+              <a:lnSpc>
+                <a:spcPct val="110000"/>
+              </a:lnSpc>
+              <a:buNone/>
+            </a:pPr>
+            <a:r>
+              <a:rPr lang="en-US" sz="1300" dirty="0">
+                <a:solidFill>
+                  <a:srgbClr val="16262E"/>
+                </a:solidFill>
+                <a:latin typeface="Calibri" pitchFamily="34" charset="0"/>
+                <a:ea typeface="Calibri" pitchFamily="34" charset="-122"/>
+                <a:cs typeface="Calibri" pitchFamily="34" charset="-120"/>
+              </a:rPr>
+              <a:t>Las casillas resuelven lo que se puede declarar: que el universo son 38 y no 41. Lo que ninguna resuelve es leer la intención: F1-09 y F2-08 son sarcasmo, y el léxico amable las volvió positivas.</a:t>
+            </a:r>
+            <a:endParaRPr lang="en-US" sz="1300" dirty="0"/>
+          </a:p>
+        </p:txBody>
+      </p:sp>
+      <p:sp>
+        <p:nvSpPr>
+          <p:cNvPr id="26" name="Text"/>
+          <p:cNvSpPr txBox="1"/>
+          <p:nvPr/>
+        </p:nvSpPr>
+        <p:spPr>
+          <a:xfrm>
+            <a:off x="566928" y="6270000"/>
+            <a:ext cx="11057839" cy="240000"/>
+          </a:xfrm>
+          <a:prstGeom prst="rect">
+            <a:avLst/>
+          </a:prstGeom>
+          <a:noFill/>
+          <a:ln/>
+        </p:spPr>
+        <p:txBody>
+          <a:bodyPr wrap="square" lIns="0" tIns="0" rIns="0" bIns="0" rtlCol="0" anchor="t"/>
+          <a:lstStyle/>
+          <a:p>
+            <a:pPr indent="0" marL="0">
+              <a:buNone/>
+            </a:pPr>
+            <a:r>
+              <a:rPr lang="en-US" sz="1000" dirty="0">
+                <a:solidFill>
+                  <a:srgbClr val="5A6B73"/>
+                </a:solidFill>
+                <a:latin typeface="Calibri" pitchFamily="34" charset="0"/>
+                <a:ea typeface="Calibri" pitchFamily="34" charset="-122"/>
+                <a:cs typeface="Calibri" pitchFamily="34" charset="-120"/>
+              </a:rPr>
+              <a:t>Dato verde: el programa y los expedientes son ficticios. Con expedientes reales esto es información amarilla y solo se escribe en Copilot Chat con la cuenta del Instituto.</a:t>
+            </a:r>
+            <a:endParaRPr lang="en-US" sz="1000" dirty="0"/>
+          </a:p>
+        </p:txBody>
+      </p:sp>
+    </p:spTree>
+  </p:cSld>
+  <p:clrMapOvr>
+    <a:masterClrMapping/>
+  </p:clrMapOvr>
+</p:sld>
+</file>
+
+<file path=ppt/slides/slide32.xml><?xml version="1.0" encoding="utf-8"?>
+<p:sld xmlns:a="http://schemas.openxmlformats.org/drawingml/2006/main" xmlns:r="http://schemas.openxmlformats.org/officeDocument/2006/relationships" xmlns:p="http://schemas.openxmlformats.org/presentationml/2006/main">
+  <p:cSld name="P_laboratorio">
+    <p:spTree>
+      <p:nvGrpSpPr>
+        <p:cNvPr id="1" name=""/>
+        <p:cNvGrpSpPr/>
+        <p:nvPr/>
+      </p:nvGrpSpPr>
+      <p:grpSpPr>
+        <a:xfrm>
+          <a:off x="0" y="0"/>
+          <a:ext cx="0" cy="0"/>
+          <a:chOff x="0" y="0"/>
+          <a:chExt cx="0" cy="0"/>
+        </a:xfrm>
+      </p:grpSpPr>
+      <p:sp>
+        <p:nvSpPr>
+          <p:cNvPr id="2" name="Text"/>
+          <p:cNvSpPr txBox="1"/>
+          <p:nvPr/>
+        </p:nvSpPr>
+        <p:spPr>
+          <a:xfrm>
+            <a:off x="566928" y="402336"/>
+            <a:ext cx="11057839" cy="749808"/>
+          </a:xfrm>
+          <a:prstGeom prst="rect">
+            <a:avLst/>
+          </a:prstGeom>
+          <a:noFill/>
+          <a:ln/>
+        </p:spPr>
+        <p:txBody>
+          <a:bodyPr wrap="square" lIns="0" tIns="0" rIns="0" bIns="0" rtlCol="0" anchor="t"/>
+          <a:lstStyle/>
+          <a:p>
+            <a:pPr algn="l" indent="0" marL="0">
+              <a:buNone/>
+            </a:pPr>
+            <a:r>
+              <a:rPr lang="en-US" sz="3200" b="1" dirty="0">
+                <a:solidFill>
+                  <a:srgbClr val="16262E"/>
+                </a:solidFill>
+                <a:latin typeface="Arial" pitchFamily="34" charset="0"/>
+                <a:ea typeface="Arial" pitchFamily="34" charset="-122"/>
+                <a:cs typeface="Arial" pitchFamily="34" charset="-120"/>
+              </a:rPr>
+              <a:t>El prompt del paso 2, para copiarse tal cual</a:t>
+            </a:r>
+            <a:endParaRPr lang="en-US" sz="3200" dirty="0"/>
+          </a:p>
+        </p:txBody>
+      </p:sp>
+      <p:sp>
+        <p:nvSpPr>
+          <p:cNvPr id="3" name="Text"/>
+          <p:cNvSpPr txBox="1"/>
+          <p:nvPr/>
+        </p:nvSpPr>
+        <p:spPr>
+          <a:xfrm>
+            <a:off x="566928" y="1280160"/>
+            <a:ext cx="11057839" cy="731520"/>
+          </a:xfrm>
+          <a:prstGeom prst="rect">
+            <a:avLst/>
+          </a:prstGeom>
+          <a:noFill/>
+          <a:ln/>
+        </p:spPr>
+        <p:txBody>
+          <a:bodyPr wrap="square" lIns="0" tIns="0" rIns="0" bIns="0" rtlCol="0" anchor="t"/>
+          <a:lstStyle/>
+          <a:p>
+            <a:pPr indent="0" marL="0">
+              <a:lnSpc>
+                <a:spcPct val="108000"/>
+              </a:lnSpc>
+              <a:buNone/>
+            </a:pPr>
+            <a:r>
+              <a:rPr lang="en-US" sz="1500" dirty="0">
+                <a:solidFill>
+                  <a:srgbClr val="5A6B73"/>
+                </a:solidFill>
+                <a:latin typeface="Calibri" pitchFamily="34" charset="0"/>
+                <a:ea typeface="Calibri" pitchFamily="34" charset="-122"/>
+                <a:cs typeface="Calibri" pitchFamily="34" charset="-120"/>
+              </a:rPr>
+              <a:t>Se copia, se llenan los dos huecos y se pega en la bitácora antes de correrlo, no al final.</a:t>
+            </a:r>
+            <a:endParaRPr lang="en-US" sz="1500" dirty="0"/>
+          </a:p>
+        </p:txBody>
+      </p:sp>
+      <p:sp>
+        <p:nvSpPr>
+          <p:cNvPr id="4" name="Shape"/>
+          <p:cNvSpPr/>
+          <p:nvPr/>
+        </p:nvSpPr>
+        <p:spPr>
+          <a:xfrm>
+            <a:off x="566928" y="1700000"/>
+            <a:ext cx="11057839" cy="300000"/>
+          </a:xfrm>
+          <a:prstGeom prst="roundRect">
+            <a:avLst>
+              <a:gd name="adj" fmla="val 20000"/>
+            </a:avLst>
+          </a:prstGeom>
+          <a:solidFill>
+            <a:srgbClr val="D7E7E7"/>
+          </a:solidFill>
+          <a:ln w="12700">
+            <a:solidFill>
+              <a:srgbClr val="D7E7E7"/>
+            </a:solidFill>
+            <a:prstDash val="solid"/>
+          </a:ln>
+        </p:spPr>
+      </p:sp>
+      <p:sp>
+        <p:nvSpPr>
+          <p:cNvPr id="5" name="Text"/>
+          <p:cNvSpPr txBox="1"/>
+          <p:nvPr/>
+        </p:nvSpPr>
+        <p:spPr>
+          <a:xfrm>
+            <a:off x="766928" y="1700000"/>
+            <a:ext cx="1700000" cy="300000"/>
+          </a:xfrm>
+          <a:prstGeom prst="rect">
+            <a:avLst/>
+          </a:prstGeom>
+          <a:noFill/>
+          <a:ln/>
+        </p:spPr>
+        <p:txBody>
+          <a:bodyPr wrap="square" lIns="0" tIns="0" rIns="0" bIns="0" rtlCol="0" anchor="ctr"/>
+          <a:lstStyle/>
+          <a:p>
+            <a:pPr indent="0" marL="0">
+              <a:buNone/>
+            </a:pPr>
+            <a:r>
+              <a:rPr lang="en-US" sz="950" b="1" spc="100" kern="0" dirty="0">
+                <a:solidFill>
+                  <a:srgbClr val="2E7D7D"/>
+                </a:solidFill>
+                <a:latin typeface="Arial" pitchFamily="34" charset="0"/>
+                <a:ea typeface="Arial" pitchFamily="34" charset="-122"/>
+                <a:cs typeface="Arial" pitchFamily="34" charset="-120"/>
+              </a:rPr>
+              <a:t>DE DÓNDE SALE</a:t>
+            </a:r>
+            <a:endParaRPr lang="en-US" sz="950" dirty="0"/>
+          </a:p>
+        </p:txBody>
+      </p:sp>
+      <p:sp>
+        <p:nvSpPr>
+          <p:cNvPr id="6" name="Text"/>
+          <p:cNvSpPr txBox="1"/>
+          <p:nvPr/>
+        </p:nvSpPr>
+        <p:spPr>
+          <a:xfrm>
+            <a:off x="2516928" y="1700000"/>
+            <a:ext cx="8907839" cy="300000"/>
+          </a:xfrm>
+          <a:prstGeom prst="rect">
+            <a:avLst/>
+          </a:prstGeom>
+          <a:noFill/>
+          <a:ln/>
+        </p:spPr>
+        <p:txBody>
+          <a:bodyPr wrap="square" lIns="0" tIns="0" rIns="0" bIns="0" rtlCol="0" anchor="ctr"/>
+          <a:lstStyle/>
+          <a:p>
+            <a:pPr indent="0" marL="0">
+              <a:buNone/>
+            </a:pPr>
+            <a:r>
+              <a:rPr lang="en-US" sz="1100" dirty="0">
+                <a:solidFill>
+                  <a:srgbClr val="16262E"/>
+                </a:solidFill>
+                <a:latin typeface="Calibri" pitchFamily="34" charset="0"/>
+                <a:ea typeface="Calibri" pitchFamily="34" charset="-122"/>
+                <a:cs typeface="Calibri" pitchFamily="34" charset="-120"/>
+              </a:rPr>
+              <a:t>Se corre sobre Expedientes_LAB2.docx, adjunto completo. La salida de la derecha es hipotética y usa una Entidad J que no existe, para que ningún equipo vea su caso proyectado.</a:t>
+            </a:r>
+            <a:endParaRPr lang="en-US" sz="1100" dirty="0"/>
+          </a:p>
+        </p:txBody>
+      </p:sp>
+      <p:sp>
+        <p:nvSpPr>
+          <p:cNvPr id="7" name="Shape"/>
+          <p:cNvSpPr/>
+          <p:nvPr/>
+        </p:nvSpPr>
+        <p:spPr>
+          <a:xfrm>
+            <a:off x="566928" y="2080000"/>
+            <a:ext cx="11057839" cy="2270000"/>
+          </a:xfrm>
+          <a:prstGeom prst="roundRect">
+            <a:avLst>
+              <a:gd name="adj" fmla="val 2933"/>
+            </a:avLst>
+          </a:prstGeom>
+          <a:solidFill>
+            <a:srgbClr val="16262E"/>
+          </a:solidFill>
+          <a:ln w="12700">
+            <a:solidFill>
+              <a:srgbClr val="16262E"/>
+            </a:solidFill>
+            <a:prstDash val="solid"/>
+          </a:ln>
+        </p:spPr>
+      </p:sp>
+      <p:sp>
+        <p:nvSpPr>
+          <p:cNvPr id="8" name="Text"/>
+          <p:cNvSpPr txBox="1"/>
+          <p:nvPr/>
+        </p:nvSpPr>
+        <p:spPr>
+          <a:xfrm>
+            <a:off x="804672" y="2190000"/>
+            <a:ext cx="10582351" cy="240000"/>
+          </a:xfrm>
+          <a:prstGeom prst="rect">
+            <a:avLst/>
+          </a:prstGeom>
+          <a:noFill/>
+          <a:ln/>
+        </p:spPr>
+        <p:txBody>
+          <a:bodyPr wrap="square" lIns="0" tIns="0" rIns="0" bIns="0" rtlCol="0" anchor="t"/>
+          <a:lstStyle/>
+          <a:p>
+            <a:pPr indent="0" marL="0">
+              <a:buNone/>
+            </a:pPr>
+            <a:r>
+              <a:rPr lang="en-US" sz="950" b="1" spc="120" kern="0" dirty="0">
+                <a:solidFill>
+                  <a:srgbClr val="8FC7C7"/>
+                </a:solidFill>
+                <a:latin typeface="Arial" pitchFamily="34" charset="0"/>
+                <a:ea typeface="Arial" pitchFamily="34" charset="-122"/>
+                <a:cs typeface="Arial" pitchFamily="34" charset="-120"/>
+              </a:rPr>
+              <a:t>EL PROMPT, CON LAS SEIS CASILLAS</a:t>
+            </a:r>
+            <a:endParaRPr lang="en-US" sz="950" dirty="0"/>
+          </a:p>
+        </p:txBody>
+      </p:sp>
+      <p:sp>
+        <p:nvSpPr>
+          <p:cNvPr id="9" name="Text"/>
+          <p:cNvSpPr txBox="1"/>
+          <p:nvPr/>
+        </p:nvSpPr>
+        <p:spPr>
+          <a:xfrm>
+            <a:off x="766928" y="2470000"/>
+            <a:ext cx="1290000" cy="620000"/>
+          </a:xfrm>
+          <a:prstGeom prst="rect">
+            <a:avLst/>
+          </a:prstGeom>
+          <a:noFill/>
+          <a:ln/>
+        </p:spPr>
+        <p:txBody>
+          <a:bodyPr wrap="square" lIns="0" tIns="0" rIns="0" bIns="0" rtlCol="0" anchor="ctr"/>
+          <a:lstStyle/>
+          <a:p>
+            <a:pPr indent="0" marL="0">
+              <a:buNone/>
+            </a:pPr>
+            <a:r>
+              <a:rPr lang="en-US" sz="950" b="1" dirty="0">
+                <a:solidFill>
+                  <a:srgbClr val="8FC7C7"/>
+                </a:solidFill>
+                <a:latin typeface="Arial" pitchFamily="34" charset="0"/>
+                <a:ea typeface="Arial" pitchFamily="34" charset="-122"/>
+                <a:cs typeface="Arial" pitchFamily="34" charset="-120"/>
+              </a:rPr>
+              <a:t>1. Rol</a:t>
+            </a:r>
+            <a:endParaRPr lang="en-US" sz="950" dirty="0"/>
+          </a:p>
+        </p:txBody>
+      </p:sp>
+      <p:sp>
+        <p:nvSpPr>
+          <p:cNvPr id="10" name="Text"/>
+          <p:cNvSpPr txBox="1"/>
+          <p:nvPr/>
+        </p:nvSpPr>
+        <p:spPr>
+          <a:xfrm>
+            <a:off x="2146928" y="2470000"/>
+            <a:ext cx="3848919" cy="620000"/>
+          </a:xfrm>
+          <a:prstGeom prst="rect">
+            <a:avLst/>
+          </a:prstGeom>
+          <a:noFill/>
+          <a:ln/>
+        </p:spPr>
+        <p:txBody>
+          <a:bodyPr wrap="square" lIns="0" tIns="0" rIns="0" bIns="0" rtlCol="0" anchor="ctr"/>
+          <a:lstStyle/>
+          <a:p>
+            <a:pPr indent="0" marL="0">
+              <a:lnSpc>
+                <a:spcPct val="103000"/>
+              </a:lnSpc>
+              <a:buNone/>
+            </a:pPr>
+            <a:r>
+              <a:rPr lang="en-US" sz="1000" dirty="0">
+                <a:solidFill>
+                  <a:srgbClr val="FFFFFF"/>
+                </a:solidFill>
+                <a:latin typeface="Calibri" pitchFamily="34" charset="0"/>
+                <a:ea typeface="Calibri" pitchFamily="34" charset="-122"/>
+                <a:cs typeface="Calibri" pitchFamily="34" charset="-120"/>
+              </a:rPr>
+              <a:t>Responde como analista de evaluación de política de desarrollo social que está reuniendo la evidencia documental de un informe estatal.</a:t>
+            </a:r>
+            <a:endParaRPr lang="en-US" sz="1000" dirty="0"/>
+          </a:p>
+        </p:txBody>
+      </p:sp>
+      <p:sp>
+        <p:nvSpPr>
+          <p:cNvPr id="11" name="Text"/>
+          <p:cNvSpPr txBox="1"/>
+          <p:nvPr/>
+        </p:nvSpPr>
+        <p:spPr>
+          <a:xfrm>
+            <a:off x="766928" y="3090000"/>
+            <a:ext cx="1290000" cy="620000"/>
+          </a:xfrm>
+          <a:prstGeom prst="rect">
+            <a:avLst/>
+          </a:prstGeom>
+          <a:noFill/>
+          <a:ln/>
+        </p:spPr>
+        <p:txBody>
+          <a:bodyPr wrap="square" lIns="0" tIns="0" rIns="0" bIns="0" rtlCol="0" anchor="ctr"/>
+          <a:lstStyle/>
+          <a:p>
+            <a:pPr indent="0" marL="0">
+              <a:buNone/>
+            </a:pPr>
+            <a:r>
+              <a:rPr lang="en-US" sz="950" b="1" dirty="0">
+                <a:solidFill>
+                  <a:srgbClr val="8FC7C7"/>
+                </a:solidFill>
+                <a:latin typeface="Arial" pitchFamily="34" charset="0"/>
+                <a:ea typeface="Arial" pitchFamily="34" charset="-122"/>
+                <a:cs typeface="Arial" pitchFamily="34" charset="-120"/>
+              </a:rPr>
+              <a:t>2. Objetivo</a:t>
+            </a:r>
+            <a:endParaRPr lang="en-US" sz="950" dirty="0"/>
+          </a:p>
+        </p:txBody>
+      </p:sp>
+      <p:sp>
+        <p:nvSpPr>
+          <p:cNvPr id="12" name="Text"/>
+          <p:cNvSpPr txBox="1"/>
+          <p:nvPr/>
+        </p:nvSpPr>
+        <p:spPr>
+          <a:xfrm>
+            <a:off x="2146928" y="3090000"/>
+            <a:ext cx="3848919" cy="620000"/>
+          </a:xfrm>
+          <a:prstGeom prst="rect">
+            <a:avLst/>
+          </a:prstGeom>
+          <a:noFill/>
+          <a:ln/>
+        </p:spPr>
+        <p:txBody>
+          <a:bodyPr wrap="square" lIns="0" tIns="0" rIns="0" bIns="0" rtlCol="0" anchor="ctr"/>
+          <a:lstStyle/>
+          <a:p>
+            <a:pPr indent="0" marL="0">
+              <a:lnSpc>
+                <a:spcPct val="103000"/>
+              </a:lnSpc>
+              <a:buNone/>
+            </a:pPr>
+            <a:r>
+              <a:rPr lang="en-US" sz="1000" dirty="0">
+                <a:solidFill>
+                  <a:srgbClr val="FFFFFF"/>
+                </a:solidFill>
+                <a:latin typeface="Calibri" pitchFamily="34" charset="0"/>
+                <a:ea typeface="Calibri" pitchFamily="34" charset="-122"/>
+                <a:cs typeface="Calibri" pitchFamily="34" charset="-120"/>
+              </a:rPr>
+              <a:t>Localiza las citas textuales que sirven para responder esta pregunta de evaluación: [COPIE AQUÍ LA PREGUNTA DE SU EXPEDIENTE].</a:t>
+            </a:r>
+            <a:endParaRPr lang="en-US" sz="1000" dirty="0"/>
+          </a:p>
+        </p:txBody>
+      </p:sp>
+      <p:sp>
+        <p:nvSpPr>
+          <p:cNvPr id="13" name="Text"/>
+          <p:cNvSpPr txBox="1"/>
+          <p:nvPr/>
+        </p:nvSpPr>
+        <p:spPr>
+          <a:xfrm>
+            <a:off x="766928" y="3710000"/>
+            <a:ext cx="1290000" cy="620000"/>
+          </a:xfrm>
+          <a:prstGeom prst="rect">
+            <a:avLst/>
+          </a:prstGeom>
+          <a:noFill/>
+          <a:ln/>
+        </p:spPr>
+        <p:txBody>
+          <a:bodyPr wrap="square" lIns="0" tIns="0" rIns="0" bIns="0" rtlCol="0" anchor="ctr"/>
+          <a:lstStyle/>
+          <a:p>
+            <a:pPr indent="0" marL="0">
+              <a:buNone/>
+            </a:pPr>
+            <a:r>
+              <a:rPr lang="en-US" sz="950" b="1" dirty="0">
+                <a:solidFill>
+                  <a:srgbClr val="8FC7C7"/>
+                </a:solidFill>
+                <a:latin typeface="Arial" pitchFamily="34" charset="0"/>
+                <a:ea typeface="Arial" pitchFamily="34" charset="-122"/>
+                <a:cs typeface="Arial" pitchFamily="34" charset="-120"/>
+              </a:rPr>
+              <a:t>3. Contexto</a:t>
+            </a:r>
+            <a:endParaRPr lang="en-US" sz="950" dirty="0"/>
+          </a:p>
+        </p:txBody>
+      </p:sp>
+      <p:sp>
+        <p:nvSpPr>
+          <p:cNvPr id="14" name="Text"/>
+          <p:cNvSpPr txBox="1"/>
+          <p:nvPr/>
+        </p:nvSpPr>
+        <p:spPr>
+          <a:xfrm>
+            <a:off x="2146928" y="3710000"/>
+            <a:ext cx="3848919" cy="620000"/>
+          </a:xfrm>
+          <a:prstGeom prst="rect">
+            <a:avLst/>
+          </a:prstGeom>
+          <a:noFill/>
+          <a:ln/>
+        </p:spPr>
+        <p:txBody>
+          <a:bodyPr wrap="square" lIns="0" tIns="0" rIns="0" bIns="0" rtlCol="0" anchor="ctr"/>
+          <a:lstStyle/>
+          <a:p>
+            <a:pPr indent="0" marL="0">
+              <a:lnSpc>
+                <a:spcPct val="103000"/>
+              </a:lnSpc>
+              <a:buNone/>
+            </a:pPr>
+            <a:r>
+              <a:rPr lang="en-US" sz="1000" dirty="0">
+                <a:solidFill>
+                  <a:srgbClr val="FFFFFF"/>
+                </a:solidFill>
+                <a:latin typeface="Calibri" pitchFamily="34" charset="0"/>
+                <a:ea typeface="Calibri" pitchFamily="34" charset="-122"/>
+                <a:cs typeface="Calibri" pitchFamily="34" charset="-120"/>
+              </a:rPr>
+              <a:t>Con esas citas mi equipo va a llenar una matriz de evidencia sobre la Entidad [LETRA]. Otro equipo la va a revisar contra los mismos documentos en cuanto cerremos este paso.</a:t>
+            </a:r>
+            <a:endParaRPr lang="en-US" sz="1000" dirty="0"/>
+          </a:p>
+        </p:txBody>
+      </p:sp>
+      <p:sp>
+        <p:nvSpPr>
+          <p:cNvPr id="15" name="Text"/>
+          <p:cNvSpPr txBox="1"/>
+          <p:nvPr/>
+        </p:nvSpPr>
+        <p:spPr>
+          <a:xfrm>
+            <a:off x="6195847" y="2470000"/>
+            <a:ext cx="1290000" cy="620000"/>
+          </a:xfrm>
+          <a:prstGeom prst="rect">
+            <a:avLst/>
+          </a:prstGeom>
+          <a:noFill/>
+          <a:ln/>
+        </p:spPr>
+        <p:txBody>
+          <a:bodyPr wrap="square" lIns="0" tIns="0" rIns="0" bIns="0" rtlCol="0" anchor="ctr"/>
+          <a:lstStyle/>
+          <a:p>
+            <a:pPr indent="0" marL="0">
+              <a:buNone/>
+            </a:pPr>
+            <a:r>
+              <a:rPr lang="en-US" sz="950" b="1" dirty="0">
+                <a:solidFill>
+                  <a:srgbClr val="8FC7C7"/>
+                </a:solidFill>
+                <a:latin typeface="Arial" pitchFamily="34" charset="0"/>
+                <a:ea typeface="Arial" pitchFamily="34" charset="-122"/>
+                <a:cs typeface="Arial" pitchFamily="34" charset="-120"/>
+              </a:rPr>
+              <a:t>4. Insumos</a:t>
+            </a:r>
+            <a:endParaRPr lang="en-US" sz="950" dirty="0"/>
+          </a:p>
+        </p:txBody>
+      </p:sp>
+      <p:sp>
+        <p:nvSpPr>
+          <p:cNvPr id="16" name="Text"/>
+          <p:cNvSpPr txBox="1"/>
+          <p:nvPr/>
+        </p:nvSpPr>
+        <p:spPr>
+          <a:xfrm>
+            <a:off x="7575847" y="2470000"/>
+            <a:ext cx="3848919" cy="620000"/>
+          </a:xfrm>
+          <a:prstGeom prst="rect">
+            <a:avLst/>
+          </a:prstGeom>
+          <a:noFill/>
+          <a:ln/>
+        </p:spPr>
+        <p:txBody>
+          <a:bodyPr wrap="square" lIns="0" tIns="0" rIns="0" bIns="0" rtlCol="0" anchor="ctr"/>
+          <a:lstStyle/>
+          <a:p>
+            <a:pPr indent="0" marL="0">
+              <a:lnSpc>
+                <a:spcPct val="103000"/>
+              </a:lnSpc>
+              <a:buNone/>
+            </a:pPr>
+            <a:r>
+              <a:rPr lang="en-US" sz="1000" dirty="0">
+                <a:solidFill>
+                  <a:srgbClr val="FFFFFF"/>
+                </a:solidFill>
+                <a:latin typeface="Calibri" pitchFamily="34" charset="0"/>
+                <a:ea typeface="Calibri" pitchFamily="34" charset="-122"/>
+                <a:cs typeface="Calibri" pitchFamily="34" charset="-120"/>
+              </a:rPr>
+              <a:t>Te adjunto Expedientes_LAB2.docx. Usa nada más dos partes: el marco normativo común y el expediente de mi entidad; ignora los otros cinco, no salgas a internet y no uses tu conocimiento general.</a:t>
+            </a:r>
+            <a:endParaRPr lang="en-US" sz="1000" dirty="0"/>
+          </a:p>
+        </p:txBody>
+      </p:sp>
+      <p:sp>
+        <p:nvSpPr>
+          <p:cNvPr id="17" name="Text"/>
+          <p:cNvSpPr txBox="1"/>
+          <p:nvPr/>
+        </p:nvSpPr>
+        <p:spPr>
+          <a:xfrm>
+            <a:off x="6195847" y="3090000"/>
+            <a:ext cx="1290000" cy="620000"/>
+          </a:xfrm>
+          <a:prstGeom prst="rect">
+            <a:avLst/>
+          </a:prstGeom>
+          <a:noFill/>
+          <a:ln/>
+        </p:spPr>
+        <p:txBody>
+          <a:bodyPr wrap="square" lIns="0" tIns="0" rIns="0" bIns="0" rtlCol="0" anchor="ctr"/>
+          <a:lstStyle/>
+          <a:p>
+            <a:pPr indent="0" marL="0">
+              <a:buNone/>
+            </a:pPr>
+            <a:r>
+              <a:rPr lang="en-US" sz="950" b="1" dirty="0">
+                <a:solidFill>
+                  <a:srgbClr val="8FC7C7"/>
+                </a:solidFill>
+                <a:latin typeface="Arial" pitchFamily="34" charset="0"/>
+                <a:ea typeface="Arial" pitchFamily="34" charset="-122"/>
+                <a:cs typeface="Arial" pitchFamily="34" charset="-120"/>
+              </a:rPr>
+              <a:t>5. Restricciones</a:t>
+            </a:r>
+            <a:endParaRPr lang="en-US" sz="950" dirty="0"/>
+          </a:p>
+        </p:txBody>
+      </p:sp>
+      <p:sp>
+        <p:nvSpPr>
+          <p:cNvPr id="18" name="Text"/>
+          <p:cNvSpPr txBox="1"/>
+          <p:nvPr/>
+        </p:nvSpPr>
+        <p:spPr>
+          <a:xfrm>
+            <a:off x="7575847" y="3090000"/>
+            <a:ext cx="3848919" cy="620000"/>
+          </a:xfrm>
+          <a:prstGeom prst="rect">
+            <a:avLst/>
+          </a:prstGeom>
+          <a:noFill/>
+          <a:ln/>
+        </p:spPr>
+        <p:txBody>
+          <a:bodyPr wrap="square" lIns="0" tIns="0" rIns="0" bIns="0" rtlCol="0" anchor="ctr"/>
+          <a:lstStyle/>
+          <a:p>
+            <a:pPr indent="0" marL="0">
+              <a:lnSpc>
+                <a:spcPct val="103000"/>
+              </a:lnSpc>
+              <a:buNone/>
+            </a:pPr>
+            <a:r>
+              <a:rPr lang="en-US" sz="1000" dirty="0">
+                <a:solidFill>
+                  <a:srgbClr val="FFFFFF"/>
+                </a:solidFill>
+                <a:latin typeface="Calibri" pitchFamily="34" charset="0"/>
+                <a:ea typeface="Calibri" pitchFamily="34" charset="-122"/>
+                <a:cs typeface="Calibri" pitchFamily="34" charset="-120"/>
+              </a:rPr>
+              <a:t>Copia cada cita palabra por palabra y completa. No cambies ni agregues cifras, fechas ni nombres. Si no llegas a seis afirmaciones con cita, entrega menos y dime qué buscaste y no encontraste. No quiero conclusiones ni recomendaciones.</a:t>
+            </a:r>
+            <a:endParaRPr lang="en-US" sz="1000" dirty="0"/>
+          </a:p>
+        </p:txBody>
+      </p:sp>
+      <p:sp>
+        <p:nvSpPr>
+          <p:cNvPr id="19" name="Text"/>
+          <p:cNvSpPr txBox="1"/>
+          <p:nvPr/>
+        </p:nvSpPr>
+        <p:spPr>
+          <a:xfrm>
+            <a:off x="6195847" y="3710000"/>
+            <a:ext cx="1290000" cy="620000"/>
+          </a:xfrm>
+          <a:prstGeom prst="rect">
+            <a:avLst/>
+          </a:prstGeom>
+          <a:noFill/>
+          <a:ln/>
+        </p:spPr>
+        <p:txBody>
+          <a:bodyPr wrap="square" lIns="0" tIns="0" rIns="0" bIns="0" rtlCol="0" anchor="ctr"/>
+          <a:lstStyle/>
+          <a:p>
+            <a:pPr indent="0" marL="0">
+              <a:buNone/>
+            </a:pPr>
+            <a:r>
+              <a:rPr lang="en-US" sz="950" b="1" dirty="0">
+                <a:solidFill>
+                  <a:srgbClr val="8FC7C7"/>
+                </a:solidFill>
+                <a:latin typeface="Arial" pitchFamily="34" charset="0"/>
+                <a:ea typeface="Arial" pitchFamily="34" charset="-122"/>
+                <a:cs typeface="Arial" pitchFamily="34" charset="-120"/>
+              </a:rPr>
+              <a:t>6. Formato de salida</a:t>
+            </a:r>
+            <a:endParaRPr lang="en-US" sz="950" dirty="0"/>
+          </a:p>
+        </p:txBody>
+      </p:sp>
+      <p:sp>
+        <p:nvSpPr>
+          <p:cNvPr id="20" name="Text"/>
+          <p:cNvSpPr txBox="1"/>
+          <p:nvPr/>
+        </p:nvSpPr>
+        <p:spPr>
+          <a:xfrm>
+            <a:off x="7575847" y="3710000"/>
+            <a:ext cx="3848919" cy="620000"/>
+          </a:xfrm>
+          <a:prstGeom prst="rect">
+            <a:avLst/>
+          </a:prstGeom>
+          <a:noFill/>
+          <a:ln/>
+        </p:spPr>
+        <p:txBody>
+          <a:bodyPr wrap="square" lIns="0" tIns="0" rIns="0" bIns="0" rtlCol="0" anchor="ctr"/>
+          <a:lstStyle/>
+          <a:p>
+            <a:pPr indent="0" marL="0">
+              <a:lnSpc>
+                <a:spcPct val="103000"/>
+              </a:lnSpc>
+              <a:buNone/>
+            </a:pPr>
+            <a:r>
+              <a:rPr lang="en-US" sz="1000" dirty="0">
+                <a:solidFill>
+                  <a:srgbClr val="FFFFFF"/>
+                </a:solidFill>
+                <a:latin typeface="Calibri" pitchFamily="34" charset="0"/>
+                <a:ea typeface="Calibri" pitchFamily="34" charset="-122"/>
+                <a:cs typeface="Calibri" pitchFamily="34" charset="-120"/>
+              </a:rPr>
+              <a:t>Una tabla de máximo seis renglones y cuatro columnas: la afirmación en una oración, la cita textual entre comillas, el documento, y el artículo, tabla o apartado. No agregues más columnas.</a:t>
+            </a:r>
+            <a:endParaRPr lang="en-US" sz="1000" dirty="0"/>
+          </a:p>
+        </p:txBody>
+      </p:sp>
+      <p:sp>
+        <p:nvSpPr>
+          <p:cNvPr id="21" name="Shape"/>
+          <p:cNvSpPr/>
+          <p:nvPr/>
+        </p:nvSpPr>
+        <p:spPr>
+          <a:xfrm>
+            <a:off x="566928" y="4450000"/>
+            <a:ext cx="11057839" cy="1216000"/>
+          </a:xfrm>
+          <a:prstGeom prst="roundRect">
+            <a:avLst>
+              <a:gd name="adj" fmla="val 2933"/>
+            </a:avLst>
+          </a:prstGeom>
+          <a:solidFill>
+            <a:srgbClr val="F7E4D8"/>
+          </a:solidFill>
+          <a:ln w="12700">
+            <a:solidFill>
+              <a:srgbClr val="F7E4D8"/>
+            </a:solidFill>
+            <a:prstDash val="solid"/>
+          </a:ln>
+        </p:spPr>
+      </p:sp>
+      <p:sp>
+        <p:nvSpPr>
+          <p:cNvPr id="22" name="Text"/>
+          <p:cNvSpPr txBox="1"/>
+          <p:nvPr/>
+        </p:nvSpPr>
+        <p:spPr>
+          <a:xfrm>
+            <a:off x="804672" y="4560000"/>
+            <a:ext cx="10582351" cy="230000"/>
+          </a:xfrm>
+          <a:prstGeom prst="rect">
+            <a:avLst/>
+          </a:prstGeom>
+          <a:noFill/>
+          <a:ln/>
+        </p:spPr>
+        <p:txBody>
+          <a:bodyPr wrap="square" lIns="0" tIns="0" rIns="0" bIns="0" rtlCol="0" anchor="t"/>
+          <a:lstStyle/>
+          <a:p>
+            <a:pPr indent="0" marL="0">
+              <a:buNone/>
+            </a:pPr>
+            <a:r>
+              <a:rPr lang="en-US" sz="950" b="1" spc="120" kern="0" dirty="0">
+                <a:solidFill>
+                  <a:srgbClr val="C85A28"/>
+                </a:solidFill>
+                <a:latin typeface="Arial" pitchFamily="34" charset="0"/>
+                <a:ea typeface="Arial" pitchFamily="34" charset="-122"/>
+                <a:cs typeface="Arial" pitchFamily="34" charset="-120"/>
+              </a:rPr>
+              <a:t>LO QUE REGRESÓ</a:t>
+            </a:r>
+            <a:endParaRPr lang="en-US" sz="950" dirty="0"/>
+          </a:p>
+        </p:txBody>
+      </p:sp>
+      <p:sp>
+        <p:nvSpPr>
+          <p:cNvPr id="23" name="Text"/>
+          <p:cNvSpPr txBox="1"/>
+          <p:nvPr/>
+        </p:nvSpPr>
+        <p:spPr>
+          <a:xfrm>
+            <a:off x="804672" y="4820000"/>
+            <a:ext cx="10582351" cy="780000"/>
+          </a:xfrm>
+          <a:prstGeom prst="rect">
+            <a:avLst/>
+          </a:prstGeom>
+          <a:noFill/>
+          <a:ln/>
+        </p:spPr>
+        <p:txBody>
+          <a:bodyPr wrap="square" lIns="0" tIns="0" rIns="0" bIns="0" rtlCol="0" anchor="t"/>
+          <a:lstStyle/>
+          <a:p>
+            <a:pPr indent="0" marL="0">
+              <a:lnSpc>
+                <a:spcPct val="104000"/>
+              </a:lnSpc>
+              <a:spcAft>
+                <a:spcPts val="300"/>
+              </a:spcAft>
+              <a:buNone/>
+            </a:pPr>
+            <a:r>
+              <a:rPr lang="en-US" sz="1100" dirty="0">
+                <a:solidFill>
+                  <a:srgbClr val="16262E"/>
+                </a:solidFill>
+                <a:latin typeface="Calibri" pitchFamily="34" charset="0"/>
+                <a:ea typeface="Calibri" pitchFamily="34" charset="-122"/>
+                <a:cs typeface="Calibri" pitchFamily="34" charset="-120"/>
+              </a:rPr>
+              <a:t>«Te entrego cinco renglones con cita; para el sexto no encontré nada.»</a:t>
+            </a:r>
+            <a:endParaRPr lang="en-US" sz="1100" dirty="0"/>
+          </a:p>
+          <a:p>
+            <a:pPr indent="0" marL="0">
+              <a:lnSpc>
+                <a:spcPct val="104000"/>
+              </a:lnSpc>
+              <a:spcAft>
+                <a:spcPts val="300"/>
+              </a:spcAft>
+              <a:buNone/>
+            </a:pPr>
+            <a:r>
+              <a:rPr lang="en-US" sz="1100" dirty="0">
+                <a:solidFill>
+                  <a:srgbClr val="16262E"/>
+                </a:solidFill>
+                <a:latin typeface="Calibri" pitchFamily="34" charset="0"/>
+                <a:ea typeface="Calibri" pitchFamily="34" charset="-122"/>
+                <a:cs typeface="Calibri" pitchFamily="34" charset="-120"/>
+              </a:rPr>
+              <a:t>Renglón 3. «La reducción del monto desalienta que las personas declaren su apoyo estatal.» Cita: «En el módulo nos preguntan seguido si conviene declarar el apoyo del estado.»</a:t>
+            </a:r>
+            <a:endParaRPr lang="en-US" sz="1100" dirty="0"/>
+          </a:p>
+          <a:p>
+            <a:pPr indent="0" marL="0">
+              <a:lnSpc>
+                <a:spcPct val="104000"/>
+              </a:lnSpc>
+              <a:spcAft>
+                <a:spcPts val="300"/>
+              </a:spcAft>
+              <a:buNone/>
+            </a:pPr>
+            <a:r>
+              <a:rPr lang="en-US" sz="1100" dirty="0">
+                <a:solidFill>
+                  <a:srgbClr val="16262E"/>
+                </a:solidFill>
+                <a:latin typeface="Calibri" pitchFamily="34" charset="0"/>
+                <a:ea typeface="Calibri" pitchFamily="34" charset="-122"/>
+                <a:cs typeface="Calibri" pitchFamily="34" charset="-120"/>
+              </a:rPr>
+              <a:t>«Lo que busqué y no encontré: ninguna cifra de cuántas personas reciben apoyo estatal sin declararlo.»</a:t>
+            </a:r>
+            <a:endParaRPr lang="en-US" sz="1100" dirty="0"/>
+          </a:p>
+        </p:txBody>
+      </p:sp>
+      <p:sp>
+        <p:nvSpPr>
+          <p:cNvPr id="24" name="Shape"/>
+          <p:cNvSpPr/>
+          <p:nvPr/>
+        </p:nvSpPr>
+        <p:spPr>
+          <a:xfrm>
+            <a:off x="566928" y="5766000"/>
+            <a:ext cx="11057839" cy="460000"/>
+          </a:xfrm>
+          <a:prstGeom prst="roundRect">
+            <a:avLst>
+              <a:gd name="adj" fmla="val 8235"/>
+            </a:avLst>
+          </a:prstGeom>
+          <a:solidFill>
+            <a:srgbClr val="F7E4D8"/>
+          </a:solidFill>
+          <a:ln w="12700">
+            <a:solidFill>
+              <a:srgbClr val="F7E4D8"/>
+            </a:solidFill>
+            <a:prstDash val="solid"/>
+          </a:ln>
+        </p:spPr>
+      </p:sp>
+      <p:sp>
+        <p:nvSpPr>
+          <p:cNvPr id="25" name="Text"/>
+          <p:cNvSpPr txBox="1"/>
+          <p:nvPr/>
+        </p:nvSpPr>
+        <p:spPr>
+          <a:xfrm>
+            <a:off x="804672" y="5766000"/>
+            <a:ext cx="10582351" cy="460000"/>
+          </a:xfrm>
+          <a:prstGeom prst="rect">
+            <a:avLst/>
+          </a:prstGeom>
+          <a:noFill/>
+          <a:ln/>
+        </p:spPr>
+        <p:txBody>
+          <a:bodyPr wrap="square" lIns="0" tIns="0" rIns="0" bIns="0" rtlCol="0" anchor="ctr"/>
+          <a:lstStyle/>
+          <a:p>
+            <a:pPr indent="0" marL="0">
+              <a:lnSpc>
+                <a:spcPct val="110000"/>
+              </a:lnSpc>
+              <a:buNone/>
+            </a:pPr>
+            <a:r>
+              <a:rPr lang="en-US" sz="1300" dirty="0">
+                <a:solidFill>
+                  <a:srgbClr val="16262E"/>
+                </a:solidFill>
+                <a:latin typeface="Calibri" pitchFamily="34" charset="0"/>
+                <a:ea typeface="Calibri" pitchFamily="34" charset="-122"/>
+                <a:cs typeface="Calibri" pitchFamily="34" charset="-120"/>
+              </a:rPr>
+              <a:t>Lo que devuelve no es la matriz: son candidatos con su cita, y de las once columnas de su hoja el modelo llena cuatro. Aun así coló el renglón 3, donde la cita es textual y no dice lo que la afirmación asegura.</a:t>
+            </a:r>
+            <a:endParaRPr lang="en-US" sz="1300" dirty="0"/>
+          </a:p>
+        </p:txBody>
+      </p:sp>
+      <p:sp>
+        <p:nvSpPr>
+          <p:cNvPr id="26" name="Text"/>
+          <p:cNvSpPr txBox="1"/>
+          <p:nvPr/>
+        </p:nvSpPr>
+        <p:spPr>
+          <a:xfrm>
+            <a:off x="566928" y="6270000"/>
+            <a:ext cx="11057839" cy="240000"/>
+          </a:xfrm>
+          <a:prstGeom prst="rect">
+            <a:avLst/>
+          </a:prstGeom>
+          <a:noFill/>
+          <a:ln/>
+        </p:spPr>
+        <p:txBody>
+          <a:bodyPr wrap="square" lIns="0" tIns="0" rIns="0" bIns="0" rtlCol="0" anchor="t"/>
+          <a:lstStyle/>
+          <a:p>
+            <a:pPr indent="0" marL="0">
+              <a:buNone/>
+            </a:pPr>
+            <a:r>
+              <a:rPr lang="en-US" sz="1000" dirty="0">
+                <a:solidFill>
+                  <a:srgbClr val="5A6B73"/>
+                </a:solidFill>
+                <a:latin typeface="Calibri" pitchFamily="34" charset="0"/>
+                <a:ea typeface="Calibri" pitchFamily="34" charset="-122"/>
+                <a:cs typeface="Calibri" pitchFamily="34" charset="-120"/>
+              </a:rPr>
+              <a:t>Dato verde: el programa y los expedientes son ficticios. Con expedientes reales esto es información amarilla y solo se escribe en Copilot Chat con la cuenta del Instituto.</a:t>
+            </a:r>
+            <a:endParaRPr lang="en-US" sz="1000" dirty="0"/>
+          </a:p>
+        </p:txBody>
+      </p:sp>
+    </p:spTree>
+  </p:cSld>
+  <p:clrMapOvr>
+    <a:masterClrMapping/>
+  </p:clrMapOvr>
+</p:sld>
+</file>
+
+<file path=ppt/slides/slide33.xml><?xml version="1.0" encoding="utf-8"?>
+<p:sld xmlns:a="http://schemas.openxmlformats.org/drawingml/2006/main" xmlns:r="http://schemas.openxmlformats.org/officeDocument/2006/relationships" xmlns:p="http://schemas.openxmlformats.org/presentationml/2006/main">
+  <p:cSld name="P_salidas">
+    <p:spTree>
+      <p:nvGrpSpPr>
+        <p:cNvPr id="1" name=""/>
+        <p:cNvGrpSpPr/>
+        <p:nvPr/>
+      </p:nvGrpSpPr>
+      <p:grpSpPr>
+        <a:xfrm>
+          <a:off x="0" y="0"/>
+          <a:ext cx="0" cy="0"/>
+          <a:chOff x="0" y="0"/>
+          <a:chExt cx="0" cy="0"/>
+        </a:xfrm>
+      </p:grpSpPr>
+      <p:sp>
+        <p:nvSpPr>
+          <p:cNvPr id="2" name="Text"/>
+          <p:cNvSpPr txBox="1"/>
+          <p:nvPr/>
+        </p:nvSpPr>
+        <p:spPr>
+          <a:xfrm>
+            <a:off x="566928" y="402336"/>
+            <a:ext cx="11057839" cy="749808"/>
+          </a:xfrm>
+          <a:prstGeom prst="rect">
+            <a:avLst/>
+          </a:prstGeom>
+          <a:noFill/>
+          <a:ln/>
+        </p:spPr>
+        <p:txBody>
+          <a:bodyPr wrap="square" lIns="0" tIns="0" rIns="0" bIns="0" rtlCol="0" anchor="t"/>
+          <a:lstStyle/>
+          <a:p>
+            <a:pPr algn="l" indent="0" marL="0">
+              <a:buNone/>
+            </a:pPr>
+            <a:r>
+              <a:rPr lang="en-US" sz="3200" b="1" dirty="0">
+                <a:solidFill>
+                  <a:srgbClr val="16262E"/>
+                </a:solidFill>
+                <a:latin typeface="Arial" pitchFamily="34" charset="0"/>
+                <a:ea typeface="Arial" pitchFamily="34" charset="-122"/>
+                <a:cs typeface="Arial" pitchFamily="34" charset="-120"/>
+              </a:rPr>
+              <a:t>El párrafo se lee mejor y dice cuatro cosas de más</a:t>
+            </a:r>
+            <a:endParaRPr lang="en-US" sz="3200" dirty="0"/>
+          </a:p>
+        </p:txBody>
+      </p:sp>
+      <p:sp>
+        <p:nvSpPr>
+          <p:cNvPr id="3" name="Text"/>
+          <p:cNvSpPr txBox="1"/>
+          <p:nvPr/>
+        </p:nvSpPr>
+        <p:spPr>
+          <a:xfrm>
+            <a:off x="566928" y="1280160"/>
+            <a:ext cx="11057839" cy="731520"/>
+          </a:xfrm>
+          <a:prstGeom prst="rect">
+            <a:avLst/>
+          </a:prstGeom>
+          <a:noFill/>
+          <a:ln/>
+        </p:spPr>
+        <p:txBody>
+          <a:bodyPr wrap="square" lIns="0" tIns="0" rIns="0" bIns="0" rtlCol="0" anchor="t"/>
+          <a:lstStyle/>
+          <a:p>
+            <a:pPr indent="0" marL="0">
+              <a:lnSpc>
+                <a:spcPct val="108000"/>
+              </a:lnSpc>
+              <a:buNone/>
+            </a:pPr>
+            <a:r>
+              <a:rPr lang="en-US" sz="1500" dirty="0">
+                <a:solidFill>
+                  <a:srgbClr val="5A6B73"/>
+                </a:solidFill>
+                <a:latin typeface="Calibri" pitchFamily="34" charset="0"/>
+                <a:ea typeface="Calibri" pitchFamily="34" charset="-122"/>
+                <a:cs typeface="Calibri" pitchFamily="34" charset="-120"/>
+              </a:rPr>
+              <a:t>Esta es la salida de la versión B, con lo que se coló señalado.</a:t>
+            </a:r>
+            <a:endParaRPr lang="en-US" sz="1500" dirty="0"/>
+          </a:p>
+        </p:txBody>
+      </p:sp>
+      <p:sp>
+        <p:nvSpPr>
+          <p:cNvPr id="4" name="Shape"/>
+          <p:cNvSpPr/>
+          <p:nvPr/>
+        </p:nvSpPr>
+        <p:spPr>
+          <a:xfrm>
+            <a:off x="566928" y="1700000"/>
+            <a:ext cx="11057839" cy="300000"/>
+          </a:xfrm>
+          <a:prstGeom prst="roundRect">
+            <a:avLst>
+              <a:gd name="adj" fmla="val 20000"/>
+            </a:avLst>
+          </a:prstGeom>
+          <a:solidFill>
+            <a:srgbClr val="D7E7E7"/>
+          </a:solidFill>
+          <a:ln w="12700">
+            <a:solidFill>
+              <a:srgbClr val="D7E7E7"/>
+            </a:solidFill>
+            <a:prstDash val="solid"/>
+          </a:ln>
+        </p:spPr>
+      </p:sp>
+      <p:sp>
+        <p:nvSpPr>
+          <p:cNvPr id="5" name="Text"/>
+          <p:cNvSpPr txBox="1"/>
+          <p:nvPr/>
+        </p:nvSpPr>
+        <p:spPr>
+          <a:xfrm>
+            <a:off x="766928" y="1700000"/>
+            <a:ext cx="1700000" cy="300000"/>
+          </a:xfrm>
+          <a:prstGeom prst="rect">
+            <a:avLst/>
+          </a:prstGeom>
+          <a:noFill/>
+          <a:ln/>
+        </p:spPr>
+        <p:txBody>
+          <a:bodyPr wrap="square" lIns="0" tIns="0" rIns="0" bIns="0" rtlCol="0" anchor="ctr"/>
+          <a:lstStyle/>
+          <a:p>
+            <a:pPr indent="0" marL="0">
+              <a:buNone/>
+            </a:pPr>
+            <a:r>
+              <a:rPr lang="en-US" sz="950" b="1" spc="100" kern="0" dirty="0">
+                <a:solidFill>
+                  <a:srgbClr val="2E7D7D"/>
+                </a:solidFill>
+                <a:latin typeface="Arial" pitchFamily="34" charset="0"/>
+                <a:ea typeface="Arial" pitchFamily="34" charset="-122"/>
+                <a:cs typeface="Arial" pitchFamily="34" charset="-120"/>
+              </a:rPr>
+              <a:t>DE DÓNDE SALE</a:t>
+            </a:r>
+            <a:endParaRPr lang="en-US" sz="950" dirty="0"/>
+          </a:p>
+        </p:txBody>
+      </p:sp>
+      <p:sp>
+        <p:nvSpPr>
+          <p:cNvPr id="6" name="Text"/>
+          <p:cNvSpPr txBox="1"/>
+          <p:nvPr/>
+        </p:nvSpPr>
+        <p:spPr>
+          <a:xfrm>
+            <a:off x="2516928" y="1700000"/>
+            <a:ext cx="8907839" cy="300000"/>
+          </a:xfrm>
+          <a:prstGeom prst="rect">
+            <a:avLst/>
+          </a:prstGeom>
+          <a:noFill/>
+          <a:ln/>
+        </p:spPr>
+        <p:txBody>
+          <a:bodyPr wrap="square" lIns="0" tIns="0" rIns="0" bIns="0" rtlCol="0" anchor="ctr"/>
+          <a:lstStyle/>
+          <a:p>
+            <a:pPr indent="0" marL="0">
+              <a:buNone/>
+            </a:pPr>
+            <a:r>
+              <a:rPr lang="en-US" sz="1100" dirty="0">
+                <a:solidFill>
+                  <a:srgbClr val="16262E"/>
+                </a:solidFill>
+                <a:latin typeface="Calibri" pitchFamily="34" charset="0"/>
+                <a:ea typeface="Calibri" pitchFamily="34" charset="-122"/>
+                <a:cs typeface="Calibri" pitchFamily="34" charset="-120"/>
+              </a:rPr>
+              <a:t>Artículo 21 de las Reglas de Operación 2025. El párrafo es hipotético; las fracciones del artículo son textuales.</a:t>
+            </a:r>
+            <a:endParaRPr lang="en-US" sz="1100" dirty="0"/>
+          </a:p>
+        </p:txBody>
+      </p:sp>
+      <p:sp>
+        <p:nvSpPr>
+          <p:cNvPr id="7" name="Shape"/>
+          <p:cNvSpPr/>
+          <p:nvPr/>
+        </p:nvSpPr>
+        <p:spPr>
+          <a:xfrm>
+            <a:off x="566928" y="2080000"/>
+            <a:ext cx="11057839" cy="900000"/>
+          </a:xfrm>
+          <a:prstGeom prst="roundRect">
+            <a:avLst>
+              <a:gd name="adj" fmla="val 2933"/>
+            </a:avLst>
+          </a:prstGeom>
+          <a:solidFill>
+            <a:srgbClr val="F2F5F6"/>
+          </a:solidFill>
+          <a:ln w="12700">
+            <a:solidFill>
+              <a:srgbClr val="F2F5F6"/>
+            </a:solidFill>
+            <a:prstDash val="solid"/>
+          </a:ln>
+        </p:spPr>
+      </p:sp>
+      <p:sp>
+        <p:nvSpPr>
+          <p:cNvPr id="8" name="Text"/>
+          <p:cNvSpPr txBox="1"/>
+          <p:nvPr/>
+        </p:nvSpPr>
+        <p:spPr>
+          <a:xfrm>
+            <a:off x="866928" y="2080000"/>
+            <a:ext cx="10457839" cy="900000"/>
+          </a:xfrm>
+          <a:prstGeom prst="rect">
+            <a:avLst/>
+          </a:prstGeom>
+          <a:noFill/>
+          <a:ln/>
+        </p:spPr>
+        <p:txBody>
+          <a:bodyPr wrap="square" lIns="0" tIns="0" rIns="0" bIns="0" rtlCol="0" anchor="ctr"/>
+          <a:lstStyle/>
+          <a:p>
+            <a:pPr indent="0" marL="0">
+              <a:lnSpc>
+                <a:spcPct val="108000"/>
+              </a:lnSpc>
+              <a:buNone/>
+            </a:pPr>
+            <a:r>
+              <a:rPr lang="en-US" sz="1250" i="1" dirty="0">
+                <a:solidFill>
+                  <a:srgbClr val="16262E"/>
+                </a:solidFill>
+                <a:latin typeface="Calibri" pitchFamily="34" charset="0"/>
+                <a:ea typeface="Calibri" pitchFamily="34" charset="-122"/>
+                <a:cs typeface="Calibri" pitchFamily="34" charset="-120"/>
+              </a:rPr>
+              <a:t>«El artículo 21 establece las condiciones mínimas que debe cumplir un centro comunitario de cuidado: una persona responsable por cada seis a ocho personas atendidas, jornadas de ocho horas, personal certificado, registro de asistencia y protocolo de emergencias. En conjunto, estas condiciones garantizan un estándar homogéneo de calidad en el cuidado y permiten supervisar el desempeño de los centros.»</a:t>
+            </a:r>
+            <a:endParaRPr lang="en-US" sz="1250" dirty="0"/>
+          </a:p>
+        </p:txBody>
+      </p:sp>
+      <p:sp>
+        <p:nvSpPr>
+          <p:cNvPr id="9" name="Shape"/>
+          <p:cNvSpPr/>
+          <p:nvPr/>
+        </p:nvSpPr>
+        <p:spPr>
+          <a:xfrm>
+            <a:off x="566928" y="3120000"/>
+            <a:ext cx="2584459" cy="2260000"/>
+          </a:xfrm>
+          <a:prstGeom prst="roundRect">
+            <a:avLst>
+              <a:gd name="adj" fmla="val 2933"/>
+            </a:avLst>
+          </a:prstGeom>
+          <a:solidFill>
+            <a:srgbClr val="F7E4D8"/>
+          </a:solidFill>
+          <a:ln w="12700">
+            <a:solidFill>
+              <a:srgbClr val="F7E4D8"/>
+            </a:solidFill>
+            <a:prstDash val="solid"/>
+          </a:ln>
+        </p:spPr>
+      </p:sp>
+      <p:sp>
+        <p:nvSpPr>
+          <p:cNvPr id="10" name="Text"/>
+          <p:cNvSpPr txBox="1"/>
+          <p:nvPr/>
+        </p:nvSpPr>
+        <p:spPr>
+          <a:xfrm>
+            <a:off x="766928" y="3260000"/>
+            <a:ext cx="2184459" cy="560000"/>
+          </a:xfrm>
+          <a:prstGeom prst="rect">
+            <a:avLst/>
+          </a:prstGeom>
+          <a:noFill/>
+          <a:ln/>
+        </p:spPr>
+        <p:txBody>
+          <a:bodyPr wrap="square" lIns="0" tIns="0" rIns="0" bIns="0" rtlCol="0" anchor="t"/>
+          <a:lstStyle/>
+          <a:p>
+            <a:pPr indent="0" marL="0">
+              <a:lnSpc>
+                <a:spcPct val="102000"/>
+              </a:lnSpc>
+              <a:buNone/>
+            </a:pPr>
+            <a:r>
+              <a:rPr lang="en-US" sz="1200" b="1" dirty="0">
+                <a:solidFill>
+                  <a:srgbClr val="C85A28"/>
+                </a:solidFill>
+                <a:latin typeface="Arial" pitchFamily="34" charset="0"/>
+                <a:ea typeface="Arial" pitchFamily="34" charset="-122"/>
+                <a:cs typeface="Arial" pitchFamily="34" charset="-120"/>
+              </a:rPr>
+              <a:t>«por cada seis a ocho personas atendidas»</a:t>
+            </a:r>
+            <a:endParaRPr lang="en-US" sz="1200" dirty="0"/>
+          </a:p>
+        </p:txBody>
+      </p:sp>
+      <p:sp>
+        <p:nvSpPr>
+          <p:cNvPr id="11" name="Text"/>
+          <p:cNvSpPr txBox="1"/>
+          <p:nvPr/>
+        </p:nvSpPr>
+        <p:spPr>
+          <a:xfrm>
+            <a:off x="766928" y="3900000"/>
+            <a:ext cx="2184459" cy="1380000"/>
+          </a:xfrm>
+          <a:prstGeom prst="rect">
+            <a:avLst/>
+          </a:prstGeom>
+          <a:noFill/>
+          <a:ln/>
+        </p:spPr>
+        <p:txBody>
+          <a:bodyPr wrap="square" lIns="0" tIns="0" rIns="0" bIns="0" rtlCol="0" anchor="t"/>
+          <a:lstStyle/>
+          <a:p>
+            <a:pPr indent="0" marL="0">
+              <a:lnSpc>
+                <a:spcPct val="105000"/>
+              </a:lnSpc>
+              <a:buNone/>
+            </a:pPr>
+            <a:r>
+              <a:rPr lang="en-US" sz="1100" dirty="0">
+                <a:solidFill>
+                  <a:srgbClr val="16262E"/>
+                </a:solidFill>
+                <a:latin typeface="Calibri" pitchFamily="34" charset="0"/>
+                <a:ea typeface="Calibri" pitchFamily="34" charset="-122"/>
+                <a:cs typeface="Calibri" pitchFamily="34" charset="-120"/>
+              </a:rPr>
+              <a:t>La fracción I no da un rango: da dos razones para dos poblaciones distintas, una por cada ocho menores de seis años y una por cada seis personas adultas mayores o con discapacidad.</a:t>
+            </a:r>
+            <a:endParaRPr lang="en-US" sz="1100" dirty="0"/>
+          </a:p>
+        </p:txBody>
+      </p:sp>
+      <p:sp>
+        <p:nvSpPr>
+          <p:cNvPr id="12" name="Shape"/>
+          <p:cNvSpPr/>
+          <p:nvPr/>
+        </p:nvSpPr>
+        <p:spPr>
+          <a:xfrm>
+            <a:off x="3391387" y="3120000"/>
+            <a:ext cx="2584459" cy="2260000"/>
+          </a:xfrm>
+          <a:prstGeom prst="roundRect">
+            <a:avLst>
+              <a:gd name="adj" fmla="val 2933"/>
+            </a:avLst>
+          </a:prstGeom>
+          <a:solidFill>
+            <a:srgbClr val="F7E4D8"/>
+          </a:solidFill>
+          <a:ln w="12700">
+            <a:solidFill>
+              <a:srgbClr val="F7E4D8"/>
+            </a:solidFill>
+            <a:prstDash val="solid"/>
+          </a:ln>
+        </p:spPr>
+      </p:sp>
+      <p:sp>
+        <p:nvSpPr>
+          <p:cNvPr id="13" name="Text"/>
+          <p:cNvSpPr txBox="1"/>
+          <p:nvPr/>
+        </p:nvSpPr>
+        <p:spPr>
+          <a:xfrm>
+            <a:off x="3591387" y="3260000"/>
+            <a:ext cx="2184459" cy="560000"/>
+          </a:xfrm>
+          <a:prstGeom prst="rect">
+            <a:avLst/>
+          </a:prstGeom>
+          <a:noFill/>
+          <a:ln/>
+        </p:spPr>
+        <p:txBody>
+          <a:bodyPr wrap="square" lIns="0" tIns="0" rIns="0" bIns="0" rtlCol="0" anchor="t"/>
+          <a:lstStyle/>
+          <a:p>
+            <a:pPr indent="0" marL="0">
+              <a:lnSpc>
+                <a:spcPct val="102000"/>
+              </a:lnSpc>
+              <a:buNone/>
+            </a:pPr>
+            <a:r>
+              <a:rPr lang="en-US" sz="1200" b="1" dirty="0">
+                <a:solidFill>
+                  <a:srgbClr val="C85A28"/>
+                </a:solidFill>
+                <a:latin typeface="Arial" pitchFamily="34" charset="0"/>
+                <a:ea typeface="Arial" pitchFamily="34" charset="-122"/>
+                <a:cs typeface="Arial" pitchFamily="34" charset="-120"/>
+              </a:rPr>
+              <a:t>«jornadas de ocho horas»</a:t>
+            </a:r>
+            <a:endParaRPr lang="en-US" sz="1200" dirty="0"/>
+          </a:p>
+        </p:txBody>
+      </p:sp>
+      <p:sp>
+        <p:nvSpPr>
+          <p:cNvPr id="14" name="Text"/>
+          <p:cNvSpPr txBox="1"/>
+          <p:nvPr/>
+        </p:nvSpPr>
+        <p:spPr>
+          <a:xfrm>
+            <a:off x="3591387" y="3900000"/>
+            <a:ext cx="2184459" cy="1380000"/>
+          </a:xfrm>
+          <a:prstGeom prst="rect">
+            <a:avLst/>
+          </a:prstGeom>
+          <a:noFill/>
+          <a:ln/>
+        </p:spPr>
+        <p:txBody>
+          <a:bodyPr wrap="square" lIns="0" tIns="0" rIns="0" bIns="0" rtlCol="0" anchor="t"/>
+          <a:lstStyle/>
+          <a:p>
+            <a:pPr indent="0" marL="0">
+              <a:lnSpc>
+                <a:spcPct val="105000"/>
+              </a:lnSpc>
+              <a:buNone/>
+            </a:pPr>
+            <a:r>
+              <a:rPr lang="en-US" sz="1100" dirty="0">
+                <a:solidFill>
+                  <a:srgbClr val="16262E"/>
+                </a:solidFill>
+                <a:latin typeface="Calibri" pitchFamily="34" charset="0"/>
+                <a:ea typeface="Calibri" pitchFamily="34" charset="-122"/>
+                <a:cs typeface="Calibri" pitchFamily="34" charset="-120"/>
+              </a:rPr>
+              <a:t>Se cayeron dos precisiones de la fracción II: continuas y en días hábiles. Un centro que abre cuatro horas en la mañana y cuatro en la tarde cumple con el resumen y no con la norma.</a:t>
+            </a:r>
+            <a:endParaRPr lang="en-US" sz="1100" dirty="0"/>
+          </a:p>
+        </p:txBody>
+      </p:sp>
+      <p:sp>
+        <p:nvSpPr>
+          <p:cNvPr id="15" name="Shape"/>
+          <p:cNvSpPr/>
+          <p:nvPr/>
+        </p:nvSpPr>
+        <p:spPr>
+          <a:xfrm>
+            <a:off x="6215846" y="3120000"/>
+            <a:ext cx="2584459" cy="2260000"/>
+          </a:xfrm>
+          <a:prstGeom prst="roundRect">
+            <a:avLst>
+              <a:gd name="adj" fmla="val 2933"/>
+            </a:avLst>
+          </a:prstGeom>
+          <a:solidFill>
+            <a:srgbClr val="F7E4D8"/>
+          </a:solidFill>
+          <a:ln w="12700">
+            <a:solidFill>
+              <a:srgbClr val="F7E4D8"/>
+            </a:solidFill>
+            <a:prstDash val="solid"/>
+          </a:ln>
+        </p:spPr>
+      </p:sp>
+      <p:sp>
+        <p:nvSpPr>
+          <p:cNvPr id="16" name="Text"/>
+          <p:cNvSpPr txBox="1"/>
+          <p:nvPr/>
+        </p:nvSpPr>
+        <p:spPr>
+          <a:xfrm>
+            <a:off x="6415846" y="3260000"/>
+            <a:ext cx="2184459" cy="560000"/>
+          </a:xfrm>
+          <a:prstGeom prst="rect">
+            <a:avLst/>
+          </a:prstGeom>
+          <a:noFill/>
+          <a:ln/>
+        </p:spPr>
+        <p:txBody>
+          <a:bodyPr wrap="square" lIns="0" tIns="0" rIns="0" bIns="0" rtlCol="0" anchor="t"/>
+          <a:lstStyle/>
+          <a:p>
+            <a:pPr indent="0" marL="0">
+              <a:lnSpc>
+                <a:spcPct val="102000"/>
+              </a:lnSpc>
+              <a:buNone/>
+            </a:pPr>
+            <a:r>
+              <a:rPr lang="en-US" sz="1200" b="1" dirty="0">
+                <a:solidFill>
+                  <a:srgbClr val="C85A28"/>
+                </a:solidFill>
+                <a:latin typeface="Arial" pitchFamily="34" charset="0"/>
+                <a:ea typeface="Arial" pitchFamily="34" charset="-122"/>
+                <a:cs typeface="Arial" pitchFamily="34" charset="-120"/>
+              </a:rPr>
+              <a:t>«personal certificado»</a:t>
+            </a:r>
+            <a:endParaRPr lang="en-US" sz="1200" dirty="0"/>
+          </a:p>
+        </p:txBody>
+      </p:sp>
+      <p:sp>
+        <p:nvSpPr>
+          <p:cNvPr id="17" name="Text"/>
+          <p:cNvSpPr txBox="1"/>
+          <p:nvPr/>
+        </p:nvSpPr>
+        <p:spPr>
+          <a:xfrm>
+            <a:off x="6415846" y="3900000"/>
+            <a:ext cx="2184459" cy="1380000"/>
+          </a:xfrm>
+          <a:prstGeom prst="rect">
+            <a:avLst/>
+          </a:prstGeom>
+          <a:noFill/>
+          <a:ln/>
+        </p:spPr>
+        <p:txBody>
+          <a:bodyPr wrap="square" lIns="0" tIns="0" rIns="0" bIns="0" rtlCol="0" anchor="t"/>
+          <a:lstStyle/>
+          <a:p>
+            <a:pPr indent="0" marL="0">
+              <a:lnSpc>
+                <a:spcPct val="105000"/>
+              </a:lnSpc>
+              <a:buNone/>
+            </a:pPr>
+            <a:r>
+              <a:rPr lang="en-US" sz="1100" dirty="0">
+                <a:solidFill>
+                  <a:srgbClr val="16262E"/>
+                </a:solidFill>
+                <a:latin typeface="Calibri" pitchFamily="34" charset="0"/>
+                <a:ea typeface="Calibri" pitchFamily="34" charset="-122"/>
+                <a:cs typeface="Calibri" pitchFamily="34" charset="-120"/>
+              </a:rPr>
+              <a:t>La fracción III pide que la totalidad del personal tenga certificación vigente. Sin esas dos palabras, un centro con la mitad del personal certificado pasa sin observación.</a:t>
+            </a:r>
+            <a:endParaRPr lang="en-US" sz="1100" dirty="0"/>
+          </a:p>
+        </p:txBody>
+      </p:sp>
+      <p:sp>
+        <p:nvSpPr>
+          <p:cNvPr id="18" name="Shape"/>
+          <p:cNvSpPr/>
+          <p:nvPr/>
+        </p:nvSpPr>
+        <p:spPr>
+          <a:xfrm>
+            <a:off x="9040305" y="3120000"/>
+            <a:ext cx="2584459" cy="2260000"/>
+          </a:xfrm>
+          <a:prstGeom prst="roundRect">
+            <a:avLst>
+              <a:gd name="adj" fmla="val 2933"/>
+            </a:avLst>
+          </a:prstGeom>
+          <a:solidFill>
+            <a:srgbClr val="F7E4D8"/>
+          </a:solidFill>
+          <a:ln w="12700">
+            <a:solidFill>
+              <a:srgbClr val="F7E4D8"/>
+            </a:solidFill>
+            <a:prstDash val="solid"/>
+          </a:ln>
+        </p:spPr>
+      </p:sp>
+      <p:sp>
+        <p:nvSpPr>
+          <p:cNvPr id="19" name="Text"/>
+          <p:cNvSpPr txBox="1"/>
+          <p:nvPr/>
+        </p:nvSpPr>
+        <p:spPr>
+          <a:xfrm>
+            <a:off x="9240305" y="3260000"/>
+            <a:ext cx="2184459" cy="560000"/>
+          </a:xfrm>
+          <a:prstGeom prst="rect">
+            <a:avLst/>
+          </a:prstGeom>
+          <a:noFill/>
+          <a:ln/>
+        </p:spPr>
+        <p:txBody>
+          <a:bodyPr wrap="square" lIns="0" tIns="0" rIns="0" bIns="0" rtlCol="0" anchor="t"/>
+          <a:lstStyle/>
+          <a:p>
+            <a:pPr indent="0" marL="0">
+              <a:lnSpc>
+                <a:spcPct val="102000"/>
+              </a:lnSpc>
+              <a:buNone/>
+            </a:pPr>
+            <a:r>
+              <a:rPr lang="en-US" sz="1200" b="1" dirty="0">
+                <a:solidFill>
+                  <a:srgbClr val="C85A28"/>
+                </a:solidFill>
+                <a:latin typeface="Arial" pitchFamily="34" charset="0"/>
+                <a:ea typeface="Arial" pitchFamily="34" charset="-122"/>
+                <a:cs typeface="Arial" pitchFamily="34" charset="-120"/>
+              </a:rPr>
+              <a:t>«garantizan calidad» y «permiten supervisar»</a:t>
+            </a:r>
+            <a:endParaRPr lang="en-US" sz="1200" dirty="0"/>
+          </a:p>
+        </p:txBody>
+      </p:sp>
+      <p:sp>
+        <p:nvSpPr>
+          <p:cNvPr id="20" name="Text"/>
+          <p:cNvSpPr txBox="1"/>
+          <p:nvPr/>
+        </p:nvSpPr>
+        <p:spPr>
+          <a:xfrm>
+            <a:off x="9240305" y="3900000"/>
+            <a:ext cx="2184459" cy="1380000"/>
+          </a:xfrm>
+          <a:prstGeom prst="rect">
+            <a:avLst/>
+          </a:prstGeom>
+          <a:noFill/>
+          <a:ln/>
+        </p:spPr>
+        <p:txBody>
+          <a:bodyPr wrap="square" lIns="0" tIns="0" rIns="0" bIns="0" rtlCol="0" anchor="t"/>
+          <a:lstStyle/>
+          <a:p>
+            <a:pPr indent="0" marL="0">
+              <a:lnSpc>
+                <a:spcPct val="105000"/>
+              </a:lnSpc>
+              <a:buNone/>
+            </a:pPr>
+            <a:r>
+              <a:rPr lang="en-US" sz="1100" dirty="0">
+                <a:solidFill>
+                  <a:srgbClr val="16262E"/>
+                </a:solidFill>
+                <a:latin typeface="Calibri" pitchFamily="34" charset="0"/>
+                <a:ea typeface="Calibri" pitchFamily="34" charset="-122"/>
+                <a:cs typeface="Calibri" pitchFamily="34" charset="-120"/>
+              </a:rPr>
+              <a:t>El artículo fija condiciones mínimas y pide un registro de asistencia. De calidad y de supervisión no dice una palabra: los dos verbos los puso el asistente.</a:t>
+            </a:r>
+            <a:endParaRPr lang="en-US" sz="1100" dirty="0"/>
+          </a:p>
+        </p:txBody>
+      </p:sp>
+      <p:sp>
+        <p:nvSpPr>
+          <p:cNvPr id="21" name="Shape"/>
+          <p:cNvSpPr/>
+          <p:nvPr/>
+        </p:nvSpPr>
+        <p:spPr>
+          <a:xfrm>
+            <a:off x="566928" y="5520000"/>
+            <a:ext cx="11057839" cy="640000"/>
+          </a:xfrm>
+          <a:prstGeom prst="roundRect">
+            <a:avLst>
+              <a:gd name="adj" fmla="val 8235"/>
+            </a:avLst>
+          </a:prstGeom>
+          <a:solidFill>
+            <a:srgbClr val="F7E4D8"/>
+          </a:solidFill>
+          <a:ln w="12700">
+            <a:solidFill>
+              <a:srgbClr val="F7E4D8"/>
+            </a:solidFill>
+            <a:prstDash val="solid"/>
+          </a:ln>
+        </p:spPr>
+      </p:sp>
+      <p:sp>
+        <p:nvSpPr>
+          <p:cNvPr id="22" name="Text"/>
+          <p:cNvSpPr txBox="1"/>
+          <p:nvPr/>
+        </p:nvSpPr>
+        <p:spPr>
+          <a:xfrm>
+            <a:off x="804672" y="5520000"/>
+            <a:ext cx="10582351" cy="640000"/>
+          </a:xfrm>
+          <a:prstGeom prst="rect">
+            <a:avLst/>
+          </a:prstGeom>
+          <a:noFill/>
+          <a:ln/>
+        </p:spPr>
+        <p:txBody>
+          <a:bodyPr wrap="square" lIns="0" tIns="0" rIns="0" bIns="0" rtlCol="0" anchor="ctr"/>
+          <a:lstStyle/>
+          <a:p>
+            <a:pPr indent="0" marL="0">
+              <a:lnSpc>
+                <a:spcPct val="110000"/>
+              </a:lnSpc>
+              <a:buNone/>
+            </a:pPr>
+            <a:r>
+              <a:rPr lang="en-US" sz="1300" dirty="0">
+                <a:solidFill>
+                  <a:srgbClr val="16262E"/>
+                </a:solidFill>
+                <a:latin typeface="Calibri" pitchFamily="34" charset="0"/>
+                <a:ea typeface="Calibri" pitchFamily="34" charset="-122"/>
+                <a:cs typeface="Calibri" pitchFamily="34" charset="-120"/>
+              </a:rPr>
+              <a:t>El párrafo cita el artículo 21 desde la primera línea, así que el control no puede ser que traiga cita. Tiene que ser la correspondencia frase por frase contra la fuente, que es exactamente la regla dura del laboratorio de hoy.</a:t>
+            </a:r>
+            <a:endParaRPr lang="en-US" sz="1300" dirty="0"/>
+          </a:p>
+        </p:txBody>
+      </p:sp>
+      <p:sp>
+        <p:nvSpPr>
+          <p:cNvPr id="23" name="Text"/>
+          <p:cNvSpPr txBox="1"/>
+          <p:nvPr/>
+        </p:nvSpPr>
+        <p:spPr>
+          <a:xfrm>
+            <a:off x="566928" y="6280000"/>
+            <a:ext cx="11057839" cy="240000"/>
+          </a:xfrm>
+          <a:prstGeom prst="rect">
+            <a:avLst/>
+          </a:prstGeom>
+          <a:noFill/>
+          <a:ln/>
+        </p:spPr>
+        <p:txBody>
+          <a:bodyPr wrap="square" lIns="0" tIns="0" rIns="0" bIns="0" rtlCol="0" anchor="t"/>
+          <a:lstStyle/>
+          <a:p>
+            <a:pPr indent="0" marL="0">
+              <a:buNone/>
+            </a:pPr>
+            <a:r>
+              <a:rPr lang="en-US" sz="1000" dirty="0">
+                <a:solidFill>
+                  <a:srgbClr val="5A6B73"/>
+                </a:solidFill>
+                <a:latin typeface="Calibri" pitchFamily="34" charset="0"/>
+                <a:ea typeface="Calibri" pitchFamily="34" charset="-122"/>
+                <a:cs typeface="Calibri" pitchFamily="34" charset="-120"/>
+              </a:rPr>
+              <a:t>Dato verde: el programa y los expedientes son ficticios. Con expedientes reales esto es información amarilla y solo se escribe en Copilot Chat con la cuenta del Instituto.</a:t>
             </a:r>
             <a:endParaRPr lang="en-US" sz="1000" dirty="0"/>
           </a:p>
@@ -23272,7 +28429,7 @@
                 <a:ea typeface="Calibri" pitchFamily="34" charset="-122"/>
                 <a:cs typeface="Calibri" pitchFamily="34" charset="-120"/>
               </a:rPr>
-              <a:t>10:20 a 11:22</a:t>
+              <a:t>10:39 a 11:44</a:t>
             </a:r>
             <a:endParaRPr lang="en-US" sz="1200" dirty="0"/>
           </a:p>
@@ -24783,7 +29940,7 @@
                 <a:ea typeface="Arial" pitchFamily="34" charset="-122"/>
                 <a:cs typeface="Arial" pitchFamily="34" charset="-120"/>
               </a:rPr>
-              <a:t>10 min · corte 10:38</a:t>
+              <a:t>10 min · corte 10:57</a:t>
             </a:r>
             <a:endParaRPr lang="en-US" sz="1100" dirty="0"/>
           </a:p>
@@ -24916,7 +30073,7 @@
                 <a:ea typeface="Calibri" pitchFamily="34" charset="-122"/>
                 <a:cs typeface="Calibri" pitchFamily="34" charset="-120"/>
               </a:rPr>
-              <a:t>Construyan la matriz con seis afirmaciones trazadas: cita textual copiada, documento y sección, herramienta usada, quién verificó y nivel de confianza.</a:t>
+              <a:t>Construyan la matriz con seis afirmaciones trazadas. El prompt de arranque está en la lámina anterior: cópienlo a la bitácora antes de correrlo.</a:t>
             </a:r>
             <a:endParaRPr lang="en-US" sz="1250" dirty="0"/>
           </a:p>
@@ -24955,7 +30112,7 @@
                 <a:ea typeface="Arial" pitchFamily="34" charset="-122"/>
                 <a:cs typeface="Arial" pitchFamily="34" charset="-120"/>
               </a:rPr>
-              <a:t>20 min · corte 10:58</a:t>
+              <a:t>20 min · corte 11:17</a:t>
             </a:r>
             <a:endParaRPr lang="en-US" sz="1100" dirty="0"/>
           </a:p>
@@ -25127,7 +30284,7 @@
                 <a:ea typeface="Arial" pitchFamily="34" charset="-122"/>
                 <a:cs typeface="Arial" pitchFamily="34" charset="-120"/>
               </a:rPr>
-              <a:t>11 min · corte 11:09</a:t>
+              <a:t>11 min · corte 11:28</a:t>
             </a:r>
             <a:endParaRPr lang="en-US" sz="1100" dirty="0"/>
           </a:p>
@@ -25299,7 +30456,7 @@
                 <a:ea typeface="Arial" pitchFamily="34" charset="-122"/>
                 <a:cs typeface="Arial" pitchFamily="34" charset="-120"/>
               </a:rPr>
-              <a:t>5 min · corte 11:14</a:t>
+              <a:t>5 min · corte 11:33</a:t>
             </a:r>
             <a:endParaRPr lang="en-US" sz="1100" dirty="0"/>
           </a:p>
@@ -25471,7 +30628,7 @@
                 <a:ea typeface="Arial" pitchFamily="34" charset="-122"/>
                 <a:cs typeface="Arial" pitchFamily="34" charset="-120"/>
               </a:rPr>
-              <a:t>2 min · corte 11:16</a:t>
+              <a:t>2 min · corte 11:35</a:t>
             </a:r>
             <a:endParaRPr lang="en-US" sz="1100" dirty="0"/>
           </a:p>

--- a/sesion-06/Sesion_06_Laboratorio_Cualitativo.pptx
+++ b/sesion-06/Sesion_06_Laboratorio_Cualitativo.pptx
@@ -21,17 +21,19 @@
     <p:sldId id="269" r:id="rId63"/>
     <p:sldId id="270" r:id="rId57"/>
     <p:sldId id="271" r:id="rId61"/>
-    <p:sldId id="272" r:id="rId50"/>
-    <p:sldId id="273" r:id="rId54"/>
-    <p:sldId id="274" r:id="rId6"/>
-    <p:sldId id="275" r:id="rId7"/>
-    <p:sldId id="276" r:id="rId8"/>
-    <p:sldId id="277" r:id="rId62"/>
-    <p:sldId id="278" r:id="rId11"/>
-    <p:sldId id="279" r:id="rId12"/>
-    <p:sldId id="280" r:id="rId13"/>
-    <p:sldId id="281" r:id="rId14"/>
-    <p:sldId id="282" r:id="rId52"/>
+    <p:sldId id="272" r:id="rId64"/>
+    <p:sldId id="273" r:id="rId65"/>
+    <p:sldId id="274" r:id="rId50"/>
+    <p:sldId id="275" r:id="rId54"/>
+    <p:sldId id="276" r:id="rId6"/>
+    <p:sldId id="277" r:id="rId7"/>
+    <p:sldId id="278" r:id="rId8"/>
+    <p:sldId id="279" r:id="rId62"/>
+    <p:sldId id="280" r:id="rId11"/>
+    <p:sldId id="281" r:id="rId12"/>
+    <p:sldId id="282" r:id="rId13"/>
+    <p:sldId id="283" r:id="rId14"/>
+    <p:sldId id="284" r:id="rId52"/>
   </p:sldIdLst>
   <p:notesMasterIdLst>
     <p:notesMasterId r:id="rId15"/>
@@ -1640,49 +1642,37 @@
           <a:p>
             <a:r>
               <a:rPr lang="en-US" dirty="0"/>
-              <a:t>Doce minutos. Es la lámina con la que este grupo se va a enganchar. Recorra las columnas de izquierda a derecha y deje la fórmula para el final.</a:t>
+              <a:t>Ocho minutos, no doce: la intuición ya está dada en las dos láminas anteriores, así que aquí solo se confirman los números y se agrega el tercer caso.</a:t>
             </a:r>
           </a:p>
           <a:p>
             <a:r>
               <a:rPr lang="en-US" dirty="0"/>
-              <a:t>La banda de arriba recuerda que el corpus es el de los foros del viernes, no el expediente de hoy. Es el único momento del bloque en que cambiamos de documento, y por eso la lámina anterior lo presenta.</a:t>
+              <a:t>La tercera columna es el remate y es nueva para ellos: dos personas que nunca abren el archivo y siempre escriben la categoría más común llegan al 97.4 por ciento con kappa exactamente cero.</a:t>
             </a:r>
           </a:p>
           <a:p>
             <a:r>
               <a:rPr lang="en-US" dirty="0"/>
-              <a:t>Los números de la primera columna son de su propio corpus de foros: la clave y una reclasificación independiente coincidieron en 36 de 38 en causa raíz.</a:t>
+              <a:t>Diga el supuesto en voz alta, porque alguien lo va a pedir: se supone que los dos codificadores reparten las categorías en las mismas proporciones. Si lo señalan, reconózcalo: estrictamente eso es pi de Scott. El matiz que lo salva: recorriendo todas las configuraciones posibles, kappa se mueve solo entre 0.927 y 0.929.</a:t>
             </a:r>
           </a:p>
           <a:p>
             <a:r>
               <a:rPr lang="en-US" dirty="0"/>
-              <a:t>Diga el supuesto en voz alta, porque alguien lo va a pedir: se supone que los dos codificadores reparten las categorías en las mismas proporciones. Si lo señalan, reconózcalo, eso es pi de Scott y no kappa de Cohen en sentido estricto. El matiz que lo salva: recorriendo todas las configuraciones posibles de marginales del segundo codificador, kappa se mueve entre 0.927 y 0.929. Aquí el supuesto es inofensivo; en las otras dos columnas las marginales son justamente lo que decide todo.</a:t>
+              <a:t>Si alguien pregunta por qué 38 y no 41: son 41 intervenciones y 3 son del moderador. Excluirlas cambia las marginales y por lo tanto el acuerdo esperado; es el tipo de decisión que se declara antes de medir.</a:t>
             </a:r>
           </a:p>
           <a:p>
             <a:r>
               <a:rPr lang="en-US" dirty="0"/>
-              <a:t>La tercera columna es el remate. Dos personas que nunca abren el archivo y siempre escriben la categoría más común llegan al 97.4 por ciento con kappa exactamente cero, porque no hubo ninguna decisión que medir.</a:t>
+              <a:t>La fórmula del recuadro es la que van a usar en el paso 4, con enteros. De dónde sale: kappa es acuerdo observado menos esperado, entre uno menos el esperado; con seis filas, multiplicar arriba y abajo por 36 deja todo en enteros.</a:t>
             </a:r>
           </a:p>
           <a:p>
             <a:r>
               <a:rPr lang="en-US" dirty="0"/>
-              <a:t>Si alguien pregunta por qué 38 y no 41: son 41 intervenciones y 3 son del moderador, que quedan fuera del conjunto clasificable. Excluirlas cambia las marginales y por lo tanto el acuerdo esperado. Es justo el tipo de decisión que se declara antes de medir.</a:t>
-            </a:r>
-          </a:p>
-          <a:p>
-            <a:r>
-              <a:rPr lang="en-US" dirty="0"/>
-              <a:t>La fórmula del recuadro es la que van a usar en el paso 4, con enteros. Demuestre de dónde sale: kappa es acuerdo observado menos esperado, entre uno menos el esperado; con seis filas, multiplicar arriba y abajo por 36 deja todo en enteros.</a:t>
-            </a:r>
-          </a:p>
-          <a:p>
-            <a:r>
-              <a:rPr lang="en-US" dirty="0"/>
-              <a:t>Las escalas de interpretación se fueron al handout a propósito. Si alguien pregunta de dónde sale que 0.61 es sustancial, la respuesta es Landis y Koch 1977, que los propios autores llamaron arbitrarios, y que además circulan en dos versiones que difieren en los extremos. En clase basta una frase: el umbral se fija antes de ver el resultado.</a:t>
+              <a:t>Las escalas de interpretación se fueron al handout. Si preguntan de dónde sale que 0.61 es sustancial: de Landis y Koch, 1977, cortes que los propios autores llamaron arbitrarios.</a:t>
             </a:r>
           </a:p>
         </p:txBody>
@@ -2941,6 +2931,230 @@
             <a:fld id="{B3C21451-1387-4CA6-816F-3879F97B5CB9}" type="slidenum">
               <a:rPr lang="en-US"/>
               <a:t>33</a:t>
+            </a:fld>
+            <a:endParaRPr lang="en-US"/>
+          </a:p>
+        </p:txBody>
+      </p:sp>
+    </p:spTree>
+  </p:cSld>
+  <p:clrMapOvr>
+    <a:masterClrMapping/>
+  </p:clrMapOvr>
+</p:notes>
+</file>
+
+<file path=ppt/notesSlides/notesSlide34.xml><?xml version="1.0" encoding="utf-8"?>
+<p:notes xmlns:a="http://schemas.openxmlformats.org/drawingml/2006/main" xmlns:r="http://schemas.openxmlformats.org/officeDocument/2006/relationships" xmlns:p="http://schemas.openxmlformats.org/presentationml/2006/main">
+  <p:cSld>
+    <p:spTree>
+      <p:nvGrpSpPr>
+        <p:cNvPr id="1" name=""/>
+        <p:cNvGrpSpPr/>
+        <p:nvPr/>
+      </p:nvGrpSpPr>
+      <p:grpSpPr>
+        <a:xfrm>
+          <a:off x="0" y="0"/>
+          <a:ext cx="0" cy="0"/>
+          <a:chOff x="0" y="0"/>
+          <a:chExt cx="0" cy="0"/>
+        </a:xfrm>
+      </p:grpSpPr>
+      <p:sp>
+        <p:nvSpPr>
+          <p:cNvPr id="2" name="Slide Image Placeholder 1"/>
+          <p:cNvSpPr>
+            <a:spLocks noGrp="1" noRot="1" noChangeAspect="1"/>
+          </p:cNvSpPr>
+          <p:nvPr>
+            <p:ph type="sldImg"/>
+          </p:nvPr>
+        </p:nvSpPr>
+        <p:spPr/>
+      </p:sp>
+      <p:sp>
+        <p:nvSpPr>
+          <p:cNvPr id="3" name="Notes Placeholder 2"/>
+          <p:cNvSpPr>
+            <a:spLocks noGrp="1"/>
+          </p:cNvSpPr>
+          <p:nvPr>
+            <p:ph type="body" idx="1"/>
+          </p:nvPr>
+        </p:nvSpPr>
+        <p:spPr/>
+        <p:txBody>
+          <a:bodyPr/>
+          <a:lstStyle/>
+          <a:p>
+            <a:r>
+              <a:rPr lang="en-US" dirty="0"/>
+              <a:t>Cuatro minutos. Es el puente que faltaba entre el sarcasmo y el acuerdo, y conviene decirlo con esas palabras: cambiamos de pregunta.</a:t>
+            </a:r>
+          </a:p>
+          <a:p>
+            <a:r>
+              <a:rPr lang="en-US" dirty="0"/>
+              <a:t>El panel izquierdo es lo que ya hicieron hace veinte minutos; el derecho es lo que acaban de ver. Léalos en ese orden y deje que el contraste haga el trabajo.</a:t>
+            </a:r>
+          </a:p>
+          <a:p>
+            <a:r>
+              <a:rPr lang="en-US" dirty="0"/>
+              <a:t>La pregunta que destraba al grupo si no lo ven: ¿contra qué lista comparo para saber si F1-09 está bien clasificada? No hay ninguna. En el artículo 9 sí la había.</a:t>
+            </a:r>
+          </a:p>
+          <a:p>
+            <a:r>
+              <a:rPr lang="en-US" dirty="0"/>
+              <a:t>El recuadro oscuro es el giro. Dígalo despacio: ya no medimos si acertó, medimos si dos personas coinciden. Eso es confiabilidad y no exactitud, y son cosas distintas.</a:t>
+            </a:r>
+          </a:p>
+          <a:p>
+            <a:r>
+              <a:rPr lang="en-US" dirty="0"/>
+              <a:t>Por qué vale la pena aprenderlo aunque no sea tan común como precisión y recuperación: porque es la única evidencia de que un libro de códigos es reproducible. Y sin eso, las categorías de una evaluación no se pueden defender.</a:t>
+            </a:r>
+          </a:p>
+          <a:p>
+            <a:r>
+              <a:rPr lang="en-US" dirty="0"/>
+              <a:t>Objeción probable: «entonces el modelo puede ser el segundo codificador». No. Un modelo corriendo dos veces es la misma fuente de error; dos personas son dos fuentes distintas. Lo que se mide aquí es humano contra humano, o humano contra modelo, nunca el modelo consigo mismo.</a:t>
+            </a:r>
+          </a:p>
+        </p:txBody>
+      </p:sp>
+      <p:sp>
+        <p:nvSpPr>
+          <p:cNvPr id="4" name="Slide Number Placeholder 3"/>
+          <p:cNvSpPr>
+            <a:spLocks noGrp="1"/>
+          </p:cNvSpPr>
+          <p:nvPr>
+            <p:ph type="sldNum" sz="quarter" idx="10"/>
+          </p:nvPr>
+        </p:nvSpPr>
+        <p:spPr/>
+        <p:txBody>
+          <a:bodyPr/>
+          <a:lstStyle/>
+          <a:p>
+            <a:fld id="{B3C21451-1387-4CA6-816F-3879F97B5CB9}" type="slidenum">
+              <a:rPr lang="en-US"/>
+              <a:t>34</a:t>
+            </a:fld>
+            <a:endParaRPr lang="en-US"/>
+          </a:p>
+        </p:txBody>
+      </p:sp>
+    </p:spTree>
+  </p:cSld>
+  <p:clrMapOvr>
+    <a:masterClrMapping/>
+  </p:clrMapOvr>
+</p:notes>
+</file>
+
+<file path=ppt/notesSlides/notesSlide35.xml><?xml version="1.0" encoding="utf-8"?>
+<p:notes xmlns:a="http://schemas.openxmlformats.org/drawingml/2006/main" xmlns:r="http://schemas.openxmlformats.org/officeDocument/2006/relationships" xmlns:p="http://schemas.openxmlformats.org/presentationml/2006/main">
+  <p:cSld>
+    <p:spTree>
+      <p:nvGrpSpPr>
+        <p:cNvPr id="1" name=""/>
+        <p:cNvGrpSpPr/>
+        <p:nvPr/>
+      </p:nvGrpSpPr>
+      <p:grpSpPr>
+        <a:xfrm>
+          <a:off x="0" y="0"/>
+          <a:ext cx="0" cy="0"/>
+          <a:chOff x="0" y="0"/>
+          <a:chExt cx="0" cy="0"/>
+        </a:xfrm>
+      </p:grpSpPr>
+      <p:sp>
+        <p:nvSpPr>
+          <p:cNvPr id="2" name="Slide Image Placeholder 1"/>
+          <p:cNvSpPr>
+            <a:spLocks noGrp="1" noRot="1" noChangeAspect="1"/>
+          </p:cNvSpPr>
+          <p:nvPr>
+            <p:ph type="sldImg"/>
+          </p:nvPr>
+        </p:nvSpPr>
+        <p:spPr/>
+      </p:sp>
+      <p:sp>
+        <p:nvSpPr>
+          <p:cNvPr id="3" name="Notes Placeholder 2"/>
+          <p:cNvSpPr>
+            <a:spLocks noGrp="1"/>
+          </p:cNvSpPr>
+          <p:nvPr>
+            <p:ph type="body" idx="1"/>
+          </p:nvPr>
+        </p:nvSpPr>
+        <p:spPr/>
+        <p:txBody>
+          <a:bodyPr/>
+          <a:lstStyle/>
+          <a:p>
+            <a:r>
+              <a:rPr lang="en-US" dirty="0"/>
+              <a:t>Cinco minutos, y es la lámina que hace entendible todo lo que sigue. No proyecte la fórmula algebraica todavía: aquí solo hay barras.</a:t>
+            </a:r>
+          </a:p>
+          <a:p>
+            <a:r>
+              <a:rPr lang="en-US" dirty="0"/>
+              <a:t>Recorra la leyenda primero. Gris: el acuerdo que se obtiene sin leer, solo porque las categorías no son igual de frecuentes. Verde: lo que ganaron leyendo. Claro: lo que faltó.</a:t>
+            </a:r>
+          </a:p>
+          <a:p>
+            <a:r>
+              <a:rPr lang="en-US" dirty="0"/>
+              <a:t>Las dos barras terminan en el mismo punto, 94.7 por ciento. Señálelo con el dedo: el porcentaje observado es idéntico. Lo que cambia es dónde arrancaban.</a:t>
+            </a:r>
+          </a:p>
+          <a:p>
+            <a:r>
+              <a:rPr lang="en-US" dirty="0"/>
+              <a:t>La frase que se llevan: kappa es la fracción del margen que quedaba y que efectivamente se ganó. Arriba quedaban 73 puntos y ganaron 68, que es 0.93; abajo quedaban 14 y ganaron 9, que es 0.64.</a:t>
+            </a:r>
+          </a:p>
+          <a:p>
+            <a:r>
+              <a:rPr lang="en-US" dirty="0"/>
+              <a:t>Los tres valores de referencia: 1 es ganar todo el margen, 0 es no ganar nada porque todo era azar, y negativo es coincidir menos de lo que el azar predecía.</a:t>
+            </a:r>
+          </a:p>
+          <a:p>
+            <a:r>
+              <a:rPr lang="en-US" dirty="0"/>
+              <a:t>Si alguien pregunta de dónde sale el gris: es la probabilidad de que dos personas coincidan por casualidad, dadas las frecuencias con que cada una usa las categorías. La fórmula completa está en la lámina siguiente y en el handout.</a:t>
+            </a:r>
+          </a:p>
+        </p:txBody>
+      </p:sp>
+      <p:sp>
+        <p:nvSpPr>
+          <p:cNvPr id="4" name="Slide Number Placeholder 3"/>
+          <p:cNvSpPr>
+            <a:spLocks noGrp="1"/>
+          </p:cNvSpPr>
+          <p:nvPr>
+            <p:ph type="sldNum" sz="quarter" idx="10"/>
+          </p:nvPr>
+        </p:nvSpPr>
+        <p:spPr/>
+        <p:txBody>
+          <a:bodyPr/>
+          <a:lstStyle/>
+          <a:p>
+            <a:fld id="{B3C21451-1387-4CA6-816F-3879F97B5CB9}" type="slidenum">
+              <a:rPr lang="en-US"/>
+              <a:t>35</a:t>
             </a:fld>
             <a:endParaRPr lang="en-US"/>
           </a:p>
@@ -3170,7 +3384,7 @@
           <a:p>
             <a:r>
               <a:rPr lang="en-US" dirty="0"/>
-              <a:t>Cuarenta y ocho minutos de práctica dentro de un bloque de sesenta y cinco, de 10:39 a 11:44. El encargo son nueve minutos porque incluye la lámina del prompt; dos para abrir salas; la práctica de 10:47 a 11:35; dos de regreso y cuatro de reporte.</a:t>
+              <a:t>Cuarenta y ocho minutos de práctica dentro de un bloque de sesenta y cinco, de 10:44 a 11:49. El encargo son nueve minutos porque incluye la lámina del prompt; dos para abrir salas; la práctica de 10:55 a 11:43; dos de regreso y cuatro de reporte.</a:t>
             </a:r>
           </a:p>
           <a:p>
@@ -7737,7 +7951,7 @@
                 <a:ea typeface="Arial" pitchFamily="34" charset="-122"/>
                 <a:cs typeface="Arial" pitchFamily="34" charset="-120"/>
               </a:rPr>
-              <a:t>9:10 a 10:29</a:t>
+              <a:t>9:10 a 10:34</a:t>
             </a:r>
             <a:endParaRPr lang="en-US" sz="1200" dirty="0"/>
           </a:p>
@@ -11671,7 +11885,7 @@
                 <a:ea typeface="Arial" pitchFamily="34" charset="-122"/>
                 <a:cs typeface="Arial" pitchFamily="34" charset="-120"/>
               </a:rPr>
-              <a:t>9:00 a 12:00</a:t>
+              <a:t>9:00 a 12:05</a:t>
             </a:r>
             <a:endParaRPr lang="en-US" sz="1200" dirty="0"/>
           </a:p>
@@ -11953,7 +12167,7 @@
                 <a:ea typeface="Arial" pitchFamily="34" charset="-122"/>
                 <a:cs typeface="Arial" pitchFamily="34" charset="-120"/>
               </a:rPr>
-              <a:t>9:20</a:t>
+              <a:t>9:21</a:t>
             </a:r>
             <a:endParaRPr lang="en-US" sz="1300" dirty="0"/>
           </a:p>
@@ -11995,7 +12209,7 @@
                 <a:ea typeface="Calibri" pitchFamily="34" charset="-122"/>
                 <a:cs typeface="Calibri" pitchFamily="34" charset="-120"/>
               </a:rPr>
-              <a:t>Medir la extracción: el prompt, la salida y el costo del error</a:t>
+              <a:t>Medir la extracción: prompt, salida y costo del error</a:t>
             </a:r>
             <a:endParaRPr lang="en-US" sz="1350" dirty="0"/>
           </a:p>
@@ -12061,7 +12275,7 @@
                 <a:ea typeface="Arial" pitchFamily="34" charset="-122"/>
                 <a:cs typeface="Arial" pitchFamily="34" charset="-120"/>
               </a:rPr>
-              <a:t>9:41</a:t>
+              <a:t>9:38</a:t>
             </a:r>
             <a:endParaRPr lang="en-US" sz="1300" dirty="0"/>
           </a:p>
@@ -12103,7 +12317,7 @@
                 <a:ea typeface="Calibri" pitchFamily="34" charset="-122"/>
                 <a:cs typeface="Calibri" pitchFamily="34" charset="-120"/>
               </a:rPr>
-              <a:t>Atribución: el prompt y la cita que no sostiene</a:t>
+              <a:t>Atribución, y las dos síntesis de dos prompts casi iguales</a:t>
             </a:r>
             <a:endParaRPr lang="en-US" sz="1350" dirty="0"/>
           </a:p>
@@ -12169,7 +12383,7 @@
                 <a:ea typeface="Arial" pitchFamily="34" charset="-122"/>
                 <a:cs typeface="Arial" pitchFamily="34" charset="-120"/>
               </a:rPr>
-              <a:t>9:52</a:t>
+              <a:t>9:59</a:t>
             </a:r>
             <a:endParaRPr lang="en-US" sz="1300" dirty="0"/>
           </a:p>
@@ -12211,7 +12425,7 @@
                 <a:ea typeface="Calibri" pitchFamily="34" charset="-122"/>
                 <a:cs typeface="Calibri" pitchFamily="34" charset="-120"/>
               </a:rPr>
-              <a:t>Las dos síntesis, el corpus de foros y el acuerdo</a:t>
+              <a:t>El corpus de foros, el acuerdo entre codificadores y la matriz</a:t>
             </a:r>
             <a:endParaRPr lang="en-US" sz="1350" dirty="0"/>
           </a:p>
@@ -12277,7 +12491,7 @@
                 <a:ea typeface="Arial" pitchFamily="34" charset="-122"/>
                 <a:cs typeface="Arial" pitchFamily="34" charset="-120"/>
               </a:rPr>
-              <a:t>10:29</a:t>
+              <a:t>10:34</a:t>
             </a:r>
             <a:endParaRPr lang="en-US" sz="1300" dirty="0"/>
           </a:p>
@@ -12385,7 +12599,7 @@
                 <a:ea typeface="Arial" pitchFamily="34" charset="-122"/>
                 <a:cs typeface="Arial" pitchFamily="34" charset="-120"/>
               </a:rPr>
-              <a:t>10:39</a:t>
+              <a:t>10:44</a:t>
             </a:r>
             <a:endParaRPr lang="en-US" sz="1300" dirty="0"/>
           </a:p>
@@ -12493,7 +12707,7 @@
                 <a:ea typeface="Arial" pitchFamily="34" charset="-122"/>
                 <a:cs typeface="Arial" pitchFamily="34" charset="-120"/>
               </a:rPr>
-              <a:t>11:44</a:t>
+              <a:t>11:49</a:t>
             </a:r>
             <a:endParaRPr lang="en-US" sz="1300" dirty="0"/>
           </a:p>
@@ -12680,7 +12894,7 @@
                 <a:ea typeface="Calibri" pitchFamily="34" charset="-122"/>
                 <a:cs typeface="Calibri" pitchFamily="34" charset="-120"/>
               </a:rPr>
-              <a:t>Dos codificadores coinciden en el 95 por ciento de los casos. ¿Eso es bueno?</a:t>
+              <a:t>Los mismos dos casos de la lámina anterior, con los números completos, y un tercero que conviene conocer.</a:t>
             </a:r>
             <a:endParaRPr lang="en-US" sz="1500" dirty="0"/>
           </a:p>
@@ -28190,6 +28404,1706 @@
                 <a:cs typeface="Calibri" pitchFamily="34" charset="-120"/>
               </a:rPr>
               <a:t>Dato verde: el programa y los expedientes son ficticios. Con expedientes reales esto es información amarilla y solo se escribe en Copilot Chat con la cuenta del Instituto.</a:t>
+            </a:r>
+            <a:endParaRPr lang="en-US" sz="1000" dirty="0"/>
+          </a:p>
+        </p:txBody>
+      </p:sp>
+    </p:spTree>
+  </p:cSld>
+  <p:clrMapOvr>
+    <a:masterClrMapping/>
+  </p:clrMapOvr>
+</p:sld>
+</file>
+
+<file path=ppt/slides/slide34.xml><?xml version="1.0" encoding="utf-8"?>
+<p:sld xmlns:a="http://schemas.openxmlformats.org/drawingml/2006/main" xmlns:r="http://schemas.openxmlformats.org/officeDocument/2006/relationships" xmlns:p="http://schemas.openxmlformats.org/presentationml/2006/main">
+  <p:cSld name="Sin respuesta correcta">
+    <p:spTree>
+      <p:nvGrpSpPr>
+        <p:cNvPr id="1" name=""/>
+        <p:cNvGrpSpPr/>
+        <p:nvPr/>
+      </p:nvGrpSpPr>
+      <p:grpSpPr>
+        <a:xfrm>
+          <a:off x="0" y="0"/>
+          <a:ext cx="0" cy="0"/>
+          <a:chOff x="0" y="0"/>
+          <a:chExt cx="0" cy="0"/>
+        </a:xfrm>
+      </p:grpSpPr>
+      <p:sp>
+        <p:nvSpPr>
+          <p:cNvPr id="2" name="Text"/>
+          <p:cNvSpPr txBox="1"/>
+          <p:nvPr/>
+        </p:nvSpPr>
+        <p:spPr>
+          <a:xfrm>
+            <a:off x="566928" y="402336"/>
+            <a:ext cx="11057839" cy="749808"/>
+          </a:xfrm>
+          <a:prstGeom prst="rect">
+            <a:avLst/>
+          </a:prstGeom>
+          <a:noFill/>
+          <a:ln/>
+        </p:spPr>
+        <p:txBody>
+          <a:bodyPr wrap="square" lIns="0" tIns="0" rIns="0" bIns="0" rtlCol="0" anchor="t"/>
+          <a:lstStyle/>
+          <a:p>
+            <a:pPr algn="l" indent="0" marL="0">
+              <a:buNone/>
+            </a:pPr>
+            <a:r>
+              <a:rPr lang="en-US" sz="3200" b="1" dirty="0">
+                <a:solidFill>
+                  <a:srgbClr val="16262E"/>
+                </a:solidFill>
+                <a:latin typeface="Arial" pitchFamily="34" charset="0"/>
+                <a:ea typeface="Arial" pitchFamily="34" charset="-122"/>
+                <a:cs typeface="Arial" pitchFamily="34" charset="-120"/>
+              </a:rPr>
+              <a:t>Cuando no hay respuesta correcta, se mide otra cosa</a:t>
+            </a:r>
+            <a:endParaRPr lang="en-US" sz="3200" dirty="0"/>
+          </a:p>
+        </p:txBody>
+      </p:sp>
+      <p:sp>
+        <p:nvSpPr>
+          <p:cNvPr id="3" name="Text"/>
+          <p:cNvSpPr txBox="1"/>
+          <p:nvPr/>
+        </p:nvSpPr>
+        <p:spPr>
+          <a:xfrm>
+            <a:off x="566928" y="1280160"/>
+            <a:ext cx="11057839" cy="731520"/>
+          </a:xfrm>
+          <a:prstGeom prst="rect">
+            <a:avLst/>
+          </a:prstGeom>
+          <a:noFill/>
+          <a:ln/>
+        </p:spPr>
+        <p:txBody>
+          <a:bodyPr wrap="square" lIns="0" tIns="0" rIns="0" bIns="0" rtlCol="0" anchor="t"/>
+          <a:lstStyle/>
+          <a:p>
+            <a:pPr indent="0" marL="0">
+              <a:lnSpc>
+                <a:spcPct val="108000"/>
+              </a:lnSpc>
+              <a:buNone/>
+            </a:pPr>
+            <a:r>
+              <a:rPr lang="en-US" sz="1500" dirty="0">
+                <a:solidFill>
+                  <a:srgbClr val="5A6B73"/>
+                </a:solidFill>
+                <a:latin typeface="Calibri" pitchFamily="34" charset="0"/>
+                <a:ea typeface="Calibri" pitchFamily="34" charset="-122"/>
+                <a:cs typeface="Calibri" pitchFamily="34" charset="-120"/>
+              </a:rPr>
+              <a:t>Lo que acabamos de ver no se puede medir con precisión y recuperación. Aquí está por qué.</a:t>
+            </a:r>
+            <a:endParaRPr lang="en-US" sz="1500" dirty="0"/>
+          </a:p>
+        </p:txBody>
+      </p:sp>
+      <p:sp>
+        <p:nvSpPr>
+          <p:cNvPr id="4" name="Shape"/>
+          <p:cNvSpPr/>
+          <p:nvPr/>
+        </p:nvSpPr>
+        <p:spPr>
+          <a:xfrm>
+            <a:off x="566928" y="1760000"/>
+            <a:ext cx="5378919" cy="2380000"/>
+          </a:xfrm>
+          <a:prstGeom prst="roundRect">
+            <a:avLst>
+              <a:gd name="adj" fmla="val 2933"/>
+            </a:avLst>
+          </a:prstGeom>
+          <a:solidFill>
+            <a:srgbClr val="F2F5F6"/>
+          </a:solidFill>
+          <a:ln w="12700">
+            <a:solidFill>
+              <a:srgbClr val="F2F5F6"/>
+            </a:solidFill>
+            <a:prstDash val="solid"/>
+          </a:ln>
+        </p:spPr>
+      </p:sp>
+      <p:sp>
+        <p:nvSpPr>
+          <p:cNvPr id="5" name="Text"/>
+          <p:cNvSpPr txBox="1"/>
+          <p:nvPr/>
+        </p:nvSpPr>
+        <p:spPr>
+          <a:xfrm>
+            <a:off x="804672" y="1900000"/>
+            <a:ext cx="4903431" cy="260000"/>
+          </a:xfrm>
+          <a:prstGeom prst="rect">
+            <a:avLst/>
+          </a:prstGeom>
+          <a:noFill/>
+          <a:ln/>
+        </p:spPr>
+        <p:txBody>
+          <a:bodyPr wrap="square" lIns="0" tIns="0" rIns="0" bIns="0" rtlCol="0" anchor="t"/>
+          <a:lstStyle/>
+          <a:p>
+            <a:pPr indent="0" marL="0">
+              <a:buNone/>
+            </a:pPr>
+            <a:r>
+              <a:rPr lang="en-US" sz="1000" b="1" spc="100" kern="0" dirty="0">
+                <a:solidFill>
+                  <a:srgbClr val="2E7D7D"/>
+                </a:solidFill>
+                <a:latin typeface="Arial" pitchFamily="34" charset="0"/>
+                <a:ea typeface="Arial" pitchFamily="34" charset="-122"/>
+                <a:cs typeface="Arial" pitchFamily="34" charset="-120"/>
+              </a:rPr>
+              <a:t>HACE UN RATO · HAY UNA LISTA CONTRA QUÉ COMPARAR</a:t>
+            </a:r>
+            <a:endParaRPr lang="en-US" sz="1000" dirty="0"/>
+          </a:p>
+        </p:txBody>
+      </p:sp>
+      <p:sp>
+        <p:nvSpPr>
+          <p:cNvPr id="6" name="Text"/>
+          <p:cNvSpPr txBox="1"/>
+          <p:nvPr/>
+        </p:nvSpPr>
+        <p:spPr>
+          <a:xfrm>
+            <a:off x="804672" y="2190000"/>
+            <a:ext cx="4903431" cy="340000"/>
+          </a:xfrm>
+          <a:prstGeom prst="rect">
+            <a:avLst/>
+          </a:prstGeom>
+          <a:noFill/>
+          <a:ln/>
+        </p:spPr>
+        <p:txBody>
+          <a:bodyPr wrap="square" lIns="0" tIns="0" rIns="0" bIns="0" rtlCol="0" anchor="t"/>
+          <a:lstStyle/>
+          <a:p>
+            <a:pPr indent="0" marL="0">
+              <a:buNone/>
+            </a:pPr>
+            <a:r>
+              <a:rPr lang="en-US" sz="1550" b="1" dirty="0">
+                <a:solidFill>
+                  <a:srgbClr val="16262E"/>
+                </a:solidFill>
+                <a:latin typeface="Arial" pitchFamily="34" charset="0"/>
+                <a:ea typeface="Arial" pitchFamily="34" charset="-122"/>
+                <a:cs typeface="Arial" pitchFamily="34" charset="-120"/>
+              </a:rPr>
+              <a:t>El artículo 9 no admite discusión</a:t>
+            </a:r>
+            <a:endParaRPr lang="en-US" sz="1550" dirty="0"/>
+          </a:p>
+        </p:txBody>
+      </p:sp>
+      <p:sp>
+        <p:nvSpPr>
+          <p:cNvPr id="7" name="Text"/>
+          <p:cNvSpPr txBox="1"/>
+          <p:nvPr/>
+        </p:nvSpPr>
+        <p:spPr>
+          <a:xfrm>
+            <a:off x="804672" y="2600000"/>
+            <a:ext cx="4903431" cy="900000"/>
+          </a:xfrm>
+          <a:prstGeom prst="rect">
+            <a:avLst/>
+          </a:prstGeom>
+          <a:noFill/>
+          <a:ln/>
+        </p:spPr>
+        <p:txBody>
+          <a:bodyPr wrap="square" lIns="0" tIns="0" rIns="0" bIns="0" rtlCol="0" anchor="t"/>
+          <a:lstStyle/>
+          <a:p>
+            <a:pPr indent="0" marL="0">
+              <a:lnSpc>
+                <a:spcPct val="106000"/>
+              </a:lnSpc>
+              <a:buNone/>
+            </a:pPr>
+            <a:r>
+              <a:rPr lang="en-US" sz="1200" dirty="0">
+                <a:solidFill>
+                  <a:srgbClr val="16262E"/>
+                </a:solidFill>
+                <a:latin typeface="Calibri" pitchFamily="34" charset="0"/>
+                <a:ea typeface="Calibri" pitchFamily="34" charset="-122"/>
+                <a:cs typeface="Calibri" pitchFamily="34" charset="-120"/>
+              </a:rPr>
+              <a:t>La norma pide cinco requisitos documentales y los enumera. Cualquiera que lea el artículo llega a la misma lista, así que se puede contar cuántos acertó el asistente y cuántos se le fueron.</a:t>
+            </a:r>
+            <a:endParaRPr lang="en-US" sz="1200" dirty="0"/>
+          </a:p>
+        </p:txBody>
+      </p:sp>
+      <p:sp>
+        <p:nvSpPr>
+          <p:cNvPr id="8" name="Text"/>
+          <p:cNvSpPr txBox="1"/>
+          <p:nvPr/>
+        </p:nvSpPr>
+        <p:spPr>
+          <a:xfrm>
+            <a:off x="804672" y="3620000"/>
+            <a:ext cx="4903431" cy="400000"/>
+          </a:xfrm>
+          <a:prstGeom prst="rect">
+            <a:avLst/>
+          </a:prstGeom>
+          <a:noFill/>
+          <a:ln/>
+        </p:spPr>
+        <p:txBody>
+          <a:bodyPr wrap="square" lIns="0" tIns="0" rIns="0" bIns="0" rtlCol="0" anchor="t"/>
+          <a:lstStyle/>
+          <a:p>
+            <a:pPr indent="0" marL="0">
+              <a:lnSpc>
+                <a:spcPct val="104000"/>
+              </a:lnSpc>
+              <a:buNone/>
+            </a:pPr>
+            <a:r>
+              <a:rPr lang="en-US" sz="1250" b="1" dirty="0">
+                <a:solidFill>
+                  <a:srgbClr val="16262E"/>
+                </a:solidFill>
+                <a:latin typeface="Arial" pitchFamily="34" charset="0"/>
+                <a:ea typeface="Arial" pitchFamily="34" charset="-122"/>
+                <a:cs typeface="Arial" pitchFamily="34" charset="-120"/>
+              </a:rPr>
+              <a:t>Por eso ahí sirven la precisión y la recuperación.</a:t>
+            </a:r>
+            <a:endParaRPr lang="en-US" sz="1250" dirty="0"/>
+          </a:p>
+        </p:txBody>
+      </p:sp>
+      <p:sp>
+        <p:nvSpPr>
+          <p:cNvPr id="9" name="Shape"/>
+          <p:cNvSpPr/>
+          <p:nvPr/>
+        </p:nvSpPr>
+        <p:spPr>
+          <a:xfrm>
+            <a:off x="6245847" y="1760000"/>
+            <a:ext cx="5378919" cy="2380000"/>
+          </a:xfrm>
+          <a:prstGeom prst="roundRect">
+            <a:avLst>
+              <a:gd name="adj" fmla="val 2933"/>
+            </a:avLst>
+          </a:prstGeom>
+          <a:solidFill>
+            <a:srgbClr val="F7E4D8"/>
+          </a:solidFill>
+          <a:ln w="12700">
+            <a:solidFill>
+              <a:srgbClr val="F7E4D8"/>
+            </a:solidFill>
+            <a:prstDash val="solid"/>
+          </a:ln>
+        </p:spPr>
+      </p:sp>
+      <p:sp>
+        <p:nvSpPr>
+          <p:cNvPr id="10" name="Text"/>
+          <p:cNvSpPr txBox="1"/>
+          <p:nvPr/>
+        </p:nvSpPr>
+        <p:spPr>
+          <a:xfrm>
+            <a:off x="6483591" y="1900000"/>
+            <a:ext cx="4903431" cy="260000"/>
+          </a:xfrm>
+          <a:prstGeom prst="rect">
+            <a:avLst/>
+          </a:prstGeom>
+          <a:noFill/>
+          <a:ln/>
+        </p:spPr>
+        <p:txBody>
+          <a:bodyPr wrap="square" lIns="0" tIns="0" rIns="0" bIns="0" rtlCol="0" anchor="t"/>
+          <a:lstStyle/>
+          <a:p>
+            <a:pPr indent="0" marL="0">
+              <a:buNone/>
+            </a:pPr>
+            <a:r>
+              <a:rPr lang="en-US" sz="1000" b="1" spc="100" kern="0" dirty="0">
+                <a:solidFill>
+                  <a:srgbClr val="C85A28"/>
+                </a:solidFill>
+                <a:latin typeface="Arial" pitchFamily="34" charset="0"/>
+                <a:ea typeface="Arial" pitchFamily="34" charset="-122"/>
+                <a:cs typeface="Arial" pitchFamily="34" charset="-120"/>
+              </a:rPr>
+              <a:t>HACE UN MINUTO · NO HAY CONTRA QUÉ COMPARAR</a:t>
+            </a:r>
+            <a:endParaRPr lang="en-US" sz="1000" dirty="0"/>
+          </a:p>
+        </p:txBody>
+      </p:sp>
+      <p:sp>
+        <p:nvSpPr>
+          <p:cNvPr id="11" name="Text"/>
+          <p:cNvSpPr txBox="1"/>
+          <p:nvPr/>
+        </p:nvSpPr>
+        <p:spPr>
+          <a:xfrm>
+            <a:off x="6483591" y="2190000"/>
+            <a:ext cx="4903431" cy="340000"/>
+          </a:xfrm>
+          <a:prstGeom prst="rect">
+            <a:avLst/>
+          </a:prstGeom>
+          <a:noFill/>
+          <a:ln/>
+        </p:spPr>
+        <p:txBody>
+          <a:bodyPr wrap="square" lIns="0" tIns="0" rIns="0" bIns="0" rtlCol="0" anchor="t"/>
+          <a:lstStyle/>
+          <a:p>
+            <a:pPr indent="0" marL="0">
+              <a:buNone/>
+            </a:pPr>
+            <a:r>
+              <a:rPr lang="en-US" sz="1550" b="1" dirty="0">
+                <a:solidFill>
+                  <a:srgbClr val="16262E"/>
+                </a:solidFill>
+                <a:latin typeface="Arial" pitchFamily="34" charset="0"/>
+                <a:ea typeface="Arial" pitchFamily="34" charset="-122"/>
+                <a:cs typeface="Arial" pitchFamily="34" charset="-120"/>
+              </a:rPr>
+              <a:t>¿F1-09 es positiva o negativa?</a:t>
+            </a:r>
+            <a:endParaRPr lang="en-US" sz="1550" dirty="0"/>
+          </a:p>
+        </p:txBody>
+      </p:sp>
+      <p:sp>
+        <p:nvSpPr>
+          <p:cNvPr id="12" name="Text"/>
+          <p:cNvSpPr txBox="1"/>
+          <p:nvPr/>
+        </p:nvSpPr>
+        <p:spPr>
+          <a:xfrm>
+            <a:off x="6483591" y="2600000"/>
+            <a:ext cx="4903431" cy="900000"/>
+          </a:xfrm>
+          <a:prstGeom prst="rect">
+            <a:avLst/>
+          </a:prstGeom>
+          <a:noFill/>
+          <a:ln/>
+        </p:spPr>
+        <p:txBody>
+          <a:bodyPr wrap="square" lIns="0" tIns="0" rIns="0" bIns="0" rtlCol="0" anchor="t"/>
+          <a:lstStyle/>
+          <a:p>
+            <a:pPr indent="0" marL="0">
+              <a:lnSpc>
+                <a:spcPct val="106000"/>
+              </a:lnSpc>
+              <a:buNone/>
+            </a:pPr>
+            <a:r>
+              <a:rPr lang="en-US" sz="1200" dirty="0">
+                <a:solidFill>
+                  <a:srgbClr val="16262E"/>
+                </a:solidFill>
+                <a:latin typeface="Calibri" pitchFamily="34" charset="0"/>
+                <a:ea typeface="Calibri" pitchFamily="34" charset="-122"/>
+                <a:cs typeface="Calibri" pitchFamily="34" charset="-120"/>
+              </a:rPr>
+              <a:t>«Quedó rete bonita la lona nueva» es sarcasmo. La transcripción no trae la respuesta en ninguna parte, y dos evaluadores con criterio pueden leerla distinto. No hay lista de referencia que contar.</a:t>
+            </a:r>
+            <a:endParaRPr lang="en-US" sz="1200" dirty="0"/>
+          </a:p>
+        </p:txBody>
+      </p:sp>
+      <p:sp>
+        <p:nvSpPr>
+          <p:cNvPr id="13" name="Text"/>
+          <p:cNvSpPr txBox="1"/>
+          <p:nvPr/>
+        </p:nvSpPr>
+        <p:spPr>
+          <a:xfrm>
+            <a:off x="6483591" y="3620000"/>
+            <a:ext cx="4903431" cy="400000"/>
+          </a:xfrm>
+          <a:prstGeom prst="rect">
+            <a:avLst/>
+          </a:prstGeom>
+          <a:noFill/>
+          <a:ln/>
+        </p:spPr>
+        <p:txBody>
+          <a:bodyPr wrap="square" lIns="0" tIns="0" rIns="0" bIns="0" rtlCol="0" anchor="t"/>
+          <a:lstStyle/>
+          <a:p>
+            <a:pPr indent="0" marL="0">
+              <a:lnSpc>
+                <a:spcPct val="104000"/>
+              </a:lnSpc>
+              <a:buNone/>
+            </a:pPr>
+            <a:r>
+              <a:rPr lang="en-US" sz="1250" b="1" dirty="0">
+                <a:solidFill>
+                  <a:srgbClr val="C85A28"/>
+                </a:solidFill>
+                <a:latin typeface="Arial" pitchFamily="34" charset="0"/>
+                <a:ea typeface="Arial" pitchFamily="34" charset="-122"/>
+                <a:cs typeface="Arial" pitchFamily="34" charset="-120"/>
+              </a:rPr>
+              <a:t>Aquí la precisión y la recuperación no se pueden calcular.</a:t>
+            </a:r>
+            <a:endParaRPr lang="en-US" sz="1250" dirty="0"/>
+          </a:p>
+        </p:txBody>
+      </p:sp>
+      <p:sp>
+        <p:nvSpPr>
+          <p:cNvPr id="14" name="Shape"/>
+          <p:cNvSpPr/>
+          <p:nvPr/>
+        </p:nvSpPr>
+        <p:spPr>
+          <a:xfrm>
+            <a:off x="566928" y="4280000"/>
+            <a:ext cx="11057839" cy="1020000"/>
+          </a:xfrm>
+          <a:prstGeom prst="roundRect">
+            <a:avLst>
+              <a:gd name="adj" fmla="val 2933"/>
+            </a:avLst>
+          </a:prstGeom>
+          <a:solidFill>
+            <a:srgbClr val="16262E"/>
+          </a:solidFill>
+          <a:ln w="12700">
+            <a:solidFill>
+              <a:srgbClr val="16262E"/>
+            </a:solidFill>
+            <a:prstDash val="solid"/>
+          </a:ln>
+        </p:spPr>
+      </p:sp>
+      <p:sp>
+        <p:nvSpPr>
+          <p:cNvPr id="15" name="Text"/>
+          <p:cNvSpPr txBox="1"/>
+          <p:nvPr/>
+        </p:nvSpPr>
+        <p:spPr>
+          <a:xfrm>
+            <a:off x="804672" y="4410000"/>
+            <a:ext cx="10582351" cy="280000"/>
+          </a:xfrm>
+          <a:prstGeom prst="rect">
+            <a:avLst/>
+          </a:prstGeom>
+          <a:noFill/>
+          <a:ln/>
+        </p:spPr>
+        <p:txBody>
+          <a:bodyPr wrap="square" lIns="0" tIns="0" rIns="0" bIns="0" rtlCol="0" anchor="t"/>
+          <a:lstStyle/>
+          <a:p>
+            <a:pPr indent="0" marL="0">
+              <a:buNone/>
+            </a:pPr>
+            <a:r>
+              <a:rPr lang="en-US" sz="1000" b="1" spc="120" kern="0" dirty="0">
+                <a:solidFill>
+                  <a:srgbClr val="8FC7C7"/>
+                </a:solidFill>
+                <a:latin typeface="Arial" pitchFamily="34" charset="0"/>
+                <a:ea typeface="Arial" pitchFamily="34" charset="-122"/>
+                <a:cs typeface="Arial" pitchFamily="34" charset="-120"/>
+              </a:rPr>
+              <a:t>ENTONCES SE CAMBIA LA PREGUNTA</a:t>
+            </a:r>
+            <a:endParaRPr lang="en-US" sz="1000" dirty="0"/>
+          </a:p>
+        </p:txBody>
+      </p:sp>
+      <p:sp>
+        <p:nvSpPr>
+          <p:cNvPr id="16" name="Text"/>
+          <p:cNvSpPr txBox="1"/>
+          <p:nvPr/>
+        </p:nvSpPr>
+        <p:spPr>
+          <a:xfrm>
+            <a:off x="804672" y="4700000"/>
+            <a:ext cx="10582351" cy="480000"/>
+          </a:xfrm>
+          <a:prstGeom prst="rect">
+            <a:avLst/>
+          </a:prstGeom>
+          <a:noFill/>
+          <a:ln/>
+        </p:spPr>
+        <p:txBody>
+          <a:bodyPr wrap="square" lIns="0" tIns="0" rIns="0" bIns="0" rtlCol="0" anchor="t"/>
+          <a:lstStyle/>
+          <a:p>
+            <a:pPr indent="0" marL="0">
+              <a:lnSpc>
+                <a:spcPct val="106000"/>
+              </a:lnSpc>
+              <a:buNone/>
+            </a:pPr>
+            <a:r>
+              <a:rPr lang="en-US" sz="1450" dirty="0">
+                <a:solidFill>
+                  <a:srgbClr val="FFFFFF"/>
+                </a:solidFill>
+                <a:latin typeface="Calibri" pitchFamily="34" charset="0"/>
+                <a:ea typeface="Calibri" pitchFamily="34" charset="-122"/>
+                <a:cs typeface="Calibri" pitchFamily="34" charset="-120"/>
+              </a:rPr>
+              <a:t>Ya no es «¿acertó?», porque no hay contra qué. Es «¿dos personas que leen lo mismo escriben lo mismo?». Eso se llama acuerdo entre codificadores, y es lo que se reporta en análisis cualitativo cuando no existe una respuesta correcta.</a:t>
+            </a:r>
+            <a:endParaRPr lang="en-US" sz="1450" dirty="0"/>
+          </a:p>
+        </p:txBody>
+      </p:sp>
+      <p:sp>
+        <p:nvSpPr>
+          <p:cNvPr id="17" name="Shape"/>
+          <p:cNvSpPr/>
+          <p:nvPr/>
+        </p:nvSpPr>
+        <p:spPr>
+          <a:xfrm>
+            <a:off x="566928" y="5420000"/>
+            <a:ext cx="11057839" cy="640000"/>
+          </a:xfrm>
+          <a:prstGeom prst="roundRect">
+            <a:avLst>
+              <a:gd name="adj" fmla="val 8235"/>
+            </a:avLst>
+          </a:prstGeom>
+          <a:solidFill>
+            <a:srgbClr val="F7E4D8"/>
+          </a:solidFill>
+          <a:ln w="12700">
+            <a:solidFill>
+              <a:srgbClr val="F7E4D8"/>
+            </a:solidFill>
+            <a:prstDash val="solid"/>
+          </a:ln>
+        </p:spPr>
+      </p:sp>
+      <p:sp>
+        <p:nvSpPr>
+          <p:cNvPr id="18" name="Text"/>
+          <p:cNvSpPr txBox="1"/>
+          <p:nvPr/>
+        </p:nvSpPr>
+        <p:spPr>
+          <a:xfrm>
+            <a:off x="804672" y="5420000"/>
+            <a:ext cx="10582351" cy="640000"/>
+          </a:xfrm>
+          <a:prstGeom prst="rect">
+            <a:avLst/>
+          </a:prstGeom>
+          <a:noFill/>
+          <a:ln/>
+        </p:spPr>
+        <p:txBody>
+          <a:bodyPr wrap="square" lIns="0" tIns="0" rIns="0" bIns="0" rtlCol="0" anchor="ctr"/>
+          <a:lstStyle/>
+          <a:p>
+            <a:pPr indent="0" marL="0">
+              <a:lnSpc>
+                <a:spcPct val="110000"/>
+              </a:lnSpc>
+              <a:buNone/>
+            </a:pPr>
+            <a:r>
+              <a:rPr lang="en-US" sz="1300" dirty="0">
+                <a:solidFill>
+                  <a:srgbClr val="16262E"/>
+                </a:solidFill>
+                <a:latin typeface="Calibri" pitchFamily="34" charset="0"/>
+                <a:ea typeface="Calibri" pitchFamily="34" charset="-122"/>
+                <a:cs typeface="Calibri" pitchFamily="34" charset="-120"/>
+              </a:rPr>
+              <a:t>No es una métrica de repuesto: es la que responde la pregunta que de verdad importa en una evaluación. Si dos personas con el mismo libro de códigos clasifican distinto, las categorías no son reproducibles, y unas categorías que no se pueden reproducir no se pueden defender ante un comité.</a:t>
+            </a:r>
+            <a:endParaRPr lang="en-US" sz="1300" dirty="0"/>
+          </a:p>
+        </p:txBody>
+      </p:sp>
+      <p:sp>
+        <p:nvSpPr>
+          <p:cNvPr id="19" name="Text"/>
+          <p:cNvSpPr txBox="1"/>
+          <p:nvPr/>
+        </p:nvSpPr>
+        <p:spPr>
+          <a:xfrm>
+            <a:off x="566928" y="6220000"/>
+            <a:ext cx="11057839" cy="240000"/>
+          </a:xfrm>
+          <a:prstGeom prst="rect">
+            <a:avLst/>
+          </a:prstGeom>
+          <a:noFill/>
+          <a:ln/>
+        </p:spPr>
+        <p:txBody>
+          <a:bodyPr wrap="square" lIns="0" tIns="0" rIns="0" bIns="0" rtlCol="0" anchor="t"/>
+          <a:lstStyle/>
+          <a:p>
+            <a:pPr indent="0" marL="0">
+              <a:buNone/>
+            </a:pPr>
+            <a:r>
+              <a:rPr lang="en-US" sz="1000" dirty="0">
+                <a:solidFill>
+                  <a:srgbClr val="5A6B73"/>
+                </a:solidFill>
+                <a:latin typeface="Calibri" pitchFamily="34" charset="0"/>
+                <a:ea typeface="Calibri" pitchFamily="34" charset="-122"/>
+                <a:cs typeface="Calibri" pitchFamily="34" charset="-120"/>
+              </a:rPr>
+              <a:t>Es lo que el criterio de rigor metodológico de la rúbrica de hoy evalúa, y lo que pide la lista de cotejo COREQ para investigación cualitativa.</a:t>
+            </a:r>
+            <a:endParaRPr lang="en-US" sz="1000" dirty="0"/>
+          </a:p>
+        </p:txBody>
+      </p:sp>
+    </p:spTree>
+  </p:cSld>
+  <p:clrMapOvr>
+    <a:masterClrMapping/>
+  </p:clrMapOvr>
+</p:sld>
+</file>
+
+<file path=ppt/slides/slide35.xml><?xml version="1.0" encoding="utf-8"?>
+<p:sld xmlns:a="http://schemas.openxmlformats.org/drawingml/2006/main" xmlns:r="http://schemas.openxmlformats.org/officeDocument/2006/relationships" xmlns:p="http://schemas.openxmlformats.org/presentationml/2006/main">
+  <p:cSld name="Intuicion kappa">
+    <p:spTree>
+      <p:nvGrpSpPr>
+        <p:cNvPr id="1" name=""/>
+        <p:cNvGrpSpPr/>
+        <p:nvPr/>
+      </p:nvGrpSpPr>
+      <p:grpSpPr>
+        <a:xfrm>
+          <a:off x="0" y="0"/>
+          <a:ext cx="0" cy="0"/>
+          <a:chOff x="0" y="0"/>
+          <a:chExt cx="0" cy="0"/>
+        </a:xfrm>
+      </p:grpSpPr>
+      <p:sp>
+        <p:nvSpPr>
+          <p:cNvPr id="2" name="Text"/>
+          <p:cNvSpPr txBox="1"/>
+          <p:nvPr/>
+        </p:nvSpPr>
+        <p:spPr>
+          <a:xfrm>
+            <a:off x="566928" y="402336"/>
+            <a:ext cx="11057839" cy="749808"/>
+          </a:xfrm>
+          <a:prstGeom prst="rect">
+            <a:avLst/>
+          </a:prstGeom>
+          <a:noFill/>
+          <a:ln/>
+        </p:spPr>
+        <p:txBody>
+          <a:bodyPr wrap="square" lIns="0" tIns="0" rIns="0" bIns="0" rtlCol="0" anchor="t"/>
+          <a:lstStyle/>
+          <a:p>
+            <a:pPr algn="l" indent="0" marL="0">
+              <a:buNone/>
+            </a:pPr>
+            <a:r>
+              <a:rPr lang="en-US" sz="3200" b="1" dirty="0">
+                <a:solidFill>
+                  <a:srgbClr val="16262E"/>
+                </a:solidFill>
+                <a:latin typeface="Arial" pitchFamily="34" charset="0"/>
+                <a:ea typeface="Arial" pitchFamily="34" charset="-122"/>
+                <a:cs typeface="Arial" pitchFamily="34" charset="-120"/>
+              </a:rPr>
+              <a:t>La intuición: cuánto del acuerdo no era gratis</a:t>
+            </a:r>
+            <a:endParaRPr lang="en-US" sz="3200" dirty="0"/>
+          </a:p>
+        </p:txBody>
+      </p:sp>
+      <p:sp>
+        <p:nvSpPr>
+          <p:cNvPr id="3" name="Text"/>
+          <p:cNvSpPr txBox="1"/>
+          <p:nvPr/>
+        </p:nvSpPr>
+        <p:spPr>
+          <a:xfrm>
+            <a:off x="566928" y="1280160"/>
+            <a:ext cx="11057839" cy="731520"/>
+          </a:xfrm>
+          <a:prstGeom prst="rect">
+            <a:avLst/>
+          </a:prstGeom>
+          <a:noFill/>
+          <a:ln/>
+        </p:spPr>
+        <p:txBody>
+          <a:bodyPr wrap="square" lIns="0" tIns="0" rIns="0" bIns="0" rtlCol="0" anchor="t"/>
+          <a:lstStyle/>
+          <a:p>
+            <a:pPr indent="0" marL="0">
+              <a:lnSpc>
+                <a:spcPct val="108000"/>
+              </a:lnSpc>
+              <a:buNone/>
+            </a:pPr>
+            <a:r>
+              <a:rPr lang="en-US" sz="1500" dirty="0">
+                <a:solidFill>
+                  <a:srgbClr val="5A6B73"/>
+                </a:solidFill>
+                <a:latin typeface="Calibri" pitchFamily="34" charset="0"/>
+                <a:ea typeface="Calibri" pitchFamily="34" charset="-122"/>
+                <a:cs typeface="Calibri" pitchFamily="34" charset="-120"/>
+              </a:rPr>
+              <a:t>Antes de los números, la idea. Coincidir mucho no siempre es mérito.</a:t>
+            </a:r>
+            <a:endParaRPr lang="en-US" sz="1500" dirty="0"/>
+          </a:p>
+        </p:txBody>
+      </p:sp>
+      <p:sp>
+        <p:nvSpPr>
+          <p:cNvPr id="4" name="Shape"/>
+          <p:cNvSpPr/>
+          <p:nvPr/>
+        </p:nvSpPr>
+        <p:spPr>
+          <a:xfrm>
+            <a:off x="3166928" y="1790000"/>
+            <a:ext cx="200000" cy="200000"/>
+          </a:xfrm>
+          <a:prstGeom prst="rect">
+            <a:avLst/>
+          </a:prstGeom>
+          <a:solidFill>
+            <a:srgbClr val="9FB3BA"/>
+          </a:solidFill>
+          <a:ln>
+            <a:noFill/>
+          </a:ln>
+        </p:spPr>
+      </p:sp>
+      <p:sp>
+        <p:nvSpPr>
+          <p:cNvPr id="5" name="Text"/>
+          <p:cNvSpPr txBox="1"/>
+          <p:nvPr/>
+        </p:nvSpPr>
+        <p:spPr>
+          <a:xfrm>
+            <a:off x="3446928" y="1760000"/>
+            <a:ext cx="2400000" cy="280000"/>
+          </a:xfrm>
+          <a:prstGeom prst="rect">
+            <a:avLst/>
+          </a:prstGeom>
+          <a:noFill/>
+          <a:ln/>
+        </p:spPr>
+        <p:txBody>
+          <a:bodyPr wrap="square" lIns="0" tIns="0" rIns="0" bIns="0" rtlCol="0" anchor="t"/>
+          <a:lstStyle/>
+          <a:p>
+            <a:pPr indent="0" marL="0">
+              <a:buNone/>
+            </a:pPr>
+            <a:r>
+              <a:rPr lang="en-US" sz="1050" dirty="0">
+                <a:solidFill>
+                  <a:srgbClr val="5A6B73"/>
+                </a:solidFill>
+                <a:latin typeface="Calibri" pitchFamily="34" charset="0"/>
+                <a:ea typeface="Calibri" pitchFamily="34" charset="-122"/>
+                <a:cs typeface="Calibri" pitchFamily="34" charset="-120"/>
+              </a:rPr>
+              <a:t>El acuerdo que sale gratis, por azar</a:t>
+            </a:r>
+            <a:endParaRPr lang="en-US" sz="1050" dirty="0"/>
+          </a:p>
+        </p:txBody>
+      </p:sp>
+      <p:sp>
+        <p:nvSpPr>
+          <p:cNvPr id="6" name="Shape"/>
+          <p:cNvSpPr/>
+          <p:nvPr/>
+        </p:nvSpPr>
+        <p:spPr>
+          <a:xfrm>
+            <a:off x="5916928" y="1790000"/>
+            <a:ext cx="200000" cy="200000"/>
+          </a:xfrm>
+          <a:prstGeom prst="rect">
+            <a:avLst/>
+          </a:prstGeom>
+          <a:solidFill>
+            <a:srgbClr val="2E7D7D"/>
+          </a:solidFill>
+          <a:ln>
+            <a:noFill/>
+          </a:ln>
+        </p:spPr>
+      </p:sp>
+      <p:sp>
+        <p:nvSpPr>
+          <p:cNvPr id="7" name="Text"/>
+          <p:cNvSpPr txBox="1"/>
+          <p:nvPr/>
+        </p:nvSpPr>
+        <p:spPr>
+          <a:xfrm>
+            <a:off x="6196928" y="1760000"/>
+            <a:ext cx="2400000" cy="280000"/>
+          </a:xfrm>
+          <a:prstGeom prst="rect">
+            <a:avLst/>
+          </a:prstGeom>
+          <a:noFill/>
+          <a:ln/>
+        </p:spPr>
+        <p:txBody>
+          <a:bodyPr wrap="square" lIns="0" tIns="0" rIns="0" bIns="0" rtlCol="0" anchor="t"/>
+          <a:lstStyle/>
+          <a:p>
+            <a:pPr indent="0" marL="0">
+              <a:buNone/>
+            </a:pPr>
+            <a:r>
+              <a:rPr lang="en-US" sz="1050" dirty="0">
+                <a:solidFill>
+                  <a:srgbClr val="5A6B73"/>
+                </a:solidFill>
+                <a:latin typeface="Calibri" pitchFamily="34" charset="0"/>
+                <a:ea typeface="Calibri" pitchFamily="34" charset="-122"/>
+                <a:cs typeface="Calibri" pitchFamily="34" charset="-120"/>
+              </a:rPr>
+              <a:t>Lo que ganaron leyendo</a:t>
+            </a:r>
+            <a:endParaRPr lang="en-US" sz="1050" dirty="0"/>
+          </a:p>
+        </p:txBody>
+      </p:sp>
+      <p:sp>
+        <p:nvSpPr>
+          <p:cNvPr id="8" name="Shape"/>
+          <p:cNvSpPr/>
+          <p:nvPr/>
+        </p:nvSpPr>
+        <p:spPr>
+          <a:xfrm>
+            <a:off x="8666928" y="1790000"/>
+            <a:ext cx="200000" cy="200000"/>
+          </a:xfrm>
+          <a:prstGeom prst="rect">
+            <a:avLst/>
+          </a:prstGeom>
+          <a:solidFill>
+            <a:srgbClr val="D7E7E7"/>
+          </a:solidFill>
+          <a:ln>
+            <a:noFill/>
+          </a:ln>
+        </p:spPr>
+      </p:sp>
+      <p:sp>
+        <p:nvSpPr>
+          <p:cNvPr id="9" name="Text"/>
+          <p:cNvSpPr txBox="1"/>
+          <p:nvPr/>
+        </p:nvSpPr>
+        <p:spPr>
+          <a:xfrm>
+            <a:off x="8946928" y="1760000"/>
+            <a:ext cx="2400000" cy="280000"/>
+          </a:xfrm>
+          <a:prstGeom prst="rect">
+            <a:avLst/>
+          </a:prstGeom>
+          <a:noFill/>
+          <a:ln/>
+        </p:spPr>
+        <p:txBody>
+          <a:bodyPr wrap="square" lIns="0" tIns="0" rIns="0" bIns="0" rtlCol="0" anchor="t"/>
+          <a:lstStyle/>
+          <a:p>
+            <a:pPr indent="0" marL="0">
+              <a:buNone/>
+            </a:pPr>
+            <a:r>
+              <a:rPr lang="en-US" sz="1050" dirty="0">
+                <a:solidFill>
+                  <a:srgbClr val="5A6B73"/>
+                </a:solidFill>
+                <a:latin typeface="Calibri" pitchFamily="34" charset="0"/>
+                <a:ea typeface="Calibri" pitchFamily="34" charset="-122"/>
+                <a:cs typeface="Calibri" pitchFamily="34" charset="-120"/>
+              </a:rPr>
+              <a:t>Lo que faltó para el acuerdo total</a:t>
+            </a:r>
+            <a:endParaRPr lang="en-US" sz="1050" dirty="0"/>
+          </a:p>
+        </p:txBody>
+      </p:sp>
+      <p:sp>
+        <p:nvSpPr>
+          <p:cNvPr id="10" name="Text"/>
+          <p:cNvSpPr txBox="1"/>
+          <p:nvPr/>
+        </p:nvSpPr>
+        <p:spPr>
+          <a:xfrm>
+            <a:off x="566928" y="2200000"/>
+            <a:ext cx="2450000" cy="420000"/>
+          </a:xfrm>
+          <a:prstGeom prst="rect">
+            <a:avLst/>
+          </a:prstGeom>
+          <a:noFill/>
+          <a:ln/>
+        </p:spPr>
+        <p:txBody>
+          <a:bodyPr wrap="square" lIns="0" tIns="0" rIns="0" bIns="0" rtlCol="0" anchor="t"/>
+          <a:lstStyle/>
+          <a:p>
+            <a:pPr indent="0" marL="0">
+              <a:lnSpc>
+                <a:spcPct val="102000"/>
+              </a:lnSpc>
+              <a:buNone/>
+            </a:pPr>
+            <a:r>
+              <a:rPr lang="en-US" sz="1250" b="1" dirty="0">
+                <a:solidFill>
+                  <a:srgbClr val="16262E"/>
+                </a:solidFill>
+                <a:latin typeface="Arial" pitchFamily="34" charset="0"/>
+                <a:ea typeface="Arial" pitchFamily="34" charset="-122"/>
+                <a:cs typeface="Arial" pitchFamily="34" charset="-120"/>
+              </a:rPr>
+              <a:t>Su corpus de foros</a:t>
+            </a:r>
+            <a:endParaRPr lang="en-US" sz="1250" dirty="0"/>
+          </a:p>
+        </p:txBody>
+      </p:sp>
+      <p:sp>
+        <p:nvSpPr>
+          <p:cNvPr id="11" name="Text"/>
+          <p:cNvSpPr txBox="1"/>
+          <p:nvPr/>
+        </p:nvSpPr>
+        <p:spPr>
+          <a:xfrm>
+            <a:off x="566928" y="2640000"/>
+            <a:ext cx="2450000" cy="300000"/>
+          </a:xfrm>
+          <a:prstGeom prst="rect">
+            <a:avLst/>
+          </a:prstGeom>
+          <a:noFill/>
+          <a:ln/>
+        </p:spPr>
+        <p:txBody>
+          <a:bodyPr wrap="square" lIns="0" tIns="0" rIns="0" bIns="0" rtlCol="0" anchor="t"/>
+          <a:lstStyle/>
+          <a:p>
+            <a:pPr indent="0" marL="0">
+              <a:lnSpc>
+                <a:spcPct val="102000"/>
+              </a:lnSpc>
+              <a:buNone/>
+            </a:pPr>
+            <a:r>
+              <a:rPr lang="en-US" sz="1050" dirty="0">
+                <a:solidFill>
+                  <a:srgbClr val="5A6B73"/>
+                </a:solidFill>
+                <a:latin typeface="Calibri" pitchFamily="34" charset="0"/>
+                <a:ea typeface="Calibri" pitchFamily="34" charset="-122"/>
+                <a:cs typeface="Calibri" pitchFamily="34" charset="-120"/>
+              </a:rPr>
+              <a:t>Cuatro causas repartidas: 14, 9, 8 y 7.</a:t>
+            </a:r>
+            <a:endParaRPr lang="en-US" sz="1050" dirty="0"/>
+          </a:p>
+        </p:txBody>
+      </p:sp>
+      <p:sp>
+        <p:nvSpPr>
+          <p:cNvPr id="12" name="Shape"/>
+          <p:cNvSpPr/>
+          <p:nvPr/>
+        </p:nvSpPr>
+        <p:spPr>
+          <a:xfrm>
+            <a:off x="3166928" y="2200000"/>
+            <a:ext cx="2229616" cy="400000"/>
+          </a:xfrm>
+          <a:prstGeom prst="rect">
+            <a:avLst/>
+          </a:prstGeom>
+          <a:solidFill>
+            <a:srgbClr val="9FB3BA"/>
+          </a:solidFill>
+          <a:ln>
+            <a:noFill/>
+          </a:ln>
+        </p:spPr>
+      </p:sp>
+      <p:sp>
+        <p:nvSpPr>
+          <p:cNvPr id="13" name="Shape"/>
+          <p:cNvSpPr/>
+          <p:nvPr/>
+        </p:nvSpPr>
+        <p:spPr>
+          <a:xfrm>
+            <a:off x="5396544" y="2200000"/>
+            <a:ext cx="5590557" cy="400000"/>
+          </a:xfrm>
+          <a:prstGeom prst="rect">
+            <a:avLst/>
+          </a:prstGeom>
+          <a:solidFill>
+            <a:srgbClr val="2E7D7D"/>
+          </a:solidFill>
+          <a:ln>
+            <a:noFill/>
+          </a:ln>
+        </p:spPr>
+      </p:sp>
+      <p:sp>
+        <p:nvSpPr>
+          <p:cNvPr id="14" name="Shape"/>
+          <p:cNvSpPr/>
+          <p:nvPr/>
+        </p:nvSpPr>
+        <p:spPr>
+          <a:xfrm>
+            <a:off x="10987101" y="2200000"/>
+            <a:ext cx="437666" cy="400000"/>
+          </a:xfrm>
+          <a:prstGeom prst="rect">
+            <a:avLst/>
+          </a:prstGeom>
+          <a:solidFill>
+            <a:srgbClr val="D7E7E7"/>
+          </a:solidFill>
+          <a:ln>
+            <a:noFill/>
+          </a:ln>
+        </p:spPr>
+      </p:sp>
+      <p:sp>
+        <p:nvSpPr>
+          <p:cNvPr id="15" name="Text"/>
+          <p:cNvSpPr txBox="1"/>
+          <p:nvPr/>
+        </p:nvSpPr>
+        <p:spPr>
+          <a:xfrm>
+            <a:off x="3166928" y="2200000"/>
+            <a:ext cx="2229616" cy="400000"/>
+          </a:xfrm>
+          <a:prstGeom prst="rect">
+            <a:avLst/>
+          </a:prstGeom>
+          <a:noFill/>
+          <a:ln/>
+        </p:spPr>
+        <p:txBody>
+          <a:bodyPr wrap="square" lIns="0" tIns="0" rIns="0" bIns="0" rtlCol="0" anchor="ctr"/>
+          <a:lstStyle/>
+          <a:p>
+            <a:pPr algn="ctr" indent="0" marL="0">
+              <a:buNone/>
+            </a:pPr>
+            <a:r>
+              <a:rPr lang="en-US" sz="1100" b="1" dirty="0">
+                <a:solidFill>
+                  <a:srgbClr val="FFFFFF"/>
+                </a:solidFill>
+                <a:latin typeface="Arial" pitchFamily="34" charset="0"/>
+                <a:ea typeface="Arial" pitchFamily="34" charset="-122"/>
+                <a:cs typeface="Arial" pitchFamily="34" charset="-120"/>
+              </a:rPr>
+              <a:t>27%</a:t>
+            </a:r>
+            <a:endParaRPr lang="en-US" sz="1100" dirty="0"/>
+          </a:p>
+        </p:txBody>
+      </p:sp>
+      <p:sp>
+        <p:nvSpPr>
+          <p:cNvPr id="16" name="Text"/>
+          <p:cNvSpPr txBox="1"/>
+          <p:nvPr/>
+        </p:nvSpPr>
+        <p:spPr>
+          <a:xfrm>
+            <a:off x="5396544" y="2200000"/>
+            <a:ext cx="5590557" cy="400000"/>
+          </a:xfrm>
+          <a:prstGeom prst="rect">
+            <a:avLst/>
+          </a:prstGeom>
+          <a:noFill/>
+          <a:ln/>
+        </p:spPr>
+        <p:txBody>
+          <a:bodyPr wrap="square" lIns="0" tIns="0" rIns="0" bIns="0" rtlCol="0" anchor="ctr"/>
+          <a:lstStyle/>
+          <a:p>
+            <a:pPr algn="ctr" indent="0" marL="0">
+              <a:buNone/>
+            </a:pPr>
+            <a:r>
+              <a:rPr lang="en-US" sz="1100" b="1" dirty="0">
+                <a:solidFill>
+                  <a:srgbClr val="FFFFFF"/>
+                </a:solidFill>
+                <a:latin typeface="Arial" pitchFamily="34" charset="0"/>
+                <a:ea typeface="Arial" pitchFamily="34" charset="-122"/>
+                <a:cs typeface="Arial" pitchFamily="34" charset="-120"/>
+              </a:rPr>
+              <a:t>68 puntos ganados</a:t>
+            </a:r>
+            <a:endParaRPr lang="en-US" sz="1100" dirty="0"/>
+          </a:p>
+        </p:txBody>
+      </p:sp>
+      <p:sp>
+        <p:nvSpPr>
+          <p:cNvPr id="17" name="Text"/>
+          <p:cNvSpPr txBox="1"/>
+          <p:nvPr/>
+        </p:nvSpPr>
+        <p:spPr>
+          <a:xfrm>
+            <a:off x="3166928" y="2650000"/>
+            <a:ext cx="8257839" cy="280000"/>
+          </a:xfrm>
+          <a:prstGeom prst="rect">
+            <a:avLst/>
+          </a:prstGeom>
+          <a:noFill/>
+          <a:ln/>
+        </p:spPr>
+        <p:txBody>
+          <a:bodyPr wrap="square" lIns="0" tIns="0" rIns="0" bIns="0" rtlCol="0" anchor="t"/>
+          <a:lstStyle/>
+          <a:p>
+            <a:pPr indent="0" marL="0">
+              <a:buNone/>
+            </a:pPr>
+            <a:r>
+              <a:rPr lang="en-US" sz="1150" b="1" dirty="0">
+                <a:solidFill>
+                  <a:srgbClr val="16262E"/>
+                </a:solidFill>
+                <a:latin typeface="Arial" pitchFamily="34" charset="0"/>
+                <a:ea typeface="Arial" pitchFamily="34" charset="-122"/>
+                <a:cs typeface="Arial" pitchFamily="34" charset="-120"/>
+              </a:rPr>
+              <a:t>Acuerdo observado 94.7%.   Kappa = 0.93</a:t>
+            </a:r>
+            <a:endParaRPr lang="en-US" sz="1150" dirty="0"/>
+          </a:p>
+        </p:txBody>
+      </p:sp>
+      <p:sp>
+        <p:nvSpPr>
+          <p:cNvPr id="18" name="Text"/>
+          <p:cNvSpPr txBox="1"/>
+          <p:nvPr/>
+        </p:nvSpPr>
+        <p:spPr>
+          <a:xfrm>
+            <a:off x="566928" y="3240000"/>
+            <a:ext cx="2450000" cy="420000"/>
+          </a:xfrm>
+          <a:prstGeom prst="rect">
+            <a:avLst/>
+          </a:prstGeom>
+          <a:noFill/>
+          <a:ln/>
+        </p:spPr>
+        <p:txBody>
+          <a:bodyPr wrap="square" lIns="0" tIns="0" rIns="0" bIns="0" rtlCol="0" anchor="t"/>
+          <a:lstStyle/>
+          <a:p>
+            <a:pPr indent="0" marL="0">
+              <a:lnSpc>
+                <a:spcPct val="102000"/>
+              </a:lnSpc>
+              <a:buNone/>
+            </a:pPr>
+            <a:r>
+              <a:rPr lang="en-US" sz="1250" b="1" dirty="0">
+                <a:solidFill>
+                  <a:srgbClr val="16262E"/>
+                </a:solidFill>
+                <a:latin typeface="Arial" pitchFamily="34" charset="0"/>
+                <a:ea typeface="Arial" pitchFamily="34" charset="-122"/>
+                <a:cs typeface="Arial" pitchFamily="34" charset="-120"/>
+              </a:rPr>
+              <a:t>Si «gestión» dominara</a:t>
+            </a:r>
+            <a:endParaRPr lang="en-US" sz="1250" dirty="0"/>
+          </a:p>
+        </p:txBody>
+      </p:sp>
+      <p:sp>
+        <p:nvSpPr>
+          <p:cNvPr id="19" name="Text"/>
+          <p:cNvSpPr txBox="1"/>
+          <p:nvPr/>
+        </p:nvSpPr>
+        <p:spPr>
+          <a:xfrm>
+            <a:off x="566928" y="3680000"/>
+            <a:ext cx="2450000" cy="300000"/>
+          </a:xfrm>
+          <a:prstGeom prst="rect">
+            <a:avLst/>
+          </a:prstGeom>
+          <a:noFill/>
+          <a:ln/>
+        </p:spPr>
+        <p:txBody>
+          <a:bodyPr wrap="square" lIns="0" tIns="0" rIns="0" bIns="0" rtlCol="0" anchor="t"/>
+          <a:lstStyle/>
+          <a:p>
+            <a:pPr indent="0" marL="0">
+              <a:lnSpc>
+                <a:spcPct val="102000"/>
+              </a:lnSpc>
+              <a:buNone/>
+            </a:pPr>
+            <a:r>
+              <a:rPr lang="en-US" sz="1050" dirty="0">
+                <a:solidFill>
+                  <a:srgbClr val="5A6B73"/>
+                </a:solidFill>
+                <a:latin typeface="Calibri" pitchFamily="34" charset="0"/>
+                <a:ea typeface="Calibri" pitchFamily="34" charset="-122"/>
+                <a:cs typeface="Calibri" pitchFamily="34" charset="-120"/>
+              </a:rPr>
+              <a:t>35 de 38 en una sola categoría.</a:t>
+            </a:r>
+            <a:endParaRPr lang="en-US" sz="1050" dirty="0"/>
+          </a:p>
+        </p:txBody>
+      </p:sp>
+      <p:sp>
+        <p:nvSpPr>
+          <p:cNvPr id="20" name="Shape"/>
+          <p:cNvSpPr/>
+          <p:nvPr/>
+        </p:nvSpPr>
+        <p:spPr>
+          <a:xfrm>
+            <a:off x="3166928" y="3240000"/>
+            <a:ext cx="7060452" cy="400000"/>
+          </a:xfrm>
+          <a:prstGeom prst="rect">
+            <a:avLst/>
+          </a:prstGeom>
+          <a:solidFill>
+            <a:srgbClr val="9FB3BA"/>
+          </a:solidFill>
+          <a:ln>
+            <a:noFill/>
+          </a:ln>
+        </p:spPr>
+      </p:sp>
+      <p:sp>
+        <p:nvSpPr>
+          <p:cNvPr id="21" name="Shape"/>
+          <p:cNvSpPr/>
+          <p:nvPr/>
+        </p:nvSpPr>
+        <p:spPr>
+          <a:xfrm>
+            <a:off x="10227380" y="3240000"/>
+            <a:ext cx="759721" cy="400000"/>
+          </a:xfrm>
+          <a:prstGeom prst="rect">
+            <a:avLst/>
+          </a:prstGeom>
+          <a:solidFill>
+            <a:srgbClr val="2E7D7D"/>
+          </a:solidFill>
+          <a:ln>
+            <a:noFill/>
+          </a:ln>
+        </p:spPr>
+      </p:sp>
+      <p:sp>
+        <p:nvSpPr>
+          <p:cNvPr id="22" name="Shape"/>
+          <p:cNvSpPr/>
+          <p:nvPr/>
+        </p:nvSpPr>
+        <p:spPr>
+          <a:xfrm>
+            <a:off x="10987101" y="3240000"/>
+            <a:ext cx="437666" cy="400000"/>
+          </a:xfrm>
+          <a:prstGeom prst="rect">
+            <a:avLst/>
+          </a:prstGeom>
+          <a:solidFill>
+            <a:srgbClr val="D7E7E7"/>
+          </a:solidFill>
+          <a:ln>
+            <a:noFill/>
+          </a:ln>
+        </p:spPr>
+      </p:sp>
+      <p:sp>
+        <p:nvSpPr>
+          <p:cNvPr id="23" name="Text"/>
+          <p:cNvSpPr txBox="1"/>
+          <p:nvPr/>
+        </p:nvSpPr>
+        <p:spPr>
+          <a:xfrm>
+            <a:off x="3166928" y="3240000"/>
+            <a:ext cx="7060452" cy="400000"/>
+          </a:xfrm>
+          <a:prstGeom prst="rect">
+            <a:avLst/>
+          </a:prstGeom>
+          <a:noFill/>
+          <a:ln/>
+        </p:spPr>
+        <p:txBody>
+          <a:bodyPr wrap="square" lIns="0" tIns="0" rIns="0" bIns="0" rtlCol="0" anchor="ctr"/>
+          <a:lstStyle/>
+          <a:p>
+            <a:pPr algn="ctr" indent="0" marL="0">
+              <a:buNone/>
+            </a:pPr>
+            <a:r>
+              <a:rPr lang="en-US" sz="1100" b="1" dirty="0">
+                <a:solidFill>
+                  <a:srgbClr val="FFFFFF"/>
+                </a:solidFill>
+                <a:latin typeface="Arial" pitchFamily="34" charset="0"/>
+                <a:ea typeface="Arial" pitchFamily="34" charset="-122"/>
+                <a:cs typeface="Arial" pitchFamily="34" charset="-120"/>
+              </a:rPr>
+              <a:t>86%</a:t>
+            </a:r>
+            <a:endParaRPr lang="en-US" sz="1100" dirty="0"/>
+          </a:p>
+        </p:txBody>
+      </p:sp>
+      <p:sp>
+        <p:nvSpPr>
+          <p:cNvPr id="24" name="Text"/>
+          <p:cNvSpPr txBox="1"/>
+          <p:nvPr/>
+        </p:nvSpPr>
+        <p:spPr>
+          <a:xfrm>
+            <a:off x="3166928" y="3690000"/>
+            <a:ext cx="8257839" cy="280000"/>
+          </a:xfrm>
+          <a:prstGeom prst="rect">
+            <a:avLst/>
+          </a:prstGeom>
+          <a:noFill/>
+          <a:ln/>
+        </p:spPr>
+        <p:txBody>
+          <a:bodyPr wrap="square" lIns="0" tIns="0" rIns="0" bIns="0" rtlCol="0" anchor="t"/>
+          <a:lstStyle/>
+          <a:p>
+            <a:pPr indent="0" marL="0">
+              <a:buNone/>
+            </a:pPr>
+            <a:r>
+              <a:rPr lang="en-US" sz="1150" b="1" dirty="0">
+                <a:solidFill>
+                  <a:srgbClr val="16262E"/>
+                </a:solidFill>
+                <a:latin typeface="Arial" pitchFamily="34" charset="0"/>
+                <a:ea typeface="Arial" pitchFamily="34" charset="-122"/>
+                <a:cs typeface="Arial" pitchFamily="34" charset="-120"/>
+              </a:rPr>
+              <a:t>Acuerdo observado 94.7%.   Kappa = 0.64</a:t>
+            </a:r>
+            <a:endParaRPr lang="en-US" sz="1150" dirty="0"/>
+          </a:p>
+        </p:txBody>
+      </p:sp>
+      <p:sp>
+        <p:nvSpPr>
+          <p:cNvPr id="25" name="Shape"/>
+          <p:cNvSpPr/>
+          <p:nvPr/>
+        </p:nvSpPr>
+        <p:spPr>
+          <a:xfrm>
+            <a:off x="566928" y="4280000"/>
+            <a:ext cx="11057839" cy="1000000"/>
+          </a:xfrm>
+          <a:prstGeom prst="roundRect">
+            <a:avLst>
+              <a:gd name="adj" fmla="val 2933"/>
+            </a:avLst>
+          </a:prstGeom>
+          <a:solidFill>
+            <a:srgbClr val="F7E4D8"/>
+          </a:solidFill>
+          <a:ln w="12700">
+            <a:solidFill>
+              <a:srgbClr val="F7E4D8"/>
+            </a:solidFill>
+            <a:prstDash val="solid"/>
+          </a:ln>
+        </p:spPr>
+      </p:sp>
+      <p:sp>
+        <p:nvSpPr>
+          <p:cNvPr id="26" name="Text"/>
+          <p:cNvSpPr txBox="1"/>
+          <p:nvPr/>
+        </p:nvSpPr>
+        <p:spPr>
+          <a:xfrm>
+            <a:off x="804672" y="4400000"/>
+            <a:ext cx="10582351" cy="320000"/>
+          </a:xfrm>
+          <a:prstGeom prst="rect">
+            <a:avLst/>
+          </a:prstGeom>
+          <a:noFill/>
+          <a:ln/>
+        </p:spPr>
+        <p:txBody>
+          <a:bodyPr wrap="square" lIns="0" tIns="0" rIns="0" bIns="0" rtlCol="0" anchor="t"/>
+          <a:lstStyle/>
+          <a:p>
+            <a:pPr indent="0" marL="0">
+              <a:buNone/>
+            </a:pPr>
+            <a:r>
+              <a:rPr lang="en-US" sz="1500" b="1" dirty="0">
+                <a:solidFill>
+                  <a:srgbClr val="16262E"/>
+                </a:solidFill>
+                <a:latin typeface="Arial" pitchFamily="34" charset="0"/>
+                <a:ea typeface="Arial" pitchFamily="34" charset="-122"/>
+                <a:cs typeface="Arial" pitchFamily="34" charset="-120"/>
+              </a:rPr>
+              <a:t>Kappa = lo que ganaron leyendo, entre lo que había por ganar</a:t>
+            </a:r>
+            <a:endParaRPr lang="en-US" sz="1500" dirty="0"/>
+          </a:p>
+        </p:txBody>
+      </p:sp>
+      <p:sp>
+        <p:nvSpPr>
+          <p:cNvPr id="27" name="Text"/>
+          <p:cNvSpPr txBox="1"/>
+          <p:nvPr/>
+        </p:nvSpPr>
+        <p:spPr>
+          <a:xfrm>
+            <a:off x="804672" y="4740000"/>
+            <a:ext cx="10582351" cy="440000"/>
+          </a:xfrm>
+          <a:prstGeom prst="rect">
+            <a:avLst/>
+          </a:prstGeom>
+          <a:noFill/>
+          <a:ln/>
+        </p:spPr>
+        <p:txBody>
+          <a:bodyPr wrap="square" lIns="0" tIns="0" rIns="0" bIns="0" rtlCol="0" anchor="t"/>
+          <a:lstStyle/>
+          <a:p>
+            <a:pPr indent="0" marL="0">
+              <a:lnSpc>
+                <a:spcPct val="106000"/>
+              </a:lnSpc>
+              <a:buNone/>
+            </a:pPr>
+            <a:r>
+              <a:rPr lang="en-US" sz="1200" dirty="0">
+                <a:solidFill>
+                  <a:srgbClr val="16262E"/>
+                </a:solidFill>
+                <a:latin typeface="Calibri" pitchFamily="34" charset="0"/>
+                <a:ea typeface="Calibri" pitchFamily="34" charset="-122"/>
+                <a:cs typeface="Calibri" pitchFamily="34" charset="-120"/>
+              </a:rPr>
+              <a:t>Kappa vale 1 cuando se ganan todos los puntos que quedaban, y 0 cuando no se gana ninguno porque todo el acuerdo ya salía del azar. Puede salir negativa, y entonces coincidieron menos de lo que el azar predecía.</a:t>
+            </a:r>
+            <a:endParaRPr lang="en-US" sz="1200" dirty="0"/>
+          </a:p>
+        </p:txBody>
+      </p:sp>
+      <p:sp>
+        <p:nvSpPr>
+          <p:cNvPr id="28" name="Shape"/>
+          <p:cNvSpPr/>
+          <p:nvPr/>
+        </p:nvSpPr>
+        <p:spPr>
+          <a:xfrm>
+            <a:off x="566928" y="5400000"/>
+            <a:ext cx="11057839" cy="640000"/>
+          </a:xfrm>
+          <a:prstGeom prst="roundRect">
+            <a:avLst>
+              <a:gd name="adj" fmla="val 8235"/>
+            </a:avLst>
+          </a:prstGeom>
+          <a:solidFill>
+            <a:srgbClr val="F7E4D8"/>
+          </a:solidFill>
+          <a:ln w="12700">
+            <a:solidFill>
+              <a:srgbClr val="F7E4D8"/>
+            </a:solidFill>
+            <a:prstDash val="solid"/>
+          </a:ln>
+        </p:spPr>
+      </p:sp>
+      <p:sp>
+        <p:nvSpPr>
+          <p:cNvPr id="29" name="Text"/>
+          <p:cNvSpPr txBox="1"/>
+          <p:nvPr/>
+        </p:nvSpPr>
+        <p:spPr>
+          <a:xfrm>
+            <a:off x="804672" y="5400000"/>
+            <a:ext cx="10582351" cy="640000"/>
+          </a:xfrm>
+          <a:prstGeom prst="rect">
+            <a:avLst/>
+          </a:prstGeom>
+          <a:noFill/>
+          <a:ln/>
+        </p:spPr>
+        <p:txBody>
+          <a:bodyPr wrap="square" lIns="0" tIns="0" rIns="0" bIns="0" rtlCol="0" anchor="ctr"/>
+          <a:lstStyle/>
+          <a:p>
+            <a:pPr indent="0" marL="0">
+              <a:lnSpc>
+                <a:spcPct val="110000"/>
+              </a:lnSpc>
+              <a:buNone/>
+            </a:pPr>
+            <a:r>
+              <a:rPr lang="en-US" sz="1300" dirty="0">
+                <a:solidFill>
+                  <a:srgbClr val="16262E"/>
+                </a:solidFill>
+                <a:latin typeface="Calibri" pitchFamily="34" charset="0"/>
+                <a:ea typeface="Calibri" pitchFamily="34" charset="-122"/>
+                <a:cs typeface="Calibri" pitchFamily="34" charset="-120"/>
+              </a:rPr>
+              <a:t>Las dos barras terminan en el mismo lugar: 94.7 por ciento de acuerdo observado en las dos. Lo que cambia es dónde empezaban. En la de arriba quedaban 73 puntos por ganar y se ganaron 68; en la de abajo solo quedaban 14 y se ganaron 9. El mismo porcentaje, la mitad del mérito.</a:t>
+            </a:r>
+            <a:endParaRPr lang="en-US" sz="1300" dirty="0"/>
+          </a:p>
+        </p:txBody>
+      </p:sp>
+      <p:sp>
+        <p:nvSpPr>
+          <p:cNvPr id="30" name="Text"/>
+          <p:cNvSpPr txBox="1"/>
+          <p:nvPr/>
+        </p:nvSpPr>
+        <p:spPr>
+          <a:xfrm>
+            <a:off x="566928" y="6200000"/>
+            <a:ext cx="11057839" cy="240000"/>
+          </a:xfrm>
+          <a:prstGeom prst="rect">
+            <a:avLst/>
+          </a:prstGeom>
+          <a:noFill/>
+          <a:ln/>
+        </p:spPr>
+        <p:txBody>
+          <a:bodyPr wrap="square" lIns="0" tIns="0" rIns="0" bIns="0" rtlCol="0" anchor="t"/>
+          <a:lstStyle/>
+          <a:p>
+            <a:pPr indent="0" marL="0">
+              <a:buNone/>
+            </a:pPr>
+            <a:r>
+              <a:rPr lang="en-US" sz="1000" dirty="0">
+                <a:solidFill>
+                  <a:srgbClr val="5A6B73"/>
+                </a:solidFill>
+                <a:latin typeface="Calibri" pitchFamily="34" charset="0"/>
+                <a:ea typeface="Calibri" pitchFamily="34" charset="-122"/>
+                <a:cs typeface="Calibri" pitchFamily="34" charset="-120"/>
+              </a:rPr>
+              <a:t>Cohen (1960), «A coefficient of agreement for nominal scales», Educational and Psychological Measurement 20(1).</a:t>
             </a:r>
             <a:endParaRPr lang="en-US" sz="1000" dirty="0"/>
           </a:p>
@@ -28429,7 +30343,7 @@
                 <a:ea typeface="Calibri" pitchFamily="34" charset="-122"/>
                 <a:cs typeface="Calibri" pitchFamily="34" charset="-120"/>
               </a:rPr>
-              <a:t>10:39 a 11:44</a:t>
+              <a:t>10:44 a 11:49</a:t>
             </a:r>
             <a:endParaRPr lang="en-US" sz="1200" dirty="0"/>
           </a:p>
@@ -29940,7 +31854,7 @@
                 <a:ea typeface="Arial" pitchFamily="34" charset="-122"/>
                 <a:cs typeface="Arial" pitchFamily="34" charset="-120"/>
               </a:rPr>
-              <a:t>10 min · corte 10:57</a:t>
+              <a:t>10 min · corte 11:05</a:t>
             </a:r>
             <a:endParaRPr lang="en-US" sz="1100" dirty="0"/>
           </a:p>
@@ -30112,7 +32026,7 @@
                 <a:ea typeface="Arial" pitchFamily="34" charset="-122"/>
                 <a:cs typeface="Arial" pitchFamily="34" charset="-120"/>
               </a:rPr>
-              <a:t>20 min · corte 11:17</a:t>
+              <a:t>20 min · corte 11:25</a:t>
             </a:r>
             <a:endParaRPr lang="en-US" sz="1100" dirty="0"/>
           </a:p>
@@ -30284,7 +32198,7 @@
                 <a:ea typeface="Arial" pitchFamily="34" charset="-122"/>
                 <a:cs typeface="Arial" pitchFamily="34" charset="-120"/>
               </a:rPr>
-              <a:t>11 min · corte 11:28</a:t>
+              <a:t>11 min · corte 11:36</a:t>
             </a:r>
             <a:endParaRPr lang="en-US" sz="1100" dirty="0"/>
           </a:p>
@@ -30456,7 +32370,7 @@
                 <a:ea typeface="Arial" pitchFamily="34" charset="-122"/>
                 <a:cs typeface="Arial" pitchFamily="34" charset="-120"/>
               </a:rPr>
-              <a:t>5 min · corte 11:33</a:t>
+              <a:t>5 min · corte 11:41</a:t>
             </a:r>
             <a:endParaRPr lang="en-US" sz="1100" dirty="0"/>
           </a:p>
@@ -30628,7 +32542,7 @@
                 <a:ea typeface="Arial" pitchFamily="34" charset="-122"/>
                 <a:cs typeface="Arial" pitchFamily="34" charset="-120"/>
               </a:rPr>
-              <a:t>2 min · corte 11:35</a:t>
+              <a:t>2 min · corte 11:43</a:t>
             </a:r>
             <a:endParaRPr lang="en-US" sz="1100" dirty="0"/>
           </a:p>

--- a/sesion-06/Sesion_06_Laboratorio_Cualitativo.pptx
+++ b/sesion-06/Sesion_06_Laboratorio_Cualitativo.pptx
@@ -23,17 +23,18 @@
     <p:sldId id="271" r:id="rId61"/>
     <p:sldId id="272" r:id="rId64"/>
     <p:sldId id="273" r:id="rId65"/>
-    <p:sldId id="274" r:id="rId50"/>
-    <p:sldId id="275" r:id="rId54"/>
-    <p:sldId id="276" r:id="rId6"/>
-    <p:sldId id="277" r:id="rId7"/>
-    <p:sldId id="278" r:id="rId8"/>
-    <p:sldId id="279" r:id="rId62"/>
-    <p:sldId id="280" r:id="rId11"/>
-    <p:sldId id="281" r:id="rId12"/>
-    <p:sldId id="282" r:id="rId13"/>
-    <p:sldId id="283" r:id="rId14"/>
-    <p:sldId id="284" r:id="rId52"/>
+    <p:sldId id="274" r:id="rId66"/>
+    <p:sldId id="275" r:id="rId50"/>
+    <p:sldId id="276" r:id="rId54"/>
+    <p:sldId id="277" r:id="rId6"/>
+    <p:sldId id="278" r:id="rId7"/>
+    <p:sldId id="279" r:id="rId8"/>
+    <p:sldId id="280" r:id="rId62"/>
+    <p:sldId id="281" r:id="rId11"/>
+    <p:sldId id="282" r:id="rId12"/>
+    <p:sldId id="283" r:id="rId13"/>
+    <p:sldId id="284" r:id="rId14"/>
+    <p:sldId id="285" r:id="rId52"/>
   </p:sldIdLst>
   <p:notesMasterIdLst>
     <p:notesMasterId r:id="rId15"/>
@@ -3168,6 +3169,112 @@
 </p:notes>
 </file>
 
+<file path=ppt/notesSlides/notesSlide36.xml><?xml version="1.0" encoding="utf-8"?>
+<p:notes xmlns:a="http://schemas.openxmlformats.org/drawingml/2006/main" xmlns:r="http://schemas.openxmlformats.org/officeDocument/2006/relationships" xmlns:p="http://schemas.openxmlformats.org/presentationml/2006/main">
+  <p:cSld>
+    <p:spTree>
+      <p:nvGrpSpPr>
+        <p:cNvPr id="1" name=""/>
+        <p:cNvGrpSpPr/>
+        <p:nvPr/>
+      </p:nvGrpSpPr>
+      <p:grpSpPr>
+        <a:xfrm>
+          <a:off x="0" y="0"/>
+          <a:ext cx="0" cy="0"/>
+          <a:chOff x="0" y="0"/>
+          <a:chExt cx="0" cy="0"/>
+        </a:xfrm>
+      </p:grpSpPr>
+      <p:sp>
+        <p:nvSpPr>
+          <p:cNvPr id="2" name="Slide Image Placeholder 1"/>
+          <p:cNvSpPr>
+            <a:spLocks noGrp="1" noRot="1" noChangeAspect="1"/>
+          </p:cNvSpPr>
+          <p:nvPr>
+            <p:ph type="sldImg"/>
+          </p:nvPr>
+        </p:nvSpPr>
+        <p:spPr/>
+      </p:sp>
+      <p:sp>
+        <p:nvSpPr>
+          <p:cNvPr id="3" name="Notes Placeholder 2"/>
+          <p:cNvSpPr>
+            <a:spLocks noGrp="1"/>
+          </p:cNvSpPr>
+          <p:nvPr>
+            <p:ph type="body" idx="1"/>
+          </p:nvPr>
+        </p:nvSpPr>
+        <p:spPr/>
+        <p:txBody>
+          <a:bodyPr/>
+          <a:lstStyle/>
+          <a:p>
+            <a:r>
+              <a:rPr lang="en-US" dirty="0"/>
+              <a:t>Cinco minutos. Es la lámina que faltaba: hasta aquí se veía el cálculo y no los datos que entran.</a:t>
+            </a:r>
+          </a:p>
+          <a:p>
+            <a:r>
+              <a:rPr lang="en-US" dirty="0"/>
+              <a:t>El panel izquierdo responde de dónde sale el 36 de 38 de la lámina siguiente. Diga por qué no se proyecta la clasificación una por una: es la clave del ejercicio de la sesión 4 y vive en el material del instructor. Lo que entra al cálculo son los totales.</a:t>
+            </a:r>
+          </a:p>
+          <a:p>
+            <a:r>
+              <a:rPr lang="en-US" dirty="0"/>
+              <a:t>El panel derecho es el que van a replicar en el paso 4. Recorra las seis filas y cuente en voz alta las coincidencias: cuatro. Después las frecuencias de cada equipo, que es de donde sale la S.</a:t>
+            </a:r>
+          </a:p>
+          <a:p>
+            <a:r>
+              <a:rPr lang="en-US" dirty="0"/>
+              <a:t>El remate es el banner y es la idea que se llevan: el dato que casi nadie reporta es con qué frecuencia usó cada quien cada categoría, y es el que decide el resultado. Dos equipos con las mismas cuatro coincidencias pueden salir con kappas muy distintas.</a:t>
+            </a:r>
+          </a:p>
+          <a:p>
+            <a:r>
+              <a:rPr lang="en-US" dirty="0"/>
+              <a:t>Si alguien pregunta por qué las dos columnas de la izquierda tienen los mismos totales: es el supuesto de marginales iguales que se declara en la lámina siguiente. Con exactamente dos desacuerdos, esa igualdad obliga a que sean un intercambio mutuo entre dos categorías.</a:t>
+            </a:r>
+          </a:p>
+        </p:txBody>
+      </p:sp>
+      <p:sp>
+        <p:nvSpPr>
+          <p:cNvPr id="4" name="Slide Number Placeholder 3"/>
+          <p:cNvSpPr>
+            <a:spLocks noGrp="1"/>
+          </p:cNvSpPr>
+          <p:nvPr>
+            <p:ph type="sldNum" sz="quarter" idx="10"/>
+          </p:nvPr>
+        </p:nvSpPr>
+        <p:spPr/>
+        <p:txBody>
+          <a:bodyPr/>
+          <a:lstStyle/>
+          <a:p>
+            <a:fld id="{B3C21451-1387-4CA6-816F-3879F97B5CB9}" type="slidenum">
+              <a:rPr lang="en-US"/>
+              <a:t>36</a:t>
+            </a:fld>
+            <a:endParaRPr lang="en-US"/>
+          </a:p>
+        </p:txBody>
+      </p:sp>
+    </p:spTree>
+  </p:cSld>
+  <p:clrMapOvr>
+    <a:masterClrMapping/>
+  </p:clrMapOvr>
+</p:notes>
+</file>
+
 <file path=ppt/notesSlides/notesSlide5.xml><?xml version="1.0" encoding="utf-8"?>
 <p:notes xmlns:a="http://schemas.openxmlformats.org/drawingml/2006/main" xmlns:r="http://schemas.openxmlformats.org/officeDocument/2006/relationships" xmlns:p="http://schemas.openxmlformats.org/presentationml/2006/main">
   <p:cSld>
@@ -3384,7 +3491,7 @@
           <a:p>
             <a:r>
               <a:rPr lang="en-US" dirty="0"/>
-              <a:t>Cuarenta y ocho minutos de práctica dentro de un bloque de sesenta y cinco, de 10:44 a 11:49. El encargo son nueve minutos porque incluye la lámina del prompt; dos para abrir salas; la práctica de 10:55 a 11:43; dos de regreso y cuatro de reporte.</a:t>
+              <a:t>Cuarenta y ocho minutos de práctica dentro de un bloque de sesenta y cinco, de 10:49 a 11:54. El encargo son nueve minutos porque incluye la lámina del prompt; dos para abrir salas; la práctica de 11:00 a 11:48; dos de regreso y cuatro de reporte.</a:t>
             </a:r>
           </a:p>
           <a:p>
@@ -7951,7 +8058,7 @@
                 <a:ea typeface="Arial" pitchFamily="34" charset="-122"/>
                 <a:cs typeface="Arial" pitchFamily="34" charset="-120"/>
               </a:rPr>
-              <a:t>9:10 a 10:34</a:t>
+              <a:t>9:10 a 10:39</a:t>
             </a:r>
             <a:endParaRPr lang="en-US" sz="1200" dirty="0"/>
           </a:p>
@@ -11885,7 +11992,7 @@
                 <a:ea typeface="Arial" pitchFamily="34" charset="-122"/>
                 <a:cs typeface="Arial" pitchFamily="34" charset="-120"/>
               </a:rPr>
-              <a:t>9:00 a 12:05</a:t>
+              <a:t>9:00 a 12:10</a:t>
             </a:r>
             <a:endParaRPr lang="en-US" sz="1200" dirty="0"/>
           </a:p>
@@ -12491,7 +12598,7 @@
                 <a:ea typeface="Arial" pitchFamily="34" charset="-122"/>
                 <a:cs typeface="Arial" pitchFamily="34" charset="-120"/>
               </a:rPr>
-              <a:t>10:34</a:t>
+              <a:t>10:39</a:t>
             </a:r>
             <a:endParaRPr lang="en-US" sz="1300" dirty="0"/>
           </a:p>
@@ -12599,7 +12706,7 @@
                 <a:ea typeface="Arial" pitchFamily="34" charset="-122"/>
                 <a:cs typeface="Arial" pitchFamily="34" charset="-120"/>
               </a:rPr>
-              <a:t>10:44</a:t>
+              <a:t>10:49</a:t>
             </a:r>
             <a:endParaRPr lang="en-US" sz="1300" dirty="0"/>
           </a:p>
@@ -12707,7 +12814,7 @@
                 <a:ea typeface="Arial" pitchFamily="34" charset="-122"/>
                 <a:cs typeface="Arial" pitchFamily="34" charset="-120"/>
               </a:rPr>
-              <a:t>11:49</a:t>
+              <a:t>11:54</a:t>
             </a:r>
             <a:endParaRPr lang="en-US" sz="1300" dirty="0"/>
           </a:p>
@@ -12788,7 +12895,7 @@
                 <a:ea typeface="Calibri" pitchFamily="34" charset="-122"/>
                 <a:cs typeface="Calibri" pitchFamily="34" charset="-120"/>
               </a:rPr>
-              <a:t>Hoy nos pasamos media hora, a propósito: cada salida que aparece en pantalla viene con el prompt que la produjo. Si hay que terminar a las 11:30, el recorte está en el guion. Una sola práctica, de cuarenta y ocho minutos.</a:t>
+              <a:t>Hoy nos pasamos cuarenta minutos, a propósito: cada salida viene con el prompt que la produjo y cada número con los datos que entraron. Si hay que terminar a las 11:30, el recorte está en el guion.</a:t>
             </a:r>
             <a:endParaRPr lang="en-US" sz="1000" dirty="0"/>
           </a:p>
@@ -30104,6 +30211,3563 @@
                 <a:cs typeface="Calibri" pitchFamily="34" charset="-120"/>
               </a:rPr>
               <a:t>Cohen (1960), «A coefficient of agreement for nominal scales», Educational and Psychological Measurement 20(1).</a:t>
+            </a:r>
+            <a:endParaRPr lang="en-US" sz="1000" dirty="0"/>
+          </a:p>
+        </p:txBody>
+      </p:sp>
+    </p:spTree>
+  </p:cSld>
+  <p:clrMapOvr>
+    <a:masterClrMapping/>
+  </p:clrMapOvr>
+</p:sld>
+</file>
+
+<file path=ppt/slides/slide36.xml><?xml version="1.0" encoding="utf-8"?>
+<p:sld xmlns:a="http://schemas.openxmlformats.org/drawingml/2006/main" xmlns:r="http://schemas.openxmlformats.org/officeDocument/2006/relationships" xmlns:p="http://schemas.openxmlformats.org/presentationml/2006/main">
+  <p:cSld name="Insumos del calculo">
+    <p:spTree>
+      <p:nvGrpSpPr>
+        <p:cNvPr id="1" name=""/>
+        <p:cNvGrpSpPr/>
+        <p:nvPr/>
+      </p:nvGrpSpPr>
+      <p:grpSpPr>
+        <a:xfrm>
+          <a:off x="0" y="0"/>
+          <a:ext cx="0" cy="0"/>
+          <a:chOff x="0" y="0"/>
+          <a:chExt cx="0" cy="0"/>
+        </a:xfrm>
+      </p:grpSpPr>
+      <p:sp>
+        <p:nvSpPr>
+          <p:cNvPr id="2" name="Text"/>
+          <p:cNvSpPr txBox="1"/>
+          <p:nvPr/>
+        </p:nvSpPr>
+        <p:spPr>
+          <a:xfrm>
+            <a:off x="566928" y="402336"/>
+            <a:ext cx="11057839" cy="749808"/>
+          </a:xfrm>
+          <a:prstGeom prst="rect">
+            <a:avLst/>
+          </a:prstGeom>
+          <a:noFill/>
+          <a:ln/>
+        </p:spPr>
+        <p:txBody>
+          <a:bodyPr wrap="square" lIns="0" tIns="0" rIns="0" bIns="0" rtlCol="0" anchor="t"/>
+          <a:lstStyle/>
+          <a:p>
+            <a:pPr algn="l" indent="0" marL="0">
+              <a:buNone/>
+            </a:pPr>
+            <a:r>
+              <a:rPr lang="en-US" sz="3200" b="1" dirty="0">
+                <a:solidFill>
+                  <a:srgbClr val="16262E"/>
+                </a:solidFill>
+                <a:latin typeface="Arial" pitchFamily="34" charset="0"/>
+                <a:ea typeface="Arial" pitchFamily="34" charset="-122"/>
+                <a:cs typeface="Arial" pitchFamily="34" charset="-120"/>
+              </a:rPr>
+              <a:t>De dónde salen esos dos números</a:t>
+            </a:r>
+            <a:endParaRPr lang="en-US" sz="3200" dirty="0"/>
+          </a:p>
+        </p:txBody>
+      </p:sp>
+      <p:sp>
+        <p:nvSpPr>
+          <p:cNvPr id="3" name="Text"/>
+          <p:cNvSpPr txBox="1"/>
+          <p:nvPr/>
+        </p:nvSpPr>
+        <p:spPr>
+          <a:xfrm>
+            <a:off x="566928" y="1280160"/>
+            <a:ext cx="11057839" cy="731520"/>
+          </a:xfrm>
+          <a:prstGeom prst="rect">
+            <a:avLst/>
+          </a:prstGeom>
+          <a:noFill/>
+          <a:ln/>
+        </p:spPr>
+        <p:txBody>
+          <a:bodyPr wrap="square" lIns="0" tIns="0" rIns="0" bIns="0" rtlCol="0" anchor="t"/>
+          <a:lstStyle/>
+          <a:p>
+            <a:pPr indent="0" marL="0">
+              <a:lnSpc>
+                <a:spcPct val="108000"/>
+              </a:lnSpc>
+              <a:buNone/>
+            </a:pPr>
+            <a:r>
+              <a:rPr lang="en-US" sz="1500" dirty="0">
+                <a:solidFill>
+                  <a:srgbClr val="5A6B73"/>
+                </a:solidFill>
+                <a:latin typeface="Calibri" pitchFamily="34" charset="0"/>
+                <a:ea typeface="Calibri" pitchFamily="34" charset="-122"/>
+                <a:cs typeface="Calibri" pitchFamily="34" charset="-120"/>
+              </a:rPr>
+              <a:t>Al cálculo no entran las clasificaciones una por una. Entran dos cosas, y conviene verlas.</a:t>
+            </a:r>
+            <a:endParaRPr lang="en-US" sz="1500" dirty="0"/>
+          </a:p>
+        </p:txBody>
+      </p:sp>
+      <p:sp>
+        <p:nvSpPr>
+          <p:cNvPr id="4" name="Shape"/>
+          <p:cNvSpPr/>
+          <p:nvPr/>
+        </p:nvSpPr>
+        <p:spPr>
+          <a:xfrm>
+            <a:off x="566928" y="1700000"/>
+            <a:ext cx="11057839" cy="300000"/>
+          </a:xfrm>
+          <a:prstGeom prst="roundRect">
+            <a:avLst>
+              <a:gd name="adj" fmla="val 20000"/>
+            </a:avLst>
+          </a:prstGeom>
+          <a:solidFill>
+            <a:srgbClr val="D7E7E7"/>
+          </a:solidFill>
+          <a:ln w="12700">
+            <a:solidFill>
+              <a:srgbClr val="D7E7E7"/>
+            </a:solidFill>
+            <a:prstDash val="solid"/>
+          </a:ln>
+        </p:spPr>
+      </p:sp>
+      <p:sp>
+        <p:nvSpPr>
+          <p:cNvPr id="5" name="Text"/>
+          <p:cNvSpPr txBox="1"/>
+          <p:nvPr/>
+        </p:nvSpPr>
+        <p:spPr>
+          <a:xfrm>
+            <a:off x="766928" y="1700000"/>
+            <a:ext cx="1700000" cy="300000"/>
+          </a:xfrm>
+          <a:prstGeom prst="rect">
+            <a:avLst/>
+          </a:prstGeom>
+          <a:noFill/>
+          <a:ln/>
+        </p:spPr>
+        <p:txBody>
+          <a:bodyPr wrap="square" lIns="0" tIns="0" rIns="0" bIns="0" rtlCol="0" anchor="ctr"/>
+          <a:lstStyle/>
+          <a:p>
+            <a:pPr indent="0" marL="0">
+              <a:buNone/>
+            </a:pPr>
+            <a:r>
+              <a:rPr lang="en-US" sz="950" b="1" spc="100" kern="0" dirty="0">
+                <a:solidFill>
+                  <a:srgbClr val="2E7D7D"/>
+                </a:solidFill>
+                <a:latin typeface="Arial" pitchFamily="34" charset="0"/>
+                <a:ea typeface="Arial" pitchFamily="34" charset="-122"/>
+                <a:cs typeface="Arial" pitchFamily="34" charset="-120"/>
+              </a:rPr>
+              <a:t>DE DÓNDE SALE</a:t>
+            </a:r>
+            <a:endParaRPr lang="en-US" sz="950" dirty="0"/>
+          </a:p>
+        </p:txBody>
+      </p:sp>
+      <p:sp>
+        <p:nvSpPr>
+          <p:cNvPr id="6" name="Text"/>
+          <p:cNvSpPr txBox="1"/>
+          <p:nvPr/>
+        </p:nvSpPr>
+        <p:spPr>
+          <a:xfrm>
+            <a:off x="2516928" y="1700000"/>
+            <a:ext cx="8907839" cy="300000"/>
+          </a:xfrm>
+          <a:prstGeom prst="rect">
+            <a:avLst/>
+          </a:prstGeom>
+          <a:noFill/>
+          <a:ln/>
+        </p:spPr>
+        <p:txBody>
+          <a:bodyPr wrap="square" lIns="0" tIns="0" rIns="0" bIns="0" rtlCol="0" anchor="ctr"/>
+          <a:lstStyle/>
+          <a:p>
+            <a:pPr indent="0" marL="0">
+              <a:buNone/>
+            </a:pPr>
+            <a:r>
+              <a:rPr lang="en-US" sz="1100" dirty="0">
+                <a:solidFill>
+                  <a:srgbClr val="16262E"/>
+                </a:solidFill>
+                <a:latin typeface="Calibri" pitchFamily="34" charset="0"/>
+                <a:ea typeface="Calibri" pitchFamily="34" charset="-122"/>
+                <a:cs typeface="Calibri" pitchFamily="34" charset="-120"/>
+              </a:rPr>
+              <a:t>A la izquierda, el corpus de foros de la sesión 4. A la derecha, el ejemplo del paso 4 que van a hacer en el laboratorio.</a:t>
+            </a:r>
+            <a:endParaRPr lang="en-US" sz="1100" dirty="0"/>
+          </a:p>
+        </p:txBody>
+      </p:sp>
+      <p:sp>
+        <p:nvSpPr>
+          <p:cNvPr id="7" name="Shape"/>
+          <p:cNvSpPr/>
+          <p:nvPr/>
+        </p:nvSpPr>
+        <p:spPr>
+          <a:xfrm>
+            <a:off x="566928" y="2100000"/>
+            <a:ext cx="5378919" cy="3320000"/>
+          </a:xfrm>
+          <a:prstGeom prst="roundRect">
+            <a:avLst>
+              <a:gd name="adj" fmla="val 2933"/>
+            </a:avLst>
+          </a:prstGeom>
+          <a:solidFill>
+            <a:srgbClr val="F2F5F6"/>
+          </a:solidFill>
+          <a:ln w="12700">
+            <a:solidFill>
+              <a:srgbClr val="F2F5F6"/>
+            </a:solidFill>
+            <a:prstDash val="solid"/>
+          </a:ln>
+        </p:spPr>
+      </p:sp>
+      <p:sp>
+        <p:nvSpPr>
+          <p:cNvPr id="8" name="Text"/>
+          <p:cNvSpPr txBox="1"/>
+          <p:nvPr/>
+        </p:nvSpPr>
+        <p:spPr>
+          <a:xfrm>
+            <a:off x="804672" y="2230000"/>
+            <a:ext cx="4903431" cy="260000"/>
+          </a:xfrm>
+          <a:prstGeom prst="rect">
+            <a:avLst/>
+          </a:prstGeom>
+          <a:noFill/>
+          <a:ln/>
+        </p:spPr>
+        <p:txBody>
+          <a:bodyPr wrap="square" lIns="0" tIns="0" rIns="0" bIns="0" rtlCol="0" anchor="t"/>
+          <a:lstStyle/>
+          <a:p>
+            <a:pPr indent="0" marL="0">
+              <a:buNone/>
+            </a:pPr>
+            <a:r>
+              <a:rPr lang="en-US" sz="1000" b="1" spc="100" kern="0" dirty="0">
+                <a:solidFill>
+                  <a:srgbClr val="2E7D7D"/>
+                </a:solidFill>
+                <a:latin typeface="Arial" pitchFamily="34" charset="0"/>
+                <a:ea typeface="Arial" pitchFamily="34" charset="-122"/>
+                <a:cs typeface="Arial" pitchFamily="34" charset="-120"/>
+              </a:rPr>
+              <a:t>INSUMO 1 · EN CUÁNTAS COINCIDIERON</a:t>
+            </a:r>
+            <a:endParaRPr lang="en-US" sz="1000" dirty="0"/>
+          </a:p>
+        </p:txBody>
+      </p:sp>
+      <p:sp>
+        <p:nvSpPr>
+          <p:cNvPr id="9" name="Text"/>
+          <p:cNvSpPr txBox="1"/>
+          <p:nvPr/>
+        </p:nvSpPr>
+        <p:spPr>
+          <a:xfrm>
+            <a:off x="804672" y="2510000"/>
+            <a:ext cx="4903431" cy="300000"/>
+          </a:xfrm>
+          <a:prstGeom prst="rect">
+            <a:avLst/>
+          </a:prstGeom>
+          <a:noFill/>
+          <a:ln/>
+        </p:spPr>
+        <p:txBody>
+          <a:bodyPr wrap="square" lIns="0" tIns="0" rIns="0" bIns="0" rtlCol="0" anchor="t"/>
+          <a:lstStyle/>
+          <a:p>
+            <a:pPr indent="0" marL="0">
+              <a:buNone/>
+            </a:pPr>
+            <a:r>
+              <a:rPr lang="en-US" sz="1450" b="1" dirty="0">
+                <a:solidFill>
+                  <a:srgbClr val="16262E"/>
+                </a:solidFill>
+                <a:latin typeface="Arial" pitchFamily="34" charset="0"/>
+                <a:ea typeface="Arial" pitchFamily="34" charset="-122"/>
+                <a:cs typeface="Arial" pitchFamily="34" charset="-120"/>
+              </a:rPr>
+              <a:t>El corpus de foros, causa raíz</a:t>
+            </a:r>
+            <a:endParaRPr lang="en-US" sz="1450" dirty="0"/>
+          </a:p>
+        </p:txBody>
+      </p:sp>
+      <p:sp>
+        <p:nvSpPr>
+          <p:cNvPr id="10" name="Shape"/>
+          <p:cNvSpPr/>
+          <p:nvPr/>
+        </p:nvSpPr>
+        <p:spPr>
+          <a:xfrm>
+            <a:off x="804672" y="2880000"/>
+            <a:ext cx="1750000" cy="280000"/>
+          </a:xfrm>
+          <a:prstGeom prst="rect">
+            <a:avLst/>
+          </a:prstGeom>
+          <a:solidFill>
+            <a:srgbClr val="16262E"/>
+          </a:solidFill>
+          <a:ln w="9525">
+            <a:solidFill>
+              <a:srgbClr val="FFFFFF"/>
+            </a:solidFill>
+            <a:prstDash val="solid"/>
+          </a:ln>
+        </p:spPr>
+      </p:sp>
+      <p:sp>
+        <p:nvSpPr>
+          <p:cNvPr id="11" name="Text"/>
+          <p:cNvSpPr txBox="1"/>
+          <p:nvPr/>
+        </p:nvSpPr>
+        <p:spPr>
+          <a:xfrm>
+            <a:off x="874672" y="2880000"/>
+            <a:ext cx="1610000" cy="280000"/>
+          </a:xfrm>
+          <a:prstGeom prst="rect">
+            <a:avLst/>
+          </a:prstGeom>
+          <a:noFill/>
+          <a:ln/>
+        </p:spPr>
+        <p:txBody>
+          <a:bodyPr wrap="square" lIns="0" tIns="0" rIns="0" bIns="0" rtlCol="0" anchor="ctr"/>
+          <a:lstStyle/>
+          <a:p>
+            <a:pPr indent="0" marL="0">
+              <a:buNone/>
+            </a:pPr>
+            <a:r>
+              <a:rPr lang="en-US" sz="900" b="1" dirty="0">
+                <a:solidFill>
+                  <a:srgbClr val="FFFFFF"/>
+                </a:solidFill>
+                <a:latin typeface="Arial" pitchFamily="34" charset="0"/>
+                <a:ea typeface="Arial" pitchFamily="34" charset="-122"/>
+                <a:cs typeface="Arial" pitchFamily="34" charset="-120"/>
+              </a:rPr>
+              <a:t>Categoría</a:t>
+            </a:r>
+            <a:endParaRPr lang="en-US" sz="900" dirty="0"/>
+          </a:p>
+        </p:txBody>
+      </p:sp>
+      <p:sp>
+        <p:nvSpPr>
+          <p:cNvPr id="12" name="Shape"/>
+          <p:cNvSpPr/>
+          <p:nvPr/>
+        </p:nvSpPr>
+        <p:spPr>
+          <a:xfrm>
+            <a:off x="2554672" y="2880000"/>
+            <a:ext cx="1500000" cy="280000"/>
+          </a:xfrm>
+          <a:prstGeom prst="rect">
+            <a:avLst/>
+          </a:prstGeom>
+          <a:solidFill>
+            <a:srgbClr val="16262E"/>
+          </a:solidFill>
+          <a:ln w="9525">
+            <a:solidFill>
+              <a:srgbClr val="FFFFFF"/>
+            </a:solidFill>
+            <a:prstDash val="solid"/>
+          </a:ln>
+        </p:spPr>
+      </p:sp>
+      <p:sp>
+        <p:nvSpPr>
+          <p:cNvPr id="13" name="Text"/>
+          <p:cNvSpPr txBox="1"/>
+          <p:nvPr/>
+        </p:nvSpPr>
+        <p:spPr>
+          <a:xfrm>
+            <a:off x="2624672" y="2880000"/>
+            <a:ext cx="1360000" cy="280000"/>
+          </a:xfrm>
+          <a:prstGeom prst="rect">
+            <a:avLst/>
+          </a:prstGeom>
+          <a:noFill/>
+          <a:ln/>
+        </p:spPr>
+        <p:txBody>
+          <a:bodyPr wrap="square" lIns="0" tIns="0" rIns="0" bIns="0" rtlCol="0" anchor="ctr"/>
+          <a:lstStyle/>
+          <a:p>
+            <a:pPr indent="0" marL="0">
+              <a:buNone/>
+            </a:pPr>
+            <a:r>
+              <a:rPr lang="en-US" sz="900" b="1" dirty="0">
+                <a:solidFill>
+                  <a:srgbClr val="FFFFFF"/>
+                </a:solidFill>
+                <a:latin typeface="Arial" pitchFamily="34" charset="0"/>
+                <a:ea typeface="Arial" pitchFamily="34" charset="-122"/>
+                <a:cs typeface="Arial" pitchFamily="34" charset="-120"/>
+              </a:rPr>
+              <a:t>La clave</a:t>
+            </a:r>
+            <a:endParaRPr lang="en-US" sz="900" dirty="0"/>
+          </a:p>
+        </p:txBody>
+      </p:sp>
+      <p:sp>
+        <p:nvSpPr>
+          <p:cNvPr id="14" name="Shape"/>
+          <p:cNvSpPr/>
+          <p:nvPr/>
+        </p:nvSpPr>
+        <p:spPr>
+          <a:xfrm>
+            <a:off x="4054672" y="2880000"/>
+            <a:ext cx="1600000" cy="280000"/>
+          </a:xfrm>
+          <a:prstGeom prst="rect">
+            <a:avLst/>
+          </a:prstGeom>
+          <a:solidFill>
+            <a:srgbClr val="16262E"/>
+          </a:solidFill>
+          <a:ln w="9525">
+            <a:solidFill>
+              <a:srgbClr val="FFFFFF"/>
+            </a:solidFill>
+            <a:prstDash val="solid"/>
+          </a:ln>
+        </p:spPr>
+      </p:sp>
+      <p:sp>
+        <p:nvSpPr>
+          <p:cNvPr id="15" name="Text"/>
+          <p:cNvSpPr txBox="1"/>
+          <p:nvPr/>
+        </p:nvSpPr>
+        <p:spPr>
+          <a:xfrm>
+            <a:off x="4124672" y="2880000"/>
+            <a:ext cx="1460000" cy="280000"/>
+          </a:xfrm>
+          <a:prstGeom prst="rect">
+            <a:avLst/>
+          </a:prstGeom>
+          <a:noFill/>
+          <a:ln/>
+        </p:spPr>
+        <p:txBody>
+          <a:bodyPr wrap="square" lIns="0" tIns="0" rIns="0" bIns="0" rtlCol="0" anchor="ctr"/>
+          <a:lstStyle/>
+          <a:p>
+            <a:pPr indent="0" marL="0">
+              <a:buNone/>
+            </a:pPr>
+            <a:r>
+              <a:rPr lang="en-US" sz="900" b="1" dirty="0">
+                <a:solidFill>
+                  <a:srgbClr val="FFFFFF"/>
+                </a:solidFill>
+                <a:latin typeface="Arial" pitchFamily="34" charset="0"/>
+                <a:ea typeface="Arial" pitchFamily="34" charset="-122"/>
+                <a:cs typeface="Arial" pitchFamily="34" charset="-120"/>
+              </a:rPr>
+              <a:t>Segunda pasada</a:t>
+            </a:r>
+            <a:endParaRPr lang="en-US" sz="900" dirty="0"/>
+          </a:p>
+        </p:txBody>
+      </p:sp>
+      <p:sp>
+        <p:nvSpPr>
+          <p:cNvPr id="16" name="Shape"/>
+          <p:cNvSpPr/>
+          <p:nvPr/>
+        </p:nvSpPr>
+        <p:spPr>
+          <a:xfrm>
+            <a:off x="804672" y="3160000"/>
+            <a:ext cx="1750000" cy="300000"/>
+          </a:xfrm>
+          <a:prstGeom prst="rect">
+            <a:avLst/>
+          </a:prstGeom>
+          <a:solidFill>
+            <a:srgbClr val="FAFCFC"/>
+          </a:solidFill>
+          <a:ln w="9525">
+            <a:solidFill>
+              <a:srgbClr val="D9E0E3"/>
+            </a:solidFill>
+            <a:prstDash val="solid"/>
+          </a:ln>
+        </p:spPr>
+      </p:sp>
+      <p:sp>
+        <p:nvSpPr>
+          <p:cNvPr id="17" name="Text"/>
+          <p:cNvSpPr txBox="1"/>
+          <p:nvPr/>
+        </p:nvSpPr>
+        <p:spPr>
+          <a:xfrm>
+            <a:off x="874672" y="3160000"/>
+            <a:ext cx="1610000" cy="300000"/>
+          </a:xfrm>
+          <a:prstGeom prst="rect">
+            <a:avLst/>
+          </a:prstGeom>
+          <a:noFill/>
+          <a:ln/>
+        </p:spPr>
+        <p:txBody>
+          <a:bodyPr wrap="square" lIns="0" tIns="0" rIns="0" bIns="0" rtlCol="0" anchor="ctr"/>
+          <a:lstStyle/>
+          <a:p>
+            <a:pPr indent="0" marL="0">
+              <a:buNone/>
+            </a:pPr>
+            <a:r>
+              <a:rPr lang="en-US" sz="1000" b="1" dirty="0">
+                <a:solidFill>
+                  <a:srgbClr val="16262E"/>
+                </a:solidFill>
+                <a:latin typeface="Arial" pitchFamily="34" charset="0"/>
+                <a:ea typeface="Arial" pitchFamily="34" charset="-122"/>
+                <a:cs typeface="Arial" pitchFamily="34" charset="-120"/>
+              </a:rPr>
+              <a:t>Gestión</a:t>
+            </a:r>
+            <a:endParaRPr lang="en-US" sz="1000" dirty="0"/>
+          </a:p>
+        </p:txBody>
+      </p:sp>
+      <p:sp>
+        <p:nvSpPr>
+          <p:cNvPr id="18" name="Shape"/>
+          <p:cNvSpPr/>
+          <p:nvPr/>
+        </p:nvSpPr>
+        <p:spPr>
+          <a:xfrm>
+            <a:off x="2554672" y="3160000"/>
+            <a:ext cx="1500000" cy="300000"/>
+          </a:xfrm>
+          <a:prstGeom prst="rect">
+            <a:avLst/>
+          </a:prstGeom>
+          <a:solidFill>
+            <a:srgbClr val="FAFCFC"/>
+          </a:solidFill>
+          <a:ln w="9525">
+            <a:solidFill>
+              <a:srgbClr val="D9E0E3"/>
+            </a:solidFill>
+            <a:prstDash val="solid"/>
+          </a:ln>
+        </p:spPr>
+      </p:sp>
+      <p:sp>
+        <p:nvSpPr>
+          <p:cNvPr id="19" name="Text"/>
+          <p:cNvSpPr txBox="1"/>
+          <p:nvPr/>
+        </p:nvSpPr>
+        <p:spPr>
+          <a:xfrm>
+            <a:off x="2624672" y="3160000"/>
+            <a:ext cx="1360000" cy="300000"/>
+          </a:xfrm>
+          <a:prstGeom prst="rect">
+            <a:avLst/>
+          </a:prstGeom>
+          <a:noFill/>
+          <a:ln/>
+        </p:spPr>
+        <p:txBody>
+          <a:bodyPr wrap="square" lIns="0" tIns="0" rIns="0" bIns="0" rtlCol="0" anchor="ctr"/>
+          <a:lstStyle/>
+          <a:p>
+            <a:pPr indent="0" marL="0">
+              <a:buNone/>
+            </a:pPr>
+            <a:r>
+              <a:rPr lang="en-US" sz="1000" dirty="0">
+                <a:solidFill>
+                  <a:srgbClr val="16262E"/>
+                </a:solidFill>
+                <a:latin typeface="Calibri" pitchFamily="34" charset="0"/>
+                <a:ea typeface="Calibri" pitchFamily="34" charset="-122"/>
+                <a:cs typeface="Calibri" pitchFamily="34" charset="-120"/>
+              </a:rPr>
+              <a:t>14</a:t>
+            </a:r>
+            <a:endParaRPr lang="en-US" sz="1000" dirty="0"/>
+          </a:p>
+        </p:txBody>
+      </p:sp>
+      <p:sp>
+        <p:nvSpPr>
+          <p:cNvPr id="20" name="Shape"/>
+          <p:cNvSpPr/>
+          <p:nvPr/>
+        </p:nvSpPr>
+        <p:spPr>
+          <a:xfrm>
+            <a:off x="4054672" y="3160000"/>
+            <a:ext cx="1600000" cy="300000"/>
+          </a:xfrm>
+          <a:prstGeom prst="rect">
+            <a:avLst/>
+          </a:prstGeom>
+          <a:solidFill>
+            <a:srgbClr val="FAFCFC"/>
+          </a:solidFill>
+          <a:ln w="9525">
+            <a:solidFill>
+              <a:srgbClr val="D9E0E3"/>
+            </a:solidFill>
+            <a:prstDash val="solid"/>
+          </a:ln>
+        </p:spPr>
+      </p:sp>
+      <p:sp>
+        <p:nvSpPr>
+          <p:cNvPr id="21" name="Text"/>
+          <p:cNvSpPr txBox="1"/>
+          <p:nvPr/>
+        </p:nvSpPr>
+        <p:spPr>
+          <a:xfrm>
+            <a:off x="4124672" y="3160000"/>
+            <a:ext cx="1460000" cy="300000"/>
+          </a:xfrm>
+          <a:prstGeom prst="rect">
+            <a:avLst/>
+          </a:prstGeom>
+          <a:noFill/>
+          <a:ln/>
+        </p:spPr>
+        <p:txBody>
+          <a:bodyPr wrap="square" lIns="0" tIns="0" rIns="0" bIns="0" rtlCol="0" anchor="ctr"/>
+          <a:lstStyle/>
+          <a:p>
+            <a:pPr indent="0" marL="0">
+              <a:buNone/>
+            </a:pPr>
+            <a:r>
+              <a:rPr lang="en-US" sz="1000" dirty="0">
+                <a:solidFill>
+                  <a:srgbClr val="16262E"/>
+                </a:solidFill>
+                <a:latin typeface="Calibri" pitchFamily="34" charset="0"/>
+                <a:ea typeface="Calibri" pitchFamily="34" charset="-122"/>
+                <a:cs typeface="Calibri" pitchFamily="34" charset="-120"/>
+              </a:rPr>
+              <a:t>14</a:t>
+            </a:r>
+            <a:endParaRPr lang="en-US" sz="1000" dirty="0"/>
+          </a:p>
+        </p:txBody>
+      </p:sp>
+      <p:sp>
+        <p:nvSpPr>
+          <p:cNvPr id="22" name="Shape"/>
+          <p:cNvSpPr/>
+          <p:nvPr/>
+        </p:nvSpPr>
+        <p:spPr>
+          <a:xfrm>
+            <a:off x="804672" y="3460000"/>
+            <a:ext cx="1750000" cy="300000"/>
+          </a:xfrm>
+          <a:prstGeom prst="rect">
+            <a:avLst/>
+          </a:prstGeom>
+          <a:solidFill>
+            <a:srgbClr val="FFFFFF"/>
+          </a:solidFill>
+          <a:ln w="9525">
+            <a:solidFill>
+              <a:srgbClr val="D9E0E3"/>
+            </a:solidFill>
+            <a:prstDash val="solid"/>
+          </a:ln>
+        </p:spPr>
+      </p:sp>
+      <p:sp>
+        <p:nvSpPr>
+          <p:cNvPr id="23" name="Text"/>
+          <p:cNvSpPr txBox="1"/>
+          <p:nvPr/>
+        </p:nvSpPr>
+        <p:spPr>
+          <a:xfrm>
+            <a:off x="874672" y="3460000"/>
+            <a:ext cx="1610000" cy="300000"/>
+          </a:xfrm>
+          <a:prstGeom prst="rect">
+            <a:avLst/>
+          </a:prstGeom>
+          <a:noFill/>
+          <a:ln/>
+        </p:spPr>
+        <p:txBody>
+          <a:bodyPr wrap="square" lIns="0" tIns="0" rIns="0" bIns="0" rtlCol="0" anchor="ctr"/>
+          <a:lstStyle/>
+          <a:p>
+            <a:pPr indent="0" marL="0">
+              <a:buNone/>
+            </a:pPr>
+            <a:r>
+              <a:rPr lang="en-US" sz="1000" b="1" dirty="0">
+                <a:solidFill>
+                  <a:srgbClr val="16262E"/>
+                </a:solidFill>
+                <a:latin typeface="Arial" pitchFamily="34" charset="0"/>
+                <a:ea typeface="Arial" pitchFamily="34" charset="-122"/>
+                <a:cs typeface="Arial" pitchFamily="34" charset="-120"/>
+              </a:rPr>
+              <a:t>Infraestructura</a:t>
+            </a:r>
+            <a:endParaRPr lang="en-US" sz="1000" dirty="0"/>
+          </a:p>
+        </p:txBody>
+      </p:sp>
+      <p:sp>
+        <p:nvSpPr>
+          <p:cNvPr id="24" name="Shape"/>
+          <p:cNvSpPr/>
+          <p:nvPr/>
+        </p:nvSpPr>
+        <p:spPr>
+          <a:xfrm>
+            <a:off x="2554672" y="3460000"/>
+            <a:ext cx="1500000" cy="300000"/>
+          </a:xfrm>
+          <a:prstGeom prst="rect">
+            <a:avLst/>
+          </a:prstGeom>
+          <a:solidFill>
+            <a:srgbClr val="FFFFFF"/>
+          </a:solidFill>
+          <a:ln w="9525">
+            <a:solidFill>
+              <a:srgbClr val="D9E0E3"/>
+            </a:solidFill>
+            <a:prstDash val="solid"/>
+          </a:ln>
+        </p:spPr>
+      </p:sp>
+      <p:sp>
+        <p:nvSpPr>
+          <p:cNvPr id="25" name="Text"/>
+          <p:cNvSpPr txBox="1"/>
+          <p:nvPr/>
+        </p:nvSpPr>
+        <p:spPr>
+          <a:xfrm>
+            <a:off x="2624672" y="3460000"/>
+            <a:ext cx="1360000" cy="300000"/>
+          </a:xfrm>
+          <a:prstGeom prst="rect">
+            <a:avLst/>
+          </a:prstGeom>
+          <a:noFill/>
+          <a:ln/>
+        </p:spPr>
+        <p:txBody>
+          <a:bodyPr wrap="square" lIns="0" tIns="0" rIns="0" bIns="0" rtlCol="0" anchor="ctr"/>
+          <a:lstStyle/>
+          <a:p>
+            <a:pPr indent="0" marL="0">
+              <a:buNone/>
+            </a:pPr>
+            <a:r>
+              <a:rPr lang="en-US" sz="1000" dirty="0">
+                <a:solidFill>
+                  <a:srgbClr val="16262E"/>
+                </a:solidFill>
+                <a:latin typeface="Calibri" pitchFamily="34" charset="0"/>
+                <a:ea typeface="Calibri" pitchFamily="34" charset="-122"/>
+                <a:cs typeface="Calibri" pitchFamily="34" charset="-120"/>
+              </a:rPr>
+              <a:t>9</a:t>
+            </a:r>
+            <a:endParaRPr lang="en-US" sz="1000" dirty="0"/>
+          </a:p>
+        </p:txBody>
+      </p:sp>
+      <p:sp>
+        <p:nvSpPr>
+          <p:cNvPr id="26" name="Shape"/>
+          <p:cNvSpPr/>
+          <p:nvPr/>
+        </p:nvSpPr>
+        <p:spPr>
+          <a:xfrm>
+            <a:off x="4054672" y="3460000"/>
+            <a:ext cx="1600000" cy="300000"/>
+          </a:xfrm>
+          <a:prstGeom prst="rect">
+            <a:avLst/>
+          </a:prstGeom>
+          <a:solidFill>
+            <a:srgbClr val="FFFFFF"/>
+          </a:solidFill>
+          <a:ln w="9525">
+            <a:solidFill>
+              <a:srgbClr val="D9E0E3"/>
+            </a:solidFill>
+            <a:prstDash val="solid"/>
+          </a:ln>
+        </p:spPr>
+      </p:sp>
+      <p:sp>
+        <p:nvSpPr>
+          <p:cNvPr id="27" name="Text"/>
+          <p:cNvSpPr txBox="1"/>
+          <p:nvPr/>
+        </p:nvSpPr>
+        <p:spPr>
+          <a:xfrm>
+            <a:off x="4124672" y="3460000"/>
+            <a:ext cx="1460000" cy="300000"/>
+          </a:xfrm>
+          <a:prstGeom prst="rect">
+            <a:avLst/>
+          </a:prstGeom>
+          <a:noFill/>
+          <a:ln/>
+        </p:spPr>
+        <p:txBody>
+          <a:bodyPr wrap="square" lIns="0" tIns="0" rIns="0" bIns="0" rtlCol="0" anchor="ctr"/>
+          <a:lstStyle/>
+          <a:p>
+            <a:pPr indent="0" marL="0">
+              <a:buNone/>
+            </a:pPr>
+            <a:r>
+              <a:rPr lang="en-US" sz="1000" dirty="0">
+                <a:solidFill>
+                  <a:srgbClr val="16262E"/>
+                </a:solidFill>
+                <a:latin typeface="Calibri" pitchFamily="34" charset="0"/>
+                <a:ea typeface="Calibri" pitchFamily="34" charset="-122"/>
+                <a:cs typeface="Calibri" pitchFamily="34" charset="-120"/>
+              </a:rPr>
+              <a:t>9</a:t>
+            </a:r>
+            <a:endParaRPr lang="en-US" sz="1000" dirty="0"/>
+          </a:p>
+        </p:txBody>
+      </p:sp>
+      <p:sp>
+        <p:nvSpPr>
+          <p:cNvPr id="28" name="Shape"/>
+          <p:cNvSpPr/>
+          <p:nvPr/>
+        </p:nvSpPr>
+        <p:spPr>
+          <a:xfrm>
+            <a:off x="804672" y="3760000"/>
+            <a:ext cx="1750000" cy="300000"/>
+          </a:xfrm>
+          <a:prstGeom prst="rect">
+            <a:avLst/>
+          </a:prstGeom>
+          <a:solidFill>
+            <a:srgbClr val="FAFCFC"/>
+          </a:solidFill>
+          <a:ln w="9525">
+            <a:solidFill>
+              <a:srgbClr val="D9E0E3"/>
+            </a:solidFill>
+            <a:prstDash val="solid"/>
+          </a:ln>
+        </p:spPr>
+      </p:sp>
+      <p:sp>
+        <p:nvSpPr>
+          <p:cNvPr id="29" name="Text"/>
+          <p:cNvSpPr txBox="1"/>
+          <p:nvPr/>
+        </p:nvSpPr>
+        <p:spPr>
+          <a:xfrm>
+            <a:off x="874672" y="3760000"/>
+            <a:ext cx="1610000" cy="300000"/>
+          </a:xfrm>
+          <a:prstGeom prst="rect">
+            <a:avLst/>
+          </a:prstGeom>
+          <a:noFill/>
+          <a:ln/>
+        </p:spPr>
+        <p:txBody>
+          <a:bodyPr wrap="square" lIns="0" tIns="0" rIns="0" bIns="0" rtlCol="0" anchor="ctr"/>
+          <a:lstStyle/>
+          <a:p>
+            <a:pPr indent="0" marL="0">
+              <a:buNone/>
+            </a:pPr>
+            <a:r>
+              <a:rPr lang="en-US" sz="1000" b="1" dirty="0">
+                <a:solidFill>
+                  <a:srgbClr val="16262E"/>
+                </a:solidFill>
+                <a:latin typeface="Arial" pitchFamily="34" charset="0"/>
+                <a:ea typeface="Arial" pitchFamily="34" charset="-122"/>
+                <a:cs typeface="Arial" pitchFamily="34" charset="-120"/>
+              </a:rPr>
+              <a:t>Presupuesto</a:t>
+            </a:r>
+            <a:endParaRPr lang="en-US" sz="1000" dirty="0"/>
+          </a:p>
+        </p:txBody>
+      </p:sp>
+      <p:sp>
+        <p:nvSpPr>
+          <p:cNvPr id="30" name="Shape"/>
+          <p:cNvSpPr/>
+          <p:nvPr/>
+        </p:nvSpPr>
+        <p:spPr>
+          <a:xfrm>
+            <a:off x="2554672" y="3760000"/>
+            <a:ext cx="1500000" cy="300000"/>
+          </a:xfrm>
+          <a:prstGeom prst="rect">
+            <a:avLst/>
+          </a:prstGeom>
+          <a:solidFill>
+            <a:srgbClr val="FAFCFC"/>
+          </a:solidFill>
+          <a:ln w="9525">
+            <a:solidFill>
+              <a:srgbClr val="D9E0E3"/>
+            </a:solidFill>
+            <a:prstDash val="solid"/>
+          </a:ln>
+        </p:spPr>
+      </p:sp>
+      <p:sp>
+        <p:nvSpPr>
+          <p:cNvPr id="31" name="Text"/>
+          <p:cNvSpPr txBox="1"/>
+          <p:nvPr/>
+        </p:nvSpPr>
+        <p:spPr>
+          <a:xfrm>
+            <a:off x="2624672" y="3760000"/>
+            <a:ext cx="1360000" cy="300000"/>
+          </a:xfrm>
+          <a:prstGeom prst="rect">
+            <a:avLst/>
+          </a:prstGeom>
+          <a:noFill/>
+          <a:ln/>
+        </p:spPr>
+        <p:txBody>
+          <a:bodyPr wrap="square" lIns="0" tIns="0" rIns="0" bIns="0" rtlCol="0" anchor="ctr"/>
+          <a:lstStyle/>
+          <a:p>
+            <a:pPr indent="0" marL="0">
+              <a:buNone/>
+            </a:pPr>
+            <a:r>
+              <a:rPr lang="en-US" sz="1000" dirty="0">
+                <a:solidFill>
+                  <a:srgbClr val="16262E"/>
+                </a:solidFill>
+                <a:latin typeface="Calibri" pitchFamily="34" charset="0"/>
+                <a:ea typeface="Calibri" pitchFamily="34" charset="-122"/>
+                <a:cs typeface="Calibri" pitchFamily="34" charset="-120"/>
+              </a:rPr>
+              <a:t>8</a:t>
+            </a:r>
+            <a:endParaRPr lang="en-US" sz="1000" dirty="0"/>
+          </a:p>
+        </p:txBody>
+      </p:sp>
+      <p:sp>
+        <p:nvSpPr>
+          <p:cNvPr id="32" name="Shape"/>
+          <p:cNvSpPr/>
+          <p:nvPr/>
+        </p:nvSpPr>
+        <p:spPr>
+          <a:xfrm>
+            <a:off x="4054672" y="3760000"/>
+            <a:ext cx="1600000" cy="300000"/>
+          </a:xfrm>
+          <a:prstGeom prst="rect">
+            <a:avLst/>
+          </a:prstGeom>
+          <a:solidFill>
+            <a:srgbClr val="FAFCFC"/>
+          </a:solidFill>
+          <a:ln w="9525">
+            <a:solidFill>
+              <a:srgbClr val="D9E0E3"/>
+            </a:solidFill>
+            <a:prstDash val="solid"/>
+          </a:ln>
+        </p:spPr>
+      </p:sp>
+      <p:sp>
+        <p:nvSpPr>
+          <p:cNvPr id="33" name="Text"/>
+          <p:cNvSpPr txBox="1"/>
+          <p:nvPr/>
+        </p:nvSpPr>
+        <p:spPr>
+          <a:xfrm>
+            <a:off x="4124672" y="3760000"/>
+            <a:ext cx="1460000" cy="300000"/>
+          </a:xfrm>
+          <a:prstGeom prst="rect">
+            <a:avLst/>
+          </a:prstGeom>
+          <a:noFill/>
+          <a:ln/>
+        </p:spPr>
+        <p:txBody>
+          <a:bodyPr wrap="square" lIns="0" tIns="0" rIns="0" bIns="0" rtlCol="0" anchor="ctr"/>
+          <a:lstStyle/>
+          <a:p>
+            <a:pPr indent="0" marL="0">
+              <a:buNone/>
+            </a:pPr>
+            <a:r>
+              <a:rPr lang="en-US" sz="1000" dirty="0">
+                <a:solidFill>
+                  <a:srgbClr val="16262E"/>
+                </a:solidFill>
+                <a:latin typeface="Calibri" pitchFamily="34" charset="0"/>
+                <a:ea typeface="Calibri" pitchFamily="34" charset="-122"/>
+                <a:cs typeface="Calibri" pitchFamily="34" charset="-120"/>
+              </a:rPr>
+              <a:t>8</a:t>
+            </a:r>
+            <a:endParaRPr lang="en-US" sz="1000" dirty="0"/>
+          </a:p>
+        </p:txBody>
+      </p:sp>
+      <p:sp>
+        <p:nvSpPr>
+          <p:cNvPr id="34" name="Shape"/>
+          <p:cNvSpPr/>
+          <p:nvPr/>
+        </p:nvSpPr>
+        <p:spPr>
+          <a:xfrm>
+            <a:off x="804672" y="4060000"/>
+            <a:ext cx="1750000" cy="300000"/>
+          </a:xfrm>
+          <a:prstGeom prst="rect">
+            <a:avLst/>
+          </a:prstGeom>
+          <a:solidFill>
+            <a:srgbClr val="FFFFFF"/>
+          </a:solidFill>
+          <a:ln w="9525">
+            <a:solidFill>
+              <a:srgbClr val="D9E0E3"/>
+            </a:solidFill>
+            <a:prstDash val="solid"/>
+          </a:ln>
+        </p:spPr>
+      </p:sp>
+      <p:sp>
+        <p:nvSpPr>
+          <p:cNvPr id="35" name="Text"/>
+          <p:cNvSpPr txBox="1"/>
+          <p:nvPr/>
+        </p:nvSpPr>
+        <p:spPr>
+          <a:xfrm>
+            <a:off x="874672" y="4060000"/>
+            <a:ext cx="1610000" cy="300000"/>
+          </a:xfrm>
+          <a:prstGeom prst="rect">
+            <a:avLst/>
+          </a:prstGeom>
+          <a:noFill/>
+          <a:ln/>
+        </p:spPr>
+        <p:txBody>
+          <a:bodyPr wrap="square" lIns="0" tIns="0" rIns="0" bIns="0" rtlCol="0" anchor="ctr"/>
+          <a:lstStyle/>
+          <a:p>
+            <a:pPr indent="0" marL="0">
+              <a:buNone/>
+            </a:pPr>
+            <a:r>
+              <a:rPr lang="en-US" sz="1000" b="1" dirty="0">
+                <a:solidFill>
+                  <a:srgbClr val="16262E"/>
+                </a:solidFill>
+                <a:latin typeface="Arial" pitchFamily="34" charset="0"/>
+                <a:ea typeface="Arial" pitchFamily="34" charset="-122"/>
+                <a:cs typeface="Arial" pitchFamily="34" charset="-120"/>
+              </a:rPr>
+              <a:t>Transparencia</a:t>
+            </a:r>
+            <a:endParaRPr lang="en-US" sz="1000" dirty="0"/>
+          </a:p>
+        </p:txBody>
+      </p:sp>
+      <p:sp>
+        <p:nvSpPr>
+          <p:cNvPr id="36" name="Shape"/>
+          <p:cNvSpPr/>
+          <p:nvPr/>
+        </p:nvSpPr>
+        <p:spPr>
+          <a:xfrm>
+            <a:off x="2554672" y="4060000"/>
+            <a:ext cx="1500000" cy="300000"/>
+          </a:xfrm>
+          <a:prstGeom prst="rect">
+            <a:avLst/>
+          </a:prstGeom>
+          <a:solidFill>
+            <a:srgbClr val="FFFFFF"/>
+          </a:solidFill>
+          <a:ln w="9525">
+            <a:solidFill>
+              <a:srgbClr val="D9E0E3"/>
+            </a:solidFill>
+            <a:prstDash val="solid"/>
+          </a:ln>
+        </p:spPr>
+      </p:sp>
+      <p:sp>
+        <p:nvSpPr>
+          <p:cNvPr id="37" name="Text"/>
+          <p:cNvSpPr txBox="1"/>
+          <p:nvPr/>
+        </p:nvSpPr>
+        <p:spPr>
+          <a:xfrm>
+            <a:off x="2624672" y="4060000"/>
+            <a:ext cx="1360000" cy="300000"/>
+          </a:xfrm>
+          <a:prstGeom prst="rect">
+            <a:avLst/>
+          </a:prstGeom>
+          <a:noFill/>
+          <a:ln/>
+        </p:spPr>
+        <p:txBody>
+          <a:bodyPr wrap="square" lIns="0" tIns="0" rIns="0" bIns="0" rtlCol="0" anchor="ctr"/>
+          <a:lstStyle/>
+          <a:p>
+            <a:pPr indent="0" marL="0">
+              <a:buNone/>
+            </a:pPr>
+            <a:r>
+              <a:rPr lang="en-US" sz="1000" dirty="0">
+                <a:solidFill>
+                  <a:srgbClr val="16262E"/>
+                </a:solidFill>
+                <a:latin typeface="Calibri" pitchFamily="34" charset="0"/>
+                <a:ea typeface="Calibri" pitchFamily="34" charset="-122"/>
+                <a:cs typeface="Calibri" pitchFamily="34" charset="-120"/>
+              </a:rPr>
+              <a:t>7</a:t>
+            </a:r>
+            <a:endParaRPr lang="en-US" sz="1000" dirty="0"/>
+          </a:p>
+        </p:txBody>
+      </p:sp>
+      <p:sp>
+        <p:nvSpPr>
+          <p:cNvPr id="38" name="Shape"/>
+          <p:cNvSpPr/>
+          <p:nvPr/>
+        </p:nvSpPr>
+        <p:spPr>
+          <a:xfrm>
+            <a:off x="4054672" y="4060000"/>
+            <a:ext cx="1600000" cy="300000"/>
+          </a:xfrm>
+          <a:prstGeom prst="rect">
+            <a:avLst/>
+          </a:prstGeom>
+          <a:solidFill>
+            <a:srgbClr val="FFFFFF"/>
+          </a:solidFill>
+          <a:ln w="9525">
+            <a:solidFill>
+              <a:srgbClr val="D9E0E3"/>
+            </a:solidFill>
+            <a:prstDash val="solid"/>
+          </a:ln>
+        </p:spPr>
+      </p:sp>
+      <p:sp>
+        <p:nvSpPr>
+          <p:cNvPr id="39" name="Text"/>
+          <p:cNvSpPr txBox="1"/>
+          <p:nvPr/>
+        </p:nvSpPr>
+        <p:spPr>
+          <a:xfrm>
+            <a:off x="4124672" y="4060000"/>
+            <a:ext cx="1460000" cy="300000"/>
+          </a:xfrm>
+          <a:prstGeom prst="rect">
+            <a:avLst/>
+          </a:prstGeom>
+          <a:noFill/>
+          <a:ln/>
+        </p:spPr>
+        <p:txBody>
+          <a:bodyPr wrap="square" lIns="0" tIns="0" rIns="0" bIns="0" rtlCol="0" anchor="ctr"/>
+          <a:lstStyle/>
+          <a:p>
+            <a:pPr indent="0" marL="0">
+              <a:buNone/>
+            </a:pPr>
+            <a:r>
+              <a:rPr lang="en-US" sz="1000" dirty="0">
+                <a:solidFill>
+                  <a:srgbClr val="16262E"/>
+                </a:solidFill>
+                <a:latin typeface="Calibri" pitchFamily="34" charset="0"/>
+                <a:ea typeface="Calibri" pitchFamily="34" charset="-122"/>
+                <a:cs typeface="Calibri" pitchFamily="34" charset="-120"/>
+              </a:rPr>
+              <a:t>7</a:t>
+            </a:r>
+            <a:endParaRPr lang="en-US" sz="1000" dirty="0"/>
+          </a:p>
+        </p:txBody>
+      </p:sp>
+      <p:sp>
+        <p:nvSpPr>
+          <p:cNvPr id="40" name="Shape"/>
+          <p:cNvSpPr/>
+          <p:nvPr/>
+        </p:nvSpPr>
+        <p:spPr>
+          <a:xfrm>
+            <a:off x="804672" y="4360000"/>
+            <a:ext cx="1750000" cy="300000"/>
+          </a:xfrm>
+          <a:prstGeom prst="rect">
+            <a:avLst/>
+          </a:prstGeom>
+          <a:solidFill>
+            <a:srgbClr val="FAFCFC"/>
+          </a:solidFill>
+          <a:ln w="9525">
+            <a:solidFill>
+              <a:srgbClr val="D9E0E3"/>
+            </a:solidFill>
+            <a:prstDash val="solid"/>
+          </a:ln>
+        </p:spPr>
+      </p:sp>
+      <p:sp>
+        <p:nvSpPr>
+          <p:cNvPr id="41" name="Text"/>
+          <p:cNvSpPr txBox="1"/>
+          <p:nvPr/>
+        </p:nvSpPr>
+        <p:spPr>
+          <a:xfrm>
+            <a:off x="874672" y="4360000"/>
+            <a:ext cx="1610000" cy="300000"/>
+          </a:xfrm>
+          <a:prstGeom prst="rect">
+            <a:avLst/>
+          </a:prstGeom>
+          <a:noFill/>
+          <a:ln/>
+        </p:spPr>
+        <p:txBody>
+          <a:bodyPr wrap="square" lIns="0" tIns="0" rIns="0" bIns="0" rtlCol="0" anchor="ctr"/>
+          <a:lstStyle/>
+          <a:p>
+            <a:pPr indent="0" marL="0">
+              <a:buNone/>
+            </a:pPr>
+            <a:r>
+              <a:rPr lang="en-US" sz="1000" b="1" dirty="0">
+                <a:solidFill>
+                  <a:srgbClr val="16262E"/>
+                </a:solidFill>
+                <a:latin typeface="Arial" pitchFamily="34" charset="0"/>
+                <a:ea typeface="Arial" pitchFamily="34" charset="-122"/>
+                <a:cs typeface="Arial" pitchFamily="34" charset="-120"/>
+              </a:rPr>
+              <a:t>Coincidencias</a:t>
+            </a:r>
+            <a:endParaRPr lang="en-US" sz="1000" dirty="0"/>
+          </a:p>
+        </p:txBody>
+      </p:sp>
+      <p:sp>
+        <p:nvSpPr>
+          <p:cNvPr id="42" name="Shape"/>
+          <p:cNvSpPr/>
+          <p:nvPr/>
+        </p:nvSpPr>
+        <p:spPr>
+          <a:xfrm>
+            <a:off x="2554672" y="4360000"/>
+            <a:ext cx="1500000" cy="300000"/>
+          </a:xfrm>
+          <a:prstGeom prst="rect">
+            <a:avLst/>
+          </a:prstGeom>
+          <a:solidFill>
+            <a:srgbClr val="FAFCFC"/>
+          </a:solidFill>
+          <a:ln w="9525">
+            <a:solidFill>
+              <a:srgbClr val="D9E0E3"/>
+            </a:solidFill>
+            <a:prstDash val="solid"/>
+          </a:ln>
+        </p:spPr>
+      </p:sp>
+      <p:sp>
+        <p:nvSpPr>
+          <p:cNvPr id="43" name="Text"/>
+          <p:cNvSpPr txBox="1"/>
+          <p:nvPr/>
+        </p:nvSpPr>
+        <p:spPr>
+          <a:xfrm>
+            <a:off x="2624672" y="4360000"/>
+            <a:ext cx="1360000" cy="300000"/>
+          </a:xfrm>
+          <a:prstGeom prst="rect">
+            <a:avLst/>
+          </a:prstGeom>
+          <a:noFill/>
+          <a:ln/>
+        </p:spPr>
+        <p:txBody>
+          <a:bodyPr wrap="square" lIns="0" tIns="0" rIns="0" bIns="0" rtlCol="0" anchor="ctr"/>
+          <a:lstStyle/>
+          <a:p>
+            <a:pPr indent="0" marL="0">
+              <a:buNone/>
+            </a:pPr>
+            <a:r>
+              <a:rPr lang="en-US" sz="1000" dirty="0">
+                <a:solidFill>
+                  <a:srgbClr val="16262E"/>
+                </a:solidFill>
+                <a:latin typeface="Calibri" pitchFamily="34" charset="0"/>
+                <a:ea typeface="Calibri" pitchFamily="34" charset="-122"/>
+                <a:cs typeface="Calibri" pitchFamily="34" charset="-120"/>
+              </a:rPr>
+              <a:t>36 de 38</a:t>
+            </a:r>
+            <a:endParaRPr lang="en-US" sz="1000" dirty="0"/>
+          </a:p>
+        </p:txBody>
+      </p:sp>
+      <p:sp>
+        <p:nvSpPr>
+          <p:cNvPr id="44" name="Shape"/>
+          <p:cNvSpPr/>
+          <p:nvPr/>
+        </p:nvSpPr>
+        <p:spPr>
+          <a:xfrm>
+            <a:off x="4054672" y="4360000"/>
+            <a:ext cx="1600000" cy="300000"/>
+          </a:xfrm>
+          <a:prstGeom prst="rect">
+            <a:avLst/>
+          </a:prstGeom>
+          <a:solidFill>
+            <a:srgbClr val="FAFCFC"/>
+          </a:solidFill>
+          <a:ln w="9525">
+            <a:solidFill>
+              <a:srgbClr val="D9E0E3"/>
+            </a:solidFill>
+            <a:prstDash val="solid"/>
+          </a:ln>
+        </p:spPr>
+      </p:sp>
+      <p:sp>
+        <p:nvSpPr>
+          <p:cNvPr id="45" name="Text"/>
+          <p:cNvSpPr txBox="1"/>
+          <p:nvPr/>
+        </p:nvSpPr>
+        <p:spPr>
+          <a:xfrm>
+            <a:off x="4124672" y="4360000"/>
+            <a:ext cx="1460000" cy="300000"/>
+          </a:xfrm>
+          <a:prstGeom prst="rect">
+            <a:avLst/>
+          </a:prstGeom>
+          <a:noFill/>
+          <a:ln/>
+        </p:spPr>
+        <p:txBody>
+          <a:bodyPr wrap="square" lIns="0" tIns="0" rIns="0" bIns="0" rtlCol="0" anchor="ctr"/>
+          <a:lstStyle/>
+          <a:p>
+            <a:pPr indent="0" marL="0">
+              <a:buNone/>
+            </a:pPr>
+            <a:r>
+              <a:rPr lang="en-US" sz="1000" dirty="0">
+                <a:solidFill>
+                  <a:srgbClr val="16262E"/>
+                </a:solidFill>
+                <a:latin typeface="Calibri" pitchFamily="34" charset="0"/>
+                <a:ea typeface="Calibri" pitchFamily="34" charset="-122"/>
+                <a:cs typeface="Calibri" pitchFamily="34" charset="-120"/>
+              </a:rPr>
+              <a:t/>
+            </a:r>
+            <a:endParaRPr lang="en-US" sz="1000" dirty="0"/>
+          </a:p>
+        </p:txBody>
+      </p:sp>
+      <p:sp>
+        <p:nvSpPr>
+          <p:cNvPr id="46" name="Text"/>
+          <p:cNvSpPr txBox="1"/>
+          <p:nvPr/>
+        </p:nvSpPr>
+        <p:spPr>
+          <a:xfrm>
+            <a:off x="804672" y="4750000"/>
+            <a:ext cx="4903431" cy="700000"/>
+          </a:xfrm>
+          <a:prstGeom prst="rect">
+            <a:avLst/>
+          </a:prstGeom>
+          <a:noFill/>
+          <a:ln/>
+        </p:spPr>
+        <p:txBody>
+          <a:bodyPr wrap="square" lIns="0" tIns="0" rIns="0" bIns="0" rtlCol="0" anchor="t"/>
+          <a:lstStyle/>
+          <a:p>
+            <a:pPr indent="0" marL="0">
+              <a:lnSpc>
+                <a:spcPct val="105000"/>
+              </a:lnSpc>
+              <a:buNone/>
+            </a:pPr>
+            <a:r>
+              <a:rPr lang="en-US" sz="1100" dirty="0">
+                <a:solidFill>
+                  <a:srgbClr val="16262E"/>
+                </a:solidFill>
+                <a:latin typeface="Calibri" pitchFamily="34" charset="0"/>
+                <a:ea typeface="Calibri" pitchFamily="34" charset="-122"/>
+                <a:cs typeface="Calibri" pitchFamily="34" charset="-120"/>
+              </a:rPr>
+              <a:t>La clasificación intervención por intervención es material del instructor y no se proyecta. Lo que entra al cálculo son estos totales y el número de coincidencias.</a:t>
+            </a:r>
+            <a:endParaRPr lang="en-US" sz="1100" dirty="0"/>
+          </a:p>
+        </p:txBody>
+      </p:sp>
+      <p:sp>
+        <p:nvSpPr>
+          <p:cNvPr id="47" name="Shape"/>
+          <p:cNvSpPr/>
+          <p:nvPr/>
+        </p:nvSpPr>
+        <p:spPr>
+          <a:xfrm>
+            <a:off x="6245847" y="2100000"/>
+            <a:ext cx="5378919" cy="3320000"/>
+          </a:xfrm>
+          <a:prstGeom prst="roundRect">
+            <a:avLst>
+              <a:gd name="adj" fmla="val 2933"/>
+            </a:avLst>
+          </a:prstGeom>
+          <a:solidFill>
+            <a:srgbClr val="D7E7E7"/>
+          </a:solidFill>
+          <a:ln w="12700">
+            <a:solidFill>
+              <a:srgbClr val="D7E7E7"/>
+            </a:solidFill>
+            <a:prstDash val="solid"/>
+          </a:ln>
+        </p:spPr>
+      </p:sp>
+      <p:sp>
+        <p:nvSpPr>
+          <p:cNvPr id="48" name="Text"/>
+          <p:cNvSpPr txBox="1"/>
+          <p:nvPr/>
+        </p:nvSpPr>
+        <p:spPr>
+          <a:xfrm>
+            <a:off x="6483591" y="2230000"/>
+            <a:ext cx="4903431" cy="260000"/>
+          </a:xfrm>
+          <a:prstGeom prst="rect">
+            <a:avLst/>
+          </a:prstGeom>
+          <a:noFill/>
+          <a:ln/>
+        </p:spPr>
+        <p:txBody>
+          <a:bodyPr wrap="square" lIns="0" tIns="0" rIns="0" bIns="0" rtlCol="0" anchor="t"/>
+          <a:lstStyle/>
+          <a:p>
+            <a:pPr indent="0" marL="0">
+              <a:buNone/>
+            </a:pPr>
+            <a:r>
+              <a:rPr lang="en-US" sz="1000" b="1" spc="100" kern="0" dirty="0">
+                <a:solidFill>
+                  <a:srgbClr val="2E7D7D"/>
+                </a:solidFill>
+                <a:latin typeface="Arial" pitchFamily="34" charset="0"/>
+                <a:ea typeface="Arial" pitchFamily="34" charset="-122"/>
+                <a:cs typeface="Arial" pitchFamily="34" charset="-120"/>
+              </a:rPr>
+              <a:t>INSUMO 2 · CON QUÉ FRECUENCIA USÓ CADA QUIEN CADA NIVEL</a:t>
+            </a:r>
+            <a:endParaRPr lang="en-US" sz="1000" dirty="0"/>
+          </a:p>
+        </p:txBody>
+      </p:sp>
+      <p:sp>
+        <p:nvSpPr>
+          <p:cNvPr id="49" name="Text"/>
+          <p:cNvSpPr txBox="1"/>
+          <p:nvPr/>
+        </p:nvSpPr>
+        <p:spPr>
+          <a:xfrm>
+            <a:off x="6483591" y="2510000"/>
+            <a:ext cx="4903431" cy="300000"/>
+          </a:xfrm>
+          <a:prstGeom prst="rect">
+            <a:avLst/>
+          </a:prstGeom>
+          <a:noFill/>
+          <a:ln/>
+        </p:spPr>
+        <p:txBody>
+          <a:bodyPr wrap="square" lIns="0" tIns="0" rIns="0" bIns="0" rtlCol="0" anchor="t"/>
+          <a:lstStyle/>
+          <a:p>
+            <a:pPr indent="0" marL="0">
+              <a:buNone/>
+            </a:pPr>
+            <a:r>
+              <a:rPr lang="en-US" sz="1450" b="1" dirty="0">
+                <a:solidFill>
+                  <a:srgbClr val="16262E"/>
+                </a:solidFill>
+                <a:latin typeface="Arial" pitchFamily="34" charset="0"/>
+                <a:ea typeface="Arial" pitchFamily="34" charset="-122"/>
+                <a:cs typeface="Arial" pitchFamily="34" charset="-120"/>
+              </a:rPr>
+              <a:t>El ejemplo del paso 4, fila por fila</a:t>
+            </a:r>
+            <a:endParaRPr lang="en-US" sz="1450" dirty="0"/>
+          </a:p>
+        </p:txBody>
+      </p:sp>
+      <p:sp>
+        <p:nvSpPr>
+          <p:cNvPr id="50" name="Shape"/>
+          <p:cNvSpPr/>
+          <p:nvPr/>
+        </p:nvSpPr>
+        <p:spPr>
+          <a:xfrm>
+            <a:off x="6483591" y="2880000"/>
+            <a:ext cx="800000" cy="280000"/>
+          </a:xfrm>
+          <a:prstGeom prst="rect">
+            <a:avLst/>
+          </a:prstGeom>
+          <a:solidFill>
+            <a:srgbClr val="16262E"/>
+          </a:solidFill>
+          <a:ln w="9525">
+            <a:solidFill>
+              <a:srgbClr val="FFFFFF"/>
+            </a:solidFill>
+            <a:prstDash val="solid"/>
+          </a:ln>
+        </p:spPr>
+      </p:sp>
+      <p:sp>
+        <p:nvSpPr>
+          <p:cNvPr id="51" name="Text"/>
+          <p:cNvSpPr txBox="1"/>
+          <p:nvPr/>
+        </p:nvSpPr>
+        <p:spPr>
+          <a:xfrm>
+            <a:off x="6553591" y="2880000"/>
+            <a:ext cx="660000" cy="280000"/>
+          </a:xfrm>
+          <a:prstGeom prst="rect">
+            <a:avLst/>
+          </a:prstGeom>
+          <a:noFill/>
+          <a:ln/>
+        </p:spPr>
+        <p:txBody>
+          <a:bodyPr wrap="square" lIns="0" tIns="0" rIns="0" bIns="0" rtlCol="0" anchor="ctr"/>
+          <a:lstStyle/>
+          <a:p>
+            <a:pPr indent="0" marL="0">
+              <a:buNone/>
+            </a:pPr>
+            <a:r>
+              <a:rPr lang="en-US" sz="900" b="1" dirty="0">
+                <a:solidFill>
+                  <a:srgbClr val="FFFFFF"/>
+                </a:solidFill>
+                <a:latin typeface="Arial" pitchFamily="34" charset="0"/>
+                <a:ea typeface="Arial" pitchFamily="34" charset="-122"/>
+                <a:cs typeface="Arial" pitchFamily="34" charset="-120"/>
+              </a:rPr>
+              <a:t>Fila</a:t>
+            </a:r>
+            <a:endParaRPr lang="en-US" sz="900" dirty="0"/>
+          </a:p>
+        </p:txBody>
+      </p:sp>
+      <p:sp>
+        <p:nvSpPr>
+          <p:cNvPr id="52" name="Shape"/>
+          <p:cNvSpPr/>
+          <p:nvPr/>
+        </p:nvSpPr>
+        <p:spPr>
+          <a:xfrm>
+            <a:off x="7283591" y="2880000"/>
+            <a:ext cx="1350000" cy="280000"/>
+          </a:xfrm>
+          <a:prstGeom prst="rect">
+            <a:avLst/>
+          </a:prstGeom>
+          <a:solidFill>
+            <a:srgbClr val="16262E"/>
+          </a:solidFill>
+          <a:ln w="9525">
+            <a:solidFill>
+              <a:srgbClr val="FFFFFF"/>
+            </a:solidFill>
+            <a:prstDash val="solid"/>
+          </a:ln>
+        </p:spPr>
+      </p:sp>
+      <p:sp>
+        <p:nvSpPr>
+          <p:cNvPr id="53" name="Text"/>
+          <p:cNvSpPr txBox="1"/>
+          <p:nvPr/>
+        </p:nvSpPr>
+        <p:spPr>
+          <a:xfrm>
+            <a:off x="7353591" y="2880000"/>
+            <a:ext cx="1210000" cy="280000"/>
+          </a:xfrm>
+          <a:prstGeom prst="rect">
+            <a:avLst/>
+          </a:prstGeom>
+          <a:noFill/>
+          <a:ln/>
+        </p:spPr>
+        <p:txBody>
+          <a:bodyPr wrap="square" lIns="0" tIns="0" rIns="0" bIns="0" rtlCol="0" anchor="ctr"/>
+          <a:lstStyle/>
+          <a:p>
+            <a:pPr indent="0" marL="0">
+              <a:buNone/>
+            </a:pPr>
+            <a:r>
+              <a:rPr lang="en-US" sz="900" b="1" dirty="0">
+                <a:solidFill>
+                  <a:srgbClr val="FFFFFF"/>
+                </a:solidFill>
+                <a:latin typeface="Arial" pitchFamily="34" charset="0"/>
+                <a:ea typeface="Arial" pitchFamily="34" charset="-122"/>
+                <a:cs typeface="Arial" pitchFamily="34" charset="-120"/>
+              </a:rPr>
+              <a:t>Su equipo</a:t>
+            </a:r>
+            <a:endParaRPr lang="en-US" sz="900" dirty="0"/>
+          </a:p>
+        </p:txBody>
+      </p:sp>
+      <p:sp>
+        <p:nvSpPr>
+          <p:cNvPr id="54" name="Shape"/>
+          <p:cNvSpPr/>
+          <p:nvPr/>
+        </p:nvSpPr>
+        <p:spPr>
+          <a:xfrm>
+            <a:off x="8633591" y="2880000"/>
+            <a:ext cx="1350000" cy="280000"/>
+          </a:xfrm>
+          <a:prstGeom prst="rect">
+            <a:avLst/>
+          </a:prstGeom>
+          <a:solidFill>
+            <a:srgbClr val="16262E"/>
+          </a:solidFill>
+          <a:ln w="9525">
+            <a:solidFill>
+              <a:srgbClr val="FFFFFF"/>
+            </a:solidFill>
+            <a:prstDash val="solid"/>
+          </a:ln>
+        </p:spPr>
+      </p:sp>
+      <p:sp>
+        <p:nvSpPr>
+          <p:cNvPr id="55" name="Text"/>
+          <p:cNvSpPr txBox="1"/>
+          <p:nvPr/>
+        </p:nvSpPr>
+        <p:spPr>
+          <a:xfrm>
+            <a:off x="8703591" y="2880000"/>
+            <a:ext cx="1210000" cy="280000"/>
+          </a:xfrm>
+          <a:prstGeom prst="rect">
+            <a:avLst/>
+          </a:prstGeom>
+          <a:noFill/>
+          <a:ln/>
+        </p:spPr>
+        <p:txBody>
+          <a:bodyPr wrap="square" lIns="0" tIns="0" rIns="0" bIns="0" rtlCol="0" anchor="ctr"/>
+          <a:lstStyle/>
+          <a:p>
+            <a:pPr indent="0" marL="0">
+              <a:buNone/>
+            </a:pPr>
+            <a:r>
+              <a:rPr lang="en-US" sz="900" b="1" dirty="0">
+                <a:solidFill>
+                  <a:srgbClr val="FFFFFF"/>
+                </a:solidFill>
+                <a:latin typeface="Arial" pitchFamily="34" charset="0"/>
+                <a:ea typeface="Arial" pitchFamily="34" charset="-122"/>
+                <a:cs typeface="Arial" pitchFamily="34" charset="-120"/>
+              </a:rPr>
+              <a:t>Revisor</a:t>
+            </a:r>
+            <a:endParaRPr lang="en-US" sz="900" dirty="0"/>
+          </a:p>
+        </p:txBody>
+      </p:sp>
+      <p:sp>
+        <p:nvSpPr>
+          <p:cNvPr id="56" name="Shape"/>
+          <p:cNvSpPr/>
+          <p:nvPr/>
+        </p:nvSpPr>
+        <p:spPr>
+          <a:xfrm>
+            <a:off x="9983591" y="2880000"/>
+            <a:ext cx="1350000" cy="280000"/>
+          </a:xfrm>
+          <a:prstGeom prst="rect">
+            <a:avLst/>
+          </a:prstGeom>
+          <a:solidFill>
+            <a:srgbClr val="16262E"/>
+          </a:solidFill>
+          <a:ln w="9525">
+            <a:solidFill>
+              <a:srgbClr val="FFFFFF"/>
+            </a:solidFill>
+            <a:prstDash val="solid"/>
+          </a:ln>
+        </p:spPr>
+      </p:sp>
+      <p:sp>
+        <p:nvSpPr>
+          <p:cNvPr id="57" name="Text"/>
+          <p:cNvSpPr txBox="1"/>
+          <p:nvPr/>
+        </p:nvSpPr>
+        <p:spPr>
+          <a:xfrm>
+            <a:off x="10053591" y="2880000"/>
+            <a:ext cx="1210000" cy="280000"/>
+          </a:xfrm>
+          <a:prstGeom prst="rect">
+            <a:avLst/>
+          </a:prstGeom>
+          <a:noFill/>
+          <a:ln/>
+        </p:spPr>
+        <p:txBody>
+          <a:bodyPr wrap="square" lIns="0" tIns="0" rIns="0" bIns="0" rtlCol="0" anchor="ctr"/>
+          <a:lstStyle/>
+          <a:p>
+            <a:pPr indent="0" marL="0">
+              <a:buNone/>
+            </a:pPr>
+            <a:r>
+              <a:rPr lang="en-US" sz="900" b="1" dirty="0">
+                <a:solidFill>
+                  <a:srgbClr val="FFFFFF"/>
+                </a:solidFill>
+                <a:latin typeface="Arial" pitchFamily="34" charset="0"/>
+                <a:ea typeface="Arial" pitchFamily="34" charset="-122"/>
+                <a:cs typeface="Arial" pitchFamily="34" charset="-120"/>
+              </a:rPr>
+              <a:t>¿Coincide?</a:t>
+            </a:r>
+            <a:endParaRPr lang="en-US" sz="900" dirty="0"/>
+          </a:p>
+        </p:txBody>
+      </p:sp>
+      <p:sp>
+        <p:nvSpPr>
+          <p:cNvPr id="58" name="Shape"/>
+          <p:cNvSpPr/>
+          <p:nvPr/>
+        </p:nvSpPr>
+        <p:spPr>
+          <a:xfrm>
+            <a:off x="6483591" y="3160000"/>
+            <a:ext cx="800000" cy="280000"/>
+          </a:xfrm>
+          <a:prstGeom prst="rect">
+            <a:avLst/>
+          </a:prstGeom>
+          <a:solidFill>
+            <a:srgbClr val="FAFCFC"/>
+          </a:solidFill>
+          <a:ln w="9525">
+            <a:solidFill>
+              <a:srgbClr val="D9E0E3"/>
+            </a:solidFill>
+            <a:prstDash val="solid"/>
+          </a:ln>
+        </p:spPr>
+      </p:sp>
+      <p:sp>
+        <p:nvSpPr>
+          <p:cNvPr id="59" name="Text"/>
+          <p:cNvSpPr txBox="1"/>
+          <p:nvPr/>
+        </p:nvSpPr>
+        <p:spPr>
+          <a:xfrm>
+            <a:off x="6553591" y="3160000"/>
+            <a:ext cx="660000" cy="280000"/>
+          </a:xfrm>
+          <a:prstGeom prst="rect">
+            <a:avLst/>
+          </a:prstGeom>
+          <a:noFill/>
+          <a:ln/>
+        </p:spPr>
+        <p:txBody>
+          <a:bodyPr wrap="square" lIns="0" tIns="0" rIns="0" bIns="0" rtlCol="0" anchor="ctr"/>
+          <a:lstStyle/>
+          <a:p>
+            <a:pPr indent="0" marL="0">
+              <a:buNone/>
+            </a:pPr>
+            <a:r>
+              <a:rPr lang="en-US" sz="1000" b="1" dirty="0">
+                <a:solidFill>
+                  <a:srgbClr val="16262E"/>
+                </a:solidFill>
+                <a:latin typeface="Arial" pitchFamily="34" charset="0"/>
+                <a:ea typeface="Arial" pitchFamily="34" charset="-122"/>
+                <a:cs typeface="Arial" pitchFamily="34" charset="-120"/>
+              </a:rPr>
+              <a:t>1</a:t>
+            </a:r>
+            <a:endParaRPr lang="en-US" sz="1000" dirty="0"/>
+          </a:p>
+        </p:txBody>
+      </p:sp>
+      <p:sp>
+        <p:nvSpPr>
+          <p:cNvPr id="60" name="Shape"/>
+          <p:cNvSpPr/>
+          <p:nvPr/>
+        </p:nvSpPr>
+        <p:spPr>
+          <a:xfrm>
+            <a:off x="7283591" y="3160000"/>
+            <a:ext cx="1350000" cy="280000"/>
+          </a:xfrm>
+          <a:prstGeom prst="rect">
+            <a:avLst/>
+          </a:prstGeom>
+          <a:solidFill>
+            <a:srgbClr val="FAFCFC"/>
+          </a:solidFill>
+          <a:ln w="9525">
+            <a:solidFill>
+              <a:srgbClr val="D9E0E3"/>
+            </a:solidFill>
+            <a:prstDash val="solid"/>
+          </a:ln>
+        </p:spPr>
+      </p:sp>
+      <p:sp>
+        <p:nvSpPr>
+          <p:cNvPr id="61" name="Text"/>
+          <p:cNvSpPr txBox="1"/>
+          <p:nvPr/>
+        </p:nvSpPr>
+        <p:spPr>
+          <a:xfrm>
+            <a:off x="7353591" y="3160000"/>
+            <a:ext cx="1210000" cy="280000"/>
+          </a:xfrm>
+          <a:prstGeom prst="rect">
+            <a:avLst/>
+          </a:prstGeom>
+          <a:noFill/>
+          <a:ln/>
+        </p:spPr>
+        <p:txBody>
+          <a:bodyPr wrap="square" lIns="0" tIns="0" rIns="0" bIns="0" rtlCol="0" anchor="ctr"/>
+          <a:lstStyle/>
+          <a:p>
+            <a:pPr indent="0" marL="0">
+              <a:buNone/>
+            </a:pPr>
+            <a:r>
+              <a:rPr lang="en-US" sz="1000" dirty="0">
+                <a:solidFill>
+                  <a:srgbClr val="16262E"/>
+                </a:solidFill>
+                <a:latin typeface="Calibri" pitchFamily="34" charset="0"/>
+                <a:ea typeface="Calibri" pitchFamily="34" charset="-122"/>
+                <a:cs typeface="Calibri" pitchFamily="34" charset="-120"/>
+              </a:rPr>
+              <a:t>Alta</a:t>
+            </a:r>
+            <a:endParaRPr lang="en-US" sz="1000" dirty="0"/>
+          </a:p>
+        </p:txBody>
+      </p:sp>
+      <p:sp>
+        <p:nvSpPr>
+          <p:cNvPr id="62" name="Shape"/>
+          <p:cNvSpPr/>
+          <p:nvPr/>
+        </p:nvSpPr>
+        <p:spPr>
+          <a:xfrm>
+            <a:off x="8633591" y="3160000"/>
+            <a:ext cx="1350000" cy="280000"/>
+          </a:xfrm>
+          <a:prstGeom prst="rect">
+            <a:avLst/>
+          </a:prstGeom>
+          <a:solidFill>
+            <a:srgbClr val="FAFCFC"/>
+          </a:solidFill>
+          <a:ln w="9525">
+            <a:solidFill>
+              <a:srgbClr val="D9E0E3"/>
+            </a:solidFill>
+            <a:prstDash val="solid"/>
+          </a:ln>
+        </p:spPr>
+      </p:sp>
+      <p:sp>
+        <p:nvSpPr>
+          <p:cNvPr id="63" name="Text"/>
+          <p:cNvSpPr txBox="1"/>
+          <p:nvPr/>
+        </p:nvSpPr>
+        <p:spPr>
+          <a:xfrm>
+            <a:off x="8703591" y="3160000"/>
+            <a:ext cx="1210000" cy="280000"/>
+          </a:xfrm>
+          <a:prstGeom prst="rect">
+            <a:avLst/>
+          </a:prstGeom>
+          <a:noFill/>
+          <a:ln/>
+        </p:spPr>
+        <p:txBody>
+          <a:bodyPr wrap="square" lIns="0" tIns="0" rIns="0" bIns="0" rtlCol="0" anchor="ctr"/>
+          <a:lstStyle/>
+          <a:p>
+            <a:pPr indent="0" marL="0">
+              <a:buNone/>
+            </a:pPr>
+            <a:r>
+              <a:rPr lang="en-US" sz="1000" dirty="0">
+                <a:solidFill>
+                  <a:srgbClr val="16262E"/>
+                </a:solidFill>
+                <a:latin typeface="Calibri" pitchFamily="34" charset="0"/>
+                <a:ea typeface="Calibri" pitchFamily="34" charset="-122"/>
+                <a:cs typeface="Calibri" pitchFamily="34" charset="-120"/>
+              </a:rPr>
+              <a:t>Alta</a:t>
+            </a:r>
+            <a:endParaRPr lang="en-US" sz="1000" dirty="0"/>
+          </a:p>
+        </p:txBody>
+      </p:sp>
+      <p:sp>
+        <p:nvSpPr>
+          <p:cNvPr id="64" name="Shape"/>
+          <p:cNvSpPr/>
+          <p:nvPr/>
+        </p:nvSpPr>
+        <p:spPr>
+          <a:xfrm>
+            <a:off x="9983591" y="3160000"/>
+            <a:ext cx="1350000" cy="280000"/>
+          </a:xfrm>
+          <a:prstGeom prst="rect">
+            <a:avLst/>
+          </a:prstGeom>
+          <a:solidFill>
+            <a:srgbClr val="FAFCFC"/>
+          </a:solidFill>
+          <a:ln w="9525">
+            <a:solidFill>
+              <a:srgbClr val="D9E0E3"/>
+            </a:solidFill>
+            <a:prstDash val="solid"/>
+          </a:ln>
+        </p:spPr>
+      </p:sp>
+      <p:sp>
+        <p:nvSpPr>
+          <p:cNvPr id="65" name="Text"/>
+          <p:cNvSpPr txBox="1"/>
+          <p:nvPr/>
+        </p:nvSpPr>
+        <p:spPr>
+          <a:xfrm>
+            <a:off x="10053591" y="3160000"/>
+            <a:ext cx="1210000" cy="280000"/>
+          </a:xfrm>
+          <a:prstGeom prst="rect">
+            <a:avLst/>
+          </a:prstGeom>
+          <a:noFill/>
+          <a:ln/>
+        </p:spPr>
+        <p:txBody>
+          <a:bodyPr wrap="square" lIns="0" tIns="0" rIns="0" bIns="0" rtlCol="0" anchor="ctr"/>
+          <a:lstStyle/>
+          <a:p>
+            <a:pPr indent="0" marL="0">
+              <a:buNone/>
+            </a:pPr>
+            <a:r>
+              <a:rPr lang="en-US" sz="1000" b="1" dirty="0">
+                <a:solidFill>
+                  <a:srgbClr val="2E7D7D"/>
+                </a:solidFill>
+                <a:latin typeface="Arial" pitchFamily="34" charset="0"/>
+                <a:ea typeface="Arial" pitchFamily="34" charset="-122"/>
+                <a:cs typeface="Arial" pitchFamily="34" charset="-120"/>
+              </a:rPr>
+              <a:t>sí</a:t>
+            </a:r>
+            <a:endParaRPr lang="en-US" sz="1000" dirty="0"/>
+          </a:p>
+        </p:txBody>
+      </p:sp>
+      <p:sp>
+        <p:nvSpPr>
+          <p:cNvPr id="66" name="Shape"/>
+          <p:cNvSpPr/>
+          <p:nvPr/>
+        </p:nvSpPr>
+        <p:spPr>
+          <a:xfrm>
+            <a:off x="6483591" y="3440000"/>
+            <a:ext cx="800000" cy="280000"/>
+          </a:xfrm>
+          <a:prstGeom prst="rect">
+            <a:avLst/>
+          </a:prstGeom>
+          <a:solidFill>
+            <a:srgbClr val="FFFFFF"/>
+          </a:solidFill>
+          <a:ln w="9525">
+            <a:solidFill>
+              <a:srgbClr val="D9E0E3"/>
+            </a:solidFill>
+            <a:prstDash val="solid"/>
+          </a:ln>
+        </p:spPr>
+      </p:sp>
+      <p:sp>
+        <p:nvSpPr>
+          <p:cNvPr id="67" name="Text"/>
+          <p:cNvSpPr txBox="1"/>
+          <p:nvPr/>
+        </p:nvSpPr>
+        <p:spPr>
+          <a:xfrm>
+            <a:off x="6553591" y="3440000"/>
+            <a:ext cx="660000" cy="280000"/>
+          </a:xfrm>
+          <a:prstGeom prst="rect">
+            <a:avLst/>
+          </a:prstGeom>
+          <a:noFill/>
+          <a:ln/>
+        </p:spPr>
+        <p:txBody>
+          <a:bodyPr wrap="square" lIns="0" tIns="0" rIns="0" bIns="0" rtlCol="0" anchor="ctr"/>
+          <a:lstStyle/>
+          <a:p>
+            <a:pPr indent="0" marL="0">
+              <a:buNone/>
+            </a:pPr>
+            <a:r>
+              <a:rPr lang="en-US" sz="1000" b="1" dirty="0">
+                <a:solidFill>
+                  <a:srgbClr val="16262E"/>
+                </a:solidFill>
+                <a:latin typeface="Arial" pitchFamily="34" charset="0"/>
+                <a:ea typeface="Arial" pitchFamily="34" charset="-122"/>
+                <a:cs typeface="Arial" pitchFamily="34" charset="-120"/>
+              </a:rPr>
+              <a:t>2</a:t>
+            </a:r>
+            <a:endParaRPr lang="en-US" sz="1000" dirty="0"/>
+          </a:p>
+        </p:txBody>
+      </p:sp>
+      <p:sp>
+        <p:nvSpPr>
+          <p:cNvPr id="68" name="Shape"/>
+          <p:cNvSpPr/>
+          <p:nvPr/>
+        </p:nvSpPr>
+        <p:spPr>
+          <a:xfrm>
+            <a:off x="7283591" y="3440000"/>
+            <a:ext cx="1350000" cy="280000"/>
+          </a:xfrm>
+          <a:prstGeom prst="rect">
+            <a:avLst/>
+          </a:prstGeom>
+          <a:solidFill>
+            <a:srgbClr val="FFFFFF"/>
+          </a:solidFill>
+          <a:ln w="9525">
+            <a:solidFill>
+              <a:srgbClr val="D9E0E3"/>
+            </a:solidFill>
+            <a:prstDash val="solid"/>
+          </a:ln>
+        </p:spPr>
+      </p:sp>
+      <p:sp>
+        <p:nvSpPr>
+          <p:cNvPr id="69" name="Text"/>
+          <p:cNvSpPr txBox="1"/>
+          <p:nvPr/>
+        </p:nvSpPr>
+        <p:spPr>
+          <a:xfrm>
+            <a:off x="7353591" y="3440000"/>
+            <a:ext cx="1210000" cy="280000"/>
+          </a:xfrm>
+          <a:prstGeom prst="rect">
+            <a:avLst/>
+          </a:prstGeom>
+          <a:noFill/>
+          <a:ln/>
+        </p:spPr>
+        <p:txBody>
+          <a:bodyPr wrap="square" lIns="0" tIns="0" rIns="0" bIns="0" rtlCol="0" anchor="ctr"/>
+          <a:lstStyle/>
+          <a:p>
+            <a:pPr indent="0" marL="0">
+              <a:buNone/>
+            </a:pPr>
+            <a:r>
+              <a:rPr lang="en-US" sz="1000" dirty="0">
+                <a:solidFill>
+                  <a:srgbClr val="16262E"/>
+                </a:solidFill>
+                <a:latin typeface="Calibri" pitchFamily="34" charset="0"/>
+                <a:ea typeface="Calibri" pitchFamily="34" charset="-122"/>
+                <a:cs typeface="Calibri" pitchFamily="34" charset="-120"/>
+              </a:rPr>
+              <a:t>Alta</a:t>
+            </a:r>
+            <a:endParaRPr lang="en-US" sz="1000" dirty="0"/>
+          </a:p>
+        </p:txBody>
+      </p:sp>
+      <p:sp>
+        <p:nvSpPr>
+          <p:cNvPr id="70" name="Shape"/>
+          <p:cNvSpPr/>
+          <p:nvPr/>
+        </p:nvSpPr>
+        <p:spPr>
+          <a:xfrm>
+            <a:off x="8633591" y="3440000"/>
+            <a:ext cx="1350000" cy="280000"/>
+          </a:xfrm>
+          <a:prstGeom prst="rect">
+            <a:avLst/>
+          </a:prstGeom>
+          <a:solidFill>
+            <a:srgbClr val="FFFFFF"/>
+          </a:solidFill>
+          <a:ln w="9525">
+            <a:solidFill>
+              <a:srgbClr val="D9E0E3"/>
+            </a:solidFill>
+            <a:prstDash val="solid"/>
+          </a:ln>
+        </p:spPr>
+      </p:sp>
+      <p:sp>
+        <p:nvSpPr>
+          <p:cNvPr id="71" name="Text"/>
+          <p:cNvSpPr txBox="1"/>
+          <p:nvPr/>
+        </p:nvSpPr>
+        <p:spPr>
+          <a:xfrm>
+            <a:off x="8703591" y="3440000"/>
+            <a:ext cx="1210000" cy="280000"/>
+          </a:xfrm>
+          <a:prstGeom prst="rect">
+            <a:avLst/>
+          </a:prstGeom>
+          <a:noFill/>
+          <a:ln/>
+        </p:spPr>
+        <p:txBody>
+          <a:bodyPr wrap="square" lIns="0" tIns="0" rIns="0" bIns="0" rtlCol="0" anchor="ctr"/>
+          <a:lstStyle/>
+          <a:p>
+            <a:pPr indent="0" marL="0">
+              <a:buNone/>
+            </a:pPr>
+            <a:r>
+              <a:rPr lang="en-US" sz="1000" dirty="0">
+                <a:solidFill>
+                  <a:srgbClr val="16262E"/>
+                </a:solidFill>
+                <a:latin typeface="Calibri" pitchFamily="34" charset="0"/>
+                <a:ea typeface="Calibri" pitchFamily="34" charset="-122"/>
+                <a:cs typeface="Calibri" pitchFamily="34" charset="-120"/>
+              </a:rPr>
+              <a:t>Alta</a:t>
+            </a:r>
+            <a:endParaRPr lang="en-US" sz="1000" dirty="0"/>
+          </a:p>
+        </p:txBody>
+      </p:sp>
+      <p:sp>
+        <p:nvSpPr>
+          <p:cNvPr id="72" name="Shape"/>
+          <p:cNvSpPr/>
+          <p:nvPr/>
+        </p:nvSpPr>
+        <p:spPr>
+          <a:xfrm>
+            <a:off x="9983591" y="3440000"/>
+            <a:ext cx="1350000" cy="280000"/>
+          </a:xfrm>
+          <a:prstGeom prst="rect">
+            <a:avLst/>
+          </a:prstGeom>
+          <a:solidFill>
+            <a:srgbClr val="FFFFFF"/>
+          </a:solidFill>
+          <a:ln w="9525">
+            <a:solidFill>
+              <a:srgbClr val="D9E0E3"/>
+            </a:solidFill>
+            <a:prstDash val="solid"/>
+          </a:ln>
+        </p:spPr>
+      </p:sp>
+      <p:sp>
+        <p:nvSpPr>
+          <p:cNvPr id="73" name="Text"/>
+          <p:cNvSpPr txBox="1"/>
+          <p:nvPr/>
+        </p:nvSpPr>
+        <p:spPr>
+          <a:xfrm>
+            <a:off x="10053591" y="3440000"/>
+            <a:ext cx="1210000" cy="280000"/>
+          </a:xfrm>
+          <a:prstGeom prst="rect">
+            <a:avLst/>
+          </a:prstGeom>
+          <a:noFill/>
+          <a:ln/>
+        </p:spPr>
+        <p:txBody>
+          <a:bodyPr wrap="square" lIns="0" tIns="0" rIns="0" bIns="0" rtlCol="0" anchor="ctr"/>
+          <a:lstStyle/>
+          <a:p>
+            <a:pPr indent="0" marL="0">
+              <a:buNone/>
+            </a:pPr>
+            <a:r>
+              <a:rPr lang="en-US" sz="1000" b="1" dirty="0">
+                <a:solidFill>
+                  <a:srgbClr val="2E7D7D"/>
+                </a:solidFill>
+                <a:latin typeface="Arial" pitchFamily="34" charset="0"/>
+                <a:ea typeface="Arial" pitchFamily="34" charset="-122"/>
+                <a:cs typeface="Arial" pitchFamily="34" charset="-120"/>
+              </a:rPr>
+              <a:t>sí</a:t>
+            </a:r>
+            <a:endParaRPr lang="en-US" sz="1000" dirty="0"/>
+          </a:p>
+        </p:txBody>
+      </p:sp>
+      <p:sp>
+        <p:nvSpPr>
+          <p:cNvPr id="74" name="Shape"/>
+          <p:cNvSpPr/>
+          <p:nvPr/>
+        </p:nvSpPr>
+        <p:spPr>
+          <a:xfrm>
+            <a:off x="6483591" y="3720000"/>
+            <a:ext cx="800000" cy="280000"/>
+          </a:xfrm>
+          <a:prstGeom prst="rect">
+            <a:avLst/>
+          </a:prstGeom>
+          <a:solidFill>
+            <a:srgbClr val="FAFCFC"/>
+          </a:solidFill>
+          <a:ln w="9525">
+            <a:solidFill>
+              <a:srgbClr val="D9E0E3"/>
+            </a:solidFill>
+            <a:prstDash val="solid"/>
+          </a:ln>
+        </p:spPr>
+      </p:sp>
+      <p:sp>
+        <p:nvSpPr>
+          <p:cNvPr id="75" name="Text"/>
+          <p:cNvSpPr txBox="1"/>
+          <p:nvPr/>
+        </p:nvSpPr>
+        <p:spPr>
+          <a:xfrm>
+            <a:off x="6553591" y="3720000"/>
+            <a:ext cx="660000" cy="280000"/>
+          </a:xfrm>
+          <a:prstGeom prst="rect">
+            <a:avLst/>
+          </a:prstGeom>
+          <a:noFill/>
+          <a:ln/>
+        </p:spPr>
+        <p:txBody>
+          <a:bodyPr wrap="square" lIns="0" tIns="0" rIns="0" bIns="0" rtlCol="0" anchor="ctr"/>
+          <a:lstStyle/>
+          <a:p>
+            <a:pPr indent="0" marL="0">
+              <a:buNone/>
+            </a:pPr>
+            <a:r>
+              <a:rPr lang="en-US" sz="1000" b="1" dirty="0">
+                <a:solidFill>
+                  <a:srgbClr val="16262E"/>
+                </a:solidFill>
+                <a:latin typeface="Arial" pitchFamily="34" charset="0"/>
+                <a:ea typeface="Arial" pitchFamily="34" charset="-122"/>
+                <a:cs typeface="Arial" pitchFamily="34" charset="-120"/>
+              </a:rPr>
+              <a:t>3</a:t>
+            </a:r>
+            <a:endParaRPr lang="en-US" sz="1000" dirty="0"/>
+          </a:p>
+        </p:txBody>
+      </p:sp>
+      <p:sp>
+        <p:nvSpPr>
+          <p:cNvPr id="76" name="Shape"/>
+          <p:cNvSpPr/>
+          <p:nvPr/>
+        </p:nvSpPr>
+        <p:spPr>
+          <a:xfrm>
+            <a:off x="7283591" y="3720000"/>
+            <a:ext cx="1350000" cy="280000"/>
+          </a:xfrm>
+          <a:prstGeom prst="rect">
+            <a:avLst/>
+          </a:prstGeom>
+          <a:solidFill>
+            <a:srgbClr val="FAFCFC"/>
+          </a:solidFill>
+          <a:ln w="9525">
+            <a:solidFill>
+              <a:srgbClr val="D9E0E3"/>
+            </a:solidFill>
+            <a:prstDash val="solid"/>
+          </a:ln>
+        </p:spPr>
+      </p:sp>
+      <p:sp>
+        <p:nvSpPr>
+          <p:cNvPr id="77" name="Text"/>
+          <p:cNvSpPr txBox="1"/>
+          <p:nvPr/>
+        </p:nvSpPr>
+        <p:spPr>
+          <a:xfrm>
+            <a:off x="7353591" y="3720000"/>
+            <a:ext cx="1210000" cy="280000"/>
+          </a:xfrm>
+          <a:prstGeom prst="rect">
+            <a:avLst/>
+          </a:prstGeom>
+          <a:noFill/>
+          <a:ln/>
+        </p:spPr>
+        <p:txBody>
+          <a:bodyPr wrap="square" lIns="0" tIns="0" rIns="0" bIns="0" rtlCol="0" anchor="ctr"/>
+          <a:lstStyle/>
+          <a:p>
+            <a:pPr indent="0" marL="0">
+              <a:buNone/>
+            </a:pPr>
+            <a:r>
+              <a:rPr lang="en-US" sz="1000" dirty="0">
+                <a:solidFill>
+                  <a:srgbClr val="16262E"/>
+                </a:solidFill>
+                <a:latin typeface="Calibri" pitchFamily="34" charset="0"/>
+                <a:ea typeface="Calibri" pitchFamily="34" charset="-122"/>
+                <a:cs typeface="Calibri" pitchFamily="34" charset="-120"/>
+              </a:rPr>
+              <a:t>Media</a:t>
+            </a:r>
+            <a:endParaRPr lang="en-US" sz="1000" dirty="0"/>
+          </a:p>
+        </p:txBody>
+      </p:sp>
+      <p:sp>
+        <p:nvSpPr>
+          <p:cNvPr id="78" name="Shape"/>
+          <p:cNvSpPr/>
+          <p:nvPr/>
+        </p:nvSpPr>
+        <p:spPr>
+          <a:xfrm>
+            <a:off x="8633591" y="3720000"/>
+            <a:ext cx="1350000" cy="280000"/>
+          </a:xfrm>
+          <a:prstGeom prst="rect">
+            <a:avLst/>
+          </a:prstGeom>
+          <a:solidFill>
+            <a:srgbClr val="FAFCFC"/>
+          </a:solidFill>
+          <a:ln w="9525">
+            <a:solidFill>
+              <a:srgbClr val="D9E0E3"/>
+            </a:solidFill>
+            <a:prstDash val="solid"/>
+          </a:ln>
+        </p:spPr>
+      </p:sp>
+      <p:sp>
+        <p:nvSpPr>
+          <p:cNvPr id="79" name="Text"/>
+          <p:cNvSpPr txBox="1"/>
+          <p:nvPr/>
+        </p:nvSpPr>
+        <p:spPr>
+          <a:xfrm>
+            <a:off x="8703591" y="3720000"/>
+            <a:ext cx="1210000" cy="280000"/>
+          </a:xfrm>
+          <a:prstGeom prst="rect">
+            <a:avLst/>
+          </a:prstGeom>
+          <a:noFill/>
+          <a:ln/>
+        </p:spPr>
+        <p:txBody>
+          <a:bodyPr wrap="square" lIns="0" tIns="0" rIns="0" bIns="0" rtlCol="0" anchor="ctr"/>
+          <a:lstStyle/>
+          <a:p>
+            <a:pPr indent="0" marL="0">
+              <a:buNone/>
+            </a:pPr>
+            <a:r>
+              <a:rPr lang="en-US" sz="1000" dirty="0">
+                <a:solidFill>
+                  <a:srgbClr val="16262E"/>
+                </a:solidFill>
+                <a:latin typeface="Calibri" pitchFamily="34" charset="0"/>
+                <a:ea typeface="Calibri" pitchFamily="34" charset="-122"/>
+                <a:cs typeface="Calibri" pitchFamily="34" charset="-120"/>
+              </a:rPr>
+              <a:t>Media</a:t>
+            </a:r>
+            <a:endParaRPr lang="en-US" sz="1000" dirty="0"/>
+          </a:p>
+        </p:txBody>
+      </p:sp>
+      <p:sp>
+        <p:nvSpPr>
+          <p:cNvPr id="80" name="Shape"/>
+          <p:cNvSpPr/>
+          <p:nvPr/>
+        </p:nvSpPr>
+        <p:spPr>
+          <a:xfrm>
+            <a:off x="9983591" y="3720000"/>
+            <a:ext cx="1350000" cy="280000"/>
+          </a:xfrm>
+          <a:prstGeom prst="rect">
+            <a:avLst/>
+          </a:prstGeom>
+          <a:solidFill>
+            <a:srgbClr val="FAFCFC"/>
+          </a:solidFill>
+          <a:ln w="9525">
+            <a:solidFill>
+              <a:srgbClr val="D9E0E3"/>
+            </a:solidFill>
+            <a:prstDash val="solid"/>
+          </a:ln>
+        </p:spPr>
+      </p:sp>
+      <p:sp>
+        <p:nvSpPr>
+          <p:cNvPr id="81" name="Text"/>
+          <p:cNvSpPr txBox="1"/>
+          <p:nvPr/>
+        </p:nvSpPr>
+        <p:spPr>
+          <a:xfrm>
+            <a:off x="10053591" y="3720000"/>
+            <a:ext cx="1210000" cy="280000"/>
+          </a:xfrm>
+          <a:prstGeom prst="rect">
+            <a:avLst/>
+          </a:prstGeom>
+          <a:noFill/>
+          <a:ln/>
+        </p:spPr>
+        <p:txBody>
+          <a:bodyPr wrap="square" lIns="0" tIns="0" rIns="0" bIns="0" rtlCol="0" anchor="ctr"/>
+          <a:lstStyle/>
+          <a:p>
+            <a:pPr indent="0" marL="0">
+              <a:buNone/>
+            </a:pPr>
+            <a:r>
+              <a:rPr lang="en-US" sz="1000" b="1" dirty="0">
+                <a:solidFill>
+                  <a:srgbClr val="2E7D7D"/>
+                </a:solidFill>
+                <a:latin typeface="Arial" pitchFamily="34" charset="0"/>
+                <a:ea typeface="Arial" pitchFamily="34" charset="-122"/>
+                <a:cs typeface="Arial" pitchFamily="34" charset="-120"/>
+              </a:rPr>
+              <a:t>sí</a:t>
+            </a:r>
+            <a:endParaRPr lang="en-US" sz="1000" dirty="0"/>
+          </a:p>
+        </p:txBody>
+      </p:sp>
+      <p:sp>
+        <p:nvSpPr>
+          <p:cNvPr id="82" name="Shape"/>
+          <p:cNvSpPr/>
+          <p:nvPr/>
+        </p:nvSpPr>
+        <p:spPr>
+          <a:xfrm>
+            <a:off x="6483591" y="4000000"/>
+            <a:ext cx="800000" cy="280000"/>
+          </a:xfrm>
+          <a:prstGeom prst="rect">
+            <a:avLst/>
+          </a:prstGeom>
+          <a:solidFill>
+            <a:srgbClr val="FFFFFF"/>
+          </a:solidFill>
+          <a:ln w="9525">
+            <a:solidFill>
+              <a:srgbClr val="D9E0E3"/>
+            </a:solidFill>
+            <a:prstDash val="solid"/>
+          </a:ln>
+        </p:spPr>
+      </p:sp>
+      <p:sp>
+        <p:nvSpPr>
+          <p:cNvPr id="83" name="Text"/>
+          <p:cNvSpPr txBox="1"/>
+          <p:nvPr/>
+        </p:nvSpPr>
+        <p:spPr>
+          <a:xfrm>
+            <a:off x="6553591" y="4000000"/>
+            <a:ext cx="660000" cy="280000"/>
+          </a:xfrm>
+          <a:prstGeom prst="rect">
+            <a:avLst/>
+          </a:prstGeom>
+          <a:noFill/>
+          <a:ln/>
+        </p:spPr>
+        <p:txBody>
+          <a:bodyPr wrap="square" lIns="0" tIns="0" rIns="0" bIns="0" rtlCol="0" anchor="ctr"/>
+          <a:lstStyle/>
+          <a:p>
+            <a:pPr indent="0" marL="0">
+              <a:buNone/>
+            </a:pPr>
+            <a:r>
+              <a:rPr lang="en-US" sz="1000" b="1" dirty="0">
+                <a:solidFill>
+                  <a:srgbClr val="16262E"/>
+                </a:solidFill>
+                <a:latin typeface="Arial" pitchFamily="34" charset="0"/>
+                <a:ea typeface="Arial" pitchFamily="34" charset="-122"/>
+                <a:cs typeface="Arial" pitchFamily="34" charset="-120"/>
+              </a:rPr>
+              <a:t>4</a:t>
+            </a:r>
+            <a:endParaRPr lang="en-US" sz="1000" dirty="0"/>
+          </a:p>
+        </p:txBody>
+      </p:sp>
+      <p:sp>
+        <p:nvSpPr>
+          <p:cNvPr id="84" name="Shape"/>
+          <p:cNvSpPr/>
+          <p:nvPr/>
+        </p:nvSpPr>
+        <p:spPr>
+          <a:xfrm>
+            <a:off x="7283591" y="4000000"/>
+            <a:ext cx="1350000" cy="280000"/>
+          </a:xfrm>
+          <a:prstGeom prst="rect">
+            <a:avLst/>
+          </a:prstGeom>
+          <a:solidFill>
+            <a:srgbClr val="FFFFFF"/>
+          </a:solidFill>
+          <a:ln w="9525">
+            <a:solidFill>
+              <a:srgbClr val="D9E0E3"/>
+            </a:solidFill>
+            <a:prstDash val="solid"/>
+          </a:ln>
+        </p:spPr>
+      </p:sp>
+      <p:sp>
+        <p:nvSpPr>
+          <p:cNvPr id="85" name="Text"/>
+          <p:cNvSpPr txBox="1"/>
+          <p:nvPr/>
+        </p:nvSpPr>
+        <p:spPr>
+          <a:xfrm>
+            <a:off x="7353591" y="4000000"/>
+            <a:ext cx="1210000" cy="280000"/>
+          </a:xfrm>
+          <a:prstGeom prst="rect">
+            <a:avLst/>
+          </a:prstGeom>
+          <a:noFill/>
+          <a:ln/>
+        </p:spPr>
+        <p:txBody>
+          <a:bodyPr wrap="square" lIns="0" tIns="0" rIns="0" bIns="0" rtlCol="0" anchor="ctr"/>
+          <a:lstStyle/>
+          <a:p>
+            <a:pPr indent="0" marL="0">
+              <a:buNone/>
+            </a:pPr>
+            <a:r>
+              <a:rPr lang="en-US" sz="1000" dirty="0">
+                <a:solidFill>
+                  <a:srgbClr val="16262E"/>
+                </a:solidFill>
+                <a:latin typeface="Calibri" pitchFamily="34" charset="0"/>
+                <a:ea typeface="Calibri" pitchFamily="34" charset="-122"/>
+                <a:cs typeface="Calibri" pitchFamily="34" charset="-120"/>
+              </a:rPr>
+              <a:t>Media</a:t>
+            </a:r>
+            <a:endParaRPr lang="en-US" sz="1000" dirty="0"/>
+          </a:p>
+        </p:txBody>
+      </p:sp>
+      <p:sp>
+        <p:nvSpPr>
+          <p:cNvPr id="86" name="Shape"/>
+          <p:cNvSpPr/>
+          <p:nvPr/>
+        </p:nvSpPr>
+        <p:spPr>
+          <a:xfrm>
+            <a:off x="8633591" y="4000000"/>
+            <a:ext cx="1350000" cy="280000"/>
+          </a:xfrm>
+          <a:prstGeom prst="rect">
+            <a:avLst/>
+          </a:prstGeom>
+          <a:solidFill>
+            <a:srgbClr val="FFFFFF"/>
+          </a:solidFill>
+          <a:ln w="9525">
+            <a:solidFill>
+              <a:srgbClr val="D9E0E3"/>
+            </a:solidFill>
+            <a:prstDash val="solid"/>
+          </a:ln>
+        </p:spPr>
+      </p:sp>
+      <p:sp>
+        <p:nvSpPr>
+          <p:cNvPr id="87" name="Text"/>
+          <p:cNvSpPr txBox="1"/>
+          <p:nvPr/>
+        </p:nvSpPr>
+        <p:spPr>
+          <a:xfrm>
+            <a:off x="8703591" y="4000000"/>
+            <a:ext cx="1210000" cy="280000"/>
+          </a:xfrm>
+          <a:prstGeom prst="rect">
+            <a:avLst/>
+          </a:prstGeom>
+          <a:noFill/>
+          <a:ln/>
+        </p:spPr>
+        <p:txBody>
+          <a:bodyPr wrap="square" lIns="0" tIns="0" rIns="0" bIns="0" rtlCol="0" anchor="ctr"/>
+          <a:lstStyle/>
+          <a:p>
+            <a:pPr indent="0" marL="0">
+              <a:buNone/>
+            </a:pPr>
+            <a:r>
+              <a:rPr lang="en-US" sz="1000" dirty="0">
+                <a:solidFill>
+                  <a:srgbClr val="16262E"/>
+                </a:solidFill>
+                <a:latin typeface="Calibri" pitchFamily="34" charset="0"/>
+                <a:ea typeface="Calibri" pitchFamily="34" charset="-122"/>
+                <a:cs typeface="Calibri" pitchFamily="34" charset="-120"/>
+              </a:rPr>
+              <a:t>Media</a:t>
+            </a:r>
+            <a:endParaRPr lang="en-US" sz="1000" dirty="0"/>
+          </a:p>
+        </p:txBody>
+      </p:sp>
+      <p:sp>
+        <p:nvSpPr>
+          <p:cNvPr id="88" name="Shape"/>
+          <p:cNvSpPr/>
+          <p:nvPr/>
+        </p:nvSpPr>
+        <p:spPr>
+          <a:xfrm>
+            <a:off x="9983591" y="4000000"/>
+            <a:ext cx="1350000" cy="280000"/>
+          </a:xfrm>
+          <a:prstGeom prst="rect">
+            <a:avLst/>
+          </a:prstGeom>
+          <a:solidFill>
+            <a:srgbClr val="FFFFFF"/>
+          </a:solidFill>
+          <a:ln w="9525">
+            <a:solidFill>
+              <a:srgbClr val="D9E0E3"/>
+            </a:solidFill>
+            <a:prstDash val="solid"/>
+          </a:ln>
+        </p:spPr>
+      </p:sp>
+      <p:sp>
+        <p:nvSpPr>
+          <p:cNvPr id="89" name="Text"/>
+          <p:cNvSpPr txBox="1"/>
+          <p:nvPr/>
+        </p:nvSpPr>
+        <p:spPr>
+          <a:xfrm>
+            <a:off x="10053591" y="4000000"/>
+            <a:ext cx="1210000" cy="280000"/>
+          </a:xfrm>
+          <a:prstGeom prst="rect">
+            <a:avLst/>
+          </a:prstGeom>
+          <a:noFill/>
+          <a:ln/>
+        </p:spPr>
+        <p:txBody>
+          <a:bodyPr wrap="square" lIns="0" tIns="0" rIns="0" bIns="0" rtlCol="0" anchor="ctr"/>
+          <a:lstStyle/>
+          <a:p>
+            <a:pPr indent="0" marL="0">
+              <a:buNone/>
+            </a:pPr>
+            <a:r>
+              <a:rPr lang="en-US" sz="1000" b="1" dirty="0">
+                <a:solidFill>
+                  <a:srgbClr val="2E7D7D"/>
+                </a:solidFill>
+                <a:latin typeface="Arial" pitchFamily="34" charset="0"/>
+                <a:ea typeface="Arial" pitchFamily="34" charset="-122"/>
+                <a:cs typeface="Arial" pitchFamily="34" charset="-120"/>
+              </a:rPr>
+              <a:t>sí</a:t>
+            </a:r>
+            <a:endParaRPr lang="en-US" sz="1000" dirty="0"/>
+          </a:p>
+        </p:txBody>
+      </p:sp>
+      <p:sp>
+        <p:nvSpPr>
+          <p:cNvPr id="90" name="Shape"/>
+          <p:cNvSpPr/>
+          <p:nvPr/>
+        </p:nvSpPr>
+        <p:spPr>
+          <a:xfrm>
+            <a:off x="6483591" y="4280000"/>
+            <a:ext cx="800000" cy="280000"/>
+          </a:xfrm>
+          <a:prstGeom prst="rect">
+            <a:avLst/>
+          </a:prstGeom>
+          <a:solidFill>
+            <a:srgbClr val="FAFCFC"/>
+          </a:solidFill>
+          <a:ln w="9525">
+            <a:solidFill>
+              <a:srgbClr val="D9E0E3"/>
+            </a:solidFill>
+            <a:prstDash val="solid"/>
+          </a:ln>
+        </p:spPr>
+      </p:sp>
+      <p:sp>
+        <p:nvSpPr>
+          <p:cNvPr id="91" name="Text"/>
+          <p:cNvSpPr txBox="1"/>
+          <p:nvPr/>
+        </p:nvSpPr>
+        <p:spPr>
+          <a:xfrm>
+            <a:off x="6553591" y="4280000"/>
+            <a:ext cx="660000" cy="280000"/>
+          </a:xfrm>
+          <a:prstGeom prst="rect">
+            <a:avLst/>
+          </a:prstGeom>
+          <a:noFill/>
+          <a:ln/>
+        </p:spPr>
+        <p:txBody>
+          <a:bodyPr wrap="square" lIns="0" tIns="0" rIns="0" bIns="0" rtlCol="0" anchor="ctr"/>
+          <a:lstStyle/>
+          <a:p>
+            <a:pPr indent="0" marL="0">
+              <a:buNone/>
+            </a:pPr>
+            <a:r>
+              <a:rPr lang="en-US" sz="1000" b="1" dirty="0">
+                <a:solidFill>
+                  <a:srgbClr val="16262E"/>
+                </a:solidFill>
+                <a:latin typeface="Arial" pitchFamily="34" charset="0"/>
+                <a:ea typeface="Arial" pitchFamily="34" charset="-122"/>
+                <a:cs typeface="Arial" pitchFamily="34" charset="-120"/>
+              </a:rPr>
+              <a:t>5</a:t>
+            </a:r>
+            <a:endParaRPr lang="en-US" sz="1000" dirty="0"/>
+          </a:p>
+        </p:txBody>
+      </p:sp>
+      <p:sp>
+        <p:nvSpPr>
+          <p:cNvPr id="92" name="Shape"/>
+          <p:cNvSpPr/>
+          <p:nvPr/>
+        </p:nvSpPr>
+        <p:spPr>
+          <a:xfrm>
+            <a:off x="7283591" y="4280000"/>
+            <a:ext cx="1350000" cy="280000"/>
+          </a:xfrm>
+          <a:prstGeom prst="rect">
+            <a:avLst/>
+          </a:prstGeom>
+          <a:solidFill>
+            <a:srgbClr val="FAFCFC"/>
+          </a:solidFill>
+          <a:ln w="9525">
+            <a:solidFill>
+              <a:srgbClr val="D9E0E3"/>
+            </a:solidFill>
+            <a:prstDash val="solid"/>
+          </a:ln>
+        </p:spPr>
+      </p:sp>
+      <p:sp>
+        <p:nvSpPr>
+          <p:cNvPr id="93" name="Text"/>
+          <p:cNvSpPr txBox="1"/>
+          <p:nvPr/>
+        </p:nvSpPr>
+        <p:spPr>
+          <a:xfrm>
+            <a:off x="7353591" y="4280000"/>
+            <a:ext cx="1210000" cy="280000"/>
+          </a:xfrm>
+          <a:prstGeom prst="rect">
+            <a:avLst/>
+          </a:prstGeom>
+          <a:noFill/>
+          <a:ln/>
+        </p:spPr>
+        <p:txBody>
+          <a:bodyPr wrap="square" lIns="0" tIns="0" rIns="0" bIns="0" rtlCol="0" anchor="ctr"/>
+          <a:lstStyle/>
+          <a:p>
+            <a:pPr indent="0" marL="0">
+              <a:buNone/>
+            </a:pPr>
+            <a:r>
+              <a:rPr lang="en-US" sz="1000" dirty="0">
+                <a:solidFill>
+                  <a:srgbClr val="16262E"/>
+                </a:solidFill>
+                <a:latin typeface="Calibri" pitchFamily="34" charset="0"/>
+                <a:ea typeface="Calibri" pitchFamily="34" charset="-122"/>
+                <a:cs typeface="Calibri" pitchFamily="34" charset="-120"/>
+              </a:rPr>
+              <a:t>Media</a:t>
+            </a:r>
+            <a:endParaRPr lang="en-US" sz="1000" dirty="0"/>
+          </a:p>
+        </p:txBody>
+      </p:sp>
+      <p:sp>
+        <p:nvSpPr>
+          <p:cNvPr id="94" name="Shape"/>
+          <p:cNvSpPr/>
+          <p:nvPr/>
+        </p:nvSpPr>
+        <p:spPr>
+          <a:xfrm>
+            <a:off x="8633591" y="4280000"/>
+            <a:ext cx="1350000" cy="280000"/>
+          </a:xfrm>
+          <a:prstGeom prst="rect">
+            <a:avLst/>
+          </a:prstGeom>
+          <a:solidFill>
+            <a:srgbClr val="FAFCFC"/>
+          </a:solidFill>
+          <a:ln w="9525">
+            <a:solidFill>
+              <a:srgbClr val="D9E0E3"/>
+            </a:solidFill>
+            <a:prstDash val="solid"/>
+          </a:ln>
+        </p:spPr>
+      </p:sp>
+      <p:sp>
+        <p:nvSpPr>
+          <p:cNvPr id="95" name="Text"/>
+          <p:cNvSpPr txBox="1"/>
+          <p:nvPr/>
+        </p:nvSpPr>
+        <p:spPr>
+          <a:xfrm>
+            <a:off x="8703591" y="4280000"/>
+            <a:ext cx="1210000" cy="280000"/>
+          </a:xfrm>
+          <a:prstGeom prst="rect">
+            <a:avLst/>
+          </a:prstGeom>
+          <a:noFill/>
+          <a:ln/>
+        </p:spPr>
+        <p:txBody>
+          <a:bodyPr wrap="square" lIns="0" tIns="0" rIns="0" bIns="0" rtlCol="0" anchor="ctr"/>
+          <a:lstStyle/>
+          <a:p>
+            <a:pPr indent="0" marL="0">
+              <a:buNone/>
+            </a:pPr>
+            <a:r>
+              <a:rPr lang="en-US" sz="1000" dirty="0">
+                <a:solidFill>
+                  <a:srgbClr val="16262E"/>
+                </a:solidFill>
+                <a:latin typeface="Calibri" pitchFamily="34" charset="0"/>
+                <a:ea typeface="Calibri" pitchFamily="34" charset="-122"/>
+                <a:cs typeface="Calibri" pitchFamily="34" charset="-120"/>
+              </a:rPr>
+              <a:t>Alta</a:t>
+            </a:r>
+            <a:endParaRPr lang="en-US" sz="1000" dirty="0"/>
+          </a:p>
+        </p:txBody>
+      </p:sp>
+      <p:sp>
+        <p:nvSpPr>
+          <p:cNvPr id="96" name="Shape"/>
+          <p:cNvSpPr/>
+          <p:nvPr/>
+        </p:nvSpPr>
+        <p:spPr>
+          <a:xfrm>
+            <a:off x="9983591" y="4280000"/>
+            <a:ext cx="1350000" cy="280000"/>
+          </a:xfrm>
+          <a:prstGeom prst="rect">
+            <a:avLst/>
+          </a:prstGeom>
+          <a:solidFill>
+            <a:srgbClr val="FAFCFC"/>
+          </a:solidFill>
+          <a:ln w="9525">
+            <a:solidFill>
+              <a:srgbClr val="D9E0E3"/>
+            </a:solidFill>
+            <a:prstDash val="solid"/>
+          </a:ln>
+        </p:spPr>
+      </p:sp>
+      <p:sp>
+        <p:nvSpPr>
+          <p:cNvPr id="97" name="Text"/>
+          <p:cNvSpPr txBox="1"/>
+          <p:nvPr/>
+        </p:nvSpPr>
+        <p:spPr>
+          <a:xfrm>
+            <a:off x="10053591" y="4280000"/>
+            <a:ext cx="1210000" cy="280000"/>
+          </a:xfrm>
+          <a:prstGeom prst="rect">
+            <a:avLst/>
+          </a:prstGeom>
+          <a:noFill/>
+          <a:ln/>
+        </p:spPr>
+        <p:txBody>
+          <a:bodyPr wrap="square" lIns="0" tIns="0" rIns="0" bIns="0" rtlCol="0" anchor="ctr"/>
+          <a:lstStyle/>
+          <a:p>
+            <a:pPr indent="0" marL="0">
+              <a:buNone/>
+            </a:pPr>
+            <a:r>
+              <a:rPr lang="en-US" sz="1000" b="1" dirty="0">
+                <a:solidFill>
+                  <a:srgbClr val="C85A28"/>
+                </a:solidFill>
+                <a:latin typeface="Arial" pitchFamily="34" charset="0"/>
+                <a:ea typeface="Arial" pitchFamily="34" charset="-122"/>
+                <a:cs typeface="Arial" pitchFamily="34" charset="-120"/>
+              </a:rPr>
+              <a:t>no</a:t>
+            </a:r>
+            <a:endParaRPr lang="en-US" sz="1000" dirty="0"/>
+          </a:p>
+        </p:txBody>
+      </p:sp>
+      <p:sp>
+        <p:nvSpPr>
+          <p:cNvPr id="98" name="Shape"/>
+          <p:cNvSpPr/>
+          <p:nvPr/>
+        </p:nvSpPr>
+        <p:spPr>
+          <a:xfrm>
+            <a:off x="6483591" y="4560000"/>
+            <a:ext cx="800000" cy="280000"/>
+          </a:xfrm>
+          <a:prstGeom prst="rect">
+            <a:avLst/>
+          </a:prstGeom>
+          <a:solidFill>
+            <a:srgbClr val="FFFFFF"/>
+          </a:solidFill>
+          <a:ln w="9525">
+            <a:solidFill>
+              <a:srgbClr val="D9E0E3"/>
+            </a:solidFill>
+            <a:prstDash val="solid"/>
+          </a:ln>
+        </p:spPr>
+      </p:sp>
+      <p:sp>
+        <p:nvSpPr>
+          <p:cNvPr id="99" name="Text"/>
+          <p:cNvSpPr txBox="1"/>
+          <p:nvPr/>
+        </p:nvSpPr>
+        <p:spPr>
+          <a:xfrm>
+            <a:off x="6553591" y="4560000"/>
+            <a:ext cx="660000" cy="280000"/>
+          </a:xfrm>
+          <a:prstGeom prst="rect">
+            <a:avLst/>
+          </a:prstGeom>
+          <a:noFill/>
+          <a:ln/>
+        </p:spPr>
+        <p:txBody>
+          <a:bodyPr wrap="square" lIns="0" tIns="0" rIns="0" bIns="0" rtlCol="0" anchor="ctr"/>
+          <a:lstStyle/>
+          <a:p>
+            <a:pPr indent="0" marL="0">
+              <a:buNone/>
+            </a:pPr>
+            <a:r>
+              <a:rPr lang="en-US" sz="1000" b="1" dirty="0">
+                <a:solidFill>
+                  <a:srgbClr val="16262E"/>
+                </a:solidFill>
+                <a:latin typeface="Arial" pitchFamily="34" charset="0"/>
+                <a:ea typeface="Arial" pitchFamily="34" charset="-122"/>
+                <a:cs typeface="Arial" pitchFamily="34" charset="-120"/>
+              </a:rPr>
+              <a:t>6</a:t>
+            </a:r>
+            <a:endParaRPr lang="en-US" sz="1000" dirty="0"/>
+          </a:p>
+        </p:txBody>
+      </p:sp>
+      <p:sp>
+        <p:nvSpPr>
+          <p:cNvPr id="100" name="Shape"/>
+          <p:cNvSpPr/>
+          <p:nvPr/>
+        </p:nvSpPr>
+        <p:spPr>
+          <a:xfrm>
+            <a:off x="7283591" y="4560000"/>
+            <a:ext cx="1350000" cy="280000"/>
+          </a:xfrm>
+          <a:prstGeom prst="rect">
+            <a:avLst/>
+          </a:prstGeom>
+          <a:solidFill>
+            <a:srgbClr val="FFFFFF"/>
+          </a:solidFill>
+          <a:ln w="9525">
+            <a:solidFill>
+              <a:srgbClr val="D9E0E3"/>
+            </a:solidFill>
+            <a:prstDash val="solid"/>
+          </a:ln>
+        </p:spPr>
+      </p:sp>
+      <p:sp>
+        <p:nvSpPr>
+          <p:cNvPr id="101" name="Text"/>
+          <p:cNvSpPr txBox="1"/>
+          <p:nvPr/>
+        </p:nvSpPr>
+        <p:spPr>
+          <a:xfrm>
+            <a:off x="7353591" y="4560000"/>
+            <a:ext cx="1210000" cy="280000"/>
+          </a:xfrm>
+          <a:prstGeom prst="rect">
+            <a:avLst/>
+          </a:prstGeom>
+          <a:noFill/>
+          <a:ln/>
+        </p:spPr>
+        <p:txBody>
+          <a:bodyPr wrap="square" lIns="0" tIns="0" rIns="0" bIns="0" rtlCol="0" anchor="ctr"/>
+          <a:lstStyle/>
+          <a:p>
+            <a:pPr indent="0" marL="0">
+              <a:buNone/>
+            </a:pPr>
+            <a:r>
+              <a:rPr lang="en-US" sz="1000" dirty="0">
+                <a:solidFill>
+                  <a:srgbClr val="16262E"/>
+                </a:solidFill>
+                <a:latin typeface="Calibri" pitchFamily="34" charset="0"/>
+                <a:ea typeface="Calibri" pitchFamily="34" charset="-122"/>
+                <a:cs typeface="Calibri" pitchFamily="34" charset="-120"/>
+              </a:rPr>
+              <a:t>Baja</a:t>
+            </a:r>
+            <a:endParaRPr lang="en-US" sz="1000" dirty="0"/>
+          </a:p>
+        </p:txBody>
+      </p:sp>
+      <p:sp>
+        <p:nvSpPr>
+          <p:cNvPr id="102" name="Shape"/>
+          <p:cNvSpPr/>
+          <p:nvPr/>
+        </p:nvSpPr>
+        <p:spPr>
+          <a:xfrm>
+            <a:off x="8633591" y="4560000"/>
+            <a:ext cx="1350000" cy="280000"/>
+          </a:xfrm>
+          <a:prstGeom prst="rect">
+            <a:avLst/>
+          </a:prstGeom>
+          <a:solidFill>
+            <a:srgbClr val="FFFFFF"/>
+          </a:solidFill>
+          <a:ln w="9525">
+            <a:solidFill>
+              <a:srgbClr val="D9E0E3"/>
+            </a:solidFill>
+            <a:prstDash val="solid"/>
+          </a:ln>
+        </p:spPr>
+      </p:sp>
+      <p:sp>
+        <p:nvSpPr>
+          <p:cNvPr id="103" name="Text"/>
+          <p:cNvSpPr txBox="1"/>
+          <p:nvPr/>
+        </p:nvSpPr>
+        <p:spPr>
+          <a:xfrm>
+            <a:off x="8703591" y="4560000"/>
+            <a:ext cx="1210000" cy="280000"/>
+          </a:xfrm>
+          <a:prstGeom prst="rect">
+            <a:avLst/>
+          </a:prstGeom>
+          <a:noFill/>
+          <a:ln/>
+        </p:spPr>
+        <p:txBody>
+          <a:bodyPr wrap="square" lIns="0" tIns="0" rIns="0" bIns="0" rtlCol="0" anchor="ctr"/>
+          <a:lstStyle/>
+          <a:p>
+            <a:pPr indent="0" marL="0">
+              <a:buNone/>
+            </a:pPr>
+            <a:r>
+              <a:rPr lang="en-US" sz="1000" dirty="0">
+                <a:solidFill>
+                  <a:srgbClr val="16262E"/>
+                </a:solidFill>
+                <a:latin typeface="Calibri" pitchFamily="34" charset="0"/>
+                <a:ea typeface="Calibri" pitchFamily="34" charset="-122"/>
+                <a:cs typeface="Calibri" pitchFamily="34" charset="-120"/>
+              </a:rPr>
+              <a:t>Alta</a:t>
+            </a:r>
+            <a:endParaRPr lang="en-US" sz="1000" dirty="0"/>
+          </a:p>
+        </p:txBody>
+      </p:sp>
+      <p:sp>
+        <p:nvSpPr>
+          <p:cNvPr id="104" name="Shape"/>
+          <p:cNvSpPr/>
+          <p:nvPr/>
+        </p:nvSpPr>
+        <p:spPr>
+          <a:xfrm>
+            <a:off x="9983591" y="4560000"/>
+            <a:ext cx="1350000" cy="280000"/>
+          </a:xfrm>
+          <a:prstGeom prst="rect">
+            <a:avLst/>
+          </a:prstGeom>
+          <a:solidFill>
+            <a:srgbClr val="FFFFFF"/>
+          </a:solidFill>
+          <a:ln w="9525">
+            <a:solidFill>
+              <a:srgbClr val="D9E0E3"/>
+            </a:solidFill>
+            <a:prstDash val="solid"/>
+          </a:ln>
+        </p:spPr>
+      </p:sp>
+      <p:sp>
+        <p:nvSpPr>
+          <p:cNvPr id="105" name="Text"/>
+          <p:cNvSpPr txBox="1"/>
+          <p:nvPr/>
+        </p:nvSpPr>
+        <p:spPr>
+          <a:xfrm>
+            <a:off x="10053591" y="4560000"/>
+            <a:ext cx="1210000" cy="280000"/>
+          </a:xfrm>
+          <a:prstGeom prst="rect">
+            <a:avLst/>
+          </a:prstGeom>
+          <a:noFill/>
+          <a:ln/>
+        </p:spPr>
+        <p:txBody>
+          <a:bodyPr wrap="square" lIns="0" tIns="0" rIns="0" bIns="0" rtlCol="0" anchor="ctr"/>
+          <a:lstStyle/>
+          <a:p>
+            <a:pPr indent="0" marL="0">
+              <a:buNone/>
+            </a:pPr>
+            <a:r>
+              <a:rPr lang="en-US" sz="1000" b="1" dirty="0">
+                <a:solidFill>
+                  <a:srgbClr val="C85A28"/>
+                </a:solidFill>
+                <a:latin typeface="Arial" pitchFamily="34" charset="0"/>
+                <a:ea typeface="Arial" pitchFamily="34" charset="-122"/>
+                <a:cs typeface="Arial" pitchFamily="34" charset="-120"/>
+              </a:rPr>
+              <a:t>no</a:t>
+            </a:r>
+            <a:endParaRPr lang="en-US" sz="1000" dirty="0"/>
+          </a:p>
+        </p:txBody>
+      </p:sp>
+      <p:sp>
+        <p:nvSpPr>
+          <p:cNvPr id="106" name="Text"/>
+          <p:cNvSpPr txBox="1"/>
+          <p:nvPr/>
+        </p:nvSpPr>
+        <p:spPr>
+          <a:xfrm>
+            <a:off x="6483591" y="4930000"/>
+            <a:ext cx="4903431" cy="700000"/>
+          </a:xfrm>
+          <a:prstGeom prst="rect">
+            <a:avLst/>
+          </a:prstGeom>
+          <a:noFill/>
+          <a:ln/>
+        </p:spPr>
+        <p:txBody>
+          <a:bodyPr wrap="square" lIns="0" tIns="0" rIns="0" bIns="0" rtlCol="0" anchor="t"/>
+          <a:lstStyle/>
+          <a:p>
+            <a:pPr indent="0" marL="0">
+              <a:lnSpc>
+                <a:spcPct val="105000"/>
+              </a:lnSpc>
+              <a:buNone/>
+            </a:pPr>
+            <a:r>
+              <a:rPr lang="en-US" sz="1100" dirty="0">
+                <a:solidFill>
+                  <a:srgbClr val="16262E"/>
+                </a:solidFill>
+                <a:latin typeface="Calibri" pitchFamily="34" charset="0"/>
+                <a:ea typeface="Calibri" pitchFamily="34" charset="-122"/>
+                <a:cs typeface="Calibri" pitchFamily="34" charset="-120"/>
+              </a:rPr>
+              <a:t>a = 4. Su equipo usó 2 altas, 3 medias y 1 baja; el revisor, 4 altas y 2 medias. S = (2×4) + (3×2) + (1×0) = 14.</a:t>
+            </a:r>
+            <a:endParaRPr lang="en-US" sz="1100" dirty="0"/>
+          </a:p>
+        </p:txBody>
+      </p:sp>
+      <p:sp>
+        <p:nvSpPr>
+          <p:cNvPr id="107" name="Shape"/>
+          <p:cNvSpPr/>
+          <p:nvPr/>
+        </p:nvSpPr>
+        <p:spPr>
+          <a:xfrm>
+            <a:off x="566928" y="5540000"/>
+            <a:ext cx="11057839" cy="620000"/>
+          </a:xfrm>
+          <a:prstGeom prst="roundRect">
+            <a:avLst>
+              <a:gd name="adj" fmla="val 8235"/>
+            </a:avLst>
+          </a:prstGeom>
+          <a:solidFill>
+            <a:srgbClr val="F7E4D8"/>
+          </a:solidFill>
+          <a:ln w="12700">
+            <a:solidFill>
+              <a:srgbClr val="F7E4D8"/>
+            </a:solidFill>
+            <a:prstDash val="solid"/>
+          </a:ln>
+        </p:spPr>
+      </p:sp>
+      <p:sp>
+        <p:nvSpPr>
+          <p:cNvPr id="108" name="Text"/>
+          <p:cNvSpPr txBox="1"/>
+          <p:nvPr/>
+        </p:nvSpPr>
+        <p:spPr>
+          <a:xfrm>
+            <a:off x="804672" y="5540000"/>
+            <a:ext cx="10582351" cy="620000"/>
+          </a:xfrm>
+          <a:prstGeom prst="rect">
+            <a:avLst/>
+          </a:prstGeom>
+          <a:noFill/>
+          <a:ln/>
+        </p:spPr>
+        <p:txBody>
+          <a:bodyPr wrap="square" lIns="0" tIns="0" rIns="0" bIns="0" rtlCol="0" anchor="ctr"/>
+          <a:lstStyle/>
+          <a:p>
+            <a:pPr indent="0" marL="0">
+              <a:lnSpc>
+                <a:spcPct val="110000"/>
+              </a:lnSpc>
+              <a:buNone/>
+            </a:pPr>
+            <a:r>
+              <a:rPr lang="en-US" sz="1300" dirty="0">
+                <a:solidFill>
+                  <a:srgbClr val="16262E"/>
+                </a:solidFill>
+                <a:latin typeface="Calibri" pitchFamily="34" charset="0"/>
+                <a:ea typeface="Calibri" pitchFamily="34" charset="-122"/>
+                <a:cs typeface="Calibri" pitchFamily="34" charset="-120"/>
+              </a:rPr>
+              <a:t>Los dos números que entran son en cuántas coincidieron y con qué frecuencia usó cada quien cada categoría. Lo segundo es lo que casi nadie reporta y es lo que decide el resultado: dos equipos con las mismas cuatro coincidencias salen con kappas muy distintas si uno declaró casi todo alta y el otro repartió.</a:t>
+            </a:r>
+            <a:endParaRPr lang="en-US" sz="1300" dirty="0"/>
+          </a:p>
+        </p:txBody>
+      </p:sp>
+      <p:sp>
+        <p:nvSpPr>
+          <p:cNvPr id="109" name="Text"/>
+          <p:cNvSpPr txBox="1"/>
+          <p:nvPr/>
+        </p:nvSpPr>
+        <p:spPr>
+          <a:xfrm>
+            <a:off x="566928" y="6250000"/>
+            <a:ext cx="11057839" cy="240000"/>
+          </a:xfrm>
+          <a:prstGeom prst="rect">
+            <a:avLst/>
+          </a:prstGeom>
+          <a:noFill/>
+          <a:ln/>
+        </p:spPr>
+        <p:txBody>
+          <a:bodyPr wrap="square" lIns="0" tIns="0" rIns="0" bIns="0" rtlCol="0" anchor="t"/>
+          <a:lstStyle/>
+          <a:p>
+            <a:pPr indent="0" marL="0">
+              <a:buNone/>
+            </a:pPr>
+            <a:r>
+              <a:rPr lang="en-US" sz="1000" dirty="0">
+                <a:solidFill>
+                  <a:srgbClr val="5A6B73"/>
+                </a:solidFill>
+                <a:latin typeface="Calibri" pitchFamily="34" charset="0"/>
+                <a:ea typeface="Calibri" pitchFamily="34" charset="-122"/>
+                <a:cs typeface="Calibri" pitchFamily="34" charset="-120"/>
+              </a:rPr>
+              <a:t>El ejemplo del paso 4 da κ = (6×4 − 14) / (36 − 14) = 10/22 = 0.45, aunque el acuerdo observado sea 4 de 6, o sea 67 por ciento.</a:t>
             </a:r>
             <a:endParaRPr lang="en-US" sz="1000" dirty="0"/>
           </a:p>
@@ -30343,7 +34007,7 @@
                 <a:ea typeface="Calibri" pitchFamily="34" charset="-122"/>
                 <a:cs typeface="Calibri" pitchFamily="34" charset="-120"/>
               </a:rPr>
-              <a:t>10:44 a 11:49</a:t>
+              <a:t>10:49 a 11:54</a:t>
             </a:r>
             <a:endParaRPr lang="en-US" sz="1200" dirty="0"/>
           </a:p>
@@ -31854,7 +35518,7 @@
                 <a:ea typeface="Arial" pitchFamily="34" charset="-122"/>
                 <a:cs typeface="Arial" pitchFamily="34" charset="-120"/>
               </a:rPr>
-              <a:t>10 min · corte 11:05</a:t>
+              <a:t>10 min · corte 11:10</a:t>
             </a:r>
             <a:endParaRPr lang="en-US" sz="1100" dirty="0"/>
           </a:p>
@@ -32026,7 +35690,7 @@
                 <a:ea typeface="Arial" pitchFamily="34" charset="-122"/>
                 <a:cs typeface="Arial" pitchFamily="34" charset="-120"/>
               </a:rPr>
-              <a:t>20 min · corte 11:25</a:t>
+              <a:t>20 min · corte 11:30</a:t>
             </a:r>
             <a:endParaRPr lang="en-US" sz="1100" dirty="0"/>
           </a:p>
@@ -32198,7 +35862,7 @@
                 <a:ea typeface="Arial" pitchFamily="34" charset="-122"/>
                 <a:cs typeface="Arial" pitchFamily="34" charset="-120"/>
               </a:rPr>
-              <a:t>11 min · corte 11:36</a:t>
+              <a:t>11 min · corte 11:41</a:t>
             </a:r>
             <a:endParaRPr lang="en-US" sz="1100" dirty="0"/>
           </a:p>
@@ -32370,7 +36034,7 @@
                 <a:ea typeface="Arial" pitchFamily="34" charset="-122"/>
                 <a:cs typeface="Arial" pitchFamily="34" charset="-120"/>
               </a:rPr>
-              <a:t>5 min · corte 11:41</a:t>
+              <a:t>5 min · corte 11:46</a:t>
             </a:r>
             <a:endParaRPr lang="en-US" sz="1100" dirty="0"/>
           </a:p>
@@ -32542,7 +36206,7 @@
                 <a:ea typeface="Arial" pitchFamily="34" charset="-122"/>
                 <a:cs typeface="Arial" pitchFamily="34" charset="-120"/>
               </a:rPr>
-              <a:t>2 min · corte 11:43</a:t>
+              <a:t>2 min · corte 11:48</a:t>
             </a:r>
             <a:endParaRPr lang="en-US" sz="1100" dirty="0"/>
           </a:p>
